--- a/downloads/presentations/modules/arc-210.pptx
+++ b/downloads/presentations/modules/arc-210.pptx
@@ -614,7 +614,8 @@
               <a:rPr lang="en-US" dirty="0"/>
               <a:t>Public Health Example
 A syndromic surveillance team may use AI to identify unusual emergency department visit patterns. The model depends on timely data feeds from hospitals, correct parsing of chief complaint text, reliable facility identifiers, and consistent geographic information. If one large hospital feed stops or a field changes after an EHR upgrade, the AI tool may miss a signal or generate a false alert. Pipeline monitoring is therefore part of outbreak detection readiness.
-A second example is an AI tool that drafts summaries of lab-based cases. The tool may rely on an ELR feed, a terminology mapping table, a deduplication process, and a case management interface. If any of those steps fail, the summary may omit a result, duplicate a patient, or misrepresent reportability. The pipeline must be reviewed before the AI output can be trusted.</a:t>
+A second example is an AI tool that drafts summaries of lab-based cases. The tool may rely on an ELR feed, a terminology mapping table, a deduplication process, and a case management interface. If any of those steps fail, the summary may omit a result, duplicate a patient, or misrepresent reportability. The pipeline must be reviewed before the AI output can be trusted.
+Application guidance: Connect the concept to data quality, model performance, validation evidence, monitoring measures, and decisions that remain under human control.</a:t>
             </a:r>
             <a:endParaRPr lang="en-US" dirty="0"/>
           </a:p>
@@ -705,7 +706,8 @@
               <a:t>Technical Deep Dive
 Pipeline design begins with the source and ends with the user-facing decision or output. In between, data may be received, staged, validated, transformed, standardized, linked, loaded, indexed, analyzed, and displayed. Each step should have an owner, a purpose, a quality check, and a documented failure process.
 Batch pipelines move data on a schedule, such as nightly files or weekly extracts. Real-time pipelines move data as events occur, such as laboratory reports or eCR messages. Event-driven pipelines trigger actions when a defined event occurs, such as creating a review task when a high-priority result arrives. AI workflows may use any of these models, but the monitoring and risk profile differ for each.
-Metadata and version control are essential for AI-supported pipelines. Staff need to know which data dictionary, code mapping, model version, prompt template, transformation rule, and document collection were used at a specific time. This is especially important when an agency investigates an incident or compares AI performance before and after a system change.</a:t>
+Metadata and version control are essential for AI-supported pipelines. Staff need to know which data dictionary, code mapping, model version, prompt template, transformation rule, and document collection were used at a specific time. This is especially important when an agency investigates an incident or compares AI performance before and after a system change.
+Application guidance: Connect the concept to data quality, model performance, validation evidence, monitoring measures, and decisions that remain under human control.</a:t>
             </a:r>
             <a:endParaRPr lang="en-US" dirty="0"/>
           </a:p>
@@ -796,7 +798,8 @@
               <a:t>Risks, Failure Modes, and Guardrails
 Silent feed failure. A data feed can stop or change without visible failure in the AI interface. Guardrails include automated feed monitoring, expected volume thresholds, error queues, and notification procedures.
 Schema and terminology changes. Source systems may change field names, formats, codes, or units. Guardrails include schema validation, terminology governance, release notes, and regression testing.
-Unclear fallback process. Staff may continue using AI outputs when data are stale or incomplete. Guardrails include visible freshness indicators, pause rules, and manual fallback procedures.</a:t>
+Unclear fallback process. Staff may continue using AI outputs when data are stale or incomplete. Guardrails include visible freshness indicators, pause rules, and manual fallback procedures.
+Application guidance: Identify what could go wrong, who could be affected, what safeguards are needed, and what evidence should be reviewed before use expands.</a:t>
             </a:r>
             <a:endParaRPr lang="en-US" dirty="0"/>
           </a:p>
@@ -885,7 +888,8 @@
             <a:r>
               <a:rPr lang="en-US" dirty="0"/>
               <a:t>Risks, Failure Modes, and Guardrails
-Weak lineage. If transformations are not documented, staff may not be able to explain or correct AI errors. Guardrails include lineage documentation, version control, and audit trails.</a:t>
+Weak lineage. If transformations are not documented, staff may not be able to explain or correct AI errors. Guardrails include lineage documentation, version control, and audit trails.
+Application guidance: Identify what could go wrong, who could be affected, what safeguards are needed, and what evidence should be reviewed before use expands.</a:t>
             </a:r>
             <a:endParaRPr lang="en-US" dirty="0"/>
           </a:p>
@@ -974,7 +978,8 @@
             <a:r>
               <a:rPr lang="en-US" dirty="0"/>
               <a:t>Application to AI-Supported Workflows
-Generative AI may use pipeline outputs to summarize records, but the summary should indicate source freshness and preserve traceability. Predictive models may rely on engineered features created by a pipeline, so the feature pipeline must be monitored for drift and missingness. RAG systems depend on document ingestion pipelines, which must track document source, version, permissions, and refresh schedules. Agentic workflows may depend on event-driven pipelines, making failure handling and approval points especially important.</a:t>
+Generative AI may use pipeline outputs to summarize records, but the summary should indicate source freshness and preserve traceability. Predictive models may rely on engineered features created by a pipeline, so the feature pipeline must be monitored for drift and missingness. RAG systems depend on document ingestion pipelines, which must track document source, version, permissions, and refresh schedules. Agentic workflows may depend on event-driven pipelines, making failure handling and approval points especially important.
+Application guidance: Connect the concept to data quality, model performance, validation evidence, monitoring measures, and decisions that remain under human control.</a:t>
             </a:r>
             <a:endParaRPr lang="en-US" dirty="0"/>
           </a:p>
@@ -1065,7 +1070,8 @@
               <a:t>Reflection Questions
 Which public health data feeds are most important to daily decisions in your program?
 Which pipelines are automatically monitored, and which depend on manual review?
-What failures would materially affect an AI output?</a:t>
+What failures would materially affect an AI output?
+Application guidance: Connect the concept to data quality, model performance, validation evidence, monitoring measures, and decisions that remain under human control.</a:t>
             </a:r>
             <a:endParaRPr lang="en-US" dirty="0"/>
           </a:p>
@@ -1155,7 +1161,8 @@
               <a:rPr lang="en-US" dirty="0"/>
               <a:t>Reflection Questions
 How would staff know if an AI output was based on stale or incomplete data?
-Who has authority to pause AI use when a pipeline fails?</a:t>
+Who has authority to pause AI use when a pipeline fails?
+Application guidance: Connect the concept to data quality, model performance, validation evidence, monitoring measures, and decisions that remain under human control.</a:t>
             </a:r>
             <a:endParaRPr lang="en-US" dirty="0"/>
           </a:p>
@@ -1245,7 +1252,8 @@
               <a:rPr lang="en-US" dirty="0"/>
               <a:t>Practical Exercise
 Create a data pipeline readiness checklist for one AI-supported workflow. Identify the data source, update frequency, required fields, validation checks, transformations, lineage documentation, monitoring indicators, error notification process, and fallback procedure.
-Document at least three pipeline failure scenarios and describe how each should be detected, escalated, and communicated to users.</a:t>
+Document at least three pipeline failure scenarios and describe how each should be detected, escalated, and communicated to users.
+Application guidance: Use the assignment to test whether you can explain the concept, apply it to a realistic public health situation, and identify what would need review before the work moves forward.</a:t>
             </a:r>
             <a:endParaRPr lang="en-US" dirty="0"/>
           </a:p>
@@ -1336,7 +1344,8 @@
               <a:t>Expected Artifact or Evidence
 Data pipeline map
 Pipeline readiness checklist
-Failure and escalation plan</a:t>
+Failure and escalation plan
+Application guidance: Connect the concept to data quality, model performance, validation evidence, monitoring measures, and decisions that remain under human control.</a:t>
             </a:r>
             <a:endParaRPr lang="en-US" dirty="0"/>
           </a:p>
@@ -1425,7 +1434,8 @@
             <a:r>
               <a:rPr lang="en-US" dirty="0"/>
               <a:t>Expected Artifact or Evidence
-Known data limitations statement</a:t>
+Known data limitations statement
+Application guidance: Connect the concept to data quality, model performance, validation evidence, monitoring measures, and decisions that remain under human control.</a:t>
             </a:r>
             <a:endParaRPr lang="en-US" dirty="0"/>
           </a:p>
@@ -1609,7 +1619,8 @@
 Data pipeline map
 Pipeline readiness checklist
 Failure and escalation plan
-Known data limitations statement</a:t>
+Known data limitations statement
+Application guidance: Use the assignment to test whether you can explain the concept, apply it to a realistic public health situation, and identify what would need review before the work moves forward.</a:t>
             </a:r>
             <a:endParaRPr lang="en-US" dirty="0"/>
           </a:p>
@@ -1702,7 +1713,8 @@
 2. Which pipeline type is most likely to trigger a workflow immediately after a defined event?
 3. What is a practical guardrail for silent feed failure?
 4. Why should source freshness be visible to users?
-5. What is strong evidence of completion for this module?</a:t>
+5. What is strong evidence of completion for this module?
+Application guidance: Use the assignment to test whether you can explain the concept, apply it to a realistic public health situation, and identify what would need review before the work moves forward.</a:t>
             </a:r>
             <a:endParaRPr lang="en-US" dirty="0"/>
           </a:p>
@@ -1794,7 +1806,8 @@
 CDC Data Modernization Initiative materials: https://www.cdc.gov/data-modernization/php/index.html
 CDC Public Health Data Strategy: https://www.cdc.gov/public-health-data-strategy/php/about/index.html
 NIST AI Risk Management Framework: https://www.nist.gov/itl/ai-risk-management-framework
-Agency data governance and system monitoring documentation</a:t>
+Agency data governance and system monitoring documentation
+Application guidance: Connect the concept to data quality, model performance, validation evidence, monitoring measures, and decisions that remain under human control.</a:t>
             </a:r>
             <a:endParaRPr lang="en-US" dirty="0"/>
           </a:p>
@@ -2073,7 +2086,8 @@
 Distinguish between batch, real-time, and event-driven data flows.
 Explain how pipeline failures can affect AI outputs and operational decisions.
 Identify metadata, lineage, version control, and audit needs for AI-supported workflows.
-Produce a data pipeline readiness checklist for a public health AI use case.</a:t>
+Produce a data pipeline readiness checklist for a public health AI use case.
+Application guidance: Use the assignment to test whether you can explain the concept, apply it to a realistic public health situation, and identify what would need review before the work moves forward.</a:t>
             </a:r>
             <a:endParaRPr lang="en-US" dirty="0"/>
           </a:p>
@@ -2162,7 +2176,8 @@
             <a:r>
               <a:rPr lang="en-US" dirty="0"/>
               <a:t>Module Overview
-Data pipelines are the operational pathways that move public health data from source systems into analytic, reporting, and workflow environments. AI tools depend on these pathways even when users do not see them. A model that classifies cases, summarizes laboratory reports, or predicts service demand can only work responsibly if the data feeding the model are timely, complete, transformed correctly, and monitored. This module helps learners understand the pipeline steps that shape AI outputs and the safeguards needed when pipeline failures could affect public health action.</a:t>
+Data pipelines are the operational pathways that move public health data from source systems into analytic, reporting, and workflow environments. AI tools depend on these pathways even when users do not see them. A model that classifies cases, summarizes laboratory reports, or predicts service demand can only work responsibly if the data feeding the model are timely, complete, transformed correctly, and monitored. This module helps learners understand the pipeline steps that shape AI outputs and the safeguards needed when pipeline failures could affect public health action.
+Application guidance: Connect the concept to data quality, model performance, validation evidence, monitoring measures, and decisions that remain under human control.</a:t>
             </a:r>
             <a:endParaRPr lang="en-US" dirty="0"/>
           </a:p>
@@ -2253,7 +2268,8 @@
               <a:t>Why This Topic Matters for Public Health AI
 Data pipeline readiness matters because AI systems can amplify routine data management problems. A delayed file, changed field name, failed interface, missing date, duplicate record, or outdated transformation rule may not be obvious to an end user. The AI tool may continue generating fluent summaries or confident classifications even after the data feed has become unreliable.
 Public health agencies need pipeline visibility before they rely on AI for operational workflows. Visibility means knowing where data originate, how often they update, what transformations occur, what validation checks run, and who is alerted when something fails. A pipeline should not be treated as a hidden technical detail. It is part of the safety infrastructure for AI.
-Pipeline review also supports public accountability. When an AI output affects case prioritization, outreach, resource allocation, or public messaging, the agency may need to explain which data were used and whether those data were current. A well-documented pipeline makes that explanation possible.</a:t>
+Pipeline review also supports public accountability. When an AI output affects case prioritization, outreach, resource allocation, or public messaging, the agency may need to explain which data were used and whether those data were current. A well-documented pipeline makes that explanation possible.
+Application guidance: Connect the concept to data quality, model performance, validation evidence, monitoring measures, and decisions that remain under human control.</a:t>
             </a:r>
             <a:endParaRPr lang="en-US" dirty="0"/>
           </a:p>
@@ -2344,7 +2360,8 @@
               <a:t>Core Concepts
 Data pipeline. A data pipeline is a set of technical and operational steps that moves data from a source to a destination where the data can be used. In public health, pipelines may include laboratory interfaces, EHR feeds, IIS submissions, syndromic surveillance feeds, vital records extracts, HIE connections, and program datasets. Each step creates an opportunity to improve or degrade data quality.
 ETL and ELT. ETL stands for extract, transform, load, while ELT stands for extract, load, transform. ETL transforms data before they enter the target system, while ELT loads data first and transforms them later. The distinction matters for AI because staff need to know where data were changed and which version was used by the AI tool.
-Pipeline monitoring. Pipeline monitoring is the routine process of checking whether data feeds, transformations, and outputs are working as intended. Monitoring may include file receipt, schema validation, required-field checks, timeliness checks, duplicate review, error queues, and volume trends. Monitoring should be tied to escalation when failures affect AI use.</a:t>
+Pipeline monitoring. Pipeline monitoring is the routine process of checking whether data feeds, transformations, and outputs are working as intended. Monitoring may include file receipt, schema validation, required-field checks, timeliness checks, duplicate review, error queues, and volume trends. Monitoring should be tied to escalation when failures affect AI use.
+Application guidance: Connect the concept to data quality, model performance, validation evidence, monitoring measures, and decisions that remain under human control.</a:t>
             </a:r>
             <a:endParaRPr lang="en-US" dirty="0"/>
           </a:p>
@@ -2433,7 +2450,8 @@
             <a:r>
               <a:rPr lang="en-US" dirty="0"/>
               <a:t>Core Concepts
-Data lineage. Data lineage shows where data came from, what happened to them, and where they were used. Lineage supports validation, troubleshooting, incident response, and public records review. In AI workflows, lineage helps staff trace a questionable output back to its source data and transformation history.</a:t>
+Data lineage. Data lineage shows where data came from, what happened to them, and where they were used. Lineage supports validation, troubleshooting, incident response, and public records review. In AI workflows, lineage helps staff trace a questionable output back to its source data and transformation history.
+Application guidance: Connect the concept to data quality, model performance, validation evidence, monitoring measures, and decisions that remain under human control.</a:t>
             </a:r>
             <a:endParaRPr lang="en-US" dirty="0"/>
           </a:p>
@@ -3204,8 +3222,8 @@
         </p:nvSpPr>
         <p:spPr>
           <a:xfrm>
-            <a:off x="9966960" y="6537960"/>
-            <a:ext cx="1645920" cy="201168"/>
+            <a:off x="9646920" y="6537960"/>
+            <a:ext cx="1965960" cy="201168"/>
           </a:xfrm>
           <a:prstGeom prst="rect">
             <a:avLst/>
@@ -3229,7 +3247,7 @@
                 <a:ea typeface="Aptos" pitchFamily="34" charset="-122"/>
                 <a:cs typeface="Aptos" pitchFamily="34" charset="-120"/>
               </a:rPr>
-              <a:t>Â© Paula Soper</a:t>
+              <a:t>Copyright Paula Soper</a:t>
             </a:r>
             <a:endParaRPr lang="en-US" sz="800" dirty="0"/>
           </a:p>
@@ -3276,77 +3294,13 @@
       </p:sp>
       <p:sp>
         <p:nvSpPr>
-          <p:cNvPr id="8" name="Shape 6"/>
+          <p:cNvPr id="8" name="Text 6"/>
           <p:cNvSpPr/>
           <p:nvPr/>
         </p:nvSpPr>
         <p:spPr>
           <a:xfrm>
             <a:off x="640080" y="658368"/>
-            <a:ext cx="420624" cy="420624"/>
-          </a:xfrm>
-          <a:prstGeom prst="ellipse">
-            <a:avLst/>
-          </a:prstGeom>
-          <a:solidFill>
-            <a:srgbClr val="0068B7"/>
-          </a:solidFill>
-          <a:ln w="12700">
-            <a:solidFill>
-              <a:srgbClr val="0068B7"/>
-            </a:solidFill>
-            <a:prstDash val="solid"/>
-          </a:ln>
-        </p:spPr>
-      </p:sp>
-      <p:sp>
-        <p:nvSpPr>
-          <p:cNvPr id="9" name="Text 7"/>
-          <p:cNvSpPr/>
-          <p:nvPr/>
-        </p:nvSpPr>
-        <p:spPr>
-          <a:xfrm>
-            <a:off x="640080" y="731520"/>
-            <a:ext cx="420624" cy="164592"/>
-          </a:xfrm>
-          <a:prstGeom prst="rect">
-            <a:avLst/>
-          </a:prstGeom>
-          <a:noFill/>
-          <a:ln/>
-        </p:spPr>
-        <p:txBody>
-          <a:bodyPr wrap="square" lIns="0" tIns="0" rIns="0" bIns="0" rtlCol="0" anchor="ctr"/>
-          <a:lstStyle/>
-          <a:p>
-            <a:pPr algn="ctr" indent="0" marL="0">
-              <a:buNone/>
-            </a:pPr>
-            <a:r>
-              <a:rPr lang="en-US" sz="1100" b="1" dirty="0">
-                <a:solidFill>
-                  <a:srgbClr val="FFFFFF"/>
-                </a:solidFill>
-                <a:latin typeface="Aptos" pitchFamily="34" charset="0"/>
-                <a:ea typeface="Aptos" pitchFamily="34" charset="-122"/>
-                <a:cs typeface="Aptos" pitchFamily="34" charset="-120"/>
-              </a:rPr>
-              <a:t>5</a:t>
-            </a:r>
-            <a:endParaRPr lang="en-US" sz="1100" dirty="0"/>
-          </a:p>
-        </p:txBody>
-      </p:sp>
-      <p:sp>
-        <p:nvSpPr>
-          <p:cNvPr id="10" name="Text 8"/>
-          <p:cNvSpPr/>
-          <p:nvPr/>
-        </p:nvSpPr>
-        <p:spPr>
-          <a:xfrm>
-            <a:off x="640080" y="621792"/>
             <a:ext cx="10881360" cy="713232"/>
           </a:xfrm>
           <a:prstGeom prst="rect">
@@ -3381,14 +3335,14 @@
       </p:sp>
       <p:sp>
         <p:nvSpPr>
-          <p:cNvPr id="11" name="Text 9"/>
+          <p:cNvPr id="9" name="Text 7"/>
           <p:cNvSpPr/>
           <p:nvPr/>
         </p:nvSpPr>
         <p:spPr>
           <a:xfrm>
             <a:off x="868680" y="1508760"/>
-            <a:ext cx="6537960" cy="4160520"/>
+            <a:ext cx="6309360" cy="4160520"/>
           </a:xfrm>
           <a:prstGeom prst="rect">
             <a:avLst/>
@@ -3447,18 +3401,18 @@
       </p:sp>
       <p:sp>
         <p:nvSpPr>
-          <p:cNvPr id="12" name="Shape 10"/>
-          <p:cNvSpPr/>
-          <p:nvPr/>
-        </p:nvSpPr>
-        <p:spPr>
-          <a:xfrm>
-            <a:off x="7909560" y="1417320"/>
-            <a:ext cx="3154680" cy="1828800"/>
+          <p:cNvPr id="10" name="Shape 8"/>
+          <p:cNvSpPr/>
+          <p:nvPr/>
+        </p:nvSpPr>
+        <p:spPr>
+          <a:xfrm>
+            <a:off x="7635240" y="1325880"/>
+            <a:ext cx="3474720" cy="1325880"/>
           </a:xfrm>
           <a:prstGeom prst="roundRect">
             <a:avLst>
-              <a:gd name="adj" fmla="val 6000"/>
+              <a:gd name="adj" fmla="val 8276"/>
             </a:avLst>
           </a:prstGeom>
           <a:solidFill>
@@ -3474,14 +3428,14 @@
       </p:sp>
       <p:sp>
         <p:nvSpPr>
-          <p:cNvPr id="13" name="Text 11"/>
-          <p:cNvSpPr/>
-          <p:nvPr/>
-        </p:nvSpPr>
-        <p:spPr>
-          <a:xfrm>
-            <a:off x="8074152" y="1563624"/>
-            <a:ext cx="2825496" cy="256032"/>
+          <p:cNvPr id="11" name="Text 9"/>
+          <p:cNvSpPr/>
+          <p:nvPr/>
+        </p:nvSpPr>
+        <p:spPr>
+          <a:xfrm>
+            <a:off x="7799832" y="1472184"/>
+            <a:ext cx="3145536" cy="256032"/>
           </a:xfrm>
           <a:prstGeom prst="rect">
             <a:avLst/>
@@ -3505,7 +3459,7 @@
                 <a:ea typeface="Aptos" pitchFamily="34" charset="-122"/>
                 <a:cs typeface="Aptos" pitchFamily="34" charset="-120"/>
               </a:rPr>
-              <a:t>Key idea</a:t>
+              <a:t>Data decision</a:t>
             </a:r>
             <a:endParaRPr lang="en-US" sz="1300" dirty="0"/>
           </a:p>
@@ -3513,14 +3467,14 @@
       </p:sp>
       <p:sp>
         <p:nvSpPr>
-          <p:cNvPr id="14" name="Text 12"/>
-          <p:cNvSpPr/>
-          <p:nvPr/>
-        </p:nvSpPr>
-        <p:spPr>
-          <a:xfrm>
-            <a:off x="8074152" y="1920240"/>
-            <a:ext cx="2825496" cy="1188720"/>
+          <p:cNvPr id="12" name="Text 10"/>
+          <p:cNvSpPr/>
+          <p:nvPr/>
+        </p:nvSpPr>
+        <p:spPr>
+          <a:xfrm>
+            <a:off x="7799832" y="1828800"/>
+            <a:ext cx="3145536" cy="685800"/>
           </a:xfrm>
           <a:prstGeom prst="rect">
             <a:avLst/>
@@ -3554,21 +3508,212 @@
       </p:sp>
       <p:sp>
         <p:nvSpPr>
-          <p:cNvPr id="15" name="Shape 13"/>
-          <p:cNvSpPr/>
-          <p:nvPr/>
-        </p:nvSpPr>
-        <p:spPr>
-          <a:xfrm>
-            <a:off x="7909560" y="3520440"/>
-            <a:ext cx="3154680" cy="1737360"/>
+          <p:cNvPr id="13" name="Shape 11"/>
+          <p:cNvSpPr/>
+          <p:nvPr/>
+        </p:nvSpPr>
+        <p:spPr>
+          <a:xfrm>
+            <a:off x="7635240" y="2788920"/>
+            <a:ext cx="3474720" cy="1536192"/>
           </a:xfrm>
           <a:prstGeom prst="roundRect">
             <a:avLst>
-              <a:gd name="adj" fmla="val 6316"/>
+              <a:gd name="adj" fmla="val 7143"/>
             </a:avLst>
           </a:prstGeom>
           <a:solidFill>
+            <a:srgbClr val="FFFFFF">
+              <a:alpha val="88000"/>
+            </a:srgbClr>
+          </a:solidFill>
+          <a:ln w="12700">
+            <a:solidFill>
+              <a:srgbClr val="D6E8F2"/>
+            </a:solidFill>
+            <a:prstDash val="solid"/>
+          </a:ln>
+        </p:spPr>
+      </p:sp>
+      <p:sp>
+        <p:nvSpPr>
+          <p:cNvPr id="14" name="Shape 12"/>
+          <p:cNvSpPr/>
+          <p:nvPr/>
+        </p:nvSpPr>
+        <p:spPr>
+          <a:xfrm>
+            <a:off x="8138160" y="3474720"/>
+            <a:ext cx="256032" cy="411480"/>
+          </a:xfrm>
+          <a:prstGeom prst="rect">
+            <a:avLst/>
+          </a:prstGeom>
+          <a:solidFill>
+            <a:srgbClr val="0068B7"/>
+          </a:solidFill>
+          <a:ln w="12700">
+            <a:solidFill>
+              <a:srgbClr val="0068B7"/>
+            </a:solidFill>
+            <a:prstDash val="solid"/>
+          </a:ln>
+        </p:spPr>
+      </p:sp>
+      <p:sp>
+        <p:nvSpPr>
+          <p:cNvPr id="15" name="Shape 13"/>
+          <p:cNvSpPr/>
+          <p:nvPr/>
+        </p:nvSpPr>
+        <p:spPr>
+          <a:xfrm>
+            <a:off x="8577072" y="3172968"/>
+            <a:ext cx="256032" cy="713232"/>
+          </a:xfrm>
+          <a:prstGeom prst="rect">
+            <a:avLst/>
+          </a:prstGeom>
+          <a:solidFill>
+            <a:srgbClr val="2F8A28"/>
+          </a:solidFill>
+          <a:ln w="12700">
+            <a:solidFill>
+              <a:srgbClr val="2F8A28"/>
+            </a:solidFill>
+            <a:prstDash val="solid"/>
+          </a:ln>
+        </p:spPr>
+      </p:sp>
+      <p:sp>
+        <p:nvSpPr>
+          <p:cNvPr id="16" name="Shape 14"/>
+          <p:cNvSpPr/>
+          <p:nvPr/>
+        </p:nvSpPr>
+        <p:spPr>
+          <a:xfrm>
+            <a:off x="9015984" y="2880360"/>
+            <a:ext cx="256032" cy="1005840"/>
+          </a:xfrm>
+          <a:prstGeom prst="rect">
+            <a:avLst/>
+          </a:prstGeom>
+          <a:solidFill>
+            <a:srgbClr val="D69A2D"/>
+          </a:solidFill>
+          <a:ln w="12700">
+            <a:solidFill>
+              <a:srgbClr val="D69A2D"/>
+            </a:solidFill>
+            <a:prstDash val="solid"/>
+          </a:ln>
+        </p:spPr>
+      </p:sp>
+      <p:sp>
+        <p:nvSpPr>
+          <p:cNvPr id="17" name="Shape 15"/>
+          <p:cNvSpPr/>
+          <p:nvPr/>
+        </p:nvSpPr>
+        <p:spPr>
+          <a:xfrm>
+            <a:off x="9454896" y="3319272"/>
+            <a:ext cx="256032" cy="566928"/>
+          </a:xfrm>
+          <a:prstGeom prst="rect">
+            <a:avLst/>
+          </a:prstGeom>
+          <a:solidFill>
+            <a:srgbClr val="6A4CA3"/>
+          </a:solidFill>
+          <a:ln w="12700">
+            <a:solidFill>
+              <a:srgbClr val="6A4CA3"/>
+            </a:solidFill>
+            <a:prstDash val="solid"/>
+          </a:ln>
+        </p:spPr>
+      </p:sp>
+      <p:sp>
+        <p:nvSpPr>
+          <p:cNvPr id="18" name="Shape 16"/>
+          <p:cNvSpPr/>
+          <p:nvPr/>
+        </p:nvSpPr>
+        <p:spPr>
+          <a:xfrm>
+            <a:off x="8019288" y="3886200"/>
+            <a:ext cx="2706624" cy="0"/>
+          </a:xfrm>
+          <a:prstGeom prst="line">
+            <a:avLst/>
+          </a:prstGeom>
+          <a:noFill/>
+          <a:ln w="15240">
+            <a:solidFill>
+              <a:srgbClr val="003A63"/>
+            </a:solidFill>
+            <a:prstDash val="solid"/>
+          </a:ln>
+        </p:spPr>
+      </p:sp>
+      <p:sp>
+        <p:nvSpPr>
+          <p:cNvPr id="19" name="Text 17"/>
+          <p:cNvSpPr/>
+          <p:nvPr/>
+        </p:nvSpPr>
+        <p:spPr>
+          <a:xfrm>
+            <a:off x="7863840" y="3017520"/>
+            <a:ext cx="3017520" cy="201168"/>
+          </a:xfrm>
+          <a:prstGeom prst="rect">
+            <a:avLst/>
+          </a:prstGeom>
+          <a:noFill/>
+          <a:ln/>
+        </p:spPr>
+        <p:txBody>
+          <a:bodyPr wrap="square" lIns="0" tIns="0" rIns="0" bIns="0" rtlCol="0" anchor="ctr"/>
+          <a:lstStyle/>
+          <a:p>
+            <a:pPr algn="ctr" indent="0" marL="0">
+              <a:buNone/>
+            </a:pPr>
+            <a:r>
+              <a:rPr lang="en-US" sz="1050" b="1" dirty="0">
+                <a:solidFill>
+                  <a:srgbClr val="003A63"/>
+                </a:solidFill>
+                <a:latin typeface="Aptos" pitchFamily="34" charset="0"/>
+                <a:ea typeface="Aptos" pitchFamily="34" charset="-122"/>
+                <a:cs typeface="Aptos" pitchFamily="34" charset="-120"/>
+              </a:rPr>
+              <a:t>Measure and monitor</a:t>
+            </a:r>
+            <a:endParaRPr lang="en-US" sz="1050" dirty="0"/>
+          </a:p>
+        </p:txBody>
+      </p:sp>
+      <p:sp>
+        <p:nvSpPr>
+          <p:cNvPr id="20" name="Shape 18"/>
+          <p:cNvSpPr/>
+          <p:nvPr/>
+        </p:nvSpPr>
+        <p:spPr>
+          <a:xfrm>
+            <a:off x="7635240" y="4498848"/>
+            <a:ext cx="3474720" cy="1143000"/>
+          </a:xfrm>
+          <a:prstGeom prst="roundRect">
+            <a:avLst>
+              <a:gd name="adj" fmla="val 9600"/>
+            </a:avLst>
+          </a:prstGeom>
+          <a:solidFill>
             <a:srgbClr val="EAF6F8"/>
           </a:solidFill>
           <a:ln w="12700">
@@ -3581,14 +3726,14 @@
       </p:sp>
       <p:sp>
         <p:nvSpPr>
-          <p:cNvPr id="16" name="Text 14"/>
-          <p:cNvSpPr/>
-          <p:nvPr/>
-        </p:nvSpPr>
-        <p:spPr>
-          <a:xfrm>
-            <a:off x="8074152" y="3666744"/>
-            <a:ext cx="2825496" cy="256032"/>
+          <p:cNvPr id="21" name="Text 19"/>
+          <p:cNvSpPr/>
+          <p:nvPr/>
+        </p:nvSpPr>
+        <p:spPr>
+          <a:xfrm>
+            <a:off x="7799832" y="4645152"/>
+            <a:ext cx="3145536" cy="256032"/>
           </a:xfrm>
           <a:prstGeom prst="rect">
             <a:avLst/>
@@ -3612,7 +3757,7 @@
                 <a:ea typeface="Aptos" pitchFamily="34" charset="-122"/>
                 <a:cs typeface="Aptos" pitchFamily="34" charset="-120"/>
               </a:rPr>
-              <a:t>Use this for</a:t>
+              <a:t>How to validate</a:t>
             </a:r>
             <a:endParaRPr lang="en-US" sz="1300" dirty="0"/>
           </a:p>
@@ -3620,14 +3765,14 @@
       </p:sp>
       <p:sp>
         <p:nvSpPr>
-          <p:cNvPr id="17" name="Text 15"/>
-          <p:cNvSpPr/>
-          <p:nvPr/>
-        </p:nvSpPr>
-        <p:spPr>
-          <a:xfrm>
-            <a:off x="8074152" y="4023360"/>
-            <a:ext cx="2825496" cy="1097280"/>
+          <p:cNvPr id="22" name="Text 20"/>
+          <p:cNvSpPr/>
+          <p:nvPr/>
+        </p:nvSpPr>
+        <p:spPr>
+          <a:xfrm>
+            <a:off x="7799832" y="5001768"/>
+            <a:ext cx="3145536" cy="502920"/>
           </a:xfrm>
           <a:prstGeom prst="rect">
             <a:avLst/>
@@ -3653,7 +3798,7 @@
                 <a:ea typeface="Aptos" pitchFamily="34" charset="-122"/>
                 <a:cs typeface="Aptos" pitchFamily="34" charset="-120"/>
               </a:rPr>
-              <a:t>Connect the concept to public health decisions, safeguards, documentation, or implementation work.</a:t>
+              <a:t>Connect the concept to data quality, model performance, validation evidence, monitoring measures, and decisions that remain under human control.</a:t>
             </a:r>
             <a:endParaRPr lang="en-US" sz="1550" dirty="0"/>
           </a:p>
@@ -3827,8 +3972,8 @@
         </p:nvSpPr>
         <p:spPr>
           <a:xfrm>
-            <a:off x="9966960" y="6537960"/>
-            <a:ext cx="1645920" cy="201168"/>
+            <a:off x="9646920" y="6537960"/>
+            <a:ext cx="1965960" cy="201168"/>
           </a:xfrm>
           <a:prstGeom prst="rect">
             <a:avLst/>
@@ -3852,7 +3997,7 @@
                 <a:ea typeface="Aptos" pitchFamily="34" charset="-122"/>
                 <a:cs typeface="Aptos" pitchFamily="34" charset="-120"/>
               </a:rPr>
-              <a:t>Â© Paula Soper</a:t>
+              <a:t>Copyright Paula Soper</a:t>
             </a:r>
             <a:endParaRPr lang="en-US" sz="800" dirty="0"/>
           </a:p>
@@ -3899,77 +4044,13 @@
       </p:sp>
       <p:sp>
         <p:nvSpPr>
-          <p:cNvPr id="8" name="Shape 6"/>
+          <p:cNvPr id="8" name="Text 6"/>
           <p:cNvSpPr/>
           <p:nvPr/>
         </p:nvSpPr>
         <p:spPr>
           <a:xfrm>
             <a:off x="640080" y="658368"/>
-            <a:ext cx="420624" cy="420624"/>
-          </a:xfrm>
-          <a:prstGeom prst="ellipse">
-            <a:avLst/>
-          </a:prstGeom>
-          <a:solidFill>
-            <a:srgbClr val="0068B7"/>
-          </a:solidFill>
-          <a:ln w="12700">
-            <a:solidFill>
-              <a:srgbClr val="0068B7"/>
-            </a:solidFill>
-            <a:prstDash val="solid"/>
-          </a:ln>
-        </p:spPr>
-      </p:sp>
-      <p:sp>
-        <p:nvSpPr>
-          <p:cNvPr id="9" name="Text 7"/>
-          <p:cNvSpPr/>
-          <p:nvPr/>
-        </p:nvSpPr>
-        <p:spPr>
-          <a:xfrm>
-            <a:off x="640080" y="731520"/>
-            <a:ext cx="420624" cy="164592"/>
-          </a:xfrm>
-          <a:prstGeom prst="rect">
-            <a:avLst/>
-          </a:prstGeom>
-          <a:noFill/>
-          <a:ln/>
-        </p:spPr>
-        <p:txBody>
-          <a:bodyPr wrap="square" lIns="0" tIns="0" rIns="0" bIns="0" rtlCol="0" anchor="ctr"/>
-          <a:lstStyle/>
-          <a:p>
-            <a:pPr algn="ctr" indent="0" marL="0">
-              <a:buNone/>
-            </a:pPr>
-            <a:r>
-              <a:rPr lang="en-US" sz="1100" b="1" dirty="0">
-                <a:solidFill>
-                  <a:srgbClr val="FFFFFF"/>
-                </a:solidFill>
-                <a:latin typeface="Aptos" pitchFamily="34" charset="0"/>
-                <a:ea typeface="Aptos" pitchFamily="34" charset="-122"/>
-                <a:cs typeface="Aptos" pitchFamily="34" charset="-120"/>
-              </a:rPr>
-              <a:t>6</a:t>
-            </a:r>
-            <a:endParaRPr lang="en-US" sz="1100" dirty="0"/>
-          </a:p>
-        </p:txBody>
-      </p:sp>
-      <p:sp>
-        <p:nvSpPr>
-          <p:cNvPr id="10" name="Text 8"/>
-          <p:cNvSpPr/>
-          <p:nvPr/>
-        </p:nvSpPr>
-        <p:spPr>
-          <a:xfrm>
-            <a:off x="640080" y="621792"/>
             <a:ext cx="10881360" cy="713232"/>
           </a:xfrm>
           <a:prstGeom prst="rect">
@@ -4004,14 +4085,14 @@
       </p:sp>
       <p:sp>
         <p:nvSpPr>
-          <p:cNvPr id="11" name="Text 9"/>
+          <p:cNvPr id="9" name="Text 7"/>
           <p:cNvSpPr/>
           <p:nvPr/>
         </p:nvSpPr>
         <p:spPr>
           <a:xfrm>
             <a:off x="868680" y="1508760"/>
-            <a:ext cx="6537960" cy="4160520"/>
+            <a:ext cx="6309360" cy="4160520"/>
           </a:xfrm>
           <a:prstGeom prst="rect">
             <a:avLst/>
@@ -4070,18 +4151,18 @@
       </p:sp>
       <p:sp>
         <p:nvSpPr>
-          <p:cNvPr id="12" name="Shape 10"/>
-          <p:cNvSpPr/>
-          <p:nvPr/>
-        </p:nvSpPr>
-        <p:spPr>
-          <a:xfrm>
-            <a:off x="7909560" y="1417320"/>
-            <a:ext cx="3154680" cy="1828800"/>
+          <p:cNvPr id="10" name="Shape 8"/>
+          <p:cNvSpPr/>
+          <p:nvPr/>
+        </p:nvSpPr>
+        <p:spPr>
+          <a:xfrm>
+            <a:off x="7635240" y="1325880"/>
+            <a:ext cx="3474720" cy="1325880"/>
           </a:xfrm>
           <a:prstGeom prst="roundRect">
             <a:avLst>
-              <a:gd name="adj" fmla="val 6000"/>
+              <a:gd name="adj" fmla="val 8276"/>
             </a:avLst>
           </a:prstGeom>
           <a:solidFill>
@@ -4097,14 +4178,14 @@
       </p:sp>
       <p:sp>
         <p:nvSpPr>
-          <p:cNvPr id="13" name="Text 11"/>
-          <p:cNvSpPr/>
-          <p:nvPr/>
-        </p:nvSpPr>
-        <p:spPr>
-          <a:xfrm>
-            <a:off x="8074152" y="1563624"/>
-            <a:ext cx="2825496" cy="256032"/>
+          <p:cNvPr id="11" name="Text 9"/>
+          <p:cNvSpPr/>
+          <p:nvPr/>
+        </p:nvSpPr>
+        <p:spPr>
+          <a:xfrm>
+            <a:off x="7799832" y="1472184"/>
+            <a:ext cx="3145536" cy="256032"/>
           </a:xfrm>
           <a:prstGeom prst="rect">
             <a:avLst/>
@@ -4128,7 +4209,7 @@
                 <a:ea typeface="Aptos" pitchFamily="34" charset="-122"/>
                 <a:cs typeface="Aptos" pitchFamily="34" charset="-120"/>
               </a:rPr>
-              <a:t>Key idea</a:t>
+              <a:t>Data decision</a:t>
             </a:r>
             <a:endParaRPr lang="en-US" sz="1300" dirty="0"/>
           </a:p>
@@ -4136,14 +4217,14 @@
       </p:sp>
       <p:sp>
         <p:nvSpPr>
-          <p:cNvPr id="14" name="Text 12"/>
-          <p:cNvSpPr/>
-          <p:nvPr/>
-        </p:nvSpPr>
-        <p:spPr>
-          <a:xfrm>
-            <a:off x="8074152" y="1920240"/>
-            <a:ext cx="2825496" cy="1188720"/>
+          <p:cNvPr id="12" name="Text 10"/>
+          <p:cNvSpPr/>
+          <p:nvPr/>
+        </p:nvSpPr>
+        <p:spPr>
+          <a:xfrm>
+            <a:off x="7799832" y="1828800"/>
+            <a:ext cx="3145536" cy="685800"/>
           </a:xfrm>
           <a:prstGeom prst="rect">
             <a:avLst/>
@@ -4177,21 +4258,212 @@
       </p:sp>
       <p:sp>
         <p:nvSpPr>
-          <p:cNvPr id="15" name="Shape 13"/>
-          <p:cNvSpPr/>
-          <p:nvPr/>
-        </p:nvSpPr>
-        <p:spPr>
-          <a:xfrm>
-            <a:off x="7909560" y="3520440"/>
-            <a:ext cx="3154680" cy="1737360"/>
+          <p:cNvPr id="13" name="Shape 11"/>
+          <p:cNvSpPr/>
+          <p:nvPr/>
+        </p:nvSpPr>
+        <p:spPr>
+          <a:xfrm>
+            <a:off x="7635240" y="2788920"/>
+            <a:ext cx="3474720" cy="1536192"/>
           </a:xfrm>
           <a:prstGeom prst="roundRect">
             <a:avLst>
-              <a:gd name="adj" fmla="val 6316"/>
+              <a:gd name="adj" fmla="val 7143"/>
             </a:avLst>
           </a:prstGeom>
           <a:solidFill>
+            <a:srgbClr val="FFFFFF">
+              <a:alpha val="88000"/>
+            </a:srgbClr>
+          </a:solidFill>
+          <a:ln w="12700">
+            <a:solidFill>
+              <a:srgbClr val="D6E8F2"/>
+            </a:solidFill>
+            <a:prstDash val="solid"/>
+          </a:ln>
+        </p:spPr>
+      </p:sp>
+      <p:sp>
+        <p:nvSpPr>
+          <p:cNvPr id="14" name="Shape 12"/>
+          <p:cNvSpPr/>
+          <p:nvPr/>
+        </p:nvSpPr>
+        <p:spPr>
+          <a:xfrm>
+            <a:off x="8138160" y="3474720"/>
+            <a:ext cx="256032" cy="411480"/>
+          </a:xfrm>
+          <a:prstGeom prst="rect">
+            <a:avLst/>
+          </a:prstGeom>
+          <a:solidFill>
+            <a:srgbClr val="0068B7"/>
+          </a:solidFill>
+          <a:ln w="12700">
+            <a:solidFill>
+              <a:srgbClr val="0068B7"/>
+            </a:solidFill>
+            <a:prstDash val="solid"/>
+          </a:ln>
+        </p:spPr>
+      </p:sp>
+      <p:sp>
+        <p:nvSpPr>
+          <p:cNvPr id="15" name="Shape 13"/>
+          <p:cNvSpPr/>
+          <p:nvPr/>
+        </p:nvSpPr>
+        <p:spPr>
+          <a:xfrm>
+            <a:off x="8577072" y="3172968"/>
+            <a:ext cx="256032" cy="713232"/>
+          </a:xfrm>
+          <a:prstGeom prst="rect">
+            <a:avLst/>
+          </a:prstGeom>
+          <a:solidFill>
+            <a:srgbClr val="2F8A28"/>
+          </a:solidFill>
+          <a:ln w="12700">
+            <a:solidFill>
+              <a:srgbClr val="2F8A28"/>
+            </a:solidFill>
+            <a:prstDash val="solid"/>
+          </a:ln>
+        </p:spPr>
+      </p:sp>
+      <p:sp>
+        <p:nvSpPr>
+          <p:cNvPr id="16" name="Shape 14"/>
+          <p:cNvSpPr/>
+          <p:nvPr/>
+        </p:nvSpPr>
+        <p:spPr>
+          <a:xfrm>
+            <a:off x="9015984" y="2880360"/>
+            <a:ext cx="256032" cy="1005840"/>
+          </a:xfrm>
+          <a:prstGeom prst="rect">
+            <a:avLst/>
+          </a:prstGeom>
+          <a:solidFill>
+            <a:srgbClr val="D69A2D"/>
+          </a:solidFill>
+          <a:ln w="12700">
+            <a:solidFill>
+              <a:srgbClr val="D69A2D"/>
+            </a:solidFill>
+            <a:prstDash val="solid"/>
+          </a:ln>
+        </p:spPr>
+      </p:sp>
+      <p:sp>
+        <p:nvSpPr>
+          <p:cNvPr id="17" name="Shape 15"/>
+          <p:cNvSpPr/>
+          <p:nvPr/>
+        </p:nvSpPr>
+        <p:spPr>
+          <a:xfrm>
+            <a:off x="9454896" y="3319272"/>
+            <a:ext cx="256032" cy="566928"/>
+          </a:xfrm>
+          <a:prstGeom prst="rect">
+            <a:avLst/>
+          </a:prstGeom>
+          <a:solidFill>
+            <a:srgbClr val="6A4CA3"/>
+          </a:solidFill>
+          <a:ln w="12700">
+            <a:solidFill>
+              <a:srgbClr val="6A4CA3"/>
+            </a:solidFill>
+            <a:prstDash val="solid"/>
+          </a:ln>
+        </p:spPr>
+      </p:sp>
+      <p:sp>
+        <p:nvSpPr>
+          <p:cNvPr id="18" name="Shape 16"/>
+          <p:cNvSpPr/>
+          <p:nvPr/>
+        </p:nvSpPr>
+        <p:spPr>
+          <a:xfrm>
+            <a:off x="8019288" y="3886200"/>
+            <a:ext cx="2706624" cy="0"/>
+          </a:xfrm>
+          <a:prstGeom prst="line">
+            <a:avLst/>
+          </a:prstGeom>
+          <a:noFill/>
+          <a:ln w="15240">
+            <a:solidFill>
+              <a:srgbClr val="003A63"/>
+            </a:solidFill>
+            <a:prstDash val="solid"/>
+          </a:ln>
+        </p:spPr>
+      </p:sp>
+      <p:sp>
+        <p:nvSpPr>
+          <p:cNvPr id="19" name="Text 17"/>
+          <p:cNvSpPr/>
+          <p:nvPr/>
+        </p:nvSpPr>
+        <p:spPr>
+          <a:xfrm>
+            <a:off x="7863840" y="3017520"/>
+            <a:ext cx="3017520" cy="201168"/>
+          </a:xfrm>
+          <a:prstGeom prst="rect">
+            <a:avLst/>
+          </a:prstGeom>
+          <a:noFill/>
+          <a:ln/>
+        </p:spPr>
+        <p:txBody>
+          <a:bodyPr wrap="square" lIns="0" tIns="0" rIns="0" bIns="0" rtlCol="0" anchor="ctr"/>
+          <a:lstStyle/>
+          <a:p>
+            <a:pPr algn="ctr" indent="0" marL="0">
+              <a:buNone/>
+            </a:pPr>
+            <a:r>
+              <a:rPr lang="en-US" sz="1050" b="1" dirty="0">
+                <a:solidFill>
+                  <a:srgbClr val="003A63"/>
+                </a:solidFill>
+                <a:latin typeface="Aptos" pitchFamily="34" charset="0"/>
+                <a:ea typeface="Aptos" pitchFamily="34" charset="-122"/>
+                <a:cs typeface="Aptos" pitchFamily="34" charset="-120"/>
+              </a:rPr>
+              <a:t>Measure and monitor</a:t>
+            </a:r>
+            <a:endParaRPr lang="en-US" sz="1050" dirty="0"/>
+          </a:p>
+        </p:txBody>
+      </p:sp>
+      <p:sp>
+        <p:nvSpPr>
+          <p:cNvPr id="20" name="Shape 18"/>
+          <p:cNvSpPr/>
+          <p:nvPr/>
+        </p:nvSpPr>
+        <p:spPr>
+          <a:xfrm>
+            <a:off x="7635240" y="4498848"/>
+            <a:ext cx="3474720" cy="1143000"/>
+          </a:xfrm>
+          <a:prstGeom prst="roundRect">
+            <a:avLst>
+              <a:gd name="adj" fmla="val 9600"/>
+            </a:avLst>
+          </a:prstGeom>
+          <a:solidFill>
             <a:srgbClr val="EAF6F8"/>
           </a:solidFill>
           <a:ln w="12700">
@@ -4204,14 +4476,14 @@
       </p:sp>
       <p:sp>
         <p:nvSpPr>
-          <p:cNvPr id="16" name="Text 14"/>
-          <p:cNvSpPr/>
-          <p:nvPr/>
-        </p:nvSpPr>
-        <p:spPr>
-          <a:xfrm>
-            <a:off x="8074152" y="3666744"/>
-            <a:ext cx="2825496" cy="256032"/>
+          <p:cNvPr id="21" name="Text 19"/>
+          <p:cNvSpPr/>
+          <p:nvPr/>
+        </p:nvSpPr>
+        <p:spPr>
+          <a:xfrm>
+            <a:off x="7799832" y="4645152"/>
+            <a:ext cx="3145536" cy="256032"/>
           </a:xfrm>
           <a:prstGeom prst="rect">
             <a:avLst/>
@@ -4235,7 +4507,7 @@
                 <a:ea typeface="Aptos" pitchFamily="34" charset="-122"/>
                 <a:cs typeface="Aptos" pitchFamily="34" charset="-120"/>
               </a:rPr>
-              <a:t>Use this for</a:t>
+              <a:t>How to validate</a:t>
             </a:r>
             <a:endParaRPr lang="en-US" sz="1300" dirty="0"/>
           </a:p>
@@ -4243,14 +4515,14 @@
       </p:sp>
       <p:sp>
         <p:nvSpPr>
-          <p:cNvPr id="17" name="Text 15"/>
-          <p:cNvSpPr/>
-          <p:nvPr/>
-        </p:nvSpPr>
-        <p:spPr>
-          <a:xfrm>
-            <a:off x="8074152" y="4023360"/>
-            <a:ext cx="2825496" cy="1097280"/>
+          <p:cNvPr id="22" name="Text 20"/>
+          <p:cNvSpPr/>
+          <p:nvPr/>
+        </p:nvSpPr>
+        <p:spPr>
+          <a:xfrm>
+            <a:off x="7799832" y="5001768"/>
+            <a:ext cx="3145536" cy="502920"/>
           </a:xfrm>
           <a:prstGeom prst="rect">
             <a:avLst/>
@@ -4276,7 +4548,7 @@
                 <a:ea typeface="Aptos" pitchFamily="34" charset="-122"/>
                 <a:cs typeface="Aptos" pitchFamily="34" charset="-120"/>
               </a:rPr>
-              <a:t>Connect the concept to public health decisions, safeguards, documentation, or implementation work.</a:t>
+              <a:t>Connect the concept to data quality, model performance, validation evidence, monitoring measures, and decisions that remain under human control.</a:t>
             </a:r>
             <a:endParaRPr lang="en-US" sz="1550" dirty="0"/>
           </a:p>
@@ -4450,8 +4722,8 @@
         </p:nvSpPr>
         <p:spPr>
           <a:xfrm>
-            <a:off x="9966960" y="6537960"/>
-            <a:ext cx="1645920" cy="201168"/>
+            <a:off x="9646920" y="6537960"/>
+            <a:ext cx="1965960" cy="201168"/>
           </a:xfrm>
           <a:prstGeom prst="rect">
             <a:avLst/>
@@ -4475,7 +4747,7 @@
                 <a:ea typeface="Aptos" pitchFamily="34" charset="-122"/>
                 <a:cs typeface="Aptos" pitchFamily="34" charset="-120"/>
               </a:rPr>
-              <a:t>Â© Paula Soper</a:t>
+              <a:t>Copyright Paula Soper</a:t>
             </a:r>
             <a:endParaRPr lang="en-US" sz="800" dirty="0"/>
           </a:p>
@@ -4522,77 +4794,13 @@
       </p:sp>
       <p:sp>
         <p:nvSpPr>
-          <p:cNvPr id="8" name="Shape 6"/>
+          <p:cNvPr id="8" name="Text 6"/>
           <p:cNvSpPr/>
           <p:nvPr/>
         </p:nvSpPr>
         <p:spPr>
           <a:xfrm>
             <a:off x="640080" y="658368"/>
-            <a:ext cx="420624" cy="420624"/>
-          </a:xfrm>
-          <a:prstGeom prst="ellipse">
-            <a:avLst/>
-          </a:prstGeom>
-          <a:solidFill>
-            <a:srgbClr val="0068B7"/>
-          </a:solidFill>
-          <a:ln w="12700">
-            <a:solidFill>
-              <a:srgbClr val="0068B7"/>
-            </a:solidFill>
-            <a:prstDash val="solid"/>
-          </a:ln>
-        </p:spPr>
-      </p:sp>
-      <p:sp>
-        <p:nvSpPr>
-          <p:cNvPr id="9" name="Text 7"/>
-          <p:cNvSpPr/>
-          <p:nvPr/>
-        </p:nvSpPr>
-        <p:spPr>
-          <a:xfrm>
-            <a:off x="640080" y="731520"/>
-            <a:ext cx="420624" cy="164592"/>
-          </a:xfrm>
-          <a:prstGeom prst="rect">
-            <a:avLst/>
-          </a:prstGeom>
-          <a:noFill/>
-          <a:ln/>
-        </p:spPr>
-        <p:txBody>
-          <a:bodyPr wrap="square" lIns="0" tIns="0" rIns="0" bIns="0" rtlCol="0" anchor="ctr"/>
-          <a:lstStyle/>
-          <a:p>
-            <a:pPr algn="ctr" indent="0" marL="0">
-              <a:buNone/>
-            </a:pPr>
-            <a:r>
-              <a:rPr lang="en-US" sz="1100" b="1" dirty="0">
-                <a:solidFill>
-                  <a:srgbClr val="FFFFFF"/>
-                </a:solidFill>
-                <a:latin typeface="Aptos" pitchFamily="34" charset="0"/>
-                <a:ea typeface="Aptos" pitchFamily="34" charset="-122"/>
-                <a:cs typeface="Aptos" pitchFamily="34" charset="-120"/>
-              </a:rPr>
-              <a:t>7</a:t>
-            </a:r>
-            <a:endParaRPr lang="en-US" sz="1100" dirty="0"/>
-          </a:p>
-        </p:txBody>
-      </p:sp>
-      <p:sp>
-        <p:nvSpPr>
-          <p:cNvPr id="10" name="Text 8"/>
-          <p:cNvSpPr/>
-          <p:nvPr/>
-        </p:nvSpPr>
-        <p:spPr>
-          <a:xfrm>
-            <a:off x="640080" y="621792"/>
             <a:ext cx="10881360" cy="713232"/>
           </a:xfrm>
           <a:prstGeom prst="rect">
@@ -4627,14 +4835,14 @@
       </p:sp>
       <p:sp>
         <p:nvSpPr>
-          <p:cNvPr id="11" name="Text 9"/>
+          <p:cNvPr id="9" name="Text 7"/>
           <p:cNvSpPr/>
           <p:nvPr/>
         </p:nvSpPr>
         <p:spPr>
           <a:xfrm>
             <a:off x="868680" y="1508760"/>
-            <a:ext cx="6537960" cy="4160520"/>
+            <a:ext cx="6309360" cy="4160520"/>
           </a:xfrm>
           <a:prstGeom prst="rect">
             <a:avLst/>
@@ -4693,18 +4901,18 @@
       </p:sp>
       <p:sp>
         <p:nvSpPr>
-          <p:cNvPr id="12" name="Shape 10"/>
-          <p:cNvSpPr/>
-          <p:nvPr/>
-        </p:nvSpPr>
-        <p:spPr>
-          <a:xfrm>
-            <a:off x="7909560" y="1417320"/>
-            <a:ext cx="3154680" cy="1828800"/>
+          <p:cNvPr id="10" name="Shape 8"/>
+          <p:cNvSpPr/>
+          <p:nvPr/>
+        </p:nvSpPr>
+        <p:spPr>
+          <a:xfrm>
+            <a:off x="7635240" y="1325880"/>
+            <a:ext cx="3474720" cy="1325880"/>
           </a:xfrm>
           <a:prstGeom prst="roundRect">
             <a:avLst>
-              <a:gd name="adj" fmla="val 6000"/>
+              <a:gd name="adj" fmla="val 8276"/>
             </a:avLst>
           </a:prstGeom>
           <a:solidFill>
@@ -4720,14 +4928,14 @@
       </p:sp>
       <p:sp>
         <p:nvSpPr>
-          <p:cNvPr id="13" name="Text 11"/>
-          <p:cNvSpPr/>
-          <p:nvPr/>
-        </p:nvSpPr>
-        <p:spPr>
-          <a:xfrm>
-            <a:off x="8074152" y="1563624"/>
-            <a:ext cx="2825496" cy="256032"/>
+          <p:cNvPr id="11" name="Text 9"/>
+          <p:cNvSpPr/>
+          <p:nvPr/>
+        </p:nvSpPr>
+        <p:spPr>
+          <a:xfrm>
+            <a:off x="7799832" y="1472184"/>
+            <a:ext cx="3145536" cy="256032"/>
           </a:xfrm>
           <a:prstGeom prst="rect">
             <a:avLst/>
@@ -4751,7 +4959,7 @@
                 <a:ea typeface="Aptos" pitchFamily="34" charset="-122"/>
                 <a:cs typeface="Aptos" pitchFamily="34" charset="-120"/>
               </a:rPr>
-              <a:t>Key idea</a:t>
+              <a:t>Risk check</a:t>
             </a:r>
             <a:endParaRPr lang="en-US" sz="1300" dirty="0"/>
           </a:p>
@@ -4759,14 +4967,14 @@
       </p:sp>
       <p:sp>
         <p:nvSpPr>
-          <p:cNvPr id="14" name="Text 12"/>
-          <p:cNvSpPr/>
-          <p:nvPr/>
-        </p:nvSpPr>
-        <p:spPr>
-          <a:xfrm>
-            <a:off x="8074152" y="1920240"/>
-            <a:ext cx="2825496" cy="1188720"/>
+          <p:cNvPr id="12" name="Text 10"/>
+          <p:cNvSpPr/>
+          <p:nvPr/>
+        </p:nvSpPr>
+        <p:spPr>
+          <a:xfrm>
+            <a:off x="7799832" y="1828800"/>
+            <a:ext cx="3145536" cy="685800"/>
           </a:xfrm>
           <a:prstGeom prst="rect">
             <a:avLst/>
@@ -4800,21 +5008,174 @@
       </p:sp>
       <p:sp>
         <p:nvSpPr>
-          <p:cNvPr id="15" name="Shape 13"/>
-          <p:cNvSpPr/>
-          <p:nvPr/>
-        </p:nvSpPr>
-        <p:spPr>
-          <a:xfrm>
-            <a:off x="7909560" y="3520440"/>
-            <a:ext cx="3154680" cy="1737360"/>
+          <p:cNvPr id="13" name="Shape 11"/>
+          <p:cNvSpPr/>
+          <p:nvPr/>
+        </p:nvSpPr>
+        <p:spPr>
+          <a:xfrm>
+            <a:off x="7635240" y="2788920"/>
+            <a:ext cx="3474720" cy="1536192"/>
           </a:xfrm>
           <a:prstGeom prst="roundRect">
             <a:avLst>
-              <a:gd name="adj" fmla="val 6316"/>
+              <a:gd name="adj" fmla="val 7143"/>
             </a:avLst>
           </a:prstGeom>
           <a:solidFill>
+            <a:srgbClr val="FFFFFF">
+              <a:alpha val="88000"/>
+            </a:srgbClr>
+          </a:solidFill>
+          <a:ln w="12700">
+            <a:solidFill>
+              <a:srgbClr val="D6E8F2"/>
+            </a:solidFill>
+            <a:prstDash val="solid"/>
+          </a:ln>
+        </p:spPr>
+      </p:sp>
+      <p:sp>
+        <p:nvSpPr>
+          <p:cNvPr id="14" name="Shape 12"/>
+          <p:cNvSpPr/>
+          <p:nvPr/>
+        </p:nvSpPr>
+        <p:spPr>
+          <a:xfrm>
+            <a:off x="8046720" y="3108960"/>
+            <a:ext cx="2651760" cy="896112"/>
+          </a:xfrm>
+          <a:prstGeom prst="arc">
+            <a:avLst/>
+          </a:prstGeom>
+          <a:noFill/>
+          <a:ln w="25400">
+            <a:solidFill>
+              <a:srgbClr val="0068B7"/>
+            </a:solidFill>
+            <a:prstDash val="solid"/>
+          </a:ln>
+        </p:spPr>
+      </p:sp>
+      <p:sp>
+        <p:nvSpPr>
+          <p:cNvPr id="15" name="Text 13"/>
+          <p:cNvSpPr/>
+          <p:nvPr/>
+        </p:nvSpPr>
+        <p:spPr>
+          <a:xfrm>
+            <a:off x="7909560" y="3099816"/>
+            <a:ext cx="2926080" cy="256032"/>
+          </a:xfrm>
+          <a:prstGeom prst="rect">
+            <a:avLst/>
+          </a:prstGeom>
+          <a:noFill/>
+          <a:ln/>
+        </p:spPr>
+        <p:txBody>
+          <a:bodyPr wrap="square" lIns="0" tIns="0" rIns="0" bIns="0" rtlCol="0" anchor="ctr"/>
+          <a:lstStyle/>
+          <a:p>
+            <a:pPr algn="ctr" indent="0" marL="0">
+              <a:buNone/>
+            </a:pPr>
+            <a:r>
+              <a:rPr lang="en-US" sz="1500" b="1" dirty="0">
+                <a:solidFill>
+                  <a:srgbClr val="003A63"/>
+                </a:solidFill>
+                <a:latin typeface="Aptos" pitchFamily="34" charset="0"/>
+                <a:ea typeface="Aptos" pitchFamily="34" charset="-122"/>
+                <a:cs typeface="Aptos" pitchFamily="34" charset="-120"/>
+              </a:rPr>
+              <a:t>Risk</a:t>
+            </a:r>
+            <a:endParaRPr lang="en-US" sz="1500" dirty="0"/>
+          </a:p>
+        </p:txBody>
+      </p:sp>
+      <p:sp>
+        <p:nvSpPr>
+          <p:cNvPr id="16" name="Shape 14"/>
+          <p:cNvSpPr/>
+          <p:nvPr/>
+        </p:nvSpPr>
+        <p:spPr>
+          <a:xfrm>
+            <a:off x="8366760" y="3639312"/>
+            <a:ext cx="2011680" cy="0"/>
+          </a:xfrm>
+          <a:prstGeom prst="line">
+            <a:avLst/>
+          </a:prstGeom>
+          <a:noFill/>
+          <a:ln w="63500">
+            <a:solidFill>
+              <a:srgbClr val="2F8A28"/>
+            </a:solidFill>
+            <a:prstDash val="solid"/>
+          </a:ln>
+        </p:spPr>
+      </p:sp>
+      <p:sp>
+        <p:nvSpPr>
+          <p:cNvPr id="17" name="Text 15"/>
+          <p:cNvSpPr/>
+          <p:nvPr/>
+        </p:nvSpPr>
+        <p:spPr>
+          <a:xfrm>
+            <a:off x="7909560" y="3849624"/>
+            <a:ext cx="2926080" cy="164592"/>
+          </a:xfrm>
+          <a:prstGeom prst="rect">
+            <a:avLst/>
+          </a:prstGeom>
+          <a:noFill/>
+          <a:ln/>
+        </p:spPr>
+        <p:txBody>
+          <a:bodyPr wrap="square" lIns="0" tIns="0" rIns="0" bIns="0" rtlCol="0" anchor="ctr"/>
+          <a:lstStyle/>
+          <a:p>
+            <a:pPr algn="ctr" indent="0" marL="0">
+              <a:buNone/>
+            </a:pPr>
+            <a:r>
+              <a:rPr lang="en-US" sz="900" dirty="0">
+                <a:solidFill>
+                  <a:srgbClr val="003A63"/>
+                </a:solidFill>
+                <a:latin typeface="Aptos" pitchFamily="34" charset="0"/>
+                <a:ea typeface="Aptos" pitchFamily="34" charset="-122"/>
+                <a:cs typeface="Aptos" pitchFamily="34" charset="-120"/>
+              </a:rPr>
+              <a:t>Human review</a:t>
+            </a:r>
+            <a:endParaRPr lang="en-US" sz="900" dirty="0"/>
+          </a:p>
+        </p:txBody>
+      </p:sp>
+      <p:sp>
+        <p:nvSpPr>
+          <p:cNvPr id="18" name="Shape 16"/>
+          <p:cNvSpPr/>
+          <p:nvPr/>
+        </p:nvSpPr>
+        <p:spPr>
+          <a:xfrm>
+            <a:off x="7635240" y="4498848"/>
+            <a:ext cx="3474720" cy="1143000"/>
+          </a:xfrm>
+          <a:prstGeom prst="roundRect">
+            <a:avLst>
+              <a:gd name="adj" fmla="val 9600"/>
+            </a:avLst>
+          </a:prstGeom>
+          <a:solidFill>
             <a:srgbClr val="EAF6F8"/>
           </a:solidFill>
           <a:ln w="12700">
@@ -4827,14 +5188,14 @@
       </p:sp>
       <p:sp>
         <p:nvSpPr>
-          <p:cNvPr id="16" name="Text 14"/>
-          <p:cNvSpPr/>
-          <p:nvPr/>
-        </p:nvSpPr>
-        <p:spPr>
-          <a:xfrm>
-            <a:off x="8074152" y="3666744"/>
-            <a:ext cx="2825496" cy="256032"/>
+          <p:cNvPr id="19" name="Text 17"/>
+          <p:cNvSpPr/>
+          <p:nvPr/>
+        </p:nvSpPr>
+        <p:spPr>
+          <a:xfrm>
+            <a:off x="7799832" y="4645152"/>
+            <a:ext cx="3145536" cy="256032"/>
           </a:xfrm>
           <a:prstGeom prst="rect">
             <a:avLst/>
@@ -4858,7 +5219,7 @@
                 <a:ea typeface="Aptos" pitchFamily="34" charset="-122"/>
                 <a:cs typeface="Aptos" pitchFamily="34" charset="-120"/>
               </a:rPr>
-              <a:t>Use this for</a:t>
+              <a:t>Safeguard to plan</a:t>
             </a:r>
             <a:endParaRPr lang="en-US" sz="1300" dirty="0"/>
           </a:p>
@@ -4866,14 +5227,14 @@
       </p:sp>
       <p:sp>
         <p:nvSpPr>
-          <p:cNvPr id="17" name="Text 15"/>
-          <p:cNvSpPr/>
-          <p:nvPr/>
-        </p:nvSpPr>
-        <p:spPr>
-          <a:xfrm>
-            <a:off x="8074152" y="4023360"/>
-            <a:ext cx="2825496" cy="1097280"/>
+          <p:cNvPr id="20" name="Text 18"/>
+          <p:cNvSpPr/>
+          <p:nvPr/>
+        </p:nvSpPr>
+        <p:spPr>
+          <a:xfrm>
+            <a:off x="7799832" y="5001768"/>
+            <a:ext cx="3145536" cy="502920"/>
           </a:xfrm>
           <a:prstGeom prst="rect">
             <a:avLst/>
@@ -4899,7 +5260,7 @@
                 <a:ea typeface="Aptos" pitchFamily="34" charset="-122"/>
                 <a:cs typeface="Aptos" pitchFamily="34" charset="-120"/>
               </a:rPr>
-              <a:t>Connect the concept to public health decisions, safeguards, documentation, or implementation work.</a:t>
+              <a:t>Identify what could go wrong, who could be affected, what safeguards are needed, and what evidence should be reviewed before use expands.</a:t>
             </a:r>
             <a:endParaRPr lang="en-US" sz="1550" dirty="0"/>
           </a:p>
@@ -5073,8 +5434,8 @@
         </p:nvSpPr>
         <p:spPr>
           <a:xfrm>
-            <a:off x="9966960" y="6537960"/>
-            <a:ext cx="1645920" cy="201168"/>
+            <a:off x="9646920" y="6537960"/>
+            <a:ext cx="1965960" cy="201168"/>
           </a:xfrm>
           <a:prstGeom prst="rect">
             <a:avLst/>
@@ -5098,7 +5459,7 @@
                 <a:ea typeface="Aptos" pitchFamily="34" charset="-122"/>
                 <a:cs typeface="Aptos" pitchFamily="34" charset="-120"/>
               </a:rPr>
-              <a:t>Â© Paula Soper</a:t>
+              <a:t>Copyright Paula Soper</a:t>
             </a:r>
             <a:endParaRPr lang="en-US" sz="800" dirty="0"/>
           </a:p>
@@ -5193,7 +5554,7 @@
         <p:spPr>
           <a:xfrm>
             <a:off x="868680" y="1508760"/>
-            <a:ext cx="6537960" cy="4160520"/>
+            <a:ext cx="6309360" cy="4160520"/>
           </a:xfrm>
           <a:prstGeom prst="rect">
             <a:avLst/>
@@ -5258,12 +5619,12 @@
         </p:nvSpPr>
         <p:spPr>
           <a:xfrm>
-            <a:off x="7909560" y="1417320"/>
-            <a:ext cx="3154680" cy="1828800"/>
+            <a:off x="7635240" y="1325880"/>
+            <a:ext cx="3474720" cy="1325880"/>
           </a:xfrm>
           <a:prstGeom prst="roundRect">
             <a:avLst>
-              <a:gd name="adj" fmla="val 6000"/>
+              <a:gd name="adj" fmla="val 8276"/>
             </a:avLst>
           </a:prstGeom>
           <a:solidFill>
@@ -5285,8 +5646,8 @@
         </p:nvSpPr>
         <p:spPr>
           <a:xfrm>
-            <a:off x="8074152" y="1563624"/>
-            <a:ext cx="2825496" cy="256032"/>
+            <a:off x="7799832" y="1472184"/>
+            <a:ext cx="3145536" cy="256032"/>
           </a:xfrm>
           <a:prstGeom prst="rect">
             <a:avLst/>
@@ -5310,7 +5671,7 @@
                 <a:ea typeface="Aptos" pitchFamily="34" charset="-122"/>
                 <a:cs typeface="Aptos" pitchFamily="34" charset="-120"/>
               </a:rPr>
-              <a:t>Key idea</a:t>
+              <a:t>Risk check</a:t>
             </a:r>
             <a:endParaRPr lang="en-US" sz="1300" dirty="0"/>
           </a:p>
@@ -5324,8 +5685,8 @@
         </p:nvSpPr>
         <p:spPr>
           <a:xfrm>
-            <a:off x="8074152" y="1920240"/>
-            <a:ext cx="2825496" cy="1188720"/>
+            <a:off x="7799832" y="1828800"/>
+            <a:ext cx="3145536" cy="685800"/>
           </a:xfrm>
           <a:prstGeom prst="rect">
             <a:avLst/>
@@ -5365,15 +5726,168 @@
         </p:nvSpPr>
         <p:spPr>
           <a:xfrm>
-            <a:off x="7909560" y="3520440"/>
-            <a:ext cx="3154680" cy="1737360"/>
+            <a:off x="7635240" y="2788920"/>
+            <a:ext cx="3474720" cy="1536192"/>
           </a:xfrm>
           <a:prstGeom prst="roundRect">
             <a:avLst>
-              <a:gd name="adj" fmla="val 6316"/>
+              <a:gd name="adj" fmla="val 7143"/>
             </a:avLst>
           </a:prstGeom>
           <a:solidFill>
+            <a:srgbClr val="FFFFFF">
+              <a:alpha val="88000"/>
+            </a:srgbClr>
+          </a:solidFill>
+          <a:ln w="12700">
+            <a:solidFill>
+              <a:srgbClr val="D6E8F2"/>
+            </a:solidFill>
+            <a:prstDash val="solid"/>
+          </a:ln>
+        </p:spPr>
+      </p:sp>
+      <p:sp>
+        <p:nvSpPr>
+          <p:cNvPr id="14" name="Shape 12"/>
+          <p:cNvSpPr/>
+          <p:nvPr/>
+        </p:nvSpPr>
+        <p:spPr>
+          <a:xfrm>
+            <a:off x="8046720" y="3108960"/>
+            <a:ext cx="2651760" cy="896112"/>
+          </a:xfrm>
+          <a:prstGeom prst="arc">
+            <a:avLst/>
+          </a:prstGeom>
+          <a:noFill/>
+          <a:ln w="25400">
+            <a:solidFill>
+              <a:srgbClr val="0068B7"/>
+            </a:solidFill>
+            <a:prstDash val="solid"/>
+          </a:ln>
+        </p:spPr>
+      </p:sp>
+      <p:sp>
+        <p:nvSpPr>
+          <p:cNvPr id="15" name="Text 13"/>
+          <p:cNvSpPr/>
+          <p:nvPr/>
+        </p:nvSpPr>
+        <p:spPr>
+          <a:xfrm>
+            <a:off x="7909560" y="3099816"/>
+            <a:ext cx="2926080" cy="256032"/>
+          </a:xfrm>
+          <a:prstGeom prst="rect">
+            <a:avLst/>
+          </a:prstGeom>
+          <a:noFill/>
+          <a:ln/>
+        </p:spPr>
+        <p:txBody>
+          <a:bodyPr wrap="square" lIns="0" tIns="0" rIns="0" bIns="0" rtlCol="0" anchor="ctr"/>
+          <a:lstStyle/>
+          <a:p>
+            <a:pPr algn="ctr" indent="0" marL="0">
+              <a:buNone/>
+            </a:pPr>
+            <a:r>
+              <a:rPr lang="en-US" sz="1500" b="1" dirty="0">
+                <a:solidFill>
+                  <a:srgbClr val="003A63"/>
+                </a:solidFill>
+                <a:latin typeface="Aptos" pitchFamily="34" charset="0"/>
+                <a:ea typeface="Aptos" pitchFamily="34" charset="-122"/>
+                <a:cs typeface="Aptos" pitchFamily="34" charset="-120"/>
+              </a:rPr>
+              <a:t>Risk</a:t>
+            </a:r>
+            <a:endParaRPr lang="en-US" sz="1500" dirty="0"/>
+          </a:p>
+        </p:txBody>
+      </p:sp>
+      <p:sp>
+        <p:nvSpPr>
+          <p:cNvPr id="16" name="Shape 14"/>
+          <p:cNvSpPr/>
+          <p:nvPr/>
+        </p:nvSpPr>
+        <p:spPr>
+          <a:xfrm>
+            <a:off x="8366760" y="3639312"/>
+            <a:ext cx="2011680" cy="0"/>
+          </a:xfrm>
+          <a:prstGeom prst="line">
+            <a:avLst/>
+          </a:prstGeom>
+          <a:noFill/>
+          <a:ln w="63500">
+            <a:solidFill>
+              <a:srgbClr val="2F8A28"/>
+            </a:solidFill>
+            <a:prstDash val="solid"/>
+          </a:ln>
+        </p:spPr>
+      </p:sp>
+      <p:sp>
+        <p:nvSpPr>
+          <p:cNvPr id="17" name="Text 15"/>
+          <p:cNvSpPr/>
+          <p:nvPr/>
+        </p:nvSpPr>
+        <p:spPr>
+          <a:xfrm>
+            <a:off x="7909560" y="3849624"/>
+            <a:ext cx="2926080" cy="164592"/>
+          </a:xfrm>
+          <a:prstGeom prst="rect">
+            <a:avLst/>
+          </a:prstGeom>
+          <a:noFill/>
+          <a:ln/>
+        </p:spPr>
+        <p:txBody>
+          <a:bodyPr wrap="square" lIns="0" tIns="0" rIns="0" bIns="0" rtlCol="0" anchor="ctr"/>
+          <a:lstStyle/>
+          <a:p>
+            <a:pPr algn="ctr" indent="0" marL="0">
+              <a:buNone/>
+            </a:pPr>
+            <a:r>
+              <a:rPr lang="en-US" sz="900" dirty="0">
+                <a:solidFill>
+                  <a:srgbClr val="003A63"/>
+                </a:solidFill>
+                <a:latin typeface="Aptos" pitchFamily="34" charset="0"/>
+                <a:ea typeface="Aptos" pitchFamily="34" charset="-122"/>
+                <a:cs typeface="Aptos" pitchFamily="34" charset="-120"/>
+              </a:rPr>
+              <a:t>Human review</a:t>
+            </a:r>
+            <a:endParaRPr lang="en-US" sz="900" dirty="0"/>
+          </a:p>
+        </p:txBody>
+      </p:sp>
+      <p:sp>
+        <p:nvSpPr>
+          <p:cNvPr id="18" name="Shape 16"/>
+          <p:cNvSpPr/>
+          <p:nvPr/>
+        </p:nvSpPr>
+        <p:spPr>
+          <a:xfrm>
+            <a:off x="7635240" y="4498848"/>
+            <a:ext cx="3474720" cy="1143000"/>
+          </a:xfrm>
+          <a:prstGeom prst="roundRect">
+            <a:avLst>
+              <a:gd name="adj" fmla="val 9600"/>
+            </a:avLst>
+          </a:prstGeom>
+          <a:solidFill>
             <a:srgbClr val="EAF6F8"/>
           </a:solidFill>
           <a:ln w="12700">
@@ -5386,14 +5900,14 @@
       </p:sp>
       <p:sp>
         <p:nvSpPr>
-          <p:cNvPr id="14" name="Text 12"/>
-          <p:cNvSpPr/>
-          <p:nvPr/>
-        </p:nvSpPr>
-        <p:spPr>
-          <a:xfrm>
-            <a:off x="8074152" y="3666744"/>
-            <a:ext cx="2825496" cy="256032"/>
+          <p:cNvPr id="19" name="Text 17"/>
+          <p:cNvSpPr/>
+          <p:nvPr/>
+        </p:nvSpPr>
+        <p:spPr>
+          <a:xfrm>
+            <a:off x="7799832" y="4645152"/>
+            <a:ext cx="3145536" cy="256032"/>
           </a:xfrm>
           <a:prstGeom prst="rect">
             <a:avLst/>
@@ -5417,7 +5931,7 @@
                 <a:ea typeface="Aptos" pitchFamily="34" charset="-122"/>
                 <a:cs typeface="Aptos" pitchFamily="34" charset="-120"/>
               </a:rPr>
-              <a:t>Use this for</a:t>
+              <a:t>Safeguard to plan</a:t>
             </a:r>
             <a:endParaRPr lang="en-US" sz="1300" dirty="0"/>
           </a:p>
@@ -5425,14 +5939,14 @@
       </p:sp>
       <p:sp>
         <p:nvSpPr>
-          <p:cNvPr id="15" name="Text 13"/>
-          <p:cNvSpPr/>
-          <p:nvPr/>
-        </p:nvSpPr>
-        <p:spPr>
-          <a:xfrm>
-            <a:off x="8074152" y="4023360"/>
-            <a:ext cx="2825496" cy="1097280"/>
+          <p:cNvPr id="20" name="Text 18"/>
+          <p:cNvSpPr/>
+          <p:nvPr/>
+        </p:nvSpPr>
+        <p:spPr>
+          <a:xfrm>
+            <a:off x="7799832" y="5001768"/>
+            <a:ext cx="3145536" cy="502920"/>
           </a:xfrm>
           <a:prstGeom prst="rect">
             <a:avLst/>
@@ -5458,7 +5972,7 @@
                 <a:ea typeface="Aptos" pitchFamily="34" charset="-122"/>
                 <a:cs typeface="Aptos" pitchFamily="34" charset="-120"/>
               </a:rPr>
-              <a:t>Connect the concept to public health decisions, safeguards, documentation, or implementation work.</a:t>
+              <a:t>Identify what could go wrong, who could be affected, what safeguards are needed, and what evidence should be reviewed before use expands.</a:t>
             </a:r>
             <a:endParaRPr lang="en-US" sz="1550" dirty="0"/>
           </a:p>
@@ -5632,8 +6146,8 @@
         </p:nvSpPr>
         <p:spPr>
           <a:xfrm>
-            <a:off x="9966960" y="6537960"/>
-            <a:ext cx="1645920" cy="201168"/>
+            <a:off x="9646920" y="6537960"/>
+            <a:ext cx="1965960" cy="201168"/>
           </a:xfrm>
           <a:prstGeom prst="rect">
             <a:avLst/>
@@ -5657,7 +6171,7 @@
                 <a:ea typeface="Aptos" pitchFamily="34" charset="-122"/>
                 <a:cs typeface="Aptos" pitchFamily="34" charset="-120"/>
               </a:rPr>
-              <a:t>Â© Paula Soper</a:t>
+              <a:t>Copyright Paula Soper</a:t>
             </a:r>
             <a:endParaRPr lang="en-US" sz="800" dirty="0"/>
           </a:p>
@@ -5704,77 +6218,13 @@
       </p:sp>
       <p:sp>
         <p:nvSpPr>
-          <p:cNvPr id="8" name="Shape 6"/>
+          <p:cNvPr id="8" name="Text 6"/>
           <p:cNvSpPr/>
           <p:nvPr/>
         </p:nvSpPr>
         <p:spPr>
           <a:xfrm>
             <a:off x="640080" y="658368"/>
-            <a:ext cx="420624" cy="420624"/>
-          </a:xfrm>
-          <a:prstGeom prst="ellipse">
-            <a:avLst/>
-          </a:prstGeom>
-          <a:solidFill>
-            <a:srgbClr val="0068B7"/>
-          </a:solidFill>
-          <a:ln w="12700">
-            <a:solidFill>
-              <a:srgbClr val="0068B7"/>
-            </a:solidFill>
-            <a:prstDash val="solid"/>
-          </a:ln>
-        </p:spPr>
-      </p:sp>
-      <p:sp>
-        <p:nvSpPr>
-          <p:cNvPr id="9" name="Text 7"/>
-          <p:cNvSpPr/>
-          <p:nvPr/>
-        </p:nvSpPr>
-        <p:spPr>
-          <a:xfrm>
-            <a:off x="640080" y="731520"/>
-            <a:ext cx="420624" cy="164592"/>
-          </a:xfrm>
-          <a:prstGeom prst="rect">
-            <a:avLst/>
-          </a:prstGeom>
-          <a:noFill/>
-          <a:ln/>
-        </p:spPr>
-        <p:txBody>
-          <a:bodyPr wrap="square" lIns="0" tIns="0" rIns="0" bIns="0" rtlCol="0" anchor="ctr"/>
-          <a:lstStyle/>
-          <a:p>
-            <a:pPr algn="ctr" indent="0" marL="0">
-              <a:buNone/>
-            </a:pPr>
-            <a:r>
-              <a:rPr lang="en-US" sz="1100" b="1" dirty="0">
-                <a:solidFill>
-                  <a:srgbClr val="FFFFFF"/>
-                </a:solidFill>
-                <a:latin typeface="Aptos" pitchFamily="34" charset="0"/>
-                <a:ea typeface="Aptos" pitchFamily="34" charset="-122"/>
-                <a:cs typeface="Aptos" pitchFamily="34" charset="-120"/>
-              </a:rPr>
-              <a:t>8</a:t>
-            </a:r>
-            <a:endParaRPr lang="en-US" sz="1100" dirty="0"/>
-          </a:p>
-        </p:txBody>
-      </p:sp>
-      <p:sp>
-        <p:nvSpPr>
-          <p:cNvPr id="10" name="Text 8"/>
-          <p:cNvSpPr/>
-          <p:nvPr/>
-        </p:nvSpPr>
-        <p:spPr>
-          <a:xfrm>
-            <a:off x="640080" y="621792"/>
             <a:ext cx="10881360" cy="713232"/>
           </a:xfrm>
           <a:prstGeom prst="rect">
@@ -5809,14 +6259,14 @@
       </p:sp>
       <p:sp>
         <p:nvSpPr>
-          <p:cNvPr id="11" name="Text 9"/>
+          <p:cNvPr id="9" name="Text 7"/>
           <p:cNvSpPr/>
           <p:nvPr/>
         </p:nvSpPr>
         <p:spPr>
           <a:xfrm>
             <a:off x="868680" y="1508760"/>
-            <a:ext cx="6537960" cy="4160520"/>
+            <a:ext cx="6309360" cy="4160520"/>
           </a:xfrm>
           <a:prstGeom prst="rect">
             <a:avLst/>
@@ -5875,18 +6325,18 @@
       </p:sp>
       <p:sp>
         <p:nvSpPr>
-          <p:cNvPr id="12" name="Shape 10"/>
-          <p:cNvSpPr/>
-          <p:nvPr/>
-        </p:nvSpPr>
-        <p:spPr>
-          <a:xfrm>
-            <a:off x="7909560" y="1417320"/>
-            <a:ext cx="3154680" cy="1828800"/>
+          <p:cNvPr id="10" name="Shape 8"/>
+          <p:cNvSpPr/>
+          <p:nvPr/>
+        </p:nvSpPr>
+        <p:spPr>
+          <a:xfrm>
+            <a:off x="7635240" y="1325880"/>
+            <a:ext cx="3474720" cy="1325880"/>
           </a:xfrm>
           <a:prstGeom prst="roundRect">
             <a:avLst>
-              <a:gd name="adj" fmla="val 6000"/>
+              <a:gd name="adj" fmla="val 8276"/>
             </a:avLst>
           </a:prstGeom>
           <a:solidFill>
@@ -5902,14 +6352,14 @@
       </p:sp>
       <p:sp>
         <p:nvSpPr>
-          <p:cNvPr id="13" name="Text 11"/>
-          <p:cNvSpPr/>
-          <p:nvPr/>
-        </p:nvSpPr>
-        <p:spPr>
-          <a:xfrm>
-            <a:off x="8074152" y="1563624"/>
-            <a:ext cx="2825496" cy="256032"/>
+          <p:cNvPr id="11" name="Text 9"/>
+          <p:cNvSpPr/>
+          <p:nvPr/>
+        </p:nvSpPr>
+        <p:spPr>
+          <a:xfrm>
+            <a:off x="7799832" y="1472184"/>
+            <a:ext cx="3145536" cy="256032"/>
           </a:xfrm>
           <a:prstGeom prst="rect">
             <a:avLst/>
@@ -5933,7 +6383,7 @@
                 <a:ea typeface="Aptos" pitchFamily="34" charset="-122"/>
                 <a:cs typeface="Aptos" pitchFamily="34" charset="-120"/>
               </a:rPr>
-              <a:t>Key idea</a:t>
+              <a:t>Data decision</a:t>
             </a:r>
             <a:endParaRPr lang="en-US" sz="1300" dirty="0"/>
           </a:p>
@@ -5941,14 +6391,14 @@
       </p:sp>
       <p:sp>
         <p:nvSpPr>
-          <p:cNvPr id="14" name="Text 12"/>
-          <p:cNvSpPr/>
-          <p:nvPr/>
-        </p:nvSpPr>
-        <p:spPr>
-          <a:xfrm>
-            <a:off x="8074152" y="1920240"/>
-            <a:ext cx="2825496" cy="1188720"/>
+          <p:cNvPr id="12" name="Text 10"/>
+          <p:cNvSpPr/>
+          <p:nvPr/>
+        </p:nvSpPr>
+        <p:spPr>
+          <a:xfrm>
+            <a:off x="7799832" y="1828800"/>
+            <a:ext cx="3145536" cy="685800"/>
           </a:xfrm>
           <a:prstGeom prst="rect">
             <a:avLst/>
@@ -5982,21 +6432,212 @@
       </p:sp>
       <p:sp>
         <p:nvSpPr>
-          <p:cNvPr id="15" name="Shape 13"/>
-          <p:cNvSpPr/>
-          <p:nvPr/>
-        </p:nvSpPr>
-        <p:spPr>
-          <a:xfrm>
-            <a:off x="7909560" y="3520440"/>
-            <a:ext cx="3154680" cy="1737360"/>
+          <p:cNvPr id="13" name="Shape 11"/>
+          <p:cNvSpPr/>
+          <p:nvPr/>
+        </p:nvSpPr>
+        <p:spPr>
+          <a:xfrm>
+            <a:off x="7635240" y="2788920"/>
+            <a:ext cx="3474720" cy="1536192"/>
           </a:xfrm>
           <a:prstGeom prst="roundRect">
             <a:avLst>
-              <a:gd name="adj" fmla="val 6316"/>
+              <a:gd name="adj" fmla="val 7143"/>
             </a:avLst>
           </a:prstGeom>
           <a:solidFill>
+            <a:srgbClr val="FFFFFF">
+              <a:alpha val="88000"/>
+            </a:srgbClr>
+          </a:solidFill>
+          <a:ln w="12700">
+            <a:solidFill>
+              <a:srgbClr val="D6E8F2"/>
+            </a:solidFill>
+            <a:prstDash val="solid"/>
+          </a:ln>
+        </p:spPr>
+      </p:sp>
+      <p:sp>
+        <p:nvSpPr>
+          <p:cNvPr id="14" name="Shape 12"/>
+          <p:cNvSpPr/>
+          <p:nvPr/>
+        </p:nvSpPr>
+        <p:spPr>
+          <a:xfrm>
+            <a:off x="8138160" y="3474720"/>
+            <a:ext cx="256032" cy="411480"/>
+          </a:xfrm>
+          <a:prstGeom prst="rect">
+            <a:avLst/>
+          </a:prstGeom>
+          <a:solidFill>
+            <a:srgbClr val="0068B7"/>
+          </a:solidFill>
+          <a:ln w="12700">
+            <a:solidFill>
+              <a:srgbClr val="0068B7"/>
+            </a:solidFill>
+            <a:prstDash val="solid"/>
+          </a:ln>
+        </p:spPr>
+      </p:sp>
+      <p:sp>
+        <p:nvSpPr>
+          <p:cNvPr id="15" name="Shape 13"/>
+          <p:cNvSpPr/>
+          <p:nvPr/>
+        </p:nvSpPr>
+        <p:spPr>
+          <a:xfrm>
+            <a:off x="8577072" y="3172968"/>
+            <a:ext cx="256032" cy="713232"/>
+          </a:xfrm>
+          <a:prstGeom prst="rect">
+            <a:avLst/>
+          </a:prstGeom>
+          <a:solidFill>
+            <a:srgbClr val="2F8A28"/>
+          </a:solidFill>
+          <a:ln w="12700">
+            <a:solidFill>
+              <a:srgbClr val="2F8A28"/>
+            </a:solidFill>
+            <a:prstDash val="solid"/>
+          </a:ln>
+        </p:spPr>
+      </p:sp>
+      <p:sp>
+        <p:nvSpPr>
+          <p:cNvPr id="16" name="Shape 14"/>
+          <p:cNvSpPr/>
+          <p:nvPr/>
+        </p:nvSpPr>
+        <p:spPr>
+          <a:xfrm>
+            <a:off x="9015984" y="2880360"/>
+            <a:ext cx="256032" cy="1005840"/>
+          </a:xfrm>
+          <a:prstGeom prst="rect">
+            <a:avLst/>
+          </a:prstGeom>
+          <a:solidFill>
+            <a:srgbClr val="D69A2D"/>
+          </a:solidFill>
+          <a:ln w="12700">
+            <a:solidFill>
+              <a:srgbClr val="D69A2D"/>
+            </a:solidFill>
+            <a:prstDash val="solid"/>
+          </a:ln>
+        </p:spPr>
+      </p:sp>
+      <p:sp>
+        <p:nvSpPr>
+          <p:cNvPr id="17" name="Shape 15"/>
+          <p:cNvSpPr/>
+          <p:nvPr/>
+        </p:nvSpPr>
+        <p:spPr>
+          <a:xfrm>
+            <a:off x="9454896" y="3319272"/>
+            <a:ext cx="256032" cy="566928"/>
+          </a:xfrm>
+          <a:prstGeom prst="rect">
+            <a:avLst/>
+          </a:prstGeom>
+          <a:solidFill>
+            <a:srgbClr val="6A4CA3"/>
+          </a:solidFill>
+          <a:ln w="12700">
+            <a:solidFill>
+              <a:srgbClr val="6A4CA3"/>
+            </a:solidFill>
+            <a:prstDash val="solid"/>
+          </a:ln>
+        </p:spPr>
+      </p:sp>
+      <p:sp>
+        <p:nvSpPr>
+          <p:cNvPr id="18" name="Shape 16"/>
+          <p:cNvSpPr/>
+          <p:nvPr/>
+        </p:nvSpPr>
+        <p:spPr>
+          <a:xfrm>
+            <a:off x="8019288" y="3886200"/>
+            <a:ext cx="2706624" cy="0"/>
+          </a:xfrm>
+          <a:prstGeom prst="line">
+            <a:avLst/>
+          </a:prstGeom>
+          <a:noFill/>
+          <a:ln w="15240">
+            <a:solidFill>
+              <a:srgbClr val="003A63"/>
+            </a:solidFill>
+            <a:prstDash val="solid"/>
+          </a:ln>
+        </p:spPr>
+      </p:sp>
+      <p:sp>
+        <p:nvSpPr>
+          <p:cNvPr id="19" name="Text 17"/>
+          <p:cNvSpPr/>
+          <p:nvPr/>
+        </p:nvSpPr>
+        <p:spPr>
+          <a:xfrm>
+            <a:off x="7863840" y="3017520"/>
+            <a:ext cx="3017520" cy="201168"/>
+          </a:xfrm>
+          <a:prstGeom prst="rect">
+            <a:avLst/>
+          </a:prstGeom>
+          <a:noFill/>
+          <a:ln/>
+        </p:spPr>
+        <p:txBody>
+          <a:bodyPr wrap="square" lIns="0" tIns="0" rIns="0" bIns="0" rtlCol="0" anchor="ctr"/>
+          <a:lstStyle/>
+          <a:p>
+            <a:pPr algn="ctr" indent="0" marL="0">
+              <a:buNone/>
+            </a:pPr>
+            <a:r>
+              <a:rPr lang="en-US" sz="1050" b="1" dirty="0">
+                <a:solidFill>
+                  <a:srgbClr val="003A63"/>
+                </a:solidFill>
+                <a:latin typeface="Aptos" pitchFamily="34" charset="0"/>
+                <a:ea typeface="Aptos" pitchFamily="34" charset="-122"/>
+                <a:cs typeface="Aptos" pitchFamily="34" charset="-120"/>
+              </a:rPr>
+              <a:t>Measure and monitor</a:t>
+            </a:r>
+            <a:endParaRPr lang="en-US" sz="1050" dirty="0"/>
+          </a:p>
+        </p:txBody>
+      </p:sp>
+      <p:sp>
+        <p:nvSpPr>
+          <p:cNvPr id="20" name="Shape 18"/>
+          <p:cNvSpPr/>
+          <p:nvPr/>
+        </p:nvSpPr>
+        <p:spPr>
+          <a:xfrm>
+            <a:off x="7635240" y="4498848"/>
+            <a:ext cx="3474720" cy="1143000"/>
+          </a:xfrm>
+          <a:prstGeom prst="roundRect">
+            <a:avLst>
+              <a:gd name="adj" fmla="val 9600"/>
+            </a:avLst>
+          </a:prstGeom>
+          <a:solidFill>
             <a:srgbClr val="EAF6F8"/>
           </a:solidFill>
           <a:ln w="12700">
@@ -6009,14 +6650,14 @@
       </p:sp>
       <p:sp>
         <p:nvSpPr>
-          <p:cNvPr id="16" name="Text 14"/>
-          <p:cNvSpPr/>
-          <p:nvPr/>
-        </p:nvSpPr>
-        <p:spPr>
-          <a:xfrm>
-            <a:off x="8074152" y="3666744"/>
-            <a:ext cx="2825496" cy="256032"/>
+          <p:cNvPr id="21" name="Text 19"/>
+          <p:cNvSpPr/>
+          <p:nvPr/>
+        </p:nvSpPr>
+        <p:spPr>
+          <a:xfrm>
+            <a:off x="7799832" y="4645152"/>
+            <a:ext cx="3145536" cy="256032"/>
           </a:xfrm>
           <a:prstGeom prst="rect">
             <a:avLst/>
@@ -6040,7 +6681,7 @@
                 <a:ea typeface="Aptos" pitchFamily="34" charset="-122"/>
                 <a:cs typeface="Aptos" pitchFamily="34" charset="-120"/>
               </a:rPr>
-              <a:t>Use this for</a:t>
+              <a:t>How to validate</a:t>
             </a:r>
             <a:endParaRPr lang="en-US" sz="1300" dirty="0"/>
           </a:p>
@@ -6048,14 +6689,14 @@
       </p:sp>
       <p:sp>
         <p:nvSpPr>
-          <p:cNvPr id="17" name="Text 15"/>
-          <p:cNvSpPr/>
-          <p:nvPr/>
-        </p:nvSpPr>
-        <p:spPr>
-          <a:xfrm>
-            <a:off x="8074152" y="4023360"/>
-            <a:ext cx="2825496" cy="1097280"/>
+          <p:cNvPr id="22" name="Text 20"/>
+          <p:cNvSpPr/>
+          <p:nvPr/>
+        </p:nvSpPr>
+        <p:spPr>
+          <a:xfrm>
+            <a:off x="7799832" y="5001768"/>
+            <a:ext cx="3145536" cy="502920"/>
           </a:xfrm>
           <a:prstGeom prst="rect">
             <a:avLst/>
@@ -6081,7 +6722,7 @@
                 <a:ea typeface="Aptos" pitchFamily="34" charset="-122"/>
                 <a:cs typeface="Aptos" pitchFamily="34" charset="-120"/>
               </a:rPr>
-              <a:t>Connect the concept to public health decisions, safeguards, documentation, or implementation work.</a:t>
+              <a:t>Connect the concept to data quality, model performance, validation evidence, monitoring measures, and decisions that remain under human control.</a:t>
             </a:r>
             <a:endParaRPr lang="en-US" sz="1550" dirty="0"/>
           </a:p>
@@ -6255,8 +6896,8 @@
         </p:nvSpPr>
         <p:spPr>
           <a:xfrm>
-            <a:off x="9966960" y="6537960"/>
-            <a:ext cx="1645920" cy="201168"/>
+            <a:off x="9646920" y="6537960"/>
+            <a:ext cx="1965960" cy="201168"/>
           </a:xfrm>
           <a:prstGeom prst="rect">
             <a:avLst/>
@@ -6280,7 +6921,7 @@
                 <a:ea typeface="Aptos" pitchFamily="34" charset="-122"/>
                 <a:cs typeface="Aptos" pitchFamily="34" charset="-120"/>
               </a:rPr>
-              <a:t>Â© Paula Soper</a:t>
+              <a:t>Copyright Paula Soper</a:t>
             </a:r>
             <a:endParaRPr lang="en-US" sz="800" dirty="0"/>
           </a:p>
@@ -6327,77 +6968,13 @@
       </p:sp>
       <p:sp>
         <p:nvSpPr>
-          <p:cNvPr id="8" name="Shape 6"/>
+          <p:cNvPr id="8" name="Text 6"/>
           <p:cNvSpPr/>
           <p:nvPr/>
         </p:nvSpPr>
         <p:spPr>
           <a:xfrm>
             <a:off x="640080" y="658368"/>
-            <a:ext cx="420624" cy="420624"/>
-          </a:xfrm>
-          <a:prstGeom prst="ellipse">
-            <a:avLst/>
-          </a:prstGeom>
-          <a:solidFill>
-            <a:srgbClr val="0068B7"/>
-          </a:solidFill>
-          <a:ln w="12700">
-            <a:solidFill>
-              <a:srgbClr val="0068B7"/>
-            </a:solidFill>
-            <a:prstDash val="solid"/>
-          </a:ln>
-        </p:spPr>
-      </p:sp>
-      <p:sp>
-        <p:nvSpPr>
-          <p:cNvPr id="9" name="Text 7"/>
-          <p:cNvSpPr/>
-          <p:nvPr/>
-        </p:nvSpPr>
-        <p:spPr>
-          <a:xfrm>
-            <a:off x="640080" y="731520"/>
-            <a:ext cx="420624" cy="164592"/>
-          </a:xfrm>
-          <a:prstGeom prst="rect">
-            <a:avLst/>
-          </a:prstGeom>
-          <a:noFill/>
-          <a:ln/>
-        </p:spPr>
-        <p:txBody>
-          <a:bodyPr wrap="square" lIns="0" tIns="0" rIns="0" bIns="0" rtlCol="0" anchor="ctr"/>
-          <a:lstStyle/>
-          <a:p>
-            <a:pPr algn="ctr" indent="0" marL="0">
-              <a:buNone/>
-            </a:pPr>
-            <a:r>
-              <a:rPr lang="en-US" sz="1100" b="1" dirty="0">
-                <a:solidFill>
-                  <a:srgbClr val="FFFFFF"/>
-                </a:solidFill>
-                <a:latin typeface="Aptos" pitchFamily="34" charset="0"/>
-                <a:ea typeface="Aptos" pitchFamily="34" charset="-122"/>
-                <a:cs typeface="Aptos" pitchFamily="34" charset="-120"/>
-              </a:rPr>
-              <a:t>9</a:t>
-            </a:r>
-            <a:endParaRPr lang="en-US" sz="1100" dirty="0"/>
-          </a:p>
-        </p:txBody>
-      </p:sp>
-      <p:sp>
-        <p:nvSpPr>
-          <p:cNvPr id="10" name="Text 8"/>
-          <p:cNvSpPr/>
-          <p:nvPr/>
-        </p:nvSpPr>
-        <p:spPr>
-          <a:xfrm>
-            <a:off x="640080" y="621792"/>
             <a:ext cx="10881360" cy="713232"/>
           </a:xfrm>
           <a:prstGeom prst="rect">
@@ -6432,14 +7009,14 @@
       </p:sp>
       <p:sp>
         <p:nvSpPr>
-          <p:cNvPr id="11" name="Text 9"/>
+          <p:cNvPr id="9" name="Text 7"/>
           <p:cNvSpPr/>
           <p:nvPr/>
         </p:nvSpPr>
         <p:spPr>
           <a:xfrm>
             <a:off x="868680" y="1508760"/>
-            <a:ext cx="6537960" cy="4160520"/>
+            <a:ext cx="6309360" cy="4160520"/>
           </a:xfrm>
           <a:prstGeom prst="rect">
             <a:avLst/>
@@ -6498,18 +7075,18 @@
       </p:sp>
       <p:sp>
         <p:nvSpPr>
-          <p:cNvPr id="12" name="Shape 10"/>
-          <p:cNvSpPr/>
-          <p:nvPr/>
-        </p:nvSpPr>
-        <p:spPr>
-          <a:xfrm>
-            <a:off x="7909560" y="1417320"/>
-            <a:ext cx="3154680" cy="1828800"/>
+          <p:cNvPr id="10" name="Shape 8"/>
+          <p:cNvSpPr/>
+          <p:nvPr/>
+        </p:nvSpPr>
+        <p:spPr>
+          <a:xfrm>
+            <a:off x="7635240" y="1325880"/>
+            <a:ext cx="3474720" cy="1325880"/>
           </a:xfrm>
           <a:prstGeom prst="roundRect">
             <a:avLst>
-              <a:gd name="adj" fmla="val 6000"/>
+              <a:gd name="adj" fmla="val 8276"/>
             </a:avLst>
           </a:prstGeom>
           <a:solidFill>
@@ -6525,14 +7102,14 @@
       </p:sp>
       <p:sp>
         <p:nvSpPr>
-          <p:cNvPr id="13" name="Text 11"/>
-          <p:cNvSpPr/>
-          <p:nvPr/>
-        </p:nvSpPr>
-        <p:spPr>
-          <a:xfrm>
-            <a:off x="8074152" y="1563624"/>
-            <a:ext cx="2825496" cy="256032"/>
+          <p:cNvPr id="11" name="Text 9"/>
+          <p:cNvSpPr/>
+          <p:nvPr/>
+        </p:nvSpPr>
+        <p:spPr>
+          <a:xfrm>
+            <a:off x="7799832" y="1472184"/>
+            <a:ext cx="3145536" cy="256032"/>
           </a:xfrm>
           <a:prstGeom prst="rect">
             <a:avLst/>
@@ -6556,7 +7133,7 @@
                 <a:ea typeface="Aptos" pitchFamily="34" charset="-122"/>
                 <a:cs typeface="Aptos" pitchFamily="34" charset="-120"/>
               </a:rPr>
-              <a:t>Key idea</a:t>
+              <a:t>Data decision</a:t>
             </a:r>
             <a:endParaRPr lang="en-US" sz="1300" dirty="0"/>
           </a:p>
@@ -6564,14 +7141,14 @@
       </p:sp>
       <p:sp>
         <p:nvSpPr>
-          <p:cNvPr id="14" name="Text 12"/>
-          <p:cNvSpPr/>
-          <p:nvPr/>
-        </p:nvSpPr>
-        <p:spPr>
-          <a:xfrm>
-            <a:off x="8074152" y="1920240"/>
-            <a:ext cx="2825496" cy="1188720"/>
+          <p:cNvPr id="12" name="Text 10"/>
+          <p:cNvSpPr/>
+          <p:nvPr/>
+        </p:nvSpPr>
+        <p:spPr>
+          <a:xfrm>
+            <a:off x="7799832" y="1828800"/>
+            <a:ext cx="3145536" cy="685800"/>
           </a:xfrm>
           <a:prstGeom prst="rect">
             <a:avLst/>
@@ -6605,21 +7182,212 @@
       </p:sp>
       <p:sp>
         <p:nvSpPr>
-          <p:cNvPr id="15" name="Shape 13"/>
-          <p:cNvSpPr/>
-          <p:nvPr/>
-        </p:nvSpPr>
-        <p:spPr>
-          <a:xfrm>
-            <a:off x="7909560" y="3520440"/>
-            <a:ext cx="3154680" cy="1737360"/>
+          <p:cNvPr id="13" name="Shape 11"/>
+          <p:cNvSpPr/>
+          <p:nvPr/>
+        </p:nvSpPr>
+        <p:spPr>
+          <a:xfrm>
+            <a:off x="7635240" y="2788920"/>
+            <a:ext cx="3474720" cy="1536192"/>
           </a:xfrm>
           <a:prstGeom prst="roundRect">
             <a:avLst>
-              <a:gd name="adj" fmla="val 6316"/>
+              <a:gd name="adj" fmla="val 7143"/>
             </a:avLst>
           </a:prstGeom>
           <a:solidFill>
+            <a:srgbClr val="FFFFFF">
+              <a:alpha val="88000"/>
+            </a:srgbClr>
+          </a:solidFill>
+          <a:ln w="12700">
+            <a:solidFill>
+              <a:srgbClr val="D6E8F2"/>
+            </a:solidFill>
+            <a:prstDash val="solid"/>
+          </a:ln>
+        </p:spPr>
+      </p:sp>
+      <p:sp>
+        <p:nvSpPr>
+          <p:cNvPr id="14" name="Shape 12"/>
+          <p:cNvSpPr/>
+          <p:nvPr/>
+        </p:nvSpPr>
+        <p:spPr>
+          <a:xfrm>
+            <a:off x="8138160" y="3474720"/>
+            <a:ext cx="256032" cy="411480"/>
+          </a:xfrm>
+          <a:prstGeom prst="rect">
+            <a:avLst/>
+          </a:prstGeom>
+          <a:solidFill>
+            <a:srgbClr val="0068B7"/>
+          </a:solidFill>
+          <a:ln w="12700">
+            <a:solidFill>
+              <a:srgbClr val="0068B7"/>
+            </a:solidFill>
+            <a:prstDash val="solid"/>
+          </a:ln>
+        </p:spPr>
+      </p:sp>
+      <p:sp>
+        <p:nvSpPr>
+          <p:cNvPr id="15" name="Shape 13"/>
+          <p:cNvSpPr/>
+          <p:nvPr/>
+        </p:nvSpPr>
+        <p:spPr>
+          <a:xfrm>
+            <a:off x="8577072" y="3172968"/>
+            <a:ext cx="256032" cy="713232"/>
+          </a:xfrm>
+          <a:prstGeom prst="rect">
+            <a:avLst/>
+          </a:prstGeom>
+          <a:solidFill>
+            <a:srgbClr val="2F8A28"/>
+          </a:solidFill>
+          <a:ln w="12700">
+            <a:solidFill>
+              <a:srgbClr val="2F8A28"/>
+            </a:solidFill>
+            <a:prstDash val="solid"/>
+          </a:ln>
+        </p:spPr>
+      </p:sp>
+      <p:sp>
+        <p:nvSpPr>
+          <p:cNvPr id="16" name="Shape 14"/>
+          <p:cNvSpPr/>
+          <p:nvPr/>
+        </p:nvSpPr>
+        <p:spPr>
+          <a:xfrm>
+            <a:off x="9015984" y="2880360"/>
+            <a:ext cx="256032" cy="1005840"/>
+          </a:xfrm>
+          <a:prstGeom prst="rect">
+            <a:avLst/>
+          </a:prstGeom>
+          <a:solidFill>
+            <a:srgbClr val="D69A2D"/>
+          </a:solidFill>
+          <a:ln w="12700">
+            <a:solidFill>
+              <a:srgbClr val="D69A2D"/>
+            </a:solidFill>
+            <a:prstDash val="solid"/>
+          </a:ln>
+        </p:spPr>
+      </p:sp>
+      <p:sp>
+        <p:nvSpPr>
+          <p:cNvPr id="17" name="Shape 15"/>
+          <p:cNvSpPr/>
+          <p:nvPr/>
+        </p:nvSpPr>
+        <p:spPr>
+          <a:xfrm>
+            <a:off x="9454896" y="3319272"/>
+            <a:ext cx="256032" cy="566928"/>
+          </a:xfrm>
+          <a:prstGeom prst="rect">
+            <a:avLst/>
+          </a:prstGeom>
+          <a:solidFill>
+            <a:srgbClr val="6A4CA3"/>
+          </a:solidFill>
+          <a:ln w="12700">
+            <a:solidFill>
+              <a:srgbClr val="6A4CA3"/>
+            </a:solidFill>
+            <a:prstDash val="solid"/>
+          </a:ln>
+        </p:spPr>
+      </p:sp>
+      <p:sp>
+        <p:nvSpPr>
+          <p:cNvPr id="18" name="Shape 16"/>
+          <p:cNvSpPr/>
+          <p:nvPr/>
+        </p:nvSpPr>
+        <p:spPr>
+          <a:xfrm>
+            <a:off x="8019288" y="3886200"/>
+            <a:ext cx="2706624" cy="0"/>
+          </a:xfrm>
+          <a:prstGeom prst="line">
+            <a:avLst/>
+          </a:prstGeom>
+          <a:noFill/>
+          <a:ln w="15240">
+            <a:solidFill>
+              <a:srgbClr val="003A63"/>
+            </a:solidFill>
+            <a:prstDash val="solid"/>
+          </a:ln>
+        </p:spPr>
+      </p:sp>
+      <p:sp>
+        <p:nvSpPr>
+          <p:cNvPr id="19" name="Text 17"/>
+          <p:cNvSpPr/>
+          <p:nvPr/>
+        </p:nvSpPr>
+        <p:spPr>
+          <a:xfrm>
+            <a:off x="7863840" y="3017520"/>
+            <a:ext cx="3017520" cy="201168"/>
+          </a:xfrm>
+          <a:prstGeom prst="rect">
+            <a:avLst/>
+          </a:prstGeom>
+          <a:noFill/>
+          <a:ln/>
+        </p:spPr>
+        <p:txBody>
+          <a:bodyPr wrap="square" lIns="0" tIns="0" rIns="0" bIns="0" rtlCol="0" anchor="ctr"/>
+          <a:lstStyle/>
+          <a:p>
+            <a:pPr algn="ctr" indent="0" marL="0">
+              <a:buNone/>
+            </a:pPr>
+            <a:r>
+              <a:rPr lang="en-US" sz="1050" b="1" dirty="0">
+                <a:solidFill>
+                  <a:srgbClr val="003A63"/>
+                </a:solidFill>
+                <a:latin typeface="Aptos" pitchFamily="34" charset="0"/>
+                <a:ea typeface="Aptos" pitchFamily="34" charset="-122"/>
+                <a:cs typeface="Aptos" pitchFamily="34" charset="-120"/>
+              </a:rPr>
+              <a:t>Measure and monitor</a:t>
+            </a:r>
+            <a:endParaRPr lang="en-US" sz="1050" dirty="0"/>
+          </a:p>
+        </p:txBody>
+      </p:sp>
+      <p:sp>
+        <p:nvSpPr>
+          <p:cNvPr id="20" name="Shape 18"/>
+          <p:cNvSpPr/>
+          <p:nvPr/>
+        </p:nvSpPr>
+        <p:spPr>
+          <a:xfrm>
+            <a:off x="7635240" y="4498848"/>
+            <a:ext cx="3474720" cy="1143000"/>
+          </a:xfrm>
+          <a:prstGeom prst="roundRect">
+            <a:avLst>
+              <a:gd name="adj" fmla="val 9600"/>
+            </a:avLst>
+          </a:prstGeom>
+          <a:solidFill>
             <a:srgbClr val="EAF6F8"/>
           </a:solidFill>
           <a:ln w="12700">
@@ -6632,14 +7400,14 @@
       </p:sp>
       <p:sp>
         <p:nvSpPr>
-          <p:cNvPr id="16" name="Text 14"/>
-          <p:cNvSpPr/>
-          <p:nvPr/>
-        </p:nvSpPr>
-        <p:spPr>
-          <a:xfrm>
-            <a:off x="8074152" y="3666744"/>
-            <a:ext cx="2825496" cy="256032"/>
+          <p:cNvPr id="21" name="Text 19"/>
+          <p:cNvSpPr/>
+          <p:nvPr/>
+        </p:nvSpPr>
+        <p:spPr>
+          <a:xfrm>
+            <a:off x="7799832" y="4645152"/>
+            <a:ext cx="3145536" cy="256032"/>
           </a:xfrm>
           <a:prstGeom prst="rect">
             <a:avLst/>
@@ -6663,7 +7431,7 @@
                 <a:ea typeface="Aptos" pitchFamily="34" charset="-122"/>
                 <a:cs typeface="Aptos" pitchFamily="34" charset="-120"/>
               </a:rPr>
-              <a:t>Use this for</a:t>
+              <a:t>How to validate</a:t>
             </a:r>
             <a:endParaRPr lang="en-US" sz="1300" dirty="0"/>
           </a:p>
@@ -6671,14 +7439,14 @@
       </p:sp>
       <p:sp>
         <p:nvSpPr>
-          <p:cNvPr id="17" name="Text 15"/>
-          <p:cNvSpPr/>
-          <p:nvPr/>
-        </p:nvSpPr>
-        <p:spPr>
-          <a:xfrm>
-            <a:off x="8074152" y="4023360"/>
-            <a:ext cx="2825496" cy="1097280"/>
+          <p:cNvPr id="22" name="Text 20"/>
+          <p:cNvSpPr/>
+          <p:nvPr/>
+        </p:nvSpPr>
+        <p:spPr>
+          <a:xfrm>
+            <a:off x="7799832" y="5001768"/>
+            <a:ext cx="3145536" cy="502920"/>
           </a:xfrm>
           <a:prstGeom prst="rect">
             <a:avLst/>
@@ -6704,7 +7472,7 @@
                 <a:ea typeface="Aptos" pitchFamily="34" charset="-122"/>
                 <a:cs typeface="Aptos" pitchFamily="34" charset="-120"/>
               </a:rPr>
-              <a:t>Connect the concept to public health decisions, safeguards, documentation, or implementation work.</a:t>
+              <a:t>Connect the concept to data quality, model performance, validation evidence, monitoring measures, and decisions that remain under human control.</a:t>
             </a:r>
             <a:endParaRPr lang="en-US" sz="1550" dirty="0"/>
           </a:p>
@@ -6878,8 +7646,8 @@
         </p:nvSpPr>
         <p:spPr>
           <a:xfrm>
-            <a:off x="9966960" y="6537960"/>
-            <a:ext cx="1645920" cy="201168"/>
+            <a:off x="9646920" y="6537960"/>
+            <a:ext cx="1965960" cy="201168"/>
           </a:xfrm>
           <a:prstGeom prst="rect">
             <a:avLst/>
@@ -6903,7 +7671,7 @@
                 <a:ea typeface="Aptos" pitchFamily="34" charset="-122"/>
                 <a:cs typeface="Aptos" pitchFamily="34" charset="-120"/>
               </a:rPr>
-              <a:t>Â© Paula Soper</a:t>
+              <a:t>Copyright Paula Soper</a:t>
             </a:r>
             <a:endParaRPr lang="en-US" sz="800" dirty="0"/>
           </a:p>
@@ -6998,7 +7766,7 @@
         <p:spPr>
           <a:xfrm>
             <a:off x="868680" y="1508760"/>
-            <a:ext cx="6537960" cy="4160520"/>
+            <a:ext cx="6309360" cy="4160520"/>
           </a:xfrm>
           <a:prstGeom prst="rect">
             <a:avLst/>
@@ -7049,12 +7817,12 @@
         </p:nvSpPr>
         <p:spPr>
           <a:xfrm>
-            <a:off x="7909560" y="1417320"/>
-            <a:ext cx="3154680" cy="1828800"/>
+            <a:off x="7635240" y="1325880"/>
+            <a:ext cx="3474720" cy="1325880"/>
           </a:xfrm>
           <a:prstGeom prst="roundRect">
             <a:avLst>
-              <a:gd name="adj" fmla="val 6000"/>
+              <a:gd name="adj" fmla="val 8276"/>
             </a:avLst>
           </a:prstGeom>
           <a:solidFill>
@@ -7076,8 +7844,8 @@
         </p:nvSpPr>
         <p:spPr>
           <a:xfrm>
-            <a:off x="8074152" y="1563624"/>
-            <a:ext cx="2825496" cy="256032"/>
+            <a:off x="7799832" y="1472184"/>
+            <a:ext cx="3145536" cy="256032"/>
           </a:xfrm>
           <a:prstGeom prst="rect">
             <a:avLst/>
@@ -7101,7 +7869,7 @@
                 <a:ea typeface="Aptos" pitchFamily="34" charset="-122"/>
                 <a:cs typeface="Aptos" pitchFamily="34" charset="-120"/>
               </a:rPr>
-              <a:t>Key idea</a:t>
+              <a:t>Data decision</a:t>
             </a:r>
             <a:endParaRPr lang="en-US" sz="1300" dirty="0"/>
           </a:p>
@@ -7115,8 +7883,8 @@
         </p:nvSpPr>
         <p:spPr>
           <a:xfrm>
-            <a:off x="8074152" y="1920240"/>
-            <a:ext cx="2825496" cy="1188720"/>
+            <a:off x="7799832" y="1828800"/>
+            <a:ext cx="3145536" cy="685800"/>
           </a:xfrm>
           <a:prstGeom prst="rect">
             <a:avLst/>
@@ -7156,15 +7924,206 @@
         </p:nvSpPr>
         <p:spPr>
           <a:xfrm>
-            <a:off x="7909560" y="3520440"/>
-            <a:ext cx="3154680" cy="1737360"/>
+            <a:off x="7635240" y="2788920"/>
+            <a:ext cx="3474720" cy="1536192"/>
           </a:xfrm>
           <a:prstGeom prst="roundRect">
             <a:avLst>
-              <a:gd name="adj" fmla="val 6316"/>
+              <a:gd name="adj" fmla="val 7143"/>
             </a:avLst>
           </a:prstGeom>
           <a:solidFill>
+            <a:srgbClr val="FFFFFF">
+              <a:alpha val="88000"/>
+            </a:srgbClr>
+          </a:solidFill>
+          <a:ln w="12700">
+            <a:solidFill>
+              <a:srgbClr val="D6E8F2"/>
+            </a:solidFill>
+            <a:prstDash val="solid"/>
+          </a:ln>
+        </p:spPr>
+      </p:sp>
+      <p:sp>
+        <p:nvSpPr>
+          <p:cNvPr id="14" name="Shape 12"/>
+          <p:cNvSpPr/>
+          <p:nvPr/>
+        </p:nvSpPr>
+        <p:spPr>
+          <a:xfrm>
+            <a:off x="8138160" y="3474720"/>
+            <a:ext cx="256032" cy="411480"/>
+          </a:xfrm>
+          <a:prstGeom prst="rect">
+            <a:avLst/>
+          </a:prstGeom>
+          <a:solidFill>
+            <a:srgbClr val="0068B7"/>
+          </a:solidFill>
+          <a:ln w="12700">
+            <a:solidFill>
+              <a:srgbClr val="0068B7"/>
+            </a:solidFill>
+            <a:prstDash val="solid"/>
+          </a:ln>
+        </p:spPr>
+      </p:sp>
+      <p:sp>
+        <p:nvSpPr>
+          <p:cNvPr id="15" name="Shape 13"/>
+          <p:cNvSpPr/>
+          <p:nvPr/>
+        </p:nvSpPr>
+        <p:spPr>
+          <a:xfrm>
+            <a:off x="8577072" y="3172968"/>
+            <a:ext cx="256032" cy="713232"/>
+          </a:xfrm>
+          <a:prstGeom prst="rect">
+            <a:avLst/>
+          </a:prstGeom>
+          <a:solidFill>
+            <a:srgbClr val="2F8A28"/>
+          </a:solidFill>
+          <a:ln w="12700">
+            <a:solidFill>
+              <a:srgbClr val="2F8A28"/>
+            </a:solidFill>
+            <a:prstDash val="solid"/>
+          </a:ln>
+        </p:spPr>
+      </p:sp>
+      <p:sp>
+        <p:nvSpPr>
+          <p:cNvPr id="16" name="Shape 14"/>
+          <p:cNvSpPr/>
+          <p:nvPr/>
+        </p:nvSpPr>
+        <p:spPr>
+          <a:xfrm>
+            <a:off x="9015984" y="2880360"/>
+            <a:ext cx="256032" cy="1005840"/>
+          </a:xfrm>
+          <a:prstGeom prst="rect">
+            <a:avLst/>
+          </a:prstGeom>
+          <a:solidFill>
+            <a:srgbClr val="D69A2D"/>
+          </a:solidFill>
+          <a:ln w="12700">
+            <a:solidFill>
+              <a:srgbClr val="D69A2D"/>
+            </a:solidFill>
+            <a:prstDash val="solid"/>
+          </a:ln>
+        </p:spPr>
+      </p:sp>
+      <p:sp>
+        <p:nvSpPr>
+          <p:cNvPr id="17" name="Shape 15"/>
+          <p:cNvSpPr/>
+          <p:nvPr/>
+        </p:nvSpPr>
+        <p:spPr>
+          <a:xfrm>
+            <a:off x="9454896" y="3319272"/>
+            <a:ext cx="256032" cy="566928"/>
+          </a:xfrm>
+          <a:prstGeom prst="rect">
+            <a:avLst/>
+          </a:prstGeom>
+          <a:solidFill>
+            <a:srgbClr val="6A4CA3"/>
+          </a:solidFill>
+          <a:ln w="12700">
+            <a:solidFill>
+              <a:srgbClr val="6A4CA3"/>
+            </a:solidFill>
+            <a:prstDash val="solid"/>
+          </a:ln>
+        </p:spPr>
+      </p:sp>
+      <p:sp>
+        <p:nvSpPr>
+          <p:cNvPr id="18" name="Shape 16"/>
+          <p:cNvSpPr/>
+          <p:nvPr/>
+        </p:nvSpPr>
+        <p:spPr>
+          <a:xfrm>
+            <a:off x="8019288" y="3886200"/>
+            <a:ext cx="2706624" cy="0"/>
+          </a:xfrm>
+          <a:prstGeom prst="line">
+            <a:avLst/>
+          </a:prstGeom>
+          <a:noFill/>
+          <a:ln w="15240">
+            <a:solidFill>
+              <a:srgbClr val="003A63"/>
+            </a:solidFill>
+            <a:prstDash val="solid"/>
+          </a:ln>
+        </p:spPr>
+      </p:sp>
+      <p:sp>
+        <p:nvSpPr>
+          <p:cNvPr id="19" name="Text 17"/>
+          <p:cNvSpPr/>
+          <p:nvPr/>
+        </p:nvSpPr>
+        <p:spPr>
+          <a:xfrm>
+            <a:off x="7863840" y="3017520"/>
+            <a:ext cx="3017520" cy="201168"/>
+          </a:xfrm>
+          <a:prstGeom prst="rect">
+            <a:avLst/>
+          </a:prstGeom>
+          <a:noFill/>
+          <a:ln/>
+        </p:spPr>
+        <p:txBody>
+          <a:bodyPr wrap="square" lIns="0" tIns="0" rIns="0" bIns="0" rtlCol="0" anchor="ctr"/>
+          <a:lstStyle/>
+          <a:p>
+            <a:pPr algn="ctr" indent="0" marL="0">
+              <a:buNone/>
+            </a:pPr>
+            <a:r>
+              <a:rPr lang="en-US" sz="1050" b="1" dirty="0">
+                <a:solidFill>
+                  <a:srgbClr val="003A63"/>
+                </a:solidFill>
+                <a:latin typeface="Aptos" pitchFamily="34" charset="0"/>
+                <a:ea typeface="Aptos" pitchFamily="34" charset="-122"/>
+                <a:cs typeface="Aptos" pitchFamily="34" charset="-120"/>
+              </a:rPr>
+              <a:t>Measure and monitor</a:t>
+            </a:r>
+            <a:endParaRPr lang="en-US" sz="1050" dirty="0"/>
+          </a:p>
+        </p:txBody>
+      </p:sp>
+      <p:sp>
+        <p:nvSpPr>
+          <p:cNvPr id="20" name="Shape 18"/>
+          <p:cNvSpPr/>
+          <p:nvPr/>
+        </p:nvSpPr>
+        <p:spPr>
+          <a:xfrm>
+            <a:off x="7635240" y="4498848"/>
+            <a:ext cx="3474720" cy="1143000"/>
+          </a:xfrm>
+          <a:prstGeom prst="roundRect">
+            <a:avLst>
+              <a:gd name="adj" fmla="val 9600"/>
+            </a:avLst>
+          </a:prstGeom>
+          <a:solidFill>
             <a:srgbClr val="EAF6F8"/>
           </a:solidFill>
           <a:ln w="12700">
@@ -7177,14 +8136,14 @@
       </p:sp>
       <p:sp>
         <p:nvSpPr>
-          <p:cNvPr id="14" name="Text 12"/>
-          <p:cNvSpPr/>
-          <p:nvPr/>
-        </p:nvSpPr>
-        <p:spPr>
-          <a:xfrm>
-            <a:off x="8074152" y="3666744"/>
-            <a:ext cx="2825496" cy="256032"/>
+          <p:cNvPr id="21" name="Text 19"/>
+          <p:cNvSpPr/>
+          <p:nvPr/>
+        </p:nvSpPr>
+        <p:spPr>
+          <a:xfrm>
+            <a:off x="7799832" y="4645152"/>
+            <a:ext cx="3145536" cy="256032"/>
           </a:xfrm>
           <a:prstGeom prst="rect">
             <a:avLst/>
@@ -7208,7 +8167,7 @@
                 <a:ea typeface="Aptos" pitchFamily="34" charset="-122"/>
                 <a:cs typeface="Aptos" pitchFamily="34" charset="-120"/>
               </a:rPr>
-              <a:t>Use this for</a:t>
+              <a:t>How to validate</a:t>
             </a:r>
             <a:endParaRPr lang="en-US" sz="1300" dirty="0"/>
           </a:p>
@@ -7216,14 +8175,14 @@
       </p:sp>
       <p:sp>
         <p:nvSpPr>
-          <p:cNvPr id="15" name="Text 13"/>
-          <p:cNvSpPr/>
-          <p:nvPr/>
-        </p:nvSpPr>
-        <p:spPr>
-          <a:xfrm>
-            <a:off x="8074152" y="4023360"/>
-            <a:ext cx="2825496" cy="1097280"/>
+          <p:cNvPr id="22" name="Text 20"/>
+          <p:cNvSpPr/>
+          <p:nvPr/>
+        </p:nvSpPr>
+        <p:spPr>
+          <a:xfrm>
+            <a:off x="7799832" y="5001768"/>
+            <a:ext cx="3145536" cy="502920"/>
           </a:xfrm>
           <a:prstGeom prst="rect">
             <a:avLst/>
@@ -7249,7 +8208,7 @@
                 <a:ea typeface="Aptos" pitchFamily="34" charset="-122"/>
                 <a:cs typeface="Aptos" pitchFamily="34" charset="-120"/>
               </a:rPr>
-              <a:t>Connect the concept to public health decisions, safeguards, documentation, or implementation work.</a:t>
+              <a:t>Connect the concept to data quality, model performance, validation evidence, monitoring measures, and decisions that remain under human control.</a:t>
             </a:r>
             <a:endParaRPr lang="en-US" sz="1550" dirty="0"/>
           </a:p>
@@ -7423,8 +8382,8 @@
         </p:nvSpPr>
         <p:spPr>
           <a:xfrm>
-            <a:off x="9966960" y="6537960"/>
-            <a:ext cx="1645920" cy="201168"/>
+            <a:off x="9646920" y="6537960"/>
+            <a:ext cx="1965960" cy="201168"/>
           </a:xfrm>
           <a:prstGeom prst="rect">
             <a:avLst/>
@@ -7448,7 +8407,7 @@
                 <a:ea typeface="Aptos" pitchFamily="34" charset="-122"/>
                 <a:cs typeface="Aptos" pitchFamily="34" charset="-120"/>
               </a:rPr>
-              <a:t>Â© Paula Soper</a:t>
+              <a:t>Copyright Paula Soper</a:t>
             </a:r>
             <a:endParaRPr lang="en-US" sz="800" dirty="0"/>
           </a:p>
@@ -7495,77 +8454,13 @@
       </p:sp>
       <p:sp>
         <p:nvSpPr>
-          <p:cNvPr id="8" name="Shape 6"/>
+          <p:cNvPr id="8" name="Text 6"/>
           <p:cNvSpPr/>
           <p:nvPr/>
         </p:nvSpPr>
         <p:spPr>
           <a:xfrm>
             <a:off x="640080" y="658368"/>
-            <a:ext cx="420624" cy="420624"/>
-          </a:xfrm>
-          <a:prstGeom prst="ellipse">
-            <a:avLst/>
-          </a:prstGeom>
-          <a:solidFill>
-            <a:srgbClr val="0068B7"/>
-          </a:solidFill>
-          <a:ln w="12700">
-            <a:solidFill>
-              <a:srgbClr val="0068B7"/>
-            </a:solidFill>
-            <a:prstDash val="solid"/>
-          </a:ln>
-        </p:spPr>
-      </p:sp>
-      <p:sp>
-        <p:nvSpPr>
-          <p:cNvPr id="9" name="Text 7"/>
-          <p:cNvSpPr/>
-          <p:nvPr/>
-        </p:nvSpPr>
-        <p:spPr>
-          <a:xfrm>
-            <a:off x="640080" y="731520"/>
-            <a:ext cx="420624" cy="164592"/>
-          </a:xfrm>
-          <a:prstGeom prst="rect">
-            <a:avLst/>
-          </a:prstGeom>
-          <a:noFill/>
-          <a:ln/>
-        </p:spPr>
-        <p:txBody>
-          <a:bodyPr wrap="square" lIns="0" tIns="0" rIns="0" bIns="0" rtlCol="0" anchor="ctr"/>
-          <a:lstStyle/>
-          <a:p>
-            <a:pPr algn="ctr" indent="0" marL="0">
-              <a:buNone/>
-            </a:pPr>
-            <a:r>
-              <a:rPr lang="en-US" sz="1100" b="1" dirty="0">
-                <a:solidFill>
-                  <a:srgbClr val="FFFFFF"/>
-                </a:solidFill>
-                <a:latin typeface="Aptos" pitchFamily="34" charset="0"/>
-                <a:ea typeface="Aptos" pitchFamily="34" charset="-122"/>
-                <a:cs typeface="Aptos" pitchFamily="34" charset="-120"/>
-              </a:rPr>
-              <a:t>10</a:t>
-            </a:r>
-            <a:endParaRPr lang="en-US" sz="1100" dirty="0"/>
-          </a:p>
-        </p:txBody>
-      </p:sp>
-      <p:sp>
-        <p:nvSpPr>
-          <p:cNvPr id="10" name="Text 8"/>
-          <p:cNvSpPr/>
-          <p:nvPr/>
-        </p:nvSpPr>
-        <p:spPr>
-          <a:xfrm>
-            <a:off x="640080" y="621792"/>
             <a:ext cx="10881360" cy="713232"/>
           </a:xfrm>
           <a:prstGeom prst="rect">
@@ -7600,14 +8495,14 @@
       </p:sp>
       <p:sp>
         <p:nvSpPr>
-          <p:cNvPr id="11" name="Text 9"/>
+          <p:cNvPr id="9" name="Text 7"/>
           <p:cNvSpPr/>
           <p:nvPr/>
         </p:nvSpPr>
         <p:spPr>
           <a:xfrm>
             <a:off x="868680" y="1508760"/>
-            <a:ext cx="6537960" cy="4160520"/>
+            <a:ext cx="6309360" cy="4160520"/>
           </a:xfrm>
           <a:prstGeom prst="rect">
             <a:avLst/>
@@ -7666,18 +8561,18 @@
       </p:sp>
       <p:sp>
         <p:nvSpPr>
-          <p:cNvPr id="12" name="Shape 10"/>
-          <p:cNvSpPr/>
-          <p:nvPr/>
-        </p:nvSpPr>
-        <p:spPr>
-          <a:xfrm>
-            <a:off x="7909560" y="1417320"/>
-            <a:ext cx="3154680" cy="1828800"/>
+          <p:cNvPr id="10" name="Shape 8"/>
+          <p:cNvSpPr/>
+          <p:nvPr/>
+        </p:nvSpPr>
+        <p:spPr>
+          <a:xfrm>
+            <a:off x="7635240" y="1325880"/>
+            <a:ext cx="3474720" cy="1325880"/>
           </a:xfrm>
           <a:prstGeom prst="roundRect">
             <a:avLst>
-              <a:gd name="adj" fmla="val 6000"/>
+              <a:gd name="adj" fmla="val 8276"/>
             </a:avLst>
           </a:prstGeom>
           <a:solidFill>
@@ -7693,14 +8588,14 @@
       </p:sp>
       <p:sp>
         <p:nvSpPr>
-          <p:cNvPr id="13" name="Text 11"/>
-          <p:cNvSpPr/>
-          <p:nvPr/>
-        </p:nvSpPr>
-        <p:spPr>
-          <a:xfrm>
-            <a:off x="8074152" y="1563624"/>
-            <a:ext cx="2825496" cy="256032"/>
+          <p:cNvPr id="11" name="Text 9"/>
+          <p:cNvSpPr/>
+          <p:nvPr/>
+        </p:nvSpPr>
+        <p:spPr>
+          <a:xfrm>
+            <a:off x="7799832" y="1472184"/>
+            <a:ext cx="3145536" cy="256032"/>
           </a:xfrm>
           <a:prstGeom prst="rect">
             <a:avLst/>
@@ -7724,7 +8619,7 @@
                 <a:ea typeface="Aptos" pitchFamily="34" charset="-122"/>
                 <a:cs typeface="Aptos" pitchFamily="34" charset="-120"/>
               </a:rPr>
-              <a:t>Key idea</a:t>
+              <a:t>Data decision</a:t>
             </a:r>
             <a:endParaRPr lang="en-US" sz="1300" dirty="0"/>
           </a:p>
@@ -7732,14 +8627,14 @@
       </p:sp>
       <p:sp>
         <p:nvSpPr>
-          <p:cNvPr id="14" name="Text 12"/>
-          <p:cNvSpPr/>
-          <p:nvPr/>
-        </p:nvSpPr>
-        <p:spPr>
-          <a:xfrm>
-            <a:off x="8074152" y="1920240"/>
-            <a:ext cx="2825496" cy="1188720"/>
+          <p:cNvPr id="12" name="Text 10"/>
+          <p:cNvSpPr/>
+          <p:nvPr/>
+        </p:nvSpPr>
+        <p:spPr>
+          <a:xfrm>
+            <a:off x="7799832" y="1828800"/>
+            <a:ext cx="3145536" cy="685800"/>
           </a:xfrm>
           <a:prstGeom prst="rect">
             <a:avLst/>
@@ -7773,21 +8668,212 @@
       </p:sp>
       <p:sp>
         <p:nvSpPr>
-          <p:cNvPr id="15" name="Shape 13"/>
-          <p:cNvSpPr/>
-          <p:nvPr/>
-        </p:nvSpPr>
-        <p:spPr>
-          <a:xfrm>
-            <a:off x="7909560" y="3520440"/>
-            <a:ext cx="3154680" cy="1737360"/>
+          <p:cNvPr id="13" name="Shape 11"/>
+          <p:cNvSpPr/>
+          <p:nvPr/>
+        </p:nvSpPr>
+        <p:spPr>
+          <a:xfrm>
+            <a:off x="7635240" y="2788920"/>
+            <a:ext cx="3474720" cy="1536192"/>
           </a:xfrm>
           <a:prstGeom prst="roundRect">
             <a:avLst>
-              <a:gd name="adj" fmla="val 6316"/>
+              <a:gd name="adj" fmla="val 7143"/>
             </a:avLst>
           </a:prstGeom>
           <a:solidFill>
+            <a:srgbClr val="FFFFFF">
+              <a:alpha val="88000"/>
+            </a:srgbClr>
+          </a:solidFill>
+          <a:ln w="12700">
+            <a:solidFill>
+              <a:srgbClr val="D6E8F2"/>
+            </a:solidFill>
+            <a:prstDash val="solid"/>
+          </a:ln>
+        </p:spPr>
+      </p:sp>
+      <p:sp>
+        <p:nvSpPr>
+          <p:cNvPr id="14" name="Shape 12"/>
+          <p:cNvSpPr/>
+          <p:nvPr/>
+        </p:nvSpPr>
+        <p:spPr>
+          <a:xfrm>
+            <a:off x="8138160" y="3474720"/>
+            <a:ext cx="256032" cy="411480"/>
+          </a:xfrm>
+          <a:prstGeom prst="rect">
+            <a:avLst/>
+          </a:prstGeom>
+          <a:solidFill>
+            <a:srgbClr val="0068B7"/>
+          </a:solidFill>
+          <a:ln w="12700">
+            <a:solidFill>
+              <a:srgbClr val="0068B7"/>
+            </a:solidFill>
+            <a:prstDash val="solid"/>
+          </a:ln>
+        </p:spPr>
+      </p:sp>
+      <p:sp>
+        <p:nvSpPr>
+          <p:cNvPr id="15" name="Shape 13"/>
+          <p:cNvSpPr/>
+          <p:nvPr/>
+        </p:nvSpPr>
+        <p:spPr>
+          <a:xfrm>
+            <a:off x="8577072" y="3172968"/>
+            <a:ext cx="256032" cy="713232"/>
+          </a:xfrm>
+          <a:prstGeom prst="rect">
+            <a:avLst/>
+          </a:prstGeom>
+          <a:solidFill>
+            <a:srgbClr val="2F8A28"/>
+          </a:solidFill>
+          <a:ln w="12700">
+            <a:solidFill>
+              <a:srgbClr val="2F8A28"/>
+            </a:solidFill>
+            <a:prstDash val="solid"/>
+          </a:ln>
+        </p:spPr>
+      </p:sp>
+      <p:sp>
+        <p:nvSpPr>
+          <p:cNvPr id="16" name="Shape 14"/>
+          <p:cNvSpPr/>
+          <p:nvPr/>
+        </p:nvSpPr>
+        <p:spPr>
+          <a:xfrm>
+            <a:off x="9015984" y="2880360"/>
+            <a:ext cx="256032" cy="1005840"/>
+          </a:xfrm>
+          <a:prstGeom prst="rect">
+            <a:avLst/>
+          </a:prstGeom>
+          <a:solidFill>
+            <a:srgbClr val="D69A2D"/>
+          </a:solidFill>
+          <a:ln w="12700">
+            <a:solidFill>
+              <a:srgbClr val="D69A2D"/>
+            </a:solidFill>
+            <a:prstDash val="solid"/>
+          </a:ln>
+        </p:spPr>
+      </p:sp>
+      <p:sp>
+        <p:nvSpPr>
+          <p:cNvPr id="17" name="Shape 15"/>
+          <p:cNvSpPr/>
+          <p:nvPr/>
+        </p:nvSpPr>
+        <p:spPr>
+          <a:xfrm>
+            <a:off x="9454896" y="3319272"/>
+            <a:ext cx="256032" cy="566928"/>
+          </a:xfrm>
+          <a:prstGeom prst="rect">
+            <a:avLst/>
+          </a:prstGeom>
+          <a:solidFill>
+            <a:srgbClr val="6A4CA3"/>
+          </a:solidFill>
+          <a:ln w="12700">
+            <a:solidFill>
+              <a:srgbClr val="6A4CA3"/>
+            </a:solidFill>
+            <a:prstDash val="solid"/>
+          </a:ln>
+        </p:spPr>
+      </p:sp>
+      <p:sp>
+        <p:nvSpPr>
+          <p:cNvPr id="18" name="Shape 16"/>
+          <p:cNvSpPr/>
+          <p:nvPr/>
+        </p:nvSpPr>
+        <p:spPr>
+          <a:xfrm>
+            <a:off x="8019288" y="3886200"/>
+            <a:ext cx="2706624" cy="0"/>
+          </a:xfrm>
+          <a:prstGeom prst="line">
+            <a:avLst/>
+          </a:prstGeom>
+          <a:noFill/>
+          <a:ln w="15240">
+            <a:solidFill>
+              <a:srgbClr val="003A63"/>
+            </a:solidFill>
+            <a:prstDash val="solid"/>
+          </a:ln>
+        </p:spPr>
+      </p:sp>
+      <p:sp>
+        <p:nvSpPr>
+          <p:cNvPr id="19" name="Text 17"/>
+          <p:cNvSpPr/>
+          <p:nvPr/>
+        </p:nvSpPr>
+        <p:spPr>
+          <a:xfrm>
+            <a:off x="7863840" y="3017520"/>
+            <a:ext cx="3017520" cy="201168"/>
+          </a:xfrm>
+          <a:prstGeom prst="rect">
+            <a:avLst/>
+          </a:prstGeom>
+          <a:noFill/>
+          <a:ln/>
+        </p:spPr>
+        <p:txBody>
+          <a:bodyPr wrap="square" lIns="0" tIns="0" rIns="0" bIns="0" rtlCol="0" anchor="ctr"/>
+          <a:lstStyle/>
+          <a:p>
+            <a:pPr algn="ctr" indent="0" marL="0">
+              <a:buNone/>
+            </a:pPr>
+            <a:r>
+              <a:rPr lang="en-US" sz="1050" b="1" dirty="0">
+                <a:solidFill>
+                  <a:srgbClr val="003A63"/>
+                </a:solidFill>
+                <a:latin typeface="Aptos" pitchFamily="34" charset="0"/>
+                <a:ea typeface="Aptos" pitchFamily="34" charset="-122"/>
+                <a:cs typeface="Aptos" pitchFamily="34" charset="-120"/>
+              </a:rPr>
+              <a:t>Measure and monitor</a:t>
+            </a:r>
+            <a:endParaRPr lang="en-US" sz="1050" dirty="0"/>
+          </a:p>
+        </p:txBody>
+      </p:sp>
+      <p:sp>
+        <p:nvSpPr>
+          <p:cNvPr id="20" name="Shape 18"/>
+          <p:cNvSpPr/>
+          <p:nvPr/>
+        </p:nvSpPr>
+        <p:spPr>
+          <a:xfrm>
+            <a:off x="7635240" y="4498848"/>
+            <a:ext cx="3474720" cy="1143000"/>
+          </a:xfrm>
+          <a:prstGeom prst="roundRect">
+            <a:avLst>
+              <a:gd name="adj" fmla="val 9600"/>
+            </a:avLst>
+          </a:prstGeom>
+          <a:solidFill>
             <a:srgbClr val="EAF6F8"/>
           </a:solidFill>
           <a:ln w="12700">
@@ -7800,14 +8886,14 @@
       </p:sp>
       <p:sp>
         <p:nvSpPr>
-          <p:cNvPr id="16" name="Text 14"/>
-          <p:cNvSpPr/>
-          <p:nvPr/>
-        </p:nvSpPr>
-        <p:spPr>
-          <a:xfrm>
-            <a:off x="8074152" y="3666744"/>
-            <a:ext cx="2825496" cy="256032"/>
+          <p:cNvPr id="21" name="Text 19"/>
+          <p:cNvSpPr/>
+          <p:nvPr/>
+        </p:nvSpPr>
+        <p:spPr>
+          <a:xfrm>
+            <a:off x="7799832" y="4645152"/>
+            <a:ext cx="3145536" cy="256032"/>
           </a:xfrm>
           <a:prstGeom prst="rect">
             <a:avLst/>
@@ -7831,7 +8917,7 @@
                 <a:ea typeface="Aptos" pitchFamily="34" charset="-122"/>
                 <a:cs typeface="Aptos" pitchFamily="34" charset="-120"/>
               </a:rPr>
-              <a:t>Use this for</a:t>
+              <a:t>How to validate</a:t>
             </a:r>
             <a:endParaRPr lang="en-US" sz="1300" dirty="0"/>
           </a:p>
@@ -7839,14 +8925,14 @@
       </p:sp>
       <p:sp>
         <p:nvSpPr>
-          <p:cNvPr id="17" name="Text 15"/>
-          <p:cNvSpPr/>
-          <p:nvPr/>
-        </p:nvSpPr>
-        <p:spPr>
-          <a:xfrm>
-            <a:off x="8074152" y="4023360"/>
-            <a:ext cx="2825496" cy="1097280"/>
+          <p:cNvPr id="22" name="Text 20"/>
+          <p:cNvSpPr/>
+          <p:nvPr/>
+        </p:nvSpPr>
+        <p:spPr>
+          <a:xfrm>
+            <a:off x="7799832" y="5001768"/>
+            <a:ext cx="3145536" cy="502920"/>
           </a:xfrm>
           <a:prstGeom prst="rect">
             <a:avLst/>
@@ -7872,7 +8958,7 @@
                 <a:ea typeface="Aptos" pitchFamily="34" charset="-122"/>
                 <a:cs typeface="Aptos" pitchFamily="34" charset="-120"/>
               </a:rPr>
-              <a:t>Connect the concept to public health decisions, safeguards, documentation, or implementation work.</a:t>
+              <a:t>Use the assignment to test whether you can explain the concept, apply it to a realistic public health situation, and identify what would need review before the work moves forward.</a:t>
             </a:r>
             <a:endParaRPr lang="en-US" sz="1550" dirty="0"/>
           </a:p>
@@ -8046,8 +9132,8 @@
         </p:nvSpPr>
         <p:spPr>
           <a:xfrm>
-            <a:off x="9966960" y="6537960"/>
-            <a:ext cx="1645920" cy="201168"/>
+            <a:off x="9646920" y="6537960"/>
+            <a:ext cx="1965960" cy="201168"/>
           </a:xfrm>
           <a:prstGeom prst="rect">
             <a:avLst/>
@@ -8071,7 +9157,7 @@
                 <a:ea typeface="Aptos" pitchFamily="34" charset="-122"/>
                 <a:cs typeface="Aptos" pitchFamily="34" charset="-120"/>
               </a:rPr>
-              <a:t>Â© Paula Soper</a:t>
+              <a:t>Copyright Paula Soper</a:t>
             </a:r>
             <a:endParaRPr lang="en-US" sz="800" dirty="0"/>
           </a:p>
@@ -8118,77 +9204,13 @@
       </p:sp>
       <p:sp>
         <p:nvSpPr>
-          <p:cNvPr id="8" name="Shape 6"/>
+          <p:cNvPr id="8" name="Text 6"/>
           <p:cNvSpPr/>
           <p:nvPr/>
         </p:nvSpPr>
         <p:spPr>
           <a:xfrm>
             <a:off x="640080" y="658368"/>
-            <a:ext cx="420624" cy="420624"/>
-          </a:xfrm>
-          <a:prstGeom prst="ellipse">
-            <a:avLst/>
-          </a:prstGeom>
-          <a:solidFill>
-            <a:srgbClr val="0068B7"/>
-          </a:solidFill>
-          <a:ln w="12700">
-            <a:solidFill>
-              <a:srgbClr val="0068B7"/>
-            </a:solidFill>
-            <a:prstDash val="solid"/>
-          </a:ln>
-        </p:spPr>
-      </p:sp>
-      <p:sp>
-        <p:nvSpPr>
-          <p:cNvPr id="9" name="Text 7"/>
-          <p:cNvSpPr/>
-          <p:nvPr/>
-        </p:nvSpPr>
-        <p:spPr>
-          <a:xfrm>
-            <a:off x="640080" y="731520"/>
-            <a:ext cx="420624" cy="164592"/>
-          </a:xfrm>
-          <a:prstGeom prst="rect">
-            <a:avLst/>
-          </a:prstGeom>
-          <a:noFill/>
-          <a:ln/>
-        </p:spPr>
-        <p:txBody>
-          <a:bodyPr wrap="square" lIns="0" tIns="0" rIns="0" bIns="0" rtlCol="0" anchor="ctr"/>
-          <a:lstStyle/>
-          <a:p>
-            <a:pPr algn="ctr" indent="0" marL="0">
-              <a:buNone/>
-            </a:pPr>
-            <a:r>
-              <a:rPr lang="en-US" sz="1100" b="1" dirty="0">
-                <a:solidFill>
-                  <a:srgbClr val="FFFFFF"/>
-                </a:solidFill>
-                <a:latin typeface="Aptos" pitchFamily="34" charset="0"/>
-                <a:ea typeface="Aptos" pitchFamily="34" charset="-122"/>
-                <a:cs typeface="Aptos" pitchFamily="34" charset="-120"/>
-              </a:rPr>
-              <a:t>11</a:t>
-            </a:r>
-            <a:endParaRPr lang="en-US" sz="1100" dirty="0"/>
-          </a:p>
-        </p:txBody>
-      </p:sp>
-      <p:sp>
-        <p:nvSpPr>
-          <p:cNvPr id="10" name="Text 8"/>
-          <p:cNvSpPr/>
-          <p:nvPr/>
-        </p:nvSpPr>
-        <p:spPr>
-          <a:xfrm>
-            <a:off x="640080" y="621792"/>
             <a:ext cx="10881360" cy="713232"/>
           </a:xfrm>
           <a:prstGeom prst="rect">
@@ -8223,14 +9245,14 @@
       </p:sp>
       <p:sp>
         <p:nvSpPr>
-          <p:cNvPr id="11" name="Text 9"/>
+          <p:cNvPr id="9" name="Text 7"/>
           <p:cNvSpPr/>
           <p:nvPr/>
         </p:nvSpPr>
         <p:spPr>
           <a:xfrm>
             <a:off x="868680" y="1508760"/>
-            <a:ext cx="6537960" cy="4160520"/>
+            <a:ext cx="6309360" cy="4160520"/>
           </a:xfrm>
           <a:prstGeom prst="rect">
             <a:avLst/>
@@ -8289,18 +9311,18 @@
       </p:sp>
       <p:sp>
         <p:nvSpPr>
-          <p:cNvPr id="12" name="Shape 10"/>
-          <p:cNvSpPr/>
-          <p:nvPr/>
-        </p:nvSpPr>
-        <p:spPr>
-          <a:xfrm>
-            <a:off x="7909560" y="1417320"/>
-            <a:ext cx="3154680" cy="1828800"/>
+          <p:cNvPr id="10" name="Shape 8"/>
+          <p:cNvSpPr/>
+          <p:nvPr/>
+        </p:nvSpPr>
+        <p:spPr>
+          <a:xfrm>
+            <a:off x="7635240" y="1325880"/>
+            <a:ext cx="3474720" cy="1325880"/>
           </a:xfrm>
           <a:prstGeom prst="roundRect">
             <a:avLst>
-              <a:gd name="adj" fmla="val 6000"/>
+              <a:gd name="adj" fmla="val 8276"/>
             </a:avLst>
           </a:prstGeom>
           <a:solidFill>
@@ -8316,14 +9338,14 @@
       </p:sp>
       <p:sp>
         <p:nvSpPr>
-          <p:cNvPr id="13" name="Text 11"/>
-          <p:cNvSpPr/>
-          <p:nvPr/>
-        </p:nvSpPr>
-        <p:spPr>
-          <a:xfrm>
-            <a:off x="8074152" y="1563624"/>
-            <a:ext cx="2825496" cy="256032"/>
+          <p:cNvPr id="11" name="Text 9"/>
+          <p:cNvSpPr/>
+          <p:nvPr/>
+        </p:nvSpPr>
+        <p:spPr>
+          <a:xfrm>
+            <a:off x="7799832" y="1472184"/>
+            <a:ext cx="3145536" cy="256032"/>
           </a:xfrm>
           <a:prstGeom prst="rect">
             <a:avLst/>
@@ -8347,7 +9369,7 @@
                 <a:ea typeface="Aptos" pitchFamily="34" charset="-122"/>
                 <a:cs typeface="Aptos" pitchFamily="34" charset="-120"/>
               </a:rPr>
-              <a:t>Key idea</a:t>
+              <a:t>Data decision</a:t>
             </a:r>
             <a:endParaRPr lang="en-US" sz="1300" dirty="0"/>
           </a:p>
@@ -8355,14 +9377,14 @@
       </p:sp>
       <p:sp>
         <p:nvSpPr>
-          <p:cNvPr id="14" name="Text 12"/>
-          <p:cNvSpPr/>
-          <p:nvPr/>
-        </p:nvSpPr>
-        <p:spPr>
-          <a:xfrm>
-            <a:off x="8074152" y="1920240"/>
-            <a:ext cx="2825496" cy="1188720"/>
+          <p:cNvPr id="12" name="Text 10"/>
+          <p:cNvSpPr/>
+          <p:nvPr/>
+        </p:nvSpPr>
+        <p:spPr>
+          <a:xfrm>
+            <a:off x="7799832" y="1828800"/>
+            <a:ext cx="3145536" cy="685800"/>
           </a:xfrm>
           <a:prstGeom prst="rect">
             <a:avLst/>
@@ -8396,21 +9418,212 @@
       </p:sp>
       <p:sp>
         <p:nvSpPr>
-          <p:cNvPr id="15" name="Shape 13"/>
-          <p:cNvSpPr/>
-          <p:nvPr/>
-        </p:nvSpPr>
-        <p:spPr>
-          <a:xfrm>
-            <a:off x="7909560" y="3520440"/>
-            <a:ext cx="3154680" cy="1737360"/>
+          <p:cNvPr id="13" name="Shape 11"/>
+          <p:cNvSpPr/>
+          <p:nvPr/>
+        </p:nvSpPr>
+        <p:spPr>
+          <a:xfrm>
+            <a:off x="7635240" y="2788920"/>
+            <a:ext cx="3474720" cy="1536192"/>
           </a:xfrm>
           <a:prstGeom prst="roundRect">
             <a:avLst>
-              <a:gd name="adj" fmla="val 6316"/>
+              <a:gd name="adj" fmla="val 7143"/>
             </a:avLst>
           </a:prstGeom>
           <a:solidFill>
+            <a:srgbClr val="FFFFFF">
+              <a:alpha val="88000"/>
+            </a:srgbClr>
+          </a:solidFill>
+          <a:ln w="12700">
+            <a:solidFill>
+              <a:srgbClr val="D6E8F2"/>
+            </a:solidFill>
+            <a:prstDash val="solid"/>
+          </a:ln>
+        </p:spPr>
+      </p:sp>
+      <p:sp>
+        <p:nvSpPr>
+          <p:cNvPr id="14" name="Shape 12"/>
+          <p:cNvSpPr/>
+          <p:nvPr/>
+        </p:nvSpPr>
+        <p:spPr>
+          <a:xfrm>
+            <a:off x="8138160" y="3474720"/>
+            <a:ext cx="256032" cy="411480"/>
+          </a:xfrm>
+          <a:prstGeom prst="rect">
+            <a:avLst/>
+          </a:prstGeom>
+          <a:solidFill>
+            <a:srgbClr val="0068B7"/>
+          </a:solidFill>
+          <a:ln w="12700">
+            <a:solidFill>
+              <a:srgbClr val="0068B7"/>
+            </a:solidFill>
+            <a:prstDash val="solid"/>
+          </a:ln>
+        </p:spPr>
+      </p:sp>
+      <p:sp>
+        <p:nvSpPr>
+          <p:cNvPr id="15" name="Shape 13"/>
+          <p:cNvSpPr/>
+          <p:nvPr/>
+        </p:nvSpPr>
+        <p:spPr>
+          <a:xfrm>
+            <a:off x="8577072" y="3172968"/>
+            <a:ext cx="256032" cy="713232"/>
+          </a:xfrm>
+          <a:prstGeom prst="rect">
+            <a:avLst/>
+          </a:prstGeom>
+          <a:solidFill>
+            <a:srgbClr val="2F8A28"/>
+          </a:solidFill>
+          <a:ln w="12700">
+            <a:solidFill>
+              <a:srgbClr val="2F8A28"/>
+            </a:solidFill>
+            <a:prstDash val="solid"/>
+          </a:ln>
+        </p:spPr>
+      </p:sp>
+      <p:sp>
+        <p:nvSpPr>
+          <p:cNvPr id="16" name="Shape 14"/>
+          <p:cNvSpPr/>
+          <p:nvPr/>
+        </p:nvSpPr>
+        <p:spPr>
+          <a:xfrm>
+            <a:off x="9015984" y="2880360"/>
+            <a:ext cx="256032" cy="1005840"/>
+          </a:xfrm>
+          <a:prstGeom prst="rect">
+            <a:avLst/>
+          </a:prstGeom>
+          <a:solidFill>
+            <a:srgbClr val="D69A2D"/>
+          </a:solidFill>
+          <a:ln w="12700">
+            <a:solidFill>
+              <a:srgbClr val="D69A2D"/>
+            </a:solidFill>
+            <a:prstDash val="solid"/>
+          </a:ln>
+        </p:spPr>
+      </p:sp>
+      <p:sp>
+        <p:nvSpPr>
+          <p:cNvPr id="17" name="Shape 15"/>
+          <p:cNvSpPr/>
+          <p:nvPr/>
+        </p:nvSpPr>
+        <p:spPr>
+          <a:xfrm>
+            <a:off x="9454896" y="3319272"/>
+            <a:ext cx="256032" cy="566928"/>
+          </a:xfrm>
+          <a:prstGeom prst="rect">
+            <a:avLst/>
+          </a:prstGeom>
+          <a:solidFill>
+            <a:srgbClr val="6A4CA3"/>
+          </a:solidFill>
+          <a:ln w="12700">
+            <a:solidFill>
+              <a:srgbClr val="6A4CA3"/>
+            </a:solidFill>
+            <a:prstDash val="solid"/>
+          </a:ln>
+        </p:spPr>
+      </p:sp>
+      <p:sp>
+        <p:nvSpPr>
+          <p:cNvPr id="18" name="Shape 16"/>
+          <p:cNvSpPr/>
+          <p:nvPr/>
+        </p:nvSpPr>
+        <p:spPr>
+          <a:xfrm>
+            <a:off x="8019288" y="3886200"/>
+            <a:ext cx="2706624" cy="0"/>
+          </a:xfrm>
+          <a:prstGeom prst="line">
+            <a:avLst/>
+          </a:prstGeom>
+          <a:noFill/>
+          <a:ln w="15240">
+            <a:solidFill>
+              <a:srgbClr val="003A63"/>
+            </a:solidFill>
+            <a:prstDash val="solid"/>
+          </a:ln>
+        </p:spPr>
+      </p:sp>
+      <p:sp>
+        <p:nvSpPr>
+          <p:cNvPr id="19" name="Text 17"/>
+          <p:cNvSpPr/>
+          <p:nvPr/>
+        </p:nvSpPr>
+        <p:spPr>
+          <a:xfrm>
+            <a:off x="7863840" y="3017520"/>
+            <a:ext cx="3017520" cy="201168"/>
+          </a:xfrm>
+          <a:prstGeom prst="rect">
+            <a:avLst/>
+          </a:prstGeom>
+          <a:noFill/>
+          <a:ln/>
+        </p:spPr>
+        <p:txBody>
+          <a:bodyPr wrap="square" lIns="0" tIns="0" rIns="0" bIns="0" rtlCol="0" anchor="ctr"/>
+          <a:lstStyle/>
+          <a:p>
+            <a:pPr algn="ctr" indent="0" marL="0">
+              <a:buNone/>
+            </a:pPr>
+            <a:r>
+              <a:rPr lang="en-US" sz="1050" b="1" dirty="0">
+                <a:solidFill>
+                  <a:srgbClr val="003A63"/>
+                </a:solidFill>
+                <a:latin typeface="Aptos" pitchFamily="34" charset="0"/>
+                <a:ea typeface="Aptos" pitchFamily="34" charset="-122"/>
+                <a:cs typeface="Aptos" pitchFamily="34" charset="-120"/>
+              </a:rPr>
+              <a:t>Measure and monitor</a:t>
+            </a:r>
+            <a:endParaRPr lang="en-US" sz="1050" dirty="0"/>
+          </a:p>
+        </p:txBody>
+      </p:sp>
+      <p:sp>
+        <p:nvSpPr>
+          <p:cNvPr id="20" name="Shape 18"/>
+          <p:cNvSpPr/>
+          <p:nvPr/>
+        </p:nvSpPr>
+        <p:spPr>
+          <a:xfrm>
+            <a:off x="7635240" y="4498848"/>
+            <a:ext cx="3474720" cy="1143000"/>
+          </a:xfrm>
+          <a:prstGeom prst="roundRect">
+            <a:avLst>
+              <a:gd name="adj" fmla="val 9600"/>
+            </a:avLst>
+          </a:prstGeom>
+          <a:solidFill>
             <a:srgbClr val="EAF6F8"/>
           </a:solidFill>
           <a:ln w="12700">
@@ -8423,14 +9636,14 @@
       </p:sp>
       <p:sp>
         <p:nvSpPr>
-          <p:cNvPr id="16" name="Text 14"/>
-          <p:cNvSpPr/>
-          <p:nvPr/>
-        </p:nvSpPr>
-        <p:spPr>
-          <a:xfrm>
-            <a:off x="8074152" y="3666744"/>
-            <a:ext cx="2825496" cy="256032"/>
+          <p:cNvPr id="21" name="Text 19"/>
+          <p:cNvSpPr/>
+          <p:nvPr/>
+        </p:nvSpPr>
+        <p:spPr>
+          <a:xfrm>
+            <a:off x="7799832" y="4645152"/>
+            <a:ext cx="3145536" cy="256032"/>
           </a:xfrm>
           <a:prstGeom prst="rect">
             <a:avLst/>
@@ -8454,7 +9667,7 @@
                 <a:ea typeface="Aptos" pitchFamily="34" charset="-122"/>
                 <a:cs typeface="Aptos" pitchFamily="34" charset="-120"/>
               </a:rPr>
-              <a:t>Use this for</a:t>
+              <a:t>How to validate</a:t>
             </a:r>
             <a:endParaRPr lang="en-US" sz="1300" dirty="0"/>
           </a:p>
@@ -8462,14 +9675,14 @@
       </p:sp>
       <p:sp>
         <p:nvSpPr>
-          <p:cNvPr id="17" name="Text 15"/>
-          <p:cNvSpPr/>
-          <p:nvPr/>
-        </p:nvSpPr>
-        <p:spPr>
-          <a:xfrm>
-            <a:off x="8074152" y="4023360"/>
-            <a:ext cx="2825496" cy="1097280"/>
+          <p:cNvPr id="22" name="Text 20"/>
+          <p:cNvSpPr/>
+          <p:nvPr/>
+        </p:nvSpPr>
+        <p:spPr>
+          <a:xfrm>
+            <a:off x="7799832" y="5001768"/>
+            <a:ext cx="3145536" cy="502920"/>
           </a:xfrm>
           <a:prstGeom prst="rect">
             <a:avLst/>
@@ -8495,7 +9708,7 @@
                 <a:ea typeface="Aptos" pitchFamily="34" charset="-122"/>
                 <a:cs typeface="Aptos" pitchFamily="34" charset="-120"/>
               </a:rPr>
-              <a:t>Connect the concept to public health decisions, safeguards, documentation, or implementation work.</a:t>
+              <a:t>Connect the concept to data quality, model performance, validation evidence, monitoring measures, and decisions that remain under human control.</a:t>
             </a:r>
             <a:endParaRPr lang="en-US" sz="1550" dirty="0"/>
           </a:p>
@@ -8669,8 +9882,8 @@
         </p:nvSpPr>
         <p:spPr>
           <a:xfrm>
-            <a:off x="9966960" y="6537960"/>
-            <a:ext cx="1645920" cy="201168"/>
+            <a:off x="9646920" y="6537960"/>
+            <a:ext cx="1965960" cy="201168"/>
           </a:xfrm>
           <a:prstGeom prst="rect">
             <a:avLst/>
@@ -8694,7 +9907,7 @@
                 <a:ea typeface="Aptos" pitchFamily="34" charset="-122"/>
                 <a:cs typeface="Aptos" pitchFamily="34" charset="-120"/>
               </a:rPr>
-              <a:t>Â© Paula Soper</a:t>
+              <a:t>Copyright Paula Soper</a:t>
             </a:r>
             <a:endParaRPr lang="en-US" sz="800" dirty="0"/>
           </a:p>
@@ -8789,7 +10002,7 @@
         <p:spPr>
           <a:xfrm>
             <a:off x="868680" y="1508760"/>
-            <a:ext cx="6537960" cy="4160520"/>
+            <a:ext cx="6309360" cy="4160520"/>
           </a:xfrm>
           <a:prstGeom prst="rect">
             <a:avLst/>
@@ -8826,12 +10039,12 @@
         </p:nvSpPr>
         <p:spPr>
           <a:xfrm>
-            <a:off x="7909560" y="1417320"/>
-            <a:ext cx="3154680" cy="1828800"/>
+            <a:off x="7635240" y="1325880"/>
+            <a:ext cx="3474720" cy="1325880"/>
           </a:xfrm>
           <a:prstGeom prst="roundRect">
             <a:avLst>
-              <a:gd name="adj" fmla="val 6000"/>
+              <a:gd name="adj" fmla="val 8276"/>
             </a:avLst>
           </a:prstGeom>
           <a:solidFill>
@@ -8853,8 +10066,8 @@
         </p:nvSpPr>
         <p:spPr>
           <a:xfrm>
-            <a:off x="8074152" y="1563624"/>
-            <a:ext cx="2825496" cy="256032"/>
+            <a:off x="7799832" y="1472184"/>
+            <a:ext cx="3145536" cy="256032"/>
           </a:xfrm>
           <a:prstGeom prst="rect">
             <a:avLst/>
@@ -8878,7 +10091,7 @@
                 <a:ea typeface="Aptos" pitchFamily="34" charset="-122"/>
                 <a:cs typeface="Aptos" pitchFamily="34" charset="-120"/>
               </a:rPr>
-              <a:t>Key idea</a:t>
+              <a:t>Data decision</a:t>
             </a:r>
             <a:endParaRPr lang="en-US" sz="1300" dirty="0"/>
           </a:p>
@@ -8892,8 +10105,8 @@
         </p:nvSpPr>
         <p:spPr>
           <a:xfrm>
-            <a:off x="8074152" y="1920240"/>
-            <a:ext cx="2825496" cy="1188720"/>
+            <a:off x="7799832" y="1828800"/>
+            <a:ext cx="3145536" cy="685800"/>
           </a:xfrm>
           <a:prstGeom prst="rect">
             <a:avLst/>
@@ -8933,15 +10146,206 @@
         </p:nvSpPr>
         <p:spPr>
           <a:xfrm>
-            <a:off x="7909560" y="3520440"/>
-            <a:ext cx="3154680" cy="1737360"/>
+            <a:off x="7635240" y="2788920"/>
+            <a:ext cx="3474720" cy="1536192"/>
           </a:xfrm>
           <a:prstGeom prst="roundRect">
             <a:avLst>
-              <a:gd name="adj" fmla="val 6316"/>
+              <a:gd name="adj" fmla="val 7143"/>
             </a:avLst>
           </a:prstGeom>
           <a:solidFill>
+            <a:srgbClr val="FFFFFF">
+              <a:alpha val="88000"/>
+            </a:srgbClr>
+          </a:solidFill>
+          <a:ln w="12700">
+            <a:solidFill>
+              <a:srgbClr val="D6E8F2"/>
+            </a:solidFill>
+            <a:prstDash val="solid"/>
+          </a:ln>
+        </p:spPr>
+      </p:sp>
+      <p:sp>
+        <p:nvSpPr>
+          <p:cNvPr id="14" name="Shape 12"/>
+          <p:cNvSpPr/>
+          <p:nvPr/>
+        </p:nvSpPr>
+        <p:spPr>
+          <a:xfrm>
+            <a:off x="8138160" y="3474720"/>
+            <a:ext cx="256032" cy="411480"/>
+          </a:xfrm>
+          <a:prstGeom prst="rect">
+            <a:avLst/>
+          </a:prstGeom>
+          <a:solidFill>
+            <a:srgbClr val="0068B7"/>
+          </a:solidFill>
+          <a:ln w="12700">
+            <a:solidFill>
+              <a:srgbClr val="0068B7"/>
+            </a:solidFill>
+            <a:prstDash val="solid"/>
+          </a:ln>
+        </p:spPr>
+      </p:sp>
+      <p:sp>
+        <p:nvSpPr>
+          <p:cNvPr id="15" name="Shape 13"/>
+          <p:cNvSpPr/>
+          <p:nvPr/>
+        </p:nvSpPr>
+        <p:spPr>
+          <a:xfrm>
+            <a:off x="8577072" y="3172968"/>
+            <a:ext cx="256032" cy="713232"/>
+          </a:xfrm>
+          <a:prstGeom prst="rect">
+            <a:avLst/>
+          </a:prstGeom>
+          <a:solidFill>
+            <a:srgbClr val="2F8A28"/>
+          </a:solidFill>
+          <a:ln w="12700">
+            <a:solidFill>
+              <a:srgbClr val="2F8A28"/>
+            </a:solidFill>
+            <a:prstDash val="solid"/>
+          </a:ln>
+        </p:spPr>
+      </p:sp>
+      <p:sp>
+        <p:nvSpPr>
+          <p:cNvPr id="16" name="Shape 14"/>
+          <p:cNvSpPr/>
+          <p:nvPr/>
+        </p:nvSpPr>
+        <p:spPr>
+          <a:xfrm>
+            <a:off x="9015984" y="2880360"/>
+            <a:ext cx="256032" cy="1005840"/>
+          </a:xfrm>
+          <a:prstGeom prst="rect">
+            <a:avLst/>
+          </a:prstGeom>
+          <a:solidFill>
+            <a:srgbClr val="D69A2D"/>
+          </a:solidFill>
+          <a:ln w="12700">
+            <a:solidFill>
+              <a:srgbClr val="D69A2D"/>
+            </a:solidFill>
+            <a:prstDash val="solid"/>
+          </a:ln>
+        </p:spPr>
+      </p:sp>
+      <p:sp>
+        <p:nvSpPr>
+          <p:cNvPr id="17" name="Shape 15"/>
+          <p:cNvSpPr/>
+          <p:nvPr/>
+        </p:nvSpPr>
+        <p:spPr>
+          <a:xfrm>
+            <a:off x="9454896" y="3319272"/>
+            <a:ext cx="256032" cy="566928"/>
+          </a:xfrm>
+          <a:prstGeom prst="rect">
+            <a:avLst/>
+          </a:prstGeom>
+          <a:solidFill>
+            <a:srgbClr val="6A4CA3"/>
+          </a:solidFill>
+          <a:ln w="12700">
+            <a:solidFill>
+              <a:srgbClr val="6A4CA3"/>
+            </a:solidFill>
+            <a:prstDash val="solid"/>
+          </a:ln>
+        </p:spPr>
+      </p:sp>
+      <p:sp>
+        <p:nvSpPr>
+          <p:cNvPr id="18" name="Shape 16"/>
+          <p:cNvSpPr/>
+          <p:nvPr/>
+        </p:nvSpPr>
+        <p:spPr>
+          <a:xfrm>
+            <a:off x="8019288" y="3886200"/>
+            <a:ext cx="2706624" cy="0"/>
+          </a:xfrm>
+          <a:prstGeom prst="line">
+            <a:avLst/>
+          </a:prstGeom>
+          <a:noFill/>
+          <a:ln w="15240">
+            <a:solidFill>
+              <a:srgbClr val="003A63"/>
+            </a:solidFill>
+            <a:prstDash val="solid"/>
+          </a:ln>
+        </p:spPr>
+      </p:sp>
+      <p:sp>
+        <p:nvSpPr>
+          <p:cNvPr id="19" name="Text 17"/>
+          <p:cNvSpPr/>
+          <p:nvPr/>
+        </p:nvSpPr>
+        <p:spPr>
+          <a:xfrm>
+            <a:off x="7863840" y="3017520"/>
+            <a:ext cx="3017520" cy="201168"/>
+          </a:xfrm>
+          <a:prstGeom prst="rect">
+            <a:avLst/>
+          </a:prstGeom>
+          <a:noFill/>
+          <a:ln/>
+        </p:spPr>
+        <p:txBody>
+          <a:bodyPr wrap="square" lIns="0" tIns="0" rIns="0" bIns="0" rtlCol="0" anchor="ctr"/>
+          <a:lstStyle/>
+          <a:p>
+            <a:pPr algn="ctr" indent="0" marL="0">
+              <a:buNone/>
+            </a:pPr>
+            <a:r>
+              <a:rPr lang="en-US" sz="1050" b="1" dirty="0">
+                <a:solidFill>
+                  <a:srgbClr val="003A63"/>
+                </a:solidFill>
+                <a:latin typeface="Aptos" pitchFamily="34" charset="0"/>
+                <a:ea typeface="Aptos" pitchFamily="34" charset="-122"/>
+                <a:cs typeface="Aptos" pitchFamily="34" charset="-120"/>
+              </a:rPr>
+              <a:t>Measure and monitor</a:t>
+            </a:r>
+            <a:endParaRPr lang="en-US" sz="1050" dirty="0"/>
+          </a:p>
+        </p:txBody>
+      </p:sp>
+      <p:sp>
+        <p:nvSpPr>
+          <p:cNvPr id="20" name="Shape 18"/>
+          <p:cNvSpPr/>
+          <p:nvPr/>
+        </p:nvSpPr>
+        <p:spPr>
+          <a:xfrm>
+            <a:off x="7635240" y="4498848"/>
+            <a:ext cx="3474720" cy="1143000"/>
+          </a:xfrm>
+          <a:prstGeom prst="roundRect">
+            <a:avLst>
+              <a:gd name="adj" fmla="val 9600"/>
+            </a:avLst>
+          </a:prstGeom>
+          <a:solidFill>
             <a:srgbClr val="EAF6F8"/>
           </a:solidFill>
           <a:ln w="12700">
@@ -8954,14 +10358,14 @@
       </p:sp>
       <p:sp>
         <p:nvSpPr>
-          <p:cNvPr id="14" name="Text 12"/>
-          <p:cNvSpPr/>
-          <p:nvPr/>
-        </p:nvSpPr>
-        <p:spPr>
-          <a:xfrm>
-            <a:off x="8074152" y="3666744"/>
-            <a:ext cx="2825496" cy="256032"/>
+          <p:cNvPr id="21" name="Text 19"/>
+          <p:cNvSpPr/>
+          <p:nvPr/>
+        </p:nvSpPr>
+        <p:spPr>
+          <a:xfrm>
+            <a:off x="7799832" y="4645152"/>
+            <a:ext cx="3145536" cy="256032"/>
           </a:xfrm>
           <a:prstGeom prst="rect">
             <a:avLst/>
@@ -8985,7 +10389,7 @@
                 <a:ea typeface="Aptos" pitchFamily="34" charset="-122"/>
                 <a:cs typeface="Aptos" pitchFamily="34" charset="-120"/>
               </a:rPr>
-              <a:t>Use this for</a:t>
+              <a:t>How to validate</a:t>
             </a:r>
             <a:endParaRPr lang="en-US" sz="1300" dirty="0"/>
           </a:p>
@@ -8993,14 +10397,14 @@
       </p:sp>
       <p:sp>
         <p:nvSpPr>
-          <p:cNvPr id="15" name="Text 13"/>
-          <p:cNvSpPr/>
-          <p:nvPr/>
-        </p:nvSpPr>
-        <p:spPr>
-          <a:xfrm>
-            <a:off x="8074152" y="4023360"/>
-            <a:ext cx="2825496" cy="1097280"/>
+          <p:cNvPr id="22" name="Text 20"/>
+          <p:cNvSpPr/>
+          <p:nvPr/>
+        </p:nvSpPr>
+        <p:spPr>
+          <a:xfrm>
+            <a:off x="7799832" y="5001768"/>
+            <a:ext cx="3145536" cy="502920"/>
           </a:xfrm>
           <a:prstGeom prst="rect">
             <a:avLst/>
@@ -9026,7 +10430,7 @@
                 <a:ea typeface="Aptos" pitchFamily="34" charset="-122"/>
                 <a:cs typeface="Aptos" pitchFamily="34" charset="-120"/>
               </a:rPr>
-              <a:t>Connect the concept to public health decisions, safeguards, documentation, or implementation work.</a:t>
+              <a:t>Connect the concept to data quality, model performance, validation evidence, monitoring measures, and decisions that remain under human control.</a:t>
             </a:r>
             <a:endParaRPr lang="en-US" sz="1550" dirty="0"/>
           </a:p>
@@ -9200,8 +10604,8 @@
         </p:nvSpPr>
         <p:spPr>
           <a:xfrm>
-            <a:off x="9966960" y="6537960"/>
-            <a:ext cx="1645920" cy="201168"/>
+            <a:off x="9646920" y="6537960"/>
+            <a:ext cx="1965960" cy="201168"/>
           </a:xfrm>
           <a:prstGeom prst="rect">
             <a:avLst/>
@@ -9225,7 +10629,7 @@
                 <a:ea typeface="Aptos" pitchFamily="34" charset="-122"/>
                 <a:cs typeface="Aptos" pitchFamily="34" charset="-120"/>
               </a:rPr>
-              <a:t>Â© Paula Soper</a:t>
+              <a:t>Copyright Paula Soper</a:t>
             </a:r>
             <a:endParaRPr lang="en-US" sz="800" dirty="0"/>
           </a:p>
@@ -9588,46 +10992,7 @@
       </p:sp>
       <p:sp>
         <p:nvSpPr>
-          <p:cNvPr id="15" name="Text 13"/>
-          <p:cNvSpPr/>
-          <p:nvPr/>
-        </p:nvSpPr>
-        <p:spPr>
-          <a:xfrm>
-            <a:off x="8695944" y="3941064"/>
-            <a:ext cx="201168" cy="256032"/>
-          </a:xfrm>
-          <a:prstGeom prst="rect">
-            <a:avLst/>
-          </a:prstGeom>
-          <a:noFill/>
-          <a:ln/>
-        </p:spPr>
-        <p:txBody>
-          <a:bodyPr wrap="square" lIns="0" tIns="0" rIns="0" bIns="0" rtlCol="0" anchor="ctr"/>
-          <a:lstStyle/>
-          <a:p>
-            <a:pPr algn="ctr" indent="0" marL="0">
-              <a:buNone/>
-            </a:pPr>
-            <a:r>
-              <a:rPr lang="en-US" sz="1800" b="1" dirty="0">
-                <a:solidFill>
-                  <a:srgbClr val="0068B7"/>
-                </a:solidFill>
-                <a:latin typeface="Aptos" pitchFamily="34" charset="0"/>
-                <a:ea typeface="Aptos" pitchFamily="34" charset="-122"/>
-                <a:cs typeface="Aptos" pitchFamily="34" charset="-120"/>
-              </a:rPr>
-              <a:t>â†’</a:t>
-            </a:r>
-            <a:endParaRPr lang="en-US" sz="1800" dirty="0"/>
-          </a:p>
-        </p:txBody>
-      </p:sp>
-      <p:sp>
-        <p:nvSpPr>
-          <p:cNvPr id="16" name="Shape 14"/>
+          <p:cNvPr id="15" name="Shape 13"/>
           <p:cNvSpPr/>
           <p:nvPr/>
         </p:nvSpPr>
@@ -9654,7 +11019,7 @@
       </p:sp>
       <p:sp>
         <p:nvSpPr>
-          <p:cNvPr id="17" name="Text 15"/>
+          <p:cNvPr id="16" name="Text 14"/>
           <p:cNvSpPr/>
           <p:nvPr/>
         </p:nvSpPr>
@@ -9695,46 +11060,7 @@
       </p:sp>
       <p:sp>
         <p:nvSpPr>
-          <p:cNvPr id="18" name="Text 16"/>
-          <p:cNvSpPr/>
-          <p:nvPr/>
-        </p:nvSpPr>
-        <p:spPr>
-          <a:xfrm>
-            <a:off x="9985248" y="3941064"/>
-            <a:ext cx="201168" cy="256032"/>
-          </a:xfrm>
-          <a:prstGeom prst="rect">
-            <a:avLst/>
-          </a:prstGeom>
-          <a:noFill/>
-          <a:ln/>
-        </p:spPr>
-        <p:txBody>
-          <a:bodyPr wrap="square" lIns="0" tIns="0" rIns="0" bIns="0" rtlCol="0" anchor="ctr"/>
-          <a:lstStyle/>
-          <a:p>
-            <a:pPr algn="ctr" indent="0" marL="0">
-              <a:buNone/>
-            </a:pPr>
-            <a:r>
-              <a:rPr lang="en-US" sz="1800" b="1" dirty="0">
-                <a:solidFill>
-                  <a:srgbClr val="0068B7"/>
-                </a:solidFill>
-                <a:latin typeface="Aptos" pitchFamily="34" charset="0"/>
-                <a:ea typeface="Aptos" pitchFamily="34" charset="-122"/>
-                <a:cs typeface="Aptos" pitchFamily="34" charset="-120"/>
-              </a:rPr>
-              <a:t>â†’</a:t>
-            </a:r>
-            <a:endParaRPr lang="en-US" sz="1800" dirty="0"/>
-          </a:p>
-        </p:txBody>
-      </p:sp>
-      <p:sp>
-        <p:nvSpPr>
-          <p:cNvPr id="19" name="Shape 17"/>
+          <p:cNvPr id="17" name="Shape 15"/>
           <p:cNvSpPr/>
           <p:nvPr/>
         </p:nvSpPr>
@@ -9761,7 +11087,7 @@
       </p:sp>
       <p:sp>
         <p:nvSpPr>
-          <p:cNvPr id="20" name="Text 18"/>
+          <p:cNvPr id="18" name="Text 16"/>
           <p:cNvSpPr/>
           <p:nvPr/>
         </p:nvSpPr>
@@ -9968,8 +11294,8 @@
         </p:nvSpPr>
         <p:spPr>
           <a:xfrm>
-            <a:off x="9966960" y="6537960"/>
-            <a:ext cx="1645920" cy="201168"/>
+            <a:off x="9646920" y="6537960"/>
+            <a:ext cx="1965960" cy="201168"/>
           </a:xfrm>
           <a:prstGeom prst="rect">
             <a:avLst/>
@@ -9993,7 +11319,7 @@
                 <a:ea typeface="Aptos" pitchFamily="34" charset="-122"/>
                 <a:cs typeface="Aptos" pitchFamily="34" charset="-120"/>
               </a:rPr>
-              <a:t>Â© Paula Soper</a:t>
+              <a:t>Copyright Paula Soper</a:t>
             </a:r>
             <a:endParaRPr lang="en-US" sz="800" dirty="0"/>
           </a:p>
@@ -10040,77 +11366,13 @@
       </p:sp>
       <p:sp>
         <p:nvSpPr>
-          <p:cNvPr id="8" name="Shape 6"/>
+          <p:cNvPr id="8" name="Text 6"/>
           <p:cNvSpPr/>
           <p:nvPr/>
         </p:nvSpPr>
         <p:spPr>
           <a:xfrm>
             <a:off x="640080" y="658368"/>
-            <a:ext cx="420624" cy="420624"/>
-          </a:xfrm>
-          <a:prstGeom prst="ellipse">
-            <a:avLst/>
-          </a:prstGeom>
-          <a:solidFill>
-            <a:srgbClr val="0068B7"/>
-          </a:solidFill>
-          <a:ln w="12700">
-            <a:solidFill>
-              <a:srgbClr val="0068B7"/>
-            </a:solidFill>
-            <a:prstDash val="solid"/>
-          </a:ln>
-        </p:spPr>
-      </p:sp>
-      <p:sp>
-        <p:nvSpPr>
-          <p:cNvPr id="9" name="Text 7"/>
-          <p:cNvSpPr/>
-          <p:nvPr/>
-        </p:nvSpPr>
-        <p:spPr>
-          <a:xfrm>
-            <a:off x="640080" y="731520"/>
-            <a:ext cx="420624" cy="164592"/>
-          </a:xfrm>
-          <a:prstGeom prst="rect">
-            <a:avLst/>
-          </a:prstGeom>
-          <a:noFill/>
-          <a:ln/>
-        </p:spPr>
-        <p:txBody>
-          <a:bodyPr wrap="square" lIns="0" tIns="0" rIns="0" bIns="0" rtlCol="0" anchor="ctr"/>
-          <a:lstStyle/>
-          <a:p>
-            <a:pPr algn="ctr" indent="0" marL="0">
-              <a:buNone/>
-            </a:pPr>
-            <a:r>
-              <a:rPr lang="en-US" sz="1100" b="1" dirty="0">
-                <a:solidFill>
-                  <a:srgbClr val="FFFFFF"/>
-                </a:solidFill>
-                <a:latin typeface="Aptos" pitchFamily="34" charset="0"/>
-                <a:ea typeface="Aptos" pitchFamily="34" charset="-122"/>
-                <a:cs typeface="Aptos" pitchFamily="34" charset="-120"/>
-              </a:rPr>
-              <a:t>12</a:t>
-            </a:r>
-            <a:endParaRPr lang="en-US" sz="1100" dirty="0"/>
-          </a:p>
-        </p:txBody>
-      </p:sp>
-      <p:sp>
-        <p:nvSpPr>
-          <p:cNvPr id="10" name="Text 8"/>
-          <p:cNvSpPr/>
-          <p:nvPr/>
-        </p:nvSpPr>
-        <p:spPr>
-          <a:xfrm>
-            <a:off x="640080" y="621792"/>
             <a:ext cx="10881360" cy="713232"/>
           </a:xfrm>
           <a:prstGeom prst="rect">
@@ -10145,14 +11407,14 @@
       </p:sp>
       <p:sp>
         <p:nvSpPr>
-          <p:cNvPr id="11" name="Text 9"/>
+          <p:cNvPr id="9" name="Text 7"/>
           <p:cNvSpPr/>
           <p:nvPr/>
         </p:nvSpPr>
         <p:spPr>
           <a:xfrm>
             <a:off x="868680" y="1508760"/>
-            <a:ext cx="6537960" cy="4160520"/>
+            <a:ext cx="6309360" cy="4160520"/>
           </a:xfrm>
           <a:prstGeom prst="rect">
             <a:avLst/>
@@ -10211,18 +11473,18 @@
       </p:sp>
       <p:sp>
         <p:nvSpPr>
-          <p:cNvPr id="12" name="Shape 10"/>
-          <p:cNvSpPr/>
-          <p:nvPr/>
-        </p:nvSpPr>
-        <p:spPr>
-          <a:xfrm>
-            <a:off x="7909560" y="1417320"/>
-            <a:ext cx="3154680" cy="1828800"/>
+          <p:cNvPr id="10" name="Shape 8"/>
+          <p:cNvSpPr/>
+          <p:nvPr/>
+        </p:nvSpPr>
+        <p:spPr>
+          <a:xfrm>
+            <a:off x="7635240" y="1325880"/>
+            <a:ext cx="3474720" cy="1325880"/>
           </a:xfrm>
           <a:prstGeom prst="roundRect">
             <a:avLst>
-              <a:gd name="adj" fmla="val 6000"/>
+              <a:gd name="adj" fmla="val 8276"/>
             </a:avLst>
           </a:prstGeom>
           <a:solidFill>
@@ -10238,14 +11500,14 @@
       </p:sp>
       <p:sp>
         <p:nvSpPr>
-          <p:cNvPr id="13" name="Text 11"/>
-          <p:cNvSpPr/>
-          <p:nvPr/>
-        </p:nvSpPr>
-        <p:spPr>
-          <a:xfrm>
-            <a:off x="8074152" y="1563624"/>
-            <a:ext cx="2825496" cy="256032"/>
+          <p:cNvPr id="11" name="Text 9"/>
+          <p:cNvSpPr/>
+          <p:nvPr/>
+        </p:nvSpPr>
+        <p:spPr>
+          <a:xfrm>
+            <a:off x="7799832" y="1472184"/>
+            <a:ext cx="3145536" cy="256032"/>
           </a:xfrm>
           <a:prstGeom prst="rect">
             <a:avLst/>
@@ -10269,7 +11531,7 @@
                 <a:ea typeface="Aptos" pitchFamily="34" charset="-122"/>
                 <a:cs typeface="Aptos" pitchFamily="34" charset="-120"/>
               </a:rPr>
-              <a:t>Key idea</a:t>
+              <a:t>Data decision</a:t>
             </a:r>
             <a:endParaRPr lang="en-US" sz="1300" dirty="0"/>
           </a:p>
@@ -10277,14 +11539,14 @@
       </p:sp>
       <p:sp>
         <p:nvSpPr>
-          <p:cNvPr id="14" name="Text 12"/>
-          <p:cNvSpPr/>
-          <p:nvPr/>
-        </p:nvSpPr>
-        <p:spPr>
-          <a:xfrm>
-            <a:off x="8074152" y="1920240"/>
-            <a:ext cx="2825496" cy="1188720"/>
+          <p:cNvPr id="12" name="Text 10"/>
+          <p:cNvSpPr/>
+          <p:nvPr/>
+        </p:nvSpPr>
+        <p:spPr>
+          <a:xfrm>
+            <a:off x="7799832" y="1828800"/>
+            <a:ext cx="3145536" cy="685800"/>
           </a:xfrm>
           <a:prstGeom prst="rect">
             <a:avLst/>
@@ -10318,21 +11580,212 @@
       </p:sp>
       <p:sp>
         <p:nvSpPr>
-          <p:cNvPr id="15" name="Shape 13"/>
-          <p:cNvSpPr/>
-          <p:nvPr/>
-        </p:nvSpPr>
-        <p:spPr>
-          <a:xfrm>
-            <a:off x="7909560" y="3520440"/>
-            <a:ext cx="3154680" cy="1737360"/>
+          <p:cNvPr id="13" name="Shape 11"/>
+          <p:cNvSpPr/>
+          <p:nvPr/>
+        </p:nvSpPr>
+        <p:spPr>
+          <a:xfrm>
+            <a:off x="7635240" y="2788920"/>
+            <a:ext cx="3474720" cy="1536192"/>
           </a:xfrm>
           <a:prstGeom prst="roundRect">
             <a:avLst>
-              <a:gd name="adj" fmla="val 6316"/>
+              <a:gd name="adj" fmla="val 7143"/>
             </a:avLst>
           </a:prstGeom>
           <a:solidFill>
+            <a:srgbClr val="FFFFFF">
+              <a:alpha val="88000"/>
+            </a:srgbClr>
+          </a:solidFill>
+          <a:ln w="12700">
+            <a:solidFill>
+              <a:srgbClr val="D6E8F2"/>
+            </a:solidFill>
+            <a:prstDash val="solid"/>
+          </a:ln>
+        </p:spPr>
+      </p:sp>
+      <p:sp>
+        <p:nvSpPr>
+          <p:cNvPr id="14" name="Shape 12"/>
+          <p:cNvSpPr/>
+          <p:nvPr/>
+        </p:nvSpPr>
+        <p:spPr>
+          <a:xfrm>
+            <a:off x="8138160" y="3474720"/>
+            <a:ext cx="256032" cy="411480"/>
+          </a:xfrm>
+          <a:prstGeom prst="rect">
+            <a:avLst/>
+          </a:prstGeom>
+          <a:solidFill>
+            <a:srgbClr val="0068B7"/>
+          </a:solidFill>
+          <a:ln w="12700">
+            <a:solidFill>
+              <a:srgbClr val="0068B7"/>
+            </a:solidFill>
+            <a:prstDash val="solid"/>
+          </a:ln>
+        </p:spPr>
+      </p:sp>
+      <p:sp>
+        <p:nvSpPr>
+          <p:cNvPr id="15" name="Shape 13"/>
+          <p:cNvSpPr/>
+          <p:nvPr/>
+        </p:nvSpPr>
+        <p:spPr>
+          <a:xfrm>
+            <a:off x="8577072" y="3172968"/>
+            <a:ext cx="256032" cy="713232"/>
+          </a:xfrm>
+          <a:prstGeom prst="rect">
+            <a:avLst/>
+          </a:prstGeom>
+          <a:solidFill>
+            <a:srgbClr val="2F8A28"/>
+          </a:solidFill>
+          <a:ln w="12700">
+            <a:solidFill>
+              <a:srgbClr val="2F8A28"/>
+            </a:solidFill>
+            <a:prstDash val="solid"/>
+          </a:ln>
+        </p:spPr>
+      </p:sp>
+      <p:sp>
+        <p:nvSpPr>
+          <p:cNvPr id="16" name="Shape 14"/>
+          <p:cNvSpPr/>
+          <p:nvPr/>
+        </p:nvSpPr>
+        <p:spPr>
+          <a:xfrm>
+            <a:off x="9015984" y="2880360"/>
+            <a:ext cx="256032" cy="1005840"/>
+          </a:xfrm>
+          <a:prstGeom prst="rect">
+            <a:avLst/>
+          </a:prstGeom>
+          <a:solidFill>
+            <a:srgbClr val="D69A2D"/>
+          </a:solidFill>
+          <a:ln w="12700">
+            <a:solidFill>
+              <a:srgbClr val="D69A2D"/>
+            </a:solidFill>
+            <a:prstDash val="solid"/>
+          </a:ln>
+        </p:spPr>
+      </p:sp>
+      <p:sp>
+        <p:nvSpPr>
+          <p:cNvPr id="17" name="Shape 15"/>
+          <p:cNvSpPr/>
+          <p:nvPr/>
+        </p:nvSpPr>
+        <p:spPr>
+          <a:xfrm>
+            <a:off x="9454896" y="3319272"/>
+            <a:ext cx="256032" cy="566928"/>
+          </a:xfrm>
+          <a:prstGeom prst="rect">
+            <a:avLst/>
+          </a:prstGeom>
+          <a:solidFill>
+            <a:srgbClr val="6A4CA3"/>
+          </a:solidFill>
+          <a:ln w="12700">
+            <a:solidFill>
+              <a:srgbClr val="6A4CA3"/>
+            </a:solidFill>
+            <a:prstDash val="solid"/>
+          </a:ln>
+        </p:spPr>
+      </p:sp>
+      <p:sp>
+        <p:nvSpPr>
+          <p:cNvPr id="18" name="Shape 16"/>
+          <p:cNvSpPr/>
+          <p:nvPr/>
+        </p:nvSpPr>
+        <p:spPr>
+          <a:xfrm>
+            <a:off x="8019288" y="3886200"/>
+            <a:ext cx="2706624" cy="0"/>
+          </a:xfrm>
+          <a:prstGeom prst="line">
+            <a:avLst/>
+          </a:prstGeom>
+          <a:noFill/>
+          <a:ln w="15240">
+            <a:solidFill>
+              <a:srgbClr val="003A63"/>
+            </a:solidFill>
+            <a:prstDash val="solid"/>
+          </a:ln>
+        </p:spPr>
+      </p:sp>
+      <p:sp>
+        <p:nvSpPr>
+          <p:cNvPr id="19" name="Text 17"/>
+          <p:cNvSpPr/>
+          <p:nvPr/>
+        </p:nvSpPr>
+        <p:spPr>
+          <a:xfrm>
+            <a:off x="7863840" y="3017520"/>
+            <a:ext cx="3017520" cy="201168"/>
+          </a:xfrm>
+          <a:prstGeom prst="rect">
+            <a:avLst/>
+          </a:prstGeom>
+          <a:noFill/>
+          <a:ln/>
+        </p:spPr>
+        <p:txBody>
+          <a:bodyPr wrap="square" lIns="0" tIns="0" rIns="0" bIns="0" rtlCol="0" anchor="ctr"/>
+          <a:lstStyle/>
+          <a:p>
+            <a:pPr algn="ctr" indent="0" marL="0">
+              <a:buNone/>
+            </a:pPr>
+            <a:r>
+              <a:rPr lang="en-US" sz="1050" b="1" dirty="0">
+                <a:solidFill>
+                  <a:srgbClr val="003A63"/>
+                </a:solidFill>
+                <a:latin typeface="Aptos" pitchFamily="34" charset="0"/>
+                <a:ea typeface="Aptos" pitchFamily="34" charset="-122"/>
+                <a:cs typeface="Aptos" pitchFamily="34" charset="-120"/>
+              </a:rPr>
+              <a:t>Measure and monitor</a:t>
+            </a:r>
+            <a:endParaRPr lang="en-US" sz="1050" dirty="0"/>
+          </a:p>
+        </p:txBody>
+      </p:sp>
+      <p:sp>
+        <p:nvSpPr>
+          <p:cNvPr id="20" name="Shape 18"/>
+          <p:cNvSpPr/>
+          <p:nvPr/>
+        </p:nvSpPr>
+        <p:spPr>
+          <a:xfrm>
+            <a:off x="7635240" y="4498848"/>
+            <a:ext cx="3474720" cy="1143000"/>
+          </a:xfrm>
+          <a:prstGeom prst="roundRect">
+            <a:avLst>
+              <a:gd name="adj" fmla="val 9600"/>
+            </a:avLst>
+          </a:prstGeom>
+          <a:solidFill>
             <a:srgbClr val="EAF6F8"/>
           </a:solidFill>
           <a:ln w="12700">
@@ -10345,14 +11798,14 @@
       </p:sp>
       <p:sp>
         <p:nvSpPr>
-          <p:cNvPr id="16" name="Text 14"/>
-          <p:cNvSpPr/>
-          <p:nvPr/>
-        </p:nvSpPr>
-        <p:spPr>
-          <a:xfrm>
-            <a:off x="8074152" y="3666744"/>
-            <a:ext cx="2825496" cy="256032"/>
+          <p:cNvPr id="21" name="Text 19"/>
+          <p:cNvSpPr/>
+          <p:nvPr/>
+        </p:nvSpPr>
+        <p:spPr>
+          <a:xfrm>
+            <a:off x="7799832" y="4645152"/>
+            <a:ext cx="3145536" cy="256032"/>
           </a:xfrm>
           <a:prstGeom prst="rect">
             <a:avLst/>
@@ -10376,7 +11829,7 @@
                 <a:ea typeface="Aptos" pitchFamily="34" charset="-122"/>
                 <a:cs typeface="Aptos" pitchFamily="34" charset="-120"/>
               </a:rPr>
-              <a:t>Use this for</a:t>
+              <a:t>How to validate</a:t>
             </a:r>
             <a:endParaRPr lang="en-US" sz="1300" dirty="0"/>
           </a:p>
@@ -10384,14 +11837,14 @@
       </p:sp>
       <p:sp>
         <p:nvSpPr>
-          <p:cNvPr id="17" name="Text 15"/>
-          <p:cNvSpPr/>
-          <p:nvPr/>
-        </p:nvSpPr>
-        <p:spPr>
-          <a:xfrm>
-            <a:off x="8074152" y="4023360"/>
-            <a:ext cx="2825496" cy="1097280"/>
+          <p:cNvPr id="22" name="Text 20"/>
+          <p:cNvSpPr/>
+          <p:nvPr/>
+        </p:nvSpPr>
+        <p:spPr>
+          <a:xfrm>
+            <a:off x="7799832" y="5001768"/>
+            <a:ext cx="3145536" cy="502920"/>
           </a:xfrm>
           <a:prstGeom prst="rect">
             <a:avLst/>
@@ -10417,7 +11870,7 @@
                 <a:ea typeface="Aptos" pitchFamily="34" charset="-122"/>
                 <a:cs typeface="Aptos" pitchFamily="34" charset="-120"/>
               </a:rPr>
-              <a:t>Connect the concept to public health decisions, safeguards, documentation, or implementation work.</a:t>
+              <a:t>Use the assignment to test whether you can explain the concept, apply it to a realistic public health situation, and identify what would need review before the work moves forward.</a:t>
             </a:r>
             <a:endParaRPr lang="en-US" sz="1550" dirty="0"/>
           </a:p>
@@ -10591,8 +12044,8 @@
         </p:nvSpPr>
         <p:spPr>
           <a:xfrm>
-            <a:off x="9966960" y="6537960"/>
-            <a:ext cx="1645920" cy="201168"/>
+            <a:off x="9646920" y="6537960"/>
+            <a:ext cx="1965960" cy="201168"/>
           </a:xfrm>
           <a:prstGeom prst="rect">
             <a:avLst/>
@@ -10616,7 +12069,7 @@
                 <a:ea typeface="Aptos" pitchFamily="34" charset="-122"/>
                 <a:cs typeface="Aptos" pitchFamily="34" charset="-120"/>
               </a:rPr>
-              <a:t>Â© Paula Soper</a:t>
+              <a:t>Copyright Paula Soper</a:t>
             </a:r>
             <a:endParaRPr lang="en-US" sz="800" dirty="0"/>
           </a:p>
@@ -10663,77 +12116,13 @@
       </p:sp>
       <p:sp>
         <p:nvSpPr>
-          <p:cNvPr id="8" name="Shape 6"/>
+          <p:cNvPr id="8" name="Text 6"/>
           <p:cNvSpPr/>
           <p:nvPr/>
         </p:nvSpPr>
         <p:spPr>
           <a:xfrm>
             <a:off x="640080" y="658368"/>
-            <a:ext cx="420624" cy="420624"/>
-          </a:xfrm>
-          <a:prstGeom prst="ellipse">
-            <a:avLst/>
-          </a:prstGeom>
-          <a:solidFill>
-            <a:srgbClr val="0068B7"/>
-          </a:solidFill>
-          <a:ln w="12700">
-            <a:solidFill>
-              <a:srgbClr val="0068B7"/>
-            </a:solidFill>
-            <a:prstDash val="solid"/>
-          </a:ln>
-        </p:spPr>
-      </p:sp>
-      <p:sp>
-        <p:nvSpPr>
-          <p:cNvPr id="9" name="Text 7"/>
-          <p:cNvSpPr/>
-          <p:nvPr/>
-        </p:nvSpPr>
-        <p:spPr>
-          <a:xfrm>
-            <a:off x="640080" y="731520"/>
-            <a:ext cx="420624" cy="164592"/>
-          </a:xfrm>
-          <a:prstGeom prst="rect">
-            <a:avLst/>
-          </a:prstGeom>
-          <a:noFill/>
-          <a:ln/>
-        </p:spPr>
-        <p:txBody>
-          <a:bodyPr wrap="square" lIns="0" tIns="0" rIns="0" bIns="0" rtlCol="0" anchor="ctr"/>
-          <a:lstStyle/>
-          <a:p>
-            <a:pPr algn="ctr" indent="0" marL="0">
-              <a:buNone/>
-            </a:pPr>
-            <a:r>
-              <a:rPr lang="en-US" sz="1100" b="1" dirty="0">
-                <a:solidFill>
-                  <a:srgbClr val="FFFFFF"/>
-                </a:solidFill>
-                <a:latin typeface="Aptos" pitchFamily="34" charset="0"/>
-                <a:ea typeface="Aptos" pitchFamily="34" charset="-122"/>
-                <a:cs typeface="Aptos" pitchFamily="34" charset="-120"/>
-              </a:rPr>
-              <a:t>13</a:t>
-            </a:r>
-            <a:endParaRPr lang="en-US" sz="1100" dirty="0"/>
-          </a:p>
-        </p:txBody>
-      </p:sp>
-      <p:sp>
-        <p:nvSpPr>
-          <p:cNvPr id="10" name="Text 8"/>
-          <p:cNvSpPr/>
-          <p:nvPr/>
-        </p:nvSpPr>
-        <p:spPr>
-          <a:xfrm>
-            <a:off x="640080" y="621792"/>
             <a:ext cx="10881360" cy="713232"/>
           </a:xfrm>
           <a:prstGeom prst="rect">
@@ -10768,14 +12157,14 @@
       </p:sp>
       <p:sp>
         <p:nvSpPr>
-          <p:cNvPr id="11" name="Text 9"/>
+          <p:cNvPr id="9" name="Text 7"/>
           <p:cNvSpPr/>
           <p:nvPr/>
         </p:nvSpPr>
         <p:spPr>
           <a:xfrm>
             <a:off x="868680" y="1508760"/>
-            <a:ext cx="6537960" cy="4160520"/>
+            <a:ext cx="6309360" cy="4160520"/>
           </a:xfrm>
           <a:prstGeom prst="rect">
             <a:avLst/>
@@ -10834,18 +12223,18 @@
       </p:sp>
       <p:sp>
         <p:nvSpPr>
-          <p:cNvPr id="12" name="Shape 10"/>
-          <p:cNvSpPr/>
-          <p:nvPr/>
-        </p:nvSpPr>
-        <p:spPr>
-          <a:xfrm>
-            <a:off x="7909560" y="1417320"/>
-            <a:ext cx="3154680" cy="1828800"/>
+          <p:cNvPr id="10" name="Shape 8"/>
+          <p:cNvSpPr/>
+          <p:nvPr/>
+        </p:nvSpPr>
+        <p:spPr>
+          <a:xfrm>
+            <a:off x="7635240" y="1325880"/>
+            <a:ext cx="3474720" cy="1325880"/>
           </a:xfrm>
           <a:prstGeom prst="roundRect">
             <a:avLst>
-              <a:gd name="adj" fmla="val 6000"/>
+              <a:gd name="adj" fmla="val 8276"/>
             </a:avLst>
           </a:prstGeom>
           <a:solidFill>
@@ -10861,14 +12250,14 @@
       </p:sp>
       <p:sp>
         <p:nvSpPr>
-          <p:cNvPr id="13" name="Text 11"/>
-          <p:cNvSpPr/>
-          <p:nvPr/>
-        </p:nvSpPr>
-        <p:spPr>
-          <a:xfrm>
-            <a:off x="8074152" y="1563624"/>
-            <a:ext cx="2825496" cy="256032"/>
+          <p:cNvPr id="11" name="Text 9"/>
+          <p:cNvSpPr/>
+          <p:nvPr/>
+        </p:nvSpPr>
+        <p:spPr>
+          <a:xfrm>
+            <a:off x="7799832" y="1472184"/>
+            <a:ext cx="3145536" cy="256032"/>
           </a:xfrm>
           <a:prstGeom prst="rect">
             <a:avLst/>
@@ -10892,7 +12281,7 @@
                 <a:ea typeface="Aptos" pitchFamily="34" charset="-122"/>
                 <a:cs typeface="Aptos" pitchFamily="34" charset="-120"/>
               </a:rPr>
-              <a:t>Key idea</a:t>
+              <a:t>Data decision</a:t>
             </a:r>
             <a:endParaRPr lang="en-US" sz="1300" dirty="0"/>
           </a:p>
@@ -10900,14 +12289,14 @@
       </p:sp>
       <p:sp>
         <p:nvSpPr>
-          <p:cNvPr id="14" name="Text 12"/>
-          <p:cNvSpPr/>
-          <p:nvPr/>
-        </p:nvSpPr>
-        <p:spPr>
-          <a:xfrm>
-            <a:off x="8074152" y="1920240"/>
-            <a:ext cx="2825496" cy="1188720"/>
+          <p:cNvPr id="12" name="Text 10"/>
+          <p:cNvSpPr/>
+          <p:nvPr/>
+        </p:nvSpPr>
+        <p:spPr>
+          <a:xfrm>
+            <a:off x="7799832" y="1828800"/>
+            <a:ext cx="3145536" cy="685800"/>
           </a:xfrm>
           <a:prstGeom prst="rect">
             <a:avLst/>
@@ -10941,21 +12330,212 @@
       </p:sp>
       <p:sp>
         <p:nvSpPr>
-          <p:cNvPr id="15" name="Shape 13"/>
-          <p:cNvSpPr/>
-          <p:nvPr/>
-        </p:nvSpPr>
-        <p:spPr>
-          <a:xfrm>
-            <a:off x="7909560" y="3520440"/>
-            <a:ext cx="3154680" cy="1737360"/>
+          <p:cNvPr id="13" name="Shape 11"/>
+          <p:cNvSpPr/>
+          <p:nvPr/>
+        </p:nvSpPr>
+        <p:spPr>
+          <a:xfrm>
+            <a:off x="7635240" y="2788920"/>
+            <a:ext cx="3474720" cy="1536192"/>
           </a:xfrm>
           <a:prstGeom prst="roundRect">
             <a:avLst>
-              <a:gd name="adj" fmla="val 6316"/>
+              <a:gd name="adj" fmla="val 7143"/>
             </a:avLst>
           </a:prstGeom>
           <a:solidFill>
+            <a:srgbClr val="FFFFFF">
+              <a:alpha val="88000"/>
+            </a:srgbClr>
+          </a:solidFill>
+          <a:ln w="12700">
+            <a:solidFill>
+              <a:srgbClr val="D6E8F2"/>
+            </a:solidFill>
+            <a:prstDash val="solid"/>
+          </a:ln>
+        </p:spPr>
+      </p:sp>
+      <p:sp>
+        <p:nvSpPr>
+          <p:cNvPr id="14" name="Shape 12"/>
+          <p:cNvSpPr/>
+          <p:nvPr/>
+        </p:nvSpPr>
+        <p:spPr>
+          <a:xfrm>
+            <a:off x="8138160" y="3474720"/>
+            <a:ext cx="256032" cy="411480"/>
+          </a:xfrm>
+          <a:prstGeom prst="rect">
+            <a:avLst/>
+          </a:prstGeom>
+          <a:solidFill>
+            <a:srgbClr val="0068B7"/>
+          </a:solidFill>
+          <a:ln w="12700">
+            <a:solidFill>
+              <a:srgbClr val="0068B7"/>
+            </a:solidFill>
+            <a:prstDash val="solid"/>
+          </a:ln>
+        </p:spPr>
+      </p:sp>
+      <p:sp>
+        <p:nvSpPr>
+          <p:cNvPr id="15" name="Shape 13"/>
+          <p:cNvSpPr/>
+          <p:nvPr/>
+        </p:nvSpPr>
+        <p:spPr>
+          <a:xfrm>
+            <a:off x="8577072" y="3172968"/>
+            <a:ext cx="256032" cy="713232"/>
+          </a:xfrm>
+          <a:prstGeom prst="rect">
+            <a:avLst/>
+          </a:prstGeom>
+          <a:solidFill>
+            <a:srgbClr val="2F8A28"/>
+          </a:solidFill>
+          <a:ln w="12700">
+            <a:solidFill>
+              <a:srgbClr val="2F8A28"/>
+            </a:solidFill>
+            <a:prstDash val="solid"/>
+          </a:ln>
+        </p:spPr>
+      </p:sp>
+      <p:sp>
+        <p:nvSpPr>
+          <p:cNvPr id="16" name="Shape 14"/>
+          <p:cNvSpPr/>
+          <p:nvPr/>
+        </p:nvSpPr>
+        <p:spPr>
+          <a:xfrm>
+            <a:off x="9015984" y="2880360"/>
+            <a:ext cx="256032" cy="1005840"/>
+          </a:xfrm>
+          <a:prstGeom prst="rect">
+            <a:avLst/>
+          </a:prstGeom>
+          <a:solidFill>
+            <a:srgbClr val="D69A2D"/>
+          </a:solidFill>
+          <a:ln w="12700">
+            <a:solidFill>
+              <a:srgbClr val="D69A2D"/>
+            </a:solidFill>
+            <a:prstDash val="solid"/>
+          </a:ln>
+        </p:spPr>
+      </p:sp>
+      <p:sp>
+        <p:nvSpPr>
+          <p:cNvPr id="17" name="Shape 15"/>
+          <p:cNvSpPr/>
+          <p:nvPr/>
+        </p:nvSpPr>
+        <p:spPr>
+          <a:xfrm>
+            <a:off x="9454896" y="3319272"/>
+            <a:ext cx="256032" cy="566928"/>
+          </a:xfrm>
+          <a:prstGeom prst="rect">
+            <a:avLst/>
+          </a:prstGeom>
+          <a:solidFill>
+            <a:srgbClr val="6A4CA3"/>
+          </a:solidFill>
+          <a:ln w="12700">
+            <a:solidFill>
+              <a:srgbClr val="6A4CA3"/>
+            </a:solidFill>
+            <a:prstDash val="solid"/>
+          </a:ln>
+        </p:spPr>
+      </p:sp>
+      <p:sp>
+        <p:nvSpPr>
+          <p:cNvPr id="18" name="Shape 16"/>
+          <p:cNvSpPr/>
+          <p:nvPr/>
+        </p:nvSpPr>
+        <p:spPr>
+          <a:xfrm>
+            <a:off x="8019288" y="3886200"/>
+            <a:ext cx="2706624" cy="0"/>
+          </a:xfrm>
+          <a:prstGeom prst="line">
+            <a:avLst/>
+          </a:prstGeom>
+          <a:noFill/>
+          <a:ln w="15240">
+            <a:solidFill>
+              <a:srgbClr val="003A63"/>
+            </a:solidFill>
+            <a:prstDash val="solid"/>
+          </a:ln>
+        </p:spPr>
+      </p:sp>
+      <p:sp>
+        <p:nvSpPr>
+          <p:cNvPr id="19" name="Text 17"/>
+          <p:cNvSpPr/>
+          <p:nvPr/>
+        </p:nvSpPr>
+        <p:spPr>
+          <a:xfrm>
+            <a:off x="7863840" y="3017520"/>
+            <a:ext cx="3017520" cy="201168"/>
+          </a:xfrm>
+          <a:prstGeom prst="rect">
+            <a:avLst/>
+          </a:prstGeom>
+          <a:noFill/>
+          <a:ln/>
+        </p:spPr>
+        <p:txBody>
+          <a:bodyPr wrap="square" lIns="0" tIns="0" rIns="0" bIns="0" rtlCol="0" anchor="ctr"/>
+          <a:lstStyle/>
+          <a:p>
+            <a:pPr algn="ctr" indent="0" marL="0">
+              <a:buNone/>
+            </a:pPr>
+            <a:r>
+              <a:rPr lang="en-US" sz="1050" b="1" dirty="0">
+                <a:solidFill>
+                  <a:srgbClr val="003A63"/>
+                </a:solidFill>
+                <a:latin typeface="Aptos" pitchFamily="34" charset="0"/>
+                <a:ea typeface="Aptos" pitchFamily="34" charset="-122"/>
+                <a:cs typeface="Aptos" pitchFamily="34" charset="-120"/>
+              </a:rPr>
+              <a:t>Measure and monitor</a:t>
+            </a:r>
+            <a:endParaRPr lang="en-US" sz="1050" dirty="0"/>
+          </a:p>
+        </p:txBody>
+      </p:sp>
+      <p:sp>
+        <p:nvSpPr>
+          <p:cNvPr id="20" name="Shape 18"/>
+          <p:cNvSpPr/>
+          <p:nvPr/>
+        </p:nvSpPr>
+        <p:spPr>
+          <a:xfrm>
+            <a:off x="7635240" y="4498848"/>
+            <a:ext cx="3474720" cy="1143000"/>
+          </a:xfrm>
+          <a:prstGeom prst="roundRect">
+            <a:avLst>
+              <a:gd name="adj" fmla="val 9600"/>
+            </a:avLst>
+          </a:prstGeom>
+          <a:solidFill>
             <a:srgbClr val="EAF6F8"/>
           </a:solidFill>
           <a:ln w="12700">
@@ -10968,14 +12548,14 @@
       </p:sp>
       <p:sp>
         <p:nvSpPr>
-          <p:cNvPr id="16" name="Text 14"/>
-          <p:cNvSpPr/>
-          <p:nvPr/>
-        </p:nvSpPr>
-        <p:spPr>
-          <a:xfrm>
-            <a:off x="8074152" y="3666744"/>
-            <a:ext cx="2825496" cy="256032"/>
+          <p:cNvPr id="21" name="Text 19"/>
+          <p:cNvSpPr/>
+          <p:nvPr/>
+        </p:nvSpPr>
+        <p:spPr>
+          <a:xfrm>
+            <a:off x="7799832" y="4645152"/>
+            <a:ext cx="3145536" cy="256032"/>
           </a:xfrm>
           <a:prstGeom prst="rect">
             <a:avLst/>
@@ -10999,7 +12579,7 @@
                 <a:ea typeface="Aptos" pitchFamily="34" charset="-122"/>
                 <a:cs typeface="Aptos" pitchFamily="34" charset="-120"/>
               </a:rPr>
-              <a:t>Use this for</a:t>
+              <a:t>How to validate</a:t>
             </a:r>
             <a:endParaRPr lang="en-US" sz="1300" dirty="0"/>
           </a:p>
@@ -11007,14 +12587,14 @@
       </p:sp>
       <p:sp>
         <p:nvSpPr>
-          <p:cNvPr id="17" name="Text 15"/>
-          <p:cNvSpPr/>
-          <p:nvPr/>
-        </p:nvSpPr>
-        <p:spPr>
-          <a:xfrm>
-            <a:off x="8074152" y="4023360"/>
-            <a:ext cx="2825496" cy="1097280"/>
+          <p:cNvPr id="22" name="Text 20"/>
+          <p:cNvSpPr/>
+          <p:nvPr/>
+        </p:nvSpPr>
+        <p:spPr>
+          <a:xfrm>
+            <a:off x="7799832" y="5001768"/>
+            <a:ext cx="3145536" cy="502920"/>
           </a:xfrm>
           <a:prstGeom prst="rect">
             <a:avLst/>
@@ -11040,7 +12620,7 @@
                 <a:ea typeface="Aptos" pitchFamily="34" charset="-122"/>
                 <a:cs typeface="Aptos" pitchFamily="34" charset="-120"/>
               </a:rPr>
-              <a:t>Connect the concept to public health decisions, safeguards, documentation, or implementation work.</a:t>
+              <a:t>Use the assignment to test whether you can explain the concept, apply it to a realistic public health situation, and identify what would need review before the work moves forward.</a:t>
             </a:r>
             <a:endParaRPr lang="en-US" sz="1550" dirty="0"/>
           </a:p>
@@ -11214,8 +12794,8 @@
         </p:nvSpPr>
         <p:spPr>
           <a:xfrm>
-            <a:off x="9966960" y="6537960"/>
-            <a:ext cx="1645920" cy="201168"/>
+            <a:off x="9646920" y="6537960"/>
+            <a:ext cx="1965960" cy="201168"/>
           </a:xfrm>
           <a:prstGeom prst="rect">
             <a:avLst/>
@@ -11239,7 +12819,7 @@
                 <a:ea typeface="Aptos" pitchFamily="34" charset="-122"/>
                 <a:cs typeface="Aptos" pitchFamily="34" charset="-120"/>
               </a:rPr>
-              <a:t>Â© Paula Soper</a:t>
+              <a:t>Copyright Paula Soper</a:t>
             </a:r>
             <a:endParaRPr lang="en-US" sz="800" dirty="0"/>
           </a:p>
@@ -11286,77 +12866,13 @@
       </p:sp>
       <p:sp>
         <p:nvSpPr>
-          <p:cNvPr id="8" name="Shape 6"/>
+          <p:cNvPr id="8" name="Text 6"/>
           <p:cNvSpPr/>
           <p:nvPr/>
         </p:nvSpPr>
         <p:spPr>
           <a:xfrm>
             <a:off x="640080" y="658368"/>
-            <a:ext cx="420624" cy="420624"/>
-          </a:xfrm>
-          <a:prstGeom prst="ellipse">
-            <a:avLst/>
-          </a:prstGeom>
-          <a:solidFill>
-            <a:srgbClr val="0068B7"/>
-          </a:solidFill>
-          <a:ln w="12700">
-            <a:solidFill>
-              <a:srgbClr val="0068B7"/>
-            </a:solidFill>
-            <a:prstDash val="solid"/>
-          </a:ln>
-        </p:spPr>
-      </p:sp>
-      <p:sp>
-        <p:nvSpPr>
-          <p:cNvPr id="9" name="Text 7"/>
-          <p:cNvSpPr/>
-          <p:nvPr/>
-        </p:nvSpPr>
-        <p:spPr>
-          <a:xfrm>
-            <a:off x="640080" y="731520"/>
-            <a:ext cx="420624" cy="164592"/>
-          </a:xfrm>
-          <a:prstGeom prst="rect">
-            <a:avLst/>
-          </a:prstGeom>
-          <a:noFill/>
-          <a:ln/>
-        </p:spPr>
-        <p:txBody>
-          <a:bodyPr wrap="square" lIns="0" tIns="0" rIns="0" bIns="0" rtlCol="0" anchor="ctr"/>
-          <a:lstStyle/>
-          <a:p>
-            <a:pPr algn="ctr" indent="0" marL="0">
-              <a:buNone/>
-            </a:pPr>
-            <a:r>
-              <a:rPr lang="en-US" sz="1100" b="1" dirty="0">
-                <a:solidFill>
-                  <a:srgbClr val="FFFFFF"/>
-                </a:solidFill>
-                <a:latin typeface="Aptos" pitchFamily="34" charset="0"/>
-                <a:ea typeface="Aptos" pitchFamily="34" charset="-122"/>
-                <a:cs typeface="Aptos" pitchFamily="34" charset="-120"/>
-              </a:rPr>
-              <a:t>14</a:t>
-            </a:r>
-            <a:endParaRPr lang="en-US" sz="1100" dirty="0"/>
-          </a:p>
-        </p:txBody>
-      </p:sp>
-      <p:sp>
-        <p:nvSpPr>
-          <p:cNvPr id="10" name="Text 8"/>
-          <p:cNvSpPr/>
-          <p:nvPr/>
-        </p:nvSpPr>
-        <p:spPr>
-          <a:xfrm>
-            <a:off x="640080" y="621792"/>
             <a:ext cx="10881360" cy="713232"/>
           </a:xfrm>
           <a:prstGeom prst="rect">
@@ -11391,14 +12907,14 @@
       </p:sp>
       <p:sp>
         <p:nvSpPr>
-          <p:cNvPr id="11" name="Text 9"/>
+          <p:cNvPr id="9" name="Text 7"/>
           <p:cNvSpPr/>
           <p:nvPr/>
         </p:nvSpPr>
         <p:spPr>
           <a:xfrm>
             <a:off x="868680" y="1508760"/>
-            <a:ext cx="6537960" cy="4160520"/>
+            <a:ext cx="6309360" cy="4160520"/>
           </a:xfrm>
           <a:prstGeom prst="rect">
             <a:avLst/>
@@ -11457,18 +12973,18 @@
       </p:sp>
       <p:sp>
         <p:nvSpPr>
-          <p:cNvPr id="12" name="Shape 10"/>
-          <p:cNvSpPr/>
-          <p:nvPr/>
-        </p:nvSpPr>
-        <p:spPr>
-          <a:xfrm>
-            <a:off x="7909560" y="1417320"/>
-            <a:ext cx="3154680" cy="1828800"/>
+          <p:cNvPr id="10" name="Shape 8"/>
+          <p:cNvSpPr/>
+          <p:nvPr/>
+        </p:nvSpPr>
+        <p:spPr>
+          <a:xfrm>
+            <a:off x="7635240" y="1325880"/>
+            <a:ext cx="3474720" cy="1325880"/>
           </a:xfrm>
           <a:prstGeom prst="roundRect">
             <a:avLst>
-              <a:gd name="adj" fmla="val 6000"/>
+              <a:gd name="adj" fmla="val 8276"/>
             </a:avLst>
           </a:prstGeom>
           <a:solidFill>
@@ -11484,14 +13000,14 @@
       </p:sp>
       <p:sp>
         <p:nvSpPr>
-          <p:cNvPr id="13" name="Text 11"/>
-          <p:cNvSpPr/>
-          <p:nvPr/>
-        </p:nvSpPr>
-        <p:spPr>
-          <a:xfrm>
-            <a:off x="8074152" y="1563624"/>
-            <a:ext cx="2825496" cy="256032"/>
+          <p:cNvPr id="11" name="Text 9"/>
+          <p:cNvSpPr/>
+          <p:nvPr/>
+        </p:nvSpPr>
+        <p:spPr>
+          <a:xfrm>
+            <a:off x="7799832" y="1472184"/>
+            <a:ext cx="3145536" cy="256032"/>
           </a:xfrm>
           <a:prstGeom prst="rect">
             <a:avLst/>
@@ -11515,7 +13031,7 @@
                 <a:ea typeface="Aptos" pitchFamily="34" charset="-122"/>
                 <a:cs typeface="Aptos" pitchFamily="34" charset="-120"/>
               </a:rPr>
-              <a:t>Key idea</a:t>
+              <a:t>Data decision</a:t>
             </a:r>
             <a:endParaRPr lang="en-US" sz="1300" dirty="0"/>
           </a:p>
@@ -11523,14 +13039,14 @@
       </p:sp>
       <p:sp>
         <p:nvSpPr>
-          <p:cNvPr id="14" name="Text 12"/>
-          <p:cNvSpPr/>
-          <p:nvPr/>
-        </p:nvSpPr>
-        <p:spPr>
-          <a:xfrm>
-            <a:off x="8074152" y="1920240"/>
-            <a:ext cx="2825496" cy="1188720"/>
+          <p:cNvPr id="12" name="Text 10"/>
+          <p:cNvSpPr/>
+          <p:nvPr/>
+        </p:nvSpPr>
+        <p:spPr>
+          <a:xfrm>
+            <a:off x="7799832" y="1828800"/>
+            <a:ext cx="3145536" cy="685800"/>
           </a:xfrm>
           <a:prstGeom prst="rect">
             <a:avLst/>
@@ -11564,21 +13080,212 @@
       </p:sp>
       <p:sp>
         <p:nvSpPr>
-          <p:cNvPr id="15" name="Shape 13"/>
-          <p:cNvSpPr/>
-          <p:nvPr/>
-        </p:nvSpPr>
-        <p:spPr>
-          <a:xfrm>
-            <a:off x="7909560" y="3520440"/>
-            <a:ext cx="3154680" cy="1737360"/>
+          <p:cNvPr id="13" name="Shape 11"/>
+          <p:cNvSpPr/>
+          <p:nvPr/>
+        </p:nvSpPr>
+        <p:spPr>
+          <a:xfrm>
+            <a:off x="7635240" y="2788920"/>
+            <a:ext cx="3474720" cy="1536192"/>
           </a:xfrm>
           <a:prstGeom prst="roundRect">
             <a:avLst>
-              <a:gd name="adj" fmla="val 6316"/>
+              <a:gd name="adj" fmla="val 7143"/>
             </a:avLst>
           </a:prstGeom>
           <a:solidFill>
+            <a:srgbClr val="FFFFFF">
+              <a:alpha val="88000"/>
+            </a:srgbClr>
+          </a:solidFill>
+          <a:ln w="12700">
+            <a:solidFill>
+              <a:srgbClr val="D6E8F2"/>
+            </a:solidFill>
+            <a:prstDash val="solid"/>
+          </a:ln>
+        </p:spPr>
+      </p:sp>
+      <p:sp>
+        <p:nvSpPr>
+          <p:cNvPr id="14" name="Shape 12"/>
+          <p:cNvSpPr/>
+          <p:nvPr/>
+        </p:nvSpPr>
+        <p:spPr>
+          <a:xfrm>
+            <a:off x="8138160" y="3474720"/>
+            <a:ext cx="256032" cy="411480"/>
+          </a:xfrm>
+          <a:prstGeom prst="rect">
+            <a:avLst/>
+          </a:prstGeom>
+          <a:solidFill>
+            <a:srgbClr val="0068B7"/>
+          </a:solidFill>
+          <a:ln w="12700">
+            <a:solidFill>
+              <a:srgbClr val="0068B7"/>
+            </a:solidFill>
+            <a:prstDash val="solid"/>
+          </a:ln>
+        </p:spPr>
+      </p:sp>
+      <p:sp>
+        <p:nvSpPr>
+          <p:cNvPr id="15" name="Shape 13"/>
+          <p:cNvSpPr/>
+          <p:nvPr/>
+        </p:nvSpPr>
+        <p:spPr>
+          <a:xfrm>
+            <a:off x="8577072" y="3172968"/>
+            <a:ext cx="256032" cy="713232"/>
+          </a:xfrm>
+          <a:prstGeom prst="rect">
+            <a:avLst/>
+          </a:prstGeom>
+          <a:solidFill>
+            <a:srgbClr val="2F8A28"/>
+          </a:solidFill>
+          <a:ln w="12700">
+            <a:solidFill>
+              <a:srgbClr val="2F8A28"/>
+            </a:solidFill>
+            <a:prstDash val="solid"/>
+          </a:ln>
+        </p:spPr>
+      </p:sp>
+      <p:sp>
+        <p:nvSpPr>
+          <p:cNvPr id="16" name="Shape 14"/>
+          <p:cNvSpPr/>
+          <p:nvPr/>
+        </p:nvSpPr>
+        <p:spPr>
+          <a:xfrm>
+            <a:off x="9015984" y="2880360"/>
+            <a:ext cx="256032" cy="1005840"/>
+          </a:xfrm>
+          <a:prstGeom prst="rect">
+            <a:avLst/>
+          </a:prstGeom>
+          <a:solidFill>
+            <a:srgbClr val="D69A2D"/>
+          </a:solidFill>
+          <a:ln w="12700">
+            <a:solidFill>
+              <a:srgbClr val="D69A2D"/>
+            </a:solidFill>
+            <a:prstDash val="solid"/>
+          </a:ln>
+        </p:spPr>
+      </p:sp>
+      <p:sp>
+        <p:nvSpPr>
+          <p:cNvPr id="17" name="Shape 15"/>
+          <p:cNvSpPr/>
+          <p:nvPr/>
+        </p:nvSpPr>
+        <p:spPr>
+          <a:xfrm>
+            <a:off x="9454896" y="3319272"/>
+            <a:ext cx="256032" cy="566928"/>
+          </a:xfrm>
+          <a:prstGeom prst="rect">
+            <a:avLst/>
+          </a:prstGeom>
+          <a:solidFill>
+            <a:srgbClr val="6A4CA3"/>
+          </a:solidFill>
+          <a:ln w="12700">
+            <a:solidFill>
+              <a:srgbClr val="6A4CA3"/>
+            </a:solidFill>
+            <a:prstDash val="solid"/>
+          </a:ln>
+        </p:spPr>
+      </p:sp>
+      <p:sp>
+        <p:nvSpPr>
+          <p:cNvPr id="18" name="Shape 16"/>
+          <p:cNvSpPr/>
+          <p:nvPr/>
+        </p:nvSpPr>
+        <p:spPr>
+          <a:xfrm>
+            <a:off x="8019288" y="3886200"/>
+            <a:ext cx="2706624" cy="0"/>
+          </a:xfrm>
+          <a:prstGeom prst="line">
+            <a:avLst/>
+          </a:prstGeom>
+          <a:noFill/>
+          <a:ln w="15240">
+            <a:solidFill>
+              <a:srgbClr val="003A63"/>
+            </a:solidFill>
+            <a:prstDash val="solid"/>
+          </a:ln>
+        </p:spPr>
+      </p:sp>
+      <p:sp>
+        <p:nvSpPr>
+          <p:cNvPr id="19" name="Text 17"/>
+          <p:cNvSpPr/>
+          <p:nvPr/>
+        </p:nvSpPr>
+        <p:spPr>
+          <a:xfrm>
+            <a:off x="7863840" y="3017520"/>
+            <a:ext cx="3017520" cy="201168"/>
+          </a:xfrm>
+          <a:prstGeom prst="rect">
+            <a:avLst/>
+          </a:prstGeom>
+          <a:noFill/>
+          <a:ln/>
+        </p:spPr>
+        <p:txBody>
+          <a:bodyPr wrap="square" lIns="0" tIns="0" rIns="0" bIns="0" rtlCol="0" anchor="ctr"/>
+          <a:lstStyle/>
+          <a:p>
+            <a:pPr algn="ctr" indent="0" marL="0">
+              <a:buNone/>
+            </a:pPr>
+            <a:r>
+              <a:rPr lang="en-US" sz="1050" b="1" dirty="0">
+                <a:solidFill>
+                  <a:srgbClr val="003A63"/>
+                </a:solidFill>
+                <a:latin typeface="Aptos" pitchFamily="34" charset="0"/>
+                <a:ea typeface="Aptos" pitchFamily="34" charset="-122"/>
+                <a:cs typeface="Aptos" pitchFamily="34" charset="-120"/>
+              </a:rPr>
+              <a:t>Measure and monitor</a:t>
+            </a:r>
+            <a:endParaRPr lang="en-US" sz="1050" dirty="0"/>
+          </a:p>
+        </p:txBody>
+      </p:sp>
+      <p:sp>
+        <p:nvSpPr>
+          <p:cNvPr id="20" name="Shape 18"/>
+          <p:cNvSpPr/>
+          <p:nvPr/>
+        </p:nvSpPr>
+        <p:spPr>
+          <a:xfrm>
+            <a:off x="7635240" y="4498848"/>
+            <a:ext cx="3474720" cy="1143000"/>
+          </a:xfrm>
+          <a:prstGeom prst="roundRect">
+            <a:avLst>
+              <a:gd name="adj" fmla="val 9600"/>
+            </a:avLst>
+          </a:prstGeom>
+          <a:solidFill>
             <a:srgbClr val="EAF6F8"/>
           </a:solidFill>
           <a:ln w="12700">
@@ -11591,14 +13298,14 @@
       </p:sp>
       <p:sp>
         <p:nvSpPr>
-          <p:cNvPr id="16" name="Text 14"/>
-          <p:cNvSpPr/>
-          <p:nvPr/>
-        </p:nvSpPr>
-        <p:spPr>
-          <a:xfrm>
-            <a:off x="8074152" y="3666744"/>
-            <a:ext cx="2825496" cy="256032"/>
+          <p:cNvPr id="21" name="Text 19"/>
+          <p:cNvSpPr/>
+          <p:nvPr/>
+        </p:nvSpPr>
+        <p:spPr>
+          <a:xfrm>
+            <a:off x="7799832" y="4645152"/>
+            <a:ext cx="3145536" cy="256032"/>
           </a:xfrm>
           <a:prstGeom prst="rect">
             <a:avLst/>
@@ -11622,7 +13329,7 @@
                 <a:ea typeface="Aptos" pitchFamily="34" charset="-122"/>
                 <a:cs typeface="Aptos" pitchFamily="34" charset="-120"/>
               </a:rPr>
-              <a:t>Use this for</a:t>
+              <a:t>How to validate</a:t>
             </a:r>
             <a:endParaRPr lang="en-US" sz="1300" dirty="0"/>
           </a:p>
@@ -11630,14 +13337,14 @@
       </p:sp>
       <p:sp>
         <p:nvSpPr>
-          <p:cNvPr id="17" name="Text 15"/>
-          <p:cNvSpPr/>
-          <p:nvPr/>
-        </p:nvSpPr>
-        <p:spPr>
-          <a:xfrm>
-            <a:off x="8074152" y="4023360"/>
-            <a:ext cx="2825496" cy="1097280"/>
+          <p:cNvPr id="22" name="Text 20"/>
+          <p:cNvSpPr/>
+          <p:nvPr/>
+        </p:nvSpPr>
+        <p:spPr>
+          <a:xfrm>
+            <a:off x="7799832" y="5001768"/>
+            <a:ext cx="3145536" cy="502920"/>
           </a:xfrm>
           <a:prstGeom prst="rect">
             <a:avLst/>
@@ -11663,7 +13370,7 @@
                 <a:ea typeface="Aptos" pitchFamily="34" charset="-122"/>
                 <a:cs typeface="Aptos" pitchFamily="34" charset="-120"/>
               </a:rPr>
-              <a:t>Connect the concept to public health decisions, safeguards, documentation, or implementation work.</a:t>
+              <a:t>Connect the concept to data quality, model performance, validation evidence, monitoring measures, and decisions that remain under human control.</a:t>
             </a:r>
             <a:endParaRPr lang="en-US" sz="1550" dirty="0"/>
           </a:p>
@@ -11837,8 +13544,8 @@
         </p:nvSpPr>
         <p:spPr>
           <a:xfrm>
-            <a:off x="9966960" y="6537960"/>
-            <a:ext cx="1645920" cy="201168"/>
+            <a:off x="9646920" y="6537960"/>
+            <a:ext cx="1965960" cy="201168"/>
           </a:xfrm>
           <a:prstGeom prst="rect">
             <a:avLst/>
@@ -11862,7 +13569,7 @@
                 <a:ea typeface="Aptos" pitchFamily="34" charset="-122"/>
                 <a:cs typeface="Aptos" pitchFamily="34" charset="-120"/>
               </a:rPr>
-              <a:t>Â© Paula Soper</a:t>
+              <a:t>Copyright Paula Soper</a:t>
             </a:r>
             <a:endParaRPr lang="en-US" sz="800" dirty="0"/>
           </a:p>
@@ -12205,46 +13912,7 @@
       </p:sp>
       <p:sp>
         <p:nvSpPr>
-          <p:cNvPr id="15" name="Text 13"/>
-          <p:cNvSpPr/>
-          <p:nvPr/>
-        </p:nvSpPr>
-        <p:spPr>
-          <a:xfrm>
-            <a:off x="8817864" y="4187952"/>
-            <a:ext cx="201168" cy="256032"/>
-          </a:xfrm>
-          <a:prstGeom prst="rect">
-            <a:avLst/>
-          </a:prstGeom>
-          <a:noFill/>
-          <a:ln/>
-        </p:spPr>
-        <p:txBody>
-          <a:bodyPr wrap="square" lIns="0" tIns="0" rIns="0" bIns="0" rtlCol="0" anchor="ctr"/>
-          <a:lstStyle/>
-          <a:p>
-            <a:pPr algn="ctr" indent="0" marL="0">
-              <a:buNone/>
-            </a:pPr>
-            <a:r>
-              <a:rPr lang="en-US" sz="1800" b="1" dirty="0">
-                <a:solidFill>
-                  <a:srgbClr val="0068B7"/>
-                </a:solidFill>
-                <a:latin typeface="Aptos" pitchFamily="34" charset="0"/>
-                <a:ea typeface="Aptos" pitchFamily="34" charset="-122"/>
-                <a:cs typeface="Aptos" pitchFamily="34" charset="-120"/>
-              </a:rPr>
-              <a:t>â†’</a:t>
-            </a:r>
-            <a:endParaRPr lang="en-US" sz="1800" dirty="0"/>
-          </a:p>
-        </p:txBody>
-      </p:sp>
-      <p:sp>
-        <p:nvSpPr>
-          <p:cNvPr id="16" name="Shape 14"/>
+          <p:cNvPr id="15" name="Shape 13"/>
           <p:cNvSpPr/>
           <p:nvPr/>
         </p:nvSpPr>
@@ -12271,7 +13939,7 @@
       </p:sp>
       <p:sp>
         <p:nvSpPr>
-          <p:cNvPr id="17" name="Text 15"/>
+          <p:cNvPr id="16" name="Text 14"/>
           <p:cNvSpPr/>
           <p:nvPr/>
         </p:nvSpPr>
@@ -12312,46 +13980,7 @@
       </p:sp>
       <p:sp>
         <p:nvSpPr>
-          <p:cNvPr id="18" name="Text 16"/>
-          <p:cNvSpPr/>
-          <p:nvPr/>
-        </p:nvSpPr>
-        <p:spPr>
-          <a:xfrm>
-            <a:off x="10046208" y="4187952"/>
-            <a:ext cx="201168" cy="256032"/>
-          </a:xfrm>
-          <a:prstGeom prst="rect">
-            <a:avLst/>
-          </a:prstGeom>
-          <a:noFill/>
-          <a:ln/>
-        </p:spPr>
-        <p:txBody>
-          <a:bodyPr wrap="square" lIns="0" tIns="0" rIns="0" bIns="0" rtlCol="0" anchor="ctr"/>
-          <a:lstStyle/>
-          <a:p>
-            <a:pPr algn="ctr" indent="0" marL="0">
-              <a:buNone/>
-            </a:pPr>
-            <a:r>
-              <a:rPr lang="en-US" sz="1800" b="1" dirty="0">
-                <a:solidFill>
-                  <a:srgbClr val="0068B7"/>
-                </a:solidFill>
-                <a:latin typeface="Aptos" pitchFamily="34" charset="0"/>
-                <a:ea typeface="Aptos" pitchFamily="34" charset="-122"/>
-                <a:cs typeface="Aptos" pitchFamily="34" charset="-120"/>
-              </a:rPr>
-              <a:t>â†’</a:t>
-            </a:r>
-            <a:endParaRPr lang="en-US" sz="1800" dirty="0"/>
-          </a:p>
-        </p:txBody>
-      </p:sp>
-      <p:sp>
-        <p:nvSpPr>
-          <p:cNvPr id="19" name="Shape 17"/>
+          <p:cNvPr id="17" name="Shape 15"/>
           <p:cNvSpPr/>
           <p:nvPr/>
         </p:nvSpPr>
@@ -12378,7 +14007,7 @@
       </p:sp>
       <p:sp>
         <p:nvSpPr>
-          <p:cNvPr id="20" name="Text 18"/>
+          <p:cNvPr id="18" name="Text 16"/>
           <p:cNvSpPr/>
           <p:nvPr/>
         </p:nvSpPr>
@@ -12585,8 +14214,8 @@
         </p:nvSpPr>
         <p:spPr>
           <a:xfrm>
-            <a:off x="9966960" y="6537960"/>
-            <a:ext cx="1645920" cy="201168"/>
+            <a:off x="9646920" y="6537960"/>
+            <a:ext cx="1965960" cy="201168"/>
           </a:xfrm>
           <a:prstGeom prst="rect">
             <a:avLst/>
@@ -12610,7 +14239,7 @@
                 <a:ea typeface="Aptos" pitchFamily="34" charset="-122"/>
                 <a:cs typeface="Aptos" pitchFamily="34" charset="-120"/>
               </a:rPr>
-              <a:t>Â© Paula Soper</a:t>
+              <a:t>Copyright Paula Soper</a:t>
             </a:r>
             <a:endParaRPr lang="en-US" sz="800" dirty="0"/>
           </a:p>
@@ -12953,46 +14582,7 @@
       </p:sp>
       <p:sp>
         <p:nvSpPr>
-          <p:cNvPr id="15" name="Text 13"/>
-          <p:cNvSpPr/>
-          <p:nvPr/>
-        </p:nvSpPr>
-        <p:spPr>
-          <a:xfrm>
-            <a:off x="8817864" y="4187952"/>
-            <a:ext cx="201168" cy="256032"/>
-          </a:xfrm>
-          <a:prstGeom prst="rect">
-            <a:avLst/>
-          </a:prstGeom>
-          <a:noFill/>
-          <a:ln/>
-        </p:spPr>
-        <p:txBody>
-          <a:bodyPr wrap="square" lIns="0" tIns="0" rIns="0" bIns="0" rtlCol="0" anchor="ctr"/>
-          <a:lstStyle/>
-          <a:p>
-            <a:pPr algn="ctr" indent="0" marL="0">
-              <a:buNone/>
-            </a:pPr>
-            <a:r>
-              <a:rPr lang="en-US" sz="1800" b="1" dirty="0">
-                <a:solidFill>
-                  <a:srgbClr val="0068B7"/>
-                </a:solidFill>
-                <a:latin typeface="Aptos" pitchFamily="34" charset="0"/>
-                <a:ea typeface="Aptos" pitchFamily="34" charset="-122"/>
-                <a:cs typeface="Aptos" pitchFamily="34" charset="-120"/>
-              </a:rPr>
-              <a:t>â†’</a:t>
-            </a:r>
-            <a:endParaRPr lang="en-US" sz="1800" dirty="0"/>
-          </a:p>
-        </p:txBody>
-      </p:sp>
-      <p:sp>
-        <p:nvSpPr>
-          <p:cNvPr id="16" name="Shape 14"/>
+          <p:cNvPr id="15" name="Shape 13"/>
           <p:cNvSpPr/>
           <p:nvPr/>
         </p:nvSpPr>
@@ -13019,7 +14609,7 @@
       </p:sp>
       <p:sp>
         <p:nvSpPr>
-          <p:cNvPr id="17" name="Text 15"/>
+          <p:cNvPr id="16" name="Text 14"/>
           <p:cNvSpPr/>
           <p:nvPr/>
         </p:nvSpPr>
@@ -13060,46 +14650,7 @@
       </p:sp>
       <p:sp>
         <p:nvSpPr>
-          <p:cNvPr id="18" name="Text 16"/>
-          <p:cNvSpPr/>
-          <p:nvPr/>
-        </p:nvSpPr>
-        <p:spPr>
-          <a:xfrm>
-            <a:off x="10046208" y="4187952"/>
-            <a:ext cx="201168" cy="256032"/>
-          </a:xfrm>
-          <a:prstGeom prst="rect">
-            <a:avLst/>
-          </a:prstGeom>
-          <a:noFill/>
-          <a:ln/>
-        </p:spPr>
-        <p:txBody>
-          <a:bodyPr wrap="square" lIns="0" tIns="0" rIns="0" bIns="0" rtlCol="0" anchor="ctr"/>
-          <a:lstStyle/>
-          <a:p>
-            <a:pPr algn="ctr" indent="0" marL="0">
-              <a:buNone/>
-            </a:pPr>
-            <a:r>
-              <a:rPr lang="en-US" sz="1800" b="1" dirty="0">
-                <a:solidFill>
-                  <a:srgbClr val="0068B7"/>
-                </a:solidFill>
-                <a:latin typeface="Aptos" pitchFamily="34" charset="0"/>
-                <a:ea typeface="Aptos" pitchFamily="34" charset="-122"/>
-                <a:cs typeface="Aptos" pitchFamily="34" charset="-120"/>
-              </a:rPr>
-              <a:t>â†’</a:t>
-            </a:r>
-            <a:endParaRPr lang="en-US" sz="1800" dirty="0"/>
-          </a:p>
-        </p:txBody>
-      </p:sp>
-      <p:sp>
-        <p:nvSpPr>
-          <p:cNvPr id="19" name="Shape 17"/>
+          <p:cNvPr id="17" name="Shape 15"/>
           <p:cNvSpPr/>
           <p:nvPr/>
         </p:nvSpPr>
@@ -13126,7 +14677,7 @@
       </p:sp>
       <p:sp>
         <p:nvSpPr>
-          <p:cNvPr id="20" name="Text 18"/>
+          <p:cNvPr id="18" name="Text 16"/>
           <p:cNvSpPr/>
           <p:nvPr/>
         </p:nvSpPr>
@@ -13333,8 +14884,8 @@
         </p:nvSpPr>
         <p:spPr>
           <a:xfrm>
-            <a:off x="9966960" y="6537960"/>
-            <a:ext cx="1645920" cy="201168"/>
+            <a:off x="9646920" y="6537960"/>
+            <a:ext cx="1965960" cy="201168"/>
           </a:xfrm>
           <a:prstGeom prst="rect">
             <a:avLst/>
@@ -13358,7 +14909,7 @@
                 <a:ea typeface="Aptos" pitchFamily="34" charset="-122"/>
                 <a:cs typeface="Aptos" pitchFamily="34" charset="-120"/>
               </a:rPr>
-              <a:t>Â© Paula Soper</a:t>
+              <a:t>Copyright Paula Soper</a:t>
             </a:r>
             <a:endParaRPr lang="en-US" sz="800" dirty="0"/>
           </a:p>
@@ -13405,77 +14956,13 @@
       </p:sp>
       <p:sp>
         <p:nvSpPr>
-          <p:cNvPr id="8" name="Shape 6"/>
+          <p:cNvPr id="8" name="Text 6"/>
           <p:cNvSpPr/>
           <p:nvPr/>
         </p:nvSpPr>
         <p:spPr>
           <a:xfrm>
             <a:off x="640080" y="658368"/>
-            <a:ext cx="420624" cy="420624"/>
-          </a:xfrm>
-          <a:prstGeom prst="ellipse">
-            <a:avLst/>
-          </a:prstGeom>
-          <a:solidFill>
-            <a:srgbClr val="0068B7"/>
-          </a:solidFill>
-          <a:ln w="12700">
-            <a:solidFill>
-              <a:srgbClr val="0068B7"/>
-            </a:solidFill>
-            <a:prstDash val="solid"/>
-          </a:ln>
-        </p:spPr>
-      </p:sp>
-      <p:sp>
-        <p:nvSpPr>
-          <p:cNvPr id="9" name="Text 7"/>
-          <p:cNvSpPr/>
-          <p:nvPr/>
-        </p:nvSpPr>
-        <p:spPr>
-          <a:xfrm>
-            <a:off x="640080" y="731520"/>
-            <a:ext cx="420624" cy="164592"/>
-          </a:xfrm>
-          <a:prstGeom prst="rect">
-            <a:avLst/>
-          </a:prstGeom>
-          <a:noFill/>
-          <a:ln/>
-        </p:spPr>
-        <p:txBody>
-          <a:bodyPr wrap="square" lIns="0" tIns="0" rIns="0" bIns="0" rtlCol="0" anchor="ctr"/>
-          <a:lstStyle/>
-          <a:p>
-            <a:pPr algn="ctr" indent="0" marL="0">
-              <a:buNone/>
-            </a:pPr>
-            <a:r>
-              <a:rPr lang="en-US" sz="1100" b="1" dirty="0">
-                <a:solidFill>
-                  <a:srgbClr val="FFFFFF"/>
-                </a:solidFill>
-                <a:latin typeface="Aptos" pitchFamily="34" charset="0"/>
-                <a:ea typeface="Aptos" pitchFamily="34" charset="-122"/>
-                <a:cs typeface="Aptos" pitchFamily="34" charset="-120"/>
-              </a:rPr>
-              <a:t>1</a:t>
-            </a:r>
-            <a:endParaRPr lang="en-US" sz="1100" dirty="0"/>
-          </a:p>
-        </p:txBody>
-      </p:sp>
-      <p:sp>
-        <p:nvSpPr>
-          <p:cNvPr id="10" name="Text 8"/>
-          <p:cNvSpPr/>
-          <p:nvPr/>
-        </p:nvSpPr>
-        <p:spPr>
-          <a:xfrm>
-            <a:off x="640080" y="621792"/>
             <a:ext cx="10881360" cy="713232"/>
           </a:xfrm>
           <a:prstGeom prst="rect">
@@ -13510,14 +14997,14 @@
       </p:sp>
       <p:sp>
         <p:nvSpPr>
-          <p:cNvPr id="11" name="Text 9"/>
+          <p:cNvPr id="9" name="Text 7"/>
           <p:cNvSpPr/>
           <p:nvPr/>
         </p:nvSpPr>
         <p:spPr>
           <a:xfrm>
             <a:off x="868680" y="1508760"/>
-            <a:ext cx="6537960" cy="4160520"/>
+            <a:ext cx="6309360" cy="4160520"/>
           </a:xfrm>
           <a:prstGeom prst="rect">
             <a:avLst/>
@@ -13576,18 +15063,18 @@
       </p:sp>
       <p:sp>
         <p:nvSpPr>
-          <p:cNvPr id="12" name="Shape 10"/>
-          <p:cNvSpPr/>
-          <p:nvPr/>
-        </p:nvSpPr>
-        <p:spPr>
-          <a:xfrm>
-            <a:off x="7909560" y="1417320"/>
-            <a:ext cx="3154680" cy="1828800"/>
+          <p:cNvPr id="10" name="Shape 8"/>
+          <p:cNvSpPr/>
+          <p:nvPr/>
+        </p:nvSpPr>
+        <p:spPr>
+          <a:xfrm>
+            <a:off x="7635240" y="1325880"/>
+            <a:ext cx="3474720" cy="1325880"/>
           </a:xfrm>
           <a:prstGeom prst="roundRect">
             <a:avLst>
-              <a:gd name="adj" fmla="val 6000"/>
+              <a:gd name="adj" fmla="val 8276"/>
             </a:avLst>
           </a:prstGeom>
           <a:solidFill>
@@ -13603,14 +15090,14 @@
       </p:sp>
       <p:sp>
         <p:nvSpPr>
-          <p:cNvPr id="13" name="Text 11"/>
-          <p:cNvSpPr/>
-          <p:nvPr/>
-        </p:nvSpPr>
-        <p:spPr>
-          <a:xfrm>
-            <a:off x="8074152" y="1563624"/>
-            <a:ext cx="2825496" cy="256032"/>
+          <p:cNvPr id="11" name="Text 9"/>
+          <p:cNvSpPr/>
+          <p:nvPr/>
+        </p:nvSpPr>
+        <p:spPr>
+          <a:xfrm>
+            <a:off x="7799832" y="1472184"/>
+            <a:ext cx="3145536" cy="256032"/>
           </a:xfrm>
           <a:prstGeom prst="rect">
             <a:avLst/>
@@ -13634,7 +15121,7 @@
                 <a:ea typeface="Aptos" pitchFamily="34" charset="-122"/>
                 <a:cs typeface="Aptos" pitchFamily="34" charset="-120"/>
               </a:rPr>
-              <a:t>Key idea</a:t>
+              <a:t>Data decision</a:t>
             </a:r>
             <a:endParaRPr lang="en-US" sz="1300" dirty="0"/>
           </a:p>
@@ -13642,14 +15129,14 @@
       </p:sp>
       <p:sp>
         <p:nvSpPr>
-          <p:cNvPr id="14" name="Text 12"/>
-          <p:cNvSpPr/>
-          <p:nvPr/>
-        </p:nvSpPr>
-        <p:spPr>
-          <a:xfrm>
-            <a:off x="8074152" y="1920240"/>
-            <a:ext cx="2825496" cy="1188720"/>
+          <p:cNvPr id="12" name="Text 10"/>
+          <p:cNvSpPr/>
+          <p:nvPr/>
+        </p:nvSpPr>
+        <p:spPr>
+          <a:xfrm>
+            <a:off x="7799832" y="1828800"/>
+            <a:ext cx="3145536" cy="685800"/>
           </a:xfrm>
           <a:prstGeom prst="rect">
             <a:avLst/>
@@ -13683,21 +15170,212 @@
       </p:sp>
       <p:sp>
         <p:nvSpPr>
-          <p:cNvPr id="15" name="Shape 13"/>
-          <p:cNvSpPr/>
-          <p:nvPr/>
-        </p:nvSpPr>
-        <p:spPr>
-          <a:xfrm>
-            <a:off x="7909560" y="3520440"/>
-            <a:ext cx="3154680" cy="1737360"/>
+          <p:cNvPr id="13" name="Shape 11"/>
+          <p:cNvSpPr/>
+          <p:nvPr/>
+        </p:nvSpPr>
+        <p:spPr>
+          <a:xfrm>
+            <a:off x="7635240" y="2788920"/>
+            <a:ext cx="3474720" cy="1536192"/>
           </a:xfrm>
           <a:prstGeom prst="roundRect">
             <a:avLst>
-              <a:gd name="adj" fmla="val 6316"/>
+              <a:gd name="adj" fmla="val 7143"/>
             </a:avLst>
           </a:prstGeom>
           <a:solidFill>
+            <a:srgbClr val="FFFFFF">
+              <a:alpha val="88000"/>
+            </a:srgbClr>
+          </a:solidFill>
+          <a:ln w="12700">
+            <a:solidFill>
+              <a:srgbClr val="D6E8F2"/>
+            </a:solidFill>
+            <a:prstDash val="solid"/>
+          </a:ln>
+        </p:spPr>
+      </p:sp>
+      <p:sp>
+        <p:nvSpPr>
+          <p:cNvPr id="14" name="Shape 12"/>
+          <p:cNvSpPr/>
+          <p:nvPr/>
+        </p:nvSpPr>
+        <p:spPr>
+          <a:xfrm>
+            <a:off x="8138160" y="3474720"/>
+            <a:ext cx="256032" cy="411480"/>
+          </a:xfrm>
+          <a:prstGeom prst="rect">
+            <a:avLst/>
+          </a:prstGeom>
+          <a:solidFill>
+            <a:srgbClr val="0068B7"/>
+          </a:solidFill>
+          <a:ln w="12700">
+            <a:solidFill>
+              <a:srgbClr val="0068B7"/>
+            </a:solidFill>
+            <a:prstDash val="solid"/>
+          </a:ln>
+        </p:spPr>
+      </p:sp>
+      <p:sp>
+        <p:nvSpPr>
+          <p:cNvPr id="15" name="Shape 13"/>
+          <p:cNvSpPr/>
+          <p:nvPr/>
+        </p:nvSpPr>
+        <p:spPr>
+          <a:xfrm>
+            <a:off x="8577072" y="3172968"/>
+            <a:ext cx="256032" cy="713232"/>
+          </a:xfrm>
+          <a:prstGeom prst="rect">
+            <a:avLst/>
+          </a:prstGeom>
+          <a:solidFill>
+            <a:srgbClr val="2F8A28"/>
+          </a:solidFill>
+          <a:ln w="12700">
+            <a:solidFill>
+              <a:srgbClr val="2F8A28"/>
+            </a:solidFill>
+            <a:prstDash val="solid"/>
+          </a:ln>
+        </p:spPr>
+      </p:sp>
+      <p:sp>
+        <p:nvSpPr>
+          <p:cNvPr id="16" name="Shape 14"/>
+          <p:cNvSpPr/>
+          <p:nvPr/>
+        </p:nvSpPr>
+        <p:spPr>
+          <a:xfrm>
+            <a:off x="9015984" y="2880360"/>
+            <a:ext cx="256032" cy="1005840"/>
+          </a:xfrm>
+          <a:prstGeom prst="rect">
+            <a:avLst/>
+          </a:prstGeom>
+          <a:solidFill>
+            <a:srgbClr val="D69A2D"/>
+          </a:solidFill>
+          <a:ln w="12700">
+            <a:solidFill>
+              <a:srgbClr val="D69A2D"/>
+            </a:solidFill>
+            <a:prstDash val="solid"/>
+          </a:ln>
+        </p:spPr>
+      </p:sp>
+      <p:sp>
+        <p:nvSpPr>
+          <p:cNvPr id="17" name="Shape 15"/>
+          <p:cNvSpPr/>
+          <p:nvPr/>
+        </p:nvSpPr>
+        <p:spPr>
+          <a:xfrm>
+            <a:off x="9454896" y="3319272"/>
+            <a:ext cx="256032" cy="566928"/>
+          </a:xfrm>
+          <a:prstGeom prst="rect">
+            <a:avLst/>
+          </a:prstGeom>
+          <a:solidFill>
+            <a:srgbClr val="6A4CA3"/>
+          </a:solidFill>
+          <a:ln w="12700">
+            <a:solidFill>
+              <a:srgbClr val="6A4CA3"/>
+            </a:solidFill>
+            <a:prstDash val="solid"/>
+          </a:ln>
+        </p:spPr>
+      </p:sp>
+      <p:sp>
+        <p:nvSpPr>
+          <p:cNvPr id="18" name="Shape 16"/>
+          <p:cNvSpPr/>
+          <p:nvPr/>
+        </p:nvSpPr>
+        <p:spPr>
+          <a:xfrm>
+            <a:off x="8019288" y="3886200"/>
+            <a:ext cx="2706624" cy="0"/>
+          </a:xfrm>
+          <a:prstGeom prst="line">
+            <a:avLst/>
+          </a:prstGeom>
+          <a:noFill/>
+          <a:ln w="15240">
+            <a:solidFill>
+              <a:srgbClr val="003A63"/>
+            </a:solidFill>
+            <a:prstDash val="solid"/>
+          </a:ln>
+        </p:spPr>
+      </p:sp>
+      <p:sp>
+        <p:nvSpPr>
+          <p:cNvPr id="19" name="Text 17"/>
+          <p:cNvSpPr/>
+          <p:nvPr/>
+        </p:nvSpPr>
+        <p:spPr>
+          <a:xfrm>
+            <a:off x="7863840" y="3017520"/>
+            <a:ext cx="3017520" cy="201168"/>
+          </a:xfrm>
+          <a:prstGeom prst="rect">
+            <a:avLst/>
+          </a:prstGeom>
+          <a:noFill/>
+          <a:ln/>
+        </p:spPr>
+        <p:txBody>
+          <a:bodyPr wrap="square" lIns="0" tIns="0" rIns="0" bIns="0" rtlCol="0" anchor="ctr"/>
+          <a:lstStyle/>
+          <a:p>
+            <a:pPr algn="ctr" indent="0" marL="0">
+              <a:buNone/>
+            </a:pPr>
+            <a:r>
+              <a:rPr lang="en-US" sz="1050" b="1" dirty="0">
+                <a:solidFill>
+                  <a:srgbClr val="003A63"/>
+                </a:solidFill>
+                <a:latin typeface="Aptos" pitchFamily="34" charset="0"/>
+                <a:ea typeface="Aptos" pitchFamily="34" charset="-122"/>
+                <a:cs typeface="Aptos" pitchFamily="34" charset="-120"/>
+              </a:rPr>
+              <a:t>Measure and monitor</a:t>
+            </a:r>
+            <a:endParaRPr lang="en-US" sz="1050" dirty="0"/>
+          </a:p>
+        </p:txBody>
+      </p:sp>
+      <p:sp>
+        <p:nvSpPr>
+          <p:cNvPr id="20" name="Shape 18"/>
+          <p:cNvSpPr/>
+          <p:nvPr/>
+        </p:nvSpPr>
+        <p:spPr>
+          <a:xfrm>
+            <a:off x="7635240" y="4498848"/>
+            <a:ext cx="3474720" cy="1143000"/>
+          </a:xfrm>
+          <a:prstGeom prst="roundRect">
+            <a:avLst>
+              <a:gd name="adj" fmla="val 9600"/>
+            </a:avLst>
+          </a:prstGeom>
+          <a:solidFill>
             <a:srgbClr val="EAF6F8"/>
           </a:solidFill>
           <a:ln w="12700">
@@ -13710,14 +15388,14 @@
       </p:sp>
       <p:sp>
         <p:nvSpPr>
-          <p:cNvPr id="16" name="Text 14"/>
-          <p:cNvSpPr/>
-          <p:nvPr/>
-        </p:nvSpPr>
-        <p:spPr>
-          <a:xfrm>
-            <a:off x="8074152" y="3666744"/>
-            <a:ext cx="2825496" cy="256032"/>
+          <p:cNvPr id="21" name="Text 19"/>
+          <p:cNvSpPr/>
+          <p:nvPr/>
+        </p:nvSpPr>
+        <p:spPr>
+          <a:xfrm>
+            <a:off x="7799832" y="4645152"/>
+            <a:ext cx="3145536" cy="256032"/>
           </a:xfrm>
           <a:prstGeom prst="rect">
             <a:avLst/>
@@ -13741,7 +15419,7 @@
                 <a:ea typeface="Aptos" pitchFamily="34" charset="-122"/>
                 <a:cs typeface="Aptos" pitchFamily="34" charset="-120"/>
               </a:rPr>
-              <a:t>Use this for</a:t>
+              <a:t>How to validate</a:t>
             </a:r>
             <a:endParaRPr lang="en-US" sz="1300" dirty="0"/>
           </a:p>
@@ -13749,14 +15427,14 @@
       </p:sp>
       <p:sp>
         <p:nvSpPr>
-          <p:cNvPr id="17" name="Text 15"/>
-          <p:cNvSpPr/>
-          <p:nvPr/>
-        </p:nvSpPr>
-        <p:spPr>
-          <a:xfrm>
-            <a:off x="8074152" y="4023360"/>
-            <a:ext cx="2825496" cy="1097280"/>
+          <p:cNvPr id="22" name="Text 20"/>
+          <p:cNvSpPr/>
+          <p:nvPr/>
+        </p:nvSpPr>
+        <p:spPr>
+          <a:xfrm>
+            <a:off x="7799832" y="5001768"/>
+            <a:ext cx="3145536" cy="502920"/>
           </a:xfrm>
           <a:prstGeom prst="rect">
             <a:avLst/>
@@ -13782,7 +15460,7 @@
                 <a:ea typeface="Aptos" pitchFamily="34" charset="-122"/>
                 <a:cs typeface="Aptos" pitchFamily="34" charset="-120"/>
               </a:rPr>
-              <a:t>Connect the concept to public health decisions, safeguards, documentation, or implementation work.</a:t>
+              <a:t>Use the assignment to test whether you can explain the concept, apply it to a realistic public health situation, and identify what would need review before the work moves forward.</a:t>
             </a:r>
             <a:endParaRPr lang="en-US" sz="1550" dirty="0"/>
           </a:p>
@@ -13956,8 +15634,8 @@
         </p:nvSpPr>
         <p:spPr>
           <a:xfrm>
-            <a:off x="9966960" y="6537960"/>
-            <a:ext cx="1645920" cy="201168"/>
+            <a:off x="9646920" y="6537960"/>
+            <a:ext cx="1965960" cy="201168"/>
           </a:xfrm>
           <a:prstGeom prst="rect">
             <a:avLst/>
@@ -13981,7 +15659,7 @@
                 <a:ea typeface="Aptos" pitchFamily="34" charset="-122"/>
                 <a:cs typeface="Aptos" pitchFamily="34" charset="-120"/>
               </a:rPr>
-              <a:t>Â© Paula Soper</a:t>
+              <a:t>Copyright Paula Soper</a:t>
             </a:r>
             <a:endParaRPr lang="en-US" sz="800" dirty="0"/>
           </a:p>
@@ -14028,77 +15706,13 @@
       </p:sp>
       <p:sp>
         <p:nvSpPr>
-          <p:cNvPr id="8" name="Shape 6"/>
+          <p:cNvPr id="8" name="Text 6"/>
           <p:cNvSpPr/>
           <p:nvPr/>
         </p:nvSpPr>
         <p:spPr>
           <a:xfrm>
             <a:off x="640080" y="658368"/>
-            <a:ext cx="420624" cy="420624"/>
-          </a:xfrm>
-          <a:prstGeom prst="ellipse">
-            <a:avLst/>
-          </a:prstGeom>
-          <a:solidFill>
-            <a:srgbClr val="0068B7"/>
-          </a:solidFill>
-          <a:ln w="12700">
-            <a:solidFill>
-              <a:srgbClr val="0068B7"/>
-            </a:solidFill>
-            <a:prstDash val="solid"/>
-          </a:ln>
-        </p:spPr>
-      </p:sp>
-      <p:sp>
-        <p:nvSpPr>
-          <p:cNvPr id="9" name="Text 7"/>
-          <p:cNvSpPr/>
-          <p:nvPr/>
-        </p:nvSpPr>
-        <p:spPr>
-          <a:xfrm>
-            <a:off x="640080" y="731520"/>
-            <a:ext cx="420624" cy="164592"/>
-          </a:xfrm>
-          <a:prstGeom prst="rect">
-            <a:avLst/>
-          </a:prstGeom>
-          <a:noFill/>
-          <a:ln/>
-        </p:spPr>
-        <p:txBody>
-          <a:bodyPr wrap="square" lIns="0" tIns="0" rIns="0" bIns="0" rtlCol="0" anchor="ctr"/>
-          <a:lstStyle/>
-          <a:p>
-            <a:pPr algn="ctr" indent="0" marL="0">
-              <a:buNone/>
-            </a:pPr>
-            <a:r>
-              <a:rPr lang="en-US" sz="1100" b="1" dirty="0">
-                <a:solidFill>
-                  <a:srgbClr val="FFFFFF"/>
-                </a:solidFill>
-                <a:latin typeface="Aptos" pitchFamily="34" charset="0"/>
-                <a:ea typeface="Aptos" pitchFamily="34" charset="-122"/>
-                <a:cs typeface="Aptos" pitchFamily="34" charset="-120"/>
-              </a:rPr>
-              <a:t>2</a:t>
-            </a:r>
-            <a:endParaRPr lang="en-US" sz="1100" dirty="0"/>
-          </a:p>
-        </p:txBody>
-      </p:sp>
-      <p:sp>
-        <p:nvSpPr>
-          <p:cNvPr id="10" name="Text 8"/>
-          <p:cNvSpPr/>
-          <p:nvPr/>
-        </p:nvSpPr>
-        <p:spPr>
-          <a:xfrm>
-            <a:off x="640080" y="621792"/>
             <a:ext cx="10881360" cy="713232"/>
           </a:xfrm>
           <a:prstGeom prst="rect">
@@ -14133,14 +15747,14 @@
       </p:sp>
       <p:sp>
         <p:nvSpPr>
-          <p:cNvPr id="11" name="Text 9"/>
+          <p:cNvPr id="9" name="Text 7"/>
           <p:cNvSpPr/>
           <p:nvPr/>
         </p:nvSpPr>
         <p:spPr>
           <a:xfrm>
             <a:off x="868680" y="1508760"/>
-            <a:ext cx="6537960" cy="4160520"/>
+            <a:ext cx="6309360" cy="4160520"/>
           </a:xfrm>
           <a:prstGeom prst="rect">
             <a:avLst/>
@@ -14199,18 +15813,18 @@
       </p:sp>
       <p:sp>
         <p:nvSpPr>
-          <p:cNvPr id="12" name="Shape 10"/>
-          <p:cNvSpPr/>
-          <p:nvPr/>
-        </p:nvSpPr>
-        <p:spPr>
-          <a:xfrm>
-            <a:off x="7909560" y="1417320"/>
-            <a:ext cx="3154680" cy="1828800"/>
+          <p:cNvPr id="10" name="Shape 8"/>
+          <p:cNvSpPr/>
+          <p:nvPr/>
+        </p:nvSpPr>
+        <p:spPr>
+          <a:xfrm>
+            <a:off x="7635240" y="1325880"/>
+            <a:ext cx="3474720" cy="1325880"/>
           </a:xfrm>
           <a:prstGeom prst="roundRect">
             <a:avLst>
-              <a:gd name="adj" fmla="val 6000"/>
+              <a:gd name="adj" fmla="val 8276"/>
             </a:avLst>
           </a:prstGeom>
           <a:solidFill>
@@ -14226,14 +15840,14 @@
       </p:sp>
       <p:sp>
         <p:nvSpPr>
-          <p:cNvPr id="13" name="Text 11"/>
-          <p:cNvSpPr/>
-          <p:nvPr/>
-        </p:nvSpPr>
-        <p:spPr>
-          <a:xfrm>
-            <a:off x="8074152" y="1563624"/>
-            <a:ext cx="2825496" cy="256032"/>
+          <p:cNvPr id="11" name="Text 9"/>
+          <p:cNvSpPr/>
+          <p:nvPr/>
+        </p:nvSpPr>
+        <p:spPr>
+          <a:xfrm>
+            <a:off x="7799832" y="1472184"/>
+            <a:ext cx="3145536" cy="256032"/>
           </a:xfrm>
           <a:prstGeom prst="rect">
             <a:avLst/>
@@ -14257,7 +15871,7 @@
                 <a:ea typeface="Aptos" pitchFamily="34" charset="-122"/>
                 <a:cs typeface="Aptos" pitchFamily="34" charset="-120"/>
               </a:rPr>
-              <a:t>Key idea</a:t>
+              <a:t>Data decision</a:t>
             </a:r>
             <a:endParaRPr lang="en-US" sz="1300" dirty="0"/>
           </a:p>
@@ -14265,14 +15879,14 @@
       </p:sp>
       <p:sp>
         <p:nvSpPr>
-          <p:cNvPr id="14" name="Text 12"/>
-          <p:cNvSpPr/>
-          <p:nvPr/>
-        </p:nvSpPr>
-        <p:spPr>
-          <a:xfrm>
-            <a:off x="8074152" y="1920240"/>
-            <a:ext cx="2825496" cy="1188720"/>
+          <p:cNvPr id="12" name="Text 10"/>
+          <p:cNvSpPr/>
+          <p:nvPr/>
+        </p:nvSpPr>
+        <p:spPr>
+          <a:xfrm>
+            <a:off x="7799832" y="1828800"/>
+            <a:ext cx="3145536" cy="685800"/>
           </a:xfrm>
           <a:prstGeom prst="rect">
             <a:avLst/>
@@ -14306,21 +15920,212 @@
       </p:sp>
       <p:sp>
         <p:nvSpPr>
-          <p:cNvPr id="15" name="Shape 13"/>
-          <p:cNvSpPr/>
-          <p:nvPr/>
-        </p:nvSpPr>
-        <p:spPr>
-          <a:xfrm>
-            <a:off x="7909560" y="3520440"/>
-            <a:ext cx="3154680" cy="1737360"/>
+          <p:cNvPr id="13" name="Shape 11"/>
+          <p:cNvSpPr/>
+          <p:nvPr/>
+        </p:nvSpPr>
+        <p:spPr>
+          <a:xfrm>
+            <a:off x="7635240" y="2788920"/>
+            <a:ext cx="3474720" cy="1536192"/>
           </a:xfrm>
           <a:prstGeom prst="roundRect">
             <a:avLst>
-              <a:gd name="adj" fmla="val 6316"/>
+              <a:gd name="adj" fmla="val 7143"/>
             </a:avLst>
           </a:prstGeom>
           <a:solidFill>
+            <a:srgbClr val="FFFFFF">
+              <a:alpha val="88000"/>
+            </a:srgbClr>
+          </a:solidFill>
+          <a:ln w="12700">
+            <a:solidFill>
+              <a:srgbClr val="D6E8F2"/>
+            </a:solidFill>
+            <a:prstDash val="solid"/>
+          </a:ln>
+        </p:spPr>
+      </p:sp>
+      <p:sp>
+        <p:nvSpPr>
+          <p:cNvPr id="14" name="Shape 12"/>
+          <p:cNvSpPr/>
+          <p:nvPr/>
+        </p:nvSpPr>
+        <p:spPr>
+          <a:xfrm>
+            <a:off x="8138160" y="3474720"/>
+            <a:ext cx="256032" cy="411480"/>
+          </a:xfrm>
+          <a:prstGeom prst="rect">
+            <a:avLst/>
+          </a:prstGeom>
+          <a:solidFill>
+            <a:srgbClr val="0068B7"/>
+          </a:solidFill>
+          <a:ln w="12700">
+            <a:solidFill>
+              <a:srgbClr val="0068B7"/>
+            </a:solidFill>
+            <a:prstDash val="solid"/>
+          </a:ln>
+        </p:spPr>
+      </p:sp>
+      <p:sp>
+        <p:nvSpPr>
+          <p:cNvPr id="15" name="Shape 13"/>
+          <p:cNvSpPr/>
+          <p:nvPr/>
+        </p:nvSpPr>
+        <p:spPr>
+          <a:xfrm>
+            <a:off x="8577072" y="3172968"/>
+            <a:ext cx="256032" cy="713232"/>
+          </a:xfrm>
+          <a:prstGeom prst="rect">
+            <a:avLst/>
+          </a:prstGeom>
+          <a:solidFill>
+            <a:srgbClr val="2F8A28"/>
+          </a:solidFill>
+          <a:ln w="12700">
+            <a:solidFill>
+              <a:srgbClr val="2F8A28"/>
+            </a:solidFill>
+            <a:prstDash val="solid"/>
+          </a:ln>
+        </p:spPr>
+      </p:sp>
+      <p:sp>
+        <p:nvSpPr>
+          <p:cNvPr id="16" name="Shape 14"/>
+          <p:cNvSpPr/>
+          <p:nvPr/>
+        </p:nvSpPr>
+        <p:spPr>
+          <a:xfrm>
+            <a:off x="9015984" y="2880360"/>
+            <a:ext cx="256032" cy="1005840"/>
+          </a:xfrm>
+          <a:prstGeom prst="rect">
+            <a:avLst/>
+          </a:prstGeom>
+          <a:solidFill>
+            <a:srgbClr val="D69A2D"/>
+          </a:solidFill>
+          <a:ln w="12700">
+            <a:solidFill>
+              <a:srgbClr val="D69A2D"/>
+            </a:solidFill>
+            <a:prstDash val="solid"/>
+          </a:ln>
+        </p:spPr>
+      </p:sp>
+      <p:sp>
+        <p:nvSpPr>
+          <p:cNvPr id="17" name="Shape 15"/>
+          <p:cNvSpPr/>
+          <p:nvPr/>
+        </p:nvSpPr>
+        <p:spPr>
+          <a:xfrm>
+            <a:off x="9454896" y="3319272"/>
+            <a:ext cx="256032" cy="566928"/>
+          </a:xfrm>
+          <a:prstGeom prst="rect">
+            <a:avLst/>
+          </a:prstGeom>
+          <a:solidFill>
+            <a:srgbClr val="6A4CA3"/>
+          </a:solidFill>
+          <a:ln w="12700">
+            <a:solidFill>
+              <a:srgbClr val="6A4CA3"/>
+            </a:solidFill>
+            <a:prstDash val="solid"/>
+          </a:ln>
+        </p:spPr>
+      </p:sp>
+      <p:sp>
+        <p:nvSpPr>
+          <p:cNvPr id="18" name="Shape 16"/>
+          <p:cNvSpPr/>
+          <p:nvPr/>
+        </p:nvSpPr>
+        <p:spPr>
+          <a:xfrm>
+            <a:off x="8019288" y="3886200"/>
+            <a:ext cx="2706624" cy="0"/>
+          </a:xfrm>
+          <a:prstGeom prst="line">
+            <a:avLst/>
+          </a:prstGeom>
+          <a:noFill/>
+          <a:ln w="15240">
+            <a:solidFill>
+              <a:srgbClr val="003A63"/>
+            </a:solidFill>
+            <a:prstDash val="solid"/>
+          </a:ln>
+        </p:spPr>
+      </p:sp>
+      <p:sp>
+        <p:nvSpPr>
+          <p:cNvPr id="19" name="Text 17"/>
+          <p:cNvSpPr/>
+          <p:nvPr/>
+        </p:nvSpPr>
+        <p:spPr>
+          <a:xfrm>
+            <a:off x="7863840" y="3017520"/>
+            <a:ext cx="3017520" cy="201168"/>
+          </a:xfrm>
+          <a:prstGeom prst="rect">
+            <a:avLst/>
+          </a:prstGeom>
+          <a:noFill/>
+          <a:ln/>
+        </p:spPr>
+        <p:txBody>
+          <a:bodyPr wrap="square" lIns="0" tIns="0" rIns="0" bIns="0" rtlCol="0" anchor="ctr"/>
+          <a:lstStyle/>
+          <a:p>
+            <a:pPr algn="ctr" indent="0" marL="0">
+              <a:buNone/>
+            </a:pPr>
+            <a:r>
+              <a:rPr lang="en-US" sz="1050" b="1" dirty="0">
+                <a:solidFill>
+                  <a:srgbClr val="003A63"/>
+                </a:solidFill>
+                <a:latin typeface="Aptos" pitchFamily="34" charset="0"/>
+                <a:ea typeface="Aptos" pitchFamily="34" charset="-122"/>
+                <a:cs typeface="Aptos" pitchFamily="34" charset="-120"/>
+              </a:rPr>
+              <a:t>Measure and monitor</a:t>
+            </a:r>
+            <a:endParaRPr lang="en-US" sz="1050" dirty="0"/>
+          </a:p>
+        </p:txBody>
+      </p:sp>
+      <p:sp>
+        <p:nvSpPr>
+          <p:cNvPr id="20" name="Shape 18"/>
+          <p:cNvSpPr/>
+          <p:nvPr/>
+        </p:nvSpPr>
+        <p:spPr>
+          <a:xfrm>
+            <a:off x="7635240" y="4498848"/>
+            <a:ext cx="3474720" cy="1143000"/>
+          </a:xfrm>
+          <a:prstGeom prst="roundRect">
+            <a:avLst>
+              <a:gd name="adj" fmla="val 9600"/>
+            </a:avLst>
+          </a:prstGeom>
+          <a:solidFill>
             <a:srgbClr val="EAF6F8"/>
           </a:solidFill>
           <a:ln w="12700">
@@ -14333,14 +16138,14 @@
       </p:sp>
       <p:sp>
         <p:nvSpPr>
-          <p:cNvPr id="16" name="Text 14"/>
-          <p:cNvSpPr/>
-          <p:nvPr/>
-        </p:nvSpPr>
-        <p:spPr>
-          <a:xfrm>
-            <a:off x="8074152" y="3666744"/>
-            <a:ext cx="2825496" cy="256032"/>
+          <p:cNvPr id="21" name="Text 19"/>
+          <p:cNvSpPr/>
+          <p:nvPr/>
+        </p:nvSpPr>
+        <p:spPr>
+          <a:xfrm>
+            <a:off x="7799832" y="4645152"/>
+            <a:ext cx="3145536" cy="256032"/>
           </a:xfrm>
           <a:prstGeom prst="rect">
             <a:avLst/>
@@ -14364,7 +16169,7 @@
                 <a:ea typeface="Aptos" pitchFamily="34" charset="-122"/>
                 <a:cs typeface="Aptos" pitchFamily="34" charset="-120"/>
               </a:rPr>
-              <a:t>Use this for</a:t>
+              <a:t>How to validate</a:t>
             </a:r>
             <a:endParaRPr lang="en-US" sz="1300" dirty="0"/>
           </a:p>
@@ -14372,14 +16177,14 @@
       </p:sp>
       <p:sp>
         <p:nvSpPr>
-          <p:cNvPr id="17" name="Text 15"/>
-          <p:cNvSpPr/>
-          <p:nvPr/>
-        </p:nvSpPr>
-        <p:spPr>
-          <a:xfrm>
-            <a:off x="8074152" y="4023360"/>
-            <a:ext cx="2825496" cy="1097280"/>
+          <p:cNvPr id="22" name="Text 20"/>
+          <p:cNvSpPr/>
+          <p:nvPr/>
+        </p:nvSpPr>
+        <p:spPr>
+          <a:xfrm>
+            <a:off x="7799832" y="5001768"/>
+            <a:ext cx="3145536" cy="502920"/>
           </a:xfrm>
           <a:prstGeom prst="rect">
             <a:avLst/>
@@ -14405,7 +16210,7 @@
                 <a:ea typeface="Aptos" pitchFamily="34" charset="-122"/>
                 <a:cs typeface="Aptos" pitchFamily="34" charset="-120"/>
               </a:rPr>
-              <a:t>Connect the concept to public health decisions, safeguards, documentation, or implementation work.</a:t>
+              <a:t>Connect the concept to data quality, model performance, validation evidence, monitoring measures, and decisions that remain under human control.</a:t>
             </a:r>
             <a:endParaRPr lang="en-US" sz="1550" dirty="0"/>
           </a:p>
@@ -14579,8 +16384,8 @@
         </p:nvSpPr>
         <p:spPr>
           <a:xfrm>
-            <a:off x="9966960" y="6537960"/>
-            <a:ext cx="1645920" cy="201168"/>
+            <a:off x="9646920" y="6537960"/>
+            <a:ext cx="1965960" cy="201168"/>
           </a:xfrm>
           <a:prstGeom prst="rect">
             <a:avLst/>
@@ -14604,7 +16409,7 @@
                 <a:ea typeface="Aptos" pitchFamily="34" charset="-122"/>
                 <a:cs typeface="Aptos" pitchFamily="34" charset="-120"/>
               </a:rPr>
-              <a:t>Â© Paula Soper</a:t>
+              <a:t>Copyright Paula Soper</a:t>
             </a:r>
             <a:endParaRPr lang="en-US" sz="800" dirty="0"/>
           </a:p>
@@ -14651,77 +16456,13 @@
       </p:sp>
       <p:sp>
         <p:nvSpPr>
-          <p:cNvPr id="8" name="Shape 6"/>
+          <p:cNvPr id="8" name="Text 6"/>
           <p:cNvSpPr/>
           <p:nvPr/>
         </p:nvSpPr>
         <p:spPr>
           <a:xfrm>
             <a:off x="640080" y="658368"/>
-            <a:ext cx="420624" cy="420624"/>
-          </a:xfrm>
-          <a:prstGeom prst="ellipse">
-            <a:avLst/>
-          </a:prstGeom>
-          <a:solidFill>
-            <a:srgbClr val="0068B7"/>
-          </a:solidFill>
-          <a:ln w="12700">
-            <a:solidFill>
-              <a:srgbClr val="0068B7"/>
-            </a:solidFill>
-            <a:prstDash val="solid"/>
-          </a:ln>
-        </p:spPr>
-      </p:sp>
-      <p:sp>
-        <p:nvSpPr>
-          <p:cNvPr id="9" name="Text 7"/>
-          <p:cNvSpPr/>
-          <p:nvPr/>
-        </p:nvSpPr>
-        <p:spPr>
-          <a:xfrm>
-            <a:off x="640080" y="731520"/>
-            <a:ext cx="420624" cy="164592"/>
-          </a:xfrm>
-          <a:prstGeom prst="rect">
-            <a:avLst/>
-          </a:prstGeom>
-          <a:noFill/>
-          <a:ln/>
-        </p:spPr>
-        <p:txBody>
-          <a:bodyPr wrap="square" lIns="0" tIns="0" rIns="0" bIns="0" rtlCol="0" anchor="ctr"/>
-          <a:lstStyle/>
-          <a:p>
-            <a:pPr algn="ctr" indent="0" marL="0">
-              <a:buNone/>
-            </a:pPr>
-            <a:r>
-              <a:rPr lang="en-US" sz="1100" b="1" dirty="0">
-                <a:solidFill>
-                  <a:srgbClr val="FFFFFF"/>
-                </a:solidFill>
-                <a:latin typeface="Aptos" pitchFamily="34" charset="0"/>
-                <a:ea typeface="Aptos" pitchFamily="34" charset="-122"/>
-                <a:cs typeface="Aptos" pitchFamily="34" charset="-120"/>
-              </a:rPr>
-              <a:t>3</a:t>
-            </a:r>
-            <a:endParaRPr lang="en-US" sz="1100" dirty="0"/>
-          </a:p>
-        </p:txBody>
-      </p:sp>
-      <p:sp>
-        <p:nvSpPr>
-          <p:cNvPr id="10" name="Text 8"/>
-          <p:cNvSpPr/>
-          <p:nvPr/>
-        </p:nvSpPr>
-        <p:spPr>
-          <a:xfrm>
-            <a:off x="640080" y="621792"/>
             <a:ext cx="10881360" cy="713232"/>
           </a:xfrm>
           <a:prstGeom prst="rect">
@@ -14756,14 +16497,14 @@
       </p:sp>
       <p:sp>
         <p:nvSpPr>
-          <p:cNvPr id="11" name="Text 9"/>
+          <p:cNvPr id="9" name="Text 7"/>
           <p:cNvSpPr/>
           <p:nvPr/>
         </p:nvSpPr>
         <p:spPr>
           <a:xfrm>
             <a:off x="868680" y="1508760"/>
-            <a:ext cx="6537960" cy="4160520"/>
+            <a:ext cx="6309360" cy="4160520"/>
           </a:xfrm>
           <a:prstGeom prst="rect">
             <a:avLst/>
@@ -14822,18 +16563,18 @@
       </p:sp>
       <p:sp>
         <p:nvSpPr>
-          <p:cNvPr id="12" name="Shape 10"/>
-          <p:cNvSpPr/>
-          <p:nvPr/>
-        </p:nvSpPr>
-        <p:spPr>
-          <a:xfrm>
-            <a:off x="7909560" y="1417320"/>
-            <a:ext cx="3154680" cy="1828800"/>
+          <p:cNvPr id="10" name="Shape 8"/>
+          <p:cNvSpPr/>
+          <p:nvPr/>
+        </p:nvSpPr>
+        <p:spPr>
+          <a:xfrm>
+            <a:off x="7635240" y="1325880"/>
+            <a:ext cx="3474720" cy="1325880"/>
           </a:xfrm>
           <a:prstGeom prst="roundRect">
             <a:avLst>
-              <a:gd name="adj" fmla="val 6000"/>
+              <a:gd name="adj" fmla="val 8276"/>
             </a:avLst>
           </a:prstGeom>
           <a:solidFill>
@@ -14849,14 +16590,14 @@
       </p:sp>
       <p:sp>
         <p:nvSpPr>
-          <p:cNvPr id="13" name="Text 11"/>
-          <p:cNvSpPr/>
-          <p:nvPr/>
-        </p:nvSpPr>
-        <p:spPr>
-          <a:xfrm>
-            <a:off x="8074152" y="1563624"/>
-            <a:ext cx="2825496" cy="256032"/>
+          <p:cNvPr id="11" name="Text 9"/>
+          <p:cNvSpPr/>
+          <p:nvPr/>
+        </p:nvSpPr>
+        <p:spPr>
+          <a:xfrm>
+            <a:off x="7799832" y="1472184"/>
+            <a:ext cx="3145536" cy="256032"/>
           </a:xfrm>
           <a:prstGeom prst="rect">
             <a:avLst/>
@@ -14880,7 +16621,7 @@
                 <a:ea typeface="Aptos" pitchFamily="34" charset="-122"/>
                 <a:cs typeface="Aptos" pitchFamily="34" charset="-120"/>
               </a:rPr>
-              <a:t>Key idea</a:t>
+              <a:t>Data decision</a:t>
             </a:r>
             <a:endParaRPr lang="en-US" sz="1300" dirty="0"/>
           </a:p>
@@ -14888,14 +16629,14 @@
       </p:sp>
       <p:sp>
         <p:nvSpPr>
-          <p:cNvPr id="14" name="Text 12"/>
-          <p:cNvSpPr/>
-          <p:nvPr/>
-        </p:nvSpPr>
-        <p:spPr>
-          <a:xfrm>
-            <a:off x="8074152" y="1920240"/>
-            <a:ext cx="2825496" cy="1188720"/>
+          <p:cNvPr id="12" name="Text 10"/>
+          <p:cNvSpPr/>
+          <p:nvPr/>
+        </p:nvSpPr>
+        <p:spPr>
+          <a:xfrm>
+            <a:off x="7799832" y="1828800"/>
+            <a:ext cx="3145536" cy="685800"/>
           </a:xfrm>
           <a:prstGeom prst="rect">
             <a:avLst/>
@@ -14929,21 +16670,212 @@
       </p:sp>
       <p:sp>
         <p:nvSpPr>
-          <p:cNvPr id="15" name="Shape 13"/>
-          <p:cNvSpPr/>
-          <p:nvPr/>
-        </p:nvSpPr>
-        <p:spPr>
-          <a:xfrm>
-            <a:off x="7909560" y="3520440"/>
-            <a:ext cx="3154680" cy="1737360"/>
+          <p:cNvPr id="13" name="Shape 11"/>
+          <p:cNvSpPr/>
+          <p:nvPr/>
+        </p:nvSpPr>
+        <p:spPr>
+          <a:xfrm>
+            <a:off x="7635240" y="2788920"/>
+            <a:ext cx="3474720" cy="1536192"/>
           </a:xfrm>
           <a:prstGeom prst="roundRect">
             <a:avLst>
-              <a:gd name="adj" fmla="val 6316"/>
+              <a:gd name="adj" fmla="val 7143"/>
             </a:avLst>
           </a:prstGeom>
           <a:solidFill>
+            <a:srgbClr val="FFFFFF">
+              <a:alpha val="88000"/>
+            </a:srgbClr>
+          </a:solidFill>
+          <a:ln w="12700">
+            <a:solidFill>
+              <a:srgbClr val="D6E8F2"/>
+            </a:solidFill>
+            <a:prstDash val="solid"/>
+          </a:ln>
+        </p:spPr>
+      </p:sp>
+      <p:sp>
+        <p:nvSpPr>
+          <p:cNvPr id="14" name="Shape 12"/>
+          <p:cNvSpPr/>
+          <p:nvPr/>
+        </p:nvSpPr>
+        <p:spPr>
+          <a:xfrm>
+            <a:off x="8138160" y="3474720"/>
+            <a:ext cx="256032" cy="411480"/>
+          </a:xfrm>
+          <a:prstGeom prst="rect">
+            <a:avLst/>
+          </a:prstGeom>
+          <a:solidFill>
+            <a:srgbClr val="0068B7"/>
+          </a:solidFill>
+          <a:ln w="12700">
+            <a:solidFill>
+              <a:srgbClr val="0068B7"/>
+            </a:solidFill>
+            <a:prstDash val="solid"/>
+          </a:ln>
+        </p:spPr>
+      </p:sp>
+      <p:sp>
+        <p:nvSpPr>
+          <p:cNvPr id="15" name="Shape 13"/>
+          <p:cNvSpPr/>
+          <p:nvPr/>
+        </p:nvSpPr>
+        <p:spPr>
+          <a:xfrm>
+            <a:off x="8577072" y="3172968"/>
+            <a:ext cx="256032" cy="713232"/>
+          </a:xfrm>
+          <a:prstGeom prst="rect">
+            <a:avLst/>
+          </a:prstGeom>
+          <a:solidFill>
+            <a:srgbClr val="2F8A28"/>
+          </a:solidFill>
+          <a:ln w="12700">
+            <a:solidFill>
+              <a:srgbClr val="2F8A28"/>
+            </a:solidFill>
+            <a:prstDash val="solid"/>
+          </a:ln>
+        </p:spPr>
+      </p:sp>
+      <p:sp>
+        <p:nvSpPr>
+          <p:cNvPr id="16" name="Shape 14"/>
+          <p:cNvSpPr/>
+          <p:nvPr/>
+        </p:nvSpPr>
+        <p:spPr>
+          <a:xfrm>
+            <a:off x="9015984" y="2880360"/>
+            <a:ext cx="256032" cy="1005840"/>
+          </a:xfrm>
+          <a:prstGeom prst="rect">
+            <a:avLst/>
+          </a:prstGeom>
+          <a:solidFill>
+            <a:srgbClr val="D69A2D"/>
+          </a:solidFill>
+          <a:ln w="12700">
+            <a:solidFill>
+              <a:srgbClr val="D69A2D"/>
+            </a:solidFill>
+            <a:prstDash val="solid"/>
+          </a:ln>
+        </p:spPr>
+      </p:sp>
+      <p:sp>
+        <p:nvSpPr>
+          <p:cNvPr id="17" name="Shape 15"/>
+          <p:cNvSpPr/>
+          <p:nvPr/>
+        </p:nvSpPr>
+        <p:spPr>
+          <a:xfrm>
+            <a:off x="9454896" y="3319272"/>
+            <a:ext cx="256032" cy="566928"/>
+          </a:xfrm>
+          <a:prstGeom prst="rect">
+            <a:avLst/>
+          </a:prstGeom>
+          <a:solidFill>
+            <a:srgbClr val="6A4CA3"/>
+          </a:solidFill>
+          <a:ln w="12700">
+            <a:solidFill>
+              <a:srgbClr val="6A4CA3"/>
+            </a:solidFill>
+            <a:prstDash val="solid"/>
+          </a:ln>
+        </p:spPr>
+      </p:sp>
+      <p:sp>
+        <p:nvSpPr>
+          <p:cNvPr id="18" name="Shape 16"/>
+          <p:cNvSpPr/>
+          <p:nvPr/>
+        </p:nvSpPr>
+        <p:spPr>
+          <a:xfrm>
+            <a:off x="8019288" y="3886200"/>
+            <a:ext cx="2706624" cy="0"/>
+          </a:xfrm>
+          <a:prstGeom prst="line">
+            <a:avLst/>
+          </a:prstGeom>
+          <a:noFill/>
+          <a:ln w="15240">
+            <a:solidFill>
+              <a:srgbClr val="003A63"/>
+            </a:solidFill>
+            <a:prstDash val="solid"/>
+          </a:ln>
+        </p:spPr>
+      </p:sp>
+      <p:sp>
+        <p:nvSpPr>
+          <p:cNvPr id="19" name="Text 17"/>
+          <p:cNvSpPr/>
+          <p:nvPr/>
+        </p:nvSpPr>
+        <p:spPr>
+          <a:xfrm>
+            <a:off x="7863840" y="3017520"/>
+            <a:ext cx="3017520" cy="201168"/>
+          </a:xfrm>
+          <a:prstGeom prst="rect">
+            <a:avLst/>
+          </a:prstGeom>
+          <a:noFill/>
+          <a:ln/>
+        </p:spPr>
+        <p:txBody>
+          <a:bodyPr wrap="square" lIns="0" tIns="0" rIns="0" bIns="0" rtlCol="0" anchor="ctr"/>
+          <a:lstStyle/>
+          <a:p>
+            <a:pPr algn="ctr" indent="0" marL="0">
+              <a:buNone/>
+            </a:pPr>
+            <a:r>
+              <a:rPr lang="en-US" sz="1050" b="1" dirty="0">
+                <a:solidFill>
+                  <a:srgbClr val="003A63"/>
+                </a:solidFill>
+                <a:latin typeface="Aptos" pitchFamily="34" charset="0"/>
+                <a:ea typeface="Aptos" pitchFamily="34" charset="-122"/>
+                <a:cs typeface="Aptos" pitchFamily="34" charset="-120"/>
+              </a:rPr>
+              <a:t>Measure and monitor</a:t>
+            </a:r>
+            <a:endParaRPr lang="en-US" sz="1050" dirty="0"/>
+          </a:p>
+        </p:txBody>
+      </p:sp>
+      <p:sp>
+        <p:nvSpPr>
+          <p:cNvPr id="20" name="Shape 18"/>
+          <p:cNvSpPr/>
+          <p:nvPr/>
+        </p:nvSpPr>
+        <p:spPr>
+          <a:xfrm>
+            <a:off x="7635240" y="4498848"/>
+            <a:ext cx="3474720" cy="1143000"/>
+          </a:xfrm>
+          <a:prstGeom prst="roundRect">
+            <a:avLst>
+              <a:gd name="adj" fmla="val 9600"/>
+            </a:avLst>
+          </a:prstGeom>
+          <a:solidFill>
             <a:srgbClr val="EAF6F8"/>
           </a:solidFill>
           <a:ln w="12700">
@@ -14956,14 +16888,14 @@
       </p:sp>
       <p:sp>
         <p:nvSpPr>
-          <p:cNvPr id="16" name="Text 14"/>
-          <p:cNvSpPr/>
-          <p:nvPr/>
-        </p:nvSpPr>
-        <p:spPr>
-          <a:xfrm>
-            <a:off x="8074152" y="3666744"/>
-            <a:ext cx="2825496" cy="256032"/>
+          <p:cNvPr id="21" name="Text 19"/>
+          <p:cNvSpPr/>
+          <p:nvPr/>
+        </p:nvSpPr>
+        <p:spPr>
+          <a:xfrm>
+            <a:off x="7799832" y="4645152"/>
+            <a:ext cx="3145536" cy="256032"/>
           </a:xfrm>
           <a:prstGeom prst="rect">
             <a:avLst/>
@@ -14987,7 +16919,7 @@
                 <a:ea typeface="Aptos" pitchFamily="34" charset="-122"/>
                 <a:cs typeface="Aptos" pitchFamily="34" charset="-120"/>
               </a:rPr>
-              <a:t>Use this for</a:t>
+              <a:t>How to validate</a:t>
             </a:r>
             <a:endParaRPr lang="en-US" sz="1300" dirty="0"/>
           </a:p>
@@ -14995,14 +16927,14 @@
       </p:sp>
       <p:sp>
         <p:nvSpPr>
-          <p:cNvPr id="17" name="Text 15"/>
-          <p:cNvSpPr/>
-          <p:nvPr/>
-        </p:nvSpPr>
-        <p:spPr>
-          <a:xfrm>
-            <a:off x="8074152" y="4023360"/>
-            <a:ext cx="2825496" cy="1097280"/>
+          <p:cNvPr id="22" name="Text 20"/>
+          <p:cNvSpPr/>
+          <p:nvPr/>
+        </p:nvSpPr>
+        <p:spPr>
+          <a:xfrm>
+            <a:off x="7799832" y="5001768"/>
+            <a:ext cx="3145536" cy="502920"/>
           </a:xfrm>
           <a:prstGeom prst="rect">
             <a:avLst/>
@@ -15028,7 +16960,7 @@
                 <a:ea typeface="Aptos" pitchFamily="34" charset="-122"/>
                 <a:cs typeface="Aptos" pitchFamily="34" charset="-120"/>
               </a:rPr>
-              <a:t>Connect the concept to public health decisions, safeguards, documentation, or implementation work.</a:t>
+              <a:t>Connect the concept to data quality, model performance, validation evidence, monitoring measures, and decisions that remain under human control.</a:t>
             </a:r>
             <a:endParaRPr lang="en-US" sz="1550" dirty="0"/>
           </a:p>
@@ -15202,8 +17134,8 @@
         </p:nvSpPr>
         <p:spPr>
           <a:xfrm>
-            <a:off x="9966960" y="6537960"/>
-            <a:ext cx="1645920" cy="201168"/>
+            <a:off x="9646920" y="6537960"/>
+            <a:ext cx="1965960" cy="201168"/>
           </a:xfrm>
           <a:prstGeom prst="rect">
             <a:avLst/>
@@ -15227,7 +17159,7 @@
                 <a:ea typeface="Aptos" pitchFamily="34" charset="-122"/>
                 <a:cs typeface="Aptos" pitchFamily="34" charset="-120"/>
               </a:rPr>
-              <a:t>Â© Paula Soper</a:t>
+              <a:t>Copyright Paula Soper</a:t>
             </a:r>
             <a:endParaRPr lang="en-US" sz="800" dirty="0"/>
           </a:p>
@@ -15274,77 +17206,13 @@
       </p:sp>
       <p:sp>
         <p:nvSpPr>
-          <p:cNvPr id="8" name="Shape 6"/>
+          <p:cNvPr id="8" name="Text 6"/>
           <p:cNvSpPr/>
           <p:nvPr/>
         </p:nvSpPr>
         <p:spPr>
           <a:xfrm>
             <a:off x="640080" y="658368"/>
-            <a:ext cx="420624" cy="420624"/>
-          </a:xfrm>
-          <a:prstGeom prst="ellipse">
-            <a:avLst/>
-          </a:prstGeom>
-          <a:solidFill>
-            <a:srgbClr val="0068B7"/>
-          </a:solidFill>
-          <a:ln w="12700">
-            <a:solidFill>
-              <a:srgbClr val="0068B7"/>
-            </a:solidFill>
-            <a:prstDash val="solid"/>
-          </a:ln>
-        </p:spPr>
-      </p:sp>
-      <p:sp>
-        <p:nvSpPr>
-          <p:cNvPr id="9" name="Text 7"/>
-          <p:cNvSpPr/>
-          <p:nvPr/>
-        </p:nvSpPr>
-        <p:spPr>
-          <a:xfrm>
-            <a:off x="640080" y="731520"/>
-            <a:ext cx="420624" cy="164592"/>
-          </a:xfrm>
-          <a:prstGeom prst="rect">
-            <a:avLst/>
-          </a:prstGeom>
-          <a:noFill/>
-          <a:ln/>
-        </p:spPr>
-        <p:txBody>
-          <a:bodyPr wrap="square" lIns="0" tIns="0" rIns="0" bIns="0" rtlCol="0" anchor="ctr"/>
-          <a:lstStyle/>
-          <a:p>
-            <a:pPr algn="ctr" indent="0" marL="0">
-              <a:buNone/>
-            </a:pPr>
-            <a:r>
-              <a:rPr lang="en-US" sz="1100" b="1" dirty="0">
-                <a:solidFill>
-                  <a:srgbClr val="FFFFFF"/>
-                </a:solidFill>
-                <a:latin typeface="Aptos" pitchFamily="34" charset="0"/>
-                <a:ea typeface="Aptos" pitchFamily="34" charset="-122"/>
-                <a:cs typeface="Aptos" pitchFamily="34" charset="-120"/>
-              </a:rPr>
-              <a:t>4</a:t>
-            </a:r>
-            <a:endParaRPr lang="en-US" sz="1100" dirty="0"/>
-          </a:p>
-        </p:txBody>
-      </p:sp>
-      <p:sp>
-        <p:nvSpPr>
-          <p:cNvPr id="10" name="Text 8"/>
-          <p:cNvSpPr/>
-          <p:nvPr/>
-        </p:nvSpPr>
-        <p:spPr>
-          <a:xfrm>
-            <a:off x="640080" y="621792"/>
             <a:ext cx="10881360" cy="713232"/>
           </a:xfrm>
           <a:prstGeom prst="rect">
@@ -15379,14 +17247,14 @@
       </p:sp>
       <p:sp>
         <p:nvSpPr>
-          <p:cNvPr id="11" name="Text 9"/>
+          <p:cNvPr id="9" name="Text 7"/>
           <p:cNvSpPr/>
           <p:nvPr/>
         </p:nvSpPr>
         <p:spPr>
           <a:xfrm>
             <a:off x="868680" y="1508760"/>
-            <a:ext cx="6537960" cy="4160520"/>
+            <a:ext cx="6309360" cy="4160520"/>
           </a:xfrm>
           <a:prstGeom prst="rect">
             <a:avLst/>
@@ -15445,18 +17313,18 @@
       </p:sp>
       <p:sp>
         <p:nvSpPr>
-          <p:cNvPr id="12" name="Shape 10"/>
-          <p:cNvSpPr/>
-          <p:nvPr/>
-        </p:nvSpPr>
-        <p:spPr>
-          <a:xfrm>
-            <a:off x="7909560" y="1417320"/>
-            <a:ext cx="3154680" cy="1828800"/>
+          <p:cNvPr id="10" name="Shape 8"/>
+          <p:cNvSpPr/>
+          <p:nvPr/>
+        </p:nvSpPr>
+        <p:spPr>
+          <a:xfrm>
+            <a:off x="7635240" y="1325880"/>
+            <a:ext cx="3474720" cy="1325880"/>
           </a:xfrm>
           <a:prstGeom prst="roundRect">
             <a:avLst>
-              <a:gd name="adj" fmla="val 6000"/>
+              <a:gd name="adj" fmla="val 8276"/>
             </a:avLst>
           </a:prstGeom>
           <a:solidFill>
@@ -15472,14 +17340,14 @@
       </p:sp>
       <p:sp>
         <p:nvSpPr>
-          <p:cNvPr id="13" name="Text 11"/>
-          <p:cNvSpPr/>
-          <p:nvPr/>
-        </p:nvSpPr>
-        <p:spPr>
-          <a:xfrm>
-            <a:off x="8074152" y="1563624"/>
-            <a:ext cx="2825496" cy="256032"/>
+          <p:cNvPr id="11" name="Text 9"/>
+          <p:cNvSpPr/>
+          <p:nvPr/>
+        </p:nvSpPr>
+        <p:spPr>
+          <a:xfrm>
+            <a:off x="7799832" y="1472184"/>
+            <a:ext cx="3145536" cy="256032"/>
           </a:xfrm>
           <a:prstGeom prst="rect">
             <a:avLst/>
@@ -15503,7 +17371,7 @@
                 <a:ea typeface="Aptos" pitchFamily="34" charset="-122"/>
                 <a:cs typeface="Aptos" pitchFamily="34" charset="-120"/>
               </a:rPr>
-              <a:t>Key idea</a:t>
+              <a:t>Data decision</a:t>
             </a:r>
             <a:endParaRPr lang="en-US" sz="1300" dirty="0"/>
           </a:p>
@@ -15511,14 +17379,14 @@
       </p:sp>
       <p:sp>
         <p:nvSpPr>
-          <p:cNvPr id="14" name="Text 12"/>
-          <p:cNvSpPr/>
-          <p:nvPr/>
-        </p:nvSpPr>
-        <p:spPr>
-          <a:xfrm>
-            <a:off x="8074152" y="1920240"/>
-            <a:ext cx="2825496" cy="1188720"/>
+          <p:cNvPr id="12" name="Text 10"/>
+          <p:cNvSpPr/>
+          <p:nvPr/>
+        </p:nvSpPr>
+        <p:spPr>
+          <a:xfrm>
+            <a:off x="7799832" y="1828800"/>
+            <a:ext cx="3145536" cy="685800"/>
           </a:xfrm>
           <a:prstGeom prst="rect">
             <a:avLst/>
@@ -15552,21 +17420,212 @@
       </p:sp>
       <p:sp>
         <p:nvSpPr>
-          <p:cNvPr id="15" name="Shape 13"/>
-          <p:cNvSpPr/>
-          <p:nvPr/>
-        </p:nvSpPr>
-        <p:spPr>
-          <a:xfrm>
-            <a:off x="7909560" y="3520440"/>
-            <a:ext cx="3154680" cy="1737360"/>
+          <p:cNvPr id="13" name="Shape 11"/>
+          <p:cNvSpPr/>
+          <p:nvPr/>
+        </p:nvSpPr>
+        <p:spPr>
+          <a:xfrm>
+            <a:off x="7635240" y="2788920"/>
+            <a:ext cx="3474720" cy="1536192"/>
           </a:xfrm>
           <a:prstGeom prst="roundRect">
             <a:avLst>
-              <a:gd name="adj" fmla="val 6316"/>
+              <a:gd name="adj" fmla="val 7143"/>
             </a:avLst>
           </a:prstGeom>
           <a:solidFill>
+            <a:srgbClr val="FFFFFF">
+              <a:alpha val="88000"/>
+            </a:srgbClr>
+          </a:solidFill>
+          <a:ln w="12700">
+            <a:solidFill>
+              <a:srgbClr val="D6E8F2"/>
+            </a:solidFill>
+            <a:prstDash val="solid"/>
+          </a:ln>
+        </p:spPr>
+      </p:sp>
+      <p:sp>
+        <p:nvSpPr>
+          <p:cNvPr id="14" name="Shape 12"/>
+          <p:cNvSpPr/>
+          <p:nvPr/>
+        </p:nvSpPr>
+        <p:spPr>
+          <a:xfrm>
+            <a:off x="8138160" y="3474720"/>
+            <a:ext cx="256032" cy="411480"/>
+          </a:xfrm>
+          <a:prstGeom prst="rect">
+            <a:avLst/>
+          </a:prstGeom>
+          <a:solidFill>
+            <a:srgbClr val="0068B7"/>
+          </a:solidFill>
+          <a:ln w="12700">
+            <a:solidFill>
+              <a:srgbClr val="0068B7"/>
+            </a:solidFill>
+            <a:prstDash val="solid"/>
+          </a:ln>
+        </p:spPr>
+      </p:sp>
+      <p:sp>
+        <p:nvSpPr>
+          <p:cNvPr id="15" name="Shape 13"/>
+          <p:cNvSpPr/>
+          <p:nvPr/>
+        </p:nvSpPr>
+        <p:spPr>
+          <a:xfrm>
+            <a:off x="8577072" y="3172968"/>
+            <a:ext cx="256032" cy="713232"/>
+          </a:xfrm>
+          <a:prstGeom prst="rect">
+            <a:avLst/>
+          </a:prstGeom>
+          <a:solidFill>
+            <a:srgbClr val="2F8A28"/>
+          </a:solidFill>
+          <a:ln w="12700">
+            <a:solidFill>
+              <a:srgbClr val="2F8A28"/>
+            </a:solidFill>
+            <a:prstDash val="solid"/>
+          </a:ln>
+        </p:spPr>
+      </p:sp>
+      <p:sp>
+        <p:nvSpPr>
+          <p:cNvPr id="16" name="Shape 14"/>
+          <p:cNvSpPr/>
+          <p:nvPr/>
+        </p:nvSpPr>
+        <p:spPr>
+          <a:xfrm>
+            <a:off x="9015984" y="2880360"/>
+            <a:ext cx="256032" cy="1005840"/>
+          </a:xfrm>
+          <a:prstGeom prst="rect">
+            <a:avLst/>
+          </a:prstGeom>
+          <a:solidFill>
+            <a:srgbClr val="D69A2D"/>
+          </a:solidFill>
+          <a:ln w="12700">
+            <a:solidFill>
+              <a:srgbClr val="D69A2D"/>
+            </a:solidFill>
+            <a:prstDash val="solid"/>
+          </a:ln>
+        </p:spPr>
+      </p:sp>
+      <p:sp>
+        <p:nvSpPr>
+          <p:cNvPr id="17" name="Shape 15"/>
+          <p:cNvSpPr/>
+          <p:nvPr/>
+        </p:nvSpPr>
+        <p:spPr>
+          <a:xfrm>
+            <a:off x="9454896" y="3319272"/>
+            <a:ext cx="256032" cy="566928"/>
+          </a:xfrm>
+          <a:prstGeom prst="rect">
+            <a:avLst/>
+          </a:prstGeom>
+          <a:solidFill>
+            <a:srgbClr val="6A4CA3"/>
+          </a:solidFill>
+          <a:ln w="12700">
+            <a:solidFill>
+              <a:srgbClr val="6A4CA3"/>
+            </a:solidFill>
+            <a:prstDash val="solid"/>
+          </a:ln>
+        </p:spPr>
+      </p:sp>
+      <p:sp>
+        <p:nvSpPr>
+          <p:cNvPr id="18" name="Shape 16"/>
+          <p:cNvSpPr/>
+          <p:nvPr/>
+        </p:nvSpPr>
+        <p:spPr>
+          <a:xfrm>
+            <a:off x="8019288" y="3886200"/>
+            <a:ext cx="2706624" cy="0"/>
+          </a:xfrm>
+          <a:prstGeom prst="line">
+            <a:avLst/>
+          </a:prstGeom>
+          <a:noFill/>
+          <a:ln w="15240">
+            <a:solidFill>
+              <a:srgbClr val="003A63"/>
+            </a:solidFill>
+            <a:prstDash val="solid"/>
+          </a:ln>
+        </p:spPr>
+      </p:sp>
+      <p:sp>
+        <p:nvSpPr>
+          <p:cNvPr id="19" name="Text 17"/>
+          <p:cNvSpPr/>
+          <p:nvPr/>
+        </p:nvSpPr>
+        <p:spPr>
+          <a:xfrm>
+            <a:off x="7863840" y="3017520"/>
+            <a:ext cx="3017520" cy="201168"/>
+          </a:xfrm>
+          <a:prstGeom prst="rect">
+            <a:avLst/>
+          </a:prstGeom>
+          <a:noFill/>
+          <a:ln/>
+        </p:spPr>
+        <p:txBody>
+          <a:bodyPr wrap="square" lIns="0" tIns="0" rIns="0" bIns="0" rtlCol="0" anchor="ctr"/>
+          <a:lstStyle/>
+          <a:p>
+            <a:pPr algn="ctr" indent="0" marL="0">
+              <a:buNone/>
+            </a:pPr>
+            <a:r>
+              <a:rPr lang="en-US" sz="1050" b="1" dirty="0">
+                <a:solidFill>
+                  <a:srgbClr val="003A63"/>
+                </a:solidFill>
+                <a:latin typeface="Aptos" pitchFamily="34" charset="0"/>
+                <a:ea typeface="Aptos" pitchFamily="34" charset="-122"/>
+                <a:cs typeface="Aptos" pitchFamily="34" charset="-120"/>
+              </a:rPr>
+              <a:t>Measure and monitor</a:t>
+            </a:r>
+            <a:endParaRPr lang="en-US" sz="1050" dirty="0"/>
+          </a:p>
+        </p:txBody>
+      </p:sp>
+      <p:sp>
+        <p:nvSpPr>
+          <p:cNvPr id="20" name="Shape 18"/>
+          <p:cNvSpPr/>
+          <p:nvPr/>
+        </p:nvSpPr>
+        <p:spPr>
+          <a:xfrm>
+            <a:off x="7635240" y="4498848"/>
+            <a:ext cx="3474720" cy="1143000"/>
+          </a:xfrm>
+          <a:prstGeom prst="roundRect">
+            <a:avLst>
+              <a:gd name="adj" fmla="val 9600"/>
+            </a:avLst>
+          </a:prstGeom>
+          <a:solidFill>
             <a:srgbClr val="EAF6F8"/>
           </a:solidFill>
           <a:ln w="12700">
@@ -15579,14 +17638,14 @@
       </p:sp>
       <p:sp>
         <p:nvSpPr>
-          <p:cNvPr id="16" name="Text 14"/>
-          <p:cNvSpPr/>
-          <p:nvPr/>
-        </p:nvSpPr>
-        <p:spPr>
-          <a:xfrm>
-            <a:off x="8074152" y="3666744"/>
-            <a:ext cx="2825496" cy="256032"/>
+          <p:cNvPr id="21" name="Text 19"/>
+          <p:cNvSpPr/>
+          <p:nvPr/>
+        </p:nvSpPr>
+        <p:spPr>
+          <a:xfrm>
+            <a:off x="7799832" y="4645152"/>
+            <a:ext cx="3145536" cy="256032"/>
           </a:xfrm>
           <a:prstGeom prst="rect">
             <a:avLst/>
@@ -15610,7 +17669,7 @@
                 <a:ea typeface="Aptos" pitchFamily="34" charset="-122"/>
                 <a:cs typeface="Aptos" pitchFamily="34" charset="-120"/>
               </a:rPr>
-              <a:t>Use this for</a:t>
+              <a:t>How to validate</a:t>
             </a:r>
             <a:endParaRPr lang="en-US" sz="1300" dirty="0"/>
           </a:p>
@@ -15618,14 +17677,14 @@
       </p:sp>
       <p:sp>
         <p:nvSpPr>
-          <p:cNvPr id="17" name="Text 15"/>
-          <p:cNvSpPr/>
-          <p:nvPr/>
-        </p:nvSpPr>
-        <p:spPr>
-          <a:xfrm>
-            <a:off x="8074152" y="4023360"/>
-            <a:ext cx="2825496" cy="1097280"/>
+          <p:cNvPr id="22" name="Text 20"/>
+          <p:cNvSpPr/>
+          <p:nvPr/>
+        </p:nvSpPr>
+        <p:spPr>
+          <a:xfrm>
+            <a:off x="7799832" y="5001768"/>
+            <a:ext cx="3145536" cy="502920"/>
           </a:xfrm>
           <a:prstGeom prst="rect">
             <a:avLst/>
@@ -15651,7 +17710,7 @@
                 <a:ea typeface="Aptos" pitchFamily="34" charset="-122"/>
                 <a:cs typeface="Aptos" pitchFamily="34" charset="-120"/>
               </a:rPr>
-              <a:t>Connect the concept to public health decisions, safeguards, documentation, or implementation work.</a:t>
+              <a:t>Connect the concept to data quality, model performance, validation evidence, monitoring measures, and decisions that remain under human control.</a:t>
             </a:r>
             <a:endParaRPr lang="en-US" sz="1550" dirty="0"/>
           </a:p>
@@ -15825,8 +17884,8 @@
         </p:nvSpPr>
         <p:spPr>
           <a:xfrm>
-            <a:off x="9966960" y="6537960"/>
-            <a:ext cx="1645920" cy="201168"/>
+            <a:off x="9646920" y="6537960"/>
+            <a:ext cx="1965960" cy="201168"/>
           </a:xfrm>
           <a:prstGeom prst="rect">
             <a:avLst/>
@@ -15850,7 +17909,7 @@
                 <a:ea typeface="Aptos" pitchFamily="34" charset="-122"/>
                 <a:cs typeface="Aptos" pitchFamily="34" charset="-120"/>
               </a:rPr>
-              <a:t>Â© Paula Soper</a:t>
+              <a:t>Copyright Paula Soper</a:t>
             </a:r>
             <a:endParaRPr lang="en-US" sz="800" dirty="0"/>
           </a:p>
@@ -15945,7 +18004,7 @@
         <p:spPr>
           <a:xfrm>
             <a:off x="868680" y="1508760"/>
-            <a:ext cx="6537960" cy="4160520"/>
+            <a:ext cx="6309360" cy="4160520"/>
           </a:xfrm>
           <a:prstGeom prst="rect">
             <a:avLst/>
@@ -16010,12 +18069,12 @@
         </p:nvSpPr>
         <p:spPr>
           <a:xfrm>
-            <a:off x="7909560" y="1417320"/>
-            <a:ext cx="3154680" cy="1828800"/>
+            <a:off x="7635240" y="1325880"/>
+            <a:ext cx="3474720" cy="1325880"/>
           </a:xfrm>
           <a:prstGeom prst="roundRect">
             <a:avLst>
-              <a:gd name="adj" fmla="val 6000"/>
+              <a:gd name="adj" fmla="val 8276"/>
             </a:avLst>
           </a:prstGeom>
           <a:solidFill>
@@ -16037,8 +18096,8 @@
         </p:nvSpPr>
         <p:spPr>
           <a:xfrm>
-            <a:off x="8074152" y="1563624"/>
-            <a:ext cx="2825496" cy="256032"/>
+            <a:off x="7799832" y="1472184"/>
+            <a:ext cx="3145536" cy="256032"/>
           </a:xfrm>
           <a:prstGeom prst="rect">
             <a:avLst/>
@@ -16062,7 +18121,7 @@
                 <a:ea typeface="Aptos" pitchFamily="34" charset="-122"/>
                 <a:cs typeface="Aptos" pitchFamily="34" charset="-120"/>
               </a:rPr>
-              <a:t>Key idea</a:t>
+              <a:t>Data decision</a:t>
             </a:r>
             <a:endParaRPr lang="en-US" sz="1300" dirty="0"/>
           </a:p>
@@ -16076,8 +18135,8 @@
         </p:nvSpPr>
         <p:spPr>
           <a:xfrm>
-            <a:off x="8074152" y="1920240"/>
-            <a:ext cx="2825496" cy="1188720"/>
+            <a:off x="7799832" y="1828800"/>
+            <a:ext cx="3145536" cy="685800"/>
           </a:xfrm>
           <a:prstGeom prst="rect">
             <a:avLst/>
@@ -16117,15 +18176,206 @@
         </p:nvSpPr>
         <p:spPr>
           <a:xfrm>
-            <a:off x="7909560" y="3520440"/>
-            <a:ext cx="3154680" cy="1737360"/>
+            <a:off x="7635240" y="2788920"/>
+            <a:ext cx="3474720" cy="1536192"/>
           </a:xfrm>
           <a:prstGeom prst="roundRect">
             <a:avLst>
-              <a:gd name="adj" fmla="val 6316"/>
+              <a:gd name="adj" fmla="val 7143"/>
             </a:avLst>
           </a:prstGeom>
           <a:solidFill>
+            <a:srgbClr val="FFFFFF">
+              <a:alpha val="88000"/>
+            </a:srgbClr>
+          </a:solidFill>
+          <a:ln w="12700">
+            <a:solidFill>
+              <a:srgbClr val="D6E8F2"/>
+            </a:solidFill>
+            <a:prstDash val="solid"/>
+          </a:ln>
+        </p:spPr>
+      </p:sp>
+      <p:sp>
+        <p:nvSpPr>
+          <p:cNvPr id="14" name="Shape 12"/>
+          <p:cNvSpPr/>
+          <p:nvPr/>
+        </p:nvSpPr>
+        <p:spPr>
+          <a:xfrm>
+            <a:off x="8138160" y="3474720"/>
+            <a:ext cx="256032" cy="411480"/>
+          </a:xfrm>
+          <a:prstGeom prst="rect">
+            <a:avLst/>
+          </a:prstGeom>
+          <a:solidFill>
+            <a:srgbClr val="0068B7"/>
+          </a:solidFill>
+          <a:ln w="12700">
+            <a:solidFill>
+              <a:srgbClr val="0068B7"/>
+            </a:solidFill>
+            <a:prstDash val="solid"/>
+          </a:ln>
+        </p:spPr>
+      </p:sp>
+      <p:sp>
+        <p:nvSpPr>
+          <p:cNvPr id="15" name="Shape 13"/>
+          <p:cNvSpPr/>
+          <p:nvPr/>
+        </p:nvSpPr>
+        <p:spPr>
+          <a:xfrm>
+            <a:off x="8577072" y="3172968"/>
+            <a:ext cx="256032" cy="713232"/>
+          </a:xfrm>
+          <a:prstGeom prst="rect">
+            <a:avLst/>
+          </a:prstGeom>
+          <a:solidFill>
+            <a:srgbClr val="2F8A28"/>
+          </a:solidFill>
+          <a:ln w="12700">
+            <a:solidFill>
+              <a:srgbClr val="2F8A28"/>
+            </a:solidFill>
+            <a:prstDash val="solid"/>
+          </a:ln>
+        </p:spPr>
+      </p:sp>
+      <p:sp>
+        <p:nvSpPr>
+          <p:cNvPr id="16" name="Shape 14"/>
+          <p:cNvSpPr/>
+          <p:nvPr/>
+        </p:nvSpPr>
+        <p:spPr>
+          <a:xfrm>
+            <a:off x="9015984" y="2880360"/>
+            <a:ext cx="256032" cy="1005840"/>
+          </a:xfrm>
+          <a:prstGeom prst="rect">
+            <a:avLst/>
+          </a:prstGeom>
+          <a:solidFill>
+            <a:srgbClr val="D69A2D"/>
+          </a:solidFill>
+          <a:ln w="12700">
+            <a:solidFill>
+              <a:srgbClr val="D69A2D"/>
+            </a:solidFill>
+            <a:prstDash val="solid"/>
+          </a:ln>
+        </p:spPr>
+      </p:sp>
+      <p:sp>
+        <p:nvSpPr>
+          <p:cNvPr id="17" name="Shape 15"/>
+          <p:cNvSpPr/>
+          <p:nvPr/>
+        </p:nvSpPr>
+        <p:spPr>
+          <a:xfrm>
+            <a:off x="9454896" y="3319272"/>
+            <a:ext cx="256032" cy="566928"/>
+          </a:xfrm>
+          <a:prstGeom prst="rect">
+            <a:avLst/>
+          </a:prstGeom>
+          <a:solidFill>
+            <a:srgbClr val="6A4CA3"/>
+          </a:solidFill>
+          <a:ln w="12700">
+            <a:solidFill>
+              <a:srgbClr val="6A4CA3"/>
+            </a:solidFill>
+            <a:prstDash val="solid"/>
+          </a:ln>
+        </p:spPr>
+      </p:sp>
+      <p:sp>
+        <p:nvSpPr>
+          <p:cNvPr id="18" name="Shape 16"/>
+          <p:cNvSpPr/>
+          <p:nvPr/>
+        </p:nvSpPr>
+        <p:spPr>
+          <a:xfrm>
+            <a:off x="8019288" y="3886200"/>
+            <a:ext cx="2706624" cy="0"/>
+          </a:xfrm>
+          <a:prstGeom prst="line">
+            <a:avLst/>
+          </a:prstGeom>
+          <a:noFill/>
+          <a:ln w="15240">
+            <a:solidFill>
+              <a:srgbClr val="003A63"/>
+            </a:solidFill>
+            <a:prstDash val="solid"/>
+          </a:ln>
+        </p:spPr>
+      </p:sp>
+      <p:sp>
+        <p:nvSpPr>
+          <p:cNvPr id="19" name="Text 17"/>
+          <p:cNvSpPr/>
+          <p:nvPr/>
+        </p:nvSpPr>
+        <p:spPr>
+          <a:xfrm>
+            <a:off x="7863840" y="3017520"/>
+            <a:ext cx="3017520" cy="201168"/>
+          </a:xfrm>
+          <a:prstGeom prst="rect">
+            <a:avLst/>
+          </a:prstGeom>
+          <a:noFill/>
+          <a:ln/>
+        </p:spPr>
+        <p:txBody>
+          <a:bodyPr wrap="square" lIns="0" tIns="0" rIns="0" bIns="0" rtlCol="0" anchor="ctr"/>
+          <a:lstStyle/>
+          <a:p>
+            <a:pPr algn="ctr" indent="0" marL="0">
+              <a:buNone/>
+            </a:pPr>
+            <a:r>
+              <a:rPr lang="en-US" sz="1050" b="1" dirty="0">
+                <a:solidFill>
+                  <a:srgbClr val="003A63"/>
+                </a:solidFill>
+                <a:latin typeface="Aptos" pitchFamily="34" charset="0"/>
+                <a:ea typeface="Aptos" pitchFamily="34" charset="-122"/>
+                <a:cs typeface="Aptos" pitchFamily="34" charset="-120"/>
+              </a:rPr>
+              <a:t>Measure and monitor</a:t>
+            </a:r>
+            <a:endParaRPr lang="en-US" sz="1050" dirty="0"/>
+          </a:p>
+        </p:txBody>
+      </p:sp>
+      <p:sp>
+        <p:nvSpPr>
+          <p:cNvPr id="20" name="Shape 18"/>
+          <p:cNvSpPr/>
+          <p:nvPr/>
+        </p:nvSpPr>
+        <p:spPr>
+          <a:xfrm>
+            <a:off x="7635240" y="4498848"/>
+            <a:ext cx="3474720" cy="1143000"/>
+          </a:xfrm>
+          <a:prstGeom prst="roundRect">
+            <a:avLst>
+              <a:gd name="adj" fmla="val 9600"/>
+            </a:avLst>
+          </a:prstGeom>
+          <a:solidFill>
             <a:srgbClr val="EAF6F8"/>
           </a:solidFill>
           <a:ln w="12700">
@@ -16138,14 +18388,14 @@
       </p:sp>
       <p:sp>
         <p:nvSpPr>
-          <p:cNvPr id="14" name="Text 12"/>
-          <p:cNvSpPr/>
-          <p:nvPr/>
-        </p:nvSpPr>
-        <p:spPr>
-          <a:xfrm>
-            <a:off x="8074152" y="3666744"/>
-            <a:ext cx="2825496" cy="256032"/>
+          <p:cNvPr id="21" name="Text 19"/>
+          <p:cNvSpPr/>
+          <p:nvPr/>
+        </p:nvSpPr>
+        <p:spPr>
+          <a:xfrm>
+            <a:off x="7799832" y="4645152"/>
+            <a:ext cx="3145536" cy="256032"/>
           </a:xfrm>
           <a:prstGeom prst="rect">
             <a:avLst/>
@@ -16169,7 +18419,7 @@
                 <a:ea typeface="Aptos" pitchFamily="34" charset="-122"/>
                 <a:cs typeface="Aptos" pitchFamily="34" charset="-120"/>
               </a:rPr>
-              <a:t>Use this for</a:t>
+              <a:t>How to validate</a:t>
             </a:r>
             <a:endParaRPr lang="en-US" sz="1300" dirty="0"/>
           </a:p>
@@ -16177,14 +18427,14 @@
       </p:sp>
       <p:sp>
         <p:nvSpPr>
-          <p:cNvPr id="15" name="Text 13"/>
-          <p:cNvSpPr/>
-          <p:nvPr/>
-        </p:nvSpPr>
-        <p:spPr>
-          <a:xfrm>
-            <a:off x="8074152" y="4023360"/>
-            <a:ext cx="2825496" cy="1097280"/>
+          <p:cNvPr id="22" name="Text 20"/>
+          <p:cNvSpPr/>
+          <p:nvPr/>
+        </p:nvSpPr>
+        <p:spPr>
+          <a:xfrm>
+            <a:off x="7799832" y="5001768"/>
+            <a:ext cx="3145536" cy="502920"/>
           </a:xfrm>
           <a:prstGeom prst="rect">
             <a:avLst/>
@@ -16210,7 +18460,7 @@
                 <a:ea typeface="Aptos" pitchFamily="34" charset="-122"/>
                 <a:cs typeface="Aptos" pitchFamily="34" charset="-120"/>
               </a:rPr>
-              <a:t>Connect the concept to public health decisions, safeguards, documentation, or implementation work.</a:t>
+              <a:t>Connect the concept to data quality, model performance, validation evidence, monitoring measures, and decisions that remain under human control.</a:t>
             </a:r>
             <a:endParaRPr lang="en-US" sz="1550" dirty="0"/>
           </a:p>

--- a/downloads/presentations/modules/arc-210.pptx
+++ b/downloads/presentations/modules/arc-210.pptx
@@ -3523,13 +3523,11 @@
             </a:avLst>
           </a:prstGeom>
           <a:solidFill>
-            <a:srgbClr val="FFFFFF">
-              <a:alpha val="88000"/>
-            </a:srgbClr>
+            <a:srgbClr val="FFFFFF"/>
           </a:solidFill>
           <a:ln w="12700">
             <a:solidFill>
-              <a:srgbClr val="D6E8F2"/>
+              <a:srgbClr val="B9D7E6"/>
             </a:solidFill>
             <a:prstDash val="solid"/>
           </a:ln>
@@ -3537,169 +3535,112 @@
       </p:sp>
       <p:sp>
         <p:nvSpPr>
-          <p:cNvPr id="14" name="Shape 12"/>
-          <p:cNvSpPr/>
-          <p:nvPr/>
-        </p:nvSpPr>
-        <p:spPr>
-          <a:xfrm>
-            <a:off x="8138160" y="3474720"/>
-            <a:ext cx="256032" cy="411480"/>
-          </a:xfrm>
-          <a:prstGeom prst="rect">
-            <a:avLst/>
-          </a:prstGeom>
-          <a:solidFill>
-            <a:srgbClr val="0068B7"/>
-          </a:solidFill>
-          <a:ln w="12700">
-            <a:solidFill>
-              <a:srgbClr val="0068B7"/>
-            </a:solidFill>
-            <a:prstDash val="solid"/>
-          </a:ln>
-        </p:spPr>
-      </p:sp>
-      <p:sp>
-        <p:nvSpPr>
-          <p:cNvPr id="15" name="Shape 13"/>
-          <p:cNvSpPr/>
-          <p:nvPr/>
-        </p:nvSpPr>
-        <p:spPr>
-          <a:xfrm>
-            <a:off x="8577072" y="3172968"/>
-            <a:ext cx="256032" cy="713232"/>
-          </a:xfrm>
-          <a:prstGeom prst="rect">
-            <a:avLst/>
-          </a:prstGeom>
-          <a:solidFill>
-            <a:srgbClr val="2F8A28"/>
-          </a:solidFill>
-          <a:ln w="12700">
-            <a:solidFill>
-              <a:srgbClr val="2F8A28"/>
-            </a:solidFill>
-            <a:prstDash val="solid"/>
-          </a:ln>
-        </p:spPr>
+          <p:cNvPr id="14" name="Text 12"/>
+          <p:cNvSpPr/>
+          <p:nvPr/>
+        </p:nvSpPr>
+        <p:spPr>
+          <a:xfrm>
+            <a:off x="7799832" y="2935224"/>
+            <a:ext cx="3145536" cy="256032"/>
+          </a:xfrm>
+          <a:prstGeom prst="rect">
+            <a:avLst/>
+          </a:prstGeom>
+          <a:noFill/>
+          <a:ln/>
+        </p:spPr>
+        <p:txBody>
+          <a:bodyPr wrap="square" lIns="0" tIns="0" rIns="0" bIns="0" rtlCol="0" anchor="ctr"/>
+          <a:lstStyle/>
+          <a:p>
+            <a:pPr indent="0" marL="0">
+              <a:buNone/>
+            </a:pPr>
+            <a:r>
+              <a:rPr lang="en-US" sz="1300" b="1" dirty="0">
+                <a:solidFill>
+                  <a:srgbClr val="0068B7"/>
+                </a:solidFill>
+                <a:latin typeface="Aptos" pitchFamily="34" charset="0"/>
+                <a:ea typeface="Aptos" pitchFamily="34" charset="-122"/>
+                <a:cs typeface="Aptos" pitchFamily="34" charset="-120"/>
+              </a:rPr>
+              <a:t>Concept checkpoints</a:t>
+            </a:r>
+            <a:endParaRPr lang="en-US" sz="1300" dirty="0"/>
+          </a:p>
+        </p:txBody>
+      </p:sp>
+      <p:sp>
+        <p:nvSpPr>
+          <p:cNvPr id="15" name="Text 13"/>
+          <p:cNvSpPr/>
+          <p:nvPr/>
+        </p:nvSpPr>
+        <p:spPr>
+          <a:xfrm>
+            <a:off x="7818120" y="3300984"/>
+            <a:ext cx="3090672" cy="877824"/>
+          </a:xfrm>
+          <a:prstGeom prst="rect">
+            <a:avLst/>
+          </a:prstGeom>
+          <a:noFill/>
+          <a:ln/>
+        </p:spPr>
+        <p:txBody>
+          <a:bodyPr wrap="square" lIns="254" tIns="254" rIns="254" bIns="254" rtlCol="0" anchor="t">
+            <a:normAutofit/>
+          </a:bodyPr>
+          <a:lstStyle/>
+          <a:p>
+            <a:r>
+              <a:rPr lang="en-US" sz="1380" dirty="0">
+                <a:solidFill>
+                  <a:srgbClr val="17364A"/>
+                </a:solidFill>
+                <a:latin typeface="Aptos" pitchFamily="34" charset="0"/>
+                <a:ea typeface="Aptos" pitchFamily="34" charset="-122"/>
+                <a:cs typeface="Aptos" pitchFamily="34" charset="-120"/>
+              </a:rPr>
+              <a:t>The model depends on timely data feeds from hospitals, correct parsing of chief complaint.</a:t>
+            </a:r>
+            <a:endParaRPr lang="en-US" sz="1380" dirty="0"/>
+          </a:p>
+          <a:p>
+            <a:r>
+              <a:rPr lang="en-US" sz="1380" dirty="0">
+                <a:solidFill>
+                  <a:srgbClr val="17364A"/>
+                </a:solidFill>
+                <a:latin typeface="Aptos" pitchFamily="34" charset="0"/>
+                <a:ea typeface="Aptos" pitchFamily="34" charset="-122"/>
+                <a:cs typeface="Aptos" pitchFamily="34" charset="-120"/>
+              </a:rPr>
+              <a:t>If one large hospital feed stops or a field changes after an EHR upgrade, the AI tool may.</a:t>
+            </a:r>
+            <a:endParaRPr lang="en-US" sz="1380" dirty="0"/>
+          </a:p>
+          <a:p>
+            <a:r>
+              <a:rPr lang="en-US" sz="1380" dirty="0">
+                <a:solidFill>
+                  <a:srgbClr val="17364A"/>
+                </a:solidFill>
+                <a:latin typeface="Aptos" pitchFamily="34" charset="0"/>
+                <a:ea typeface="Aptos" pitchFamily="34" charset="-122"/>
+                <a:cs typeface="Aptos" pitchFamily="34" charset="-120"/>
+              </a:rPr>
+              <a:t>Pipeline monitoring is therefore part of outbreak detection readiness.</a:t>
+            </a:r>
+            <a:endParaRPr lang="en-US" sz="1380" dirty="0"/>
+          </a:p>
+        </p:txBody>
       </p:sp>
       <p:sp>
         <p:nvSpPr>
           <p:cNvPr id="16" name="Shape 14"/>
-          <p:cNvSpPr/>
-          <p:nvPr/>
-        </p:nvSpPr>
-        <p:spPr>
-          <a:xfrm>
-            <a:off x="9015984" y="2880360"/>
-            <a:ext cx="256032" cy="1005840"/>
-          </a:xfrm>
-          <a:prstGeom prst="rect">
-            <a:avLst/>
-          </a:prstGeom>
-          <a:solidFill>
-            <a:srgbClr val="D69A2D"/>
-          </a:solidFill>
-          <a:ln w="12700">
-            <a:solidFill>
-              <a:srgbClr val="D69A2D"/>
-            </a:solidFill>
-            <a:prstDash val="solid"/>
-          </a:ln>
-        </p:spPr>
-      </p:sp>
-      <p:sp>
-        <p:nvSpPr>
-          <p:cNvPr id="17" name="Shape 15"/>
-          <p:cNvSpPr/>
-          <p:nvPr/>
-        </p:nvSpPr>
-        <p:spPr>
-          <a:xfrm>
-            <a:off x="9454896" y="3319272"/>
-            <a:ext cx="256032" cy="566928"/>
-          </a:xfrm>
-          <a:prstGeom prst="rect">
-            <a:avLst/>
-          </a:prstGeom>
-          <a:solidFill>
-            <a:srgbClr val="6A4CA3"/>
-          </a:solidFill>
-          <a:ln w="12700">
-            <a:solidFill>
-              <a:srgbClr val="6A4CA3"/>
-            </a:solidFill>
-            <a:prstDash val="solid"/>
-          </a:ln>
-        </p:spPr>
-      </p:sp>
-      <p:sp>
-        <p:nvSpPr>
-          <p:cNvPr id="18" name="Shape 16"/>
-          <p:cNvSpPr/>
-          <p:nvPr/>
-        </p:nvSpPr>
-        <p:spPr>
-          <a:xfrm>
-            <a:off x="8019288" y="3886200"/>
-            <a:ext cx="2706624" cy="0"/>
-          </a:xfrm>
-          <a:prstGeom prst="line">
-            <a:avLst/>
-          </a:prstGeom>
-          <a:noFill/>
-          <a:ln w="15240">
-            <a:solidFill>
-              <a:srgbClr val="003A63"/>
-            </a:solidFill>
-            <a:prstDash val="solid"/>
-          </a:ln>
-        </p:spPr>
-      </p:sp>
-      <p:sp>
-        <p:nvSpPr>
-          <p:cNvPr id="19" name="Text 17"/>
-          <p:cNvSpPr/>
-          <p:nvPr/>
-        </p:nvSpPr>
-        <p:spPr>
-          <a:xfrm>
-            <a:off x="7863840" y="3017520"/>
-            <a:ext cx="3017520" cy="201168"/>
-          </a:xfrm>
-          <a:prstGeom prst="rect">
-            <a:avLst/>
-          </a:prstGeom>
-          <a:noFill/>
-          <a:ln/>
-        </p:spPr>
-        <p:txBody>
-          <a:bodyPr wrap="square" lIns="0" tIns="0" rIns="0" bIns="0" rtlCol="0" anchor="ctr"/>
-          <a:lstStyle/>
-          <a:p>
-            <a:pPr algn="ctr" indent="0" marL="0">
-              <a:buNone/>
-            </a:pPr>
-            <a:r>
-              <a:rPr lang="en-US" sz="1050" b="1" dirty="0">
-                <a:solidFill>
-                  <a:srgbClr val="003A63"/>
-                </a:solidFill>
-                <a:latin typeface="Aptos" pitchFamily="34" charset="0"/>
-                <a:ea typeface="Aptos" pitchFamily="34" charset="-122"/>
-                <a:cs typeface="Aptos" pitchFamily="34" charset="-120"/>
-              </a:rPr>
-              <a:t>Measure and monitor</a:t>
-            </a:r>
-            <a:endParaRPr lang="en-US" sz="1050" dirty="0"/>
-          </a:p>
-        </p:txBody>
-      </p:sp>
-      <p:sp>
-        <p:nvSpPr>
-          <p:cNvPr id="20" name="Shape 18"/>
           <p:cNvSpPr/>
           <p:nvPr/>
         </p:nvSpPr>
@@ -3726,7 +3667,7 @@
       </p:sp>
       <p:sp>
         <p:nvSpPr>
-          <p:cNvPr id="21" name="Text 19"/>
+          <p:cNvPr id="17" name="Text 15"/>
           <p:cNvSpPr/>
           <p:nvPr/>
         </p:nvSpPr>
@@ -3765,7 +3706,7 @@
       </p:sp>
       <p:sp>
         <p:nvSpPr>
-          <p:cNvPr id="22" name="Text 20"/>
+          <p:cNvPr id="18" name="Text 16"/>
           <p:cNvSpPr/>
           <p:nvPr/>
         </p:nvSpPr>
@@ -4273,13 +4214,11 @@
             </a:avLst>
           </a:prstGeom>
           <a:solidFill>
-            <a:srgbClr val="FFFFFF">
-              <a:alpha val="88000"/>
-            </a:srgbClr>
+            <a:srgbClr val="FFFFFF"/>
           </a:solidFill>
           <a:ln w="12700">
             <a:solidFill>
-              <a:srgbClr val="D6E8F2"/>
+              <a:srgbClr val="B9D7E6"/>
             </a:solidFill>
             <a:prstDash val="solid"/>
           </a:ln>
@@ -4287,169 +4226,112 @@
       </p:sp>
       <p:sp>
         <p:nvSpPr>
-          <p:cNvPr id="14" name="Shape 12"/>
-          <p:cNvSpPr/>
-          <p:nvPr/>
-        </p:nvSpPr>
-        <p:spPr>
-          <a:xfrm>
-            <a:off x="8138160" y="3474720"/>
-            <a:ext cx="256032" cy="411480"/>
-          </a:xfrm>
-          <a:prstGeom prst="rect">
-            <a:avLst/>
-          </a:prstGeom>
-          <a:solidFill>
-            <a:srgbClr val="0068B7"/>
-          </a:solidFill>
-          <a:ln w="12700">
-            <a:solidFill>
-              <a:srgbClr val="0068B7"/>
-            </a:solidFill>
-            <a:prstDash val="solid"/>
-          </a:ln>
-        </p:spPr>
-      </p:sp>
-      <p:sp>
-        <p:nvSpPr>
-          <p:cNvPr id="15" name="Shape 13"/>
-          <p:cNvSpPr/>
-          <p:nvPr/>
-        </p:nvSpPr>
-        <p:spPr>
-          <a:xfrm>
-            <a:off x="8577072" y="3172968"/>
-            <a:ext cx="256032" cy="713232"/>
-          </a:xfrm>
-          <a:prstGeom prst="rect">
-            <a:avLst/>
-          </a:prstGeom>
-          <a:solidFill>
-            <a:srgbClr val="2F8A28"/>
-          </a:solidFill>
-          <a:ln w="12700">
-            <a:solidFill>
-              <a:srgbClr val="2F8A28"/>
-            </a:solidFill>
-            <a:prstDash val="solid"/>
-          </a:ln>
-        </p:spPr>
+          <p:cNvPr id="14" name="Text 12"/>
+          <p:cNvSpPr/>
+          <p:nvPr/>
+        </p:nvSpPr>
+        <p:spPr>
+          <a:xfrm>
+            <a:off x="7799832" y="2935224"/>
+            <a:ext cx="3145536" cy="256032"/>
+          </a:xfrm>
+          <a:prstGeom prst="rect">
+            <a:avLst/>
+          </a:prstGeom>
+          <a:noFill/>
+          <a:ln/>
+        </p:spPr>
+        <p:txBody>
+          <a:bodyPr wrap="square" lIns="0" tIns="0" rIns="0" bIns="0" rtlCol="0" anchor="ctr"/>
+          <a:lstStyle/>
+          <a:p>
+            <a:pPr indent="0" marL="0">
+              <a:buNone/>
+            </a:pPr>
+            <a:r>
+              <a:rPr lang="en-US" sz="1300" b="1" dirty="0">
+                <a:solidFill>
+                  <a:srgbClr val="0068B7"/>
+                </a:solidFill>
+                <a:latin typeface="Aptos" pitchFamily="34" charset="0"/>
+                <a:ea typeface="Aptos" pitchFamily="34" charset="-122"/>
+                <a:cs typeface="Aptos" pitchFamily="34" charset="-120"/>
+              </a:rPr>
+              <a:t>Concept checkpoints</a:t>
+            </a:r>
+            <a:endParaRPr lang="en-US" sz="1300" dirty="0"/>
+          </a:p>
+        </p:txBody>
+      </p:sp>
+      <p:sp>
+        <p:nvSpPr>
+          <p:cNvPr id="15" name="Text 13"/>
+          <p:cNvSpPr/>
+          <p:nvPr/>
+        </p:nvSpPr>
+        <p:spPr>
+          <a:xfrm>
+            <a:off x="7818120" y="3300984"/>
+            <a:ext cx="3090672" cy="877824"/>
+          </a:xfrm>
+          <a:prstGeom prst="rect">
+            <a:avLst/>
+          </a:prstGeom>
+          <a:noFill/>
+          <a:ln/>
+        </p:spPr>
+        <p:txBody>
+          <a:bodyPr wrap="square" lIns="254" tIns="254" rIns="254" bIns="254" rtlCol="0" anchor="t">
+            <a:normAutofit/>
+          </a:bodyPr>
+          <a:lstStyle/>
+          <a:p>
+            <a:r>
+              <a:rPr lang="en-US" sz="1380" dirty="0">
+                <a:solidFill>
+                  <a:srgbClr val="17364A"/>
+                </a:solidFill>
+                <a:latin typeface="Aptos" pitchFamily="34" charset="0"/>
+                <a:ea typeface="Aptos" pitchFamily="34" charset="-122"/>
+                <a:cs typeface="Aptos" pitchFamily="34" charset="-120"/>
+              </a:rPr>
+              <a:t>In between, data may be received, staged, validated, transformed, standardized, linked,.</a:t>
+            </a:r>
+            <a:endParaRPr lang="en-US" sz="1380" dirty="0"/>
+          </a:p>
+          <a:p>
+            <a:r>
+              <a:rPr lang="en-US" sz="1380" dirty="0">
+                <a:solidFill>
+                  <a:srgbClr val="17364A"/>
+                </a:solidFill>
+                <a:latin typeface="Aptos" pitchFamily="34" charset="0"/>
+                <a:ea typeface="Aptos" pitchFamily="34" charset="-122"/>
+                <a:cs typeface="Aptos" pitchFamily="34" charset="-120"/>
+              </a:rPr>
+              <a:t>Batch pipelines move data on a schedule, such as nightly files or weekly extracts.</a:t>
+            </a:r>
+            <a:endParaRPr lang="en-US" sz="1380" dirty="0"/>
+          </a:p>
+          <a:p>
+            <a:r>
+              <a:rPr lang="en-US" sz="1380" dirty="0">
+                <a:solidFill>
+                  <a:srgbClr val="17364A"/>
+                </a:solidFill>
+                <a:latin typeface="Aptos" pitchFamily="34" charset="0"/>
+                <a:ea typeface="Aptos" pitchFamily="34" charset="-122"/>
+                <a:cs typeface="Aptos" pitchFamily="34" charset="-120"/>
+              </a:rPr>
+              <a:t>Real-time pipelines move data as events occur, such as laboratory reports or eCR messages.</a:t>
+            </a:r>
+            <a:endParaRPr lang="en-US" sz="1380" dirty="0"/>
+          </a:p>
+        </p:txBody>
       </p:sp>
       <p:sp>
         <p:nvSpPr>
           <p:cNvPr id="16" name="Shape 14"/>
-          <p:cNvSpPr/>
-          <p:nvPr/>
-        </p:nvSpPr>
-        <p:spPr>
-          <a:xfrm>
-            <a:off x="9015984" y="2880360"/>
-            <a:ext cx="256032" cy="1005840"/>
-          </a:xfrm>
-          <a:prstGeom prst="rect">
-            <a:avLst/>
-          </a:prstGeom>
-          <a:solidFill>
-            <a:srgbClr val="D69A2D"/>
-          </a:solidFill>
-          <a:ln w="12700">
-            <a:solidFill>
-              <a:srgbClr val="D69A2D"/>
-            </a:solidFill>
-            <a:prstDash val="solid"/>
-          </a:ln>
-        </p:spPr>
-      </p:sp>
-      <p:sp>
-        <p:nvSpPr>
-          <p:cNvPr id="17" name="Shape 15"/>
-          <p:cNvSpPr/>
-          <p:nvPr/>
-        </p:nvSpPr>
-        <p:spPr>
-          <a:xfrm>
-            <a:off x="9454896" y="3319272"/>
-            <a:ext cx="256032" cy="566928"/>
-          </a:xfrm>
-          <a:prstGeom prst="rect">
-            <a:avLst/>
-          </a:prstGeom>
-          <a:solidFill>
-            <a:srgbClr val="6A4CA3"/>
-          </a:solidFill>
-          <a:ln w="12700">
-            <a:solidFill>
-              <a:srgbClr val="6A4CA3"/>
-            </a:solidFill>
-            <a:prstDash val="solid"/>
-          </a:ln>
-        </p:spPr>
-      </p:sp>
-      <p:sp>
-        <p:nvSpPr>
-          <p:cNvPr id="18" name="Shape 16"/>
-          <p:cNvSpPr/>
-          <p:nvPr/>
-        </p:nvSpPr>
-        <p:spPr>
-          <a:xfrm>
-            <a:off x="8019288" y="3886200"/>
-            <a:ext cx="2706624" cy="0"/>
-          </a:xfrm>
-          <a:prstGeom prst="line">
-            <a:avLst/>
-          </a:prstGeom>
-          <a:noFill/>
-          <a:ln w="15240">
-            <a:solidFill>
-              <a:srgbClr val="003A63"/>
-            </a:solidFill>
-            <a:prstDash val="solid"/>
-          </a:ln>
-        </p:spPr>
-      </p:sp>
-      <p:sp>
-        <p:nvSpPr>
-          <p:cNvPr id="19" name="Text 17"/>
-          <p:cNvSpPr/>
-          <p:nvPr/>
-        </p:nvSpPr>
-        <p:spPr>
-          <a:xfrm>
-            <a:off x="7863840" y="3017520"/>
-            <a:ext cx="3017520" cy="201168"/>
-          </a:xfrm>
-          <a:prstGeom prst="rect">
-            <a:avLst/>
-          </a:prstGeom>
-          <a:noFill/>
-          <a:ln/>
-        </p:spPr>
-        <p:txBody>
-          <a:bodyPr wrap="square" lIns="0" tIns="0" rIns="0" bIns="0" rtlCol="0" anchor="ctr"/>
-          <a:lstStyle/>
-          <a:p>
-            <a:pPr algn="ctr" indent="0" marL="0">
-              <a:buNone/>
-            </a:pPr>
-            <a:r>
-              <a:rPr lang="en-US" sz="1050" b="1" dirty="0">
-                <a:solidFill>
-                  <a:srgbClr val="003A63"/>
-                </a:solidFill>
-                <a:latin typeface="Aptos" pitchFamily="34" charset="0"/>
-                <a:ea typeface="Aptos" pitchFamily="34" charset="-122"/>
-                <a:cs typeface="Aptos" pitchFamily="34" charset="-120"/>
-              </a:rPr>
-              <a:t>Measure and monitor</a:t>
-            </a:r>
-            <a:endParaRPr lang="en-US" sz="1050" dirty="0"/>
-          </a:p>
-        </p:txBody>
-      </p:sp>
-      <p:sp>
-        <p:nvSpPr>
-          <p:cNvPr id="20" name="Shape 18"/>
           <p:cNvSpPr/>
           <p:nvPr/>
         </p:nvSpPr>
@@ -4476,7 +4358,7 @@
       </p:sp>
       <p:sp>
         <p:nvSpPr>
-          <p:cNvPr id="21" name="Text 19"/>
+          <p:cNvPr id="17" name="Text 15"/>
           <p:cNvSpPr/>
           <p:nvPr/>
         </p:nvSpPr>
@@ -4515,7 +4397,7 @@
       </p:sp>
       <p:sp>
         <p:nvSpPr>
-          <p:cNvPr id="22" name="Text 20"/>
+          <p:cNvPr id="18" name="Text 16"/>
           <p:cNvSpPr/>
           <p:nvPr/>
         </p:nvSpPr>
@@ -5023,13 +4905,11 @@
             </a:avLst>
           </a:prstGeom>
           <a:solidFill>
-            <a:srgbClr val="FFFFFF">
-              <a:alpha val="88000"/>
-            </a:srgbClr>
+            <a:srgbClr val="FFFFFF"/>
           </a:solidFill>
           <a:ln w="12700">
             <a:solidFill>
-              <a:srgbClr val="D6E8F2"/>
+              <a:srgbClr val="B9D7E6"/>
             </a:solidFill>
             <a:prstDash val="solid"/>
           </a:ln>
@@ -5037,26 +4917,42 @@
       </p:sp>
       <p:sp>
         <p:nvSpPr>
-          <p:cNvPr id="14" name="Shape 12"/>
-          <p:cNvSpPr/>
-          <p:nvPr/>
-        </p:nvSpPr>
-        <p:spPr>
-          <a:xfrm>
-            <a:off x="8046720" y="3108960"/>
-            <a:ext cx="2651760" cy="896112"/>
-          </a:xfrm>
-          <a:prstGeom prst="arc">
-            <a:avLst/>
-          </a:prstGeom>
-          <a:noFill/>
-          <a:ln w="25400">
-            <a:solidFill>
-              <a:srgbClr val="0068B7"/>
-            </a:solidFill>
-            <a:prstDash val="solid"/>
-          </a:ln>
-        </p:spPr>
+          <p:cNvPr id="14" name="Text 12"/>
+          <p:cNvSpPr/>
+          <p:nvPr/>
+        </p:nvSpPr>
+        <p:spPr>
+          <a:xfrm>
+            <a:off x="7799832" y="2935224"/>
+            <a:ext cx="3145536" cy="256032"/>
+          </a:xfrm>
+          <a:prstGeom prst="rect">
+            <a:avLst/>
+          </a:prstGeom>
+          <a:noFill/>
+          <a:ln/>
+        </p:spPr>
+        <p:txBody>
+          <a:bodyPr wrap="square" lIns="0" tIns="0" rIns="0" bIns="0" rtlCol="0" anchor="ctr"/>
+          <a:lstStyle/>
+          <a:p>
+            <a:pPr indent="0" marL="0">
+              <a:buNone/>
+            </a:pPr>
+            <a:r>
+              <a:rPr lang="en-US" sz="1300" b="1" dirty="0">
+                <a:solidFill>
+                  <a:srgbClr val="0068B7"/>
+                </a:solidFill>
+                <a:latin typeface="Aptos" pitchFamily="34" charset="0"/>
+                <a:ea typeface="Aptos" pitchFamily="34" charset="-122"/>
+                <a:cs typeface="Aptos" pitchFamily="34" charset="-120"/>
+              </a:rPr>
+              <a:t>Concept checkpoints</a:t>
+            </a:r>
+            <a:endParaRPr lang="en-US" sz="1300" dirty="0"/>
+          </a:p>
+        </p:txBody>
       </p:sp>
       <p:sp>
         <p:nvSpPr>
@@ -5066,102 +4962,67 @@
         </p:nvSpPr>
         <p:spPr>
           <a:xfrm>
-            <a:off x="7909560" y="3099816"/>
-            <a:ext cx="2926080" cy="256032"/>
-          </a:xfrm>
-          <a:prstGeom prst="rect">
-            <a:avLst/>
-          </a:prstGeom>
-          <a:noFill/>
-          <a:ln/>
-        </p:spPr>
-        <p:txBody>
-          <a:bodyPr wrap="square" lIns="0" tIns="0" rIns="0" bIns="0" rtlCol="0" anchor="ctr"/>
-          <a:lstStyle/>
-          <a:p>
-            <a:pPr algn="ctr" indent="0" marL="0">
-              <a:buNone/>
-            </a:pPr>
-            <a:r>
-              <a:rPr lang="en-US" sz="1500" b="1" dirty="0">
-                <a:solidFill>
-                  <a:srgbClr val="003A63"/>
-                </a:solidFill>
-                <a:latin typeface="Aptos" pitchFamily="34" charset="0"/>
-                <a:ea typeface="Aptos" pitchFamily="34" charset="-122"/>
-                <a:cs typeface="Aptos" pitchFamily="34" charset="-120"/>
-              </a:rPr>
-              <a:t>Risk</a:t>
-            </a:r>
-            <a:endParaRPr lang="en-US" sz="1500" dirty="0"/>
+            <a:off x="7818120" y="3300984"/>
+            <a:ext cx="3090672" cy="877824"/>
+          </a:xfrm>
+          <a:prstGeom prst="rect">
+            <a:avLst/>
+          </a:prstGeom>
+          <a:noFill/>
+          <a:ln/>
+        </p:spPr>
+        <p:txBody>
+          <a:bodyPr wrap="square" lIns="254" tIns="254" rIns="254" bIns="254" rtlCol="0" anchor="t">
+            <a:normAutofit/>
+          </a:bodyPr>
+          <a:lstStyle/>
+          <a:p>
+            <a:r>
+              <a:rPr lang="en-US" sz="1380" dirty="0">
+                <a:solidFill>
+                  <a:srgbClr val="17364A"/>
+                </a:solidFill>
+                <a:latin typeface="Aptos" pitchFamily="34" charset="0"/>
+                <a:ea typeface="Aptos" pitchFamily="34" charset="-122"/>
+                <a:cs typeface="Aptos" pitchFamily="34" charset="-120"/>
+              </a:rPr>
+              <a:t>Guardrails include automated feed monitoring, expected volume thresholds, error queues,.</a:t>
+            </a:r>
+            <a:endParaRPr lang="en-US" sz="1380" dirty="0"/>
+          </a:p>
+          <a:p>
+            <a:r>
+              <a:rPr lang="en-US" sz="1380" dirty="0">
+                <a:solidFill>
+                  <a:srgbClr val="17364A"/>
+                </a:solidFill>
+                <a:latin typeface="Aptos" pitchFamily="34" charset="0"/>
+                <a:ea typeface="Aptos" pitchFamily="34" charset="-122"/>
+                <a:cs typeface="Aptos" pitchFamily="34" charset="-120"/>
+              </a:rPr>
+              <a:t>Schema and terminology changes.</a:t>
+            </a:r>
+            <a:endParaRPr lang="en-US" sz="1380" dirty="0"/>
+          </a:p>
+          <a:p>
+            <a:r>
+              <a:rPr lang="en-US" sz="1380" dirty="0">
+                <a:solidFill>
+                  <a:srgbClr val="17364A"/>
+                </a:solidFill>
+                <a:latin typeface="Aptos" pitchFamily="34" charset="0"/>
+                <a:ea typeface="Aptos" pitchFamily="34" charset="-122"/>
+                <a:cs typeface="Aptos" pitchFamily="34" charset="-120"/>
+              </a:rPr>
+              <a:t>Source systems may change field names, formats, codes, or units.</a:t>
+            </a:r>
+            <a:endParaRPr lang="en-US" sz="1380" dirty="0"/>
           </a:p>
         </p:txBody>
       </p:sp>
       <p:sp>
         <p:nvSpPr>
           <p:cNvPr id="16" name="Shape 14"/>
-          <p:cNvSpPr/>
-          <p:nvPr/>
-        </p:nvSpPr>
-        <p:spPr>
-          <a:xfrm>
-            <a:off x="8366760" y="3639312"/>
-            <a:ext cx="2011680" cy="0"/>
-          </a:xfrm>
-          <a:prstGeom prst="line">
-            <a:avLst/>
-          </a:prstGeom>
-          <a:noFill/>
-          <a:ln w="63500">
-            <a:solidFill>
-              <a:srgbClr val="2F8A28"/>
-            </a:solidFill>
-            <a:prstDash val="solid"/>
-          </a:ln>
-        </p:spPr>
-      </p:sp>
-      <p:sp>
-        <p:nvSpPr>
-          <p:cNvPr id="17" name="Text 15"/>
-          <p:cNvSpPr/>
-          <p:nvPr/>
-        </p:nvSpPr>
-        <p:spPr>
-          <a:xfrm>
-            <a:off x="7909560" y="3849624"/>
-            <a:ext cx="2926080" cy="164592"/>
-          </a:xfrm>
-          <a:prstGeom prst="rect">
-            <a:avLst/>
-          </a:prstGeom>
-          <a:noFill/>
-          <a:ln/>
-        </p:spPr>
-        <p:txBody>
-          <a:bodyPr wrap="square" lIns="0" tIns="0" rIns="0" bIns="0" rtlCol="0" anchor="ctr"/>
-          <a:lstStyle/>
-          <a:p>
-            <a:pPr algn="ctr" indent="0" marL="0">
-              <a:buNone/>
-            </a:pPr>
-            <a:r>
-              <a:rPr lang="en-US" sz="900" dirty="0">
-                <a:solidFill>
-                  <a:srgbClr val="003A63"/>
-                </a:solidFill>
-                <a:latin typeface="Aptos" pitchFamily="34" charset="0"/>
-                <a:ea typeface="Aptos" pitchFamily="34" charset="-122"/>
-                <a:cs typeface="Aptos" pitchFamily="34" charset="-120"/>
-              </a:rPr>
-              <a:t>Human review</a:t>
-            </a:r>
-            <a:endParaRPr lang="en-US" sz="900" dirty="0"/>
-          </a:p>
-        </p:txBody>
-      </p:sp>
-      <p:sp>
-        <p:nvSpPr>
-          <p:cNvPr id="18" name="Shape 16"/>
           <p:cNvSpPr/>
           <p:nvPr/>
         </p:nvSpPr>
@@ -5188,7 +5049,7 @@
       </p:sp>
       <p:sp>
         <p:nvSpPr>
-          <p:cNvPr id="19" name="Text 17"/>
+          <p:cNvPr id="17" name="Text 15"/>
           <p:cNvSpPr/>
           <p:nvPr/>
         </p:nvSpPr>
@@ -5227,7 +5088,7 @@
       </p:sp>
       <p:sp>
         <p:nvSpPr>
-          <p:cNvPr id="20" name="Text 18"/>
+          <p:cNvPr id="18" name="Text 16"/>
           <p:cNvSpPr/>
           <p:nvPr/>
         </p:nvSpPr>
@@ -5735,13 +5596,11 @@
             </a:avLst>
           </a:prstGeom>
           <a:solidFill>
-            <a:srgbClr val="FFFFFF">
-              <a:alpha val="88000"/>
-            </a:srgbClr>
+            <a:srgbClr val="FFFFFF"/>
           </a:solidFill>
           <a:ln w="12700">
             <a:solidFill>
-              <a:srgbClr val="D6E8F2"/>
+              <a:srgbClr val="B9D7E6"/>
             </a:solidFill>
             <a:prstDash val="solid"/>
           </a:ln>
@@ -5749,26 +5608,42 @@
       </p:sp>
       <p:sp>
         <p:nvSpPr>
-          <p:cNvPr id="14" name="Shape 12"/>
-          <p:cNvSpPr/>
-          <p:nvPr/>
-        </p:nvSpPr>
-        <p:spPr>
-          <a:xfrm>
-            <a:off x="8046720" y="3108960"/>
-            <a:ext cx="2651760" cy="896112"/>
-          </a:xfrm>
-          <a:prstGeom prst="arc">
-            <a:avLst/>
-          </a:prstGeom>
-          <a:noFill/>
-          <a:ln w="25400">
-            <a:solidFill>
-              <a:srgbClr val="0068B7"/>
-            </a:solidFill>
-            <a:prstDash val="solid"/>
-          </a:ln>
-        </p:spPr>
+          <p:cNvPr id="14" name="Text 12"/>
+          <p:cNvSpPr/>
+          <p:nvPr/>
+        </p:nvSpPr>
+        <p:spPr>
+          <a:xfrm>
+            <a:off x="7799832" y="2935224"/>
+            <a:ext cx="3145536" cy="256032"/>
+          </a:xfrm>
+          <a:prstGeom prst="rect">
+            <a:avLst/>
+          </a:prstGeom>
+          <a:noFill/>
+          <a:ln/>
+        </p:spPr>
+        <p:txBody>
+          <a:bodyPr wrap="square" lIns="0" tIns="0" rIns="0" bIns="0" rtlCol="0" anchor="ctr"/>
+          <a:lstStyle/>
+          <a:p>
+            <a:pPr indent="0" marL="0">
+              <a:buNone/>
+            </a:pPr>
+            <a:r>
+              <a:rPr lang="en-US" sz="1300" b="1" dirty="0">
+                <a:solidFill>
+                  <a:srgbClr val="0068B7"/>
+                </a:solidFill>
+                <a:latin typeface="Aptos" pitchFamily="34" charset="0"/>
+                <a:ea typeface="Aptos" pitchFamily="34" charset="-122"/>
+                <a:cs typeface="Aptos" pitchFamily="34" charset="-120"/>
+              </a:rPr>
+              <a:t>Concept checkpoints</a:t>
+            </a:r>
+            <a:endParaRPr lang="en-US" sz="1300" dirty="0"/>
+          </a:p>
+        </p:txBody>
       </p:sp>
       <p:sp>
         <p:nvSpPr>
@@ -5778,102 +5653,67 @@
         </p:nvSpPr>
         <p:spPr>
           <a:xfrm>
-            <a:off x="7909560" y="3099816"/>
-            <a:ext cx="2926080" cy="256032"/>
-          </a:xfrm>
-          <a:prstGeom prst="rect">
-            <a:avLst/>
-          </a:prstGeom>
-          <a:noFill/>
-          <a:ln/>
-        </p:spPr>
-        <p:txBody>
-          <a:bodyPr wrap="square" lIns="0" tIns="0" rIns="0" bIns="0" rtlCol="0" anchor="ctr"/>
-          <a:lstStyle/>
-          <a:p>
-            <a:pPr algn="ctr" indent="0" marL="0">
-              <a:buNone/>
-            </a:pPr>
-            <a:r>
-              <a:rPr lang="en-US" sz="1500" b="1" dirty="0">
-                <a:solidFill>
-                  <a:srgbClr val="003A63"/>
-                </a:solidFill>
-                <a:latin typeface="Aptos" pitchFamily="34" charset="0"/>
-                <a:ea typeface="Aptos" pitchFamily="34" charset="-122"/>
-                <a:cs typeface="Aptos" pitchFamily="34" charset="-120"/>
-              </a:rPr>
-              <a:t>Risk</a:t>
-            </a:r>
-            <a:endParaRPr lang="en-US" sz="1500" dirty="0"/>
+            <a:off x="7818120" y="3300984"/>
+            <a:ext cx="3090672" cy="877824"/>
+          </a:xfrm>
+          <a:prstGeom prst="rect">
+            <a:avLst/>
+          </a:prstGeom>
+          <a:noFill/>
+          <a:ln/>
+        </p:spPr>
+        <p:txBody>
+          <a:bodyPr wrap="square" lIns="254" tIns="254" rIns="254" bIns="254" rtlCol="0" anchor="t">
+            <a:normAutofit/>
+          </a:bodyPr>
+          <a:lstStyle/>
+          <a:p>
+            <a:r>
+              <a:rPr lang="en-US" sz="1380" dirty="0">
+                <a:solidFill>
+                  <a:srgbClr val="17364A"/>
+                </a:solidFill>
+                <a:latin typeface="Aptos" pitchFamily="34" charset="0"/>
+                <a:ea typeface="Aptos" pitchFamily="34" charset="-122"/>
+                <a:cs typeface="Aptos" pitchFamily="34" charset="-120"/>
+              </a:rPr>
+              <a:t>Weak lineage.</a:t>
+            </a:r>
+            <a:endParaRPr lang="en-US" sz="1380" dirty="0"/>
+          </a:p>
+          <a:p>
+            <a:r>
+              <a:rPr lang="en-US" sz="1380" dirty="0">
+                <a:solidFill>
+                  <a:srgbClr val="17364A"/>
+                </a:solidFill>
+                <a:latin typeface="Aptos" pitchFamily="34" charset="0"/>
+                <a:ea typeface="Aptos" pitchFamily="34" charset="-122"/>
+                <a:cs typeface="Aptos" pitchFamily="34" charset="-120"/>
+              </a:rPr>
+              <a:t>If transformations are not documented, staff may not be able to explain or correct AI.</a:t>
+            </a:r>
+            <a:endParaRPr lang="en-US" sz="1380" dirty="0"/>
+          </a:p>
+          <a:p>
+            <a:r>
+              <a:rPr lang="en-US" sz="1380" dirty="0">
+                <a:solidFill>
+                  <a:srgbClr val="17364A"/>
+                </a:solidFill>
+                <a:latin typeface="Aptos" pitchFamily="34" charset="0"/>
+                <a:ea typeface="Aptos" pitchFamily="34" charset="-122"/>
+                <a:cs typeface="Aptos" pitchFamily="34" charset="-120"/>
+              </a:rPr>
+              <a:t>Guardrails include lineage documentation, version control, and audit trails.</a:t>
+            </a:r>
+            <a:endParaRPr lang="en-US" sz="1380" dirty="0"/>
           </a:p>
         </p:txBody>
       </p:sp>
       <p:sp>
         <p:nvSpPr>
           <p:cNvPr id="16" name="Shape 14"/>
-          <p:cNvSpPr/>
-          <p:nvPr/>
-        </p:nvSpPr>
-        <p:spPr>
-          <a:xfrm>
-            <a:off x="8366760" y="3639312"/>
-            <a:ext cx="2011680" cy="0"/>
-          </a:xfrm>
-          <a:prstGeom prst="line">
-            <a:avLst/>
-          </a:prstGeom>
-          <a:noFill/>
-          <a:ln w="63500">
-            <a:solidFill>
-              <a:srgbClr val="2F8A28"/>
-            </a:solidFill>
-            <a:prstDash val="solid"/>
-          </a:ln>
-        </p:spPr>
-      </p:sp>
-      <p:sp>
-        <p:nvSpPr>
-          <p:cNvPr id="17" name="Text 15"/>
-          <p:cNvSpPr/>
-          <p:nvPr/>
-        </p:nvSpPr>
-        <p:spPr>
-          <a:xfrm>
-            <a:off x="7909560" y="3849624"/>
-            <a:ext cx="2926080" cy="164592"/>
-          </a:xfrm>
-          <a:prstGeom prst="rect">
-            <a:avLst/>
-          </a:prstGeom>
-          <a:noFill/>
-          <a:ln/>
-        </p:spPr>
-        <p:txBody>
-          <a:bodyPr wrap="square" lIns="0" tIns="0" rIns="0" bIns="0" rtlCol="0" anchor="ctr"/>
-          <a:lstStyle/>
-          <a:p>
-            <a:pPr algn="ctr" indent="0" marL="0">
-              <a:buNone/>
-            </a:pPr>
-            <a:r>
-              <a:rPr lang="en-US" sz="900" dirty="0">
-                <a:solidFill>
-                  <a:srgbClr val="003A63"/>
-                </a:solidFill>
-                <a:latin typeface="Aptos" pitchFamily="34" charset="0"/>
-                <a:ea typeface="Aptos" pitchFamily="34" charset="-122"/>
-                <a:cs typeface="Aptos" pitchFamily="34" charset="-120"/>
-              </a:rPr>
-              <a:t>Human review</a:t>
-            </a:r>
-            <a:endParaRPr lang="en-US" sz="900" dirty="0"/>
-          </a:p>
-        </p:txBody>
-      </p:sp>
-      <p:sp>
-        <p:nvSpPr>
-          <p:cNvPr id="18" name="Shape 16"/>
           <p:cNvSpPr/>
           <p:nvPr/>
         </p:nvSpPr>
@@ -5900,7 +5740,7 @@
       </p:sp>
       <p:sp>
         <p:nvSpPr>
-          <p:cNvPr id="19" name="Text 17"/>
+          <p:cNvPr id="17" name="Text 15"/>
           <p:cNvSpPr/>
           <p:nvPr/>
         </p:nvSpPr>
@@ -5939,7 +5779,7 @@
       </p:sp>
       <p:sp>
         <p:nvSpPr>
-          <p:cNvPr id="20" name="Text 18"/>
+          <p:cNvPr id="18" name="Text 16"/>
           <p:cNvSpPr/>
           <p:nvPr/>
         </p:nvSpPr>
@@ -6447,13 +6287,11 @@
             </a:avLst>
           </a:prstGeom>
           <a:solidFill>
-            <a:srgbClr val="FFFFFF">
-              <a:alpha val="88000"/>
-            </a:srgbClr>
+            <a:srgbClr val="FFFFFF"/>
           </a:solidFill>
           <a:ln w="12700">
             <a:solidFill>
-              <a:srgbClr val="D6E8F2"/>
+              <a:srgbClr val="B9D7E6"/>
             </a:solidFill>
             <a:prstDash val="solid"/>
           </a:ln>
@@ -6461,169 +6299,112 @@
       </p:sp>
       <p:sp>
         <p:nvSpPr>
-          <p:cNvPr id="14" name="Shape 12"/>
-          <p:cNvSpPr/>
-          <p:nvPr/>
-        </p:nvSpPr>
-        <p:spPr>
-          <a:xfrm>
-            <a:off x="8138160" y="3474720"/>
-            <a:ext cx="256032" cy="411480"/>
-          </a:xfrm>
-          <a:prstGeom prst="rect">
-            <a:avLst/>
-          </a:prstGeom>
-          <a:solidFill>
-            <a:srgbClr val="0068B7"/>
-          </a:solidFill>
-          <a:ln w="12700">
-            <a:solidFill>
-              <a:srgbClr val="0068B7"/>
-            </a:solidFill>
-            <a:prstDash val="solid"/>
-          </a:ln>
-        </p:spPr>
-      </p:sp>
-      <p:sp>
-        <p:nvSpPr>
-          <p:cNvPr id="15" name="Shape 13"/>
-          <p:cNvSpPr/>
-          <p:nvPr/>
-        </p:nvSpPr>
-        <p:spPr>
-          <a:xfrm>
-            <a:off x="8577072" y="3172968"/>
-            <a:ext cx="256032" cy="713232"/>
-          </a:xfrm>
-          <a:prstGeom prst="rect">
-            <a:avLst/>
-          </a:prstGeom>
-          <a:solidFill>
-            <a:srgbClr val="2F8A28"/>
-          </a:solidFill>
-          <a:ln w="12700">
-            <a:solidFill>
-              <a:srgbClr val="2F8A28"/>
-            </a:solidFill>
-            <a:prstDash val="solid"/>
-          </a:ln>
-        </p:spPr>
+          <p:cNvPr id="14" name="Text 12"/>
+          <p:cNvSpPr/>
+          <p:nvPr/>
+        </p:nvSpPr>
+        <p:spPr>
+          <a:xfrm>
+            <a:off x="7799832" y="2935224"/>
+            <a:ext cx="3145536" cy="256032"/>
+          </a:xfrm>
+          <a:prstGeom prst="rect">
+            <a:avLst/>
+          </a:prstGeom>
+          <a:noFill/>
+          <a:ln/>
+        </p:spPr>
+        <p:txBody>
+          <a:bodyPr wrap="square" lIns="0" tIns="0" rIns="0" bIns="0" rtlCol="0" anchor="ctr"/>
+          <a:lstStyle/>
+          <a:p>
+            <a:pPr indent="0" marL="0">
+              <a:buNone/>
+            </a:pPr>
+            <a:r>
+              <a:rPr lang="en-US" sz="1300" b="1" dirty="0">
+                <a:solidFill>
+                  <a:srgbClr val="0068B7"/>
+                </a:solidFill>
+                <a:latin typeface="Aptos" pitchFamily="34" charset="0"/>
+                <a:ea typeface="Aptos" pitchFamily="34" charset="-122"/>
+                <a:cs typeface="Aptos" pitchFamily="34" charset="-120"/>
+              </a:rPr>
+              <a:t>Concept checkpoints</a:t>
+            </a:r>
+            <a:endParaRPr lang="en-US" sz="1300" dirty="0"/>
+          </a:p>
+        </p:txBody>
+      </p:sp>
+      <p:sp>
+        <p:nvSpPr>
+          <p:cNvPr id="15" name="Text 13"/>
+          <p:cNvSpPr/>
+          <p:nvPr/>
+        </p:nvSpPr>
+        <p:spPr>
+          <a:xfrm>
+            <a:off x="7818120" y="3300984"/>
+            <a:ext cx="3090672" cy="877824"/>
+          </a:xfrm>
+          <a:prstGeom prst="rect">
+            <a:avLst/>
+          </a:prstGeom>
+          <a:noFill/>
+          <a:ln/>
+        </p:spPr>
+        <p:txBody>
+          <a:bodyPr wrap="square" lIns="254" tIns="254" rIns="254" bIns="254" rtlCol="0" anchor="t">
+            <a:normAutofit/>
+          </a:bodyPr>
+          <a:lstStyle/>
+          <a:p>
+            <a:r>
+              <a:rPr lang="en-US" sz="1380" dirty="0">
+                <a:solidFill>
+                  <a:srgbClr val="17364A"/>
+                </a:solidFill>
+                <a:latin typeface="Aptos" pitchFamily="34" charset="0"/>
+                <a:ea typeface="Aptos" pitchFamily="34" charset="-122"/>
+                <a:cs typeface="Aptos" pitchFamily="34" charset="-120"/>
+              </a:rPr>
+              <a:t>Generative AI may use pipeline outputs to summarize records, but the summary should.</a:t>
+            </a:r>
+            <a:endParaRPr lang="en-US" sz="1380" dirty="0"/>
+          </a:p>
+          <a:p>
+            <a:r>
+              <a:rPr lang="en-US" sz="1380" dirty="0">
+                <a:solidFill>
+                  <a:srgbClr val="17364A"/>
+                </a:solidFill>
+                <a:latin typeface="Aptos" pitchFamily="34" charset="0"/>
+                <a:ea typeface="Aptos" pitchFamily="34" charset="-122"/>
+                <a:cs typeface="Aptos" pitchFamily="34" charset="-120"/>
+              </a:rPr>
+              <a:t>Predictive models may rely on engineered features created by a pipeline, so the feature.</a:t>
+            </a:r>
+            <a:endParaRPr lang="en-US" sz="1380" dirty="0"/>
+          </a:p>
+          <a:p>
+            <a:r>
+              <a:rPr lang="en-US" sz="1380" dirty="0">
+                <a:solidFill>
+                  <a:srgbClr val="17364A"/>
+                </a:solidFill>
+                <a:latin typeface="Aptos" pitchFamily="34" charset="0"/>
+                <a:ea typeface="Aptos" pitchFamily="34" charset="-122"/>
+                <a:cs typeface="Aptos" pitchFamily="34" charset="-120"/>
+              </a:rPr>
+              <a:t>RAG systems depend on document ingestion pipelines, which must track document source,.</a:t>
+            </a:r>
+            <a:endParaRPr lang="en-US" sz="1380" dirty="0"/>
+          </a:p>
+        </p:txBody>
       </p:sp>
       <p:sp>
         <p:nvSpPr>
           <p:cNvPr id="16" name="Shape 14"/>
-          <p:cNvSpPr/>
-          <p:nvPr/>
-        </p:nvSpPr>
-        <p:spPr>
-          <a:xfrm>
-            <a:off x="9015984" y="2880360"/>
-            <a:ext cx="256032" cy="1005840"/>
-          </a:xfrm>
-          <a:prstGeom prst="rect">
-            <a:avLst/>
-          </a:prstGeom>
-          <a:solidFill>
-            <a:srgbClr val="D69A2D"/>
-          </a:solidFill>
-          <a:ln w="12700">
-            <a:solidFill>
-              <a:srgbClr val="D69A2D"/>
-            </a:solidFill>
-            <a:prstDash val="solid"/>
-          </a:ln>
-        </p:spPr>
-      </p:sp>
-      <p:sp>
-        <p:nvSpPr>
-          <p:cNvPr id="17" name="Shape 15"/>
-          <p:cNvSpPr/>
-          <p:nvPr/>
-        </p:nvSpPr>
-        <p:spPr>
-          <a:xfrm>
-            <a:off x="9454896" y="3319272"/>
-            <a:ext cx="256032" cy="566928"/>
-          </a:xfrm>
-          <a:prstGeom prst="rect">
-            <a:avLst/>
-          </a:prstGeom>
-          <a:solidFill>
-            <a:srgbClr val="6A4CA3"/>
-          </a:solidFill>
-          <a:ln w="12700">
-            <a:solidFill>
-              <a:srgbClr val="6A4CA3"/>
-            </a:solidFill>
-            <a:prstDash val="solid"/>
-          </a:ln>
-        </p:spPr>
-      </p:sp>
-      <p:sp>
-        <p:nvSpPr>
-          <p:cNvPr id="18" name="Shape 16"/>
-          <p:cNvSpPr/>
-          <p:nvPr/>
-        </p:nvSpPr>
-        <p:spPr>
-          <a:xfrm>
-            <a:off x="8019288" y="3886200"/>
-            <a:ext cx="2706624" cy="0"/>
-          </a:xfrm>
-          <a:prstGeom prst="line">
-            <a:avLst/>
-          </a:prstGeom>
-          <a:noFill/>
-          <a:ln w="15240">
-            <a:solidFill>
-              <a:srgbClr val="003A63"/>
-            </a:solidFill>
-            <a:prstDash val="solid"/>
-          </a:ln>
-        </p:spPr>
-      </p:sp>
-      <p:sp>
-        <p:nvSpPr>
-          <p:cNvPr id="19" name="Text 17"/>
-          <p:cNvSpPr/>
-          <p:nvPr/>
-        </p:nvSpPr>
-        <p:spPr>
-          <a:xfrm>
-            <a:off x="7863840" y="3017520"/>
-            <a:ext cx="3017520" cy="201168"/>
-          </a:xfrm>
-          <a:prstGeom prst="rect">
-            <a:avLst/>
-          </a:prstGeom>
-          <a:noFill/>
-          <a:ln/>
-        </p:spPr>
-        <p:txBody>
-          <a:bodyPr wrap="square" lIns="0" tIns="0" rIns="0" bIns="0" rtlCol="0" anchor="ctr"/>
-          <a:lstStyle/>
-          <a:p>
-            <a:pPr algn="ctr" indent="0" marL="0">
-              <a:buNone/>
-            </a:pPr>
-            <a:r>
-              <a:rPr lang="en-US" sz="1050" b="1" dirty="0">
-                <a:solidFill>
-                  <a:srgbClr val="003A63"/>
-                </a:solidFill>
-                <a:latin typeface="Aptos" pitchFamily="34" charset="0"/>
-                <a:ea typeface="Aptos" pitchFamily="34" charset="-122"/>
-                <a:cs typeface="Aptos" pitchFamily="34" charset="-120"/>
-              </a:rPr>
-              <a:t>Measure and monitor</a:t>
-            </a:r>
-            <a:endParaRPr lang="en-US" sz="1050" dirty="0"/>
-          </a:p>
-        </p:txBody>
-      </p:sp>
-      <p:sp>
-        <p:nvSpPr>
-          <p:cNvPr id="20" name="Shape 18"/>
           <p:cNvSpPr/>
           <p:nvPr/>
         </p:nvSpPr>
@@ -6650,7 +6431,7 @@
       </p:sp>
       <p:sp>
         <p:nvSpPr>
-          <p:cNvPr id="21" name="Text 19"/>
+          <p:cNvPr id="17" name="Text 15"/>
           <p:cNvSpPr/>
           <p:nvPr/>
         </p:nvSpPr>
@@ -6689,7 +6470,7 @@
       </p:sp>
       <p:sp>
         <p:nvSpPr>
-          <p:cNvPr id="22" name="Text 20"/>
+          <p:cNvPr id="18" name="Text 16"/>
           <p:cNvSpPr/>
           <p:nvPr/>
         </p:nvSpPr>
@@ -7197,13 +6978,11 @@
             </a:avLst>
           </a:prstGeom>
           <a:solidFill>
-            <a:srgbClr val="FFFFFF">
-              <a:alpha val="88000"/>
-            </a:srgbClr>
+            <a:srgbClr val="FFFFFF"/>
           </a:solidFill>
           <a:ln w="12700">
             <a:solidFill>
-              <a:srgbClr val="D6E8F2"/>
+              <a:srgbClr val="B9D7E6"/>
             </a:solidFill>
             <a:prstDash val="solid"/>
           </a:ln>
@@ -7211,169 +6990,112 @@
       </p:sp>
       <p:sp>
         <p:nvSpPr>
-          <p:cNvPr id="14" name="Shape 12"/>
-          <p:cNvSpPr/>
-          <p:nvPr/>
-        </p:nvSpPr>
-        <p:spPr>
-          <a:xfrm>
-            <a:off x="8138160" y="3474720"/>
-            <a:ext cx="256032" cy="411480"/>
-          </a:xfrm>
-          <a:prstGeom prst="rect">
-            <a:avLst/>
-          </a:prstGeom>
-          <a:solidFill>
-            <a:srgbClr val="0068B7"/>
-          </a:solidFill>
-          <a:ln w="12700">
-            <a:solidFill>
-              <a:srgbClr val="0068B7"/>
-            </a:solidFill>
-            <a:prstDash val="solid"/>
-          </a:ln>
-        </p:spPr>
-      </p:sp>
-      <p:sp>
-        <p:nvSpPr>
-          <p:cNvPr id="15" name="Shape 13"/>
-          <p:cNvSpPr/>
-          <p:nvPr/>
-        </p:nvSpPr>
-        <p:spPr>
-          <a:xfrm>
-            <a:off x="8577072" y="3172968"/>
-            <a:ext cx="256032" cy="713232"/>
-          </a:xfrm>
-          <a:prstGeom prst="rect">
-            <a:avLst/>
-          </a:prstGeom>
-          <a:solidFill>
-            <a:srgbClr val="2F8A28"/>
-          </a:solidFill>
-          <a:ln w="12700">
-            <a:solidFill>
-              <a:srgbClr val="2F8A28"/>
-            </a:solidFill>
-            <a:prstDash val="solid"/>
-          </a:ln>
-        </p:spPr>
+          <p:cNvPr id="14" name="Text 12"/>
+          <p:cNvSpPr/>
+          <p:nvPr/>
+        </p:nvSpPr>
+        <p:spPr>
+          <a:xfrm>
+            <a:off x="7799832" y="2935224"/>
+            <a:ext cx="3145536" cy="256032"/>
+          </a:xfrm>
+          <a:prstGeom prst="rect">
+            <a:avLst/>
+          </a:prstGeom>
+          <a:noFill/>
+          <a:ln/>
+        </p:spPr>
+        <p:txBody>
+          <a:bodyPr wrap="square" lIns="0" tIns="0" rIns="0" bIns="0" rtlCol="0" anchor="ctr"/>
+          <a:lstStyle/>
+          <a:p>
+            <a:pPr indent="0" marL="0">
+              <a:buNone/>
+            </a:pPr>
+            <a:r>
+              <a:rPr lang="en-US" sz="1300" b="1" dirty="0">
+                <a:solidFill>
+                  <a:srgbClr val="0068B7"/>
+                </a:solidFill>
+                <a:latin typeface="Aptos" pitchFamily="34" charset="0"/>
+                <a:ea typeface="Aptos" pitchFamily="34" charset="-122"/>
+                <a:cs typeface="Aptos" pitchFamily="34" charset="-120"/>
+              </a:rPr>
+              <a:t>Concept checkpoints</a:t>
+            </a:r>
+            <a:endParaRPr lang="en-US" sz="1300" dirty="0"/>
+          </a:p>
+        </p:txBody>
+      </p:sp>
+      <p:sp>
+        <p:nvSpPr>
+          <p:cNvPr id="15" name="Text 13"/>
+          <p:cNvSpPr/>
+          <p:nvPr/>
+        </p:nvSpPr>
+        <p:spPr>
+          <a:xfrm>
+            <a:off x="7818120" y="3300984"/>
+            <a:ext cx="3090672" cy="877824"/>
+          </a:xfrm>
+          <a:prstGeom prst="rect">
+            <a:avLst/>
+          </a:prstGeom>
+          <a:noFill/>
+          <a:ln/>
+        </p:spPr>
+        <p:txBody>
+          <a:bodyPr wrap="square" lIns="254" tIns="254" rIns="254" bIns="254" rtlCol="0" anchor="t">
+            <a:normAutofit/>
+          </a:bodyPr>
+          <a:lstStyle/>
+          <a:p>
+            <a:r>
+              <a:rPr lang="en-US" sz="1380" dirty="0">
+                <a:solidFill>
+                  <a:srgbClr val="17364A"/>
+                </a:solidFill>
+                <a:latin typeface="Aptos" pitchFamily="34" charset="0"/>
+                <a:ea typeface="Aptos" pitchFamily="34" charset="-122"/>
+                <a:cs typeface="Aptos" pitchFamily="34" charset="-120"/>
+              </a:rPr>
+              <a:t>Which public health data feeds are most important to daily decisions in your program?</a:t>
+            </a:r>
+            <a:endParaRPr lang="en-US" sz="1380" dirty="0"/>
+          </a:p>
+          <a:p>
+            <a:r>
+              <a:rPr lang="en-US" sz="1380" dirty="0">
+                <a:solidFill>
+                  <a:srgbClr val="17364A"/>
+                </a:solidFill>
+                <a:latin typeface="Aptos" pitchFamily="34" charset="0"/>
+                <a:ea typeface="Aptos" pitchFamily="34" charset="-122"/>
+                <a:cs typeface="Aptos" pitchFamily="34" charset="-120"/>
+              </a:rPr>
+              <a:t>Which pipelines are automatically monitored, and which depend on manual review?</a:t>
+            </a:r>
+            <a:endParaRPr lang="en-US" sz="1380" dirty="0"/>
+          </a:p>
+          <a:p>
+            <a:r>
+              <a:rPr lang="en-US" sz="1380" dirty="0">
+                <a:solidFill>
+                  <a:srgbClr val="17364A"/>
+                </a:solidFill>
+                <a:latin typeface="Aptos" pitchFamily="34" charset="0"/>
+                <a:ea typeface="Aptos" pitchFamily="34" charset="-122"/>
+                <a:cs typeface="Aptos" pitchFamily="34" charset="-120"/>
+              </a:rPr>
+              <a:t>What failures would materially affect an AI output?</a:t>
+            </a:r>
+            <a:endParaRPr lang="en-US" sz="1380" dirty="0"/>
+          </a:p>
+        </p:txBody>
       </p:sp>
       <p:sp>
         <p:nvSpPr>
           <p:cNvPr id="16" name="Shape 14"/>
-          <p:cNvSpPr/>
-          <p:nvPr/>
-        </p:nvSpPr>
-        <p:spPr>
-          <a:xfrm>
-            <a:off x="9015984" y="2880360"/>
-            <a:ext cx="256032" cy="1005840"/>
-          </a:xfrm>
-          <a:prstGeom prst="rect">
-            <a:avLst/>
-          </a:prstGeom>
-          <a:solidFill>
-            <a:srgbClr val="D69A2D"/>
-          </a:solidFill>
-          <a:ln w="12700">
-            <a:solidFill>
-              <a:srgbClr val="D69A2D"/>
-            </a:solidFill>
-            <a:prstDash val="solid"/>
-          </a:ln>
-        </p:spPr>
-      </p:sp>
-      <p:sp>
-        <p:nvSpPr>
-          <p:cNvPr id="17" name="Shape 15"/>
-          <p:cNvSpPr/>
-          <p:nvPr/>
-        </p:nvSpPr>
-        <p:spPr>
-          <a:xfrm>
-            <a:off x="9454896" y="3319272"/>
-            <a:ext cx="256032" cy="566928"/>
-          </a:xfrm>
-          <a:prstGeom prst="rect">
-            <a:avLst/>
-          </a:prstGeom>
-          <a:solidFill>
-            <a:srgbClr val="6A4CA3"/>
-          </a:solidFill>
-          <a:ln w="12700">
-            <a:solidFill>
-              <a:srgbClr val="6A4CA3"/>
-            </a:solidFill>
-            <a:prstDash val="solid"/>
-          </a:ln>
-        </p:spPr>
-      </p:sp>
-      <p:sp>
-        <p:nvSpPr>
-          <p:cNvPr id="18" name="Shape 16"/>
-          <p:cNvSpPr/>
-          <p:nvPr/>
-        </p:nvSpPr>
-        <p:spPr>
-          <a:xfrm>
-            <a:off x="8019288" y="3886200"/>
-            <a:ext cx="2706624" cy="0"/>
-          </a:xfrm>
-          <a:prstGeom prst="line">
-            <a:avLst/>
-          </a:prstGeom>
-          <a:noFill/>
-          <a:ln w="15240">
-            <a:solidFill>
-              <a:srgbClr val="003A63"/>
-            </a:solidFill>
-            <a:prstDash val="solid"/>
-          </a:ln>
-        </p:spPr>
-      </p:sp>
-      <p:sp>
-        <p:nvSpPr>
-          <p:cNvPr id="19" name="Text 17"/>
-          <p:cNvSpPr/>
-          <p:nvPr/>
-        </p:nvSpPr>
-        <p:spPr>
-          <a:xfrm>
-            <a:off x="7863840" y="3017520"/>
-            <a:ext cx="3017520" cy="201168"/>
-          </a:xfrm>
-          <a:prstGeom prst="rect">
-            <a:avLst/>
-          </a:prstGeom>
-          <a:noFill/>
-          <a:ln/>
-        </p:spPr>
-        <p:txBody>
-          <a:bodyPr wrap="square" lIns="0" tIns="0" rIns="0" bIns="0" rtlCol="0" anchor="ctr"/>
-          <a:lstStyle/>
-          <a:p>
-            <a:pPr algn="ctr" indent="0" marL="0">
-              <a:buNone/>
-            </a:pPr>
-            <a:r>
-              <a:rPr lang="en-US" sz="1050" b="1" dirty="0">
-                <a:solidFill>
-                  <a:srgbClr val="003A63"/>
-                </a:solidFill>
-                <a:latin typeface="Aptos" pitchFamily="34" charset="0"/>
-                <a:ea typeface="Aptos" pitchFamily="34" charset="-122"/>
-                <a:cs typeface="Aptos" pitchFamily="34" charset="-120"/>
-              </a:rPr>
-              <a:t>Measure and monitor</a:t>
-            </a:r>
-            <a:endParaRPr lang="en-US" sz="1050" dirty="0"/>
-          </a:p>
-        </p:txBody>
-      </p:sp>
-      <p:sp>
-        <p:nvSpPr>
-          <p:cNvPr id="20" name="Shape 18"/>
           <p:cNvSpPr/>
           <p:nvPr/>
         </p:nvSpPr>
@@ -7400,7 +7122,7 @@
       </p:sp>
       <p:sp>
         <p:nvSpPr>
-          <p:cNvPr id="21" name="Text 19"/>
+          <p:cNvPr id="17" name="Text 15"/>
           <p:cNvSpPr/>
           <p:nvPr/>
         </p:nvSpPr>
@@ -7439,7 +7161,7 @@
       </p:sp>
       <p:sp>
         <p:nvSpPr>
-          <p:cNvPr id="22" name="Text 20"/>
+          <p:cNvPr id="18" name="Text 16"/>
           <p:cNvSpPr/>
           <p:nvPr/>
         </p:nvSpPr>
@@ -7933,13 +7655,11 @@
             </a:avLst>
           </a:prstGeom>
           <a:solidFill>
-            <a:srgbClr val="FFFFFF">
-              <a:alpha val="88000"/>
-            </a:srgbClr>
+            <a:srgbClr val="FFFFFF"/>
           </a:solidFill>
           <a:ln w="12700">
             <a:solidFill>
-              <a:srgbClr val="D6E8F2"/>
+              <a:srgbClr val="B9D7E6"/>
             </a:solidFill>
             <a:prstDash val="solid"/>
           </a:ln>
@@ -7947,169 +7667,98 @@
       </p:sp>
       <p:sp>
         <p:nvSpPr>
-          <p:cNvPr id="14" name="Shape 12"/>
-          <p:cNvSpPr/>
-          <p:nvPr/>
-        </p:nvSpPr>
-        <p:spPr>
-          <a:xfrm>
-            <a:off x="8138160" y="3474720"/>
-            <a:ext cx="256032" cy="411480"/>
-          </a:xfrm>
-          <a:prstGeom prst="rect">
-            <a:avLst/>
-          </a:prstGeom>
-          <a:solidFill>
-            <a:srgbClr val="0068B7"/>
-          </a:solidFill>
-          <a:ln w="12700">
-            <a:solidFill>
-              <a:srgbClr val="0068B7"/>
-            </a:solidFill>
-            <a:prstDash val="solid"/>
-          </a:ln>
-        </p:spPr>
-      </p:sp>
-      <p:sp>
-        <p:nvSpPr>
-          <p:cNvPr id="15" name="Shape 13"/>
-          <p:cNvSpPr/>
-          <p:nvPr/>
-        </p:nvSpPr>
-        <p:spPr>
-          <a:xfrm>
-            <a:off x="8577072" y="3172968"/>
-            <a:ext cx="256032" cy="713232"/>
-          </a:xfrm>
-          <a:prstGeom prst="rect">
-            <a:avLst/>
-          </a:prstGeom>
-          <a:solidFill>
-            <a:srgbClr val="2F8A28"/>
-          </a:solidFill>
-          <a:ln w="12700">
-            <a:solidFill>
-              <a:srgbClr val="2F8A28"/>
-            </a:solidFill>
-            <a:prstDash val="solid"/>
-          </a:ln>
-        </p:spPr>
+          <p:cNvPr id="14" name="Text 12"/>
+          <p:cNvSpPr/>
+          <p:nvPr/>
+        </p:nvSpPr>
+        <p:spPr>
+          <a:xfrm>
+            <a:off x="7799832" y="2935224"/>
+            <a:ext cx="3145536" cy="256032"/>
+          </a:xfrm>
+          <a:prstGeom prst="rect">
+            <a:avLst/>
+          </a:prstGeom>
+          <a:noFill/>
+          <a:ln/>
+        </p:spPr>
+        <p:txBody>
+          <a:bodyPr wrap="square" lIns="0" tIns="0" rIns="0" bIns="0" rtlCol="0" anchor="ctr"/>
+          <a:lstStyle/>
+          <a:p>
+            <a:pPr indent="0" marL="0">
+              <a:buNone/>
+            </a:pPr>
+            <a:r>
+              <a:rPr lang="en-US" sz="1300" b="1" dirty="0">
+                <a:solidFill>
+                  <a:srgbClr val="0068B7"/>
+                </a:solidFill>
+                <a:latin typeface="Aptos" pitchFamily="34" charset="0"/>
+                <a:ea typeface="Aptos" pitchFamily="34" charset="-122"/>
+                <a:cs typeface="Aptos" pitchFamily="34" charset="-120"/>
+              </a:rPr>
+              <a:t>Concept checkpoints</a:t>
+            </a:r>
+            <a:endParaRPr lang="en-US" sz="1300" dirty="0"/>
+          </a:p>
+        </p:txBody>
+      </p:sp>
+      <p:sp>
+        <p:nvSpPr>
+          <p:cNvPr id="15" name="Text 13"/>
+          <p:cNvSpPr/>
+          <p:nvPr/>
+        </p:nvSpPr>
+        <p:spPr>
+          <a:xfrm>
+            <a:off x="7818120" y="3300984"/>
+            <a:ext cx="3090672" cy="877824"/>
+          </a:xfrm>
+          <a:prstGeom prst="rect">
+            <a:avLst/>
+          </a:prstGeom>
+          <a:noFill/>
+          <a:ln/>
+        </p:spPr>
+        <p:txBody>
+          <a:bodyPr wrap="square" lIns="254" tIns="254" rIns="254" bIns="254" rtlCol="0" anchor="t">
+            <a:normAutofit/>
+          </a:bodyPr>
+          <a:lstStyle/>
+          <a:p>
+            <a:r>
+              <a:rPr lang="en-US" sz="1380" dirty="0">
+                <a:solidFill>
+                  <a:srgbClr val="17364A"/>
+                </a:solidFill>
+                <a:latin typeface="Aptos" pitchFamily="34" charset="0"/>
+                <a:ea typeface="Aptos" pitchFamily="34" charset="-122"/>
+                <a:cs typeface="Aptos" pitchFamily="34" charset="-120"/>
+              </a:rPr>
+              <a:t>How would staff know if an AI output was based on stale or incomplete data?</a:t>
+            </a:r>
+            <a:endParaRPr lang="en-US" sz="1380" dirty="0"/>
+          </a:p>
+          <a:p>
+            <a:r>
+              <a:rPr lang="en-US" sz="1380" dirty="0">
+                <a:solidFill>
+                  <a:srgbClr val="17364A"/>
+                </a:solidFill>
+                <a:latin typeface="Aptos" pitchFamily="34" charset="0"/>
+                <a:ea typeface="Aptos" pitchFamily="34" charset="-122"/>
+                <a:cs typeface="Aptos" pitchFamily="34" charset="-120"/>
+              </a:rPr>
+              <a:t>Who has authority to pause AI use when a pipeline fails?</a:t>
+            </a:r>
+            <a:endParaRPr lang="en-US" sz="1380" dirty="0"/>
+          </a:p>
+        </p:txBody>
       </p:sp>
       <p:sp>
         <p:nvSpPr>
           <p:cNvPr id="16" name="Shape 14"/>
-          <p:cNvSpPr/>
-          <p:nvPr/>
-        </p:nvSpPr>
-        <p:spPr>
-          <a:xfrm>
-            <a:off x="9015984" y="2880360"/>
-            <a:ext cx="256032" cy="1005840"/>
-          </a:xfrm>
-          <a:prstGeom prst="rect">
-            <a:avLst/>
-          </a:prstGeom>
-          <a:solidFill>
-            <a:srgbClr val="D69A2D"/>
-          </a:solidFill>
-          <a:ln w="12700">
-            <a:solidFill>
-              <a:srgbClr val="D69A2D"/>
-            </a:solidFill>
-            <a:prstDash val="solid"/>
-          </a:ln>
-        </p:spPr>
-      </p:sp>
-      <p:sp>
-        <p:nvSpPr>
-          <p:cNvPr id="17" name="Shape 15"/>
-          <p:cNvSpPr/>
-          <p:nvPr/>
-        </p:nvSpPr>
-        <p:spPr>
-          <a:xfrm>
-            <a:off x="9454896" y="3319272"/>
-            <a:ext cx="256032" cy="566928"/>
-          </a:xfrm>
-          <a:prstGeom prst="rect">
-            <a:avLst/>
-          </a:prstGeom>
-          <a:solidFill>
-            <a:srgbClr val="6A4CA3"/>
-          </a:solidFill>
-          <a:ln w="12700">
-            <a:solidFill>
-              <a:srgbClr val="6A4CA3"/>
-            </a:solidFill>
-            <a:prstDash val="solid"/>
-          </a:ln>
-        </p:spPr>
-      </p:sp>
-      <p:sp>
-        <p:nvSpPr>
-          <p:cNvPr id="18" name="Shape 16"/>
-          <p:cNvSpPr/>
-          <p:nvPr/>
-        </p:nvSpPr>
-        <p:spPr>
-          <a:xfrm>
-            <a:off x="8019288" y="3886200"/>
-            <a:ext cx="2706624" cy="0"/>
-          </a:xfrm>
-          <a:prstGeom prst="line">
-            <a:avLst/>
-          </a:prstGeom>
-          <a:noFill/>
-          <a:ln w="15240">
-            <a:solidFill>
-              <a:srgbClr val="003A63"/>
-            </a:solidFill>
-            <a:prstDash val="solid"/>
-          </a:ln>
-        </p:spPr>
-      </p:sp>
-      <p:sp>
-        <p:nvSpPr>
-          <p:cNvPr id="19" name="Text 17"/>
-          <p:cNvSpPr/>
-          <p:nvPr/>
-        </p:nvSpPr>
-        <p:spPr>
-          <a:xfrm>
-            <a:off x="7863840" y="3017520"/>
-            <a:ext cx="3017520" cy="201168"/>
-          </a:xfrm>
-          <a:prstGeom prst="rect">
-            <a:avLst/>
-          </a:prstGeom>
-          <a:noFill/>
-          <a:ln/>
-        </p:spPr>
-        <p:txBody>
-          <a:bodyPr wrap="square" lIns="0" tIns="0" rIns="0" bIns="0" rtlCol="0" anchor="ctr"/>
-          <a:lstStyle/>
-          <a:p>
-            <a:pPr algn="ctr" indent="0" marL="0">
-              <a:buNone/>
-            </a:pPr>
-            <a:r>
-              <a:rPr lang="en-US" sz="1050" b="1" dirty="0">
-                <a:solidFill>
-                  <a:srgbClr val="003A63"/>
-                </a:solidFill>
-                <a:latin typeface="Aptos" pitchFamily="34" charset="0"/>
-                <a:ea typeface="Aptos" pitchFamily="34" charset="-122"/>
-                <a:cs typeface="Aptos" pitchFamily="34" charset="-120"/>
-              </a:rPr>
-              <a:t>Measure and monitor</a:t>
-            </a:r>
-            <a:endParaRPr lang="en-US" sz="1050" dirty="0"/>
-          </a:p>
-        </p:txBody>
-      </p:sp>
-      <p:sp>
-        <p:nvSpPr>
-          <p:cNvPr id="20" name="Shape 18"/>
           <p:cNvSpPr/>
           <p:nvPr/>
         </p:nvSpPr>
@@ -8136,7 +7785,7 @@
       </p:sp>
       <p:sp>
         <p:nvSpPr>
-          <p:cNvPr id="21" name="Text 19"/>
+          <p:cNvPr id="17" name="Text 15"/>
           <p:cNvSpPr/>
           <p:nvPr/>
         </p:nvSpPr>
@@ -8175,7 +7824,7 @@
       </p:sp>
       <p:sp>
         <p:nvSpPr>
-          <p:cNvPr id="22" name="Text 20"/>
+          <p:cNvPr id="18" name="Text 16"/>
           <p:cNvSpPr/>
           <p:nvPr/>
         </p:nvSpPr>
@@ -8683,13 +8332,11 @@
             </a:avLst>
           </a:prstGeom>
           <a:solidFill>
-            <a:srgbClr val="FFFFFF">
-              <a:alpha val="88000"/>
-            </a:srgbClr>
+            <a:srgbClr val="FFFFFF"/>
           </a:solidFill>
           <a:ln w="12700">
             <a:solidFill>
-              <a:srgbClr val="D6E8F2"/>
+              <a:srgbClr val="B9D7E6"/>
             </a:solidFill>
             <a:prstDash val="solid"/>
           </a:ln>
@@ -8697,169 +8344,98 @@
       </p:sp>
       <p:sp>
         <p:nvSpPr>
-          <p:cNvPr id="14" name="Shape 12"/>
-          <p:cNvSpPr/>
-          <p:nvPr/>
-        </p:nvSpPr>
-        <p:spPr>
-          <a:xfrm>
-            <a:off x="8138160" y="3474720"/>
-            <a:ext cx="256032" cy="411480"/>
-          </a:xfrm>
-          <a:prstGeom prst="rect">
-            <a:avLst/>
-          </a:prstGeom>
-          <a:solidFill>
-            <a:srgbClr val="0068B7"/>
-          </a:solidFill>
-          <a:ln w="12700">
-            <a:solidFill>
-              <a:srgbClr val="0068B7"/>
-            </a:solidFill>
-            <a:prstDash val="solid"/>
-          </a:ln>
-        </p:spPr>
-      </p:sp>
-      <p:sp>
-        <p:nvSpPr>
-          <p:cNvPr id="15" name="Shape 13"/>
-          <p:cNvSpPr/>
-          <p:nvPr/>
-        </p:nvSpPr>
-        <p:spPr>
-          <a:xfrm>
-            <a:off x="8577072" y="3172968"/>
-            <a:ext cx="256032" cy="713232"/>
-          </a:xfrm>
-          <a:prstGeom prst="rect">
-            <a:avLst/>
-          </a:prstGeom>
-          <a:solidFill>
-            <a:srgbClr val="2F8A28"/>
-          </a:solidFill>
-          <a:ln w="12700">
-            <a:solidFill>
-              <a:srgbClr val="2F8A28"/>
-            </a:solidFill>
-            <a:prstDash val="solid"/>
-          </a:ln>
-        </p:spPr>
+          <p:cNvPr id="14" name="Text 12"/>
+          <p:cNvSpPr/>
+          <p:nvPr/>
+        </p:nvSpPr>
+        <p:spPr>
+          <a:xfrm>
+            <a:off x="7799832" y="2935224"/>
+            <a:ext cx="3145536" cy="256032"/>
+          </a:xfrm>
+          <a:prstGeom prst="rect">
+            <a:avLst/>
+          </a:prstGeom>
+          <a:noFill/>
+          <a:ln/>
+        </p:spPr>
+        <p:txBody>
+          <a:bodyPr wrap="square" lIns="0" tIns="0" rIns="0" bIns="0" rtlCol="0" anchor="ctr"/>
+          <a:lstStyle/>
+          <a:p>
+            <a:pPr indent="0" marL="0">
+              <a:buNone/>
+            </a:pPr>
+            <a:r>
+              <a:rPr lang="en-US" sz="1300" b="1" dirty="0">
+                <a:solidFill>
+                  <a:srgbClr val="0068B7"/>
+                </a:solidFill>
+                <a:latin typeface="Aptos" pitchFamily="34" charset="0"/>
+                <a:ea typeface="Aptos" pitchFamily="34" charset="-122"/>
+                <a:cs typeface="Aptos" pitchFamily="34" charset="-120"/>
+              </a:rPr>
+              <a:t>Concept checkpoints</a:t>
+            </a:r>
+            <a:endParaRPr lang="en-US" sz="1300" dirty="0"/>
+          </a:p>
+        </p:txBody>
+      </p:sp>
+      <p:sp>
+        <p:nvSpPr>
+          <p:cNvPr id="15" name="Text 13"/>
+          <p:cNvSpPr/>
+          <p:nvPr/>
+        </p:nvSpPr>
+        <p:spPr>
+          <a:xfrm>
+            <a:off x="7818120" y="3300984"/>
+            <a:ext cx="3090672" cy="877824"/>
+          </a:xfrm>
+          <a:prstGeom prst="rect">
+            <a:avLst/>
+          </a:prstGeom>
+          <a:noFill/>
+          <a:ln/>
+        </p:spPr>
+        <p:txBody>
+          <a:bodyPr wrap="square" lIns="254" tIns="254" rIns="254" bIns="254" rtlCol="0" anchor="t">
+            <a:normAutofit/>
+          </a:bodyPr>
+          <a:lstStyle/>
+          <a:p>
+            <a:r>
+              <a:rPr lang="en-US" sz="1380" dirty="0">
+                <a:solidFill>
+                  <a:srgbClr val="17364A"/>
+                </a:solidFill>
+                <a:latin typeface="Aptos" pitchFamily="34" charset="0"/>
+                <a:ea typeface="Aptos" pitchFamily="34" charset="-122"/>
+                <a:cs typeface="Aptos" pitchFamily="34" charset="-120"/>
+              </a:rPr>
+              <a:t>Identify the data source, update frequency, required fields, validation checks,.</a:t>
+            </a:r>
+            <a:endParaRPr lang="en-US" sz="1380" dirty="0"/>
+          </a:p>
+          <a:p>
+            <a:r>
+              <a:rPr lang="en-US" sz="1380" dirty="0">
+                <a:solidFill>
+                  <a:srgbClr val="17364A"/>
+                </a:solidFill>
+                <a:latin typeface="Aptos" pitchFamily="34" charset="0"/>
+                <a:ea typeface="Aptos" pitchFamily="34" charset="-122"/>
+                <a:cs typeface="Aptos" pitchFamily="34" charset="-120"/>
+              </a:rPr>
+              <a:t>Document at least three pipeline failure scenarios and describe how each should be.</a:t>
+            </a:r>
+            <a:endParaRPr lang="en-US" sz="1380" dirty="0"/>
+          </a:p>
+        </p:txBody>
       </p:sp>
       <p:sp>
         <p:nvSpPr>
           <p:cNvPr id="16" name="Shape 14"/>
-          <p:cNvSpPr/>
-          <p:nvPr/>
-        </p:nvSpPr>
-        <p:spPr>
-          <a:xfrm>
-            <a:off x="9015984" y="2880360"/>
-            <a:ext cx="256032" cy="1005840"/>
-          </a:xfrm>
-          <a:prstGeom prst="rect">
-            <a:avLst/>
-          </a:prstGeom>
-          <a:solidFill>
-            <a:srgbClr val="D69A2D"/>
-          </a:solidFill>
-          <a:ln w="12700">
-            <a:solidFill>
-              <a:srgbClr val="D69A2D"/>
-            </a:solidFill>
-            <a:prstDash val="solid"/>
-          </a:ln>
-        </p:spPr>
-      </p:sp>
-      <p:sp>
-        <p:nvSpPr>
-          <p:cNvPr id="17" name="Shape 15"/>
-          <p:cNvSpPr/>
-          <p:nvPr/>
-        </p:nvSpPr>
-        <p:spPr>
-          <a:xfrm>
-            <a:off x="9454896" y="3319272"/>
-            <a:ext cx="256032" cy="566928"/>
-          </a:xfrm>
-          <a:prstGeom prst="rect">
-            <a:avLst/>
-          </a:prstGeom>
-          <a:solidFill>
-            <a:srgbClr val="6A4CA3"/>
-          </a:solidFill>
-          <a:ln w="12700">
-            <a:solidFill>
-              <a:srgbClr val="6A4CA3"/>
-            </a:solidFill>
-            <a:prstDash val="solid"/>
-          </a:ln>
-        </p:spPr>
-      </p:sp>
-      <p:sp>
-        <p:nvSpPr>
-          <p:cNvPr id="18" name="Shape 16"/>
-          <p:cNvSpPr/>
-          <p:nvPr/>
-        </p:nvSpPr>
-        <p:spPr>
-          <a:xfrm>
-            <a:off x="8019288" y="3886200"/>
-            <a:ext cx="2706624" cy="0"/>
-          </a:xfrm>
-          <a:prstGeom prst="line">
-            <a:avLst/>
-          </a:prstGeom>
-          <a:noFill/>
-          <a:ln w="15240">
-            <a:solidFill>
-              <a:srgbClr val="003A63"/>
-            </a:solidFill>
-            <a:prstDash val="solid"/>
-          </a:ln>
-        </p:spPr>
-      </p:sp>
-      <p:sp>
-        <p:nvSpPr>
-          <p:cNvPr id="19" name="Text 17"/>
-          <p:cNvSpPr/>
-          <p:nvPr/>
-        </p:nvSpPr>
-        <p:spPr>
-          <a:xfrm>
-            <a:off x="7863840" y="3017520"/>
-            <a:ext cx="3017520" cy="201168"/>
-          </a:xfrm>
-          <a:prstGeom prst="rect">
-            <a:avLst/>
-          </a:prstGeom>
-          <a:noFill/>
-          <a:ln/>
-        </p:spPr>
-        <p:txBody>
-          <a:bodyPr wrap="square" lIns="0" tIns="0" rIns="0" bIns="0" rtlCol="0" anchor="ctr"/>
-          <a:lstStyle/>
-          <a:p>
-            <a:pPr algn="ctr" indent="0" marL="0">
-              <a:buNone/>
-            </a:pPr>
-            <a:r>
-              <a:rPr lang="en-US" sz="1050" b="1" dirty="0">
-                <a:solidFill>
-                  <a:srgbClr val="003A63"/>
-                </a:solidFill>
-                <a:latin typeface="Aptos" pitchFamily="34" charset="0"/>
-                <a:ea typeface="Aptos" pitchFamily="34" charset="-122"/>
-                <a:cs typeface="Aptos" pitchFamily="34" charset="-120"/>
-              </a:rPr>
-              <a:t>Measure and monitor</a:t>
-            </a:r>
-            <a:endParaRPr lang="en-US" sz="1050" dirty="0"/>
-          </a:p>
-        </p:txBody>
-      </p:sp>
-      <p:sp>
-        <p:nvSpPr>
-          <p:cNvPr id="20" name="Shape 18"/>
           <p:cNvSpPr/>
           <p:nvPr/>
         </p:nvSpPr>
@@ -8886,7 +8462,7 @@
       </p:sp>
       <p:sp>
         <p:nvSpPr>
-          <p:cNvPr id="21" name="Text 19"/>
+          <p:cNvPr id="17" name="Text 15"/>
           <p:cNvSpPr/>
           <p:nvPr/>
         </p:nvSpPr>
@@ -8925,7 +8501,7 @@
       </p:sp>
       <p:sp>
         <p:nvSpPr>
-          <p:cNvPr id="22" name="Text 20"/>
+          <p:cNvPr id="18" name="Text 16"/>
           <p:cNvSpPr/>
           <p:nvPr/>
         </p:nvSpPr>
@@ -9433,13 +9009,11 @@
             </a:avLst>
           </a:prstGeom>
           <a:solidFill>
-            <a:srgbClr val="FFFFFF">
-              <a:alpha val="88000"/>
-            </a:srgbClr>
+            <a:srgbClr val="FFFFFF"/>
           </a:solidFill>
           <a:ln w="12700">
             <a:solidFill>
-              <a:srgbClr val="D6E8F2"/>
+              <a:srgbClr val="B9D7E6"/>
             </a:solidFill>
             <a:prstDash val="solid"/>
           </a:ln>
@@ -9447,169 +9021,112 @@
       </p:sp>
       <p:sp>
         <p:nvSpPr>
-          <p:cNvPr id="14" name="Shape 12"/>
-          <p:cNvSpPr/>
-          <p:nvPr/>
-        </p:nvSpPr>
-        <p:spPr>
-          <a:xfrm>
-            <a:off x="8138160" y="3474720"/>
-            <a:ext cx="256032" cy="411480"/>
-          </a:xfrm>
-          <a:prstGeom prst="rect">
-            <a:avLst/>
-          </a:prstGeom>
-          <a:solidFill>
-            <a:srgbClr val="0068B7"/>
-          </a:solidFill>
-          <a:ln w="12700">
-            <a:solidFill>
-              <a:srgbClr val="0068B7"/>
-            </a:solidFill>
-            <a:prstDash val="solid"/>
-          </a:ln>
-        </p:spPr>
-      </p:sp>
-      <p:sp>
-        <p:nvSpPr>
-          <p:cNvPr id="15" name="Shape 13"/>
-          <p:cNvSpPr/>
-          <p:nvPr/>
-        </p:nvSpPr>
-        <p:spPr>
-          <a:xfrm>
-            <a:off x="8577072" y="3172968"/>
-            <a:ext cx="256032" cy="713232"/>
-          </a:xfrm>
-          <a:prstGeom prst="rect">
-            <a:avLst/>
-          </a:prstGeom>
-          <a:solidFill>
-            <a:srgbClr val="2F8A28"/>
-          </a:solidFill>
-          <a:ln w="12700">
-            <a:solidFill>
-              <a:srgbClr val="2F8A28"/>
-            </a:solidFill>
-            <a:prstDash val="solid"/>
-          </a:ln>
-        </p:spPr>
+          <p:cNvPr id="14" name="Text 12"/>
+          <p:cNvSpPr/>
+          <p:nvPr/>
+        </p:nvSpPr>
+        <p:spPr>
+          <a:xfrm>
+            <a:off x="7799832" y="2935224"/>
+            <a:ext cx="3145536" cy="256032"/>
+          </a:xfrm>
+          <a:prstGeom prst="rect">
+            <a:avLst/>
+          </a:prstGeom>
+          <a:noFill/>
+          <a:ln/>
+        </p:spPr>
+        <p:txBody>
+          <a:bodyPr wrap="square" lIns="0" tIns="0" rIns="0" bIns="0" rtlCol="0" anchor="ctr"/>
+          <a:lstStyle/>
+          <a:p>
+            <a:pPr indent="0" marL="0">
+              <a:buNone/>
+            </a:pPr>
+            <a:r>
+              <a:rPr lang="en-US" sz="1300" b="1" dirty="0">
+                <a:solidFill>
+                  <a:srgbClr val="0068B7"/>
+                </a:solidFill>
+                <a:latin typeface="Aptos" pitchFamily="34" charset="0"/>
+                <a:ea typeface="Aptos" pitchFamily="34" charset="-122"/>
+                <a:cs typeface="Aptos" pitchFamily="34" charset="-120"/>
+              </a:rPr>
+              <a:t>Concept checkpoints</a:t>
+            </a:r>
+            <a:endParaRPr lang="en-US" sz="1300" dirty="0"/>
+          </a:p>
+        </p:txBody>
+      </p:sp>
+      <p:sp>
+        <p:nvSpPr>
+          <p:cNvPr id="15" name="Text 13"/>
+          <p:cNvSpPr/>
+          <p:nvPr/>
+        </p:nvSpPr>
+        <p:spPr>
+          <a:xfrm>
+            <a:off x="7818120" y="3300984"/>
+            <a:ext cx="3090672" cy="877824"/>
+          </a:xfrm>
+          <a:prstGeom prst="rect">
+            <a:avLst/>
+          </a:prstGeom>
+          <a:noFill/>
+          <a:ln/>
+        </p:spPr>
+        <p:txBody>
+          <a:bodyPr wrap="square" lIns="254" tIns="254" rIns="254" bIns="254" rtlCol="0" anchor="t">
+            <a:normAutofit/>
+          </a:bodyPr>
+          <a:lstStyle/>
+          <a:p>
+            <a:r>
+              <a:rPr lang="en-US" sz="1380" dirty="0">
+                <a:solidFill>
+                  <a:srgbClr val="17364A"/>
+                </a:solidFill>
+                <a:latin typeface="Aptos" pitchFamily="34" charset="0"/>
+                <a:ea typeface="Aptos" pitchFamily="34" charset="-122"/>
+                <a:cs typeface="Aptos" pitchFamily="34" charset="-120"/>
+              </a:rPr>
+              <a:t>Data pipeline map</a:t>
+            </a:r>
+            <a:endParaRPr lang="en-US" sz="1380" dirty="0"/>
+          </a:p>
+          <a:p>
+            <a:r>
+              <a:rPr lang="en-US" sz="1380" dirty="0">
+                <a:solidFill>
+                  <a:srgbClr val="17364A"/>
+                </a:solidFill>
+                <a:latin typeface="Aptos" pitchFamily="34" charset="0"/>
+                <a:ea typeface="Aptos" pitchFamily="34" charset="-122"/>
+                <a:cs typeface="Aptos" pitchFamily="34" charset="-120"/>
+              </a:rPr>
+              <a:t>Pipeline readiness checklist</a:t>
+            </a:r>
+            <a:endParaRPr lang="en-US" sz="1380" dirty="0"/>
+          </a:p>
+          <a:p>
+            <a:r>
+              <a:rPr lang="en-US" sz="1380" dirty="0">
+                <a:solidFill>
+                  <a:srgbClr val="17364A"/>
+                </a:solidFill>
+                <a:latin typeface="Aptos" pitchFamily="34" charset="0"/>
+                <a:ea typeface="Aptos" pitchFamily="34" charset="-122"/>
+                <a:cs typeface="Aptos" pitchFamily="34" charset="-120"/>
+              </a:rPr>
+              <a:t>Failure and escalation plan</a:t>
+            </a:r>
+            <a:endParaRPr lang="en-US" sz="1380" dirty="0"/>
+          </a:p>
+        </p:txBody>
       </p:sp>
       <p:sp>
         <p:nvSpPr>
           <p:cNvPr id="16" name="Shape 14"/>
-          <p:cNvSpPr/>
-          <p:nvPr/>
-        </p:nvSpPr>
-        <p:spPr>
-          <a:xfrm>
-            <a:off x="9015984" y="2880360"/>
-            <a:ext cx="256032" cy="1005840"/>
-          </a:xfrm>
-          <a:prstGeom prst="rect">
-            <a:avLst/>
-          </a:prstGeom>
-          <a:solidFill>
-            <a:srgbClr val="D69A2D"/>
-          </a:solidFill>
-          <a:ln w="12700">
-            <a:solidFill>
-              <a:srgbClr val="D69A2D"/>
-            </a:solidFill>
-            <a:prstDash val="solid"/>
-          </a:ln>
-        </p:spPr>
-      </p:sp>
-      <p:sp>
-        <p:nvSpPr>
-          <p:cNvPr id="17" name="Shape 15"/>
-          <p:cNvSpPr/>
-          <p:nvPr/>
-        </p:nvSpPr>
-        <p:spPr>
-          <a:xfrm>
-            <a:off x="9454896" y="3319272"/>
-            <a:ext cx="256032" cy="566928"/>
-          </a:xfrm>
-          <a:prstGeom prst="rect">
-            <a:avLst/>
-          </a:prstGeom>
-          <a:solidFill>
-            <a:srgbClr val="6A4CA3"/>
-          </a:solidFill>
-          <a:ln w="12700">
-            <a:solidFill>
-              <a:srgbClr val="6A4CA3"/>
-            </a:solidFill>
-            <a:prstDash val="solid"/>
-          </a:ln>
-        </p:spPr>
-      </p:sp>
-      <p:sp>
-        <p:nvSpPr>
-          <p:cNvPr id="18" name="Shape 16"/>
-          <p:cNvSpPr/>
-          <p:nvPr/>
-        </p:nvSpPr>
-        <p:spPr>
-          <a:xfrm>
-            <a:off x="8019288" y="3886200"/>
-            <a:ext cx="2706624" cy="0"/>
-          </a:xfrm>
-          <a:prstGeom prst="line">
-            <a:avLst/>
-          </a:prstGeom>
-          <a:noFill/>
-          <a:ln w="15240">
-            <a:solidFill>
-              <a:srgbClr val="003A63"/>
-            </a:solidFill>
-            <a:prstDash val="solid"/>
-          </a:ln>
-        </p:spPr>
-      </p:sp>
-      <p:sp>
-        <p:nvSpPr>
-          <p:cNvPr id="19" name="Text 17"/>
-          <p:cNvSpPr/>
-          <p:nvPr/>
-        </p:nvSpPr>
-        <p:spPr>
-          <a:xfrm>
-            <a:off x="7863840" y="3017520"/>
-            <a:ext cx="3017520" cy="201168"/>
-          </a:xfrm>
-          <a:prstGeom prst="rect">
-            <a:avLst/>
-          </a:prstGeom>
-          <a:noFill/>
-          <a:ln/>
-        </p:spPr>
-        <p:txBody>
-          <a:bodyPr wrap="square" lIns="0" tIns="0" rIns="0" bIns="0" rtlCol="0" anchor="ctr"/>
-          <a:lstStyle/>
-          <a:p>
-            <a:pPr algn="ctr" indent="0" marL="0">
-              <a:buNone/>
-            </a:pPr>
-            <a:r>
-              <a:rPr lang="en-US" sz="1050" b="1" dirty="0">
-                <a:solidFill>
-                  <a:srgbClr val="003A63"/>
-                </a:solidFill>
-                <a:latin typeface="Aptos" pitchFamily="34" charset="0"/>
-                <a:ea typeface="Aptos" pitchFamily="34" charset="-122"/>
-                <a:cs typeface="Aptos" pitchFamily="34" charset="-120"/>
-              </a:rPr>
-              <a:t>Measure and monitor</a:t>
-            </a:r>
-            <a:endParaRPr lang="en-US" sz="1050" dirty="0"/>
-          </a:p>
-        </p:txBody>
-      </p:sp>
-      <p:sp>
-        <p:nvSpPr>
-          <p:cNvPr id="20" name="Shape 18"/>
           <p:cNvSpPr/>
           <p:nvPr/>
         </p:nvSpPr>
@@ -9636,7 +9153,7 @@
       </p:sp>
       <p:sp>
         <p:nvSpPr>
-          <p:cNvPr id="21" name="Text 19"/>
+          <p:cNvPr id="17" name="Text 15"/>
           <p:cNvSpPr/>
           <p:nvPr/>
         </p:nvSpPr>
@@ -9675,7 +9192,7 @@
       </p:sp>
       <p:sp>
         <p:nvSpPr>
-          <p:cNvPr id="22" name="Text 20"/>
+          <p:cNvPr id="18" name="Text 16"/>
           <p:cNvSpPr/>
           <p:nvPr/>
         </p:nvSpPr>
@@ -10155,13 +9672,11 @@
             </a:avLst>
           </a:prstGeom>
           <a:solidFill>
-            <a:srgbClr val="FFFFFF">
-              <a:alpha val="88000"/>
-            </a:srgbClr>
+            <a:srgbClr val="FFFFFF"/>
           </a:solidFill>
           <a:ln w="12700">
             <a:solidFill>
-              <a:srgbClr val="D6E8F2"/>
+              <a:srgbClr val="B9D7E6"/>
             </a:solidFill>
             <a:prstDash val="solid"/>
           </a:ln>
@@ -10169,169 +9684,84 @@
       </p:sp>
       <p:sp>
         <p:nvSpPr>
-          <p:cNvPr id="14" name="Shape 12"/>
-          <p:cNvSpPr/>
-          <p:nvPr/>
-        </p:nvSpPr>
-        <p:spPr>
-          <a:xfrm>
-            <a:off x="8138160" y="3474720"/>
-            <a:ext cx="256032" cy="411480"/>
-          </a:xfrm>
-          <a:prstGeom prst="rect">
-            <a:avLst/>
-          </a:prstGeom>
-          <a:solidFill>
-            <a:srgbClr val="0068B7"/>
-          </a:solidFill>
-          <a:ln w="12700">
-            <a:solidFill>
-              <a:srgbClr val="0068B7"/>
-            </a:solidFill>
-            <a:prstDash val="solid"/>
-          </a:ln>
-        </p:spPr>
-      </p:sp>
-      <p:sp>
-        <p:nvSpPr>
-          <p:cNvPr id="15" name="Shape 13"/>
-          <p:cNvSpPr/>
-          <p:nvPr/>
-        </p:nvSpPr>
-        <p:spPr>
-          <a:xfrm>
-            <a:off x="8577072" y="3172968"/>
-            <a:ext cx="256032" cy="713232"/>
-          </a:xfrm>
-          <a:prstGeom prst="rect">
-            <a:avLst/>
-          </a:prstGeom>
-          <a:solidFill>
-            <a:srgbClr val="2F8A28"/>
-          </a:solidFill>
-          <a:ln w="12700">
-            <a:solidFill>
-              <a:srgbClr val="2F8A28"/>
-            </a:solidFill>
-            <a:prstDash val="solid"/>
-          </a:ln>
-        </p:spPr>
+          <p:cNvPr id="14" name="Text 12"/>
+          <p:cNvSpPr/>
+          <p:nvPr/>
+        </p:nvSpPr>
+        <p:spPr>
+          <a:xfrm>
+            <a:off x="7799832" y="2935224"/>
+            <a:ext cx="3145536" cy="256032"/>
+          </a:xfrm>
+          <a:prstGeom prst="rect">
+            <a:avLst/>
+          </a:prstGeom>
+          <a:noFill/>
+          <a:ln/>
+        </p:spPr>
+        <p:txBody>
+          <a:bodyPr wrap="square" lIns="0" tIns="0" rIns="0" bIns="0" rtlCol="0" anchor="ctr"/>
+          <a:lstStyle/>
+          <a:p>
+            <a:pPr indent="0" marL="0">
+              <a:buNone/>
+            </a:pPr>
+            <a:r>
+              <a:rPr lang="en-US" sz="1300" b="1" dirty="0">
+                <a:solidFill>
+                  <a:srgbClr val="0068B7"/>
+                </a:solidFill>
+                <a:latin typeface="Aptos" pitchFamily="34" charset="0"/>
+                <a:ea typeface="Aptos" pitchFamily="34" charset="-122"/>
+                <a:cs typeface="Aptos" pitchFamily="34" charset="-120"/>
+              </a:rPr>
+              <a:t>Concept checkpoints</a:t>
+            </a:r>
+            <a:endParaRPr lang="en-US" sz="1300" dirty="0"/>
+          </a:p>
+        </p:txBody>
+      </p:sp>
+      <p:sp>
+        <p:nvSpPr>
+          <p:cNvPr id="15" name="Text 13"/>
+          <p:cNvSpPr/>
+          <p:nvPr/>
+        </p:nvSpPr>
+        <p:spPr>
+          <a:xfrm>
+            <a:off x="7818120" y="3300984"/>
+            <a:ext cx="3090672" cy="877824"/>
+          </a:xfrm>
+          <a:prstGeom prst="rect">
+            <a:avLst/>
+          </a:prstGeom>
+          <a:noFill/>
+          <a:ln/>
+        </p:spPr>
+        <p:txBody>
+          <a:bodyPr wrap="square" lIns="254" tIns="254" rIns="254" bIns="254" rtlCol="0" anchor="t">
+            <a:normAutofit/>
+          </a:bodyPr>
+          <a:lstStyle/>
+          <a:p>
+            <a:r>
+              <a:rPr lang="en-US" sz="1380" dirty="0">
+                <a:solidFill>
+                  <a:srgbClr val="17364A"/>
+                </a:solidFill>
+                <a:latin typeface="Aptos" pitchFamily="34" charset="0"/>
+                <a:ea typeface="Aptos" pitchFamily="34" charset="-122"/>
+                <a:cs typeface="Aptos" pitchFamily="34" charset="-120"/>
+              </a:rPr>
+              <a:t>Known data limitations statement</a:t>
+            </a:r>
+            <a:endParaRPr lang="en-US" sz="1380" dirty="0"/>
+          </a:p>
+        </p:txBody>
       </p:sp>
       <p:sp>
         <p:nvSpPr>
           <p:cNvPr id="16" name="Shape 14"/>
-          <p:cNvSpPr/>
-          <p:nvPr/>
-        </p:nvSpPr>
-        <p:spPr>
-          <a:xfrm>
-            <a:off x="9015984" y="2880360"/>
-            <a:ext cx="256032" cy="1005840"/>
-          </a:xfrm>
-          <a:prstGeom prst="rect">
-            <a:avLst/>
-          </a:prstGeom>
-          <a:solidFill>
-            <a:srgbClr val="D69A2D"/>
-          </a:solidFill>
-          <a:ln w="12700">
-            <a:solidFill>
-              <a:srgbClr val="D69A2D"/>
-            </a:solidFill>
-            <a:prstDash val="solid"/>
-          </a:ln>
-        </p:spPr>
-      </p:sp>
-      <p:sp>
-        <p:nvSpPr>
-          <p:cNvPr id="17" name="Shape 15"/>
-          <p:cNvSpPr/>
-          <p:nvPr/>
-        </p:nvSpPr>
-        <p:spPr>
-          <a:xfrm>
-            <a:off x="9454896" y="3319272"/>
-            <a:ext cx="256032" cy="566928"/>
-          </a:xfrm>
-          <a:prstGeom prst="rect">
-            <a:avLst/>
-          </a:prstGeom>
-          <a:solidFill>
-            <a:srgbClr val="6A4CA3"/>
-          </a:solidFill>
-          <a:ln w="12700">
-            <a:solidFill>
-              <a:srgbClr val="6A4CA3"/>
-            </a:solidFill>
-            <a:prstDash val="solid"/>
-          </a:ln>
-        </p:spPr>
-      </p:sp>
-      <p:sp>
-        <p:nvSpPr>
-          <p:cNvPr id="18" name="Shape 16"/>
-          <p:cNvSpPr/>
-          <p:nvPr/>
-        </p:nvSpPr>
-        <p:spPr>
-          <a:xfrm>
-            <a:off x="8019288" y="3886200"/>
-            <a:ext cx="2706624" cy="0"/>
-          </a:xfrm>
-          <a:prstGeom prst="line">
-            <a:avLst/>
-          </a:prstGeom>
-          <a:noFill/>
-          <a:ln w="15240">
-            <a:solidFill>
-              <a:srgbClr val="003A63"/>
-            </a:solidFill>
-            <a:prstDash val="solid"/>
-          </a:ln>
-        </p:spPr>
-      </p:sp>
-      <p:sp>
-        <p:nvSpPr>
-          <p:cNvPr id="19" name="Text 17"/>
-          <p:cNvSpPr/>
-          <p:nvPr/>
-        </p:nvSpPr>
-        <p:spPr>
-          <a:xfrm>
-            <a:off x="7863840" y="3017520"/>
-            <a:ext cx="3017520" cy="201168"/>
-          </a:xfrm>
-          <a:prstGeom prst="rect">
-            <a:avLst/>
-          </a:prstGeom>
-          <a:noFill/>
-          <a:ln/>
-        </p:spPr>
-        <p:txBody>
-          <a:bodyPr wrap="square" lIns="0" tIns="0" rIns="0" bIns="0" rtlCol="0" anchor="ctr"/>
-          <a:lstStyle/>
-          <a:p>
-            <a:pPr algn="ctr" indent="0" marL="0">
-              <a:buNone/>
-            </a:pPr>
-            <a:r>
-              <a:rPr lang="en-US" sz="1050" b="1" dirty="0">
-                <a:solidFill>
-                  <a:srgbClr val="003A63"/>
-                </a:solidFill>
-                <a:latin typeface="Aptos" pitchFamily="34" charset="0"/>
-                <a:ea typeface="Aptos" pitchFamily="34" charset="-122"/>
-                <a:cs typeface="Aptos" pitchFamily="34" charset="-120"/>
-              </a:rPr>
-              <a:t>Measure and monitor</a:t>
-            </a:r>
-            <a:endParaRPr lang="en-US" sz="1050" dirty="0"/>
-          </a:p>
-        </p:txBody>
-      </p:sp>
-      <p:sp>
-        <p:nvSpPr>
-          <p:cNvPr id="20" name="Shape 18"/>
           <p:cNvSpPr/>
           <p:nvPr/>
         </p:nvSpPr>
@@ -10358,7 +9788,7 @@
       </p:sp>
       <p:sp>
         <p:nvSpPr>
-          <p:cNvPr id="21" name="Text 19"/>
+          <p:cNvPr id="17" name="Text 15"/>
           <p:cNvSpPr/>
           <p:nvPr/>
         </p:nvSpPr>
@@ -10397,7 +9827,7 @@
       </p:sp>
       <p:sp>
         <p:nvSpPr>
-          <p:cNvPr id="22" name="Text 20"/>
+          <p:cNvPr id="18" name="Text 16"/>
           <p:cNvSpPr/>
           <p:nvPr/>
         </p:nvSpPr>
@@ -10930,20 +10360,20 @@
         </p:nvSpPr>
         <p:spPr>
           <a:xfrm>
-            <a:off x="7635240" y="3730752"/>
-            <a:ext cx="1033272" cy="749808"/>
+            <a:off x="7909560" y="3675888"/>
+            <a:ext cx="3154680" cy="1691640"/>
           </a:xfrm>
           <a:prstGeom prst="roundRect">
             <a:avLst>
-              <a:gd name="adj" fmla="val 14634"/>
+              <a:gd name="adj" fmla="val 6486"/>
             </a:avLst>
           </a:prstGeom>
           <a:solidFill>
-            <a:srgbClr val="0068B7"/>
+            <a:srgbClr val="FFFFFF"/>
           </a:solidFill>
           <a:ln w="12700">
             <a:solidFill>
-              <a:srgbClr val="0068B7"/>
+              <a:srgbClr val="B9D7E6"/>
             </a:solidFill>
             <a:prstDash val="solid"/>
           </a:ln>
@@ -10957,172 +10387,100 @@
         </p:nvSpPr>
         <p:spPr>
           <a:xfrm>
-            <a:off x="7708392" y="3922776"/>
-            <a:ext cx="886968" cy="310896"/>
-          </a:xfrm>
-          <a:prstGeom prst="rect">
-            <a:avLst/>
-          </a:prstGeom>
-          <a:noFill/>
-          <a:ln/>
-        </p:spPr>
-        <p:txBody>
-          <a:bodyPr wrap="square" lIns="0" tIns="0" rIns="0" bIns="0" rtlCol="0" anchor="ctr">
+            <a:off x="8074152" y="3822192"/>
+            <a:ext cx="2825496" cy="256032"/>
+          </a:xfrm>
+          <a:prstGeom prst="rect">
+            <a:avLst/>
+          </a:prstGeom>
+          <a:noFill/>
+          <a:ln/>
+        </p:spPr>
+        <p:txBody>
+          <a:bodyPr wrap="square" lIns="0" tIns="0" rIns="0" bIns="0" rtlCol="0" anchor="ctr"/>
+          <a:lstStyle/>
+          <a:p>
+            <a:pPr indent="0" marL="0">
+              <a:buNone/>
+            </a:pPr>
+            <a:r>
+              <a:rPr lang="en-US" sz="1300" b="1" dirty="0">
+                <a:solidFill>
+                  <a:srgbClr val="0068B7"/>
+                </a:solidFill>
+                <a:latin typeface="Aptos" pitchFamily="34" charset="0"/>
+                <a:ea typeface="Aptos" pitchFamily="34" charset="-122"/>
+                <a:cs typeface="Aptos" pitchFamily="34" charset="-120"/>
+              </a:rPr>
+              <a:t>Learning sequence</a:t>
+            </a:r>
+            <a:endParaRPr lang="en-US" sz="1300" dirty="0"/>
+          </a:p>
+        </p:txBody>
+      </p:sp>
+      <p:sp>
+        <p:nvSpPr>
+          <p:cNvPr id="15" name="Text 13"/>
+          <p:cNvSpPr/>
+          <p:nvPr/>
+        </p:nvSpPr>
+        <p:spPr>
+          <a:xfrm>
+            <a:off x="8092440" y="4187952"/>
+            <a:ext cx="2770632" cy="1033272"/>
+          </a:xfrm>
+          <a:prstGeom prst="rect">
+            <a:avLst/>
+          </a:prstGeom>
+          <a:noFill/>
+          <a:ln/>
+        </p:spPr>
+        <p:txBody>
+          <a:bodyPr wrap="square" lIns="254" tIns="254" rIns="254" bIns="254" rtlCol="0" anchor="t">
             <a:normAutofit/>
           </a:bodyPr>
           <a:lstStyle/>
           <a:p>
-            <a:pPr algn="ctr" indent="0" marL="0">
-              <a:buNone/>
-            </a:pPr>
-            <a:r>
-              <a:rPr lang="en-US" sz="1500" b="1" dirty="0">
-                <a:solidFill>
-                  <a:srgbClr val="FFFFFF"/>
-                </a:solidFill>
-                <a:latin typeface="Aptos" pitchFamily="34" charset="0"/>
-                <a:ea typeface="Aptos" pitchFamily="34" charset="-122"/>
-                <a:cs typeface="Aptos" pitchFamily="34" charset="-120"/>
-              </a:rPr>
-              <a:t>Learn</a:t>
-            </a:r>
-            <a:endParaRPr lang="en-US" sz="1500" dirty="0"/>
-          </a:p>
-        </p:txBody>
-      </p:sp>
-      <p:sp>
-        <p:nvSpPr>
-          <p:cNvPr id="15" name="Shape 13"/>
-          <p:cNvSpPr/>
-          <p:nvPr/>
-        </p:nvSpPr>
-        <p:spPr>
-          <a:xfrm>
-            <a:off x="8924544" y="3730752"/>
-            <a:ext cx="1033272" cy="749808"/>
-          </a:xfrm>
-          <a:prstGeom prst="roundRect">
-            <a:avLst>
-              <a:gd name="adj" fmla="val 14634"/>
-            </a:avLst>
-          </a:prstGeom>
-          <a:solidFill>
-            <a:srgbClr val="2F8A28"/>
-          </a:solidFill>
-          <a:ln w="12700">
-            <a:solidFill>
-              <a:srgbClr val="2F8A28"/>
-            </a:solidFill>
-            <a:prstDash val="solid"/>
-          </a:ln>
-        </p:spPr>
-      </p:sp>
-      <p:sp>
-        <p:nvSpPr>
-          <p:cNvPr id="16" name="Text 14"/>
-          <p:cNvSpPr/>
-          <p:nvPr/>
-        </p:nvSpPr>
-        <p:spPr>
-          <a:xfrm>
-            <a:off x="8997696" y="3922776"/>
-            <a:ext cx="886968" cy="310896"/>
-          </a:xfrm>
-          <a:prstGeom prst="rect">
-            <a:avLst/>
-          </a:prstGeom>
-          <a:noFill/>
-          <a:ln/>
-        </p:spPr>
-        <p:txBody>
-          <a:bodyPr wrap="square" lIns="0" tIns="0" rIns="0" bIns="0" rtlCol="0" anchor="ctr">
-            <a:normAutofit/>
-          </a:bodyPr>
-          <a:lstStyle/>
-          <a:p>
-            <a:pPr algn="ctr" indent="0" marL="0">
-              <a:buNone/>
-            </a:pPr>
-            <a:r>
-              <a:rPr lang="en-US" sz="1500" b="1" dirty="0">
-                <a:solidFill>
-                  <a:srgbClr val="FFFFFF"/>
-                </a:solidFill>
-                <a:latin typeface="Aptos" pitchFamily="34" charset="0"/>
-                <a:ea typeface="Aptos" pitchFamily="34" charset="-122"/>
-                <a:cs typeface="Aptos" pitchFamily="34" charset="-120"/>
-              </a:rPr>
-              <a:t>Apply</a:t>
-            </a:r>
-            <a:endParaRPr lang="en-US" sz="1500" dirty="0"/>
-          </a:p>
-        </p:txBody>
-      </p:sp>
-      <p:sp>
-        <p:nvSpPr>
-          <p:cNvPr id="17" name="Shape 15"/>
-          <p:cNvSpPr/>
-          <p:nvPr/>
-        </p:nvSpPr>
-        <p:spPr>
-          <a:xfrm>
-            <a:off x="10213848" y="3730752"/>
-            <a:ext cx="1033272" cy="749808"/>
-          </a:xfrm>
-          <a:prstGeom prst="roundRect">
-            <a:avLst>
-              <a:gd name="adj" fmla="val 14634"/>
-            </a:avLst>
-          </a:prstGeom>
-          <a:solidFill>
-            <a:srgbClr val="6A4CA3"/>
-          </a:solidFill>
-          <a:ln w="12700">
-            <a:solidFill>
-              <a:srgbClr val="6A4CA3"/>
-            </a:solidFill>
-            <a:prstDash val="solid"/>
-          </a:ln>
-        </p:spPr>
-      </p:sp>
-      <p:sp>
-        <p:nvSpPr>
-          <p:cNvPr id="18" name="Text 16"/>
-          <p:cNvSpPr/>
-          <p:nvPr/>
-        </p:nvSpPr>
-        <p:spPr>
-          <a:xfrm>
-            <a:off x="10287000" y="3922776"/>
-            <a:ext cx="886968" cy="310896"/>
-          </a:xfrm>
-          <a:prstGeom prst="rect">
-            <a:avLst/>
-          </a:prstGeom>
-          <a:noFill/>
-          <a:ln/>
-        </p:spPr>
-        <p:txBody>
-          <a:bodyPr wrap="square" lIns="0" tIns="0" rIns="0" bIns="0" rtlCol="0" anchor="ctr">
-            <a:normAutofit/>
-          </a:bodyPr>
-          <a:lstStyle/>
-          <a:p>
-            <a:pPr algn="ctr" indent="0" marL="0">
-              <a:buNone/>
-            </a:pPr>
-            <a:r>
-              <a:rPr lang="en-US" sz="1500" b="1" dirty="0">
-                <a:solidFill>
-                  <a:srgbClr val="FFFFFF"/>
-                </a:solidFill>
-                <a:latin typeface="Aptos" pitchFamily="34" charset="0"/>
-                <a:ea typeface="Aptos" pitchFamily="34" charset="-122"/>
-                <a:cs typeface="Aptos" pitchFamily="34" charset="-120"/>
-              </a:rPr>
-              <a:t>Document</a:t>
-            </a:r>
-            <a:endParaRPr lang="en-US" sz="1500" dirty="0"/>
+            <a:r>
+              <a:rPr lang="en-US" sz="1380" dirty="0">
+                <a:solidFill>
+                  <a:srgbClr val="17364A"/>
+                </a:solidFill>
+                <a:latin typeface="Aptos" pitchFamily="34" charset="0"/>
+                <a:ea typeface="Aptos" pitchFamily="34" charset="-122"/>
+                <a:cs typeface="Aptos" pitchFamily="34" charset="-120"/>
+              </a:rPr>
+              <a:t>Read the module for shared vocabulary and context.</a:t>
+            </a:r>
+            <a:endParaRPr lang="en-US" sz="1380" dirty="0"/>
+          </a:p>
+          <a:p>
+            <a:r>
+              <a:rPr lang="en-US" sz="1380" dirty="0">
+                <a:solidFill>
+                  <a:srgbClr val="17364A"/>
+                </a:solidFill>
+                <a:latin typeface="Aptos" pitchFamily="34" charset="0"/>
+                <a:ea typeface="Aptos" pitchFamily="34" charset="-122"/>
+                <a:cs typeface="Aptos" pitchFamily="34" charset="-120"/>
+              </a:rPr>
+              <a:t>Complete the practical exercise to apply the concept.</a:t>
+            </a:r>
+            <a:endParaRPr lang="en-US" sz="1380" dirty="0"/>
+          </a:p>
+          <a:p>
+            <a:r>
+              <a:rPr lang="en-US" sz="1380" dirty="0">
+                <a:solidFill>
+                  <a:srgbClr val="17364A"/>
+                </a:solidFill>
+                <a:latin typeface="Aptos" pitchFamily="34" charset="0"/>
+                <a:ea typeface="Aptos" pitchFamily="34" charset="-122"/>
+                <a:cs typeface="Aptos" pitchFamily="34" charset="-120"/>
+              </a:rPr>
+              <a:t>Use the notes and references for deeper review.</a:t>
+            </a:r>
+            <a:endParaRPr lang="en-US" sz="1380" dirty="0"/>
           </a:p>
         </p:txBody>
       </p:sp>
@@ -11595,13 +10953,11 @@
             </a:avLst>
           </a:prstGeom>
           <a:solidFill>
-            <a:srgbClr val="FFFFFF">
-              <a:alpha val="88000"/>
-            </a:srgbClr>
+            <a:srgbClr val="FFFFFF"/>
           </a:solidFill>
           <a:ln w="12700">
             <a:solidFill>
-              <a:srgbClr val="D6E8F2"/>
+              <a:srgbClr val="B9D7E6"/>
             </a:solidFill>
             <a:prstDash val="solid"/>
           </a:ln>
@@ -11609,169 +10965,112 @@
       </p:sp>
       <p:sp>
         <p:nvSpPr>
-          <p:cNvPr id="14" name="Shape 12"/>
-          <p:cNvSpPr/>
-          <p:nvPr/>
-        </p:nvSpPr>
-        <p:spPr>
-          <a:xfrm>
-            <a:off x="8138160" y="3474720"/>
-            <a:ext cx="256032" cy="411480"/>
-          </a:xfrm>
-          <a:prstGeom prst="rect">
-            <a:avLst/>
-          </a:prstGeom>
-          <a:solidFill>
-            <a:srgbClr val="0068B7"/>
-          </a:solidFill>
-          <a:ln w="12700">
-            <a:solidFill>
-              <a:srgbClr val="0068B7"/>
-            </a:solidFill>
-            <a:prstDash val="solid"/>
-          </a:ln>
-        </p:spPr>
-      </p:sp>
-      <p:sp>
-        <p:nvSpPr>
-          <p:cNvPr id="15" name="Shape 13"/>
-          <p:cNvSpPr/>
-          <p:nvPr/>
-        </p:nvSpPr>
-        <p:spPr>
-          <a:xfrm>
-            <a:off x="8577072" y="3172968"/>
-            <a:ext cx="256032" cy="713232"/>
-          </a:xfrm>
-          <a:prstGeom prst="rect">
-            <a:avLst/>
-          </a:prstGeom>
-          <a:solidFill>
-            <a:srgbClr val="2F8A28"/>
-          </a:solidFill>
-          <a:ln w="12700">
-            <a:solidFill>
-              <a:srgbClr val="2F8A28"/>
-            </a:solidFill>
-            <a:prstDash val="solid"/>
-          </a:ln>
-        </p:spPr>
+          <p:cNvPr id="14" name="Text 12"/>
+          <p:cNvSpPr/>
+          <p:nvPr/>
+        </p:nvSpPr>
+        <p:spPr>
+          <a:xfrm>
+            <a:off x="7799832" y="2935224"/>
+            <a:ext cx="3145536" cy="256032"/>
+          </a:xfrm>
+          <a:prstGeom prst="rect">
+            <a:avLst/>
+          </a:prstGeom>
+          <a:noFill/>
+          <a:ln/>
+        </p:spPr>
+        <p:txBody>
+          <a:bodyPr wrap="square" lIns="0" tIns="0" rIns="0" bIns="0" rtlCol="0" anchor="ctr"/>
+          <a:lstStyle/>
+          <a:p>
+            <a:pPr indent="0" marL="0">
+              <a:buNone/>
+            </a:pPr>
+            <a:r>
+              <a:rPr lang="en-US" sz="1300" b="1" dirty="0">
+                <a:solidFill>
+                  <a:srgbClr val="0068B7"/>
+                </a:solidFill>
+                <a:latin typeface="Aptos" pitchFamily="34" charset="0"/>
+                <a:ea typeface="Aptos" pitchFamily="34" charset="-122"/>
+                <a:cs typeface="Aptos" pitchFamily="34" charset="-120"/>
+              </a:rPr>
+              <a:t>Concept checkpoints</a:t>
+            </a:r>
+            <a:endParaRPr lang="en-US" sz="1300" dirty="0"/>
+          </a:p>
+        </p:txBody>
+      </p:sp>
+      <p:sp>
+        <p:nvSpPr>
+          <p:cNvPr id="15" name="Text 13"/>
+          <p:cNvSpPr/>
+          <p:nvPr/>
+        </p:nvSpPr>
+        <p:spPr>
+          <a:xfrm>
+            <a:off x="7818120" y="3300984"/>
+            <a:ext cx="3090672" cy="877824"/>
+          </a:xfrm>
+          <a:prstGeom prst="rect">
+            <a:avLst/>
+          </a:prstGeom>
+          <a:noFill/>
+          <a:ln/>
+        </p:spPr>
+        <p:txBody>
+          <a:bodyPr wrap="square" lIns="254" tIns="254" rIns="254" bIns="254" rtlCol="0" anchor="t">
+            <a:normAutofit/>
+          </a:bodyPr>
+          <a:lstStyle/>
+          <a:p>
+            <a:r>
+              <a:rPr lang="en-US" sz="1380" dirty="0">
+                <a:solidFill>
+                  <a:srgbClr val="17364A"/>
+                </a:solidFill>
+                <a:latin typeface="Aptos" pitchFamily="34" charset="0"/>
+                <a:ea typeface="Aptos" pitchFamily="34" charset="-122"/>
+                <a:cs typeface="Aptos" pitchFamily="34" charset="-120"/>
+              </a:rPr>
+              <a:t>Data pipeline map</a:t>
+            </a:r>
+            <a:endParaRPr lang="en-US" sz="1380" dirty="0"/>
+          </a:p>
+          <a:p>
+            <a:r>
+              <a:rPr lang="en-US" sz="1380" dirty="0">
+                <a:solidFill>
+                  <a:srgbClr val="17364A"/>
+                </a:solidFill>
+                <a:latin typeface="Aptos" pitchFamily="34" charset="0"/>
+                <a:ea typeface="Aptos" pitchFamily="34" charset="-122"/>
+                <a:cs typeface="Aptos" pitchFamily="34" charset="-120"/>
+              </a:rPr>
+              <a:t>Pipeline readiness checklist</a:t>
+            </a:r>
+            <a:endParaRPr lang="en-US" sz="1380" dirty="0"/>
+          </a:p>
+          <a:p>
+            <a:r>
+              <a:rPr lang="en-US" sz="1380" dirty="0">
+                <a:solidFill>
+                  <a:srgbClr val="17364A"/>
+                </a:solidFill>
+                <a:latin typeface="Aptos" pitchFamily="34" charset="0"/>
+                <a:ea typeface="Aptos" pitchFamily="34" charset="-122"/>
+                <a:cs typeface="Aptos" pitchFamily="34" charset="-120"/>
+              </a:rPr>
+              <a:t>Failure and escalation plan</a:t>
+            </a:r>
+            <a:endParaRPr lang="en-US" sz="1380" dirty="0"/>
+          </a:p>
+        </p:txBody>
       </p:sp>
       <p:sp>
         <p:nvSpPr>
           <p:cNvPr id="16" name="Shape 14"/>
-          <p:cNvSpPr/>
-          <p:nvPr/>
-        </p:nvSpPr>
-        <p:spPr>
-          <a:xfrm>
-            <a:off x="9015984" y="2880360"/>
-            <a:ext cx="256032" cy="1005840"/>
-          </a:xfrm>
-          <a:prstGeom prst="rect">
-            <a:avLst/>
-          </a:prstGeom>
-          <a:solidFill>
-            <a:srgbClr val="D69A2D"/>
-          </a:solidFill>
-          <a:ln w="12700">
-            <a:solidFill>
-              <a:srgbClr val="D69A2D"/>
-            </a:solidFill>
-            <a:prstDash val="solid"/>
-          </a:ln>
-        </p:spPr>
-      </p:sp>
-      <p:sp>
-        <p:nvSpPr>
-          <p:cNvPr id="17" name="Shape 15"/>
-          <p:cNvSpPr/>
-          <p:nvPr/>
-        </p:nvSpPr>
-        <p:spPr>
-          <a:xfrm>
-            <a:off x="9454896" y="3319272"/>
-            <a:ext cx="256032" cy="566928"/>
-          </a:xfrm>
-          <a:prstGeom prst="rect">
-            <a:avLst/>
-          </a:prstGeom>
-          <a:solidFill>
-            <a:srgbClr val="6A4CA3"/>
-          </a:solidFill>
-          <a:ln w="12700">
-            <a:solidFill>
-              <a:srgbClr val="6A4CA3"/>
-            </a:solidFill>
-            <a:prstDash val="solid"/>
-          </a:ln>
-        </p:spPr>
-      </p:sp>
-      <p:sp>
-        <p:nvSpPr>
-          <p:cNvPr id="18" name="Shape 16"/>
-          <p:cNvSpPr/>
-          <p:nvPr/>
-        </p:nvSpPr>
-        <p:spPr>
-          <a:xfrm>
-            <a:off x="8019288" y="3886200"/>
-            <a:ext cx="2706624" cy="0"/>
-          </a:xfrm>
-          <a:prstGeom prst="line">
-            <a:avLst/>
-          </a:prstGeom>
-          <a:noFill/>
-          <a:ln w="15240">
-            <a:solidFill>
-              <a:srgbClr val="003A63"/>
-            </a:solidFill>
-            <a:prstDash val="solid"/>
-          </a:ln>
-        </p:spPr>
-      </p:sp>
-      <p:sp>
-        <p:nvSpPr>
-          <p:cNvPr id="19" name="Text 17"/>
-          <p:cNvSpPr/>
-          <p:nvPr/>
-        </p:nvSpPr>
-        <p:spPr>
-          <a:xfrm>
-            <a:off x="7863840" y="3017520"/>
-            <a:ext cx="3017520" cy="201168"/>
-          </a:xfrm>
-          <a:prstGeom prst="rect">
-            <a:avLst/>
-          </a:prstGeom>
-          <a:noFill/>
-          <a:ln/>
-        </p:spPr>
-        <p:txBody>
-          <a:bodyPr wrap="square" lIns="0" tIns="0" rIns="0" bIns="0" rtlCol="0" anchor="ctr"/>
-          <a:lstStyle/>
-          <a:p>
-            <a:pPr algn="ctr" indent="0" marL="0">
-              <a:buNone/>
-            </a:pPr>
-            <a:r>
-              <a:rPr lang="en-US" sz="1050" b="1" dirty="0">
-                <a:solidFill>
-                  <a:srgbClr val="003A63"/>
-                </a:solidFill>
-                <a:latin typeface="Aptos" pitchFamily="34" charset="0"/>
-                <a:ea typeface="Aptos" pitchFamily="34" charset="-122"/>
-                <a:cs typeface="Aptos" pitchFamily="34" charset="-120"/>
-              </a:rPr>
-              <a:t>Measure and monitor</a:t>
-            </a:r>
-            <a:endParaRPr lang="en-US" sz="1050" dirty="0"/>
-          </a:p>
-        </p:txBody>
-      </p:sp>
-      <p:sp>
-        <p:nvSpPr>
-          <p:cNvPr id="20" name="Shape 18"/>
           <p:cNvSpPr/>
           <p:nvPr/>
         </p:nvSpPr>
@@ -11798,7 +11097,7 @@
       </p:sp>
       <p:sp>
         <p:nvSpPr>
-          <p:cNvPr id="21" name="Text 19"/>
+          <p:cNvPr id="17" name="Text 15"/>
           <p:cNvSpPr/>
           <p:nvPr/>
         </p:nvSpPr>
@@ -11837,7 +11136,7 @@
       </p:sp>
       <p:sp>
         <p:nvSpPr>
-          <p:cNvPr id="22" name="Text 20"/>
+          <p:cNvPr id="18" name="Text 16"/>
           <p:cNvSpPr/>
           <p:nvPr/>
         </p:nvSpPr>
@@ -12345,13 +11644,11 @@
             </a:avLst>
           </a:prstGeom>
           <a:solidFill>
-            <a:srgbClr val="FFFFFF">
-              <a:alpha val="88000"/>
-            </a:srgbClr>
+            <a:srgbClr val="FFFFFF"/>
           </a:solidFill>
           <a:ln w="12700">
             <a:solidFill>
-              <a:srgbClr val="D6E8F2"/>
+              <a:srgbClr val="B9D7E6"/>
             </a:solidFill>
             <a:prstDash val="solid"/>
           </a:ln>
@@ -12359,169 +11656,112 @@
       </p:sp>
       <p:sp>
         <p:nvSpPr>
-          <p:cNvPr id="14" name="Shape 12"/>
-          <p:cNvSpPr/>
-          <p:nvPr/>
-        </p:nvSpPr>
-        <p:spPr>
-          <a:xfrm>
-            <a:off x="8138160" y="3474720"/>
-            <a:ext cx="256032" cy="411480"/>
-          </a:xfrm>
-          <a:prstGeom prst="rect">
-            <a:avLst/>
-          </a:prstGeom>
-          <a:solidFill>
-            <a:srgbClr val="0068B7"/>
-          </a:solidFill>
-          <a:ln w="12700">
-            <a:solidFill>
-              <a:srgbClr val="0068B7"/>
-            </a:solidFill>
-            <a:prstDash val="solid"/>
-          </a:ln>
-        </p:spPr>
-      </p:sp>
-      <p:sp>
-        <p:nvSpPr>
-          <p:cNvPr id="15" name="Shape 13"/>
-          <p:cNvSpPr/>
-          <p:nvPr/>
-        </p:nvSpPr>
-        <p:spPr>
-          <a:xfrm>
-            <a:off x="8577072" y="3172968"/>
-            <a:ext cx="256032" cy="713232"/>
-          </a:xfrm>
-          <a:prstGeom prst="rect">
-            <a:avLst/>
-          </a:prstGeom>
-          <a:solidFill>
-            <a:srgbClr val="2F8A28"/>
-          </a:solidFill>
-          <a:ln w="12700">
-            <a:solidFill>
-              <a:srgbClr val="2F8A28"/>
-            </a:solidFill>
-            <a:prstDash val="solid"/>
-          </a:ln>
-        </p:spPr>
+          <p:cNvPr id="14" name="Text 12"/>
+          <p:cNvSpPr/>
+          <p:nvPr/>
+        </p:nvSpPr>
+        <p:spPr>
+          <a:xfrm>
+            <a:off x="7799832" y="2935224"/>
+            <a:ext cx="3145536" cy="256032"/>
+          </a:xfrm>
+          <a:prstGeom prst="rect">
+            <a:avLst/>
+          </a:prstGeom>
+          <a:noFill/>
+          <a:ln/>
+        </p:spPr>
+        <p:txBody>
+          <a:bodyPr wrap="square" lIns="0" tIns="0" rIns="0" bIns="0" rtlCol="0" anchor="ctr"/>
+          <a:lstStyle/>
+          <a:p>
+            <a:pPr indent="0" marL="0">
+              <a:buNone/>
+            </a:pPr>
+            <a:r>
+              <a:rPr lang="en-US" sz="1300" b="1" dirty="0">
+                <a:solidFill>
+                  <a:srgbClr val="0068B7"/>
+                </a:solidFill>
+                <a:latin typeface="Aptos" pitchFamily="34" charset="0"/>
+                <a:ea typeface="Aptos" pitchFamily="34" charset="-122"/>
+                <a:cs typeface="Aptos" pitchFamily="34" charset="-120"/>
+              </a:rPr>
+              <a:t>Concept checkpoints</a:t>
+            </a:r>
+            <a:endParaRPr lang="en-US" sz="1300" dirty="0"/>
+          </a:p>
+        </p:txBody>
+      </p:sp>
+      <p:sp>
+        <p:nvSpPr>
+          <p:cNvPr id="15" name="Text 13"/>
+          <p:cNvSpPr/>
+          <p:nvPr/>
+        </p:nvSpPr>
+        <p:spPr>
+          <a:xfrm>
+            <a:off x="7818120" y="3300984"/>
+            <a:ext cx="3090672" cy="877824"/>
+          </a:xfrm>
+          <a:prstGeom prst="rect">
+            <a:avLst/>
+          </a:prstGeom>
+          <a:noFill/>
+          <a:ln/>
+        </p:spPr>
+        <p:txBody>
+          <a:bodyPr wrap="square" lIns="254" tIns="254" rIns="254" bIns="254" rtlCol="0" anchor="t">
+            <a:normAutofit/>
+          </a:bodyPr>
+          <a:lstStyle/>
+          <a:p>
+            <a:r>
+              <a:rPr lang="en-US" sz="1380" dirty="0">
+                <a:solidFill>
+                  <a:srgbClr val="17364A"/>
+                </a:solidFill>
+                <a:latin typeface="Aptos" pitchFamily="34" charset="0"/>
+                <a:ea typeface="Aptos" pitchFamily="34" charset="-122"/>
+                <a:cs typeface="Aptos" pitchFamily="34" charset="-120"/>
+              </a:rPr>
+              <a:t>1.</a:t>
+            </a:r>
+            <a:endParaRPr lang="en-US" sz="1380" dirty="0"/>
+          </a:p>
+          <a:p>
+            <a:r>
+              <a:rPr lang="en-US" sz="1380" dirty="0">
+                <a:solidFill>
+                  <a:srgbClr val="17364A"/>
+                </a:solidFill>
+                <a:latin typeface="Aptos" pitchFamily="34" charset="0"/>
+                <a:ea typeface="Aptos" pitchFamily="34" charset="-122"/>
+                <a:cs typeface="Aptos" pitchFamily="34" charset="-120"/>
+              </a:rPr>
+              <a:t>What is the strongest reason to document data lineage for an AI-supported workflow?</a:t>
+            </a:r>
+            <a:endParaRPr lang="en-US" sz="1380" dirty="0"/>
+          </a:p>
+          <a:p>
+            <a:r>
+              <a:rPr lang="en-US" sz="1380" dirty="0">
+                <a:solidFill>
+                  <a:srgbClr val="17364A"/>
+                </a:solidFill>
+                <a:latin typeface="Aptos" pitchFamily="34" charset="0"/>
+                <a:ea typeface="Aptos" pitchFamily="34" charset="-122"/>
+                <a:cs typeface="Aptos" pitchFamily="34" charset="-120"/>
+              </a:rPr>
+              <a:t>2.</a:t>
+            </a:r>
+            <a:endParaRPr lang="en-US" sz="1380" dirty="0"/>
+          </a:p>
+        </p:txBody>
       </p:sp>
       <p:sp>
         <p:nvSpPr>
           <p:cNvPr id="16" name="Shape 14"/>
-          <p:cNvSpPr/>
-          <p:nvPr/>
-        </p:nvSpPr>
-        <p:spPr>
-          <a:xfrm>
-            <a:off x="9015984" y="2880360"/>
-            <a:ext cx="256032" cy="1005840"/>
-          </a:xfrm>
-          <a:prstGeom prst="rect">
-            <a:avLst/>
-          </a:prstGeom>
-          <a:solidFill>
-            <a:srgbClr val="D69A2D"/>
-          </a:solidFill>
-          <a:ln w="12700">
-            <a:solidFill>
-              <a:srgbClr val="D69A2D"/>
-            </a:solidFill>
-            <a:prstDash val="solid"/>
-          </a:ln>
-        </p:spPr>
-      </p:sp>
-      <p:sp>
-        <p:nvSpPr>
-          <p:cNvPr id="17" name="Shape 15"/>
-          <p:cNvSpPr/>
-          <p:nvPr/>
-        </p:nvSpPr>
-        <p:spPr>
-          <a:xfrm>
-            <a:off x="9454896" y="3319272"/>
-            <a:ext cx="256032" cy="566928"/>
-          </a:xfrm>
-          <a:prstGeom prst="rect">
-            <a:avLst/>
-          </a:prstGeom>
-          <a:solidFill>
-            <a:srgbClr val="6A4CA3"/>
-          </a:solidFill>
-          <a:ln w="12700">
-            <a:solidFill>
-              <a:srgbClr val="6A4CA3"/>
-            </a:solidFill>
-            <a:prstDash val="solid"/>
-          </a:ln>
-        </p:spPr>
-      </p:sp>
-      <p:sp>
-        <p:nvSpPr>
-          <p:cNvPr id="18" name="Shape 16"/>
-          <p:cNvSpPr/>
-          <p:nvPr/>
-        </p:nvSpPr>
-        <p:spPr>
-          <a:xfrm>
-            <a:off x="8019288" y="3886200"/>
-            <a:ext cx="2706624" cy="0"/>
-          </a:xfrm>
-          <a:prstGeom prst="line">
-            <a:avLst/>
-          </a:prstGeom>
-          <a:noFill/>
-          <a:ln w="15240">
-            <a:solidFill>
-              <a:srgbClr val="003A63"/>
-            </a:solidFill>
-            <a:prstDash val="solid"/>
-          </a:ln>
-        </p:spPr>
-      </p:sp>
-      <p:sp>
-        <p:nvSpPr>
-          <p:cNvPr id="19" name="Text 17"/>
-          <p:cNvSpPr/>
-          <p:nvPr/>
-        </p:nvSpPr>
-        <p:spPr>
-          <a:xfrm>
-            <a:off x="7863840" y="3017520"/>
-            <a:ext cx="3017520" cy="201168"/>
-          </a:xfrm>
-          <a:prstGeom prst="rect">
-            <a:avLst/>
-          </a:prstGeom>
-          <a:noFill/>
-          <a:ln/>
-        </p:spPr>
-        <p:txBody>
-          <a:bodyPr wrap="square" lIns="0" tIns="0" rIns="0" bIns="0" rtlCol="0" anchor="ctr"/>
-          <a:lstStyle/>
-          <a:p>
-            <a:pPr algn="ctr" indent="0" marL="0">
-              <a:buNone/>
-            </a:pPr>
-            <a:r>
-              <a:rPr lang="en-US" sz="1050" b="1" dirty="0">
-                <a:solidFill>
-                  <a:srgbClr val="003A63"/>
-                </a:solidFill>
-                <a:latin typeface="Aptos" pitchFamily="34" charset="0"/>
-                <a:ea typeface="Aptos" pitchFamily="34" charset="-122"/>
-                <a:cs typeface="Aptos" pitchFamily="34" charset="-120"/>
-              </a:rPr>
-              <a:t>Measure and monitor</a:t>
-            </a:r>
-            <a:endParaRPr lang="en-US" sz="1050" dirty="0"/>
-          </a:p>
-        </p:txBody>
-      </p:sp>
-      <p:sp>
-        <p:nvSpPr>
-          <p:cNvPr id="20" name="Shape 18"/>
           <p:cNvSpPr/>
           <p:nvPr/>
         </p:nvSpPr>
@@ -12548,7 +11788,7 @@
       </p:sp>
       <p:sp>
         <p:nvSpPr>
-          <p:cNvPr id="21" name="Text 19"/>
+          <p:cNvPr id="17" name="Text 15"/>
           <p:cNvSpPr/>
           <p:nvPr/>
         </p:nvSpPr>
@@ -12587,7 +11827,7 @@
       </p:sp>
       <p:sp>
         <p:nvSpPr>
-          <p:cNvPr id="22" name="Text 20"/>
+          <p:cNvPr id="18" name="Text 16"/>
           <p:cNvSpPr/>
           <p:nvPr/>
         </p:nvSpPr>
@@ -13095,13 +12335,11 @@
             </a:avLst>
           </a:prstGeom>
           <a:solidFill>
-            <a:srgbClr val="FFFFFF">
-              <a:alpha val="88000"/>
-            </a:srgbClr>
+            <a:srgbClr val="FFFFFF"/>
           </a:solidFill>
           <a:ln w="12700">
             <a:solidFill>
-              <a:srgbClr val="D6E8F2"/>
+              <a:srgbClr val="B9D7E6"/>
             </a:solidFill>
             <a:prstDash val="solid"/>
           </a:ln>
@@ -13109,169 +12347,112 @@
       </p:sp>
       <p:sp>
         <p:nvSpPr>
-          <p:cNvPr id="14" name="Shape 12"/>
-          <p:cNvSpPr/>
-          <p:nvPr/>
-        </p:nvSpPr>
-        <p:spPr>
-          <a:xfrm>
-            <a:off x="8138160" y="3474720"/>
-            <a:ext cx="256032" cy="411480"/>
-          </a:xfrm>
-          <a:prstGeom prst="rect">
-            <a:avLst/>
-          </a:prstGeom>
-          <a:solidFill>
-            <a:srgbClr val="0068B7"/>
-          </a:solidFill>
-          <a:ln w="12700">
-            <a:solidFill>
-              <a:srgbClr val="0068B7"/>
-            </a:solidFill>
-            <a:prstDash val="solid"/>
-          </a:ln>
-        </p:spPr>
-      </p:sp>
-      <p:sp>
-        <p:nvSpPr>
-          <p:cNvPr id="15" name="Shape 13"/>
-          <p:cNvSpPr/>
-          <p:nvPr/>
-        </p:nvSpPr>
-        <p:spPr>
-          <a:xfrm>
-            <a:off x="8577072" y="3172968"/>
-            <a:ext cx="256032" cy="713232"/>
-          </a:xfrm>
-          <a:prstGeom prst="rect">
-            <a:avLst/>
-          </a:prstGeom>
-          <a:solidFill>
-            <a:srgbClr val="2F8A28"/>
-          </a:solidFill>
-          <a:ln w="12700">
-            <a:solidFill>
-              <a:srgbClr val="2F8A28"/>
-            </a:solidFill>
-            <a:prstDash val="solid"/>
-          </a:ln>
-        </p:spPr>
+          <p:cNvPr id="14" name="Text 12"/>
+          <p:cNvSpPr/>
+          <p:nvPr/>
+        </p:nvSpPr>
+        <p:spPr>
+          <a:xfrm>
+            <a:off x="7799832" y="2935224"/>
+            <a:ext cx="3145536" cy="256032"/>
+          </a:xfrm>
+          <a:prstGeom prst="rect">
+            <a:avLst/>
+          </a:prstGeom>
+          <a:noFill/>
+          <a:ln/>
+        </p:spPr>
+        <p:txBody>
+          <a:bodyPr wrap="square" lIns="0" tIns="0" rIns="0" bIns="0" rtlCol="0" anchor="ctr"/>
+          <a:lstStyle/>
+          <a:p>
+            <a:pPr indent="0" marL="0">
+              <a:buNone/>
+            </a:pPr>
+            <a:r>
+              <a:rPr lang="en-US" sz="1300" b="1" dirty="0">
+                <a:solidFill>
+                  <a:srgbClr val="0068B7"/>
+                </a:solidFill>
+                <a:latin typeface="Aptos" pitchFamily="34" charset="0"/>
+                <a:ea typeface="Aptos" pitchFamily="34" charset="-122"/>
+                <a:cs typeface="Aptos" pitchFamily="34" charset="-120"/>
+              </a:rPr>
+              <a:t>Concept checkpoints</a:t>
+            </a:r>
+            <a:endParaRPr lang="en-US" sz="1300" dirty="0"/>
+          </a:p>
+        </p:txBody>
+      </p:sp>
+      <p:sp>
+        <p:nvSpPr>
+          <p:cNvPr id="15" name="Text 13"/>
+          <p:cNvSpPr/>
+          <p:nvPr/>
+        </p:nvSpPr>
+        <p:spPr>
+          <a:xfrm>
+            <a:off x="7818120" y="3300984"/>
+            <a:ext cx="3090672" cy="877824"/>
+          </a:xfrm>
+          <a:prstGeom prst="rect">
+            <a:avLst/>
+          </a:prstGeom>
+          <a:noFill/>
+          <a:ln/>
+        </p:spPr>
+        <p:txBody>
+          <a:bodyPr wrap="square" lIns="254" tIns="254" rIns="254" bIns="254" rtlCol="0" anchor="t">
+            <a:normAutofit/>
+          </a:bodyPr>
+          <a:lstStyle/>
+          <a:p>
+            <a:r>
+              <a:rPr lang="en-US" sz="1380" dirty="0">
+                <a:solidFill>
+                  <a:srgbClr val="17364A"/>
+                </a:solidFill>
+                <a:latin typeface="Aptos" pitchFamily="34" charset="0"/>
+                <a:ea typeface="Aptos" pitchFamily="34" charset="-122"/>
+                <a:cs typeface="Aptos" pitchFamily="34" charset="-120"/>
+              </a:rPr>
+              <a:t>CDC Data Modernization Initiative materials:.</a:t>
+            </a:r>
+            <a:endParaRPr lang="en-US" sz="1380" dirty="0"/>
+          </a:p>
+          <a:p>
+            <a:r>
+              <a:rPr lang="en-US" sz="1380" dirty="0">
+                <a:solidFill>
+                  <a:srgbClr val="17364A"/>
+                </a:solidFill>
+                <a:latin typeface="Aptos" pitchFamily="34" charset="0"/>
+                <a:ea typeface="Aptos" pitchFamily="34" charset="-122"/>
+                <a:cs typeface="Aptos" pitchFamily="34" charset="-120"/>
+              </a:rPr>
+              <a:t>CDC Public Health Data Strategy:.</a:t>
+            </a:r>
+            <a:endParaRPr lang="en-US" sz="1380" dirty="0"/>
+          </a:p>
+          <a:p>
+            <a:r>
+              <a:rPr lang="en-US" sz="1380" dirty="0">
+                <a:solidFill>
+                  <a:srgbClr val="17364A"/>
+                </a:solidFill>
+                <a:latin typeface="Aptos" pitchFamily="34" charset="0"/>
+                <a:ea typeface="Aptos" pitchFamily="34" charset="-122"/>
+                <a:cs typeface="Aptos" pitchFamily="34" charset="-120"/>
+              </a:rPr>
+              <a:t>NIST AI Risk Management Framework: https://www.nist.gov/itl/ai-risk-management-framework</a:t>
+            </a:r>
+            <a:endParaRPr lang="en-US" sz="1380" dirty="0"/>
+          </a:p>
+        </p:txBody>
       </p:sp>
       <p:sp>
         <p:nvSpPr>
           <p:cNvPr id="16" name="Shape 14"/>
-          <p:cNvSpPr/>
-          <p:nvPr/>
-        </p:nvSpPr>
-        <p:spPr>
-          <a:xfrm>
-            <a:off x="9015984" y="2880360"/>
-            <a:ext cx="256032" cy="1005840"/>
-          </a:xfrm>
-          <a:prstGeom prst="rect">
-            <a:avLst/>
-          </a:prstGeom>
-          <a:solidFill>
-            <a:srgbClr val="D69A2D"/>
-          </a:solidFill>
-          <a:ln w="12700">
-            <a:solidFill>
-              <a:srgbClr val="D69A2D"/>
-            </a:solidFill>
-            <a:prstDash val="solid"/>
-          </a:ln>
-        </p:spPr>
-      </p:sp>
-      <p:sp>
-        <p:nvSpPr>
-          <p:cNvPr id="17" name="Shape 15"/>
-          <p:cNvSpPr/>
-          <p:nvPr/>
-        </p:nvSpPr>
-        <p:spPr>
-          <a:xfrm>
-            <a:off x="9454896" y="3319272"/>
-            <a:ext cx="256032" cy="566928"/>
-          </a:xfrm>
-          <a:prstGeom prst="rect">
-            <a:avLst/>
-          </a:prstGeom>
-          <a:solidFill>
-            <a:srgbClr val="6A4CA3"/>
-          </a:solidFill>
-          <a:ln w="12700">
-            <a:solidFill>
-              <a:srgbClr val="6A4CA3"/>
-            </a:solidFill>
-            <a:prstDash val="solid"/>
-          </a:ln>
-        </p:spPr>
-      </p:sp>
-      <p:sp>
-        <p:nvSpPr>
-          <p:cNvPr id="18" name="Shape 16"/>
-          <p:cNvSpPr/>
-          <p:nvPr/>
-        </p:nvSpPr>
-        <p:spPr>
-          <a:xfrm>
-            <a:off x="8019288" y="3886200"/>
-            <a:ext cx="2706624" cy="0"/>
-          </a:xfrm>
-          <a:prstGeom prst="line">
-            <a:avLst/>
-          </a:prstGeom>
-          <a:noFill/>
-          <a:ln w="15240">
-            <a:solidFill>
-              <a:srgbClr val="003A63"/>
-            </a:solidFill>
-            <a:prstDash val="solid"/>
-          </a:ln>
-        </p:spPr>
-      </p:sp>
-      <p:sp>
-        <p:nvSpPr>
-          <p:cNvPr id="19" name="Text 17"/>
-          <p:cNvSpPr/>
-          <p:nvPr/>
-        </p:nvSpPr>
-        <p:spPr>
-          <a:xfrm>
-            <a:off x="7863840" y="3017520"/>
-            <a:ext cx="3017520" cy="201168"/>
-          </a:xfrm>
-          <a:prstGeom prst="rect">
-            <a:avLst/>
-          </a:prstGeom>
-          <a:noFill/>
-          <a:ln/>
-        </p:spPr>
-        <p:txBody>
-          <a:bodyPr wrap="square" lIns="0" tIns="0" rIns="0" bIns="0" rtlCol="0" anchor="ctr"/>
-          <a:lstStyle/>
-          <a:p>
-            <a:pPr algn="ctr" indent="0" marL="0">
-              <a:buNone/>
-            </a:pPr>
-            <a:r>
-              <a:rPr lang="en-US" sz="1050" b="1" dirty="0">
-                <a:solidFill>
-                  <a:srgbClr val="003A63"/>
-                </a:solidFill>
-                <a:latin typeface="Aptos" pitchFamily="34" charset="0"/>
-                <a:ea typeface="Aptos" pitchFamily="34" charset="-122"/>
-                <a:cs typeface="Aptos" pitchFamily="34" charset="-120"/>
-              </a:rPr>
-              <a:t>Measure and monitor</a:t>
-            </a:r>
-            <a:endParaRPr lang="en-US" sz="1050" dirty="0"/>
-          </a:p>
-        </p:txBody>
-      </p:sp>
-      <p:sp>
-        <p:nvSpPr>
-          <p:cNvPr id="20" name="Shape 18"/>
           <p:cNvSpPr/>
           <p:nvPr/>
         </p:nvSpPr>
@@ -13298,7 +12479,7 @@
       </p:sp>
       <p:sp>
         <p:nvSpPr>
-          <p:cNvPr id="21" name="Text 19"/>
+          <p:cNvPr id="17" name="Text 15"/>
           <p:cNvSpPr/>
           <p:nvPr/>
         </p:nvSpPr>
@@ -13337,7 +12518,7 @@
       </p:sp>
       <p:sp>
         <p:nvSpPr>
-          <p:cNvPr id="22" name="Text 20"/>
+          <p:cNvPr id="18" name="Text 16"/>
           <p:cNvSpPr/>
           <p:nvPr/>
         </p:nvSpPr>
@@ -13850,20 +13031,20 @@
         </p:nvSpPr>
         <p:spPr>
           <a:xfrm>
-            <a:off x="7818120" y="3977640"/>
-            <a:ext cx="972312" cy="749808"/>
+            <a:off x="8046720" y="3794760"/>
+            <a:ext cx="3063240" cy="1600200"/>
           </a:xfrm>
           <a:prstGeom prst="roundRect">
             <a:avLst>
-              <a:gd name="adj" fmla="val 14634"/>
+              <a:gd name="adj" fmla="val 6857"/>
             </a:avLst>
           </a:prstGeom>
           <a:solidFill>
-            <a:srgbClr val="0068B7"/>
+            <a:srgbClr val="FFFFFF"/>
           </a:solidFill>
           <a:ln w="12700">
             <a:solidFill>
-              <a:srgbClr val="0068B7"/>
+              <a:srgbClr val="B9D7E6"/>
             </a:solidFill>
             <a:prstDash val="solid"/>
           </a:ln>
@@ -13877,172 +13058,100 @@
         </p:nvSpPr>
         <p:spPr>
           <a:xfrm>
-            <a:off x="7891272" y="4169664"/>
-            <a:ext cx="826008" cy="310896"/>
-          </a:xfrm>
-          <a:prstGeom prst="rect">
-            <a:avLst/>
-          </a:prstGeom>
-          <a:noFill/>
-          <a:ln/>
-        </p:spPr>
-        <p:txBody>
-          <a:bodyPr wrap="square" lIns="0" tIns="0" rIns="0" bIns="0" rtlCol="0" anchor="ctr">
+            <a:off x="8211312" y="3941064"/>
+            <a:ext cx="2734056" cy="256032"/>
+          </a:xfrm>
+          <a:prstGeom prst="rect">
+            <a:avLst/>
+          </a:prstGeom>
+          <a:noFill/>
+          <a:ln/>
+        </p:spPr>
+        <p:txBody>
+          <a:bodyPr wrap="square" lIns="0" tIns="0" rIns="0" bIns="0" rtlCol="0" anchor="ctr"/>
+          <a:lstStyle/>
+          <a:p>
+            <a:pPr indent="0" marL="0">
+              <a:buNone/>
+            </a:pPr>
+            <a:r>
+              <a:rPr lang="en-US" sz="1300" b="1" dirty="0">
+                <a:solidFill>
+                  <a:srgbClr val="0068B7"/>
+                </a:solidFill>
+                <a:latin typeface="Aptos" pitchFamily="34" charset="0"/>
+                <a:ea typeface="Aptos" pitchFamily="34" charset="-122"/>
+                <a:cs typeface="Aptos" pitchFamily="34" charset="-120"/>
+              </a:rPr>
+              <a:t>Use the play links to</a:t>
+            </a:r>
+            <a:endParaRPr lang="en-US" sz="1300" dirty="0"/>
+          </a:p>
+        </p:txBody>
+      </p:sp>
+      <p:sp>
+        <p:nvSpPr>
+          <p:cNvPr id="15" name="Text 13"/>
+          <p:cNvSpPr/>
+          <p:nvPr/>
+        </p:nvSpPr>
+        <p:spPr>
+          <a:xfrm>
+            <a:off x="8229600" y="4306824"/>
+            <a:ext cx="2679192" cy="941832"/>
+          </a:xfrm>
+          <a:prstGeom prst="rect">
+            <a:avLst/>
+          </a:prstGeom>
+          <a:noFill/>
+          <a:ln/>
+        </p:spPr>
+        <p:txBody>
+          <a:bodyPr wrap="square" lIns="254" tIns="254" rIns="254" bIns="254" rtlCol="0" anchor="t">
             <a:normAutofit/>
           </a:bodyPr>
           <a:lstStyle/>
           <a:p>
-            <a:pPr algn="ctr" indent="0" marL="0">
-              <a:buNone/>
-            </a:pPr>
-            <a:r>
-              <a:rPr lang="en-US" sz="1500" b="1" dirty="0">
-                <a:solidFill>
-                  <a:srgbClr val="FFFFFF"/>
-                </a:solidFill>
-                <a:latin typeface="Aptos" pitchFamily="34" charset="0"/>
-                <a:ea typeface="Aptos" pitchFamily="34" charset="-122"/>
-                <a:cs typeface="Aptos" pitchFamily="34" charset="-120"/>
-              </a:rPr>
-              <a:t>Lesson</a:t>
-            </a:r>
-            <a:endParaRPr lang="en-US" sz="1500" dirty="0"/>
-          </a:p>
-        </p:txBody>
-      </p:sp>
-      <p:sp>
-        <p:nvSpPr>
-          <p:cNvPr id="15" name="Shape 13"/>
-          <p:cNvSpPr/>
-          <p:nvPr/>
-        </p:nvSpPr>
-        <p:spPr>
-          <a:xfrm>
-            <a:off x="9046464" y="3977640"/>
-            <a:ext cx="972312" cy="749808"/>
-          </a:xfrm>
-          <a:prstGeom prst="roundRect">
-            <a:avLst>
-              <a:gd name="adj" fmla="val 14634"/>
-            </a:avLst>
-          </a:prstGeom>
-          <a:solidFill>
-            <a:srgbClr val="2F8A28"/>
-          </a:solidFill>
-          <a:ln w="12700">
-            <a:solidFill>
-              <a:srgbClr val="2F8A28"/>
-            </a:solidFill>
-            <a:prstDash val="solid"/>
-          </a:ln>
-        </p:spPr>
-      </p:sp>
-      <p:sp>
-        <p:nvSpPr>
-          <p:cNvPr id="16" name="Text 14"/>
-          <p:cNvSpPr/>
-          <p:nvPr/>
-        </p:nvSpPr>
-        <p:spPr>
-          <a:xfrm>
-            <a:off x="9119616" y="4169664"/>
-            <a:ext cx="826008" cy="310896"/>
-          </a:xfrm>
-          <a:prstGeom prst="rect">
-            <a:avLst/>
-          </a:prstGeom>
-          <a:noFill/>
-          <a:ln/>
-        </p:spPr>
-        <p:txBody>
-          <a:bodyPr wrap="square" lIns="0" tIns="0" rIns="0" bIns="0" rtlCol="0" anchor="ctr">
-            <a:normAutofit/>
-          </a:bodyPr>
-          <a:lstStyle/>
-          <a:p>
-            <a:pPr algn="ctr" indent="0" marL="0">
-              <a:buNone/>
-            </a:pPr>
-            <a:r>
-              <a:rPr lang="en-US" sz="1500" b="1" dirty="0">
-                <a:solidFill>
-                  <a:srgbClr val="FFFFFF"/>
-                </a:solidFill>
-                <a:latin typeface="Aptos" pitchFamily="34" charset="0"/>
-                <a:ea typeface="Aptos" pitchFamily="34" charset="-122"/>
-                <a:cs typeface="Aptos" pitchFamily="34" charset="-120"/>
-              </a:rPr>
-              <a:t>Plays</a:t>
-            </a:r>
-            <a:endParaRPr lang="en-US" sz="1500" dirty="0"/>
-          </a:p>
-        </p:txBody>
-      </p:sp>
-      <p:sp>
-        <p:nvSpPr>
-          <p:cNvPr id="17" name="Shape 15"/>
-          <p:cNvSpPr/>
-          <p:nvPr/>
-        </p:nvSpPr>
-        <p:spPr>
-          <a:xfrm>
-            <a:off x="10274808" y="3977640"/>
-            <a:ext cx="972312" cy="749808"/>
-          </a:xfrm>
-          <a:prstGeom prst="roundRect">
-            <a:avLst>
-              <a:gd name="adj" fmla="val 14634"/>
-            </a:avLst>
-          </a:prstGeom>
-          <a:solidFill>
-            <a:srgbClr val="6A4CA3"/>
-          </a:solidFill>
-          <a:ln w="12700">
-            <a:solidFill>
-              <a:srgbClr val="6A4CA3"/>
-            </a:solidFill>
-            <a:prstDash val="solid"/>
-          </a:ln>
-        </p:spPr>
-      </p:sp>
-      <p:sp>
-        <p:nvSpPr>
-          <p:cNvPr id="18" name="Text 16"/>
-          <p:cNvSpPr/>
-          <p:nvPr/>
-        </p:nvSpPr>
-        <p:spPr>
-          <a:xfrm>
-            <a:off x="10347960" y="4169664"/>
-            <a:ext cx="826008" cy="310896"/>
-          </a:xfrm>
-          <a:prstGeom prst="rect">
-            <a:avLst/>
-          </a:prstGeom>
-          <a:noFill/>
-          <a:ln/>
-        </p:spPr>
-        <p:txBody>
-          <a:bodyPr wrap="square" lIns="0" tIns="0" rIns="0" bIns="0" rtlCol="0" anchor="ctr">
-            <a:normAutofit/>
-          </a:bodyPr>
-          <a:lstStyle/>
-          <a:p>
-            <a:pPr algn="ctr" indent="0" marL="0">
-              <a:buNone/>
-            </a:pPr>
-            <a:r>
-              <a:rPr lang="en-US" sz="1500" b="1" dirty="0">
-                <a:solidFill>
-                  <a:srgbClr val="FFFFFF"/>
-                </a:solidFill>
-                <a:latin typeface="Aptos" pitchFamily="34" charset="0"/>
-                <a:ea typeface="Aptos" pitchFamily="34" charset="-122"/>
-                <a:cs typeface="Aptos" pitchFamily="34" charset="-120"/>
-              </a:rPr>
-              <a:t>Action</a:t>
-            </a:r>
-            <a:endParaRPr lang="en-US" sz="1500" dirty="0"/>
+            <a:r>
+              <a:rPr lang="en-US" sz="1380" dirty="0">
+                <a:solidFill>
+                  <a:srgbClr val="17364A"/>
+                </a:solidFill>
+                <a:latin typeface="Aptos" pitchFamily="34" charset="0"/>
+                <a:ea typeface="Aptos" pitchFamily="34" charset="-122"/>
+                <a:cs typeface="Aptos" pitchFamily="34" charset="-120"/>
+              </a:rPr>
+              <a:t>Locate the decision point in the playbook sequence.</a:t>
+            </a:r>
+            <a:endParaRPr lang="en-US" sz="1380" dirty="0"/>
+          </a:p>
+          <a:p>
+            <a:r>
+              <a:rPr lang="en-US" sz="1380" dirty="0">
+                <a:solidFill>
+                  <a:srgbClr val="17364A"/>
+                </a:solidFill>
+                <a:latin typeface="Aptos" pitchFamily="34" charset="0"/>
+                <a:ea typeface="Aptos" pitchFamily="34" charset="-122"/>
+                <a:cs typeface="Aptos" pitchFamily="34" charset="-120"/>
+              </a:rPr>
+              <a:t>Identify who should participate in the work.</a:t>
+            </a:r>
+            <a:endParaRPr lang="en-US" sz="1380" dirty="0"/>
+          </a:p>
+          <a:p>
+            <a:r>
+              <a:rPr lang="en-US" sz="1380" dirty="0">
+                <a:solidFill>
+                  <a:srgbClr val="17364A"/>
+                </a:solidFill>
+                <a:latin typeface="Aptos" pitchFamily="34" charset="0"/>
+                <a:ea typeface="Aptos" pitchFamily="34" charset="-122"/>
+                <a:cs typeface="Aptos" pitchFamily="34" charset="-120"/>
+              </a:rPr>
+              <a:t>Document the review, approval, or implementation step.</a:t>
+            </a:r>
+            <a:endParaRPr lang="en-US" sz="1380" dirty="0"/>
           </a:p>
         </p:txBody>
       </p:sp>
@@ -14520,20 +13629,20 @@
         </p:nvSpPr>
         <p:spPr>
           <a:xfrm>
-            <a:off x="7818120" y="3977640"/>
-            <a:ext cx="972312" cy="749808"/>
+            <a:off x="8046720" y="3794760"/>
+            <a:ext cx="3063240" cy="1600200"/>
           </a:xfrm>
           <a:prstGeom prst="roundRect">
             <a:avLst>
-              <a:gd name="adj" fmla="val 14634"/>
+              <a:gd name="adj" fmla="val 6857"/>
             </a:avLst>
           </a:prstGeom>
           <a:solidFill>
-            <a:srgbClr val="0068B7"/>
+            <a:srgbClr val="FFFFFF"/>
           </a:solidFill>
           <a:ln w="12700">
             <a:solidFill>
-              <a:srgbClr val="0068B7"/>
+              <a:srgbClr val="B9D7E6"/>
             </a:solidFill>
             <a:prstDash val="solid"/>
           </a:ln>
@@ -14547,172 +13656,100 @@
         </p:nvSpPr>
         <p:spPr>
           <a:xfrm>
-            <a:off x="7891272" y="4169664"/>
-            <a:ext cx="826008" cy="310896"/>
-          </a:xfrm>
-          <a:prstGeom prst="rect">
-            <a:avLst/>
-          </a:prstGeom>
-          <a:noFill/>
-          <a:ln/>
-        </p:spPr>
-        <p:txBody>
-          <a:bodyPr wrap="square" lIns="0" tIns="0" rIns="0" bIns="0" rtlCol="0" anchor="ctr">
+            <a:off x="8211312" y="3941064"/>
+            <a:ext cx="2734056" cy="256032"/>
+          </a:xfrm>
+          <a:prstGeom prst="rect">
+            <a:avLst/>
+          </a:prstGeom>
+          <a:noFill/>
+          <a:ln/>
+        </p:spPr>
+        <p:txBody>
+          <a:bodyPr wrap="square" lIns="0" tIns="0" rIns="0" bIns="0" rtlCol="0" anchor="ctr"/>
+          <a:lstStyle/>
+          <a:p>
+            <a:pPr indent="0" marL="0">
+              <a:buNone/>
+            </a:pPr>
+            <a:r>
+              <a:rPr lang="en-US" sz="1300" b="1" dirty="0">
+                <a:solidFill>
+                  <a:srgbClr val="0068B7"/>
+                </a:solidFill>
+                <a:latin typeface="Aptos" pitchFamily="34" charset="0"/>
+                <a:ea typeface="Aptos" pitchFamily="34" charset="-122"/>
+                <a:cs typeface="Aptos" pitchFamily="34" charset="-120"/>
+              </a:rPr>
+              <a:t>Tool selection cues</a:t>
+            </a:r>
+            <a:endParaRPr lang="en-US" sz="1300" dirty="0"/>
+          </a:p>
+        </p:txBody>
+      </p:sp>
+      <p:sp>
+        <p:nvSpPr>
+          <p:cNvPr id="15" name="Text 13"/>
+          <p:cNvSpPr/>
+          <p:nvPr/>
+        </p:nvSpPr>
+        <p:spPr>
+          <a:xfrm>
+            <a:off x="8229600" y="4306824"/>
+            <a:ext cx="2679192" cy="941832"/>
+          </a:xfrm>
+          <a:prstGeom prst="rect">
+            <a:avLst/>
+          </a:prstGeom>
+          <a:noFill/>
+          <a:ln/>
+        </p:spPr>
+        <p:txBody>
+          <a:bodyPr wrap="square" lIns="254" tIns="254" rIns="254" bIns="254" rtlCol="0" anchor="t">
             <a:normAutofit/>
           </a:bodyPr>
           <a:lstStyle/>
           <a:p>
-            <a:pPr algn="ctr" indent="0" marL="0">
-              <a:buNone/>
-            </a:pPr>
-            <a:r>
-              <a:rPr lang="en-US" sz="1500" b="1" dirty="0">
-                <a:solidFill>
-                  <a:srgbClr val="FFFFFF"/>
-                </a:solidFill>
-                <a:latin typeface="Aptos" pitchFamily="34" charset="0"/>
-                <a:ea typeface="Aptos" pitchFamily="34" charset="-122"/>
-                <a:cs typeface="Aptos" pitchFamily="34" charset="-120"/>
-              </a:rPr>
-              <a:t>Concept</a:t>
-            </a:r>
-            <a:endParaRPr lang="en-US" sz="1500" dirty="0"/>
-          </a:p>
-        </p:txBody>
-      </p:sp>
-      <p:sp>
-        <p:nvSpPr>
-          <p:cNvPr id="15" name="Shape 13"/>
-          <p:cNvSpPr/>
-          <p:nvPr/>
-        </p:nvSpPr>
-        <p:spPr>
-          <a:xfrm>
-            <a:off x="9046464" y="3977640"/>
-            <a:ext cx="972312" cy="749808"/>
-          </a:xfrm>
-          <a:prstGeom prst="roundRect">
-            <a:avLst>
-              <a:gd name="adj" fmla="val 14634"/>
-            </a:avLst>
-          </a:prstGeom>
-          <a:solidFill>
-            <a:srgbClr val="2F8A28"/>
-          </a:solidFill>
-          <a:ln w="12700">
-            <a:solidFill>
-              <a:srgbClr val="2F8A28"/>
-            </a:solidFill>
-            <a:prstDash val="solid"/>
-          </a:ln>
-        </p:spPr>
-      </p:sp>
-      <p:sp>
-        <p:nvSpPr>
-          <p:cNvPr id="16" name="Text 14"/>
-          <p:cNvSpPr/>
-          <p:nvPr/>
-        </p:nvSpPr>
-        <p:spPr>
-          <a:xfrm>
-            <a:off x="9119616" y="4169664"/>
-            <a:ext cx="826008" cy="310896"/>
-          </a:xfrm>
-          <a:prstGeom prst="rect">
-            <a:avLst/>
-          </a:prstGeom>
-          <a:noFill/>
-          <a:ln/>
-        </p:spPr>
-        <p:txBody>
-          <a:bodyPr wrap="square" lIns="0" tIns="0" rIns="0" bIns="0" rtlCol="0" anchor="ctr">
-            <a:normAutofit/>
-          </a:bodyPr>
-          <a:lstStyle/>
-          <a:p>
-            <a:pPr algn="ctr" indent="0" marL="0">
-              <a:buNone/>
-            </a:pPr>
-            <a:r>
-              <a:rPr lang="en-US" sz="1500" b="1" dirty="0">
-                <a:solidFill>
-                  <a:srgbClr val="FFFFFF"/>
-                </a:solidFill>
-                <a:latin typeface="Aptos" pitchFamily="34" charset="0"/>
-                <a:ea typeface="Aptos" pitchFamily="34" charset="-122"/>
-                <a:cs typeface="Aptos" pitchFamily="34" charset="-120"/>
-              </a:rPr>
-              <a:t>Tool</a:t>
-            </a:r>
-            <a:endParaRPr lang="en-US" sz="1500" dirty="0"/>
-          </a:p>
-        </p:txBody>
-      </p:sp>
-      <p:sp>
-        <p:nvSpPr>
-          <p:cNvPr id="17" name="Shape 15"/>
-          <p:cNvSpPr/>
-          <p:nvPr/>
-        </p:nvSpPr>
-        <p:spPr>
-          <a:xfrm>
-            <a:off x="10274808" y="3977640"/>
-            <a:ext cx="972312" cy="749808"/>
-          </a:xfrm>
-          <a:prstGeom prst="roundRect">
-            <a:avLst>
-              <a:gd name="adj" fmla="val 14634"/>
-            </a:avLst>
-          </a:prstGeom>
-          <a:solidFill>
-            <a:srgbClr val="D69A2D"/>
-          </a:solidFill>
-          <a:ln w="12700">
-            <a:solidFill>
-              <a:srgbClr val="D69A2D"/>
-            </a:solidFill>
-            <a:prstDash val="solid"/>
-          </a:ln>
-        </p:spPr>
-      </p:sp>
-      <p:sp>
-        <p:nvSpPr>
-          <p:cNvPr id="18" name="Text 16"/>
-          <p:cNvSpPr/>
-          <p:nvPr/>
-        </p:nvSpPr>
-        <p:spPr>
-          <a:xfrm>
-            <a:off x="10347960" y="4169664"/>
-            <a:ext cx="826008" cy="310896"/>
-          </a:xfrm>
-          <a:prstGeom prst="rect">
-            <a:avLst/>
-          </a:prstGeom>
-          <a:noFill/>
-          <a:ln/>
-        </p:spPr>
-        <p:txBody>
-          <a:bodyPr wrap="square" lIns="0" tIns="0" rIns="0" bIns="0" rtlCol="0" anchor="ctr">
-            <a:normAutofit/>
-          </a:bodyPr>
-          <a:lstStyle/>
-          <a:p>
-            <a:pPr algn="ctr" indent="0" marL="0">
-              <a:buNone/>
-            </a:pPr>
-            <a:r>
-              <a:rPr lang="en-US" sz="1500" b="1" dirty="0">
-                <a:solidFill>
-                  <a:srgbClr val="FFFFFF"/>
-                </a:solidFill>
-                <a:latin typeface="Aptos" pitchFamily="34" charset="0"/>
-                <a:ea typeface="Aptos" pitchFamily="34" charset="-122"/>
-                <a:cs typeface="Aptos" pitchFamily="34" charset="-120"/>
-              </a:rPr>
-              <a:t>Artifact</a:t>
-            </a:r>
-            <a:endParaRPr lang="en-US" sz="1500" dirty="0"/>
+            <a:r>
+              <a:rPr lang="en-US" sz="1380" dirty="0">
+                <a:solidFill>
+                  <a:srgbClr val="17364A"/>
+                </a:solidFill>
+                <a:latin typeface="Aptos" pitchFamily="34" charset="0"/>
+                <a:ea typeface="Aptos" pitchFamily="34" charset="-122"/>
+                <a:cs typeface="Aptos" pitchFamily="34" charset="-120"/>
+              </a:rPr>
+              <a:t>Use a tool when no comparable local process exists.</a:t>
+            </a:r>
+            <a:endParaRPr lang="en-US" sz="1380" dirty="0"/>
+          </a:p>
+          <a:p>
+            <a:r>
+              <a:rPr lang="en-US" sz="1380" dirty="0">
+                <a:solidFill>
+                  <a:srgbClr val="17364A"/>
+                </a:solidFill>
+                <a:latin typeface="Aptos" pitchFamily="34" charset="0"/>
+                <a:ea typeface="Aptos" pitchFamily="34" charset="-122"/>
+                <a:cs typeface="Aptos" pitchFamily="34" charset="-120"/>
+              </a:rPr>
+              <a:t>Adapt existing department templates when they already fit the purpose.</a:t>
+            </a:r>
+            <a:endParaRPr lang="en-US" sz="1380" dirty="0"/>
+          </a:p>
+          <a:p>
+            <a:r>
+              <a:rPr lang="en-US" sz="1380" dirty="0">
+                <a:solidFill>
+                  <a:srgbClr val="17364A"/>
+                </a:solidFill>
+                <a:latin typeface="Aptos" pitchFamily="34" charset="0"/>
+                <a:ea typeface="Aptos" pitchFamily="34" charset="-122"/>
+                <a:cs typeface="Aptos" pitchFamily="34" charset="-120"/>
+              </a:rPr>
+              <a:t>Save the completed artifact as evidence of the decision.</a:t>
+            </a:r>
+            <a:endParaRPr lang="en-US" sz="1380" dirty="0"/>
           </a:p>
         </p:txBody>
       </p:sp>
@@ -15185,13 +14222,11 @@
             </a:avLst>
           </a:prstGeom>
           <a:solidFill>
-            <a:srgbClr val="FFFFFF">
-              <a:alpha val="88000"/>
-            </a:srgbClr>
+            <a:srgbClr val="FFFFFF"/>
           </a:solidFill>
           <a:ln w="12700">
             <a:solidFill>
-              <a:srgbClr val="D6E8F2"/>
+              <a:srgbClr val="B9D7E6"/>
             </a:solidFill>
             <a:prstDash val="solid"/>
           </a:ln>
@@ -15199,169 +14234,112 @@
       </p:sp>
       <p:sp>
         <p:nvSpPr>
-          <p:cNvPr id="14" name="Shape 12"/>
-          <p:cNvSpPr/>
-          <p:nvPr/>
-        </p:nvSpPr>
-        <p:spPr>
-          <a:xfrm>
-            <a:off x="8138160" y="3474720"/>
-            <a:ext cx="256032" cy="411480"/>
-          </a:xfrm>
-          <a:prstGeom prst="rect">
-            <a:avLst/>
-          </a:prstGeom>
-          <a:solidFill>
-            <a:srgbClr val="0068B7"/>
-          </a:solidFill>
-          <a:ln w="12700">
-            <a:solidFill>
-              <a:srgbClr val="0068B7"/>
-            </a:solidFill>
-            <a:prstDash val="solid"/>
-          </a:ln>
-        </p:spPr>
-      </p:sp>
-      <p:sp>
-        <p:nvSpPr>
-          <p:cNvPr id="15" name="Shape 13"/>
-          <p:cNvSpPr/>
-          <p:nvPr/>
-        </p:nvSpPr>
-        <p:spPr>
-          <a:xfrm>
-            <a:off x="8577072" y="3172968"/>
-            <a:ext cx="256032" cy="713232"/>
-          </a:xfrm>
-          <a:prstGeom prst="rect">
-            <a:avLst/>
-          </a:prstGeom>
-          <a:solidFill>
-            <a:srgbClr val="2F8A28"/>
-          </a:solidFill>
-          <a:ln w="12700">
-            <a:solidFill>
-              <a:srgbClr val="2F8A28"/>
-            </a:solidFill>
-            <a:prstDash val="solid"/>
-          </a:ln>
-        </p:spPr>
+          <p:cNvPr id="14" name="Text 12"/>
+          <p:cNvSpPr/>
+          <p:nvPr/>
+        </p:nvSpPr>
+        <p:spPr>
+          <a:xfrm>
+            <a:off x="7799832" y="2935224"/>
+            <a:ext cx="3145536" cy="256032"/>
+          </a:xfrm>
+          <a:prstGeom prst="rect">
+            <a:avLst/>
+          </a:prstGeom>
+          <a:noFill/>
+          <a:ln/>
+        </p:spPr>
+        <p:txBody>
+          <a:bodyPr wrap="square" lIns="0" tIns="0" rIns="0" bIns="0" rtlCol="0" anchor="ctr"/>
+          <a:lstStyle/>
+          <a:p>
+            <a:pPr indent="0" marL="0">
+              <a:buNone/>
+            </a:pPr>
+            <a:r>
+              <a:rPr lang="en-US" sz="1300" b="1" dirty="0">
+                <a:solidFill>
+                  <a:srgbClr val="0068B7"/>
+                </a:solidFill>
+                <a:latin typeface="Aptos" pitchFamily="34" charset="0"/>
+                <a:ea typeface="Aptos" pitchFamily="34" charset="-122"/>
+                <a:cs typeface="Aptos" pitchFamily="34" charset="-120"/>
+              </a:rPr>
+              <a:t>Concept checkpoints</a:t>
+            </a:r>
+            <a:endParaRPr lang="en-US" sz="1300" dirty="0"/>
+          </a:p>
+        </p:txBody>
+      </p:sp>
+      <p:sp>
+        <p:nvSpPr>
+          <p:cNvPr id="15" name="Text 13"/>
+          <p:cNvSpPr/>
+          <p:nvPr/>
+        </p:nvSpPr>
+        <p:spPr>
+          <a:xfrm>
+            <a:off x="7818120" y="3300984"/>
+            <a:ext cx="3090672" cy="877824"/>
+          </a:xfrm>
+          <a:prstGeom prst="rect">
+            <a:avLst/>
+          </a:prstGeom>
+          <a:noFill/>
+          <a:ln/>
+        </p:spPr>
+        <p:txBody>
+          <a:bodyPr wrap="square" lIns="254" tIns="254" rIns="254" bIns="254" rtlCol="0" anchor="t">
+            <a:normAutofit/>
+          </a:bodyPr>
+          <a:lstStyle/>
+          <a:p>
+            <a:r>
+              <a:rPr lang="en-US" sz="1380" dirty="0">
+                <a:solidFill>
+                  <a:srgbClr val="17364A"/>
+                </a:solidFill>
+                <a:latin typeface="Aptos" pitchFamily="34" charset="0"/>
+                <a:ea typeface="Aptos" pitchFamily="34" charset="-122"/>
+                <a:cs typeface="Aptos" pitchFamily="34" charset="-120"/>
+              </a:rPr>
+              <a:t>Describe the major steps in public health data pipelines, including ingestion, validation,.</a:t>
+            </a:r>
+            <a:endParaRPr lang="en-US" sz="1380" dirty="0"/>
+          </a:p>
+          <a:p>
+            <a:r>
+              <a:rPr lang="en-US" sz="1380" dirty="0">
+                <a:solidFill>
+                  <a:srgbClr val="17364A"/>
+                </a:solidFill>
+                <a:latin typeface="Aptos" pitchFamily="34" charset="0"/>
+                <a:ea typeface="Aptos" pitchFamily="34" charset="-122"/>
+                <a:cs typeface="Aptos" pitchFamily="34" charset="-120"/>
+              </a:rPr>
+              <a:t>Identify metadata, lineage, version control, and audit needs for AI-supported workflows.</a:t>
+            </a:r>
+            <a:endParaRPr lang="en-US" sz="1380" dirty="0"/>
+          </a:p>
+          <a:p>
+            <a:r>
+              <a:rPr lang="en-US" sz="1380" dirty="0">
+                <a:solidFill>
+                  <a:srgbClr val="17364A"/>
+                </a:solidFill>
+                <a:latin typeface="Aptos" pitchFamily="34" charset="0"/>
+                <a:ea typeface="Aptos" pitchFamily="34" charset="-122"/>
+                <a:cs typeface="Aptos" pitchFamily="34" charset="-120"/>
+              </a:rPr>
+              <a:t>Produce a data pipeline readiness checklist for a public health AI use case.</a:t>
+            </a:r>
+            <a:endParaRPr lang="en-US" sz="1380" dirty="0"/>
+          </a:p>
+        </p:txBody>
       </p:sp>
       <p:sp>
         <p:nvSpPr>
           <p:cNvPr id="16" name="Shape 14"/>
-          <p:cNvSpPr/>
-          <p:nvPr/>
-        </p:nvSpPr>
-        <p:spPr>
-          <a:xfrm>
-            <a:off x="9015984" y="2880360"/>
-            <a:ext cx="256032" cy="1005840"/>
-          </a:xfrm>
-          <a:prstGeom prst="rect">
-            <a:avLst/>
-          </a:prstGeom>
-          <a:solidFill>
-            <a:srgbClr val="D69A2D"/>
-          </a:solidFill>
-          <a:ln w="12700">
-            <a:solidFill>
-              <a:srgbClr val="D69A2D"/>
-            </a:solidFill>
-            <a:prstDash val="solid"/>
-          </a:ln>
-        </p:spPr>
-      </p:sp>
-      <p:sp>
-        <p:nvSpPr>
-          <p:cNvPr id="17" name="Shape 15"/>
-          <p:cNvSpPr/>
-          <p:nvPr/>
-        </p:nvSpPr>
-        <p:spPr>
-          <a:xfrm>
-            <a:off x="9454896" y="3319272"/>
-            <a:ext cx="256032" cy="566928"/>
-          </a:xfrm>
-          <a:prstGeom prst="rect">
-            <a:avLst/>
-          </a:prstGeom>
-          <a:solidFill>
-            <a:srgbClr val="6A4CA3"/>
-          </a:solidFill>
-          <a:ln w="12700">
-            <a:solidFill>
-              <a:srgbClr val="6A4CA3"/>
-            </a:solidFill>
-            <a:prstDash val="solid"/>
-          </a:ln>
-        </p:spPr>
-      </p:sp>
-      <p:sp>
-        <p:nvSpPr>
-          <p:cNvPr id="18" name="Shape 16"/>
-          <p:cNvSpPr/>
-          <p:nvPr/>
-        </p:nvSpPr>
-        <p:spPr>
-          <a:xfrm>
-            <a:off x="8019288" y="3886200"/>
-            <a:ext cx="2706624" cy="0"/>
-          </a:xfrm>
-          <a:prstGeom prst="line">
-            <a:avLst/>
-          </a:prstGeom>
-          <a:noFill/>
-          <a:ln w="15240">
-            <a:solidFill>
-              <a:srgbClr val="003A63"/>
-            </a:solidFill>
-            <a:prstDash val="solid"/>
-          </a:ln>
-        </p:spPr>
-      </p:sp>
-      <p:sp>
-        <p:nvSpPr>
-          <p:cNvPr id="19" name="Text 17"/>
-          <p:cNvSpPr/>
-          <p:nvPr/>
-        </p:nvSpPr>
-        <p:spPr>
-          <a:xfrm>
-            <a:off x="7863840" y="3017520"/>
-            <a:ext cx="3017520" cy="201168"/>
-          </a:xfrm>
-          <a:prstGeom prst="rect">
-            <a:avLst/>
-          </a:prstGeom>
-          <a:noFill/>
-          <a:ln/>
-        </p:spPr>
-        <p:txBody>
-          <a:bodyPr wrap="square" lIns="0" tIns="0" rIns="0" bIns="0" rtlCol="0" anchor="ctr"/>
-          <a:lstStyle/>
-          <a:p>
-            <a:pPr algn="ctr" indent="0" marL="0">
-              <a:buNone/>
-            </a:pPr>
-            <a:r>
-              <a:rPr lang="en-US" sz="1050" b="1" dirty="0">
-                <a:solidFill>
-                  <a:srgbClr val="003A63"/>
-                </a:solidFill>
-                <a:latin typeface="Aptos" pitchFamily="34" charset="0"/>
-                <a:ea typeface="Aptos" pitchFamily="34" charset="-122"/>
-                <a:cs typeface="Aptos" pitchFamily="34" charset="-120"/>
-              </a:rPr>
-              <a:t>Measure and monitor</a:t>
-            </a:r>
-            <a:endParaRPr lang="en-US" sz="1050" dirty="0"/>
-          </a:p>
-        </p:txBody>
-      </p:sp>
-      <p:sp>
-        <p:nvSpPr>
-          <p:cNvPr id="20" name="Shape 18"/>
           <p:cNvSpPr/>
           <p:nvPr/>
         </p:nvSpPr>
@@ -15388,7 +14366,7 @@
       </p:sp>
       <p:sp>
         <p:nvSpPr>
-          <p:cNvPr id="21" name="Text 19"/>
+          <p:cNvPr id="17" name="Text 15"/>
           <p:cNvSpPr/>
           <p:nvPr/>
         </p:nvSpPr>
@@ -15427,7 +14405,7 @@
       </p:sp>
       <p:sp>
         <p:nvSpPr>
-          <p:cNvPr id="22" name="Text 20"/>
+          <p:cNvPr id="18" name="Text 16"/>
           <p:cNvSpPr/>
           <p:nvPr/>
         </p:nvSpPr>
@@ -15935,13 +14913,11 @@
             </a:avLst>
           </a:prstGeom>
           <a:solidFill>
-            <a:srgbClr val="FFFFFF">
-              <a:alpha val="88000"/>
-            </a:srgbClr>
+            <a:srgbClr val="FFFFFF"/>
           </a:solidFill>
           <a:ln w="12700">
             <a:solidFill>
-              <a:srgbClr val="D6E8F2"/>
+              <a:srgbClr val="B9D7E6"/>
             </a:solidFill>
             <a:prstDash val="solid"/>
           </a:ln>
@@ -15949,169 +14925,112 @@
       </p:sp>
       <p:sp>
         <p:nvSpPr>
-          <p:cNvPr id="14" name="Shape 12"/>
-          <p:cNvSpPr/>
-          <p:nvPr/>
-        </p:nvSpPr>
-        <p:spPr>
-          <a:xfrm>
-            <a:off x="8138160" y="3474720"/>
-            <a:ext cx="256032" cy="411480"/>
-          </a:xfrm>
-          <a:prstGeom prst="rect">
-            <a:avLst/>
-          </a:prstGeom>
-          <a:solidFill>
-            <a:srgbClr val="0068B7"/>
-          </a:solidFill>
-          <a:ln w="12700">
-            <a:solidFill>
-              <a:srgbClr val="0068B7"/>
-            </a:solidFill>
-            <a:prstDash val="solid"/>
-          </a:ln>
-        </p:spPr>
-      </p:sp>
-      <p:sp>
-        <p:nvSpPr>
-          <p:cNvPr id="15" name="Shape 13"/>
-          <p:cNvSpPr/>
-          <p:nvPr/>
-        </p:nvSpPr>
-        <p:spPr>
-          <a:xfrm>
-            <a:off x="8577072" y="3172968"/>
-            <a:ext cx="256032" cy="713232"/>
-          </a:xfrm>
-          <a:prstGeom prst="rect">
-            <a:avLst/>
-          </a:prstGeom>
-          <a:solidFill>
-            <a:srgbClr val="2F8A28"/>
-          </a:solidFill>
-          <a:ln w="12700">
-            <a:solidFill>
-              <a:srgbClr val="2F8A28"/>
-            </a:solidFill>
-            <a:prstDash val="solid"/>
-          </a:ln>
-        </p:spPr>
+          <p:cNvPr id="14" name="Text 12"/>
+          <p:cNvSpPr/>
+          <p:nvPr/>
+        </p:nvSpPr>
+        <p:spPr>
+          <a:xfrm>
+            <a:off x="7799832" y="2935224"/>
+            <a:ext cx="3145536" cy="256032"/>
+          </a:xfrm>
+          <a:prstGeom prst="rect">
+            <a:avLst/>
+          </a:prstGeom>
+          <a:noFill/>
+          <a:ln/>
+        </p:spPr>
+        <p:txBody>
+          <a:bodyPr wrap="square" lIns="0" tIns="0" rIns="0" bIns="0" rtlCol="0" anchor="ctr"/>
+          <a:lstStyle/>
+          <a:p>
+            <a:pPr indent="0" marL="0">
+              <a:buNone/>
+            </a:pPr>
+            <a:r>
+              <a:rPr lang="en-US" sz="1300" b="1" dirty="0">
+                <a:solidFill>
+                  <a:srgbClr val="0068B7"/>
+                </a:solidFill>
+                <a:latin typeface="Aptos" pitchFamily="34" charset="0"/>
+                <a:ea typeface="Aptos" pitchFamily="34" charset="-122"/>
+                <a:cs typeface="Aptos" pitchFamily="34" charset="-120"/>
+              </a:rPr>
+              <a:t>Concept checkpoints</a:t>
+            </a:r>
+            <a:endParaRPr lang="en-US" sz="1300" dirty="0"/>
+          </a:p>
+        </p:txBody>
+      </p:sp>
+      <p:sp>
+        <p:nvSpPr>
+          <p:cNvPr id="15" name="Text 13"/>
+          <p:cNvSpPr/>
+          <p:nvPr/>
+        </p:nvSpPr>
+        <p:spPr>
+          <a:xfrm>
+            <a:off x="7818120" y="3300984"/>
+            <a:ext cx="3090672" cy="877824"/>
+          </a:xfrm>
+          <a:prstGeom prst="rect">
+            <a:avLst/>
+          </a:prstGeom>
+          <a:noFill/>
+          <a:ln/>
+        </p:spPr>
+        <p:txBody>
+          <a:bodyPr wrap="square" lIns="254" tIns="254" rIns="254" bIns="254" rtlCol="0" anchor="t">
+            <a:normAutofit/>
+          </a:bodyPr>
+          <a:lstStyle/>
+          <a:p>
+            <a:r>
+              <a:rPr lang="en-US" sz="1380" dirty="0">
+                <a:solidFill>
+                  <a:srgbClr val="17364A"/>
+                </a:solidFill>
+                <a:latin typeface="Aptos" pitchFamily="34" charset="0"/>
+                <a:ea typeface="Aptos" pitchFamily="34" charset="-122"/>
+                <a:cs typeface="Aptos" pitchFamily="34" charset="-120"/>
+              </a:rPr>
+              <a:t>Data pipelines are the operational pathways that move public health data from source.</a:t>
+            </a:r>
+            <a:endParaRPr lang="en-US" sz="1380" dirty="0"/>
+          </a:p>
+          <a:p>
+            <a:r>
+              <a:rPr lang="en-US" sz="1380" dirty="0">
+                <a:solidFill>
+                  <a:srgbClr val="17364A"/>
+                </a:solidFill>
+                <a:latin typeface="Aptos" pitchFamily="34" charset="0"/>
+                <a:ea typeface="Aptos" pitchFamily="34" charset="-122"/>
+                <a:cs typeface="Aptos" pitchFamily="34" charset="-120"/>
+              </a:rPr>
+              <a:t>A model that classifies cases, summarizes laboratory reports, or predicts service demand.</a:t>
+            </a:r>
+            <a:endParaRPr lang="en-US" sz="1380" dirty="0"/>
+          </a:p>
+          <a:p>
+            <a:r>
+              <a:rPr lang="en-US" sz="1380" dirty="0">
+                <a:solidFill>
+                  <a:srgbClr val="17364A"/>
+                </a:solidFill>
+                <a:latin typeface="Aptos" pitchFamily="34" charset="0"/>
+                <a:ea typeface="Aptos" pitchFamily="34" charset="-122"/>
+                <a:cs typeface="Aptos" pitchFamily="34" charset="-120"/>
+              </a:rPr>
+              <a:t>This module helps learners understand the pipeline steps that shape AI outputs and the.</a:t>
+            </a:r>
+            <a:endParaRPr lang="en-US" sz="1380" dirty="0"/>
+          </a:p>
+        </p:txBody>
       </p:sp>
       <p:sp>
         <p:nvSpPr>
           <p:cNvPr id="16" name="Shape 14"/>
-          <p:cNvSpPr/>
-          <p:nvPr/>
-        </p:nvSpPr>
-        <p:spPr>
-          <a:xfrm>
-            <a:off x="9015984" y="2880360"/>
-            <a:ext cx="256032" cy="1005840"/>
-          </a:xfrm>
-          <a:prstGeom prst="rect">
-            <a:avLst/>
-          </a:prstGeom>
-          <a:solidFill>
-            <a:srgbClr val="D69A2D"/>
-          </a:solidFill>
-          <a:ln w="12700">
-            <a:solidFill>
-              <a:srgbClr val="D69A2D"/>
-            </a:solidFill>
-            <a:prstDash val="solid"/>
-          </a:ln>
-        </p:spPr>
-      </p:sp>
-      <p:sp>
-        <p:nvSpPr>
-          <p:cNvPr id="17" name="Shape 15"/>
-          <p:cNvSpPr/>
-          <p:nvPr/>
-        </p:nvSpPr>
-        <p:spPr>
-          <a:xfrm>
-            <a:off x="9454896" y="3319272"/>
-            <a:ext cx="256032" cy="566928"/>
-          </a:xfrm>
-          <a:prstGeom prst="rect">
-            <a:avLst/>
-          </a:prstGeom>
-          <a:solidFill>
-            <a:srgbClr val="6A4CA3"/>
-          </a:solidFill>
-          <a:ln w="12700">
-            <a:solidFill>
-              <a:srgbClr val="6A4CA3"/>
-            </a:solidFill>
-            <a:prstDash val="solid"/>
-          </a:ln>
-        </p:spPr>
-      </p:sp>
-      <p:sp>
-        <p:nvSpPr>
-          <p:cNvPr id="18" name="Shape 16"/>
-          <p:cNvSpPr/>
-          <p:nvPr/>
-        </p:nvSpPr>
-        <p:spPr>
-          <a:xfrm>
-            <a:off x="8019288" y="3886200"/>
-            <a:ext cx="2706624" cy="0"/>
-          </a:xfrm>
-          <a:prstGeom prst="line">
-            <a:avLst/>
-          </a:prstGeom>
-          <a:noFill/>
-          <a:ln w="15240">
-            <a:solidFill>
-              <a:srgbClr val="003A63"/>
-            </a:solidFill>
-            <a:prstDash val="solid"/>
-          </a:ln>
-        </p:spPr>
-      </p:sp>
-      <p:sp>
-        <p:nvSpPr>
-          <p:cNvPr id="19" name="Text 17"/>
-          <p:cNvSpPr/>
-          <p:nvPr/>
-        </p:nvSpPr>
-        <p:spPr>
-          <a:xfrm>
-            <a:off x="7863840" y="3017520"/>
-            <a:ext cx="3017520" cy="201168"/>
-          </a:xfrm>
-          <a:prstGeom prst="rect">
-            <a:avLst/>
-          </a:prstGeom>
-          <a:noFill/>
-          <a:ln/>
-        </p:spPr>
-        <p:txBody>
-          <a:bodyPr wrap="square" lIns="0" tIns="0" rIns="0" bIns="0" rtlCol="0" anchor="ctr"/>
-          <a:lstStyle/>
-          <a:p>
-            <a:pPr algn="ctr" indent="0" marL="0">
-              <a:buNone/>
-            </a:pPr>
-            <a:r>
-              <a:rPr lang="en-US" sz="1050" b="1" dirty="0">
-                <a:solidFill>
-                  <a:srgbClr val="003A63"/>
-                </a:solidFill>
-                <a:latin typeface="Aptos" pitchFamily="34" charset="0"/>
-                <a:ea typeface="Aptos" pitchFamily="34" charset="-122"/>
-                <a:cs typeface="Aptos" pitchFamily="34" charset="-120"/>
-              </a:rPr>
-              <a:t>Measure and monitor</a:t>
-            </a:r>
-            <a:endParaRPr lang="en-US" sz="1050" dirty="0"/>
-          </a:p>
-        </p:txBody>
-      </p:sp>
-      <p:sp>
-        <p:nvSpPr>
-          <p:cNvPr id="20" name="Shape 18"/>
           <p:cNvSpPr/>
           <p:nvPr/>
         </p:nvSpPr>
@@ -16138,7 +15057,7 @@
       </p:sp>
       <p:sp>
         <p:nvSpPr>
-          <p:cNvPr id="21" name="Text 19"/>
+          <p:cNvPr id="17" name="Text 15"/>
           <p:cNvSpPr/>
           <p:nvPr/>
         </p:nvSpPr>
@@ -16177,7 +15096,7 @@
       </p:sp>
       <p:sp>
         <p:nvSpPr>
-          <p:cNvPr id="22" name="Text 20"/>
+          <p:cNvPr id="18" name="Text 16"/>
           <p:cNvSpPr/>
           <p:nvPr/>
         </p:nvSpPr>
@@ -16685,13 +15604,11 @@
             </a:avLst>
           </a:prstGeom>
           <a:solidFill>
-            <a:srgbClr val="FFFFFF">
-              <a:alpha val="88000"/>
-            </a:srgbClr>
+            <a:srgbClr val="FFFFFF"/>
           </a:solidFill>
           <a:ln w="12700">
             <a:solidFill>
-              <a:srgbClr val="D6E8F2"/>
+              <a:srgbClr val="B9D7E6"/>
             </a:solidFill>
             <a:prstDash val="solid"/>
           </a:ln>
@@ -16699,169 +15616,112 @@
       </p:sp>
       <p:sp>
         <p:nvSpPr>
-          <p:cNvPr id="14" name="Shape 12"/>
-          <p:cNvSpPr/>
-          <p:nvPr/>
-        </p:nvSpPr>
-        <p:spPr>
-          <a:xfrm>
-            <a:off x="8138160" y="3474720"/>
-            <a:ext cx="256032" cy="411480"/>
-          </a:xfrm>
-          <a:prstGeom prst="rect">
-            <a:avLst/>
-          </a:prstGeom>
-          <a:solidFill>
-            <a:srgbClr val="0068B7"/>
-          </a:solidFill>
-          <a:ln w="12700">
-            <a:solidFill>
-              <a:srgbClr val="0068B7"/>
-            </a:solidFill>
-            <a:prstDash val="solid"/>
-          </a:ln>
-        </p:spPr>
-      </p:sp>
-      <p:sp>
-        <p:nvSpPr>
-          <p:cNvPr id="15" name="Shape 13"/>
-          <p:cNvSpPr/>
-          <p:nvPr/>
-        </p:nvSpPr>
-        <p:spPr>
-          <a:xfrm>
-            <a:off x="8577072" y="3172968"/>
-            <a:ext cx="256032" cy="713232"/>
-          </a:xfrm>
-          <a:prstGeom prst="rect">
-            <a:avLst/>
-          </a:prstGeom>
-          <a:solidFill>
-            <a:srgbClr val="2F8A28"/>
-          </a:solidFill>
-          <a:ln w="12700">
-            <a:solidFill>
-              <a:srgbClr val="2F8A28"/>
-            </a:solidFill>
-            <a:prstDash val="solid"/>
-          </a:ln>
-        </p:spPr>
+          <p:cNvPr id="14" name="Text 12"/>
+          <p:cNvSpPr/>
+          <p:nvPr/>
+        </p:nvSpPr>
+        <p:spPr>
+          <a:xfrm>
+            <a:off x="7799832" y="2935224"/>
+            <a:ext cx="3145536" cy="256032"/>
+          </a:xfrm>
+          <a:prstGeom prst="rect">
+            <a:avLst/>
+          </a:prstGeom>
+          <a:noFill/>
+          <a:ln/>
+        </p:spPr>
+        <p:txBody>
+          <a:bodyPr wrap="square" lIns="0" tIns="0" rIns="0" bIns="0" rtlCol="0" anchor="ctr"/>
+          <a:lstStyle/>
+          <a:p>
+            <a:pPr indent="0" marL="0">
+              <a:buNone/>
+            </a:pPr>
+            <a:r>
+              <a:rPr lang="en-US" sz="1300" b="1" dirty="0">
+                <a:solidFill>
+                  <a:srgbClr val="0068B7"/>
+                </a:solidFill>
+                <a:latin typeface="Aptos" pitchFamily="34" charset="0"/>
+                <a:ea typeface="Aptos" pitchFamily="34" charset="-122"/>
+                <a:cs typeface="Aptos" pitchFamily="34" charset="-120"/>
+              </a:rPr>
+              <a:t>Concept checkpoints</a:t>
+            </a:r>
+            <a:endParaRPr lang="en-US" sz="1300" dirty="0"/>
+          </a:p>
+        </p:txBody>
+      </p:sp>
+      <p:sp>
+        <p:nvSpPr>
+          <p:cNvPr id="15" name="Text 13"/>
+          <p:cNvSpPr/>
+          <p:nvPr/>
+        </p:nvSpPr>
+        <p:spPr>
+          <a:xfrm>
+            <a:off x="7818120" y="3300984"/>
+            <a:ext cx="3090672" cy="877824"/>
+          </a:xfrm>
+          <a:prstGeom prst="rect">
+            <a:avLst/>
+          </a:prstGeom>
+          <a:noFill/>
+          <a:ln/>
+        </p:spPr>
+        <p:txBody>
+          <a:bodyPr wrap="square" lIns="254" tIns="254" rIns="254" bIns="254" rtlCol="0" anchor="t">
+            <a:normAutofit/>
+          </a:bodyPr>
+          <a:lstStyle/>
+          <a:p>
+            <a:r>
+              <a:rPr lang="en-US" sz="1380" dirty="0">
+                <a:solidFill>
+                  <a:srgbClr val="17364A"/>
+                </a:solidFill>
+                <a:latin typeface="Aptos" pitchFamily="34" charset="0"/>
+                <a:ea typeface="Aptos" pitchFamily="34" charset="-122"/>
+                <a:cs typeface="Aptos" pitchFamily="34" charset="-120"/>
+              </a:rPr>
+              <a:t>A delayed file, changed field name, failed interface, missing date, duplicate record, or.</a:t>
+            </a:r>
+            <a:endParaRPr lang="en-US" sz="1380" dirty="0"/>
+          </a:p>
+          <a:p>
+            <a:r>
+              <a:rPr lang="en-US" sz="1380" dirty="0">
+                <a:solidFill>
+                  <a:srgbClr val="17364A"/>
+                </a:solidFill>
+                <a:latin typeface="Aptos" pitchFamily="34" charset="0"/>
+                <a:ea typeface="Aptos" pitchFamily="34" charset="-122"/>
+                <a:cs typeface="Aptos" pitchFamily="34" charset="-120"/>
+              </a:rPr>
+              <a:t>The AI tool may continue generating fluent summaries or confident classifications even.</a:t>
+            </a:r>
+            <a:endParaRPr lang="en-US" sz="1380" dirty="0"/>
+          </a:p>
+          <a:p>
+            <a:r>
+              <a:rPr lang="en-US" sz="1380" dirty="0">
+                <a:solidFill>
+                  <a:srgbClr val="17364A"/>
+                </a:solidFill>
+                <a:latin typeface="Aptos" pitchFamily="34" charset="0"/>
+                <a:ea typeface="Aptos" pitchFamily="34" charset="-122"/>
+                <a:cs typeface="Aptos" pitchFamily="34" charset="-120"/>
+              </a:rPr>
+              <a:t>Public health agencies need pipeline visibility before they rely on AI for operational.</a:t>
+            </a:r>
+            <a:endParaRPr lang="en-US" sz="1380" dirty="0"/>
+          </a:p>
+        </p:txBody>
       </p:sp>
       <p:sp>
         <p:nvSpPr>
           <p:cNvPr id="16" name="Shape 14"/>
-          <p:cNvSpPr/>
-          <p:nvPr/>
-        </p:nvSpPr>
-        <p:spPr>
-          <a:xfrm>
-            <a:off x="9015984" y="2880360"/>
-            <a:ext cx="256032" cy="1005840"/>
-          </a:xfrm>
-          <a:prstGeom prst="rect">
-            <a:avLst/>
-          </a:prstGeom>
-          <a:solidFill>
-            <a:srgbClr val="D69A2D"/>
-          </a:solidFill>
-          <a:ln w="12700">
-            <a:solidFill>
-              <a:srgbClr val="D69A2D"/>
-            </a:solidFill>
-            <a:prstDash val="solid"/>
-          </a:ln>
-        </p:spPr>
-      </p:sp>
-      <p:sp>
-        <p:nvSpPr>
-          <p:cNvPr id="17" name="Shape 15"/>
-          <p:cNvSpPr/>
-          <p:nvPr/>
-        </p:nvSpPr>
-        <p:spPr>
-          <a:xfrm>
-            <a:off x="9454896" y="3319272"/>
-            <a:ext cx="256032" cy="566928"/>
-          </a:xfrm>
-          <a:prstGeom prst="rect">
-            <a:avLst/>
-          </a:prstGeom>
-          <a:solidFill>
-            <a:srgbClr val="6A4CA3"/>
-          </a:solidFill>
-          <a:ln w="12700">
-            <a:solidFill>
-              <a:srgbClr val="6A4CA3"/>
-            </a:solidFill>
-            <a:prstDash val="solid"/>
-          </a:ln>
-        </p:spPr>
-      </p:sp>
-      <p:sp>
-        <p:nvSpPr>
-          <p:cNvPr id="18" name="Shape 16"/>
-          <p:cNvSpPr/>
-          <p:nvPr/>
-        </p:nvSpPr>
-        <p:spPr>
-          <a:xfrm>
-            <a:off x="8019288" y="3886200"/>
-            <a:ext cx="2706624" cy="0"/>
-          </a:xfrm>
-          <a:prstGeom prst="line">
-            <a:avLst/>
-          </a:prstGeom>
-          <a:noFill/>
-          <a:ln w="15240">
-            <a:solidFill>
-              <a:srgbClr val="003A63"/>
-            </a:solidFill>
-            <a:prstDash val="solid"/>
-          </a:ln>
-        </p:spPr>
-      </p:sp>
-      <p:sp>
-        <p:nvSpPr>
-          <p:cNvPr id="19" name="Text 17"/>
-          <p:cNvSpPr/>
-          <p:nvPr/>
-        </p:nvSpPr>
-        <p:spPr>
-          <a:xfrm>
-            <a:off x="7863840" y="3017520"/>
-            <a:ext cx="3017520" cy="201168"/>
-          </a:xfrm>
-          <a:prstGeom prst="rect">
-            <a:avLst/>
-          </a:prstGeom>
-          <a:noFill/>
-          <a:ln/>
-        </p:spPr>
-        <p:txBody>
-          <a:bodyPr wrap="square" lIns="0" tIns="0" rIns="0" bIns="0" rtlCol="0" anchor="ctr"/>
-          <a:lstStyle/>
-          <a:p>
-            <a:pPr algn="ctr" indent="0" marL="0">
-              <a:buNone/>
-            </a:pPr>
-            <a:r>
-              <a:rPr lang="en-US" sz="1050" b="1" dirty="0">
-                <a:solidFill>
-                  <a:srgbClr val="003A63"/>
-                </a:solidFill>
-                <a:latin typeface="Aptos" pitchFamily="34" charset="0"/>
-                <a:ea typeface="Aptos" pitchFamily="34" charset="-122"/>
-                <a:cs typeface="Aptos" pitchFamily="34" charset="-120"/>
-              </a:rPr>
-              <a:t>Measure and monitor</a:t>
-            </a:r>
-            <a:endParaRPr lang="en-US" sz="1050" dirty="0"/>
-          </a:p>
-        </p:txBody>
-      </p:sp>
-      <p:sp>
-        <p:nvSpPr>
-          <p:cNvPr id="20" name="Shape 18"/>
           <p:cNvSpPr/>
           <p:nvPr/>
         </p:nvSpPr>
@@ -16888,7 +15748,7 @@
       </p:sp>
       <p:sp>
         <p:nvSpPr>
-          <p:cNvPr id="21" name="Text 19"/>
+          <p:cNvPr id="17" name="Text 15"/>
           <p:cNvSpPr/>
           <p:nvPr/>
         </p:nvSpPr>
@@ -16927,7 +15787,7 @@
       </p:sp>
       <p:sp>
         <p:nvSpPr>
-          <p:cNvPr id="22" name="Text 20"/>
+          <p:cNvPr id="18" name="Text 16"/>
           <p:cNvSpPr/>
           <p:nvPr/>
         </p:nvSpPr>
@@ -17435,13 +16295,11 @@
             </a:avLst>
           </a:prstGeom>
           <a:solidFill>
-            <a:srgbClr val="FFFFFF">
-              <a:alpha val="88000"/>
-            </a:srgbClr>
+            <a:srgbClr val="FFFFFF"/>
           </a:solidFill>
           <a:ln w="12700">
             <a:solidFill>
-              <a:srgbClr val="D6E8F2"/>
+              <a:srgbClr val="B9D7E6"/>
             </a:solidFill>
             <a:prstDash val="solid"/>
           </a:ln>
@@ -17449,169 +16307,112 @@
       </p:sp>
       <p:sp>
         <p:nvSpPr>
-          <p:cNvPr id="14" name="Shape 12"/>
-          <p:cNvSpPr/>
-          <p:nvPr/>
-        </p:nvSpPr>
-        <p:spPr>
-          <a:xfrm>
-            <a:off x="8138160" y="3474720"/>
-            <a:ext cx="256032" cy="411480"/>
-          </a:xfrm>
-          <a:prstGeom prst="rect">
-            <a:avLst/>
-          </a:prstGeom>
-          <a:solidFill>
-            <a:srgbClr val="0068B7"/>
-          </a:solidFill>
-          <a:ln w="12700">
-            <a:solidFill>
-              <a:srgbClr val="0068B7"/>
-            </a:solidFill>
-            <a:prstDash val="solid"/>
-          </a:ln>
-        </p:spPr>
-      </p:sp>
-      <p:sp>
-        <p:nvSpPr>
-          <p:cNvPr id="15" name="Shape 13"/>
-          <p:cNvSpPr/>
-          <p:nvPr/>
-        </p:nvSpPr>
-        <p:spPr>
-          <a:xfrm>
-            <a:off x="8577072" y="3172968"/>
-            <a:ext cx="256032" cy="713232"/>
-          </a:xfrm>
-          <a:prstGeom prst="rect">
-            <a:avLst/>
-          </a:prstGeom>
-          <a:solidFill>
-            <a:srgbClr val="2F8A28"/>
-          </a:solidFill>
-          <a:ln w="12700">
-            <a:solidFill>
-              <a:srgbClr val="2F8A28"/>
-            </a:solidFill>
-            <a:prstDash val="solid"/>
-          </a:ln>
-        </p:spPr>
+          <p:cNvPr id="14" name="Text 12"/>
+          <p:cNvSpPr/>
+          <p:nvPr/>
+        </p:nvSpPr>
+        <p:spPr>
+          <a:xfrm>
+            <a:off x="7799832" y="2935224"/>
+            <a:ext cx="3145536" cy="256032"/>
+          </a:xfrm>
+          <a:prstGeom prst="rect">
+            <a:avLst/>
+          </a:prstGeom>
+          <a:noFill/>
+          <a:ln/>
+        </p:spPr>
+        <p:txBody>
+          <a:bodyPr wrap="square" lIns="0" tIns="0" rIns="0" bIns="0" rtlCol="0" anchor="ctr"/>
+          <a:lstStyle/>
+          <a:p>
+            <a:pPr indent="0" marL="0">
+              <a:buNone/>
+            </a:pPr>
+            <a:r>
+              <a:rPr lang="en-US" sz="1300" b="1" dirty="0">
+                <a:solidFill>
+                  <a:srgbClr val="0068B7"/>
+                </a:solidFill>
+                <a:latin typeface="Aptos" pitchFamily="34" charset="0"/>
+                <a:ea typeface="Aptos" pitchFamily="34" charset="-122"/>
+                <a:cs typeface="Aptos" pitchFamily="34" charset="-120"/>
+              </a:rPr>
+              <a:t>Concept checkpoints</a:t>
+            </a:r>
+            <a:endParaRPr lang="en-US" sz="1300" dirty="0"/>
+          </a:p>
+        </p:txBody>
+      </p:sp>
+      <p:sp>
+        <p:nvSpPr>
+          <p:cNvPr id="15" name="Text 13"/>
+          <p:cNvSpPr/>
+          <p:nvPr/>
+        </p:nvSpPr>
+        <p:spPr>
+          <a:xfrm>
+            <a:off x="7818120" y="3300984"/>
+            <a:ext cx="3090672" cy="877824"/>
+          </a:xfrm>
+          <a:prstGeom prst="rect">
+            <a:avLst/>
+          </a:prstGeom>
+          <a:noFill/>
+          <a:ln/>
+        </p:spPr>
+        <p:txBody>
+          <a:bodyPr wrap="square" lIns="254" tIns="254" rIns="254" bIns="254" rtlCol="0" anchor="t">
+            <a:normAutofit/>
+          </a:bodyPr>
+          <a:lstStyle/>
+          <a:p>
+            <a:r>
+              <a:rPr lang="en-US" sz="1380" dirty="0">
+                <a:solidFill>
+                  <a:srgbClr val="17364A"/>
+                </a:solidFill>
+                <a:latin typeface="Aptos" pitchFamily="34" charset="0"/>
+                <a:ea typeface="Aptos" pitchFamily="34" charset="-122"/>
+                <a:cs typeface="Aptos" pitchFamily="34" charset="-120"/>
+              </a:rPr>
+              <a:t>A data pipeline is a set of technical and operational steps that moves data from a source.</a:t>
+            </a:r>
+            <a:endParaRPr lang="en-US" sz="1380" dirty="0"/>
+          </a:p>
+          <a:p>
+            <a:r>
+              <a:rPr lang="en-US" sz="1380" dirty="0">
+                <a:solidFill>
+                  <a:srgbClr val="17364A"/>
+                </a:solidFill>
+                <a:latin typeface="Aptos" pitchFamily="34" charset="0"/>
+                <a:ea typeface="Aptos" pitchFamily="34" charset="-122"/>
+                <a:cs typeface="Aptos" pitchFamily="34" charset="-120"/>
+              </a:rPr>
+              <a:t>In public health, pipelines may include laboratory interfaces, EHR feeds, IIS submissions,.</a:t>
+            </a:r>
+            <a:endParaRPr lang="en-US" sz="1380" dirty="0"/>
+          </a:p>
+          <a:p>
+            <a:r>
+              <a:rPr lang="en-US" sz="1380" dirty="0">
+                <a:solidFill>
+                  <a:srgbClr val="17364A"/>
+                </a:solidFill>
+                <a:latin typeface="Aptos" pitchFamily="34" charset="0"/>
+                <a:ea typeface="Aptos" pitchFamily="34" charset="-122"/>
+                <a:cs typeface="Aptos" pitchFamily="34" charset="-120"/>
+              </a:rPr>
+              <a:t>Each step creates an opportunity to improve or degrade data quality.</a:t>
+            </a:r>
+            <a:endParaRPr lang="en-US" sz="1380" dirty="0"/>
+          </a:p>
+        </p:txBody>
       </p:sp>
       <p:sp>
         <p:nvSpPr>
           <p:cNvPr id="16" name="Shape 14"/>
-          <p:cNvSpPr/>
-          <p:nvPr/>
-        </p:nvSpPr>
-        <p:spPr>
-          <a:xfrm>
-            <a:off x="9015984" y="2880360"/>
-            <a:ext cx="256032" cy="1005840"/>
-          </a:xfrm>
-          <a:prstGeom prst="rect">
-            <a:avLst/>
-          </a:prstGeom>
-          <a:solidFill>
-            <a:srgbClr val="D69A2D"/>
-          </a:solidFill>
-          <a:ln w="12700">
-            <a:solidFill>
-              <a:srgbClr val="D69A2D"/>
-            </a:solidFill>
-            <a:prstDash val="solid"/>
-          </a:ln>
-        </p:spPr>
-      </p:sp>
-      <p:sp>
-        <p:nvSpPr>
-          <p:cNvPr id="17" name="Shape 15"/>
-          <p:cNvSpPr/>
-          <p:nvPr/>
-        </p:nvSpPr>
-        <p:spPr>
-          <a:xfrm>
-            <a:off x="9454896" y="3319272"/>
-            <a:ext cx="256032" cy="566928"/>
-          </a:xfrm>
-          <a:prstGeom prst="rect">
-            <a:avLst/>
-          </a:prstGeom>
-          <a:solidFill>
-            <a:srgbClr val="6A4CA3"/>
-          </a:solidFill>
-          <a:ln w="12700">
-            <a:solidFill>
-              <a:srgbClr val="6A4CA3"/>
-            </a:solidFill>
-            <a:prstDash val="solid"/>
-          </a:ln>
-        </p:spPr>
-      </p:sp>
-      <p:sp>
-        <p:nvSpPr>
-          <p:cNvPr id="18" name="Shape 16"/>
-          <p:cNvSpPr/>
-          <p:nvPr/>
-        </p:nvSpPr>
-        <p:spPr>
-          <a:xfrm>
-            <a:off x="8019288" y="3886200"/>
-            <a:ext cx="2706624" cy="0"/>
-          </a:xfrm>
-          <a:prstGeom prst="line">
-            <a:avLst/>
-          </a:prstGeom>
-          <a:noFill/>
-          <a:ln w="15240">
-            <a:solidFill>
-              <a:srgbClr val="003A63"/>
-            </a:solidFill>
-            <a:prstDash val="solid"/>
-          </a:ln>
-        </p:spPr>
-      </p:sp>
-      <p:sp>
-        <p:nvSpPr>
-          <p:cNvPr id="19" name="Text 17"/>
-          <p:cNvSpPr/>
-          <p:nvPr/>
-        </p:nvSpPr>
-        <p:spPr>
-          <a:xfrm>
-            <a:off x="7863840" y="3017520"/>
-            <a:ext cx="3017520" cy="201168"/>
-          </a:xfrm>
-          <a:prstGeom prst="rect">
-            <a:avLst/>
-          </a:prstGeom>
-          <a:noFill/>
-          <a:ln/>
-        </p:spPr>
-        <p:txBody>
-          <a:bodyPr wrap="square" lIns="0" tIns="0" rIns="0" bIns="0" rtlCol="0" anchor="ctr"/>
-          <a:lstStyle/>
-          <a:p>
-            <a:pPr algn="ctr" indent="0" marL="0">
-              <a:buNone/>
-            </a:pPr>
-            <a:r>
-              <a:rPr lang="en-US" sz="1050" b="1" dirty="0">
-                <a:solidFill>
-                  <a:srgbClr val="003A63"/>
-                </a:solidFill>
-                <a:latin typeface="Aptos" pitchFamily="34" charset="0"/>
-                <a:ea typeface="Aptos" pitchFamily="34" charset="-122"/>
-                <a:cs typeface="Aptos" pitchFamily="34" charset="-120"/>
-              </a:rPr>
-              <a:t>Measure and monitor</a:t>
-            </a:r>
-            <a:endParaRPr lang="en-US" sz="1050" dirty="0"/>
-          </a:p>
-        </p:txBody>
-      </p:sp>
-      <p:sp>
-        <p:nvSpPr>
-          <p:cNvPr id="20" name="Shape 18"/>
           <p:cNvSpPr/>
           <p:nvPr/>
         </p:nvSpPr>
@@ -17638,7 +16439,7 @@
       </p:sp>
       <p:sp>
         <p:nvSpPr>
-          <p:cNvPr id="21" name="Text 19"/>
+          <p:cNvPr id="17" name="Text 15"/>
           <p:cNvSpPr/>
           <p:nvPr/>
         </p:nvSpPr>
@@ -17677,7 +16478,7 @@
       </p:sp>
       <p:sp>
         <p:nvSpPr>
-          <p:cNvPr id="22" name="Text 20"/>
+          <p:cNvPr id="18" name="Text 16"/>
           <p:cNvSpPr/>
           <p:nvPr/>
         </p:nvSpPr>
@@ -18185,13 +16986,11 @@
             </a:avLst>
           </a:prstGeom>
           <a:solidFill>
-            <a:srgbClr val="FFFFFF">
-              <a:alpha val="88000"/>
-            </a:srgbClr>
+            <a:srgbClr val="FFFFFF"/>
           </a:solidFill>
           <a:ln w="12700">
             <a:solidFill>
-              <a:srgbClr val="D6E8F2"/>
+              <a:srgbClr val="B9D7E6"/>
             </a:solidFill>
             <a:prstDash val="solid"/>
           </a:ln>
@@ -18199,169 +16998,112 @@
       </p:sp>
       <p:sp>
         <p:nvSpPr>
-          <p:cNvPr id="14" name="Shape 12"/>
-          <p:cNvSpPr/>
-          <p:nvPr/>
-        </p:nvSpPr>
-        <p:spPr>
-          <a:xfrm>
-            <a:off x="8138160" y="3474720"/>
-            <a:ext cx="256032" cy="411480"/>
-          </a:xfrm>
-          <a:prstGeom prst="rect">
-            <a:avLst/>
-          </a:prstGeom>
-          <a:solidFill>
-            <a:srgbClr val="0068B7"/>
-          </a:solidFill>
-          <a:ln w="12700">
-            <a:solidFill>
-              <a:srgbClr val="0068B7"/>
-            </a:solidFill>
-            <a:prstDash val="solid"/>
-          </a:ln>
-        </p:spPr>
-      </p:sp>
-      <p:sp>
-        <p:nvSpPr>
-          <p:cNvPr id="15" name="Shape 13"/>
-          <p:cNvSpPr/>
-          <p:nvPr/>
-        </p:nvSpPr>
-        <p:spPr>
-          <a:xfrm>
-            <a:off x="8577072" y="3172968"/>
-            <a:ext cx="256032" cy="713232"/>
-          </a:xfrm>
-          <a:prstGeom prst="rect">
-            <a:avLst/>
-          </a:prstGeom>
-          <a:solidFill>
-            <a:srgbClr val="2F8A28"/>
-          </a:solidFill>
-          <a:ln w="12700">
-            <a:solidFill>
-              <a:srgbClr val="2F8A28"/>
-            </a:solidFill>
-            <a:prstDash val="solid"/>
-          </a:ln>
-        </p:spPr>
+          <p:cNvPr id="14" name="Text 12"/>
+          <p:cNvSpPr/>
+          <p:nvPr/>
+        </p:nvSpPr>
+        <p:spPr>
+          <a:xfrm>
+            <a:off x="7799832" y="2935224"/>
+            <a:ext cx="3145536" cy="256032"/>
+          </a:xfrm>
+          <a:prstGeom prst="rect">
+            <a:avLst/>
+          </a:prstGeom>
+          <a:noFill/>
+          <a:ln/>
+        </p:spPr>
+        <p:txBody>
+          <a:bodyPr wrap="square" lIns="0" tIns="0" rIns="0" bIns="0" rtlCol="0" anchor="ctr"/>
+          <a:lstStyle/>
+          <a:p>
+            <a:pPr indent="0" marL="0">
+              <a:buNone/>
+            </a:pPr>
+            <a:r>
+              <a:rPr lang="en-US" sz="1300" b="1" dirty="0">
+                <a:solidFill>
+                  <a:srgbClr val="0068B7"/>
+                </a:solidFill>
+                <a:latin typeface="Aptos" pitchFamily="34" charset="0"/>
+                <a:ea typeface="Aptos" pitchFamily="34" charset="-122"/>
+                <a:cs typeface="Aptos" pitchFamily="34" charset="-120"/>
+              </a:rPr>
+              <a:t>Concept checkpoints</a:t>
+            </a:r>
+            <a:endParaRPr lang="en-US" sz="1300" dirty="0"/>
+          </a:p>
+        </p:txBody>
+      </p:sp>
+      <p:sp>
+        <p:nvSpPr>
+          <p:cNvPr id="15" name="Text 13"/>
+          <p:cNvSpPr/>
+          <p:nvPr/>
+        </p:nvSpPr>
+        <p:spPr>
+          <a:xfrm>
+            <a:off x="7818120" y="3300984"/>
+            <a:ext cx="3090672" cy="877824"/>
+          </a:xfrm>
+          <a:prstGeom prst="rect">
+            <a:avLst/>
+          </a:prstGeom>
+          <a:noFill/>
+          <a:ln/>
+        </p:spPr>
+        <p:txBody>
+          <a:bodyPr wrap="square" lIns="254" tIns="254" rIns="254" bIns="254" rtlCol="0" anchor="t">
+            <a:normAutofit/>
+          </a:bodyPr>
+          <a:lstStyle/>
+          <a:p>
+            <a:r>
+              <a:rPr lang="en-US" sz="1380" dirty="0">
+                <a:solidFill>
+                  <a:srgbClr val="17364A"/>
+                </a:solidFill>
+                <a:latin typeface="Aptos" pitchFamily="34" charset="0"/>
+                <a:ea typeface="Aptos" pitchFamily="34" charset="-122"/>
+                <a:cs typeface="Aptos" pitchFamily="34" charset="-120"/>
+              </a:rPr>
+              <a:t>Data lineage.</a:t>
+            </a:r>
+            <a:endParaRPr lang="en-US" sz="1380" dirty="0"/>
+          </a:p>
+          <a:p>
+            <a:r>
+              <a:rPr lang="en-US" sz="1380" dirty="0">
+                <a:solidFill>
+                  <a:srgbClr val="17364A"/>
+                </a:solidFill>
+                <a:latin typeface="Aptos" pitchFamily="34" charset="0"/>
+                <a:ea typeface="Aptos" pitchFamily="34" charset="-122"/>
+                <a:cs typeface="Aptos" pitchFamily="34" charset="-120"/>
+              </a:rPr>
+              <a:t>Data lineage shows where data came from, what happened to them, and where they were used.</a:t>
+            </a:r>
+            <a:endParaRPr lang="en-US" sz="1380" dirty="0"/>
+          </a:p>
+          <a:p>
+            <a:r>
+              <a:rPr lang="en-US" sz="1380" dirty="0">
+                <a:solidFill>
+                  <a:srgbClr val="17364A"/>
+                </a:solidFill>
+                <a:latin typeface="Aptos" pitchFamily="34" charset="0"/>
+                <a:ea typeface="Aptos" pitchFamily="34" charset="-122"/>
+                <a:cs typeface="Aptos" pitchFamily="34" charset="-120"/>
+              </a:rPr>
+              <a:t>Lineage supports validation, troubleshooting, incident response, and public records review.</a:t>
+            </a:r>
+            <a:endParaRPr lang="en-US" sz="1380" dirty="0"/>
+          </a:p>
+        </p:txBody>
       </p:sp>
       <p:sp>
         <p:nvSpPr>
           <p:cNvPr id="16" name="Shape 14"/>
-          <p:cNvSpPr/>
-          <p:nvPr/>
-        </p:nvSpPr>
-        <p:spPr>
-          <a:xfrm>
-            <a:off x="9015984" y="2880360"/>
-            <a:ext cx="256032" cy="1005840"/>
-          </a:xfrm>
-          <a:prstGeom prst="rect">
-            <a:avLst/>
-          </a:prstGeom>
-          <a:solidFill>
-            <a:srgbClr val="D69A2D"/>
-          </a:solidFill>
-          <a:ln w="12700">
-            <a:solidFill>
-              <a:srgbClr val="D69A2D"/>
-            </a:solidFill>
-            <a:prstDash val="solid"/>
-          </a:ln>
-        </p:spPr>
-      </p:sp>
-      <p:sp>
-        <p:nvSpPr>
-          <p:cNvPr id="17" name="Shape 15"/>
-          <p:cNvSpPr/>
-          <p:nvPr/>
-        </p:nvSpPr>
-        <p:spPr>
-          <a:xfrm>
-            <a:off x="9454896" y="3319272"/>
-            <a:ext cx="256032" cy="566928"/>
-          </a:xfrm>
-          <a:prstGeom prst="rect">
-            <a:avLst/>
-          </a:prstGeom>
-          <a:solidFill>
-            <a:srgbClr val="6A4CA3"/>
-          </a:solidFill>
-          <a:ln w="12700">
-            <a:solidFill>
-              <a:srgbClr val="6A4CA3"/>
-            </a:solidFill>
-            <a:prstDash val="solid"/>
-          </a:ln>
-        </p:spPr>
-      </p:sp>
-      <p:sp>
-        <p:nvSpPr>
-          <p:cNvPr id="18" name="Shape 16"/>
-          <p:cNvSpPr/>
-          <p:nvPr/>
-        </p:nvSpPr>
-        <p:spPr>
-          <a:xfrm>
-            <a:off x="8019288" y="3886200"/>
-            <a:ext cx="2706624" cy="0"/>
-          </a:xfrm>
-          <a:prstGeom prst="line">
-            <a:avLst/>
-          </a:prstGeom>
-          <a:noFill/>
-          <a:ln w="15240">
-            <a:solidFill>
-              <a:srgbClr val="003A63"/>
-            </a:solidFill>
-            <a:prstDash val="solid"/>
-          </a:ln>
-        </p:spPr>
-      </p:sp>
-      <p:sp>
-        <p:nvSpPr>
-          <p:cNvPr id="19" name="Text 17"/>
-          <p:cNvSpPr/>
-          <p:nvPr/>
-        </p:nvSpPr>
-        <p:spPr>
-          <a:xfrm>
-            <a:off x="7863840" y="3017520"/>
-            <a:ext cx="3017520" cy="201168"/>
-          </a:xfrm>
-          <a:prstGeom prst="rect">
-            <a:avLst/>
-          </a:prstGeom>
-          <a:noFill/>
-          <a:ln/>
-        </p:spPr>
-        <p:txBody>
-          <a:bodyPr wrap="square" lIns="0" tIns="0" rIns="0" bIns="0" rtlCol="0" anchor="ctr"/>
-          <a:lstStyle/>
-          <a:p>
-            <a:pPr algn="ctr" indent="0" marL="0">
-              <a:buNone/>
-            </a:pPr>
-            <a:r>
-              <a:rPr lang="en-US" sz="1050" b="1" dirty="0">
-                <a:solidFill>
-                  <a:srgbClr val="003A63"/>
-                </a:solidFill>
-                <a:latin typeface="Aptos" pitchFamily="34" charset="0"/>
-                <a:ea typeface="Aptos" pitchFamily="34" charset="-122"/>
-                <a:cs typeface="Aptos" pitchFamily="34" charset="-120"/>
-              </a:rPr>
-              <a:t>Measure and monitor</a:t>
-            </a:r>
-            <a:endParaRPr lang="en-US" sz="1050" dirty="0"/>
-          </a:p>
-        </p:txBody>
-      </p:sp>
-      <p:sp>
-        <p:nvSpPr>
-          <p:cNvPr id="20" name="Shape 18"/>
           <p:cNvSpPr/>
           <p:nvPr/>
         </p:nvSpPr>
@@ -18388,7 +17130,7 @@
       </p:sp>
       <p:sp>
         <p:nvSpPr>
-          <p:cNvPr id="21" name="Text 19"/>
+          <p:cNvPr id="17" name="Text 15"/>
           <p:cNvSpPr/>
           <p:nvPr/>
         </p:nvSpPr>
@@ -18427,7 +17169,7 @@
       </p:sp>
       <p:sp>
         <p:nvSpPr>
-          <p:cNvPr id="22" name="Text 20"/>
+          <p:cNvPr id="18" name="Text 16"/>
           <p:cNvSpPr/>
           <p:nvPr/>
         </p:nvSpPr>

--- a/downloads/presentations/modules/arc-210.pptx
+++ b/downloads/presentations/modules/arc-210.pptx
@@ -3351,49 +3351,58 @@
           <a:ln/>
         </p:spPr>
         <p:txBody>
-          <a:bodyPr wrap="square" lIns="635" tIns="635" rIns="635" bIns="635" rtlCol="0" anchor="t">
+          <a:bodyPr wrap="square" lIns="1016" tIns="1016" rIns="1016" bIns="1016" rtlCol="0" anchor="t">
             <a:normAutofit/>
           </a:bodyPr>
           <a:lstStyle/>
           <a:p>
+            <a:pPr indent="0" marL="0">
+              <a:buNone/>
+            </a:pPr>
             <a:r>
               <a:rPr lang="en-US" sz="2100" dirty="0">
                 <a:solidFill>
-                  <a:srgbClr val="17364A"/>
-                </a:solidFill>
-                <a:latin typeface="Aptos" pitchFamily="34" charset="0"/>
-                <a:ea typeface="Aptos" pitchFamily="34" charset="-122"/>
-                <a:cs typeface="Aptos" pitchFamily="34" charset="-120"/>
-              </a:rPr>
-              <a:t>A syndromic surveillance team may use AI to identify unusual emergency department visit patterns.</a:t>
+                  <a:srgbClr val="003A63"/>
+                </a:solidFill>
+                <a:latin typeface="Aptos" pitchFamily="34" charset="0"/>
+                <a:ea typeface="Aptos" pitchFamily="34" charset="-122"/>
+                <a:cs typeface="Aptos" pitchFamily="34" charset="-120"/>
+              </a:rPr>
+              <a:t>• A syndromic surveillance team may use AI to identify unusual emergency department visit.</a:t>
             </a:r>
             <a:endParaRPr lang="en-US" sz="2100" dirty="0"/>
           </a:p>
           <a:p>
+            <a:pPr indent="0" marL="0">
+              <a:buNone/>
+            </a:pPr>
             <a:r>
               <a:rPr lang="en-US" sz="2100" dirty="0">
                 <a:solidFill>
-                  <a:srgbClr val="17364A"/>
-                </a:solidFill>
-                <a:latin typeface="Aptos" pitchFamily="34" charset="0"/>
-                <a:ea typeface="Aptos" pitchFamily="34" charset="-122"/>
-                <a:cs typeface="Aptos" pitchFamily="34" charset="-120"/>
-              </a:rPr>
-              <a:t>The model depends on timely data feeds from hospitals, correct parsing of chief complaint text,.</a:t>
+                  <a:srgbClr val="003A63"/>
+                </a:solidFill>
+                <a:latin typeface="Aptos" pitchFamily="34" charset="0"/>
+                <a:ea typeface="Aptos" pitchFamily="34" charset="-122"/>
+                <a:cs typeface="Aptos" pitchFamily="34" charset="-120"/>
+              </a:rPr>
+              <a:t>• The model depends on timely data feeds from hospitals, correct parsing of chief complaint text,.</a:t>
             </a:r>
             <a:endParaRPr lang="en-US" sz="2100" dirty="0"/>
           </a:p>
           <a:p>
+            <a:pPr indent="0" marL="0">
+              <a:buNone/>
+            </a:pPr>
             <a:r>
               <a:rPr lang="en-US" sz="2100" dirty="0">
                 <a:solidFill>
-                  <a:srgbClr val="17364A"/>
-                </a:solidFill>
-                <a:latin typeface="Aptos" pitchFamily="34" charset="0"/>
-                <a:ea typeface="Aptos" pitchFamily="34" charset="-122"/>
-                <a:cs typeface="Aptos" pitchFamily="34" charset="-120"/>
-              </a:rPr>
-              <a:t>If one large hospital feed stops or a field changes after an EHR upgrade, the AI tool may miss a signal.</a:t>
+                  <a:srgbClr val="003A63"/>
+                </a:solidFill>
+                <a:latin typeface="Aptos" pitchFamily="34" charset="0"/>
+                <a:ea typeface="Aptos" pitchFamily="34" charset="-122"/>
+                <a:cs typeface="Aptos" pitchFamily="34" charset="-120"/>
+              </a:rPr>
+              <a:t>• If one large hospital feed stops or a field changes after an EHR upgrade, the AI tool may miss.</a:t>
             </a:r>
             <a:endParaRPr lang="en-US" sz="2100" dirty="0"/>
           </a:p>
@@ -3473,17 +3482,17 @@
         </p:nvSpPr>
         <p:spPr>
           <a:xfrm>
-            <a:off x="7799832" y="1828800"/>
-            <a:ext cx="3145536" cy="685800"/>
-          </a:xfrm>
-          <a:prstGeom prst="rect">
-            <a:avLst/>
-          </a:prstGeom>
-          <a:noFill/>
-          <a:ln/>
-        </p:spPr>
-        <p:txBody>
-          <a:bodyPr wrap="square" lIns="0" tIns="0" rIns="0" bIns="0" rtlCol="0" anchor="t">
+            <a:off x="7799832" y="1801368"/>
+            <a:ext cx="3145536" cy="758952"/>
+          </a:xfrm>
+          <a:prstGeom prst="rect">
+            <a:avLst/>
+          </a:prstGeom>
+          <a:noFill/>
+          <a:ln/>
+        </p:spPr>
+        <p:txBody>
+          <a:bodyPr wrap="square" lIns="254" tIns="254" rIns="254" bIns="254" rtlCol="0" anchor="t">
             <a:normAutofit/>
           </a:bodyPr>
           <a:lstStyle/>
@@ -3492,7 +3501,7 @@
               <a:buNone/>
             </a:pPr>
             <a:r>
-              <a:rPr lang="en-US" sz="1550" dirty="0">
+              <a:rPr lang="en-US" sz="1320" dirty="0">
                 <a:solidFill>
                   <a:srgbClr val="17364A"/>
                 </a:solidFill>
@@ -3502,7 +3511,7 @@
               </a:rPr>
               <a:t>A syndromic surveillance team may use AI to identify unusual emergency department visit patterns.</a:t>
             </a:r>
-            <a:endParaRPr lang="en-US" sz="1550" dirty="0"/>
+            <a:endParaRPr lang="en-US" sz="1320" dirty="0"/>
           </a:p>
         </p:txBody>
       </p:sp>
@@ -3590,13 +3599,16 @@
           <a:ln/>
         </p:spPr>
         <p:txBody>
-          <a:bodyPr wrap="square" lIns="254" tIns="254" rIns="254" bIns="254" rtlCol="0" anchor="t">
+          <a:bodyPr wrap="square" lIns="508" tIns="508" rIns="508" bIns="508" rtlCol="0" anchor="t">
             <a:normAutofit/>
           </a:bodyPr>
           <a:lstStyle/>
           <a:p>
-            <a:r>
-              <a:rPr lang="en-US" sz="1380" dirty="0">
+            <a:pPr indent="0" marL="0">
+              <a:buNone/>
+            </a:pPr>
+            <a:r>
+              <a:rPr lang="en-US" sz="1220" dirty="0">
                 <a:solidFill>
                   <a:srgbClr val="17364A"/>
                 </a:solidFill>
@@ -3604,13 +3616,16 @@
                 <a:ea typeface="Aptos" pitchFamily="34" charset="-122"/>
                 <a:cs typeface="Aptos" pitchFamily="34" charset="-120"/>
               </a:rPr>
-              <a:t>The model depends on timely data feeds from hospitals, correct parsing of chief complaint.</a:t>
-            </a:r>
-            <a:endParaRPr lang="en-US" sz="1380" dirty="0"/>
-          </a:p>
-          <a:p>
-            <a:r>
-              <a:rPr lang="en-US" sz="1380" dirty="0">
+              <a:t>The model depends on timely data feeds from hospitals, correct.</a:t>
+            </a:r>
+            <a:endParaRPr lang="en-US" sz="1220" dirty="0"/>
+          </a:p>
+          <a:p>
+            <a:pPr indent="0" marL="0">
+              <a:buNone/>
+            </a:pPr>
+            <a:r>
+              <a:rPr lang="en-US" sz="1220" dirty="0">
                 <a:solidFill>
                   <a:srgbClr val="17364A"/>
                 </a:solidFill>
@@ -3618,13 +3633,16 @@
                 <a:ea typeface="Aptos" pitchFamily="34" charset="-122"/>
                 <a:cs typeface="Aptos" pitchFamily="34" charset="-120"/>
               </a:rPr>
-              <a:t>If one large hospital feed stops or a field changes after an EHR upgrade, the AI tool may.</a:t>
-            </a:r>
-            <a:endParaRPr lang="en-US" sz="1380" dirty="0"/>
-          </a:p>
-          <a:p>
-            <a:r>
-              <a:rPr lang="en-US" sz="1380" dirty="0">
+              <a:t>If one large hospital feed stops or a field changes after an EHR.</a:t>
+            </a:r>
+            <a:endParaRPr lang="en-US" sz="1220" dirty="0"/>
+          </a:p>
+          <a:p>
+            <a:pPr indent="0" marL="0">
+              <a:buNone/>
+            </a:pPr>
+            <a:r>
+              <a:rPr lang="en-US" sz="1220" dirty="0">
                 <a:solidFill>
                   <a:srgbClr val="17364A"/>
                 </a:solidFill>
@@ -3632,9 +3650,9 @@
                 <a:ea typeface="Aptos" pitchFamily="34" charset="-122"/>
                 <a:cs typeface="Aptos" pitchFamily="34" charset="-120"/>
               </a:rPr>
-              <a:t>Pipeline monitoring is therefore part of outbreak detection readiness.</a:t>
-            </a:r>
-            <a:endParaRPr lang="en-US" sz="1380" dirty="0"/>
+              <a:t>Pipeline monitoring is therefore part of outbreak detection.</a:t>
+            </a:r>
+            <a:endParaRPr lang="en-US" sz="1220" dirty="0"/>
           </a:p>
         </p:txBody>
       </p:sp>
@@ -3712,17 +3730,17 @@
         </p:nvSpPr>
         <p:spPr>
           <a:xfrm>
-            <a:off x="7799832" y="5001768"/>
-            <a:ext cx="3145536" cy="502920"/>
-          </a:xfrm>
-          <a:prstGeom prst="rect">
-            <a:avLst/>
-          </a:prstGeom>
-          <a:noFill/>
-          <a:ln/>
-        </p:spPr>
-        <p:txBody>
-          <a:bodyPr wrap="square" lIns="0" tIns="0" rIns="0" bIns="0" rtlCol="0" anchor="t">
+            <a:off x="7799832" y="4974336"/>
+            <a:ext cx="3145536" cy="576072"/>
+          </a:xfrm>
+          <a:prstGeom prst="rect">
+            <a:avLst/>
+          </a:prstGeom>
+          <a:noFill/>
+          <a:ln/>
+        </p:spPr>
+        <p:txBody>
+          <a:bodyPr wrap="square" lIns="254" tIns="254" rIns="254" bIns="254" rtlCol="0" anchor="t">
             <a:normAutofit/>
           </a:bodyPr>
           <a:lstStyle/>
@@ -3731,7 +3749,7 @@
               <a:buNone/>
             </a:pPr>
             <a:r>
-              <a:rPr lang="en-US" sz="1550" dirty="0">
+              <a:rPr lang="en-US" sz="1320" dirty="0">
                 <a:solidFill>
                   <a:srgbClr val="17364A"/>
                 </a:solidFill>
@@ -3739,9 +3757,9 @@
                 <a:ea typeface="Aptos" pitchFamily="34" charset="-122"/>
                 <a:cs typeface="Aptos" pitchFamily="34" charset="-120"/>
               </a:rPr>
-              <a:t>Connect the concept to data quality, model performance, validation evidence, monitoring measures, and decisions that remain under human control.</a:t>
-            </a:r>
-            <a:endParaRPr lang="en-US" sz="1550" dirty="0"/>
+              <a:t>Connect the concept to data quality, model performance, validation evidence, monitoring measures, and decisions that.</a:t>
+            </a:r>
+            <a:endParaRPr lang="en-US" sz="1320" dirty="0"/>
           </a:p>
         </p:txBody>
       </p:sp>
@@ -4042,49 +4060,58 @@
           <a:ln/>
         </p:spPr>
         <p:txBody>
-          <a:bodyPr wrap="square" lIns="635" tIns="635" rIns="635" bIns="635" rtlCol="0" anchor="t">
+          <a:bodyPr wrap="square" lIns="1016" tIns="1016" rIns="1016" bIns="1016" rtlCol="0" anchor="t">
             <a:normAutofit/>
           </a:bodyPr>
           <a:lstStyle/>
           <a:p>
+            <a:pPr indent="0" marL="0">
+              <a:buNone/>
+            </a:pPr>
             <a:r>
               <a:rPr lang="en-US" sz="2100" dirty="0">
                 <a:solidFill>
-                  <a:srgbClr val="17364A"/>
-                </a:solidFill>
-                <a:latin typeface="Aptos" pitchFamily="34" charset="0"/>
-                <a:ea typeface="Aptos" pitchFamily="34" charset="-122"/>
-                <a:cs typeface="Aptos" pitchFamily="34" charset="-120"/>
-              </a:rPr>
-              <a:t>Pipeline design begins with the source and ends with the user-facing decision or output.</a:t>
+                  <a:srgbClr val="003A63"/>
+                </a:solidFill>
+                <a:latin typeface="Aptos" pitchFamily="34" charset="0"/>
+                <a:ea typeface="Aptos" pitchFamily="34" charset="-122"/>
+                <a:cs typeface="Aptos" pitchFamily="34" charset="-120"/>
+              </a:rPr>
+              <a:t>• Pipeline design begins with the source and ends with the user-facing decision or output.</a:t>
             </a:r>
             <a:endParaRPr lang="en-US" sz="2100" dirty="0"/>
           </a:p>
           <a:p>
+            <a:pPr indent="0" marL="0">
+              <a:buNone/>
+            </a:pPr>
             <a:r>
               <a:rPr lang="en-US" sz="2100" dirty="0">
                 <a:solidFill>
-                  <a:srgbClr val="17364A"/>
-                </a:solidFill>
-                <a:latin typeface="Aptos" pitchFamily="34" charset="0"/>
-                <a:ea typeface="Aptos" pitchFamily="34" charset="-122"/>
-                <a:cs typeface="Aptos" pitchFamily="34" charset="-120"/>
-              </a:rPr>
-              <a:t>In between, data may be received, staged, validated, transformed, standardized, linked, loaded,.</a:t>
+                  <a:srgbClr val="003A63"/>
+                </a:solidFill>
+                <a:latin typeface="Aptos" pitchFamily="34" charset="0"/>
+                <a:ea typeface="Aptos" pitchFamily="34" charset="-122"/>
+                <a:cs typeface="Aptos" pitchFamily="34" charset="-120"/>
+              </a:rPr>
+              <a:t>• In between, data may be received, staged, validated, transformed, standardized, linked, loaded,.</a:t>
             </a:r>
             <a:endParaRPr lang="en-US" sz="2100" dirty="0"/>
           </a:p>
           <a:p>
+            <a:pPr indent="0" marL="0">
+              <a:buNone/>
+            </a:pPr>
             <a:r>
               <a:rPr lang="en-US" sz="2100" dirty="0">
                 <a:solidFill>
-                  <a:srgbClr val="17364A"/>
-                </a:solidFill>
-                <a:latin typeface="Aptos" pitchFamily="34" charset="0"/>
-                <a:ea typeface="Aptos" pitchFamily="34" charset="-122"/>
-                <a:cs typeface="Aptos" pitchFamily="34" charset="-120"/>
-              </a:rPr>
-              <a:t>Each step should have an owner, a purpose, a quality check, and a documented failure process.</a:t>
+                  <a:srgbClr val="003A63"/>
+                </a:solidFill>
+                <a:latin typeface="Aptos" pitchFamily="34" charset="0"/>
+                <a:ea typeface="Aptos" pitchFamily="34" charset="-122"/>
+                <a:cs typeface="Aptos" pitchFamily="34" charset="-120"/>
+              </a:rPr>
+              <a:t>• Each step should have an owner, a purpose, a quality check, and a documented failure process.</a:t>
             </a:r>
             <a:endParaRPr lang="en-US" sz="2100" dirty="0"/>
           </a:p>
@@ -4164,17 +4191,17 @@
         </p:nvSpPr>
         <p:spPr>
           <a:xfrm>
-            <a:off x="7799832" y="1828800"/>
-            <a:ext cx="3145536" cy="685800"/>
-          </a:xfrm>
-          <a:prstGeom prst="rect">
-            <a:avLst/>
-          </a:prstGeom>
-          <a:noFill/>
-          <a:ln/>
-        </p:spPr>
-        <p:txBody>
-          <a:bodyPr wrap="square" lIns="0" tIns="0" rIns="0" bIns="0" rtlCol="0" anchor="t">
+            <a:off x="7799832" y="1801368"/>
+            <a:ext cx="3145536" cy="758952"/>
+          </a:xfrm>
+          <a:prstGeom prst="rect">
+            <a:avLst/>
+          </a:prstGeom>
+          <a:noFill/>
+          <a:ln/>
+        </p:spPr>
+        <p:txBody>
+          <a:bodyPr wrap="square" lIns="254" tIns="254" rIns="254" bIns="254" rtlCol="0" anchor="t">
             <a:normAutofit/>
           </a:bodyPr>
           <a:lstStyle/>
@@ -4183,7 +4210,7 @@
               <a:buNone/>
             </a:pPr>
             <a:r>
-              <a:rPr lang="en-US" sz="1550" dirty="0">
+              <a:rPr lang="en-US" sz="1320" dirty="0">
                 <a:solidFill>
                   <a:srgbClr val="17364A"/>
                 </a:solidFill>
@@ -4193,7 +4220,7 @@
               </a:rPr>
               <a:t>Pipeline design begins with the source and ends with the user-facing decision or output.</a:t>
             </a:r>
-            <a:endParaRPr lang="en-US" sz="1550" dirty="0"/>
+            <a:endParaRPr lang="en-US" sz="1320" dirty="0"/>
           </a:p>
         </p:txBody>
       </p:sp>
@@ -4281,13 +4308,16 @@
           <a:ln/>
         </p:spPr>
         <p:txBody>
-          <a:bodyPr wrap="square" lIns="254" tIns="254" rIns="254" bIns="254" rtlCol="0" anchor="t">
+          <a:bodyPr wrap="square" lIns="508" tIns="508" rIns="508" bIns="508" rtlCol="0" anchor="t">
             <a:normAutofit/>
           </a:bodyPr>
           <a:lstStyle/>
           <a:p>
-            <a:r>
-              <a:rPr lang="en-US" sz="1380" dirty="0">
+            <a:pPr indent="0" marL="0">
+              <a:buNone/>
+            </a:pPr>
+            <a:r>
+              <a:rPr lang="en-US" sz="1220" dirty="0">
                 <a:solidFill>
                   <a:srgbClr val="17364A"/>
                 </a:solidFill>
@@ -4295,13 +4325,16 @@
                 <a:ea typeface="Aptos" pitchFamily="34" charset="-122"/>
                 <a:cs typeface="Aptos" pitchFamily="34" charset="-120"/>
               </a:rPr>
-              <a:t>In between, data may be received, staged, validated, transformed, standardized, linked,.</a:t>
-            </a:r>
-            <a:endParaRPr lang="en-US" sz="1380" dirty="0"/>
-          </a:p>
-          <a:p>
-            <a:r>
-              <a:rPr lang="en-US" sz="1380" dirty="0">
+              <a:t>In between, data may be received, staged, validated, transformed,.</a:t>
+            </a:r>
+            <a:endParaRPr lang="en-US" sz="1220" dirty="0"/>
+          </a:p>
+          <a:p>
+            <a:pPr indent="0" marL="0">
+              <a:buNone/>
+            </a:pPr>
+            <a:r>
+              <a:rPr lang="en-US" sz="1220" dirty="0">
                 <a:solidFill>
                   <a:srgbClr val="17364A"/>
                 </a:solidFill>
@@ -4309,13 +4342,16 @@
                 <a:ea typeface="Aptos" pitchFamily="34" charset="-122"/>
                 <a:cs typeface="Aptos" pitchFamily="34" charset="-120"/>
               </a:rPr>
-              <a:t>Batch pipelines move data on a schedule, such as nightly files or weekly extracts.</a:t>
-            </a:r>
-            <a:endParaRPr lang="en-US" sz="1380" dirty="0"/>
-          </a:p>
-          <a:p>
-            <a:r>
-              <a:rPr lang="en-US" sz="1380" dirty="0">
+              <a:t>Batch pipelines move data on a schedule, such as nightly files or.</a:t>
+            </a:r>
+            <a:endParaRPr lang="en-US" sz="1220" dirty="0"/>
+          </a:p>
+          <a:p>
+            <a:pPr indent="0" marL="0">
+              <a:buNone/>
+            </a:pPr>
+            <a:r>
+              <a:rPr lang="en-US" sz="1220" dirty="0">
                 <a:solidFill>
                   <a:srgbClr val="17364A"/>
                 </a:solidFill>
@@ -4323,9 +4359,9 @@
                 <a:ea typeface="Aptos" pitchFamily="34" charset="-122"/>
                 <a:cs typeface="Aptos" pitchFamily="34" charset="-120"/>
               </a:rPr>
-              <a:t>Real-time pipelines move data as events occur, such as laboratory reports or eCR messages.</a:t>
-            </a:r>
-            <a:endParaRPr lang="en-US" sz="1380" dirty="0"/>
+              <a:t>Real-time pipelines move data as events occur, such as laboratory.</a:t>
+            </a:r>
+            <a:endParaRPr lang="en-US" sz="1220" dirty="0"/>
           </a:p>
         </p:txBody>
       </p:sp>
@@ -4403,17 +4439,17 @@
         </p:nvSpPr>
         <p:spPr>
           <a:xfrm>
-            <a:off x="7799832" y="5001768"/>
-            <a:ext cx="3145536" cy="502920"/>
-          </a:xfrm>
-          <a:prstGeom prst="rect">
-            <a:avLst/>
-          </a:prstGeom>
-          <a:noFill/>
-          <a:ln/>
-        </p:spPr>
-        <p:txBody>
-          <a:bodyPr wrap="square" lIns="0" tIns="0" rIns="0" bIns="0" rtlCol="0" anchor="t">
+            <a:off x="7799832" y="4974336"/>
+            <a:ext cx="3145536" cy="576072"/>
+          </a:xfrm>
+          <a:prstGeom prst="rect">
+            <a:avLst/>
+          </a:prstGeom>
+          <a:noFill/>
+          <a:ln/>
+        </p:spPr>
+        <p:txBody>
+          <a:bodyPr wrap="square" lIns="254" tIns="254" rIns="254" bIns="254" rtlCol="0" anchor="t">
             <a:normAutofit/>
           </a:bodyPr>
           <a:lstStyle/>
@@ -4422,7 +4458,7 @@
               <a:buNone/>
             </a:pPr>
             <a:r>
-              <a:rPr lang="en-US" sz="1550" dirty="0">
+              <a:rPr lang="en-US" sz="1320" dirty="0">
                 <a:solidFill>
                   <a:srgbClr val="17364A"/>
                 </a:solidFill>
@@ -4430,9 +4466,9 @@
                 <a:ea typeface="Aptos" pitchFamily="34" charset="-122"/>
                 <a:cs typeface="Aptos" pitchFamily="34" charset="-120"/>
               </a:rPr>
-              <a:t>Connect the concept to data quality, model performance, validation evidence, monitoring measures, and decisions that remain under human control.</a:t>
-            </a:r>
-            <a:endParaRPr lang="en-US" sz="1550" dirty="0"/>
+              <a:t>Connect the concept to data quality, model performance, validation evidence, monitoring measures, and decisions that.</a:t>
+            </a:r>
+            <a:endParaRPr lang="en-US" sz="1320" dirty="0"/>
           </a:p>
         </p:txBody>
       </p:sp>
@@ -4733,49 +4769,58 @@
           <a:ln/>
         </p:spPr>
         <p:txBody>
-          <a:bodyPr wrap="square" lIns="635" tIns="635" rIns="635" bIns="635" rtlCol="0" anchor="t">
+          <a:bodyPr wrap="square" lIns="1016" tIns="1016" rIns="1016" bIns="1016" rtlCol="0" anchor="t">
             <a:normAutofit/>
           </a:bodyPr>
           <a:lstStyle/>
           <a:p>
+            <a:pPr indent="0" marL="0">
+              <a:buNone/>
+            </a:pPr>
             <a:r>
               <a:rPr lang="en-US" sz="2100" dirty="0">
                 <a:solidFill>
-                  <a:srgbClr val="17364A"/>
-                </a:solidFill>
-                <a:latin typeface="Aptos" pitchFamily="34" charset="0"/>
-                <a:ea typeface="Aptos" pitchFamily="34" charset="-122"/>
-                <a:cs typeface="Aptos" pitchFamily="34" charset="-120"/>
-              </a:rPr>
-              <a:t>Silent feed failure.</a:t>
+                  <a:srgbClr val="003A63"/>
+                </a:solidFill>
+                <a:latin typeface="Aptos" pitchFamily="34" charset="0"/>
+                <a:ea typeface="Aptos" pitchFamily="34" charset="-122"/>
+                <a:cs typeface="Aptos" pitchFamily="34" charset="-120"/>
+              </a:rPr>
+              <a:t>• Silent feed failure.</a:t>
             </a:r>
             <a:endParaRPr lang="en-US" sz="2100" dirty="0"/>
           </a:p>
           <a:p>
+            <a:pPr indent="0" marL="0">
+              <a:buNone/>
+            </a:pPr>
             <a:r>
               <a:rPr lang="en-US" sz="2100" dirty="0">
                 <a:solidFill>
-                  <a:srgbClr val="17364A"/>
-                </a:solidFill>
-                <a:latin typeface="Aptos" pitchFamily="34" charset="0"/>
-                <a:ea typeface="Aptos" pitchFamily="34" charset="-122"/>
-                <a:cs typeface="Aptos" pitchFamily="34" charset="-120"/>
-              </a:rPr>
-              <a:t>A data feed can stop or change without visible failure in the AI interface.</a:t>
+                  <a:srgbClr val="003A63"/>
+                </a:solidFill>
+                <a:latin typeface="Aptos" pitchFamily="34" charset="0"/>
+                <a:ea typeface="Aptos" pitchFamily="34" charset="-122"/>
+                <a:cs typeface="Aptos" pitchFamily="34" charset="-120"/>
+              </a:rPr>
+              <a:t>• A data feed can stop or change without visible failure in the AI interface.</a:t>
             </a:r>
             <a:endParaRPr lang="en-US" sz="2100" dirty="0"/>
           </a:p>
           <a:p>
+            <a:pPr indent="0" marL="0">
+              <a:buNone/>
+            </a:pPr>
             <a:r>
               <a:rPr lang="en-US" sz="2100" dirty="0">
                 <a:solidFill>
-                  <a:srgbClr val="17364A"/>
-                </a:solidFill>
-                <a:latin typeface="Aptos" pitchFamily="34" charset="0"/>
-                <a:ea typeface="Aptos" pitchFamily="34" charset="-122"/>
-                <a:cs typeface="Aptos" pitchFamily="34" charset="-120"/>
-              </a:rPr>
-              <a:t>Guardrails include automated feed monitoring, expected volume thresholds, error queues, and.</a:t>
+                  <a:srgbClr val="003A63"/>
+                </a:solidFill>
+                <a:latin typeface="Aptos" pitchFamily="34" charset="0"/>
+                <a:ea typeface="Aptos" pitchFamily="34" charset="-122"/>
+                <a:cs typeface="Aptos" pitchFamily="34" charset="-120"/>
+              </a:rPr>
+              <a:t>• Guardrails include automated feed monitoring, expected volume thresholds, error queues, and.</a:t>
             </a:r>
             <a:endParaRPr lang="en-US" sz="2100" dirty="0"/>
           </a:p>
@@ -4855,17 +4900,17 @@
         </p:nvSpPr>
         <p:spPr>
           <a:xfrm>
-            <a:off x="7799832" y="1828800"/>
-            <a:ext cx="3145536" cy="685800"/>
-          </a:xfrm>
-          <a:prstGeom prst="rect">
-            <a:avLst/>
-          </a:prstGeom>
-          <a:noFill/>
-          <a:ln/>
-        </p:spPr>
-        <p:txBody>
-          <a:bodyPr wrap="square" lIns="0" tIns="0" rIns="0" bIns="0" rtlCol="0" anchor="t">
+            <a:off x="7799832" y="1801368"/>
+            <a:ext cx="3145536" cy="758952"/>
+          </a:xfrm>
+          <a:prstGeom prst="rect">
+            <a:avLst/>
+          </a:prstGeom>
+          <a:noFill/>
+          <a:ln/>
+        </p:spPr>
+        <p:txBody>
+          <a:bodyPr wrap="square" lIns="254" tIns="254" rIns="254" bIns="254" rtlCol="0" anchor="t">
             <a:normAutofit/>
           </a:bodyPr>
           <a:lstStyle/>
@@ -4874,7 +4919,7 @@
               <a:buNone/>
             </a:pPr>
             <a:r>
-              <a:rPr lang="en-US" sz="1550" dirty="0">
+              <a:rPr lang="en-US" sz="1320" dirty="0">
                 <a:solidFill>
                   <a:srgbClr val="17364A"/>
                 </a:solidFill>
@@ -4884,7 +4929,7 @@
               </a:rPr>
               <a:t>Silent feed failure.</a:t>
             </a:r>
-            <a:endParaRPr lang="en-US" sz="1550" dirty="0"/>
+            <a:endParaRPr lang="en-US" sz="1320" dirty="0"/>
           </a:p>
         </p:txBody>
       </p:sp>
@@ -4972,13 +5017,16 @@
           <a:ln/>
         </p:spPr>
         <p:txBody>
-          <a:bodyPr wrap="square" lIns="254" tIns="254" rIns="254" bIns="254" rtlCol="0" anchor="t">
+          <a:bodyPr wrap="square" lIns="508" tIns="508" rIns="508" bIns="508" rtlCol="0" anchor="t">
             <a:normAutofit/>
           </a:bodyPr>
           <a:lstStyle/>
           <a:p>
-            <a:r>
-              <a:rPr lang="en-US" sz="1380" dirty="0">
+            <a:pPr indent="0" marL="0">
+              <a:buNone/>
+            </a:pPr>
+            <a:r>
+              <a:rPr lang="en-US" sz="1220" dirty="0">
                 <a:solidFill>
                   <a:srgbClr val="17364A"/>
                 </a:solidFill>
@@ -4986,13 +5034,16 @@
                 <a:ea typeface="Aptos" pitchFamily="34" charset="-122"/>
                 <a:cs typeface="Aptos" pitchFamily="34" charset="-120"/>
               </a:rPr>
-              <a:t>Guardrails include automated feed monitoring, expected volume thresholds, error queues,.</a:t>
-            </a:r>
-            <a:endParaRPr lang="en-US" sz="1380" dirty="0"/>
-          </a:p>
-          <a:p>
-            <a:r>
-              <a:rPr lang="en-US" sz="1380" dirty="0">
+              <a:t>Guardrails include automated feed monitoring, expected volume.</a:t>
+            </a:r>
+            <a:endParaRPr lang="en-US" sz="1220" dirty="0"/>
+          </a:p>
+          <a:p>
+            <a:pPr indent="0" marL="0">
+              <a:buNone/>
+            </a:pPr>
+            <a:r>
+              <a:rPr lang="en-US" sz="1220" dirty="0">
                 <a:solidFill>
                   <a:srgbClr val="17364A"/>
                 </a:solidFill>
@@ -5002,11 +5053,14 @@
               </a:rPr>
               <a:t>Schema and terminology changes.</a:t>
             </a:r>
-            <a:endParaRPr lang="en-US" sz="1380" dirty="0"/>
-          </a:p>
-          <a:p>
-            <a:r>
-              <a:rPr lang="en-US" sz="1380" dirty="0">
+            <a:endParaRPr lang="en-US" sz="1220" dirty="0"/>
+          </a:p>
+          <a:p>
+            <a:pPr indent="0" marL="0">
+              <a:buNone/>
+            </a:pPr>
+            <a:r>
+              <a:rPr lang="en-US" sz="1220" dirty="0">
                 <a:solidFill>
                   <a:srgbClr val="17364A"/>
                 </a:solidFill>
@@ -5016,7 +5070,7 @@
               </a:rPr>
               <a:t>Source systems may change field names, formats, codes, or units.</a:t>
             </a:r>
-            <a:endParaRPr lang="en-US" sz="1380" dirty="0"/>
+            <a:endParaRPr lang="en-US" sz="1220" dirty="0"/>
           </a:p>
         </p:txBody>
       </p:sp>
@@ -5094,17 +5148,17 @@
         </p:nvSpPr>
         <p:spPr>
           <a:xfrm>
-            <a:off x="7799832" y="5001768"/>
-            <a:ext cx="3145536" cy="502920"/>
-          </a:xfrm>
-          <a:prstGeom prst="rect">
-            <a:avLst/>
-          </a:prstGeom>
-          <a:noFill/>
-          <a:ln/>
-        </p:spPr>
-        <p:txBody>
-          <a:bodyPr wrap="square" lIns="0" tIns="0" rIns="0" bIns="0" rtlCol="0" anchor="t">
+            <a:off x="7799832" y="4974336"/>
+            <a:ext cx="3145536" cy="576072"/>
+          </a:xfrm>
+          <a:prstGeom prst="rect">
+            <a:avLst/>
+          </a:prstGeom>
+          <a:noFill/>
+          <a:ln/>
+        </p:spPr>
+        <p:txBody>
+          <a:bodyPr wrap="square" lIns="254" tIns="254" rIns="254" bIns="254" rtlCol="0" anchor="t">
             <a:normAutofit/>
           </a:bodyPr>
           <a:lstStyle/>
@@ -5113,7 +5167,7 @@
               <a:buNone/>
             </a:pPr>
             <a:r>
-              <a:rPr lang="en-US" sz="1550" dirty="0">
+              <a:rPr lang="en-US" sz="1320" dirty="0">
                 <a:solidFill>
                   <a:srgbClr val="17364A"/>
                 </a:solidFill>
@@ -5121,9 +5175,9 @@
                 <a:ea typeface="Aptos" pitchFamily="34" charset="-122"/>
                 <a:cs typeface="Aptos" pitchFamily="34" charset="-120"/>
               </a:rPr>
-              <a:t>Identify what could go wrong, who could be affected, what safeguards are needed, and what evidence should be reviewed before use expands.</a:t>
-            </a:r>
-            <a:endParaRPr lang="en-US" sz="1550" dirty="0"/>
+              <a:t>Identify what could go wrong, who could be affected, what safeguards are needed, and what evidence should be reviewed.</a:t>
+            </a:r>
+            <a:endParaRPr lang="en-US" sz="1320" dirty="0"/>
           </a:p>
         </p:txBody>
       </p:sp>
@@ -5424,49 +5478,58 @@
           <a:ln/>
         </p:spPr>
         <p:txBody>
-          <a:bodyPr wrap="square" lIns="635" tIns="635" rIns="635" bIns="635" rtlCol="0" anchor="t">
+          <a:bodyPr wrap="square" lIns="1016" tIns="1016" rIns="1016" bIns="1016" rtlCol="0" anchor="t">
             <a:normAutofit/>
           </a:bodyPr>
           <a:lstStyle/>
           <a:p>
+            <a:pPr indent="0" marL="0">
+              <a:buNone/>
+            </a:pPr>
             <a:r>
               <a:rPr lang="en-US" sz="2100" dirty="0">
                 <a:solidFill>
-                  <a:srgbClr val="17364A"/>
-                </a:solidFill>
-                <a:latin typeface="Aptos" pitchFamily="34" charset="0"/>
-                <a:ea typeface="Aptos" pitchFamily="34" charset="-122"/>
-                <a:cs typeface="Aptos" pitchFamily="34" charset="-120"/>
-              </a:rPr>
-              <a:t>Weak lineage.</a:t>
+                  <a:srgbClr val="003A63"/>
+                </a:solidFill>
+                <a:latin typeface="Aptos" pitchFamily="34" charset="0"/>
+                <a:ea typeface="Aptos" pitchFamily="34" charset="-122"/>
+                <a:cs typeface="Aptos" pitchFamily="34" charset="-120"/>
+              </a:rPr>
+              <a:t>• Weak lineage.</a:t>
             </a:r>
             <a:endParaRPr lang="en-US" sz="2100" dirty="0"/>
           </a:p>
           <a:p>
+            <a:pPr indent="0" marL="0">
+              <a:buNone/>
+            </a:pPr>
             <a:r>
               <a:rPr lang="en-US" sz="2100" dirty="0">
                 <a:solidFill>
-                  <a:srgbClr val="17364A"/>
-                </a:solidFill>
-                <a:latin typeface="Aptos" pitchFamily="34" charset="0"/>
-                <a:ea typeface="Aptos" pitchFamily="34" charset="-122"/>
-                <a:cs typeface="Aptos" pitchFamily="34" charset="-120"/>
-              </a:rPr>
-              <a:t>If transformations are not documented, staff may not be able to explain or correct AI errors.</a:t>
+                  <a:srgbClr val="003A63"/>
+                </a:solidFill>
+                <a:latin typeface="Aptos" pitchFamily="34" charset="0"/>
+                <a:ea typeface="Aptos" pitchFamily="34" charset="-122"/>
+                <a:cs typeface="Aptos" pitchFamily="34" charset="-120"/>
+              </a:rPr>
+              <a:t>• If transformations are not documented, staff may not be able to explain or correct AI errors.</a:t>
             </a:r>
             <a:endParaRPr lang="en-US" sz="2100" dirty="0"/>
           </a:p>
           <a:p>
+            <a:pPr indent="0" marL="0">
+              <a:buNone/>
+            </a:pPr>
             <a:r>
               <a:rPr lang="en-US" sz="2100" dirty="0">
                 <a:solidFill>
-                  <a:srgbClr val="17364A"/>
-                </a:solidFill>
-                <a:latin typeface="Aptos" pitchFamily="34" charset="0"/>
-                <a:ea typeface="Aptos" pitchFamily="34" charset="-122"/>
-                <a:cs typeface="Aptos" pitchFamily="34" charset="-120"/>
-              </a:rPr>
-              <a:t>Guardrails include lineage documentation, version control, and audit trails.</a:t>
+                  <a:srgbClr val="003A63"/>
+                </a:solidFill>
+                <a:latin typeface="Aptos" pitchFamily="34" charset="0"/>
+                <a:ea typeface="Aptos" pitchFamily="34" charset="-122"/>
+                <a:cs typeface="Aptos" pitchFamily="34" charset="-120"/>
+              </a:rPr>
+              <a:t>• Guardrails include lineage documentation, version control, and audit trails.</a:t>
             </a:r>
             <a:endParaRPr lang="en-US" sz="2100" dirty="0"/>
           </a:p>
@@ -5546,17 +5609,17 @@
         </p:nvSpPr>
         <p:spPr>
           <a:xfrm>
-            <a:off x="7799832" y="1828800"/>
-            <a:ext cx="3145536" cy="685800"/>
-          </a:xfrm>
-          <a:prstGeom prst="rect">
-            <a:avLst/>
-          </a:prstGeom>
-          <a:noFill/>
-          <a:ln/>
-        </p:spPr>
-        <p:txBody>
-          <a:bodyPr wrap="square" lIns="0" tIns="0" rIns="0" bIns="0" rtlCol="0" anchor="t">
+            <a:off x="7799832" y="1801368"/>
+            <a:ext cx="3145536" cy="758952"/>
+          </a:xfrm>
+          <a:prstGeom prst="rect">
+            <a:avLst/>
+          </a:prstGeom>
+          <a:noFill/>
+          <a:ln/>
+        </p:spPr>
+        <p:txBody>
+          <a:bodyPr wrap="square" lIns="254" tIns="254" rIns="254" bIns="254" rtlCol="0" anchor="t">
             <a:normAutofit/>
           </a:bodyPr>
           <a:lstStyle/>
@@ -5565,7 +5628,7 @@
               <a:buNone/>
             </a:pPr>
             <a:r>
-              <a:rPr lang="en-US" sz="1550" dirty="0">
+              <a:rPr lang="en-US" sz="1320" dirty="0">
                 <a:solidFill>
                   <a:srgbClr val="17364A"/>
                 </a:solidFill>
@@ -5575,7 +5638,7 @@
               </a:rPr>
               <a:t>Weak lineage.</a:t>
             </a:r>
-            <a:endParaRPr lang="en-US" sz="1550" dirty="0"/>
+            <a:endParaRPr lang="en-US" sz="1320" dirty="0"/>
           </a:p>
         </p:txBody>
       </p:sp>
@@ -5663,13 +5726,16 @@
           <a:ln/>
         </p:spPr>
         <p:txBody>
-          <a:bodyPr wrap="square" lIns="254" tIns="254" rIns="254" bIns="254" rtlCol="0" anchor="t">
+          <a:bodyPr wrap="square" lIns="508" tIns="508" rIns="508" bIns="508" rtlCol="0" anchor="t">
             <a:normAutofit/>
           </a:bodyPr>
           <a:lstStyle/>
           <a:p>
-            <a:r>
-              <a:rPr lang="en-US" sz="1380" dirty="0">
+            <a:pPr indent="0" marL="0">
+              <a:buNone/>
+            </a:pPr>
+            <a:r>
+              <a:rPr lang="en-US" sz="1220" dirty="0">
                 <a:solidFill>
                   <a:srgbClr val="17364A"/>
                 </a:solidFill>
@@ -5679,11 +5745,14 @@
               </a:rPr>
               <a:t>Weak lineage.</a:t>
             </a:r>
-            <a:endParaRPr lang="en-US" sz="1380" dirty="0"/>
-          </a:p>
-          <a:p>
-            <a:r>
-              <a:rPr lang="en-US" sz="1380" dirty="0">
+            <a:endParaRPr lang="en-US" sz="1220" dirty="0"/>
+          </a:p>
+          <a:p>
+            <a:pPr indent="0" marL="0">
+              <a:buNone/>
+            </a:pPr>
+            <a:r>
+              <a:rPr lang="en-US" sz="1220" dirty="0">
                 <a:solidFill>
                   <a:srgbClr val="17364A"/>
                 </a:solidFill>
@@ -5691,13 +5760,16 @@
                 <a:ea typeface="Aptos" pitchFamily="34" charset="-122"/>
                 <a:cs typeface="Aptos" pitchFamily="34" charset="-120"/>
               </a:rPr>
-              <a:t>If transformations are not documented, staff may not be able to explain or correct AI.</a:t>
-            </a:r>
-            <a:endParaRPr lang="en-US" sz="1380" dirty="0"/>
-          </a:p>
-          <a:p>
-            <a:r>
-              <a:rPr lang="en-US" sz="1380" dirty="0">
+              <a:t>If transformations are not documented, staff may not be able to.</a:t>
+            </a:r>
+            <a:endParaRPr lang="en-US" sz="1220" dirty="0"/>
+          </a:p>
+          <a:p>
+            <a:pPr indent="0" marL="0">
+              <a:buNone/>
+            </a:pPr>
+            <a:r>
+              <a:rPr lang="en-US" sz="1220" dirty="0">
                 <a:solidFill>
                   <a:srgbClr val="17364A"/>
                 </a:solidFill>
@@ -5705,9 +5777,9 @@
                 <a:ea typeface="Aptos" pitchFamily="34" charset="-122"/>
                 <a:cs typeface="Aptos" pitchFamily="34" charset="-120"/>
               </a:rPr>
-              <a:t>Guardrails include lineage documentation, version control, and audit trails.</a:t>
-            </a:r>
-            <a:endParaRPr lang="en-US" sz="1380" dirty="0"/>
+              <a:t>Guardrails include lineage documentation, version control, and.</a:t>
+            </a:r>
+            <a:endParaRPr lang="en-US" sz="1220" dirty="0"/>
           </a:p>
         </p:txBody>
       </p:sp>
@@ -5785,17 +5857,17 @@
         </p:nvSpPr>
         <p:spPr>
           <a:xfrm>
-            <a:off x="7799832" y="5001768"/>
-            <a:ext cx="3145536" cy="502920"/>
-          </a:xfrm>
-          <a:prstGeom prst="rect">
-            <a:avLst/>
-          </a:prstGeom>
-          <a:noFill/>
-          <a:ln/>
-        </p:spPr>
-        <p:txBody>
-          <a:bodyPr wrap="square" lIns="0" tIns="0" rIns="0" bIns="0" rtlCol="0" anchor="t">
+            <a:off x="7799832" y="4974336"/>
+            <a:ext cx="3145536" cy="576072"/>
+          </a:xfrm>
+          <a:prstGeom prst="rect">
+            <a:avLst/>
+          </a:prstGeom>
+          <a:noFill/>
+          <a:ln/>
+        </p:spPr>
+        <p:txBody>
+          <a:bodyPr wrap="square" lIns="254" tIns="254" rIns="254" bIns="254" rtlCol="0" anchor="t">
             <a:normAutofit/>
           </a:bodyPr>
           <a:lstStyle/>
@@ -5804,7 +5876,7 @@
               <a:buNone/>
             </a:pPr>
             <a:r>
-              <a:rPr lang="en-US" sz="1550" dirty="0">
+              <a:rPr lang="en-US" sz="1320" dirty="0">
                 <a:solidFill>
                   <a:srgbClr val="17364A"/>
                 </a:solidFill>
@@ -5812,9 +5884,9 @@
                 <a:ea typeface="Aptos" pitchFamily="34" charset="-122"/>
                 <a:cs typeface="Aptos" pitchFamily="34" charset="-120"/>
               </a:rPr>
-              <a:t>Identify what could go wrong, who could be affected, what safeguards are needed, and what evidence should be reviewed before use expands.</a:t>
-            </a:r>
-            <a:endParaRPr lang="en-US" sz="1550" dirty="0"/>
+              <a:t>Identify what could go wrong, who could be affected, what safeguards are needed, and what evidence should be reviewed.</a:t>
+            </a:r>
+            <a:endParaRPr lang="en-US" sz="1320" dirty="0"/>
           </a:p>
         </p:txBody>
       </p:sp>
@@ -6115,49 +6187,58 @@
           <a:ln/>
         </p:spPr>
         <p:txBody>
-          <a:bodyPr wrap="square" lIns="635" tIns="635" rIns="635" bIns="635" rtlCol="0" anchor="t">
+          <a:bodyPr wrap="square" lIns="1016" tIns="1016" rIns="1016" bIns="1016" rtlCol="0" anchor="t">
             <a:normAutofit/>
           </a:bodyPr>
           <a:lstStyle/>
           <a:p>
+            <a:pPr indent="0" marL="0">
+              <a:buNone/>
+            </a:pPr>
             <a:r>
               <a:rPr lang="en-US" sz="2100" dirty="0">
                 <a:solidFill>
-                  <a:srgbClr val="17364A"/>
-                </a:solidFill>
-                <a:latin typeface="Aptos" pitchFamily="34" charset="0"/>
-                <a:ea typeface="Aptos" pitchFamily="34" charset="-122"/>
-                <a:cs typeface="Aptos" pitchFamily="34" charset="-120"/>
-              </a:rPr>
-              <a:t>Generative AI may use pipeline outputs to summarize records, but the summary should indicate source.</a:t>
+                  <a:srgbClr val="003A63"/>
+                </a:solidFill>
+                <a:latin typeface="Aptos" pitchFamily="34" charset="0"/>
+                <a:ea typeface="Aptos" pitchFamily="34" charset="-122"/>
+                <a:cs typeface="Aptos" pitchFamily="34" charset="-120"/>
+              </a:rPr>
+              <a:t>• Generative AI may use pipeline outputs to summarize records, but the summary should indicate.</a:t>
             </a:r>
             <a:endParaRPr lang="en-US" sz="2100" dirty="0"/>
           </a:p>
           <a:p>
+            <a:pPr indent="0" marL="0">
+              <a:buNone/>
+            </a:pPr>
             <a:r>
               <a:rPr lang="en-US" sz="2100" dirty="0">
                 <a:solidFill>
-                  <a:srgbClr val="17364A"/>
-                </a:solidFill>
-                <a:latin typeface="Aptos" pitchFamily="34" charset="0"/>
-                <a:ea typeface="Aptos" pitchFamily="34" charset="-122"/>
-                <a:cs typeface="Aptos" pitchFamily="34" charset="-120"/>
-              </a:rPr>
-              <a:t>Predictive models may rely on engineered features created by a pipeline, so the feature pipeline must.</a:t>
+                  <a:srgbClr val="003A63"/>
+                </a:solidFill>
+                <a:latin typeface="Aptos" pitchFamily="34" charset="0"/>
+                <a:ea typeface="Aptos" pitchFamily="34" charset="-122"/>
+                <a:cs typeface="Aptos" pitchFamily="34" charset="-120"/>
+              </a:rPr>
+              <a:t>• Predictive models may rely on engineered features created by a pipeline, so the feature.</a:t>
             </a:r>
             <a:endParaRPr lang="en-US" sz="2100" dirty="0"/>
           </a:p>
           <a:p>
+            <a:pPr indent="0" marL="0">
+              <a:buNone/>
+            </a:pPr>
             <a:r>
               <a:rPr lang="en-US" sz="2100" dirty="0">
                 <a:solidFill>
-                  <a:srgbClr val="17364A"/>
-                </a:solidFill>
-                <a:latin typeface="Aptos" pitchFamily="34" charset="0"/>
-                <a:ea typeface="Aptos" pitchFamily="34" charset="-122"/>
-                <a:cs typeface="Aptos" pitchFamily="34" charset="-120"/>
-              </a:rPr>
-              <a:t>RAG systems depend on document ingestion pipelines, which must track document source, version,.</a:t>
+                  <a:srgbClr val="003A63"/>
+                </a:solidFill>
+                <a:latin typeface="Aptos" pitchFamily="34" charset="0"/>
+                <a:ea typeface="Aptos" pitchFamily="34" charset="-122"/>
+                <a:cs typeface="Aptos" pitchFamily="34" charset="-120"/>
+              </a:rPr>
+              <a:t>• RAG systems depend on document ingestion pipelines, which must track document source, version,.</a:t>
             </a:r>
             <a:endParaRPr lang="en-US" sz="2100" dirty="0"/>
           </a:p>
@@ -6237,17 +6318,17 @@
         </p:nvSpPr>
         <p:spPr>
           <a:xfrm>
-            <a:off x="7799832" y="1828800"/>
-            <a:ext cx="3145536" cy="685800"/>
-          </a:xfrm>
-          <a:prstGeom prst="rect">
-            <a:avLst/>
-          </a:prstGeom>
-          <a:noFill/>
-          <a:ln/>
-        </p:spPr>
-        <p:txBody>
-          <a:bodyPr wrap="square" lIns="0" tIns="0" rIns="0" bIns="0" rtlCol="0" anchor="t">
+            <a:off x="7799832" y="1801368"/>
+            <a:ext cx="3145536" cy="758952"/>
+          </a:xfrm>
+          <a:prstGeom prst="rect">
+            <a:avLst/>
+          </a:prstGeom>
+          <a:noFill/>
+          <a:ln/>
+        </p:spPr>
+        <p:txBody>
+          <a:bodyPr wrap="square" lIns="254" tIns="254" rIns="254" bIns="254" rtlCol="0" anchor="t">
             <a:normAutofit/>
           </a:bodyPr>
           <a:lstStyle/>
@@ -6256,7 +6337,7 @@
               <a:buNone/>
             </a:pPr>
             <a:r>
-              <a:rPr lang="en-US" sz="1550" dirty="0">
+              <a:rPr lang="en-US" sz="1320" dirty="0">
                 <a:solidFill>
                   <a:srgbClr val="17364A"/>
                 </a:solidFill>
@@ -6266,7 +6347,7 @@
               </a:rPr>
               <a:t>Generative AI may use pipeline outputs to summarize records, but the summary should indicate source.</a:t>
             </a:r>
-            <a:endParaRPr lang="en-US" sz="1550" dirty="0"/>
+            <a:endParaRPr lang="en-US" sz="1320" dirty="0"/>
           </a:p>
         </p:txBody>
       </p:sp>
@@ -6354,13 +6435,16 @@
           <a:ln/>
         </p:spPr>
         <p:txBody>
-          <a:bodyPr wrap="square" lIns="254" tIns="254" rIns="254" bIns="254" rtlCol="0" anchor="t">
+          <a:bodyPr wrap="square" lIns="508" tIns="508" rIns="508" bIns="508" rtlCol="0" anchor="t">
             <a:normAutofit/>
           </a:bodyPr>
           <a:lstStyle/>
           <a:p>
-            <a:r>
-              <a:rPr lang="en-US" sz="1380" dirty="0">
+            <a:pPr indent="0" marL="0">
+              <a:buNone/>
+            </a:pPr>
+            <a:r>
+              <a:rPr lang="en-US" sz="1220" dirty="0">
                 <a:solidFill>
                   <a:srgbClr val="17364A"/>
                 </a:solidFill>
@@ -6368,13 +6452,16 @@
                 <a:ea typeface="Aptos" pitchFamily="34" charset="-122"/>
                 <a:cs typeface="Aptos" pitchFamily="34" charset="-120"/>
               </a:rPr>
-              <a:t>Generative AI may use pipeline outputs to summarize records, but the summary should.</a:t>
-            </a:r>
-            <a:endParaRPr lang="en-US" sz="1380" dirty="0"/>
-          </a:p>
-          <a:p>
-            <a:r>
-              <a:rPr lang="en-US" sz="1380" dirty="0">
+              <a:t>Generative AI may use pipeline outputs to summarize records, but.</a:t>
+            </a:r>
+            <a:endParaRPr lang="en-US" sz="1220" dirty="0"/>
+          </a:p>
+          <a:p>
+            <a:pPr indent="0" marL="0">
+              <a:buNone/>
+            </a:pPr>
+            <a:r>
+              <a:rPr lang="en-US" sz="1220" dirty="0">
                 <a:solidFill>
                   <a:srgbClr val="17364A"/>
                 </a:solidFill>
@@ -6382,13 +6469,16 @@
                 <a:ea typeface="Aptos" pitchFamily="34" charset="-122"/>
                 <a:cs typeface="Aptos" pitchFamily="34" charset="-120"/>
               </a:rPr>
-              <a:t>Predictive models may rely on engineered features created by a pipeline, so the feature.</a:t>
-            </a:r>
-            <a:endParaRPr lang="en-US" sz="1380" dirty="0"/>
-          </a:p>
-          <a:p>
-            <a:r>
-              <a:rPr lang="en-US" sz="1380" dirty="0">
+              <a:t>Predictive models may rely on engineered features created by a.</a:t>
+            </a:r>
+            <a:endParaRPr lang="en-US" sz="1220" dirty="0"/>
+          </a:p>
+          <a:p>
+            <a:pPr indent="0" marL="0">
+              <a:buNone/>
+            </a:pPr>
+            <a:r>
+              <a:rPr lang="en-US" sz="1220" dirty="0">
                 <a:solidFill>
                   <a:srgbClr val="17364A"/>
                 </a:solidFill>
@@ -6396,9 +6486,9 @@
                 <a:ea typeface="Aptos" pitchFamily="34" charset="-122"/>
                 <a:cs typeface="Aptos" pitchFamily="34" charset="-120"/>
               </a:rPr>
-              <a:t>RAG systems depend on document ingestion pipelines, which must track document source,.</a:t>
-            </a:r>
-            <a:endParaRPr lang="en-US" sz="1380" dirty="0"/>
+              <a:t>RAG systems depend on document ingestion pipelines, which must.</a:t>
+            </a:r>
+            <a:endParaRPr lang="en-US" sz="1220" dirty="0"/>
           </a:p>
         </p:txBody>
       </p:sp>
@@ -6476,17 +6566,17 @@
         </p:nvSpPr>
         <p:spPr>
           <a:xfrm>
-            <a:off x="7799832" y="5001768"/>
-            <a:ext cx="3145536" cy="502920"/>
-          </a:xfrm>
-          <a:prstGeom prst="rect">
-            <a:avLst/>
-          </a:prstGeom>
-          <a:noFill/>
-          <a:ln/>
-        </p:spPr>
-        <p:txBody>
-          <a:bodyPr wrap="square" lIns="0" tIns="0" rIns="0" bIns="0" rtlCol="0" anchor="t">
+            <a:off x="7799832" y="4974336"/>
+            <a:ext cx="3145536" cy="576072"/>
+          </a:xfrm>
+          <a:prstGeom prst="rect">
+            <a:avLst/>
+          </a:prstGeom>
+          <a:noFill/>
+          <a:ln/>
+        </p:spPr>
+        <p:txBody>
+          <a:bodyPr wrap="square" lIns="254" tIns="254" rIns="254" bIns="254" rtlCol="0" anchor="t">
             <a:normAutofit/>
           </a:bodyPr>
           <a:lstStyle/>
@@ -6495,7 +6585,7 @@
               <a:buNone/>
             </a:pPr>
             <a:r>
-              <a:rPr lang="en-US" sz="1550" dirty="0">
+              <a:rPr lang="en-US" sz="1320" dirty="0">
                 <a:solidFill>
                   <a:srgbClr val="17364A"/>
                 </a:solidFill>
@@ -6503,9 +6593,9 @@
                 <a:ea typeface="Aptos" pitchFamily="34" charset="-122"/>
                 <a:cs typeface="Aptos" pitchFamily="34" charset="-120"/>
               </a:rPr>
-              <a:t>Connect the concept to data quality, model performance, validation evidence, monitoring measures, and decisions that remain under human control.</a:t>
-            </a:r>
-            <a:endParaRPr lang="en-US" sz="1550" dirty="0"/>
+              <a:t>Connect the concept to data quality, model performance, validation evidence, monitoring measures, and decisions that.</a:t>
+            </a:r>
+            <a:endParaRPr lang="en-US" sz="1320" dirty="0"/>
           </a:p>
         </p:txBody>
       </p:sp>
@@ -6806,49 +6896,58 @@
           <a:ln/>
         </p:spPr>
         <p:txBody>
-          <a:bodyPr wrap="square" lIns="635" tIns="635" rIns="635" bIns="635" rtlCol="0" anchor="t">
+          <a:bodyPr wrap="square" lIns="1016" tIns="1016" rIns="1016" bIns="1016" rtlCol="0" anchor="t">
             <a:normAutofit/>
           </a:bodyPr>
           <a:lstStyle/>
           <a:p>
+            <a:pPr indent="0" marL="0">
+              <a:buNone/>
+            </a:pPr>
             <a:r>
               <a:rPr lang="en-US" sz="2100" dirty="0">
                 <a:solidFill>
-                  <a:srgbClr val="17364A"/>
-                </a:solidFill>
-                <a:latin typeface="Aptos" pitchFamily="34" charset="0"/>
-                <a:ea typeface="Aptos" pitchFamily="34" charset="-122"/>
-                <a:cs typeface="Aptos" pitchFamily="34" charset="-120"/>
-              </a:rPr>
-              <a:t>Which public health data feeds are most important to daily decisions in your program?</a:t>
+                  <a:srgbClr val="003A63"/>
+                </a:solidFill>
+                <a:latin typeface="Aptos" pitchFamily="34" charset="0"/>
+                <a:ea typeface="Aptos" pitchFamily="34" charset="-122"/>
+                <a:cs typeface="Aptos" pitchFamily="34" charset="-120"/>
+              </a:rPr>
+              <a:t>• Which public health data feeds are most important to daily decisions in your program?</a:t>
             </a:r>
             <a:endParaRPr lang="en-US" sz="2100" dirty="0"/>
           </a:p>
           <a:p>
+            <a:pPr indent="0" marL="0">
+              <a:buNone/>
+            </a:pPr>
             <a:r>
               <a:rPr lang="en-US" sz="2100" dirty="0">
                 <a:solidFill>
-                  <a:srgbClr val="17364A"/>
-                </a:solidFill>
-                <a:latin typeface="Aptos" pitchFamily="34" charset="0"/>
-                <a:ea typeface="Aptos" pitchFamily="34" charset="-122"/>
-                <a:cs typeface="Aptos" pitchFamily="34" charset="-120"/>
-              </a:rPr>
-              <a:t>Which pipelines are automatically monitored, and which depend on manual review?</a:t>
+                  <a:srgbClr val="003A63"/>
+                </a:solidFill>
+                <a:latin typeface="Aptos" pitchFamily="34" charset="0"/>
+                <a:ea typeface="Aptos" pitchFamily="34" charset="-122"/>
+                <a:cs typeface="Aptos" pitchFamily="34" charset="-120"/>
+              </a:rPr>
+              <a:t>• Which pipelines are automatically monitored, and which depend on manual review?</a:t>
             </a:r>
             <a:endParaRPr lang="en-US" sz="2100" dirty="0"/>
           </a:p>
           <a:p>
+            <a:pPr indent="0" marL="0">
+              <a:buNone/>
+            </a:pPr>
             <a:r>
               <a:rPr lang="en-US" sz="2100" dirty="0">
                 <a:solidFill>
-                  <a:srgbClr val="17364A"/>
-                </a:solidFill>
-                <a:latin typeface="Aptos" pitchFamily="34" charset="0"/>
-                <a:ea typeface="Aptos" pitchFamily="34" charset="-122"/>
-                <a:cs typeface="Aptos" pitchFamily="34" charset="-120"/>
-              </a:rPr>
-              <a:t>What failures would materially affect an AI output?</a:t>
+                  <a:srgbClr val="003A63"/>
+                </a:solidFill>
+                <a:latin typeface="Aptos" pitchFamily="34" charset="0"/>
+                <a:ea typeface="Aptos" pitchFamily="34" charset="-122"/>
+                <a:cs typeface="Aptos" pitchFamily="34" charset="-120"/>
+              </a:rPr>
+              <a:t>• What failures would materially affect an AI output?</a:t>
             </a:r>
             <a:endParaRPr lang="en-US" sz="2100" dirty="0"/>
           </a:p>
@@ -6928,17 +7027,17 @@
         </p:nvSpPr>
         <p:spPr>
           <a:xfrm>
-            <a:off x="7799832" y="1828800"/>
-            <a:ext cx="3145536" cy="685800"/>
-          </a:xfrm>
-          <a:prstGeom prst="rect">
-            <a:avLst/>
-          </a:prstGeom>
-          <a:noFill/>
-          <a:ln/>
-        </p:spPr>
-        <p:txBody>
-          <a:bodyPr wrap="square" lIns="0" tIns="0" rIns="0" bIns="0" rtlCol="0" anchor="t">
+            <a:off x="7799832" y="1801368"/>
+            <a:ext cx="3145536" cy="758952"/>
+          </a:xfrm>
+          <a:prstGeom prst="rect">
+            <a:avLst/>
+          </a:prstGeom>
+          <a:noFill/>
+          <a:ln/>
+        </p:spPr>
+        <p:txBody>
+          <a:bodyPr wrap="square" lIns="254" tIns="254" rIns="254" bIns="254" rtlCol="0" anchor="t">
             <a:normAutofit/>
           </a:bodyPr>
           <a:lstStyle/>
@@ -6947,7 +7046,7 @@
               <a:buNone/>
             </a:pPr>
             <a:r>
-              <a:rPr lang="en-US" sz="1550" dirty="0">
+              <a:rPr lang="en-US" sz="1320" dirty="0">
                 <a:solidFill>
                   <a:srgbClr val="17364A"/>
                 </a:solidFill>
@@ -6957,7 +7056,7 @@
               </a:rPr>
               <a:t>Which public health data feeds are most important to daily decisions in your program?</a:t>
             </a:r>
-            <a:endParaRPr lang="en-US" sz="1550" dirty="0"/>
+            <a:endParaRPr lang="en-US" sz="1320" dirty="0"/>
           </a:p>
         </p:txBody>
       </p:sp>
@@ -7045,13 +7144,16 @@
           <a:ln/>
         </p:spPr>
         <p:txBody>
-          <a:bodyPr wrap="square" lIns="254" tIns="254" rIns="254" bIns="254" rtlCol="0" anchor="t">
+          <a:bodyPr wrap="square" lIns="508" tIns="508" rIns="508" bIns="508" rtlCol="0" anchor="t">
             <a:normAutofit/>
           </a:bodyPr>
           <a:lstStyle/>
           <a:p>
-            <a:r>
-              <a:rPr lang="en-US" sz="1380" dirty="0">
+            <a:pPr indent="0" marL="0">
+              <a:buNone/>
+            </a:pPr>
+            <a:r>
+              <a:rPr lang="en-US" sz="1220" dirty="0">
                 <a:solidFill>
                   <a:srgbClr val="17364A"/>
                 </a:solidFill>
@@ -7059,13 +7161,16 @@
                 <a:ea typeface="Aptos" pitchFamily="34" charset="-122"/>
                 <a:cs typeface="Aptos" pitchFamily="34" charset="-120"/>
               </a:rPr>
-              <a:t>Which public health data feeds are most important to daily decisions in your program?</a:t>
-            </a:r>
-            <a:endParaRPr lang="en-US" sz="1380" dirty="0"/>
-          </a:p>
-          <a:p>
-            <a:r>
-              <a:rPr lang="en-US" sz="1380" dirty="0">
+              <a:t>Which public health data feeds are most important to daily.</a:t>
+            </a:r>
+            <a:endParaRPr lang="en-US" sz="1220" dirty="0"/>
+          </a:p>
+          <a:p>
+            <a:pPr indent="0" marL="0">
+              <a:buNone/>
+            </a:pPr>
+            <a:r>
+              <a:rPr lang="en-US" sz="1220" dirty="0">
                 <a:solidFill>
                   <a:srgbClr val="17364A"/>
                 </a:solidFill>
@@ -7073,13 +7178,16 @@
                 <a:ea typeface="Aptos" pitchFamily="34" charset="-122"/>
                 <a:cs typeface="Aptos" pitchFamily="34" charset="-120"/>
               </a:rPr>
-              <a:t>Which pipelines are automatically monitored, and which depend on manual review?</a:t>
-            </a:r>
-            <a:endParaRPr lang="en-US" sz="1380" dirty="0"/>
-          </a:p>
-          <a:p>
-            <a:r>
-              <a:rPr lang="en-US" sz="1380" dirty="0">
+              <a:t>Which pipelines are automatically monitored, and which depend on.</a:t>
+            </a:r>
+            <a:endParaRPr lang="en-US" sz="1220" dirty="0"/>
+          </a:p>
+          <a:p>
+            <a:pPr indent="0" marL="0">
+              <a:buNone/>
+            </a:pPr>
+            <a:r>
+              <a:rPr lang="en-US" sz="1220" dirty="0">
                 <a:solidFill>
                   <a:srgbClr val="17364A"/>
                 </a:solidFill>
@@ -7089,7 +7197,7 @@
               </a:rPr>
               <a:t>What failures would materially affect an AI output?</a:t>
             </a:r>
-            <a:endParaRPr lang="en-US" sz="1380" dirty="0"/>
+            <a:endParaRPr lang="en-US" sz="1220" dirty="0"/>
           </a:p>
         </p:txBody>
       </p:sp>
@@ -7167,17 +7275,17 @@
         </p:nvSpPr>
         <p:spPr>
           <a:xfrm>
-            <a:off x="7799832" y="5001768"/>
-            <a:ext cx="3145536" cy="502920"/>
-          </a:xfrm>
-          <a:prstGeom prst="rect">
-            <a:avLst/>
-          </a:prstGeom>
-          <a:noFill/>
-          <a:ln/>
-        </p:spPr>
-        <p:txBody>
-          <a:bodyPr wrap="square" lIns="0" tIns="0" rIns="0" bIns="0" rtlCol="0" anchor="t">
+            <a:off x="7799832" y="4974336"/>
+            <a:ext cx="3145536" cy="576072"/>
+          </a:xfrm>
+          <a:prstGeom prst="rect">
+            <a:avLst/>
+          </a:prstGeom>
+          <a:noFill/>
+          <a:ln/>
+        </p:spPr>
+        <p:txBody>
+          <a:bodyPr wrap="square" lIns="254" tIns="254" rIns="254" bIns="254" rtlCol="0" anchor="t">
             <a:normAutofit/>
           </a:bodyPr>
           <a:lstStyle/>
@@ -7186,7 +7294,7 @@
               <a:buNone/>
             </a:pPr>
             <a:r>
-              <a:rPr lang="en-US" sz="1550" dirty="0">
+              <a:rPr lang="en-US" sz="1320" dirty="0">
                 <a:solidFill>
                   <a:srgbClr val="17364A"/>
                 </a:solidFill>
@@ -7194,9 +7302,9 @@
                 <a:ea typeface="Aptos" pitchFamily="34" charset="-122"/>
                 <a:cs typeface="Aptos" pitchFamily="34" charset="-120"/>
               </a:rPr>
-              <a:t>Connect the concept to data quality, model performance, validation evidence, monitoring measures, and decisions that remain under human control.</a:t>
-            </a:r>
-            <a:endParaRPr lang="en-US" sz="1550" dirty="0"/>
+              <a:t>Connect the concept to data quality, model performance, validation evidence, monitoring measures, and decisions that.</a:t>
+            </a:r>
+            <a:endParaRPr lang="en-US" sz="1320" dirty="0"/>
           </a:p>
         </p:txBody>
       </p:sp>
@@ -7497,35 +7605,41 @@
           <a:ln/>
         </p:spPr>
         <p:txBody>
-          <a:bodyPr wrap="square" lIns="635" tIns="635" rIns="635" bIns="635" rtlCol="0" anchor="t">
+          <a:bodyPr wrap="square" lIns="1016" tIns="1016" rIns="1016" bIns="1016" rtlCol="0" anchor="t">
             <a:normAutofit/>
           </a:bodyPr>
           <a:lstStyle/>
           <a:p>
+            <a:pPr indent="0" marL="0">
+              <a:buNone/>
+            </a:pPr>
             <a:r>
               <a:rPr lang="en-US" sz="2100" dirty="0">
                 <a:solidFill>
-                  <a:srgbClr val="17364A"/>
-                </a:solidFill>
-                <a:latin typeface="Aptos" pitchFamily="34" charset="0"/>
-                <a:ea typeface="Aptos" pitchFamily="34" charset="-122"/>
-                <a:cs typeface="Aptos" pitchFamily="34" charset="-120"/>
-              </a:rPr>
-              <a:t>How would staff know if an AI output was based on stale or incomplete data?</a:t>
+                  <a:srgbClr val="003A63"/>
+                </a:solidFill>
+                <a:latin typeface="Aptos" pitchFamily="34" charset="0"/>
+                <a:ea typeface="Aptos" pitchFamily="34" charset="-122"/>
+                <a:cs typeface="Aptos" pitchFamily="34" charset="-120"/>
+              </a:rPr>
+              <a:t>• How would staff know if an AI output was based on stale or incomplete data?</a:t>
             </a:r>
             <a:endParaRPr lang="en-US" sz="2100" dirty="0"/>
           </a:p>
           <a:p>
+            <a:pPr indent="0" marL="0">
+              <a:buNone/>
+            </a:pPr>
             <a:r>
               <a:rPr lang="en-US" sz="2100" dirty="0">
                 <a:solidFill>
-                  <a:srgbClr val="17364A"/>
-                </a:solidFill>
-                <a:latin typeface="Aptos" pitchFamily="34" charset="0"/>
-                <a:ea typeface="Aptos" pitchFamily="34" charset="-122"/>
-                <a:cs typeface="Aptos" pitchFamily="34" charset="-120"/>
-              </a:rPr>
-              <a:t>Who has authority to pause AI use when a pipeline fails?</a:t>
+                  <a:srgbClr val="003A63"/>
+                </a:solidFill>
+                <a:latin typeface="Aptos" pitchFamily="34" charset="0"/>
+                <a:ea typeface="Aptos" pitchFamily="34" charset="-122"/>
+                <a:cs typeface="Aptos" pitchFamily="34" charset="-120"/>
+              </a:rPr>
+              <a:t>• Who has authority to pause AI use when a pipeline fails?</a:t>
             </a:r>
             <a:endParaRPr lang="en-US" sz="2100" dirty="0"/>
           </a:p>
@@ -7605,17 +7719,17 @@
         </p:nvSpPr>
         <p:spPr>
           <a:xfrm>
-            <a:off x="7799832" y="1828800"/>
-            <a:ext cx="3145536" cy="685800"/>
-          </a:xfrm>
-          <a:prstGeom prst="rect">
-            <a:avLst/>
-          </a:prstGeom>
-          <a:noFill/>
-          <a:ln/>
-        </p:spPr>
-        <p:txBody>
-          <a:bodyPr wrap="square" lIns="0" tIns="0" rIns="0" bIns="0" rtlCol="0" anchor="t">
+            <a:off x="7799832" y="1801368"/>
+            <a:ext cx="3145536" cy="758952"/>
+          </a:xfrm>
+          <a:prstGeom prst="rect">
+            <a:avLst/>
+          </a:prstGeom>
+          <a:noFill/>
+          <a:ln/>
+        </p:spPr>
+        <p:txBody>
+          <a:bodyPr wrap="square" lIns="254" tIns="254" rIns="254" bIns="254" rtlCol="0" anchor="t">
             <a:normAutofit/>
           </a:bodyPr>
           <a:lstStyle/>
@@ -7624,7 +7738,7 @@
               <a:buNone/>
             </a:pPr>
             <a:r>
-              <a:rPr lang="en-US" sz="1550" dirty="0">
+              <a:rPr lang="en-US" sz="1320" dirty="0">
                 <a:solidFill>
                   <a:srgbClr val="17364A"/>
                 </a:solidFill>
@@ -7634,7 +7748,7 @@
               </a:rPr>
               <a:t>How would staff know if an AI output was based on stale or incomplete data?</a:t>
             </a:r>
-            <a:endParaRPr lang="en-US" sz="1550" dirty="0"/>
+            <a:endParaRPr lang="en-US" sz="1320" dirty="0"/>
           </a:p>
         </p:txBody>
       </p:sp>
@@ -7722,13 +7836,16 @@
           <a:ln/>
         </p:spPr>
         <p:txBody>
-          <a:bodyPr wrap="square" lIns="254" tIns="254" rIns="254" bIns="254" rtlCol="0" anchor="t">
+          <a:bodyPr wrap="square" lIns="508" tIns="508" rIns="508" bIns="508" rtlCol="0" anchor="t">
             <a:normAutofit/>
           </a:bodyPr>
           <a:lstStyle/>
           <a:p>
-            <a:r>
-              <a:rPr lang="en-US" sz="1380" dirty="0">
+            <a:pPr indent="0" marL="0">
+              <a:buNone/>
+            </a:pPr>
+            <a:r>
+              <a:rPr lang="en-US" sz="1220" dirty="0">
                 <a:solidFill>
                   <a:srgbClr val="17364A"/>
                 </a:solidFill>
@@ -7736,13 +7853,16 @@
                 <a:ea typeface="Aptos" pitchFamily="34" charset="-122"/>
                 <a:cs typeface="Aptos" pitchFamily="34" charset="-120"/>
               </a:rPr>
-              <a:t>How would staff know if an AI output was based on stale or incomplete data?</a:t>
-            </a:r>
-            <a:endParaRPr lang="en-US" sz="1380" dirty="0"/>
-          </a:p>
-          <a:p>
-            <a:r>
-              <a:rPr lang="en-US" sz="1380" dirty="0">
+              <a:t>How would staff know if an AI output was based on stale or.</a:t>
+            </a:r>
+            <a:endParaRPr lang="en-US" sz="1220" dirty="0"/>
+          </a:p>
+          <a:p>
+            <a:pPr indent="0" marL="0">
+              <a:buNone/>
+            </a:pPr>
+            <a:r>
+              <a:rPr lang="en-US" sz="1220" dirty="0">
                 <a:solidFill>
                   <a:srgbClr val="17364A"/>
                 </a:solidFill>
@@ -7752,7 +7872,7 @@
               </a:rPr>
               <a:t>Who has authority to pause AI use when a pipeline fails?</a:t>
             </a:r>
-            <a:endParaRPr lang="en-US" sz="1380" dirty="0"/>
+            <a:endParaRPr lang="en-US" sz="1220" dirty="0"/>
           </a:p>
         </p:txBody>
       </p:sp>
@@ -7830,17 +7950,17 @@
         </p:nvSpPr>
         <p:spPr>
           <a:xfrm>
-            <a:off x="7799832" y="5001768"/>
-            <a:ext cx="3145536" cy="502920"/>
-          </a:xfrm>
-          <a:prstGeom prst="rect">
-            <a:avLst/>
-          </a:prstGeom>
-          <a:noFill/>
-          <a:ln/>
-        </p:spPr>
-        <p:txBody>
-          <a:bodyPr wrap="square" lIns="0" tIns="0" rIns="0" bIns="0" rtlCol="0" anchor="t">
+            <a:off x="7799832" y="4974336"/>
+            <a:ext cx="3145536" cy="576072"/>
+          </a:xfrm>
+          <a:prstGeom prst="rect">
+            <a:avLst/>
+          </a:prstGeom>
+          <a:noFill/>
+          <a:ln/>
+        </p:spPr>
+        <p:txBody>
+          <a:bodyPr wrap="square" lIns="254" tIns="254" rIns="254" bIns="254" rtlCol="0" anchor="t">
             <a:normAutofit/>
           </a:bodyPr>
           <a:lstStyle/>
@@ -7849,7 +7969,7 @@
               <a:buNone/>
             </a:pPr>
             <a:r>
-              <a:rPr lang="en-US" sz="1550" dirty="0">
+              <a:rPr lang="en-US" sz="1320" dirty="0">
                 <a:solidFill>
                   <a:srgbClr val="17364A"/>
                 </a:solidFill>
@@ -7857,9 +7977,9 @@
                 <a:ea typeface="Aptos" pitchFamily="34" charset="-122"/>
                 <a:cs typeface="Aptos" pitchFamily="34" charset="-120"/>
               </a:rPr>
-              <a:t>Connect the concept to data quality, model performance, validation evidence, monitoring measures, and decisions that remain under human control.</a:t>
-            </a:r>
-            <a:endParaRPr lang="en-US" sz="1550" dirty="0"/>
+              <a:t>Connect the concept to data quality, model performance, validation evidence, monitoring measures, and decisions that.</a:t>
+            </a:r>
+            <a:endParaRPr lang="en-US" sz="1320" dirty="0"/>
           </a:p>
         </p:txBody>
       </p:sp>
@@ -8160,49 +8280,58 @@
           <a:ln/>
         </p:spPr>
         <p:txBody>
-          <a:bodyPr wrap="square" lIns="635" tIns="635" rIns="635" bIns="635" rtlCol="0" anchor="t">
+          <a:bodyPr wrap="square" lIns="1016" tIns="1016" rIns="1016" bIns="1016" rtlCol="0" anchor="t">
             <a:normAutofit/>
           </a:bodyPr>
           <a:lstStyle/>
           <a:p>
+            <a:pPr indent="0" marL="0">
+              <a:buNone/>
+            </a:pPr>
             <a:r>
               <a:rPr lang="en-US" sz="2100" dirty="0">
                 <a:solidFill>
-                  <a:srgbClr val="17364A"/>
-                </a:solidFill>
-                <a:latin typeface="Aptos" pitchFamily="34" charset="0"/>
-                <a:ea typeface="Aptos" pitchFamily="34" charset="-122"/>
-                <a:cs typeface="Aptos" pitchFamily="34" charset="-120"/>
-              </a:rPr>
-              <a:t>Create a data pipeline readiness checklist for one AI-supported workflow.</a:t>
+                  <a:srgbClr val="003A63"/>
+                </a:solidFill>
+                <a:latin typeface="Aptos" pitchFamily="34" charset="0"/>
+                <a:ea typeface="Aptos" pitchFamily="34" charset="-122"/>
+                <a:cs typeface="Aptos" pitchFamily="34" charset="-120"/>
+              </a:rPr>
+              <a:t>• Create a data pipeline readiness checklist for one AI-supported workflow.</a:t>
             </a:r>
             <a:endParaRPr lang="en-US" sz="2100" dirty="0"/>
           </a:p>
           <a:p>
+            <a:pPr indent="0" marL="0">
+              <a:buNone/>
+            </a:pPr>
             <a:r>
               <a:rPr lang="en-US" sz="2100" dirty="0">
                 <a:solidFill>
-                  <a:srgbClr val="17364A"/>
-                </a:solidFill>
-                <a:latin typeface="Aptos" pitchFamily="34" charset="0"/>
-                <a:ea typeface="Aptos" pitchFamily="34" charset="-122"/>
-                <a:cs typeface="Aptos" pitchFamily="34" charset="-120"/>
-              </a:rPr>
-              <a:t>Identify the data source, update frequency, required fields, validation checks, transformations,.</a:t>
+                  <a:srgbClr val="003A63"/>
+                </a:solidFill>
+                <a:latin typeface="Aptos" pitchFamily="34" charset="0"/>
+                <a:ea typeface="Aptos" pitchFamily="34" charset="-122"/>
+                <a:cs typeface="Aptos" pitchFamily="34" charset="-120"/>
+              </a:rPr>
+              <a:t>• Identify the data source, update frequency, required fields, validation checks,.</a:t>
             </a:r>
             <a:endParaRPr lang="en-US" sz="2100" dirty="0"/>
           </a:p>
           <a:p>
+            <a:pPr indent="0" marL="0">
+              <a:buNone/>
+            </a:pPr>
             <a:r>
               <a:rPr lang="en-US" sz="2100" dirty="0">
                 <a:solidFill>
-                  <a:srgbClr val="17364A"/>
-                </a:solidFill>
-                <a:latin typeface="Aptos" pitchFamily="34" charset="0"/>
-                <a:ea typeface="Aptos" pitchFamily="34" charset="-122"/>
-                <a:cs typeface="Aptos" pitchFamily="34" charset="-120"/>
-              </a:rPr>
-              <a:t>Document at least three pipeline failure scenarios and describe how each should be detected, escalated,.</a:t>
+                  <a:srgbClr val="003A63"/>
+                </a:solidFill>
+                <a:latin typeface="Aptos" pitchFamily="34" charset="0"/>
+                <a:ea typeface="Aptos" pitchFamily="34" charset="-122"/>
+                <a:cs typeface="Aptos" pitchFamily="34" charset="-120"/>
+              </a:rPr>
+              <a:t>• Document at least three pipeline failure scenarios and describe how each should be detected,.</a:t>
             </a:r>
             <a:endParaRPr lang="en-US" sz="2100" dirty="0"/>
           </a:p>
@@ -8282,17 +8411,17 @@
         </p:nvSpPr>
         <p:spPr>
           <a:xfrm>
-            <a:off x="7799832" y="1828800"/>
-            <a:ext cx="3145536" cy="685800"/>
-          </a:xfrm>
-          <a:prstGeom prst="rect">
-            <a:avLst/>
-          </a:prstGeom>
-          <a:noFill/>
-          <a:ln/>
-        </p:spPr>
-        <p:txBody>
-          <a:bodyPr wrap="square" lIns="0" tIns="0" rIns="0" bIns="0" rtlCol="0" anchor="t">
+            <a:off x="7799832" y="1801368"/>
+            <a:ext cx="3145536" cy="758952"/>
+          </a:xfrm>
+          <a:prstGeom prst="rect">
+            <a:avLst/>
+          </a:prstGeom>
+          <a:noFill/>
+          <a:ln/>
+        </p:spPr>
+        <p:txBody>
+          <a:bodyPr wrap="square" lIns="254" tIns="254" rIns="254" bIns="254" rtlCol="0" anchor="t">
             <a:normAutofit/>
           </a:bodyPr>
           <a:lstStyle/>
@@ -8301,7 +8430,7 @@
               <a:buNone/>
             </a:pPr>
             <a:r>
-              <a:rPr lang="en-US" sz="1550" dirty="0">
+              <a:rPr lang="en-US" sz="1320" dirty="0">
                 <a:solidFill>
                   <a:srgbClr val="17364A"/>
                 </a:solidFill>
@@ -8311,7 +8440,7 @@
               </a:rPr>
               <a:t>Create a data pipeline readiness checklist for one AI-supported workflow.</a:t>
             </a:r>
-            <a:endParaRPr lang="en-US" sz="1550" dirty="0"/>
+            <a:endParaRPr lang="en-US" sz="1320" dirty="0"/>
           </a:p>
         </p:txBody>
       </p:sp>
@@ -8399,13 +8528,16 @@
           <a:ln/>
         </p:spPr>
         <p:txBody>
-          <a:bodyPr wrap="square" lIns="254" tIns="254" rIns="254" bIns="254" rtlCol="0" anchor="t">
+          <a:bodyPr wrap="square" lIns="508" tIns="508" rIns="508" bIns="508" rtlCol="0" anchor="t">
             <a:normAutofit/>
           </a:bodyPr>
           <a:lstStyle/>
           <a:p>
-            <a:r>
-              <a:rPr lang="en-US" sz="1380" dirty="0">
+            <a:pPr indent="0" marL="0">
+              <a:buNone/>
+            </a:pPr>
+            <a:r>
+              <a:rPr lang="en-US" sz="1220" dirty="0">
                 <a:solidFill>
                   <a:srgbClr val="17364A"/>
                 </a:solidFill>
@@ -8413,13 +8545,16 @@
                 <a:ea typeface="Aptos" pitchFamily="34" charset="-122"/>
                 <a:cs typeface="Aptos" pitchFamily="34" charset="-120"/>
               </a:rPr>
-              <a:t>Identify the data source, update frequency, required fields, validation checks,.</a:t>
-            </a:r>
-            <a:endParaRPr lang="en-US" sz="1380" dirty="0"/>
-          </a:p>
-          <a:p>
-            <a:r>
-              <a:rPr lang="en-US" sz="1380" dirty="0">
+              <a:t>Identify the data source, update frequency, required fields,.</a:t>
+            </a:r>
+            <a:endParaRPr lang="en-US" sz="1220" dirty="0"/>
+          </a:p>
+          <a:p>
+            <a:pPr indent="0" marL="0">
+              <a:buNone/>
+            </a:pPr>
+            <a:r>
+              <a:rPr lang="en-US" sz="1220" dirty="0">
                 <a:solidFill>
                   <a:srgbClr val="17364A"/>
                 </a:solidFill>
@@ -8427,9 +8562,9 @@
                 <a:ea typeface="Aptos" pitchFamily="34" charset="-122"/>
                 <a:cs typeface="Aptos" pitchFamily="34" charset="-120"/>
               </a:rPr>
-              <a:t>Document at least three pipeline failure scenarios and describe how each should be.</a:t>
-            </a:r>
-            <a:endParaRPr lang="en-US" sz="1380" dirty="0"/>
+              <a:t>Document at least three pipeline failure scenarios and describe.</a:t>
+            </a:r>
+            <a:endParaRPr lang="en-US" sz="1220" dirty="0"/>
           </a:p>
         </p:txBody>
       </p:sp>
@@ -8507,17 +8642,17 @@
         </p:nvSpPr>
         <p:spPr>
           <a:xfrm>
-            <a:off x="7799832" y="5001768"/>
-            <a:ext cx="3145536" cy="502920"/>
-          </a:xfrm>
-          <a:prstGeom prst="rect">
-            <a:avLst/>
-          </a:prstGeom>
-          <a:noFill/>
-          <a:ln/>
-        </p:spPr>
-        <p:txBody>
-          <a:bodyPr wrap="square" lIns="0" tIns="0" rIns="0" bIns="0" rtlCol="0" anchor="t">
+            <a:off x="7799832" y="4974336"/>
+            <a:ext cx="3145536" cy="576072"/>
+          </a:xfrm>
+          <a:prstGeom prst="rect">
+            <a:avLst/>
+          </a:prstGeom>
+          <a:noFill/>
+          <a:ln/>
+        </p:spPr>
+        <p:txBody>
+          <a:bodyPr wrap="square" lIns="254" tIns="254" rIns="254" bIns="254" rtlCol="0" anchor="t">
             <a:normAutofit/>
           </a:bodyPr>
           <a:lstStyle/>
@@ -8526,7 +8661,7 @@
               <a:buNone/>
             </a:pPr>
             <a:r>
-              <a:rPr lang="en-US" sz="1550" dirty="0">
+              <a:rPr lang="en-US" sz="1320" dirty="0">
                 <a:solidFill>
                   <a:srgbClr val="17364A"/>
                 </a:solidFill>
@@ -8534,9 +8669,9 @@
                 <a:ea typeface="Aptos" pitchFamily="34" charset="-122"/>
                 <a:cs typeface="Aptos" pitchFamily="34" charset="-120"/>
               </a:rPr>
-              <a:t>Use the assignment to test whether you can explain the concept, apply it to a realistic public health situation, and identify what would need review before the work moves forward.</a:t>
-            </a:r>
-            <a:endParaRPr lang="en-US" sz="1550" dirty="0"/>
+              <a:t>Use the assignment to test whether you can explain the concept, apply it to a realistic public health situation, and.</a:t>
+            </a:r>
+            <a:endParaRPr lang="en-US" sz="1320" dirty="0"/>
           </a:p>
         </p:txBody>
       </p:sp>
@@ -8837,49 +8972,58 @@
           <a:ln/>
         </p:spPr>
         <p:txBody>
-          <a:bodyPr wrap="square" lIns="635" tIns="635" rIns="635" bIns="635" rtlCol="0" anchor="t">
+          <a:bodyPr wrap="square" lIns="1016" tIns="1016" rIns="1016" bIns="1016" rtlCol="0" anchor="t">
             <a:normAutofit/>
           </a:bodyPr>
           <a:lstStyle/>
           <a:p>
+            <a:pPr indent="0" marL="0">
+              <a:buNone/>
+            </a:pPr>
             <a:r>
               <a:rPr lang="en-US" sz="2100" dirty="0">
                 <a:solidFill>
-                  <a:srgbClr val="17364A"/>
-                </a:solidFill>
-                <a:latin typeface="Aptos" pitchFamily="34" charset="0"/>
-                <a:ea typeface="Aptos" pitchFamily="34" charset="-122"/>
-                <a:cs typeface="Aptos" pitchFamily="34" charset="-120"/>
-              </a:rPr>
-              <a:t>Data pipeline map</a:t>
+                  <a:srgbClr val="003A63"/>
+                </a:solidFill>
+                <a:latin typeface="Aptos" pitchFamily="34" charset="0"/>
+                <a:ea typeface="Aptos" pitchFamily="34" charset="-122"/>
+                <a:cs typeface="Aptos" pitchFamily="34" charset="-120"/>
+              </a:rPr>
+              <a:t>• Data pipeline map</a:t>
             </a:r>
             <a:endParaRPr lang="en-US" sz="2100" dirty="0"/>
           </a:p>
           <a:p>
+            <a:pPr indent="0" marL="0">
+              <a:buNone/>
+            </a:pPr>
             <a:r>
               <a:rPr lang="en-US" sz="2100" dirty="0">
                 <a:solidFill>
-                  <a:srgbClr val="17364A"/>
-                </a:solidFill>
-                <a:latin typeface="Aptos" pitchFamily="34" charset="0"/>
-                <a:ea typeface="Aptos" pitchFamily="34" charset="-122"/>
-                <a:cs typeface="Aptos" pitchFamily="34" charset="-120"/>
-              </a:rPr>
-              <a:t>Pipeline readiness checklist</a:t>
+                  <a:srgbClr val="003A63"/>
+                </a:solidFill>
+                <a:latin typeface="Aptos" pitchFamily="34" charset="0"/>
+                <a:ea typeface="Aptos" pitchFamily="34" charset="-122"/>
+                <a:cs typeface="Aptos" pitchFamily="34" charset="-120"/>
+              </a:rPr>
+              <a:t>• Pipeline readiness checklist</a:t>
             </a:r>
             <a:endParaRPr lang="en-US" sz="2100" dirty="0"/>
           </a:p>
           <a:p>
+            <a:pPr indent="0" marL="0">
+              <a:buNone/>
+            </a:pPr>
             <a:r>
               <a:rPr lang="en-US" sz="2100" dirty="0">
                 <a:solidFill>
-                  <a:srgbClr val="17364A"/>
-                </a:solidFill>
-                <a:latin typeface="Aptos" pitchFamily="34" charset="0"/>
-                <a:ea typeface="Aptos" pitchFamily="34" charset="-122"/>
-                <a:cs typeface="Aptos" pitchFamily="34" charset="-120"/>
-              </a:rPr>
-              <a:t>Failure and escalation plan</a:t>
+                  <a:srgbClr val="003A63"/>
+                </a:solidFill>
+                <a:latin typeface="Aptos" pitchFamily="34" charset="0"/>
+                <a:ea typeface="Aptos" pitchFamily="34" charset="-122"/>
+                <a:cs typeface="Aptos" pitchFamily="34" charset="-120"/>
+              </a:rPr>
+              <a:t>• Failure and escalation plan</a:t>
             </a:r>
             <a:endParaRPr lang="en-US" sz="2100" dirty="0"/>
           </a:p>
@@ -8959,17 +9103,17 @@
         </p:nvSpPr>
         <p:spPr>
           <a:xfrm>
-            <a:off x="7799832" y="1828800"/>
-            <a:ext cx="3145536" cy="685800"/>
-          </a:xfrm>
-          <a:prstGeom prst="rect">
-            <a:avLst/>
-          </a:prstGeom>
-          <a:noFill/>
-          <a:ln/>
-        </p:spPr>
-        <p:txBody>
-          <a:bodyPr wrap="square" lIns="0" tIns="0" rIns="0" bIns="0" rtlCol="0" anchor="t">
+            <a:off x="7799832" y="1801368"/>
+            <a:ext cx="3145536" cy="758952"/>
+          </a:xfrm>
+          <a:prstGeom prst="rect">
+            <a:avLst/>
+          </a:prstGeom>
+          <a:noFill/>
+          <a:ln/>
+        </p:spPr>
+        <p:txBody>
+          <a:bodyPr wrap="square" lIns="254" tIns="254" rIns="254" bIns="254" rtlCol="0" anchor="t">
             <a:normAutofit/>
           </a:bodyPr>
           <a:lstStyle/>
@@ -8978,7 +9122,7 @@
               <a:buNone/>
             </a:pPr>
             <a:r>
-              <a:rPr lang="en-US" sz="1550" dirty="0">
+              <a:rPr lang="en-US" sz="1320" dirty="0">
                 <a:solidFill>
                   <a:srgbClr val="17364A"/>
                 </a:solidFill>
@@ -8988,7 +9132,7 @@
               </a:rPr>
               <a:t>Data pipeline map</a:t>
             </a:r>
-            <a:endParaRPr lang="en-US" sz="1550" dirty="0"/>
+            <a:endParaRPr lang="en-US" sz="1320" dirty="0"/>
           </a:p>
         </p:txBody>
       </p:sp>
@@ -9076,13 +9220,16 @@
           <a:ln/>
         </p:spPr>
         <p:txBody>
-          <a:bodyPr wrap="square" lIns="254" tIns="254" rIns="254" bIns="254" rtlCol="0" anchor="t">
+          <a:bodyPr wrap="square" lIns="508" tIns="508" rIns="508" bIns="508" rtlCol="0" anchor="t">
             <a:normAutofit/>
           </a:bodyPr>
           <a:lstStyle/>
           <a:p>
-            <a:r>
-              <a:rPr lang="en-US" sz="1380" dirty="0">
+            <a:pPr indent="0" marL="0">
+              <a:buNone/>
+            </a:pPr>
+            <a:r>
+              <a:rPr lang="en-US" sz="1220" dirty="0">
                 <a:solidFill>
                   <a:srgbClr val="17364A"/>
                 </a:solidFill>
@@ -9092,11 +9239,14 @@
               </a:rPr>
               <a:t>Data pipeline map</a:t>
             </a:r>
-            <a:endParaRPr lang="en-US" sz="1380" dirty="0"/>
-          </a:p>
-          <a:p>
-            <a:r>
-              <a:rPr lang="en-US" sz="1380" dirty="0">
+            <a:endParaRPr lang="en-US" sz="1220" dirty="0"/>
+          </a:p>
+          <a:p>
+            <a:pPr indent="0" marL="0">
+              <a:buNone/>
+            </a:pPr>
+            <a:r>
+              <a:rPr lang="en-US" sz="1220" dirty="0">
                 <a:solidFill>
                   <a:srgbClr val="17364A"/>
                 </a:solidFill>
@@ -9106,11 +9256,14 @@
               </a:rPr>
               <a:t>Pipeline readiness checklist</a:t>
             </a:r>
-            <a:endParaRPr lang="en-US" sz="1380" dirty="0"/>
-          </a:p>
-          <a:p>
-            <a:r>
-              <a:rPr lang="en-US" sz="1380" dirty="0">
+            <a:endParaRPr lang="en-US" sz="1220" dirty="0"/>
+          </a:p>
+          <a:p>
+            <a:pPr indent="0" marL="0">
+              <a:buNone/>
+            </a:pPr>
+            <a:r>
+              <a:rPr lang="en-US" sz="1220" dirty="0">
                 <a:solidFill>
                   <a:srgbClr val="17364A"/>
                 </a:solidFill>
@@ -9120,7 +9273,7 @@
               </a:rPr>
               <a:t>Failure and escalation plan</a:t>
             </a:r>
-            <a:endParaRPr lang="en-US" sz="1380" dirty="0"/>
+            <a:endParaRPr lang="en-US" sz="1220" dirty="0"/>
           </a:p>
         </p:txBody>
       </p:sp>
@@ -9198,17 +9351,17 @@
         </p:nvSpPr>
         <p:spPr>
           <a:xfrm>
-            <a:off x="7799832" y="5001768"/>
-            <a:ext cx="3145536" cy="502920"/>
-          </a:xfrm>
-          <a:prstGeom prst="rect">
-            <a:avLst/>
-          </a:prstGeom>
-          <a:noFill/>
-          <a:ln/>
-        </p:spPr>
-        <p:txBody>
-          <a:bodyPr wrap="square" lIns="0" tIns="0" rIns="0" bIns="0" rtlCol="0" anchor="t">
+            <a:off x="7799832" y="4974336"/>
+            <a:ext cx="3145536" cy="576072"/>
+          </a:xfrm>
+          <a:prstGeom prst="rect">
+            <a:avLst/>
+          </a:prstGeom>
+          <a:noFill/>
+          <a:ln/>
+        </p:spPr>
+        <p:txBody>
+          <a:bodyPr wrap="square" lIns="254" tIns="254" rIns="254" bIns="254" rtlCol="0" anchor="t">
             <a:normAutofit/>
           </a:bodyPr>
           <a:lstStyle/>
@@ -9217,7 +9370,7 @@
               <a:buNone/>
             </a:pPr>
             <a:r>
-              <a:rPr lang="en-US" sz="1550" dirty="0">
+              <a:rPr lang="en-US" sz="1320" dirty="0">
                 <a:solidFill>
                   <a:srgbClr val="17364A"/>
                 </a:solidFill>
@@ -9225,9 +9378,9 @@
                 <a:ea typeface="Aptos" pitchFamily="34" charset="-122"/>
                 <a:cs typeface="Aptos" pitchFamily="34" charset="-120"/>
               </a:rPr>
-              <a:t>Connect the concept to data quality, model performance, validation evidence, monitoring measures, and decisions that remain under human control.</a:t>
-            </a:r>
-            <a:endParaRPr lang="en-US" sz="1550" dirty="0"/>
+              <a:t>Connect the concept to data quality, model performance, validation evidence, monitoring measures, and decisions that.</a:t>
+            </a:r>
+            <a:endParaRPr lang="en-US" sz="1320" dirty="0"/>
           </a:p>
         </p:txBody>
       </p:sp>
@@ -9528,21 +9681,24 @@
           <a:ln/>
         </p:spPr>
         <p:txBody>
-          <a:bodyPr wrap="square" lIns="635" tIns="635" rIns="635" bIns="635" rtlCol="0" anchor="t">
+          <a:bodyPr wrap="square" lIns="1016" tIns="1016" rIns="1016" bIns="1016" rtlCol="0" anchor="t">
             <a:normAutofit/>
           </a:bodyPr>
           <a:lstStyle/>
           <a:p>
+            <a:pPr indent="0" marL="0">
+              <a:buNone/>
+            </a:pPr>
             <a:r>
               <a:rPr lang="en-US" sz="2100" dirty="0">
                 <a:solidFill>
-                  <a:srgbClr val="17364A"/>
-                </a:solidFill>
-                <a:latin typeface="Aptos" pitchFamily="34" charset="0"/>
-                <a:ea typeface="Aptos" pitchFamily="34" charset="-122"/>
-                <a:cs typeface="Aptos" pitchFamily="34" charset="-120"/>
-              </a:rPr>
-              <a:t>Known data limitations statement</a:t>
+                  <a:srgbClr val="003A63"/>
+                </a:solidFill>
+                <a:latin typeface="Aptos" pitchFamily="34" charset="0"/>
+                <a:ea typeface="Aptos" pitchFamily="34" charset="-122"/>
+                <a:cs typeface="Aptos" pitchFamily="34" charset="-120"/>
+              </a:rPr>
+              <a:t>• Known data limitations statement</a:t>
             </a:r>
             <a:endParaRPr lang="en-US" sz="2100" dirty="0"/>
           </a:p>
@@ -9622,17 +9778,17 @@
         </p:nvSpPr>
         <p:spPr>
           <a:xfrm>
-            <a:off x="7799832" y="1828800"/>
-            <a:ext cx="3145536" cy="685800"/>
-          </a:xfrm>
-          <a:prstGeom prst="rect">
-            <a:avLst/>
-          </a:prstGeom>
-          <a:noFill/>
-          <a:ln/>
-        </p:spPr>
-        <p:txBody>
-          <a:bodyPr wrap="square" lIns="0" tIns="0" rIns="0" bIns="0" rtlCol="0" anchor="t">
+            <a:off x="7799832" y="1801368"/>
+            <a:ext cx="3145536" cy="758952"/>
+          </a:xfrm>
+          <a:prstGeom prst="rect">
+            <a:avLst/>
+          </a:prstGeom>
+          <a:noFill/>
+          <a:ln/>
+        </p:spPr>
+        <p:txBody>
+          <a:bodyPr wrap="square" lIns="254" tIns="254" rIns="254" bIns="254" rtlCol="0" anchor="t">
             <a:normAutofit/>
           </a:bodyPr>
           <a:lstStyle/>
@@ -9641,7 +9797,7 @@
               <a:buNone/>
             </a:pPr>
             <a:r>
-              <a:rPr lang="en-US" sz="1550" dirty="0">
+              <a:rPr lang="en-US" sz="1320" dirty="0">
                 <a:solidFill>
                   <a:srgbClr val="17364A"/>
                 </a:solidFill>
@@ -9651,7 +9807,7 @@
               </a:rPr>
               <a:t>Known data limitations statement</a:t>
             </a:r>
-            <a:endParaRPr lang="en-US" sz="1550" dirty="0"/>
+            <a:endParaRPr lang="en-US" sz="1320" dirty="0"/>
           </a:p>
         </p:txBody>
       </p:sp>
@@ -9739,13 +9895,16 @@
           <a:ln/>
         </p:spPr>
         <p:txBody>
-          <a:bodyPr wrap="square" lIns="254" tIns="254" rIns="254" bIns="254" rtlCol="0" anchor="t">
+          <a:bodyPr wrap="square" lIns="508" tIns="508" rIns="508" bIns="508" rtlCol="0" anchor="t">
             <a:normAutofit/>
           </a:bodyPr>
           <a:lstStyle/>
           <a:p>
-            <a:r>
-              <a:rPr lang="en-US" sz="1380" dirty="0">
+            <a:pPr indent="0" marL="0">
+              <a:buNone/>
+            </a:pPr>
+            <a:r>
+              <a:rPr lang="en-US" sz="1220" dirty="0">
                 <a:solidFill>
                   <a:srgbClr val="17364A"/>
                 </a:solidFill>
@@ -9755,7 +9914,7 @@
               </a:rPr>
               <a:t>Known data limitations statement</a:t>
             </a:r>
-            <a:endParaRPr lang="en-US" sz="1380" dirty="0"/>
+            <a:endParaRPr lang="en-US" sz="1220" dirty="0"/>
           </a:p>
         </p:txBody>
       </p:sp>
@@ -9833,17 +9992,17 @@
         </p:nvSpPr>
         <p:spPr>
           <a:xfrm>
-            <a:off x="7799832" y="5001768"/>
-            <a:ext cx="3145536" cy="502920"/>
-          </a:xfrm>
-          <a:prstGeom prst="rect">
-            <a:avLst/>
-          </a:prstGeom>
-          <a:noFill/>
-          <a:ln/>
-        </p:spPr>
-        <p:txBody>
-          <a:bodyPr wrap="square" lIns="0" tIns="0" rIns="0" bIns="0" rtlCol="0" anchor="t">
+            <a:off x="7799832" y="4974336"/>
+            <a:ext cx="3145536" cy="576072"/>
+          </a:xfrm>
+          <a:prstGeom prst="rect">
+            <a:avLst/>
+          </a:prstGeom>
+          <a:noFill/>
+          <a:ln/>
+        </p:spPr>
+        <p:txBody>
+          <a:bodyPr wrap="square" lIns="254" tIns="254" rIns="254" bIns="254" rtlCol="0" anchor="t">
             <a:normAutofit/>
           </a:bodyPr>
           <a:lstStyle/>
@@ -9852,7 +10011,7 @@
               <a:buNone/>
             </a:pPr>
             <a:r>
-              <a:rPr lang="en-US" sz="1550" dirty="0">
+              <a:rPr lang="en-US" sz="1320" dirty="0">
                 <a:solidFill>
                   <a:srgbClr val="17364A"/>
                 </a:solidFill>
@@ -9860,9 +10019,9 @@
                 <a:ea typeface="Aptos" pitchFamily="34" charset="-122"/>
                 <a:cs typeface="Aptos" pitchFamily="34" charset="-120"/>
               </a:rPr>
-              <a:t>Connect the concept to data quality, model performance, validation evidence, monitoring measures, and decisions that remain under human control.</a:t>
-            </a:r>
-            <a:endParaRPr lang="en-US" sz="1550" dirty="0"/>
+              <a:t>Connect the concept to data quality, model performance, validation evidence, monitoring measures, and decisions that.</a:t>
+            </a:r>
+            <a:endParaRPr lang="en-US" sz="1320" dirty="0"/>
           </a:p>
         </p:txBody>
       </p:sp>
@@ -10163,49 +10322,58 @@
           <a:ln/>
         </p:spPr>
         <p:txBody>
-          <a:bodyPr wrap="square" lIns="635" tIns="635" rIns="635" bIns="635" rtlCol="0" anchor="t">
+          <a:bodyPr wrap="square" lIns="1016" tIns="1016" rIns="1016" bIns="1016" rtlCol="0" anchor="t">
             <a:normAutofit/>
           </a:bodyPr>
           <a:lstStyle/>
           <a:p>
+            <a:pPr indent="0" marL="0">
+              <a:buNone/>
+            </a:pPr>
             <a:r>
               <a:rPr lang="en-US" sz="2100" dirty="0">
                 <a:solidFill>
-                  <a:srgbClr val="17364A"/>
-                </a:solidFill>
-                <a:latin typeface="Aptos" pitchFamily="34" charset="0"/>
-                <a:ea typeface="Aptos" pitchFamily="34" charset="-122"/>
-                <a:cs typeface="Aptos" pitchFamily="34" charset="-120"/>
-              </a:rPr>
-              <a:t>Data pipelines are the operational pathways that move public health data from source systems into analytic,.</a:t>
+                  <a:srgbClr val="003A63"/>
+                </a:solidFill>
+                <a:latin typeface="Aptos" pitchFamily="34" charset="0"/>
+                <a:ea typeface="Aptos" pitchFamily="34" charset="-122"/>
+                <a:cs typeface="Aptos" pitchFamily="34" charset="-120"/>
+              </a:rPr>
+              <a:t>• Data pipelines are the operational pathways that move public health data from source systems.</a:t>
             </a:r>
             <a:endParaRPr lang="en-US" sz="2100" dirty="0"/>
           </a:p>
           <a:p>
+            <a:pPr indent="0" marL="0">
+              <a:buNone/>
+            </a:pPr>
             <a:r>
               <a:rPr lang="en-US" sz="2100" dirty="0">
                 <a:solidFill>
-                  <a:srgbClr val="17364A"/>
-                </a:solidFill>
-                <a:latin typeface="Aptos" pitchFamily="34" charset="0"/>
-                <a:ea typeface="Aptos" pitchFamily="34" charset="-122"/>
-                <a:cs typeface="Aptos" pitchFamily="34" charset="-120"/>
-              </a:rPr>
-              <a:t>AI tools depend on these pathways even when users do not see them.</a:t>
+                  <a:srgbClr val="003A63"/>
+                </a:solidFill>
+                <a:latin typeface="Aptos" pitchFamily="34" charset="0"/>
+                <a:ea typeface="Aptos" pitchFamily="34" charset="-122"/>
+                <a:cs typeface="Aptos" pitchFamily="34" charset="-120"/>
+              </a:rPr>
+              <a:t>• AI tools depend on these pathways even when users do not see them.</a:t>
             </a:r>
             <a:endParaRPr lang="en-US" sz="2100" dirty="0"/>
           </a:p>
           <a:p>
+            <a:pPr indent="0" marL="0">
+              <a:buNone/>
+            </a:pPr>
             <a:r>
               <a:rPr lang="en-US" sz="2100" dirty="0">
                 <a:solidFill>
-                  <a:srgbClr val="17364A"/>
-                </a:solidFill>
-                <a:latin typeface="Aptos" pitchFamily="34" charset="0"/>
-                <a:ea typeface="Aptos" pitchFamily="34" charset="-122"/>
-                <a:cs typeface="Aptos" pitchFamily="34" charset="-120"/>
-              </a:rPr>
-              <a:t>A model that classifies cases, summarizes laboratory reports, or predicts service demand can only work.</a:t>
+                  <a:srgbClr val="003A63"/>
+                </a:solidFill>
+                <a:latin typeface="Aptos" pitchFamily="34" charset="0"/>
+                <a:ea typeface="Aptos" pitchFamily="34" charset="-122"/>
+                <a:cs typeface="Aptos" pitchFamily="34" charset="-120"/>
+              </a:rPr>
+              <a:t>• A model that classifies cases, summarizes laboratory reports, or predicts service demand can.</a:t>
             </a:r>
             <a:endParaRPr lang="en-US" sz="2100" dirty="0"/>
           </a:p>
@@ -10285,17 +10453,17 @@
         </p:nvSpPr>
         <p:spPr>
           <a:xfrm>
-            <a:off x="8074152" y="1920240"/>
-            <a:ext cx="2825496" cy="1280160"/>
-          </a:xfrm>
-          <a:prstGeom prst="rect">
-            <a:avLst/>
-          </a:prstGeom>
-          <a:noFill/>
-          <a:ln/>
-        </p:spPr>
-        <p:txBody>
-          <a:bodyPr wrap="square" lIns="0" tIns="0" rIns="0" bIns="0" rtlCol="0" anchor="t">
+            <a:off x="8074152" y="1892808"/>
+            <a:ext cx="2825496" cy="1353312"/>
+          </a:xfrm>
+          <a:prstGeom prst="rect">
+            <a:avLst/>
+          </a:prstGeom>
+          <a:noFill/>
+          <a:ln/>
+        </p:spPr>
+        <p:txBody>
+          <a:bodyPr wrap="square" lIns="254" tIns="254" rIns="254" bIns="254" rtlCol="0" anchor="t">
             <a:normAutofit/>
           </a:bodyPr>
           <a:lstStyle/>
@@ -10304,7 +10472,7 @@
               <a:buNone/>
             </a:pPr>
             <a:r>
-              <a:rPr lang="en-US" sz="1550" dirty="0">
+              <a:rPr lang="en-US" sz="1320" dirty="0">
                 <a:solidFill>
                   <a:srgbClr val="17364A"/>
                 </a:solidFill>
@@ -10312,43 +10480,9 @@
                 <a:ea typeface="Aptos" pitchFamily="34" charset="-122"/>
                 <a:cs typeface="Aptos" pitchFamily="34" charset="-120"/>
               </a:rPr>
-              <a:t>Level: applied/foundational</a:t>
-            </a:r>
-            <a:endParaRPr lang="en-US" sz="1550" dirty="0"/>
-          </a:p>
-          <a:p>
-            <a:pPr indent="0" marL="0">
-              <a:buNone/>
-            </a:pPr>
-            <a:r>
-              <a:rPr lang="en-US" sz="1550" dirty="0">
-                <a:solidFill>
-                  <a:srgbClr val="17364A"/>
-                </a:solidFill>
-                <a:latin typeface="Aptos" pitchFamily="34" charset="0"/>
-                <a:ea typeface="Aptos" pitchFamily="34" charset="-122"/>
-                <a:cs typeface="Aptos" pitchFamily="34" charset="-120"/>
-              </a:rPr>
-              <a:t>Primary track: Technical Architecture Track</a:t>
-            </a:r>
-            <a:endParaRPr lang="en-US" sz="1550" dirty="0"/>
-          </a:p>
-          <a:p>
-            <a:pPr indent="0" marL="0">
-              <a:buNone/>
-            </a:pPr>
-            <a:r>
-              <a:rPr lang="en-US" sz="1550" dirty="0">
-                <a:solidFill>
-                  <a:srgbClr val="17364A"/>
-                </a:solidFill>
-                <a:latin typeface="Aptos" pitchFamily="34" charset="0"/>
-                <a:ea typeface="Aptos" pitchFamily="34" charset="-122"/>
-                <a:cs typeface="Aptos" pitchFamily="34" charset="-120"/>
-              </a:rPr>
-              <a:t>Appears in tracks: technical-architecture</a:t>
-            </a:r>
-            <a:endParaRPr lang="en-US" sz="1550" dirty="0"/>
+              <a:t>Level: applied/foundational Primary track: Technical Architecture Track Appears in tracks: technical-architecture</a:t>
+            </a:r>
+            <a:endParaRPr lang="en-US" sz="1320" dirty="0"/>
           </a:p>
         </p:txBody>
       </p:sp>
@@ -10436,13 +10570,16 @@
           <a:ln/>
         </p:spPr>
         <p:txBody>
-          <a:bodyPr wrap="square" lIns="254" tIns="254" rIns="254" bIns="254" rtlCol="0" anchor="t">
+          <a:bodyPr wrap="square" lIns="508" tIns="508" rIns="508" bIns="508" rtlCol="0" anchor="t">
             <a:normAutofit/>
           </a:bodyPr>
           <a:lstStyle/>
           <a:p>
-            <a:r>
-              <a:rPr lang="en-US" sz="1380" dirty="0">
+            <a:pPr indent="0" marL="0">
+              <a:buNone/>
+            </a:pPr>
+            <a:r>
+              <a:rPr lang="en-US" sz="1220" dirty="0">
                 <a:solidFill>
                   <a:srgbClr val="17364A"/>
                 </a:solidFill>
@@ -10452,11 +10589,14 @@
               </a:rPr>
               <a:t>Read the module for shared vocabulary and context.</a:t>
             </a:r>
-            <a:endParaRPr lang="en-US" sz="1380" dirty="0"/>
-          </a:p>
-          <a:p>
-            <a:r>
-              <a:rPr lang="en-US" sz="1380" dirty="0">
+            <a:endParaRPr lang="en-US" sz="1220" dirty="0"/>
+          </a:p>
+          <a:p>
+            <a:pPr indent="0" marL="0">
+              <a:buNone/>
+            </a:pPr>
+            <a:r>
+              <a:rPr lang="en-US" sz="1220" dirty="0">
                 <a:solidFill>
                   <a:srgbClr val="17364A"/>
                 </a:solidFill>
@@ -10466,11 +10606,14 @@
               </a:rPr>
               <a:t>Complete the practical exercise to apply the concept.</a:t>
             </a:r>
-            <a:endParaRPr lang="en-US" sz="1380" dirty="0"/>
-          </a:p>
-          <a:p>
-            <a:r>
-              <a:rPr lang="en-US" sz="1380" dirty="0">
+            <a:endParaRPr lang="en-US" sz="1220" dirty="0"/>
+          </a:p>
+          <a:p>
+            <a:pPr indent="0" marL="0">
+              <a:buNone/>
+            </a:pPr>
+            <a:r>
+              <a:rPr lang="en-US" sz="1220" dirty="0">
                 <a:solidFill>
                   <a:srgbClr val="17364A"/>
                 </a:solidFill>
@@ -10480,7 +10623,7 @@
               </a:rPr>
               <a:t>Use the notes and references for deeper review.</a:t>
             </a:r>
-            <a:endParaRPr lang="en-US" sz="1380" dirty="0"/>
+            <a:endParaRPr lang="en-US" sz="1220" dirty="0"/>
           </a:p>
         </p:txBody>
       </p:sp>
@@ -10781,49 +10924,58 @@
           <a:ln/>
         </p:spPr>
         <p:txBody>
-          <a:bodyPr wrap="square" lIns="635" tIns="635" rIns="635" bIns="635" rtlCol="0" anchor="t">
+          <a:bodyPr wrap="square" lIns="1016" tIns="1016" rIns="1016" bIns="1016" rtlCol="0" anchor="t">
             <a:normAutofit/>
           </a:bodyPr>
           <a:lstStyle/>
           <a:p>
+            <a:pPr indent="0" marL="0">
+              <a:buNone/>
+            </a:pPr>
             <a:r>
               <a:rPr lang="en-US" sz="2100" dirty="0">
                 <a:solidFill>
-                  <a:srgbClr val="17364A"/>
-                </a:solidFill>
-                <a:latin typeface="Aptos" pitchFamily="34" charset="0"/>
-                <a:ea typeface="Aptos" pitchFamily="34" charset="-122"/>
-                <a:cs typeface="Aptos" pitchFamily="34" charset="-120"/>
-              </a:rPr>
-              <a:t>Data pipeline map</a:t>
+                  <a:srgbClr val="003A63"/>
+                </a:solidFill>
+                <a:latin typeface="Aptos" pitchFamily="34" charset="0"/>
+                <a:ea typeface="Aptos" pitchFamily="34" charset="-122"/>
+                <a:cs typeface="Aptos" pitchFamily="34" charset="-120"/>
+              </a:rPr>
+              <a:t>• Data pipeline map</a:t>
             </a:r>
             <a:endParaRPr lang="en-US" sz="2100" dirty="0"/>
           </a:p>
           <a:p>
+            <a:pPr indent="0" marL="0">
+              <a:buNone/>
+            </a:pPr>
             <a:r>
               <a:rPr lang="en-US" sz="2100" dirty="0">
                 <a:solidFill>
-                  <a:srgbClr val="17364A"/>
-                </a:solidFill>
-                <a:latin typeface="Aptos" pitchFamily="34" charset="0"/>
-                <a:ea typeface="Aptos" pitchFamily="34" charset="-122"/>
-                <a:cs typeface="Aptos" pitchFamily="34" charset="-120"/>
-              </a:rPr>
-              <a:t>Pipeline readiness checklist</a:t>
+                  <a:srgbClr val="003A63"/>
+                </a:solidFill>
+                <a:latin typeface="Aptos" pitchFamily="34" charset="0"/>
+                <a:ea typeface="Aptos" pitchFamily="34" charset="-122"/>
+                <a:cs typeface="Aptos" pitchFamily="34" charset="-120"/>
+              </a:rPr>
+              <a:t>• Pipeline readiness checklist</a:t>
             </a:r>
             <a:endParaRPr lang="en-US" sz="2100" dirty="0"/>
           </a:p>
           <a:p>
+            <a:pPr indent="0" marL="0">
+              <a:buNone/>
+            </a:pPr>
             <a:r>
               <a:rPr lang="en-US" sz="2100" dirty="0">
                 <a:solidFill>
-                  <a:srgbClr val="17364A"/>
-                </a:solidFill>
-                <a:latin typeface="Aptos" pitchFamily="34" charset="0"/>
-                <a:ea typeface="Aptos" pitchFamily="34" charset="-122"/>
-                <a:cs typeface="Aptos" pitchFamily="34" charset="-120"/>
-              </a:rPr>
-              <a:t>Failure and escalation plan</a:t>
+                  <a:srgbClr val="003A63"/>
+                </a:solidFill>
+                <a:latin typeface="Aptos" pitchFamily="34" charset="0"/>
+                <a:ea typeface="Aptos" pitchFamily="34" charset="-122"/>
+                <a:cs typeface="Aptos" pitchFamily="34" charset="-120"/>
+              </a:rPr>
+              <a:t>• Failure and escalation plan</a:t>
             </a:r>
             <a:endParaRPr lang="en-US" sz="2100" dirty="0"/>
           </a:p>
@@ -10903,17 +11055,17 @@
         </p:nvSpPr>
         <p:spPr>
           <a:xfrm>
-            <a:off x="7799832" y="1828800"/>
-            <a:ext cx="3145536" cy="685800"/>
-          </a:xfrm>
-          <a:prstGeom prst="rect">
-            <a:avLst/>
-          </a:prstGeom>
-          <a:noFill/>
-          <a:ln/>
-        </p:spPr>
-        <p:txBody>
-          <a:bodyPr wrap="square" lIns="0" tIns="0" rIns="0" bIns="0" rtlCol="0" anchor="t">
+            <a:off x="7799832" y="1801368"/>
+            <a:ext cx="3145536" cy="758952"/>
+          </a:xfrm>
+          <a:prstGeom prst="rect">
+            <a:avLst/>
+          </a:prstGeom>
+          <a:noFill/>
+          <a:ln/>
+        </p:spPr>
+        <p:txBody>
+          <a:bodyPr wrap="square" lIns="254" tIns="254" rIns="254" bIns="254" rtlCol="0" anchor="t">
             <a:normAutofit/>
           </a:bodyPr>
           <a:lstStyle/>
@@ -10922,7 +11074,7 @@
               <a:buNone/>
             </a:pPr>
             <a:r>
-              <a:rPr lang="en-US" sz="1550" dirty="0">
+              <a:rPr lang="en-US" sz="1320" dirty="0">
                 <a:solidFill>
                   <a:srgbClr val="17364A"/>
                 </a:solidFill>
@@ -10932,7 +11084,7 @@
               </a:rPr>
               <a:t>Data pipeline map</a:t>
             </a:r>
-            <a:endParaRPr lang="en-US" sz="1550" dirty="0"/>
+            <a:endParaRPr lang="en-US" sz="1320" dirty="0"/>
           </a:p>
         </p:txBody>
       </p:sp>
@@ -11020,13 +11172,16 @@
           <a:ln/>
         </p:spPr>
         <p:txBody>
-          <a:bodyPr wrap="square" lIns="254" tIns="254" rIns="254" bIns="254" rtlCol="0" anchor="t">
+          <a:bodyPr wrap="square" lIns="508" tIns="508" rIns="508" bIns="508" rtlCol="0" anchor="t">
             <a:normAutofit/>
           </a:bodyPr>
           <a:lstStyle/>
           <a:p>
-            <a:r>
-              <a:rPr lang="en-US" sz="1380" dirty="0">
+            <a:pPr indent="0" marL="0">
+              <a:buNone/>
+            </a:pPr>
+            <a:r>
+              <a:rPr lang="en-US" sz="1220" dirty="0">
                 <a:solidFill>
                   <a:srgbClr val="17364A"/>
                 </a:solidFill>
@@ -11036,11 +11191,14 @@
               </a:rPr>
               <a:t>Data pipeline map</a:t>
             </a:r>
-            <a:endParaRPr lang="en-US" sz="1380" dirty="0"/>
-          </a:p>
-          <a:p>
-            <a:r>
-              <a:rPr lang="en-US" sz="1380" dirty="0">
+            <a:endParaRPr lang="en-US" sz="1220" dirty="0"/>
+          </a:p>
+          <a:p>
+            <a:pPr indent="0" marL="0">
+              <a:buNone/>
+            </a:pPr>
+            <a:r>
+              <a:rPr lang="en-US" sz="1220" dirty="0">
                 <a:solidFill>
                   <a:srgbClr val="17364A"/>
                 </a:solidFill>
@@ -11050,11 +11208,14 @@
               </a:rPr>
               <a:t>Pipeline readiness checklist</a:t>
             </a:r>
-            <a:endParaRPr lang="en-US" sz="1380" dirty="0"/>
-          </a:p>
-          <a:p>
-            <a:r>
-              <a:rPr lang="en-US" sz="1380" dirty="0">
+            <a:endParaRPr lang="en-US" sz="1220" dirty="0"/>
+          </a:p>
+          <a:p>
+            <a:pPr indent="0" marL="0">
+              <a:buNone/>
+            </a:pPr>
+            <a:r>
+              <a:rPr lang="en-US" sz="1220" dirty="0">
                 <a:solidFill>
                   <a:srgbClr val="17364A"/>
                 </a:solidFill>
@@ -11064,7 +11225,7 @@
               </a:rPr>
               <a:t>Failure and escalation plan</a:t>
             </a:r>
-            <a:endParaRPr lang="en-US" sz="1380" dirty="0"/>
+            <a:endParaRPr lang="en-US" sz="1220" dirty="0"/>
           </a:p>
         </p:txBody>
       </p:sp>
@@ -11142,17 +11303,17 @@
         </p:nvSpPr>
         <p:spPr>
           <a:xfrm>
-            <a:off x="7799832" y="5001768"/>
-            <a:ext cx="3145536" cy="502920"/>
-          </a:xfrm>
-          <a:prstGeom prst="rect">
-            <a:avLst/>
-          </a:prstGeom>
-          <a:noFill/>
-          <a:ln/>
-        </p:spPr>
-        <p:txBody>
-          <a:bodyPr wrap="square" lIns="0" tIns="0" rIns="0" bIns="0" rtlCol="0" anchor="t">
+            <a:off x="7799832" y="4974336"/>
+            <a:ext cx="3145536" cy="576072"/>
+          </a:xfrm>
+          <a:prstGeom prst="rect">
+            <a:avLst/>
+          </a:prstGeom>
+          <a:noFill/>
+          <a:ln/>
+        </p:spPr>
+        <p:txBody>
+          <a:bodyPr wrap="square" lIns="254" tIns="254" rIns="254" bIns="254" rtlCol="0" anchor="t">
             <a:normAutofit/>
           </a:bodyPr>
           <a:lstStyle/>
@@ -11161,7 +11322,7 @@
               <a:buNone/>
             </a:pPr>
             <a:r>
-              <a:rPr lang="en-US" sz="1550" dirty="0">
+              <a:rPr lang="en-US" sz="1320" dirty="0">
                 <a:solidFill>
                   <a:srgbClr val="17364A"/>
                 </a:solidFill>
@@ -11169,9 +11330,9 @@
                 <a:ea typeface="Aptos" pitchFamily="34" charset="-122"/>
                 <a:cs typeface="Aptos" pitchFamily="34" charset="-120"/>
               </a:rPr>
-              <a:t>Use the assignment to test whether you can explain the concept, apply it to a realistic public health situation, and identify what would need review before the work moves forward.</a:t>
-            </a:r>
-            <a:endParaRPr lang="en-US" sz="1550" dirty="0"/>
+              <a:t>Use the assignment to test whether you can explain the concept, apply it to a realistic public health situation, and.</a:t>
+            </a:r>
+            <a:endParaRPr lang="en-US" sz="1320" dirty="0"/>
           </a:p>
         </p:txBody>
       </p:sp>
@@ -11472,49 +11633,58 @@
           <a:ln/>
         </p:spPr>
         <p:txBody>
-          <a:bodyPr wrap="square" lIns="635" tIns="635" rIns="635" bIns="635" rtlCol="0" anchor="t">
+          <a:bodyPr wrap="square" lIns="1016" tIns="1016" rIns="1016" bIns="1016" rtlCol="0" anchor="t">
             <a:normAutofit/>
           </a:bodyPr>
           <a:lstStyle/>
           <a:p>
+            <a:pPr indent="0" marL="0">
+              <a:buNone/>
+            </a:pPr>
             <a:r>
               <a:rPr lang="en-US" sz="2100" dirty="0">
                 <a:solidFill>
-                  <a:srgbClr val="17364A"/>
-                </a:solidFill>
-                <a:latin typeface="Aptos" pitchFamily="34" charset="0"/>
-                <a:ea typeface="Aptos" pitchFamily="34" charset="-122"/>
-                <a:cs typeface="Aptos" pitchFamily="34" charset="-120"/>
-              </a:rPr>
-              <a:t>1. What is the strongest reason to document data lineage for an AI-supported workflow?</a:t>
+                  <a:srgbClr val="003A63"/>
+                </a:solidFill>
+                <a:latin typeface="Aptos" pitchFamily="34" charset="0"/>
+                <a:ea typeface="Aptos" pitchFamily="34" charset="-122"/>
+                <a:cs typeface="Aptos" pitchFamily="34" charset="-120"/>
+              </a:rPr>
+              <a:t>• 1. What is the strongest reason to document data lineage for an AI-supported workflow?</a:t>
             </a:r>
             <a:endParaRPr lang="en-US" sz="2100" dirty="0"/>
           </a:p>
           <a:p>
+            <a:pPr indent="0" marL="0">
+              <a:buNone/>
+            </a:pPr>
             <a:r>
               <a:rPr lang="en-US" sz="2100" dirty="0">
                 <a:solidFill>
-                  <a:srgbClr val="17364A"/>
-                </a:solidFill>
-                <a:latin typeface="Aptos" pitchFamily="34" charset="0"/>
-                <a:ea typeface="Aptos" pitchFamily="34" charset="-122"/>
-                <a:cs typeface="Aptos" pitchFamily="34" charset="-120"/>
-              </a:rPr>
-              <a:t>2. Which pipeline type is most likely to trigger a workflow immediately after a defined event?</a:t>
+                  <a:srgbClr val="003A63"/>
+                </a:solidFill>
+                <a:latin typeface="Aptos" pitchFamily="34" charset="0"/>
+                <a:ea typeface="Aptos" pitchFamily="34" charset="-122"/>
+                <a:cs typeface="Aptos" pitchFamily="34" charset="-120"/>
+              </a:rPr>
+              <a:t>• 2. Which pipeline type is most likely to trigger a workflow immediately after a defined event?</a:t>
             </a:r>
             <a:endParaRPr lang="en-US" sz="2100" dirty="0"/>
           </a:p>
           <a:p>
+            <a:pPr indent="0" marL="0">
+              <a:buNone/>
+            </a:pPr>
             <a:r>
               <a:rPr lang="en-US" sz="2100" dirty="0">
                 <a:solidFill>
-                  <a:srgbClr val="17364A"/>
-                </a:solidFill>
-                <a:latin typeface="Aptos" pitchFamily="34" charset="0"/>
-                <a:ea typeface="Aptos" pitchFamily="34" charset="-122"/>
-                <a:cs typeface="Aptos" pitchFamily="34" charset="-120"/>
-              </a:rPr>
-              <a:t>3. What is a practical guardrail for silent feed failure?</a:t>
+                  <a:srgbClr val="003A63"/>
+                </a:solidFill>
+                <a:latin typeface="Aptos" pitchFamily="34" charset="0"/>
+                <a:ea typeface="Aptos" pitchFamily="34" charset="-122"/>
+                <a:cs typeface="Aptos" pitchFamily="34" charset="-120"/>
+              </a:rPr>
+              <a:t>• 3. What is a practical guardrail for silent feed failure?</a:t>
             </a:r>
             <a:endParaRPr lang="en-US" sz="2100" dirty="0"/>
           </a:p>
@@ -11594,17 +11764,17 @@
         </p:nvSpPr>
         <p:spPr>
           <a:xfrm>
-            <a:off x="7799832" y="1828800"/>
-            <a:ext cx="3145536" cy="685800"/>
-          </a:xfrm>
-          <a:prstGeom prst="rect">
-            <a:avLst/>
-          </a:prstGeom>
-          <a:noFill/>
-          <a:ln/>
-        </p:spPr>
-        <p:txBody>
-          <a:bodyPr wrap="square" lIns="0" tIns="0" rIns="0" bIns="0" rtlCol="0" anchor="t">
+            <a:off x="7799832" y="1801368"/>
+            <a:ext cx="3145536" cy="758952"/>
+          </a:xfrm>
+          <a:prstGeom prst="rect">
+            <a:avLst/>
+          </a:prstGeom>
+          <a:noFill/>
+          <a:ln/>
+        </p:spPr>
+        <p:txBody>
+          <a:bodyPr wrap="square" lIns="254" tIns="254" rIns="254" bIns="254" rtlCol="0" anchor="t">
             <a:normAutofit/>
           </a:bodyPr>
           <a:lstStyle/>
@@ -11613,7 +11783,7 @@
               <a:buNone/>
             </a:pPr>
             <a:r>
-              <a:rPr lang="en-US" sz="1550" dirty="0">
+              <a:rPr lang="en-US" sz="1320" dirty="0">
                 <a:solidFill>
                   <a:srgbClr val="17364A"/>
                 </a:solidFill>
@@ -11623,7 +11793,7 @@
               </a:rPr>
               <a:t>1. What is the strongest reason to document data lineage for an AI-supported workflow?</a:t>
             </a:r>
-            <a:endParaRPr lang="en-US" sz="1550" dirty="0"/>
+            <a:endParaRPr lang="en-US" sz="1320" dirty="0"/>
           </a:p>
         </p:txBody>
       </p:sp>
@@ -11711,13 +11881,16 @@
           <a:ln/>
         </p:spPr>
         <p:txBody>
-          <a:bodyPr wrap="square" lIns="254" tIns="254" rIns="254" bIns="254" rtlCol="0" anchor="t">
+          <a:bodyPr wrap="square" lIns="508" tIns="508" rIns="508" bIns="508" rtlCol="0" anchor="t">
             <a:normAutofit/>
           </a:bodyPr>
           <a:lstStyle/>
           <a:p>
-            <a:r>
-              <a:rPr lang="en-US" sz="1380" dirty="0">
+            <a:pPr indent="0" marL="0">
+              <a:buNone/>
+            </a:pPr>
+            <a:r>
+              <a:rPr lang="en-US" sz="1220" dirty="0">
                 <a:solidFill>
                   <a:srgbClr val="17364A"/>
                 </a:solidFill>
@@ -11727,11 +11900,14 @@
               </a:rPr>
               <a:t>1.</a:t>
             </a:r>
-            <a:endParaRPr lang="en-US" sz="1380" dirty="0"/>
-          </a:p>
-          <a:p>
-            <a:r>
-              <a:rPr lang="en-US" sz="1380" dirty="0">
+            <a:endParaRPr lang="en-US" sz="1220" dirty="0"/>
+          </a:p>
+          <a:p>
+            <a:pPr indent="0" marL="0">
+              <a:buNone/>
+            </a:pPr>
+            <a:r>
+              <a:rPr lang="en-US" sz="1220" dirty="0">
                 <a:solidFill>
                   <a:srgbClr val="17364A"/>
                 </a:solidFill>
@@ -11739,13 +11915,16 @@
                 <a:ea typeface="Aptos" pitchFamily="34" charset="-122"/>
                 <a:cs typeface="Aptos" pitchFamily="34" charset="-120"/>
               </a:rPr>
-              <a:t>What is the strongest reason to document data lineage for an AI-supported workflow?</a:t>
-            </a:r>
-            <a:endParaRPr lang="en-US" sz="1380" dirty="0"/>
-          </a:p>
-          <a:p>
-            <a:r>
-              <a:rPr lang="en-US" sz="1380" dirty="0">
+              <a:t>What is the strongest reason to document data lineage for an.</a:t>
+            </a:r>
+            <a:endParaRPr lang="en-US" sz="1220" dirty="0"/>
+          </a:p>
+          <a:p>
+            <a:pPr indent="0" marL="0">
+              <a:buNone/>
+            </a:pPr>
+            <a:r>
+              <a:rPr lang="en-US" sz="1220" dirty="0">
                 <a:solidFill>
                   <a:srgbClr val="17364A"/>
                 </a:solidFill>
@@ -11755,7 +11934,7 @@
               </a:rPr>
               <a:t>2.</a:t>
             </a:r>
-            <a:endParaRPr lang="en-US" sz="1380" dirty="0"/>
+            <a:endParaRPr lang="en-US" sz="1220" dirty="0"/>
           </a:p>
         </p:txBody>
       </p:sp>
@@ -11833,17 +12012,17 @@
         </p:nvSpPr>
         <p:spPr>
           <a:xfrm>
-            <a:off x="7799832" y="5001768"/>
-            <a:ext cx="3145536" cy="502920"/>
-          </a:xfrm>
-          <a:prstGeom prst="rect">
-            <a:avLst/>
-          </a:prstGeom>
-          <a:noFill/>
-          <a:ln/>
-        </p:spPr>
-        <p:txBody>
-          <a:bodyPr wrap="square" lIns="0" tIns="0" rIns="0" bIns="0" rtlCol="0" anchor="t">
+            <a:off x="7799832" y="4974336"/>
+            <a:ext cx="3145536" cy="576072"/>
+          </a:xfrm>
+          <a:prstGeom prst="rect">
+            <a:avLst/>
+          </a:prstGeom>
+          <a:noFill/>
+          <a:ln/>
+        </p:spPr>
+        <p:txBody>
+          <a:bodyPr wrap="square" lIns="254" tIns="254" rIns="254" bIns="254" rtlCol="0" anchor="t">
             <a:normAutofit/>
           </a:bodyPr>
           <a:lstStyle/>
@@ -11852,7 +12031,7 @@
               <a:buNone/>
             </a:pPr>
             <a:r>
-              <a:rPr lang="en-US" sz="1550" dirty="0">
+              <a:rPr lang="en-US" sz="1320" dirty="0">
                 <a:solidFill>
                   <a:srgbClr val="17364A"/>
                 </a:solidFill>
@@ -11860,9 +12039,9 @@
                 <a:ea typeface="Aptos" pitchFamily="34" charset="-122"/>
                 <a:cs typeface="Aptos" pitchFamily="34" charset="-120"/>
               </a:rPr>
-              <a:t>Use the assignment to test whether you can explain the concept, apply it to a realistic public health situation, and identify what would need review before the work moves forward.</a:t>
-            </a:r>
-            <a:endParaRPr lang="en-US" sz="1550" dirty="0"/>
+              <a:t>Use the assignment to test whether you can explain the concept, apply it to a realistic public health situation, and.</a:t>
+            </a:r>
+            <a:endParaRPr lang="en-US" sz="1320" dirty="0"/>
           </a:p>
         </p:txBody>
       </p:sp>
@@ -12163,49 +12342,58 @@
           <a:ln/>
         </p:spPr>
         <p:txBody>
-          <a:bodyPr wrap="square" lIns="635" tIns="635" rIns="635" bIns="635" rtlCol="0" anchor="t">
+          <a:bodyPr wrap="square" lIns="1016" tIns="1016" rIns="1016" bIns="1016" rtlCol="0" anchor="t">
             <a:normAutofit/>
           </a:bodyPr>
           <a:lstStyle/>
           <a:p>
+            <a:pPr indent="0" marL="0">
+              <a:buNone/>
+            </a:pPr>
             <a:r>
               <a:rPr lang="en-US" sz="2100" dirty="0">
                 <a:solidFill>
-                  <a:srgbClr val="17364A"/>
-                </a:solidFill>
-                <a:latin typeface="Aptos" pitchFamily="34" charset="0"/>
-                <a:ea typeface="Aptos" pitchFamily="34" charset="-122"/>
-                <a:cs typeface="Aptos" pitchFamily="34" charset="-120"/>
-              </a:rPr>
-              <a:t>CDC Data Modernization Initiative materials: https://www.cdc.gov/data-modernization/php/index.html</a:t>
+                  <a:srgbClr val="003A63"/>
+                </a:solidFill>
+                <a:latin typeface="Aptos" pitchFamily="34" charset="0"/>
+                <a:ea typeface="Aptos" pitchFamily="34" charset="-122"/>
+                <a:cs typeface="Aptos" pitchFamily="34" charset="-120"/>
+              </a:rPr>
+              <a:t>• CDC Data Modernization Initiative materials:.</a:t>
             </a:r>
             <a:endParaRPr lang="en-US" sz="2100" dirty="0"/>
           </a:p>
           <a:p>
+            <a:pPr indent="0" marL="0">
+              <a:buNone/>
+            </a:pPr>
             <a:r>
               <a:rPr lang="en-US" sz="2100" dirty="0">
                 <a:solidFill>
-                  <a:srgbClr val="17364A"/>
-                </a:solidFill>
-                <a:latin typeface="Aptos" pitchFamily="34" charset="0"/>
-                <a:ea typeface="Aptos" pitchFamily="34" charset="-122"/>
-                <a:cs typeface="Aptos" pitchFamily="34" charset="-120"/>
-              </a:rPr>
-              <a:t>CDC Public Health Data Strategy: https://www.cdc.gov/public-health-data-strategy/php/about/index.html</a:t>
+                  <a:srgbClr val="003A63"/>
+                </a:solidFill>
+                <a:latin typeface="Aptos" pitchFamily="34" charset="0"/>
+                <a:ea typeface="Aptos" pitchFamily="34" charset="-122"/>
+                <a:cs typeface="Aptos" pitchFamily="34" charset="-120"/>
+              </a:rPr>
+              <a:t>• CDC Public Health Data Strategy:.</a:t>
             </a:r>
             <a:endParaRPr lang="en-US" sz="2100" dirty="0"/>
           </a:p>
           <a:p>
+            <a:pPr indent="0" marL="0">
+              <a:buNone/>
+            </a:pPr>
             <a:r>
               <a:rPr lang="en-US" sz="2100" dirty="0">
                 <a:solidFill>
-                  <a:srgbClr val="17364A"/>
-                </a:solidFill>
-                <a:latin typeface="Aptos" pitchFamily="34" charset="0"/>
-                <a:ea typeface="Aptos" pitchFamily="34" charset="-122"/>
-                <a:cs typeface="Aptos" pitchFamily="34" charset="-120"/>
-              </a:rPr>
-              <a:t>NIST AI Risk Management Framework: https://www.nist.gov/itl/ai-risk-management-framework</a:t>
+                  <a:srgbClr val="003A63"/>
+                </a:solidFill>
+                <a:latin typeface="Aptos" pitchFamily="34" charset="0"/>
+                <a:ea typeface="Aptos" pitchFamily="34" charset="-122"/>
+                <a:cs typeface="Aptos" pitchFamily="34" charset="-120"/>
+              </a:rPr>
+              <a:t>• NIST AI Risk Management Framework: https://www.nist.gov/itl/ai-risk-management-framework</a:t>
             </a:r>
             <a:endParaRPr lang="en-US" sz="2100" dirty="0"/>
           </a:p>
@@ -12285,17 +12473,17 @@
         </p:nvSpPr>
         <p:spPr>
           <a:xfrm>
-            <a:off x="7799832" y="1828800"/>
-            <a:ext cx="3145536" cy="685800"/>
-          </a:xfrm>
-          <a:prstGeom prst="rect">
-            <a:avLst/>
-          </a:prstGeom>
-          <a:noFill/>
-          <a:ln/>
-        </p:spPr>
-        <p:txBody>
-          <a:bodyPr wrap="square" lIns="0" tIns="0" rIns="0" bIns="0" rtlCol="0" anchor="t">
+            <a:off x="7799832" y="1801368"/>
+            <a:ext cx="3145536" cy="758952"/>
+          </a:xfrm>
+          <a:prstGeom prst="rect">
+            <a:avLst/>
+          </a:prstGeom>
+          <a:noFill/>
+          <a:ln/>
+        </p:spPr>
+        <p:txBody>
+          <a:bodyPr wrap="square" lIns="254" tIns="254" rIns="254" bIns="254" rtlCol="0" anchor="t">
             <a:normAutofit/>
           </a:bodyPr>
           <a:lstStyle/>
@@ -12304,7 +12492,7 @@
               <a:buNone/>
             </a:pPr>
             <a:r>
-              <a:rPr lang="en-US" sz="1550" dirty="0">
+              <a:rPr lang="en-US" sz="1320" dirty="0">
                 <a:solidFill>
                   <a:srgbClr val="17364A"/>
                 </a:solidFill>
@@ -12314,7 +12502,7 @@
               </a:rPr>
               <a:t>CDC Data Modernization Initiative materials: https://www.cdc.gov/data-modernization/php/index.html</a:t>
             </a:r>
-            <a:endParaRPr lang="en-US" sz="1550" dirty="0"/>
+            <a:endParaRPr lang="en-US" sz="1320" dirty="0"/>
           </a:p>
         </p:txBody>
       </p:sp>
@@ -12402,13 +12590,16 @@
           <a:ln/>
         </p:spPr>
         <p:txBody>
-          <a:bodyPr wrap="square" lIns="254" tIns="254" rIns="254" bIns="254" rtlCol="0" anchor="t">
+          <a:bodyPr wrap="square" lIns="508" tIns="508" rIns="508" bIns="508" rtlCol="0" anchor="t">
             <a:normAutofit/>
           </a:bodyPr>
           <a:lstStyle/>
           <a:p>
-            <a:r>
-              <a:rPr lang="en-US" sz="1380" dirty="0">
+            <a:pPr indent="0" marL="0">
+              <a:buNone/>
+            </a:pPr>
+            <a:r>
+              <a:rPr lang="en-US" sz="1220" dirty="0">
                 <a:solidFill>
                   <a:srgbClr val="17364A"/>
                 </a:solidFill>
@@ -12418,11 +12609,14 @@
               </a:rPr>
               <a:t>CDC Data Modernization Initiative materials:.</a:t>
             </a:r>
-            <a:endParaRPr lang="en-US" sz="1380" dirty="0"/>
-          </a:p>
-          <a:p>
-            <a:r>
-              <a:rPr lang="en-US" sz="1380" dirty="0">
+            <a:endParaRPr lang="en-US" sz="1220" dirty="0"/>
+          </a:p>
+          <a:p>
+            <a:pPr indent="0" marL="0">
+              <a:buNone/>
+            </a:pPr>
+            <a:r>
+              <a:rPr lang="en-US" sz="1220" dirty="0">
                 <a:solidFill>
                   <a:srgbClr val="17364A"/>
                 </a:solidFill>
@@ -12432,11 +12626,14 @@
               </a:rPr>
               <a:t>CDC Public Health Data Strategy:.</a:t>
             </a:r>
-            <a:endParaRPr lang="en-US" sz="1380" dirty="0"/>
-          </a:p>
-          <a:p>
-            <a:r>
-              <a:rPr lang="en-US" sz="1380" dirty="0">
+            <a:endParaRPr lang="en-US" sz="1220" dirty="0"/>
+          </a:p>
+          <a:p>
+            <a:pPr indent="0" marL="0">
+              <a:buNone/>
+            </a:pPr>
+            <a:r>
+              <a:rPr lang="en-US" sz="1220" dirty="0">
                 <a:solidFill>
                   <a:srgbClr val="17364A"/>
                 </a:solidFill>
@@ -12444,9 +12641,9 @@
                 <a:ea typeface="Aptos" pitchFamily="34" charset="-122"/>
                 <a:cs typeface="Aptos" pitchFamily="34" charset="-120"/>
               </a:rPr>
-              <a:t>NIST AI Risk Management Framework: https://www.nist.gov/itl/ai-risk-management-framework</a:t>
-            </a:r>
-            <a:endParaRPr lang="en-US" sz="1380" dirty="0"/>
+              <a:t>NIST AI Risk Management Framework:.</a:t>
+            </a:r>
+            <a:endParaRPr lang="en-US" sz="1220" dirty="0"/>
           </a:p>
         </p:txBody>
       </p:sp>
@@ -12524,17 +12721,17 @@
         </p:nvSpPr>
         <p:spPr>
           <a:xfrm>
-            <a:off x="7799832" y="5001768"/>
-            <a:ext cx="3145536" cy="502920"/>
-          </a:xfrm>
-          <a:prstGeom prst="rect">
-            <a:avLst/>
-          </a:prstGeom>
-          <a:noFill/>
-          <a:ln/>
-        </p:spPr>
-        <p:txBody>
-          <a:bodyPr wrap="square" lIns="0" tIns="0" rIns="0" bIns="0" rtlCol="0" anchor="t">
+            <a:off x="7799832" y="4974336"/>
+            <a:ext cx="3145536" cy="576072"/>
+          </a:xfrm>
+          <a:prstGeom prst="rect">
+            <a:avLst/>
+          </a:prstGeom>
+          <a:noFill/>
+          <a:ln/>
+        </p:spPr>
+        <p:txBody>
+          <a:bodyPr wrap="square" lIns="254" tIns="254" rIns="254" bIns="254" rtlCol="0" anchor="t">
             <a:normAutofit/>
           </a:bodyPr>
           <a:lstStyle/>
@@ -12543,7 +12740,7 @@
               <a:buNone/>
             </a:pPr>
             <a:r>
-              <a:rPr lang="en-US" sz="1550" dirty="0">
+              <a:rPr lang="en-US" sz="1320" dirty="0">
                 <a:solidFill>
                   <a:srgbClr val="17364A"/>
                 </a:solidFill>
@@ -12551,9 +12748,9 @@
                 <a:ea typeface="Aptos" pitchFamily="34" charset="-122"/>
                 <a:cs typeface="Aptos" pitchFamily="34" charset="-120"/>
               </a:rPr>
-              <a:t>Connect the concept to data quality, model performance, validation evidence, monitoring measures, and decisions that remain under human control.</a:t>
-            </a:r>
-            <a:endParaRPr lang="en-US" sz="1550" dirty="0"/>
+              <a:t>Connect the concept to data quality, model performance, validation evidence, monitoring measures, and decisions that.</a:t>
+            </a:r>
+            <a:endParaRPr lang="en-US" sz="1320" dirty="0"/>
           </a:p>
         </p:txBody>
       </p:sp>
@@ -12854,63 +13051,75 @@
           <a:ln/>
         </p:spPr>
         <p:txBody>
-          <a:bodyPr wrap="square" lIns="635" tIns="635" rIns="635" bIns="635" rtlCol="0" anchor="t">
+          <a:bodyPr wrap="square" lIns="1016" tIns="1016" rIns="1016" bIns="1016" rtlCol="0" anchor="t">
             <a:normAutofit/>
           </a:bodyPr>
           <a:lstStyle/>
           <a:p>
+            <a:pPr indent="0" marL="0">
+              <a:buNone/>
+            </a:pPr>
             <a:r>
               <a:rPr lang="en-US" sz="1900" dirty="0">
                 <a:solidFill>
-                  <a:srgbClr val="17364A"/>
-                </a:solidFill>
-                <a:latin typeface="Aptos" pitchFamily="34" charset="0"/>
-                <a:ea typeface="Aptos" pitchFamily="34" charset="-122"/>
-                <a:cs typeface="Aptos" pitchFamily="34" charset="-120"/>
-              </a:rPr>
-              <a:t>Play 12: Execute Governance and Oversight - This lesson informs Play 12 by helping learners connect the.</a:t>
+                  <a:srgbClr val="003A63"/>
+                </a:solidFill>
+                <a:latin typeface="Aptos" pitchFamily="34" charset="0"/>
+                <a:ea typeface="Aptos" pitchFamily="34" charset="-122"/>
+                <a:cs typeface="Aptos" pitchFamily="34" charset="-120"/>
+              </a:rPr>
+              <a:t>• Play 12: Execute Governance and Oversight - This lesson informs Play 12 by helping learners.</a:t>
             </a:r>
             <a:endParaRPr lang="en-US" sz="1900" dirty="0"/>
           </a:p>
           <a:p>
+            <a:pPr indent="0" marL="0">
+              <a:buNone/>
+            </a:pPr>
             <a:r>
               <a:rPr lang="en-US" sz="1900" dirty="0">
                 <a:solidFill>
-                  <a:srgbClr val="17364A"/>
-                </a:solidFill>
-                <a:latin typeface="Aptos" pitchFamily="34" charset="0"/>
-                <a:ea typeface="Aptos" pitchFamily="34" charset="-122"/>
-                <a:cs typeface="Aptos" pitchFamily="34" charset="-120"/>
-              </a:rPr>
-              <a:t>Play 3: Establish AI Governance - This lesson informs Play 3 by helping learners connect the lesson topic to.</a:t>
+                  <a:srgbClr val="003A63"/>
+                </a:solidFill>
+                <a:latin typeface="Aptos" pitchFamily="34" charset="0"/>
+                <a:ea typeface="Aptos" pitchFamily="34" charset="-122"/>
+                <a:cs typeface="Aptos" pitchFamily="34" charset="-120"/>
+              </a:rPr>
+              <a:t>• Play 3: Establish AI Governance - This lesson informs Play 3 by helping learners connect the.</a:t>
             </a:r>
             <a:endParaRPr lang="en-US" sz="1900" dirty="0"/>
           </a:p>
           <a:p>
+            <a:pPr indent="0" marL="0">
+              <a:buNone/>
+            </a:pPr>
             <a:r>
               <a:rPr lang="en-US" sz="1900" dirty="0">
                 <a:solidFill>
-                  <a:srgbClr val="17364A"/>
-                </a:solidFill>
-                <a:latin typeface="Aptos" pitchFamily="34" charset="0"/>
-                <a:ea typeface="Aptos" pitchFamily="34" charset="-122"/>
-                <a:cs typeface="Aptos" pitchFamily="34" charset="-120"/>
-              </a:rPr>
-              <a:t>Play 13: Monitor and Evaluate AI Systems - This lesson informs Play 13 by helping learners connect the.</a:t>
+                  <a:srgbClr val="003A63"/>
+                </a:solidFill>
+                <a:latin typeface="Aptos" pitchFamily="34" charset="0"/>
+                <a:ea typeface="Aptos" pitchFamily="34" charset="-122"/>
+                <a:cs typeface="Aptos" pitchFamily="34" charset="-120"/>
+              </a:rPr>
+              <a:t>• Play 13: Monitor and Evaluate AI Systems - This lesson informs Play 13 by helping learners.</a:t>
             </a:r>
             <a:endParaRPr lang="en-US" sz="1900" dirty="0"/>
           </a:p>
           <a:p>
+            <a:pPr indent="0" marL="0">
+              <a:buNone/>
+            </a:pPr>
             <a:r>
               <a:rPr lang="en-US" sz="1900" dirty="0">
                 <a:solidFill>
-                  <a:srgbClr val="17364A"/>
-                </a:solidFill>
-                <a:latin typeface="Aptos" pitchFamily="34" charset="0"/>
-                <a:ea typeface="Aptos" pitchFamily="34" charset="-122"/>
-                <a:cs typeface="Aptos" pitchFamily="34" charset="-120"/>
-              </a:rPr>
-              <a:t>Play 11: Build and Deploy AI Solutions - This lesson informs Play 11 by helping learners connect the lesson.</a:t>
+                  <a:srgbClr val="003A63"/>
+                </a:solidFill>
+                <a:latin typeface="Aptos" pitchFamily="34" charset="0"/>
+                <a:ea typeface="Aptos" pitchFamily="34" charset="-122"/>
+                <a:cs typeface="Aptos" pitchFamily="34" charset="-120"/>
+              </a:rPr>
+              <a:t>• Play 11: Build and Deploy AI Solutions - This lesson informs Play 11 by helping learners.</a:t>
             </a:r>
             <a:endParaRPr lang="en-US" sz="1900" dirty="0"/>
           </a:p>
@@ -12990,17 +13199,17 @@
         </p:nvSpPr>
         <p:spPr>
           <a:xfrm>
-            <a:off x="8211312" y="1920240"/>
-            <a:ext cx="2734056" cy="1463040"/>
-          </a:xfrm>
-          <a:prstGeom prst="rect">
-            <a:avLst/>
-          </a:prstGeom>
-          <a:noFill/>
-          <a:ln/>
-        </p:spPr>
-        <p:txBody>
-          <a:bodyPr wrap="square" lIns="0" tIns="0" rIns="0" bIns="0" rtlCol="0" anchor="t">
+            <a:off x="8211312" y="1892808"/>
+            <a:ext cx="2734056" cy="1536192"/>
+          </a:xfrm>
+          <a:prstGeom prst="rect">
+            <a:avLst/>
+          </a:prstGeom>
+          <a:noFill/>
+          <a:ln/>
+        </p:spPr>
+        <p:txBody>
+          <a:bodyPr wrap="square" lIns="254" tIns="254" rIns="254" bIns="254" rtlCol="0" anchor="t">
             <a:normAutofit/>
           </a:bodyPr>
           <a:lstStyle/>
@@ -13009,7 +13218,7 @@
               <a:buNone/>
             </a:pPr>
             <a:r>
-              <a:rPr lang="en-US" sz="1550" dirty="0">
+              <a:rPr lang="en-US" sz="1320" dirty="0">
                 <a:solidFill>
                   <a:srgbClr val="17364A"/>
                 </a:solidFill>
@@ -13017,9 +13226,9 @@
                 <a:ea typeface="Aptos" pitchFamily="34" charset="-122"/>
                 <a:cs typeface="Aptos" pitchFamily="34" charset="-120"/>
               </a:rPr>
-              <a:t>Use the related plays to identify decisions, participants, timing, approvals, and documentation needed for responsible implementation.</a:t>
-            </a:r>
-            <a:endParaRPr lang="en-US" sz="1550" dirty="0"/>
+              <a:t>Use the related plays to identify decisions, participants, timing, approvals, and documentation needed for responsible.</a:t>
+            </a:r>
+            <a:endParaRPr lang="en-US" sz="1320" dirty="0"/>
           </a:p>
         </p:txBody>
       </p:sp>
@@ -13107,13 +13316,16 @@
           <a:ln/>
         </p:spPr>
         <p:txBody>
-          <a:bodyPr wrap="square" lIns="254" tIns="254" rIns="254" bIns="254" rtlCol="0" anchor="t">
+          <a:bodyPr wrap="square" lIns="508" tIns="508" rIns="508" bIns="508" rtlCol="0" anchor="t">
             <a:normAutofit/>
           </a:bodyPr>
           <a:lstStyle/>
           <a:p>
-            <a:r>
-              <a:rPr lang="en-US" sz="1380" dirty="0">
+            <a:pPr indent="0" marL="0">
+              <a:buNone/>
+            </a:pPr>
+            <a:r>
+              <a:rPr lang="en-US" sz="1220" dirty="0">
                 <a:solidFill>
                   <a:srgbClr val="17364A"/>
                 </a:solidFill>
@@ -13123,11 +13335,14 @@
               </a:rPr>
               <a:t>Locate the decision point in the playbook sequence.</a:t>
             </a:r>
-            <a:endParaRPr lang="en-US" sz="1380" dirty="0"/>
-          </a:p>
-          <a:p>
-            <a:r>
-              <a:rPr lang="en-US" sz="1380" dirty="0">
+            <a:endParaRPr lang="en-US" sz="1220" dirty="0"/>
+          </a:p>
+          <a:p>
+            <a:pPr indent="0" marL="0">
+              <a:buNone/>
+            </a:pPr>
+            <a:r>
+              <a:rPr lang="en-US" sz="1220" dirty="0">
                 <a:solidFill>
                   <a:srgbClr val="17364A"/>
                 </a:solidFill>
@@ -13137,11 +13352,14 @@
               </a:rPr>
               <a:t>Identify who should participate in the work.</a:t>
             </a:r>
-            <a:endParaRPr lang="en-US" sz="1380" dirty="0"/>
-          </a:p>
-          <a:p>
-            <a:r>
-              <a:rPr lang="en-US" sz="1380" dirty="0">
+            <a:endParaRPr lang="en-US" sz="1220" dirty="0"/>
+          </a:p>
+          <a:p>
+            <a:pPr indent="0" marL="0">
+              <a:buNone/>
+            </a:pPr>
+            <a:r>
+              <a:rPr lang="en-US" sz="1220" dirty="0">
                 <a:solidFill>
                   <a:srgbClr val="17364A"/>
                 </a:solidFill>
@@ -13151,7 +13369,7 @@
               </a:rPr>
               <a:t>Document the review, approval, or implementation step.</a:t>
             </a:r>
-            <a:endParaRPr lang="en-US" sz="1380" dirty="0"/>
+            <a:endParaRPr lang="en-US" sz="1220" dirty="0"/>
           </a:p>
         </p:txBody>
       </p:sp>
@@ -13452,63 +13670,75 @@
           <a:ln/>
         </p:spPr>
         <p:txBody>
-          <a:bodyPr wrap="square" lIns="635" tIns="635" rIns="635" bIns="635" rtlCol="0" anchor="t">
+          <a:bodyPr wrap="square" lIns="1016" tIns="1016" rIns="1016" bIns="1016" rtlCol="0" anchor="t">
             <a:normAutofit/>
           </a:bodyPr>
           <a:lstStyle/>
           <a:p>
+            <a:pPr indent="0" marL="0">
+              <a:buNone/>
+            </a:pPr>
             <a:r>
               <a:rPr lang="en-US" sz="1850" dirty="0">
                 <a:solidFill>
-                  <a:srgbClr val="17364A"/>
-                </a:solidFill>
-                <a:latin typeface="Aptos" pitchFamily="34" charset="0"/>
-                <a:ea typeface="Aptos" pitchFamily="34" charset="-122"/>
-                <a:cs typeface="Aptos" pitchFamily="34" charset="-120"/>
-              </a:rPr>
-              <a:t>Tool 16: Incident Response Checklist (Checklist) - Use Incident Response Checklist to translate this lesson.</a:t>
+                  <a:srgbClr val="003A63"/>
+                </a:solidFill>
+                <a:latin typeface="Aptos" pitchFamily="34" charset="0"/>
+                <a:ea typeface="Aptos" pitchFamily="34" charset="-122"/>
+                <a:cs typeface="Aptos" pitchFamily="34" charset="-120"/>
+              </a:rPr>
+              <a:t>• Tool 16: Incident Response Checklist (Checklist) - Use Incident Response Checklist to.</a:t>
             </a:r>
             <a:endParaRPr lang="en-US" sz="1850" dirty="0"/>
           </a:p>
           <a:p>
+            <a:pPr indent="0" marL="0">
+              <a:buNone/>
+            </a:pPr>
             <a:r>
               <a:rPr lang="en-US" sz="1850" dirty="0">
                 <a:solidFill>
-                  <a:srgbClr val="17364A"/>
-                </a:solidFill>
-                <a:latin typeface="Aptos" pitchFamily="34" charset="0"/>
-                <a:ea typeface="Aptos" pitchFamily="34" charset="-122"/>
-                <a:cs typeface="Aptos" pitchFamily="34" charset="-120"/>
-              </a:rPr>
-              <a:t>Tool 17: Compliance Audit Checklist (Checklist) - Use Compliance Audit Checklist to translate this lesson.</a:t>
+                  <a:srgbClr val="003A63"/>
+                </a:solidFill>
+                <a:latin typeface="Aptos" pitchFamily="34" charset="0"/>
+                <a:ea typeface="Aptos" pitchFamily="34" charset="-122"/>
+                <a:cs typeface="Aptos" pitchFamily="34" charset="-120"/>
+              </a:rPr>
+              <a:t>• Tool 17: Compliance Audit Checklist (Checklist) - Use Compliance Audit Checklist to translate.</a:t>
             </a:r>
             <a:endParaRPr lang="en-US" sz="1850" dirty="0"/>
           </a:p>
           <a:p>
+            <a:pPr indent="0" marL="0">
+              <a:buNone/>
+            </a:pPr>
             <a:r>
               <a:rPr lang="en-US" sz="1850" dirty="0">
                 <a:solidFill>
-                  <a:srgbClr val="17364A"/>
-                </a:solidFill>
-                <a:latin typeface="Aptos" pitchFamily="34" charset="0"/>
-                <a:ea typeface="Aptos" pitchFamily="34" charset="-122"/>
-                <a:cs typeface="Aptos" pitchFamily="34" charset="-120"/>
-              </a:rPr>
-              <a:t>Tool 18: Policy Update &amp; Version Control Log (Log) - Use this tool to complete or strengthen the practical.</a:t>
+                  <a:srgbClr val="003A63"/>
+                </a:solidFill>
+                <a:latin typeface="Aptos" pitchFamily="34" charset="0"/>
+                <a:ea typeface="Aptos" pitchFamily="34" charset="-122"/>
+                <a:cs typeface="Aptos" pitchFamily="34" charset="-120"/>
+              </a:rPr>
+              <a:t>• Tool 18: Policy Update &amp; Version Control Log (Log) - Use this tool to complete or strengthen.</a:t>
             </a:r>
             <a:endParaRPr lang="en-US" sz="1850" dirty="0"/>
           </a:p>
           <a:p>
+            <a:pPr indent="0" marL="0">
+              <a:buNone/>
+            </a:pPr>
             <a:r>
               <a:rPr lang="en-US" sz="1850" dirty="0">
                 <a:solidFill>
-                  <a:srgbClr val="17364A"/>
-                </a:solidFill>
-                <a:latin typeface="Aptos" pitchFamily="34" charset="0"/>
-                <a:ea typeface="Aptos" pitchFamily="34" charset="-122"/>
-                <a:cs typeface="Aptos" pitchFamily="34" charset="-120"/>
-              </a:rPr>
-              <a:t>Tool 19: Plain-Language AI Public Notice Template (Template) - Use Plain-Language AI Public Notice Template.</a:t>
+                  <a:srgbClr val="003A63"/>
+                </a:solidFill>
+                <a:latin typeface="Aptos" pitchFamily="34" charset="0"/>
+                <a:ea typeface="Aptos" pitchFamily="34" charset="-122"/>
+                <a:cs typeface="Aptos" pitchFamily="34" charset="-120"/>
+              </a:rPr>
+              <a:t>• Tool 19: Plain-Language AI Public Notice Template (Template) - Use Plain-Language AI Public.</a:t>
             </a:r>
             <a:endParaRPr lang="en-US" sz="1850" dirty="0"/>
           </a:p>
@@ -13588,17 +13818,17 @@
         </p:nvSpPr>
         <p:spPr>
           <a:xfrm>
-            <a:off x="8211312" y="1920240"/>
-            <a:ext cx="2734056" cy="1463040"/>
-          </a:xfrm>
-          <a:prstGeom prst="rect">
-            <a:avLst/>
-          </a:prstGeom>
-          <a:noFill/>
-          <a:ln/>
-        </p:spPr>
-        <p:txBody>
-          <a:bodyPr wrap="square" lIns="0" tIns="0" rIns="0" bIns="0" rtlCol="0" anchor="t">
+            <a:off x="8211312" y="1892808"/>
+            <a:ext cx="2734056" cy="1536192"/>
+          </a:xfrm>
+          <a:prstGeom prst="rect">
+            <a:avLst/>
+          </a:prstGeom>
+          <a:noFill/>
+          <a:ln/>
+        </p:spPr>
+        <p:txBody>
+          <a:bodyPr wrap="square" lIns="254" tIns="254" rIns="254" bIns="254" rtlCol="0" anchor="t">
             <a:normAutofit/>
           </a:bodyPr>
           <a:lstStyle/>
@@ -13607,7 +13837,7 @@
               <a:buNone/>
             </a:pPr>
             <a:r>
-              <a:rPr lang="en-US" sz="1550" dirty="0">
+              <a:rPr lang="en-US" sz="1320" dirty="0">
                 <a:solidFill>
                   <a:srgbClr val="17364A"/>
                 </a:solidFill>
@@ -13615,9 +13845,9 @@
                 <a:ea typeface="Aptos" pitchFamily="34" charset="-122"/>
                 <a:cs typeface="Aptos" pitchFamily="34" charset="-120"/>
               </a:rPr>
-              <a:t>Use linked tools when your department needs a structured worksheet, template, checklist, review process, or documentation artifact.</a:t>
-            </a:r>
-            <a:endParaRPr lang="en-US" sz="1550" dirty="0"/>
+              <a:t>Use linked tools when your department needs a structured worksheet, template, checklist, review process, or.</a:t>
+            </a:r>
+            <a:endParaRPr lang="en-US" sz="1320" dirty="0"/>
           </a:p>
         </p:txBody>
       </p:sp>
@@ -13705,13 +13935,16 @@
           <a:ln/>
         </p:spPr>
         <p:txBody>
-          <a:bodyPr wrap="square" lIns="254" tIns="254" rIns="254" bIns="254" rtlCol="0" anchor="t">
+          <a:bodyPr wrap="square" lIns="508" tIns="508" rIns="508" bIns="508" rtlCol="0" anchor="t">
             <a:normAutofit/>
           </a:bodyPr>
           <a:lstStyle/>
           <a:p>
-            <a:r>
-              <a:rPr lang="en-US" sz="1380" dirty="0">
+            <a:pPr indent="0" marL="0">
+              <a:buNone/>
+            </a:pPr>
+            <a:r>
+              <a:rPr lang="en-US" sz="1220" dirty="0">
                 <a:solidFill>
                   <a:srgbClr val="17364A"/>
                 </a:solidFill>
@@ -13721,11 +13954,14 @@
               </a:rPr>
               <a:t>Use a tool when no comparable local process exists.</a:t>
             </a:r>
-            <a:endParaRPr lang="en-US" sz="1380" dirty="0"/>
-          </a:p>
-          <a:p>
-            <a:r>
-              <a:rPr lang="en-US" sz="1380" dirty="0">
+            <a:endParaRPr lang="en-US" sz="1220" dirty="0"/>
+          </a:p>
+          <a:p>
+            <a:pPr indent="0" marL="0">
+              <a:buNone/>
+            </a:pPr>
+            <a:r>
+              <a:rPr lang="en-US" sz="1220" dirty="0">
                 <a:solidFill>
                   <a:srgbClr val="17364A"/>
                 </a:solidFill>
@@ -13733,13 +13969,16 @@
                 <a:ea typeface="Aptos" pitchFamily="34" charset="-122"/>
                 <a:cs typeface="Aptos" pitchFamily="34" charset="-120"/>
               </a:rPr>
-              <a:t>Adapt existing department templates when they already fit the purpose.</a:t>
-            </a:r>
-            <a:endParaRPr lang="en-US" sz="1380" dirty="0"/>
-          </a:p>
-          <a:p>
-            <a:r>
-              <a:rPr lang="en-US" sz="1380" dirty="0">
+              <a:t>Adapt existing department templates when they already fit the.</a:t>
+            </a:r>
+            <a:endParaRPr lang="en-US" sz="1220" dirty="0"/>
+          </a:p>
+          <a:p>
+            <a:pPr indent="0" marL="0">
+              <a:buNone/>
+            </a:pPr>
+            <a:r>
+              <a:rPr lang="en-US" sz="1220" dirty="0">
                 <a:solidFill>
                   <a:srgbClr val="17364A"/>
                 </a:solidFill>
@@ -13749,7 +13988,7 @@
               </a:rPr>
               <a:t>Save the completed artifact as evidence of the decision.</a:t>
             </a:r>
-            <a:endParaRPr lang="en-US" sz="1380" dirty="0"/>
+            <a:endParaRPr lang="en-US" sz="1220" dirty="0"/>
           </a:p>
         </p:txBody>
       </p:sp>
@@ -14050,49 +14289,58 @@
           <a:ln/>
         </p:spPr>
         <p:txBody>
-          <a:bodyPr wrap="square" lIns="635" tIns="635" rIns="635" bIns="635" rtlCol="0" anchor="t">
+          <a:bodyPr wrap="square" lIns="1016" tIns="1016" rIns="1016" bIns="1016" rtlCol="0" anchor="t">
             <a:normAutofit/>
           </a:bodyPr>
           <a:lstStyle/>
           <a:p>
+            <a:pPr indent="0" marL="0">
+              <a:buNone/>
+            </a:pPr>
             <a:r>
               <a:rPr lang="en-US" sz="2100" dirty="0">
                 <a:solidFill>
-                  <a:srgbClr val="17364A"/>
-                </a:solidFill>
-                <a:latin typeface="Aptos" pitchFamily="34" charset="0"/>
-                <a:ea typeface="Aptos" pitchFamily="34" charset="-122"/>
-                <a:cs typeface="Aptos" pitchFamily="34" charset="-120"/>
-              </a:rPr>
-              <a:t>Describe the major steps in public health data pipelines, including ingestion, validation,.</a:t>
+                  <a:srgbClr val="003A63"/>
+                </a:solidFill>
+                <a:latin typeface="Aptos" pitchFamily="34" charset="0"/>
+                <a:ea typeface="Aptos" pitchFamily="34" charset="-122"/>
+                <a:cs typeface="Aptos" pitchFamily="34" charset="-120"/>
+              </a:rPr>
+              <a:t>• Describe the major steps in public health data pipelines, including ingestion, validation,.</a:t>
             </a:r>
             <a:endParaRPr lang="en-US" sz="2100" dirty="0"/>
           </a:p>
           <a:p>
+            <a:pPr indent="0" marL="0">
+              <a:buNone/>
+            </a:pPr>
             <a:r>
               <a:rPr lang="en-US" sz="2100" dirty="0">
                 <a:solidFill>
-                  <a:srgbClr val="17364A"/>
-                </a:solidFill>
-                <a:latin typeface="Aptos" pitchFamily="34" charset="0"/>
-                <a:ea typeface="Aptos" pitchFamily="34" charset="-122"/>
-                <a:cs typeface="Aptos" pitchFamily="34" charset="-120"/>
-              </a:rPr>
-              <a:t>Distinguish between batch, real-time, and event-driven data flows.</a:t>
+                  <a:srgbClr val="003A63"/>
+                </a:solidFill>
+                <a:latin typeface="Aptos" pitchFamily="34" charset="0"/>
+                <a:ea typeface="Aptos" pitchFamily="34" charset="-122"/>
+                <a:cs typeface="Aptos" pitchFamily="34" charset="-120"/>
+              </a:rPr>
+              <a:t>• Distinguish between batch, real-time, and event-driven data flows.</a:t>
             </a:r>
             <a:endParaRPr lang="en-US" sz="2100" dirty="0"/>
           </a:p>
           <a:p>
+            <a:pPr indent="0" marL="0">
+              <a:buNone/>
+            </a:pPr>
             <a:r>
               <a:rPr lang="en-US" sz="2100" dirty="0">
                 <a:solidFill>
-                  <a:srgbClr val="17364A"/>
-                </a:solidFill>
-                <a:latin typeface="Aptos" pitchFamily="34" charset="0"/>
-                <a:ea typeface="Aptos" pitchFamily="34" charset="-122"/>
-                <a:cs typeface="Aptos" pitchFamily="34" charset="-120"/>
-              </a:rPr>
-              <a:t>Explain how pipeline failures can affect AI outputs and operational decisions.</a:t>
+                  <a:srgbClr val="003A63"/>
+                </a:solidFill>
+                <a:latin typeface="Aptos" pitchFamily="34" charset="0"/>
+                <a:ea typeface="Aptos" pitchFamily="34" charset="-122"/>
+                <a:cs typeface="Aptos" pitchFamily="34" charset="-120"/>
+              </a:rPr>
+              <a:t>• Explain how pipeline failures can affect AI outputs and operational decisions.</a:t>
             </a:r>
             <a:endParaRPr lang="en-US" sz="2100" dirty="0"/>
           </a:p>
@@ -14172,17 +14420,17 @@
         </p:nvSpPr>
         <p:spPr>
           <a:xfrm>
-            <a:off x="7799832" y="1828800"/>
-            <a:ext cx="3145536" cy="685800"/>
-          </a:xfrm>
-          <a:prstGeom prst="rect">
-            <a:avLst/>
-          </a:prstGeom>
-          <a:noFill/>
-          <a:ln/>
-        </p:spPr>
-        <p:txBody>
-          <a:bodyPr wrap="square" lIns="0" tIns="0" rIns="0" bIns="0" rtlCol="0" anchor="t">
+            <a:off x="7799832" y="1801368"/>
+            <a:ext cx="3145536" cy="758952"/>
+          </a:xfrm>
+          <a:prstGeom prst="rect">
+            <a:avLst/>
+          </a:prstGeom>
+          <a:noFill/>
+          <a:ln/>
+        </p:spPr>
+        <p:txBody>
+          <a:bodyPr wrap="square" lIns="254" tIns="254" rIns="254" bIns="254" rtlCol="0" anchor="t">
             <a:normAutofit/>
           </a:bodyPr>
           <a:lstStyle/>
@@ -14191,7 +14439,7 @@
               <a:buNone/>
             </a:pPr>
             <a:r>
-              <a:rPr lang="en-US" sz="1550" dirty="0">
+              <a:rPr lang="en-US" sz="1320" dirty="0">
                 <a:solidFill>
                   <a:srgbClr val="17364A"/>
                 </a:solidFill>
@@ -14201,7 +14449,7 @@
               </a:rPr>
               <a:t>Describe the major steps in public health data pipelines, including ingestion, validation,.</a:t>
             </a:r>
-            <a:endParaRPr lang="en-US" sz="1550" dirty="0"/>
+            <a:endParaRPr lang="en-US" sz="1320" dirty="0"/>
           </a:p>
         </p:txBody>
       </p:sp>
@@ -14289,13 +14537,16 @@
           <a:ln/>
         </p:spPr>
         <p:txBody>
-          <a:bodyPr wrap="square" lIns="254" tIns="254" rIns="254" bIns="254" rtlCol="0" anchor="t">
+          <a:bodyPr wrap="square" lIns="508" tIns="508" rIns="508" bIns="508" rtlCol="0" anchor="t">
             <a:normAutofit/>
           </a:bodyPr>
           <a:lstStyle/>
           <a:p>
-            <a:r>
-              <a:rPr lang="en-US" sz="1380" dirty="0">
+            <a:pPr indent="0" marL="0">
+              <a:buNone/>
+            </a:pPr>
+            <a:r>
+              <a:rPr lang="en-US" sz="1220" dirty="0">
                 <a:solidFill>
                   <a:srgbClr val="17364A"/>
                 </a:solidFill>
@@ -14303,13 +14554,16 @@
                 <a:ea typeface="Aptos" pitchFamily="34" charset="-122"/>
                 <a:cs typeface="Aptos" pitchFamily="34" charset="-120"/>
               </a:rPr>
-              <a:t>Describe the major steps in public health data pipelines, including ingestion, validation,.</a:t>
-            </a:r>
-            <a:endParaRPr lang="en-US" sz="1380" dirty="0"/>
-          </a:p>
-          <a:p>
-            <a:r>
-              <a:rPr lang="en-US" sz="1380" dirty="0">
+              <a:t>Describe the major steps in public health data pipelines,.</a:t>
+            </a:r>
+            <a:endParaRPr lang="en-US" sz="1220" dirty="0"/>
+          </a:p>
+          <a:p>
+            <a:pPr indent="0" marL="0">
+              <a:buNone/>
+            </a:pPr>
+            <a:r>
+              <a:rPr lang="en-US" sz="1220" dirty="0">
                 <a:solidFill>
                   <a:srgbClr val="17364A"/>
                 </a:solidFill>
@@ -14317,13 +14571,16 @@
                 <a:ea typeface="Aptos" pitchFamily="34" charset="-122"/>
                 <a:cs typeface="Aptos" pitchFamily="34" charset="-120"/>
               </a:rPr>
-              <a:t>Identify metadata, lineage, version control, and audit needs for AI-supported workflows.</a:t>
-            </a:r>
-            <a:endParaRPr lang="en-US" sz="1380" dirty="0"/>
-          </a:p>
-          <a:p>
-            <a:r>
-              <a:rPr lang="en-US" sz="1380" dirty="0">
+              <a:t>Identify metadata, lineage, version control, and audit needs for.</a:t>
+            </a:r>
+            <a:endParaRPr lang="en-US" sz="1220" dirty="0"/>
+          </a:p>
+          <a:p>
+            <a:pPr indent="0" marL="0">
+              <a:buNone/>
+            </a:pPr>
+            <a:r>
+              <a:rPr lang="en-US" sz="1220" dirty="0">
                 <a:solidFill>
                   <a:srgbClr val="17364A"/>
                 </a:solidFill>
@@ -14331,9 +14588,9 @@
                 <a:ea typeface="Aptos" pitchFamily="34" charset="-122"/>
                 <a:cs typeface="Aptos" pitchFamily="34" charset="-120"/>
               </a:rPr>
-              <a:t>Produce a data pipeline readiness checklist for a public health AI use case.</a:t>
-            </a:r>
-            <a:endParaRPr lang="en-US" sz="1380" dirty="0"/>
+              <a:t>Produce a data pipeline readiness checklist for a public health AI.</a:t>
+            </a:r>
+            <a:endParaRPr lang="en-US" sz="1220" dirty="0"/>
           </a:p>
         </p:txBody>
       </p:sp>
@@ -14411,17 +14668,17 @@
         </p:nvSpPr>
         <p:spPr>
           <a:xfrm>
-            <a:off x="7799832" y="5001768"/>
-            <a:ext cx="3145536" cy="502920"/>
-          </a:xfrm>
-          <a:prstGeom prst="rect">
-            <a:avLst/>
-          </a:prstGeom>
-          <a:noFill/>
-          <a:ln/>
-        </p:spPr>
-        <p:txBody>
-          <a:bodyPr wrap="square" lIns="0" tIns="0" rIns="0" bIns="0" rtlCol="0" anchor="t">
+            <a:off x="7799832" y="4974336"/>
+            <a:ext cx="3145536" cy="576072"/>
+          </a:xfrm>
+          <a:prstGeom prst="rect">
+            <a:avLst/>
+          </a:prstGeom>
+          <a:noFill/>
+          <a:ln/>
+        </p:spPr>
+        <p:txBody>
+          <a:bodyPr wrap="square" lIns="254" tIns="254" rIns="254" bIns="254" rtlCol="0" anchor="t">
             <a:normAutofit/>
           </a:bodyPr>
           <a:lstStyle/>
@@ -14430,7 +14687,7 @@
               <a:buNone/>
             </a:pPr>
             <a:r>
-              <a:rPr lang="en-US" sz="1550" dirty="0">
+              <a:rPr lang="en-US" sz="1320" dirty="0">
                 <a:solidFill>
                   <a:srgbClr val="17364A"/>
                 </a:solidFill>
@@ -14438,9 +14695,9 @@
                 <a:ea typeface="Aptos" pitchFamily="34" charset="-122"/>
                 <a:cs typeface="Aptos" pitchFamily="34" charset="-120"/>
               </a:rPr>
-              <a:t>Use the assignment to test whether you can explain the concept, apply it to a realistic public health situation, and identify what would need review before the work moves forward.</a:t>
-            </a:r>
-            <a:endParaRPr lang="en-US" sz="1550" dirty="0"/>
+              <a:t>Use the assignment to test whether you can explain the concept, apply it to a realistic public health situation, and.</a:t>
+            </a:r>
+            <a:endParaRPr lang="en-US" sz="1320" dirty="0"/>
           </a:p>
         </p:txBody>
       </p:sp>
@@ -14741,49 +14998,58 @@
           <a:ln/>
         </p:spPr>
         <p:txBody>
-          <a:bodyPr wrap="square" lIns="635" tIns="635" rIns="635" bIns="635" rtlCol="0" anchor="t">
+          <a:bodyPr wrap="square" lIns="1016" tIns="1016" rIns="1016" bIns="1016" rtlCol="0" anchor="t">
             <a:normAutofit/>
           </a:bodyPr>
           <a:lstStyle/>
           <a:p>
+            <a:pPr indent="0" marL="0">
+              <a:buNone/>
+            </a:pPr>
             <a:r>
               <a:rPr lang="en-US" sz="2100" dirty="0">
                 <a:solidFill>
-                  <a:srgbClr val="17364A"/>
-                </a:solidFill>
-                <a:latin typeface="Aptos" pitchFamily="34" charset="0"/>
-                <a:ea typeface="Aptos" pitchFamily="34" charset="-122"/>
-                <a:cs typeface="Aptos" pitchFamily="34" charset="-120"/>
-              </a:rPr>
-              <a:t>Data pipelines are the operational pathways that move public health data from source systems into.</a:t>
+                  <a:srgbClr val="003A63"/>
+                </a:solidFill>
+                <a:latin typeface="Aptos" pitchFamily="34" charset="0"/>
+                <a:ea typeface="Aptos" pitchFamily="34" charset="-122"/>
+                <a:cs typeface="Aptos" pitchFamily="34" charset="-120"/>
+              </a:rPr>
+              <a:t>• Data pipelines are the operational pathways that move public health data from source systems.</a:t>
             </a:r>
             <a:endParaRPr lang="en-US" sz="2100" dirty="0"/>
           </a:p>
           <a:p>
+            <a:pPr indent="0" marL="0">
+              <a:buNone/>
+            </a:pPr>
             <a:r>
               <a:rPr lang="en-US" sz="2100" dirty="0">
                 <a:solidFill>
-                  <a:srgbClr val="17364A"/>
-                </a:solidFill>
-                <a:latin typeface="Aptos" pitchFamily="34" charset="0"/>
-                <a:ea typeface="Aptos" pitchFamily="34" charset="-122"/>
-                <a:cs typeface="Aptos" pitchFamily="34" charset="-120"/>
-              </a:rPr>
-              <a:t>AI tools depend on these pathways even when users do not see them.</a:t>
+                  <a:srgbClr val="003A63"/>
+                </a:solidFill>
+                <a:latin typeface="Aptos" pitchFamily="34" charset="0"/>
+                <a:ea typeface="Aptos" pitchFamily="34" charset="-122"/>
+                <a:cs typeface="Aptos" pitchFamily="34" charset="-120"/>
+              </a:rPr>
+              <a:t>• AI tools depend on these pathways even when users do not see them.</a:t>
             </a:r>
             <a:endParaRPr lang="en-US" sz="2100" dirty="0"/>
           </a:p>
           <a:p>
+            <a:pPr indent="0" marL="0">
+              <a:buNone/>
+            </a:pPr>
             <a:r>
               <a:rPr lang="en-US" sz="2100" dirty="0">
                 <a:solidFill>
-                  <a:srgbClr val="17364A"/>
-                </a:solidFill>
-                <a:latin typeface="Aptos" pitchFamily="34" charset="0"/>
-                <a:ea typeface="Aptos" pitchFamily="34" charset="-122"/>
-                <a:cs typeface="Aptos" pitchFamily="34" charset="-120"/>
-              </a:rPr>
-              <a:t>A model that classifies cases, summarizes laboratory reports, or predicts service demand can only work.</a:t>
+                  <a:srgbClr val="003A63"/>
+                </a:solidFill>
+                <a:latin typeface="Aptos" pitchFamily="34" charset="0"/>
+                <a:ea typeface="Aptos" pitchFamily="34" charset="-122"/>
+                <a:cs typeface="Aptos" pitchFamily="34" charset="-120"/>
+              </a:rPr>
+              <a:t>• A model that classifies cases, summarizes laboratory reports, or predicts service demand can.</a:t>
             </a:r>
             <a:endParaRPr lang="en-US" sz="2100" dirty="0"/>
           </a:p>
@@ -14863,17 +15129,17 @@
         </p:nvSpPr>
         <p:spPr>
           <a:xfrm>
-            <a:off x="7799832" y="1828800"/>
-            <a:ext cx="3145536" cy="685800"/>
-          </a:xfrm>
-          <a:prstGeom prst="rect">
-            <a:avLst/>
-          </a:prstGeom>
-          <a:noFill/>
-          <a:ln/>
-        </p:spPr>
-        <p:txBody>
-          <a:bodyPr wrap="square" lIns="0" tIns="0" rIns="0" bIns="0" rtlCol="0" anchor="t">
+            <a:off x="7799832" y="1801368"/>
+            <a:ext cx="3145536" cy="758952"/>
+          </a:xfrm>
+          <a:prstGeom prst="rect">
+            <a:avLst/>
+          </a:prstGeom>
+          <a:noFill/>
+          <a:ln/>
+        </p:spPr>
+        <p:txBody>
+          <a:bodyPr wrap="square" lIns="254" tIns="254" rIns="254" bIns="254" rtlCol="0" anchor="t">
             <a:normAutofit/>
           </a:bodyPr>
           <a:lstStyle/>
@@ -14882,7 +15148,7 @@
               <a:buNone/>
             </a:pPr>
             <a:r>
-              <a:rPr lang="en-US" sz="1550" dirty="0">
+              <a:rPr lang="en-US" sz="1320" dirty="0">
                 <a:solidFill>
                   <a:srgbClr val="17364A"/>
                 </a:solidFill>
@@ -14892,7 +15158,7 @@
               </a:rPr>
               <a:t>Data pipelines are the operational pathways that move public health data from source systems into.</a:t>
             </a:r>
-            <a:endParaRPr lang="en-US" sz="1550" dirty="0"/>
+            <a:endParaRPr lang="en-US" sz="1320" dirty="0"/>
           </a:p>
         </p:txBody>
       </p:sp>
@@ -14980,13 +15246,16 @@
           <a:ln/>
         </p:spPr>
         <p:txBody>
-          <a:bodyPr wrap="square" lIns="254" tIns="254" rIns="254" bIns="254" rtlCol="0" anchor="t">
+          <a:bodyPr wrap="square" lIns="508" tIns="508" rIns="508" bIns="508" rtlCol="0" anchor="t">
             <a:normAutofit/>
           </a:bodyPr>
           <a:lstStyle/>
           <a:p>
-            <a:r>
-              <a:rPr lang="en-US" sz="1380" dirty="0">
+            <a:pPr indent="0" marL="0">
+              <a:buNone/>
+            </a:pPr>
+            <a:r>
+              <a:rPr lang="en-US" sz="1220" dirty="0">
                 <a:solidFill>
                   <a:srgbClr val="17364A"/>
                 </a:solidFill>
@@ -14994,13 +15263,16 @@
                 <a:ea typeface="Aptos" pitchFamily="34" charset="-122"/>
                 <a:cs typeface="Aptos" pitchFamily="34" charset="-120"/>
               </a:rPr>
-              <a:t>Data pipelines are the operational pathways that move public health data from source.</a:t>
-            </a:r>
-            <a:endParaRPr lang="en-US" sz="1380" dirty="0"/>
-          </a:p>
-          <a:p>
-            <a:r>
-              <a:rPr lang="en-US" sz="1380" dirty="0">
+              <a:t>Data pipelines are the operational pathways that move public.</a:t>
+            </a:r>
+            <a:endParaRPr lang="en-US" sz="1220" dirty="0"/>
+          </a:p>
+          <a:p>
+            <a:pPr indent="0" marL="0">
+              <a:buNone/>
+            </a:pPr>
+            <a:r>
+              <a:rPr lang="en-US" sz="1220" dirty="0">
                 <a:solidFill>
                   <a:srgbClr val="17364A"/>
                 </a:solidFill>
@@ -15008,13 +15280,16 @@
                 <a:ea typeface="Aptos" pitchFamily="34" charset="-122"/>
                 <a:cs typeface="Aptos" pitchFamily="34" charset="-120"/>
               </a:rPr>
-              <a:t>A model that classifies cases, summarizes laboratory reports, or predicts service demand.</a:t>
-            </a:r>
-            <a:endParaRPr lang="en-US" sz="1380" dirty="0"/>
-          </a:p>
-          <a:p>
-            <a:r>
-              <a:rPr lang="en-US" sz="1380" dirty="0">
+              <a:t>A model that classifies cases, summarizes laboratory reports, or.</a:t>
+            </a:r>
+            <a:endParaRPr lang="en-US" sz="1220" dirty="0"/>
+          </a:p>
+          <a:p>
+            <a:pPr indent="0" marL="0">
+              <a:buNone/>
+            </a:pPr>
+            <a:r>
+              <a:rPr lang="en-US" sz="1220" dirty="0">
                 <a:solidFill>
                   <a:srgbClr val="17364A"/>
                 </a:solidFill>
@@ -15022,9 +15297,9 @@
                 <a:ea typeface="Aptos" pitchFamily="34" charset="-122"/>
                 <a:cs typeface="Aptos" pitchFamily="34" charset="-120"/>
               </a:rPr>
-              <a:t>This module helps learners understand the pipeline steps that shape AI outputs and the.</a:t>
-            </a:r>
-            <a:endParaRPr lang="en-US" sz="1380" dirty="0"/>
+              <a:t>This module helps learners understand the pipeline steps that.</a:t>
+            </a:r>
+            <a:endParaRPr lang="en-US" sz="1220" dirty="0"/>
           </a:p>
         </p:txBody>
       </p:sp>
@@ -15102,17 +15377,17 @@
         </p:nvSpPr>
         <p:spPr>
           <a:xfrm>
-            <a:off x="7799832" y="5001768"/>
-            <a:ext cx="3145536" cy="502920"/>
-          </a:xfrm>
-          <a:prstGeom prst="rect">
-            <a:avLst/>
-          </a:prstGeom>
-          <a:noFill/>
-          <a:ln/>
-        </p:spPr>
-        <p:txBody>
-          <a:bodyPr wrap="square" lIns="0" tIns="0" rIns="0" bIns="0" rtlCol="0" anchor="t">
+            <a:off x="7799832" y="4974336"/>
+            <a:ext cx="3145536" cy="576072"/>
+          </a:xfrm>
+          <a:prstGeom prst="rect">
+            <a:avLst/>
+          </a:prstGeom>
+          <a:noFill/>
+          <a:ln/>
+        </p:spPr>
+        <p:txBody>
+          <a:bodyPr wrap="square" lIns="254" tIns="254" rIns="254" bIns="254" rtlCol="0" anchor="t">
             <a:normAutofit/>
           </a:bodyPr>
           <a:lstStyle/>
@@ -15121,7 +15396,7 @@
               <a:buNone/>
             </a:pPr>
             <a:r>
-              <a:rPr lang="en-US" sz="1550" dirty="0">
+              <a:rPr lang="en-US" sz="1320" dirty="0">
                 <a:solidFill>
                   <a:srgbClr val="17364A"/>
                 </a:solidFill>
@@ -15129,9 +15404,9 @@
                 <a:ea typeface="Aptos" pitchFamily="34" charset="-122"/>
                 <a:cs typeface="Aptos" pitchFamily="34" charset="-120"/>
               </a:rPr>
-              <a:t>Connect the concept to data quality, model performance, validation evidence, monitoring measures, and decisions that remain under human control.</a:t>
-            </a:r>
-            <a:endParaRPr lang="en-US" sz="1550" dirty="0"/>
+              <a:t>Connect the concept to data quality, model performance, validation evidence, monitoring measures, and decisions that.</a:t>
+            </a:r>
+            <a:endParaRPr lang="en-US" sz="1320" dirty="0"/>
           </a:p>
         </p:txBody>
       </p:sp>
@@ -15432,49 +15707,58 @@
           <a:ln/>
         </p:spPr>
         <p:txBody>
-          <a:bodyPr wrap="square" lIns="635" tIns="635" rIns="635" bIns="635" rtlCol="0" anchor="t">
+          <a:bodyPr wrap="square" lIns="1016" tIns="1016" rIns="1016" bIns="1016" rtlCol="0" anchor="t">
             <a:normAutofit/>
           </a:bodyPr>
           <a:lstStyle/>
           <a:p>
+            <a:pPr indent="0" marL="0">
+              <a:buNone/>
+            </a:pPr>
             <a:r>
               <a:rPr lang="en-US" sz="2100" dirty="0">
                 <a:solidFill>
-                  <a:srgbClr val="17364A"/>
-                </a:solidFill>
-                <a:latin typeface="Aptos" pitchFamily="34" charset="0"/>
-                <a:ea typeface="Aptos" pitchFamily="34" charset="-122"/>
-                <a:cs typeface="Aptos" pitchFamily="34" charset="-120"/>
-              </a:rPr>
-              <a:t>Data pipeline readiness matters because AI systems can amplify routine data management problems.</a:t>
+                  <a:srgbClr val="003A63"/>
+                </a:solidFill>
+                <a:latin typeface="Aptos" pitchFamily="34" charset="0"/>
+                <a:ea typeface="Aptos" pitchFamily="34" charset="-122"/>
+                <a:cs typeface="Aptos" pitchFamily="34" charset="-120"/>
+              </a:rPr>
+              <a:t>• Data pipeline readiness matters because AI systems can amplify routine data management problems.</a:t>
             </a:r>
             <a:endParaRPr lang="en-US" sz="2100" dirty="0"/>
           </a:p>
           <a:p>
+            <a:pPr indent="0" marL="0">
+              <a:buNone/>
+            </a:pPr>
             <a:r>
               <a:rPr lang="en-US" sz="2100" dirty="0">
                 <a:solidFill>
-                  <a:srgbClr val="17364A"/>
-                </a:solidFill>
-                <a:latin typeface="Aptos" pitchFamily="34" charset="0"/>
-                <a:ea typeface="Aptos" pitchFamily="34" charset="-122"/>
-                <a:cs typeface="Aptos" pitchFamily="34" charset="-120"/>
-              </a:rPr>
-              <a:t>A delayed file, changed field name, failed interface, missing date, duplicate record, or outdated.</a:t>
+                  <a:srgbClr val="003A63"/>
+                </a:solidFill>
+                <a:latin typeface="Aptos" pitchFamily="34" charset="0"/>
+                <a:ea typeface="Aptos" pitchFamily="34" charset="-122"/>
+                <a:cs typeface="Aptos" pitchFamily="34" charset="-120"/>
+              </a:rPr>
+              <a:t>• A delayed file, changed field name, failed interface, missing date, duplicate record, or.</a:t>
             </a:r>
             <a:endParaRPr lang="en-US" sz="2100" dirty="0"/>
           </a:p>
           <a:p>
+            <a:pPr indent="0" marL="0">
+              <a:buNone/>
+            </a:pPr>
             <a:r>
               <a:rPr lang="en-US" sz="2100" dirty="0">
                 <a:solidFill>
-                  <a:srgbClr val="17364A"/>
-                </a:solidFill>
-                <a:latin typeface="Aptos" pitchFamily="34" charset="0"/>
-                <a:ea typeface="Aptos" pitchFamily="34" charset="-122"/>
-                <a:cs typeface="Aptos" pitchFamily="34" charset="-120"/>
-              </a:rPr>
-              <a:t>The AI tool may continue generating fluent summaries or confident classifications even after the data.</a:t>
+                  <a:srgbClr val="003A63"/>
+                </a:solidFill>
+                <a:latin typeface="Aptos" pitchFamily="34" charset="0"/>
+                <a:ea typeface="Aptos" pitchFamily="34" charset="-122"/>
+                <a:cs typeface="Aptos" pitchFamily="34" charset="-120"/>
+              </a:rPr>
+              <a:t>• The AI tool may continue generating fluent summaries or confident classifications even after.</a:t>
             </a:r>
             <a:endParaRPr lang="en-US" sz="2100" dirty="0"/>
           </a:p>
@@ -15554,17 +15838,17 @@
         </p:nvSpPr>
         <p:spPr>
           <a:xfrm>
-            <a:off x="7799832" y="1828800"/>
-            <a:ext cx="3145536" cy="685800"/>
-          </a:xfrm>
-          <a:prstGeom prst="rect">
-            <a:avLst/>
-          </a:prstGeom>
-          <a:noFill/>
-          <a:ln/>
-        </p:spPr>
-        <p:txBody>
-          <a:bodyPr wrap="square" lIns="0" tIns="0" rIns="0" bIns="0" rtlCol="0" anchor="t">
+            <a:off x="7799832" y="1801368"/>
+            <a:ext cx="3145536" cy="758952"/>
+          </a:xfrm>
+          <a:prstGeom prst="rect">
+            <a:avLst/>
+          </a:prstGeom>
+          <a:noFill/>
+          <a:ln/>
+        </p:spPr>
+        <p:txBody>
+          <a:bodyPr wrap="square" lIns="254" tIns="254" rIns="254" bIns="254" rtlCol="0" anchor="t">
             <a:normAutofit/>
           </a:bodyPr>
           <a:lstStyle/>
@@ -15573,7 +15857,7 @@
               <a:buNone/>
             </a:pPr>
             <a:r>
-              <a:rPr lang="en-US" sz="1550" dirty="0">
+              <a:rPr lang="en-US" sz="1320" dirty="0">
                 <a:solidFill>
                   <a:srgbClr val="17364A"/>
                 </a:solidFill>
@@ -15583,7 +15867,7 @@
               </a:rPr>
               <a:t>Data pipeline readiness matters because AI systems can amplify routine data management problems.</a:t>
             </a:r>
-            <a:endParaRPr lang="en-US" sz="1550" dirty="0"/>
+            <a:endParaRPr lang="en-US" sz="1320" dirty="0"/>
           </a:p>
         </p:txBody>
       </p:sp>
@@ -15671,13 +15955,16 @@
           <a:ln/>
         </p:spPr>
         <p:txBody>
-          <a:bodyPr wrap="square" lIns="254" tIns="254" rIns="254" bIns="254" rtlCol="0" anchor="t">
+          <a:bodyPr wrap="square" lIns="508" tIns="508" rIns="508" bIns="508" rtlCol="0" anchor="t">
             <a:normAutofit/>
           </a:bodyPr>
           <a:lstStyle/>
           <a:p>
-            <a:r>
-              <a:rPr lang="en-US" sz="1380" dirty="0">
+            <a:pPr indent="0" marL="0">
+              <a:buNone/>
+            </a:pPr>
+            <a:r>
+              <a:rPr lang="en-US" sz="1220" dirty="0">
                 <a:solidFill>
                   <a:srgbClr val="17364A"/>
                 </a:solidFill>
@@ -15685,13 +15972,16 @@
                 <a:ea typeface="Aptos" pitchFamily="34" charset="-122"/>
                 <a:cs typeface="Aptos" pitchFamily="34" charset="-120"/>
               </a:rPr>
-              <a:t>A delayed file, changed field name, failed interface, missing date, duplicate record, or.</a:t>
-            </a:r>
-            <a:endParaRPr lang="en-US" sz="1380" dirty="0"/>
-          </a:p>
-          <a:p>
-            <a:r>
-              <a:rPr lang="en-US" sz="1380" dirty="0">
+              <a:t>A delayed file, changed field name, failed interface, missing.</a:t>
+            </a:r>
+            <a:endParaRPr lang="en-US" sz="1220" dirty="0"/>
+          </a:p>
+          <a:p>
+            <a:pPr indent="0" marL="0">
+              <a:buNone/>
+            </a:pPr>
+            <a:r>
+              <a:rPr lang="en-US" sz="1220" dirty="0">
                 <a:solidFill>
                   <a:srgbClr val="17364A"/>
                 </a:solidFill>
@@ -15699,13 +15989,16 @@
                 <a:ea typeface="Aptos" pitchFamily="34" charset="-122"/>
                 <a:cs typeface="Aptos" pitchFamily="34" charset="-120"/>
               </a:rPr>
-              <a:t>The AI tool may continue generating fluent summaries or confident classifications even.</a:t>
-            </a:r>
-            <a:endParaRPr lang="en-US" sz="1380" dirty="0"/>
-          </a:p>
-          <a:p>
-            <a:r>
-              <a:rPr lang="en-US" sz="1380" dirty="0">
+              <a:t>The AI tool may continue generating fluent summaries or confident.</a:t>
+            </a:r>
+            <a:endParaRPr lang="en-US" sz="1220" dirty="0"/>
+          </a:p>
+          <a:p>
+            <a:pPr indent="0" marL="0">
+              <a:buNone/>
+            </a:pPr>
+            <a:r>
+              <a:rPr lang="en-US" sz="1220" dirty="0">
                 <a:solidFill>
                   <a:srgbClr val="17364A"/>
                 </a:solidFill>
@@ -15713,9 +16006,9 @@
                 <a:ea typeface="Aptos" pitchFamily="34" charset="-122"/>
                 <a:cs typeface="Aptos" pitchFamily="34" charset="-120"/>
               </a:rPr>
-              <a:t>Public health agencies need pipeline visibility before they rely on AI for operational.</a:t>
-            </a:r>
-            <a:endParaRPr lang="en-US" sz="1380" dirty="0"/>
+              <a:t>Public health agencies need pipeline visibility before they rely.</a:t>
+            </a:r>
+            <a:endParaRPr lang="en-US" sz="1220" dirty="0"/>
           </a:p>
         </p:txBody>
       </p:sp>
@@ -15793,17 +16086,17 @@
         </p:nvSpPr>
         <p:spPr>
           <a:xfrm>
-            <a:off x="7799832" y="5001768"/>
-            <a:ext cx="3145536" cy="502920"/>
-          </a:xfrm>
-          <a:prstGeom prst="rect">
-            <a:avLst/>
-          </a:prstGeom>
-          <a:noFill/>
-          <a:ln/>
-        </p:spPr>
-        <p:txBody>
-          <a:bodyPr wrap="square" lIns="0" tIns="0" rIns="0" bIns="0" rtlCol="0" anchor="t">
+            <a:off x="7799832" y="4974336"/>
+            <a:ext cx="3145536" cy="576072"/>
+          </a:xfrm>
+          <a:prstGeom prst="rect">
+            <a:avLst/>
+          </a:prstGeom>
+          <a:noFill/>
+          <a:ln/>
+        </p:spPr>
+        <p:txBody>
+          <a:bodyPr wrap="square" lIns="254" tIns="254" rIns="254" bIns="254" rtlCol="0" anchor="t">
             <a:normAutofit/>
           </a:bodyPr>
           <a:lstStyle/>
@@ -15812,7 +16105,7 @@
               <a:buNone/>
             </a:pPr>
             <a:r>
-              <a:rPr lang="en-US" sz="1550" dirty="0">
+              <a:rPr lang="en-US" sz="1320" dirty="0">
                 <a:solidFill>
                   <a:srgbClr val="17364A"/>
                 </a:solidFill>
@@ -15820,9 +16113,9 @@
                 <a:ea typeface="Aptos" pitchFamily="34" charset="-122"/>
                 <a:cs typeface="Aptos" pitchFamily="34" charset="-120"/>
               </a:rPr>
-              <a:t>Connect the concept to data quality, model performance, validation evidence, monitoring measures, and decisions that remain under human control.</a:t>
-            </a:r>
-            <a:endParaRPr lang="en-US" sz="1550" dirty="0"/>
+              <a:t>Connect the concept to data quality, model performance, validation evidence, monitoring measures, and decisions that.</a:t>
+            </a:r>
+            <a:endParaRPr lang="en-US" sz="1320" dirty="0"/>
           </a:p>
         </p:txBody>
       </p:sp>
@@ -16123,49 +16416,58 @@
           <a:ln/>
         </p:spPr>
         <p:txBody>
-          <a:bodyPr wrap="square" lIns="635" tIns="635" rIns="635" bIns="635" rtlCol="0" anchor="t">
+          <a:bodyPr wrap="square" lIns="1016" tIns="1016" rIns="1016" bIns="1016" rtlCol="0" anchor="t">
             <a:normAutofit/>
           </a:bodyPr>
           <a:lstStyle/>
           <a:p>
+            <a:pPr indent="0" marL="0">
+              <a:buNone/>
+            </a:pPr>
             <a:r>
               <a:rPr lang="en-US" sz="2100" dirty="0">
                 <a:solidFill>
-                  <a:srgbClr val="17364A"/>
-                </a:solidFill>
-                <a:latin typeface="Aptos" pitchFamily="34" charset="0"/>
-                <a:ea typeface="Aptos" pitchFamily="34" charset="-122"/>
-                <a:cs typeface="Aptos" pitchFamily="34" charset="-120"/>
-              </a:rPr>
-              <a:t>Data pipeline.</a:t>
+                  <a:srgbClr val="003A63"/>
+                </a:solidFill>
+                <a:latin typeface="Aptos" pitchFamily="34" charset="0"/>
+                <a:ea typeface="Aptos" pitchFamily="34" charset="-122"/>
+                <a:cs typeface="Aptos" pitchFamily="34" charset="-120"/>
+              </a:rPr>
+              <a:t>• Data pipeline.</a:t>
             </a:r>
             <a:endParaRPr lang="en-US" sz="2100" dirty="0"/>
           </a:p>
           <a:p>
+            <a:pPr indent="0" marL="0">
+              <a:buNone/>
+            </a:pPr>
             <a:r>
               <a:rPr lang="en-US" sz="2100" dirty="0">
                 <a:solidFill>
-                  <a:srgbClr val="17364A"/>
-                </a:solidFill>
-                <a:latin typeface="Aptos" pitchFamily="34" charset="0"/>
-                <a:ea typeface="Aptos" pitchFamily="34" charset="-122"/>
-                <a:cs typeface="Aptos" pitchFamily="34" charset="-120"/>
-              </a:rPr>
-              <a:t>A data pipeline is a set of technical and operational steps that moves data from a source to a.</a:t>
+                  <a:srgbClr val="003A63"/>
+                </a:solidFill>
+                <a:latin typeface="Aptos" pitchFamily="34" charset="0"/>
+                <a:ea typeface="Aptos" pitchFamily="34" charset="-122"/>
+                <a:cs typeface="Aptos" pitchFamily="34" charset="-120"/>
+              </a:rPr>
+              <a:t>• A data pipeline is a set of technical and operational steps that moves data from a source to a.</a:t>
             </a:r>
             <a:endParaRPr lang="en-US" sz="2100" dirty="0"/>
           </a:p>
           <a:p>
+            <a:pPr indent="0" marL="0">
+              <a:buNone/>
+            </a:pPr>
             <a:r>
               <a:rPr lang="en-US" sz="2100" dirty="0">
                 <a:solidFill>
-                  <a:srgbClr val="17364A"/>
-                </a:solidFill>
-                <a:latin typeface="Aptos" pitchFamily="34" charset="0"/>
-                <a:ea typeface="Aptos" pitchFamily="34" charset="-122"/>
-                <a:cs typeface="Aptos" pitchFamily="34" charset="-120"/>
-              </a:rPr>
-              <a:t>In public health, pipelines may include laboratory interfaces, EHR feeds, IIS submissions, syndromic.</a:t>
+                  <a:srgbClr val="003A63"/>
+                </a:solidFill>
+                <a:latin typeface="Aptos" pitchFamily="34" charset="0"/>
+                <a:ea typeface="Aptos" pitchFamily="34" charset="-122"/>
+                <a:cs typeface="Aptos" pitchFamily="34" charset="-120"/>
+              </a:rPr>
+              <a:t>• In public health, pipelines may include laboratory interfaces, EHR feeds, IIS submissions,.</a:t>
             </a:r>
             <a:endParaRPr lang="en-US" sz="2100" dirty="0"/>
           </a:p>
@@ -16245,17 +16547,17 @@
         </p:nvSpPr>
         <p:spPr>
           <a:xfrm>
-            <a:off x="7799832" y="1828800"/>
-            <a:ext cx="3145536" cy="685800"/>
-          </a:xfrm>
-          <a:prstGeom prst="rect">
-            <a:avLst/>
-          </a:prstGeom>
-          <a:noFill/>
-          <a:ln/>
-        </p:spPr>
-        <p:txBody>
-          <a:bodyPr wrap="square" lIns="0" tIns="0" rIns="0" bIns="0" rtlCol="0" anchor="t">
+            <a:off x="7799832" y="1801368"/>
+            <a:ext cx="3145536" cy="758952"/>
+          </a:xfrm>
+          <a:prstGeom prst="rect">
+            <a:avLst/>
+          </a:prstGeom>
+          <a:noFill/>
+          <a:ln/>
+        </p:spPr>
+        <p:txBody>
+          <a:bodyPr wrap="square" lIns="254" tIns="254" rIns="254" bIns="254" rtlCol="0" anchor="t">
             <a:normAutofit/>
           </a:bodyPr>
           <a:lstStyle/>
@@ -16264,7 +16566,7 @@
               <a:buNone/>
             </a:pPr>
             <a:r>
-              <a:rPr lang="en-US" sz="1550" dirty="0">
+              <a:rPr lang="en-US" sz="1320" dirty="0">
                 <a:solidFill>
                   <a:srgbClr val="17364A"/>
                 </a:solidFill>
@@ -16274,7 +16576,7 @@
               </a:rPr>
               <a:t>Data pipeline.</a:t>
             </a:r>
-            <a:endParaRPr lang="en-US" sz="1550" dirty="0"/>
+            <a:endParaRPr lang="en-US" sz="1320" dirty="0"/>
           </a:p>
         </p:txBody>
       </p:sp>
@@ -16362,13 +16664,16 @@
           <a:ln/>
         </p:spPr>
         <p:txBody>
-          <a:bodyPr wrap="square" lIns="254" tIns="254" rIns="254" bIns="254" rtlCol="0" anchor="t">
+          <a:bodyPr wrap="square" lIns="508" tIns="508" rIns="508" bIns="508" rtlCol="0" anchor="t">
             <a:normAutofit/>
           </a:bodyPr>
           <a:lstStyle/>
           <a:p>
-            <a:r>
-              <a:rPr lang="en-US" sz="1380" dirty="0">
+            <a:pPr indent="0" marL="0">
+              <a:buNone/>
+            </a:pPr>
+            <a:r>
+              <a:rPr lang="en-US" sz="1220" dirty="0">
                 <a:solidFill>
                   <a:srgbClr val="17364A"/>
                 </a:solidFill>
@@ -16376,13 +16681,16 @@
                 <a:ea typeface="Aptos" pitchFamily="34" charset="-122"/>
                 <a:cs typeface="Aptos" pitchFamily="34" charset="-120"/>
               </a:rPr>
-              <a:t>A data pipeline is a set of technical and operational steps that moves data from a source.</a:t>
-            </a:r>
-            <a:endParaRPr lang="en-US" sz="1380" dirty="0"/>
-          </a:p>
-          <a:p>
-            <a:r>
-              <a:rPr lang="en-US" sz="1380" dirty="0">
+              <a:t>A data pipeline is a set of technical and operational steps that.</a:t>
+            </a:r>
+            <a:endParaRPr lang="en-US" sz="1220" dirty="0"/>
+          </a:p>
+          <a:p>
+            <a:pPr indent="0" marL="0">
+              <a:buNone/>
+            </a:pPr>
+            <a:r>
+              <a:rPr lang="en-US" sz="1220" dirty="0">
                 <a:solidFill>
                   <a:srgbClr val="17364A"/>
                 </a:solidFill>
@@ -16390,13 +16698,16 @@
                 <a:ea typeface="Aptos" pitchFamily="34" charset="-122"/>
                 <a:cs typeface="Aptos" pitchFamily="34" charset="-120"/>
               </a:rPr>
-              <a:t>In public health, pipelines may include laboratory interfaces, EHR feeds, IIS submissions,.</a:t>
-            </a:r>
-            <a:endParaRPr lang="en-US" sz="1380" dirty="0"/>
-          </a:p>
-          <a:p>
-            <a:r>
-              <a:rPr lang="en-US" sz="1380" dirty="0">
+              <a:t>In public health, pipelines may include laboratory interfaces, EHR.</a:t>
+            </a:r>
+            <a:endParaRPr lang="en-US" sz="1220" dirty="0"/>
+          </a:p>
+          <a:p>
+            <a:pPr indent="0" marL="0">
+              <a:buNone/>
+            </a:pPr>
+            <a:r>
+              <a:rPr lang="en-US" sz="1220" dirty="0">
                 <a:solidFill>
                   <a:srgbClr val="17364A"/>
                 </a:solidFill>
@@ -16406,7 +16717,7 @@
               </a:rPr>
               <a:t>Each step creates an opportunity to improve or degrade data quality.</a:t>
             </a:r>
-            <a:endParaRPr lang="en-US" sz="1380" dirty="0"/>
+            <a:endParaRPr lang="en-US" sz="1220" dirty="0"/>
           </a:p>
         </p:txBody>
       </p:sp>
@@ -16484,17 +16795,17 @@
         </p:nvSpPr>
         <p:spPr>
           <a:xfrm>
-            <a:off x="7799832" y="5001768"/>
-            <a:ext cx="3145536" cy="502920"/>
-          </a:xfrm>
-          <a:prstGeom prst="rect">
-            <a:avLst/>
-          </a:prstGeom>
-          <a:noFill/>
-          <a:ln/>
-        </p:spPr>
-        <p:txBody>
-          <a:bodyPr wrap="square" lIns="0" tIns="0" rIns="0" bIns="0" rtlCol="0" anchor="t">
+            <a:off x="7799832" y="4974336"/>
+            <a:ext cx="3145536" cy="576072"/>
+          </a:xfrm>
+          <a:prstGeom prst="rect">
+            <a:avLst/>
+          </a:prstGeom>
+          <a:noFill/>
+          <a:ln/>
+        </p:spPr>
+        <p:txBody>
+          <a:bodyPr wrap="square" lIns="254" tIns="254" rIns="254" bIns="254" rtlCol="0" anchor="t">
             <a:normAutofit/>
           </a:bodyPr>
           <a:lstStyle/>
@@ -16503,7 +16814,7 @@
               <a:buNone/>
             </a:pPr>
             <a:r>
-              <a:rPr lang="en-US" sz="1550" dirty="0">
+              <a:rPr lang="en-US" sz="1320" dirty="0">
                 <a:solidFill>
                   <a:srgbClr val="17364A"/>
                 </a:solidFill>
@@ -16511,9 +16822,9 @@
                 <a:ea typeface="Aptos" pitchFamily="34" charset="-122"/>
                 <a:cs typeface="Aptos" pitchFamily="34" charset="-120"/>
               </a:rPr>
-              <a:t>Connect the concept to data quality, model performance, validation evidence, monitoring measures, and decisions that remain under human control.</a:t>
-            </a:r>
-            <a:endParaRPr lang="en-US" sz="1550" dirty="0"/>
+              <a:t>Connect the concept to data quality, model performance, validation evidence, monitoring measures, and decisions that.</a:t>
+            </a:r>
+            <a:endParaRPr lang="en-US" sz="1320" dirty="0"/>
           </a:p>
         </p:txBody>
       </p:sp>
@@ -16814,49 +17125,58 @@
           <a:ln/>
         </p:spPr>
         <p:txBody>
-          <a:bodyPr wrap="square" lIns="635" tIns="635" rIns="635" bIns="635" rtlCol="0" anchor="t">
+          <a:bodyPr wrap="square" lIns="1016" tIns="1016" rIns="1016" bIns="1016" rtlCol="0" anchor="t">
             <a:normAutofit/>
           </a:bodyPr>
           <a:lstStyle/>
           <a:p>
+            <a:pPr indent="0" marL="0">
+              <a:buNone/>
+            </a:pPr>
             <a:r>
               <a:rPr lang="en-US" sz="2100" dirty="0">
                 <a:solidFill>
-                  <a:srgbClr val="17364A"/>
-                </a:solidFill>
-                <a:latin typeface="Aptos" pitchFamily="34" charset="0"/>
-                <a:ea typeface="Aptos" pitchFamily="34" charset="-122"/>
-                <a:cs typeface="Aptos" pitchFamily="34" charset="-120"/>
-              </a:rPr>
-              <a:t>Data lineage.</a:t>
+                  <a:srgbClr val="003A63"/>
+                </a:solidFill>
+                <a:latin typeface="Aptos" pitchFamily="34" charset="0"/>
+                <a:ea typeface="Aptos" pitchFamily="34" charset="-122"/>
+                <a:cs typeface="Aptos" pitchFamily="34" charset="-120"/>
+              </a:rPr>
+              <a:t>• Data lineage.</a:t>
             </a:r>
             <a:endParaRPr lang="en-US" sz="2100" dirty="0"/>
           </a:p>
           <a:p>
+            <a:pPr indent="0" marL="0">
+              <a:buNone/>
+            </a:pPr>
             <a:r>
               <a:rPr lang="en-US" sz="2100" dirty="0">
                 <a:solidFill>
-                  <a:srgbClr val="17364A"/>
-                </a:solidFill>
-                <a:latin typeface="Aptos" pitchFamily="34" charset="0"/>
-                <a:ea typeface="Aptos" pitchFamily="34" charset="-122"/>
-                <a:cs typeface="Aptos" pitchFamily="34" charset="-120"/>
-              </a:rPr>
-              <a:t>Data lineage shows where data came from, what happened to them, and where they were used.</a:t>
+                  <a:srgbClr val="003A63"/>
+                </a:solidFill>
+                <a:latin typeface="Aptos" pitchFamily="34" charset="0"/>
+                <a:ea typeface="Aptos" pitchFamily="34" charset="-122"/>
+                <a:cs typeface="Aptos" pitchFamily="34" charset="-120"/>
+              </a:rPr>
+              <a:t>• Data lineage shows where data came from, what happened to them, and where they were used.</a:t>
             </a:r>
             <a:endParaRPr lang="en-US" sz="2100" dirty="0"/>
           </a:p>
           <a:p>
+            <a:pPr indent="0" marL="0">
+              <a:buNone/>
+            </a:pPr>
             <a:r>
               <a:rPr lang="en-US" sz="2100" dirty="0">
                 <a:solidFill>
-                  <a:srgbClr val="17364A"/>
-                </a:solidFill>
-                <a:latin typeface="Aptos" pitchFamily="34" charset="0"/>
-                <a:ea typeface="Aptos" pitchFamily="34" charset="-122"/>
-                <a:cs typeface="Aptos" pitchFamily="34" charset="-120"/>
-              </a:rPr>
-              <a:t>Lineage supports validation, troubleshooting, incident response, and public records review.</a:t>
+                  <a:srgbClr val="003A63"/>
+                </a:solidFill>
+                <a:latin typeface="Aptos" pitchFamily="34" charset="0"/>
+                <a:ea typeface="Aptos" pitchFamily="34" charset="-122"/>
+                <a:cs typeface="Aptos" pitchFamily="34" charset="-120"/>
+              </a:rPr>
+              <a:t>• Lineage supports validation, troubleshooting, incident response, and public records review.</a:t>
             </a:r>
             <a:endParaRPr lang="en-US" sz="2100" dirty="0"/>
           </a:p>
@@ -16936,17 +17256,17 @@
         </p:nvSpPr>
         <p:spPr>
           <a:xfrm>
-            <a:off x="7799832" y="1828800"/>
-            <a:ext cx="3145536" cy="685800"/>
-          </a:xfrm>
-          <a:prstGeom prst="rect">
-            <a:avLst/>
-          </a:prstGeom>
-          <a:noFill/>
-          <a:ln/>
-        </p:spPr>
-        <p:txBody>
-          <a:bodyPr wrap="square" lIns="0" tIns="0" rIns="0" bIns="0" rtlCol="0" anchor="t">
+            <a:off x="7799832" y="1801368"/>
+            <a:ext cx="3145536" cy="758952"/>
+          </a:xfrm>
+          <a:prstGeom prst="rect">
+            <a:avLst/>
+          </a:prstGeom>
+          <a:noFill/>
+          <a:ln/>
+        </p:spPr>
+        <p:txBody>
+          <a:bodyPr wrap="square" lIns="254" tIns="254" rIns="254" bIns="254" rtlCol="0" anchor="t">
             <a:normAutofit/>
           </a:bodyPr>
           <a:lstStyle/>
@@ -16955,7 +17275,7 @@
               <a:buNone/>
             </a:pPr>
             <a:r>
-              <a:rPr lang="en-US" sz="1550" dirty="0">
+              <a:rPr lang="en-US" sz="1320" dirty="0">
                 <a:solidFill>
                   <a:srgbClr val="17364A"/>
                 </a:solidFill>
@@ -16965,7 +17285,7 @@
               </a:rPr>
               <a:t>Data lineage.</a:t>
             </a:r>
-            <a:endParaRPr lang="en-US" sz="1550" dirty="0"/>
+            <a:endParaRPr lang="en-US" sz="1320" dirty="0"/>
           </a:p>
         </p:txBody>
       </p:sp>
@@ -17053,13 +17373,16 @@
           <a:ln/>
         </p:spPr>
         <p:txBody>
-          <a:bodyPr wrap="square" lIns="254" tIns="254" rIns="254" bIns="254" rtlCol="0" anchor="t">
+          <a:bodyPr wrap="square" lIns="508" tIns="508" rIns="508" bIns="508" rtlCol="0" anchor="t">
             <a:normAutofit/>
           </a:bodyPr>
           <a:lstStyle/>
           <a:p>
-            <a:r>
-              <a:rPr lang="en-US" sz="1380" dirty="0">
+            <a:pPr indent="0" marL="0">
+              <a:buNone/>
+            </a:pPr>
+            <a:r>
+              <a:rPr lang="en-US" sz="1220" dirty="0">
                 <a:solidFill>
                   <a:srgbClr val="17364A"/>
                 </a:solidFill>
@@ -17069,11 +17392,14 @@
               </a:rPr>
               <a:t>Data lineage.</a:t>
             </a:r>
-            <a:endParaRPr lang="en-US" sz="1380" dirty="0"/>
-          </a:p>
-          <a:p>
-            <a:r>
-              <a:rPr lang="en-US" sz="1380" dirty="0">
+            <a:endParaRPr lang="en-US" sz="1220" dirty="0"/>
+          </a:p>
+          <a:p>
+            <a:pPr indent="0" marL="0">
+              <a:buNone/>
+            </a:pPr>
+            <a:r>
+              <a:rPr lang="en-US" sz="1220" dirty="0">
                 <a:solidFill>
                   <a:srgbClr val="17364A"/>
                 </a:solidFill>
@@ -17081,13 +17407,16 @@
                 <a:ea typeface="Aptos" pitchFamily="34" charset="-122"/>
                 <a:cs typeface="Aptos" pitchFamily="34" charset="-120"/>
               </a:rPr>
-              <a:t>Data lineage shows where data came from, what happened to them, and where they were used.</a:t>
-            </a:r>
-            <a:endParaRPr lang="en-US" sz="1380" dirty="0"/>
-          </a:p>
-          <a:p>
-            <a:r>
-              <a:rPr lang="en-US" sz="1380" dirty="0">
+              <a:t>Data lineage shows where data came from, what happened to them,.</a:t>
+            </a:r>
+            <a:endParaRPr lang="en-US" sz="1220" dirty="0"/>
+          </a:p>
+          <a:p>
+            <a:pPr indent="0" marL="0">
+              <a:buNone/>
+            </a:pPr>
+            <a:r>
+              <a:rPr lang="en-US" sz="1220" dirty="0">
                 <a:solidFill>
                   <a:srgbClr val="17364A"/>
                 </a:solidFill>
@@ -17095,9 +17424,9 @@
                 <a:ea typeface="Aptos" pitchFamily="34" charset="-122"/>
                 <a:cs typeface="Aptos" pitchFamily="34" charset="-120"/>
               </a:rPr>
-              <a:t>Lineage supports validation, troubleshooting, incident response, and public records review.</a:t>
-            </a:r>
-            <a:endParaRPr lang="en-US" sz="1380" dirty="0"/>
+              <a:t>Lineage supports validation, troubleshooting, incident response,.</a:t>
+            </a:r>
+            <a:endParaRPr lang="en-US" sz="1220" dirty="0"/>
           </a:p>
         </p:txBody>
       </p:sp>
@@ -17175,17 +17504,17 @@
         </p:nvSpPr>
         <p:spPr>
           <a:xfrm>
-            <a:off x="7799832" y="5001768"/>
-            <a:ext cx="3145536" cy="502920"/>
-          </a:xfrm>
-          <a:prstGeom prst="rect">
-            <a:avLst/>
-          </a:prstGeom>
-          <a:noFill/>
-          <a:ln/>
-        </p:spPr>
-        <p:txBody>
-          <a:bodyPr wrap="square" lIns="0" tIns="0" rIns="0" bIns="0" rtlCol="0" anchor="t">
+            <a:off x="7799832" y="4974336"/>
+            <a:ext cx="3145536" cy="576072"/>
+          </a:xfrm>
+          <a:prstGeom prst="rect">
+            <a:avLst/>
+          </a:prstGeom>
+          <a:noFill/>
+          <a:ln/>
+        </p:spPr>
+        <p:txBody>
+          <a:bodyPr wrap="square" lIns="254" tIns="254" rIns="254" bIns="254" rtlCol="0" anchor="t">
             <a:normAutofit/>
           </a:bodyPr>
           <a:lstStyle/>
@@ -17194,7 +17523,7 @@
               <a:buNone/>
             </a:pPr>
             <a:r>
-              <a:rPr lang="en-US" sz="1550" dirty="0">
+              <a:rPr lang="en-US" sz="1320" dirty="0">
                 <a:solidFill>
                   <a:srgbClr val="17364A"/>
                 </a:solidFill>
@@ -17202,9 +17531,9 @@
                 <a:ea typeface="Aptos" pitchFamily="34" charset="-122"/>
                 <a:cs typeface="Aptos" pitchFamily="34" charset="-120"/>
               </a:rPr>
-              <a:t>Connect the concept to data quality, model performance, validation evidence, monitoring measures, and decisions that remain under human control.</a:t>
-            </a:r>
-            <a:endParaRPr lang="en-US" sz="1550" dirty="0"/>
+              <a:t>Connect the concept to data quality, model performance, validation evidence, monitoring measures, and decisions that.</a:t>
+            </a:r>
+            <a:endParaRPr lang="en-US" sz="1320" dirty="0"/>
           </a:p>
         </p:txBody>
       </p:sp>

--- a/downloads/presentations/modules/arc-210.pptx
+++ b/downloads/presentations/modules/arc-210.pptx
@@ -3417,11 +3417,11 @@
         <p:spPr>
           <a:xfrm>
             <a:off x="7635240" y="1325880"/>
-            <a:ext cx="3474720" cy="1325880"/>
+            <a:ext cx="3474720" cy="1255471"/>
           </a:xfrm>
           <a:prstGeom prst="roundRect">
             <a:avLst>
-              <a:gd name="adj" fmla="val 8276"/>
+              <a:gd name="adj" fmla="val 8740"/>
             </a:avLst>
           </a:prstGeom>
           <a:solidFill>
@@ -3483,7 +3483,7 @@
         <p:spPr>
           <a:xfrm>
             <a:off x="7799832" y="1801368"/>
-            <a:ext cx="3145536" cy="758952"/>
+            <a:ext cx="3145536" cy="688543"/>
           </a:xfrm>
           <a:prstGeom prst="rect">
             <a:avLst/>
@@ -3523,12 +3523,12 @@
         </p:nvSpPr>
         <p:spPr>
           <a:xfrm>
-            <a:off x="7635240" y="2788920"/>
-            <a:ext cx="3474720" cy="1536192"/>
+            <a:off x="7635240" y="2718511"/>
+            <a:ext cx="3474720" cy="1328623"/>
           </a:xfrm>
           <a:prstGeom prst="roundRect">
             <a:avLst>
-              <a:gd name="adj" fmla="val 7143"/>
+              <a:gd name="adj" fmla="val 8259"/>
             </a:avLst>
           </a:prstGeom>
           <a:solidFill>
@@ -3550,7 +3550,7 @@
         </p:nvSpPr>
         <p:spPr>
           <a:xfrm>
-            <a:off x="7799832" y="2935224"/>
+            <a:off x="7799832" y="2864815"/>
             <a:ext cx="3145536" cy="256032"/>
           </a:xfrm>
           <a:prstGeom prst="rect">
@@ -3589,8 +3589,8 @@
         </p:nvSpPr>
         <p:spPr>
           <a:xfrm>
-            <a:off x="7818120" y="3300984"/>
-            <a:ext cx="3090672" cy="877824"/>
+            <a:off x="7818120" y="3230575"/>
+            <a:ext cx="3090672" cy="670255"/>
           </a:xfrm>
           <a:prstGeom prst="rect">
             <a:avLst/>
@@ -3664,12 +3664,12 @@
         </p:nvSpPr>
         <p:spPr>
           <a:xfrm>
-            <a:off x="7635240" y="4498848"/>
-            <a:ext cx="3474720" cy="1143000"/>
+            <a:off x="7635240" y="4184294"/>
+            <a:ext cx="3474720" cy="1466698"/>
           </a:xfrm>
           <a:prstGeom prst="roundRect">
             <a:avLst>
-              <a:gd name="adj" fmla="val 9600"/>
+              <a:gd name="adj" fmla="val 7481"/>
             </a:avLst>
           </a:prstGeom>
           <a:solidFill>
@@ -3691,7 +3691,7 @@
         </p:nvSpPr>
         <p:spPr>
           <a:xfrm>
-            <a:off x="7799832" y="4645152"/>
+            <a:off x="7799832" y="4330598"/>
             <a:ext cx="3145536" cy="256032"/>
           </a:xfrm>
           <a:prstGeom prst="rect">
@@ -3730,8 +3730,8 @@
         </p:nvSpPr>
         <p:spPr>
           <a:xfrm>
-            <a:off x="7799832" y="4974336"/>
-            <a:ext cx="3145536" cy="576072"/>
+            <a:off x="7799832" y="4659782"/>
+            <a:ext cx="3145536" cy="899770"/>
           </a:xfrm>
           <a:prstGeom prst="rect">
             <a:avLst/>
@@ -3757,7 +3757,7 @@
                 <a:ea typeface="Aptos" pitchFamily="34" charset="-122"/>
                 <a:cs typeface="Aptos" pitchFamily="34" charset="-120"/>
               </a:rPr>
-              <a:t>Connect the concept to data quality, model performance, validation evidence, monitoring measures, and decisions that.</a:t>
+              <a:t>Connect the concept to data quality, model performance, validation evidence, monitoring measures, and decisions that remain under human control.</a:t>
             </a:r>
             <a:endParaRPr lang="en-US" sz="1320" dirty="0"/>
           </a:p>
@@ -4126,11 +4126,11 @@
         <p:spPr>
           <a:xfrm>
             <a:off x="7635240" y="1325880"/>
-            <a:ext cx="3474720" cy="1325880"/>
+            <a:ext cx="3474720" cy="1207008"/>
           </a:xfrm>
           <a:prstGeom prst="roundRect">
             <a:avLst>
-              <a:gd name="adj" fmla="val 8276"/>
+              <a:gd name="adj" fmla="val 9091"/>
             </a:avLst>
           </a:prstGeom>
           <a:solidFill>
@@ -4192,7 +4192,7 @@
         <p:spPr>
           <a:xfrm>
             <a:off x="7799832" y="1801368"/>
-            <a:ext cx="3145536" cy="758952"/>
+            <a:ext cx="3145536" cy="640080"/>
           </a:xfrm>
           <a:prstGeom prst="rect">
             <a:avLst/>
@@ -4232,12 +4232,12 @@
         </p:nvSpPr>
         <p:spPr>
           <a:xfrm>
-            <a:off x="7635240" y="2788920"/>
-            <a:ext cx="3474720" cy="1536192"/>
+            <a:off x="7635240" y="2670048"/>
+            <a:ext cx="3474720" cy="1377086"/>
           </a:xfrm>
           <a:prstGeom prst="roundRect">
             <a:avLst>
-              <a:gd name="adj" fmla="val 7143"/>
+              <a:gd name="adj" fmla="val 7968"/>
             </a:avLst>
           </a:prstGeom>
           <a:solidFill>
@@ -4259,8 +4259,8 @@
         </p:nvSpPr>
         <p:spPr>
           <a:xfrm>
-            <a:off x="7799832" y="2935224"/>
-            <a:ext cx="3145536" cy="256032"/>
+            <a:off x="7799832" y="2798064"/>
+            <a:ext cx="3145536" cy="237744"/>
           </a:xfrm>
           <a:prstGeom prst="rect">
             <a:avLst/>
@@ -4276,7 +4276,7 @@
               <a:buNone/>
             </a:pPr>
             <a:r>
-              <a:rPr lang="en-US" sz="1300" b="1" dirty="0">
+              <a:rPr lang="en-US" sz="1250" b="1" dirty="0">
                 <a:solidFill>
                   <a:srgbClr val="0068B7"/>
                 </a:solidFill>
@@ -4284,101 +4284,317 @@
                 <a:ea typeface="Aptos" pitchFamily="34" charset="-122"/>
                 <a:cs typeface="Aptos" pitchFamily="34" charset="-120"/>
               </a:rPr>
-              <a:t>Concept checkpoints</a:t>
-            </a:r>
-            <a:endParaRPr lang="en-US" sz="1300" dirty="0"/>
-          </a:p>
-        </p:txBody>
-      </p:sp>
-      <p:sp>
-        <p:nvSpPr>
-          <p:cNvPr id="15" name="Text 13"/>
-          <p:cNvSpPr/>
-          <p:nvPr/>
-        </p:nvSpPr>
-        <p:spPr>
-          <a:xfrm>
-            <a:off x="7818120" y="3300984"/>
-            <a:ext cx="3090672" cy="877824"/>
-          </a:xfrm>
-          <a:prstGeom prst="rect">
-            <a:avLst/>
-          </a:prstGeom>
-          <a:noFill/>
-          <a:ln/>
-        </p:spPr>
-        <p:txBody>
-          <a:bodyPr wrap="square" lIns="508" tIns="508" rIns="508" bIns="508" rtlCol="0" anchor="t">
+              <a:t>Data-to-decision flow</a:t>
+            </a:r>
+            <a:endParaRPr lang="en-US" sz="1250" dirty="0"/>
+          </a:p>
+        </p:txBody>
+      </p:sp>
+      <p:sp>
+        <p:nvSpPr>
+          <p:cNvPr id="15" name="Shape 13"/>
+          <p:cNvSpPr/>
+          <p:nvPr/>
+        </p:nvSpPr>
+        <p:spPr>
+          <a:xfrm>
+            <a:off x="8763000" y="3351276"/>
+            <a:ext cx="164592" cy="0"/>
+          </a:xfrm>
+          <a:prstGeom prst="line">
+            <a:avLst/>
+          </a:prstGeom>
+          <a:noFill/>
+          <a:ln w="15240">
+            <a:solidFill>
+              <a:srgbClr val="8ABBD8"/>
+            </a:solidFill>
+            <a:prstDash val="solid"/>
+          </a:ln>
+        </p:spPr>
+      </p:sp>
+      <p:sp>
+        <p:nvSpPr>
+          <p:cNvPr id="16" name="Shape 14"/>
+          <p:cNvSpPr/>
+          <p:nvPr/>
+        </p:nvSpPr>
+        <p:spPr>
+          <a:xfrm>
+            <a:off x="7872984" y="3200400"/>
+            <a:ext cx="890016" cy="301752"/>
+          </a:xfrm>
+          <a:prstGeom prst="roundRect">
+            <a:avLst>
+              <a:gd name="adj" fmla="val 24242"/>
+            </a:avLst>
+          </a:prstGeom>
+          <a:solidFill>
+            <a:srgbClr val="0068B7"/>
+          </a:solidFill>
+          <a:ln w="12700">
+            <a:solidFill>
+              <a:srgbClr val="0068B7"/>
+            </a:solidFill>
+            <a:prstDash val="solid"/>
+          </a:ln>
+        </p:spPr>
+      </p:sp>
+      <p:sp>
+        <p:nvSpPr>
+          <p:cNvPr id="17" name="Text 15"/>
+          <p:cNvSpPr/>
+          <p:nvPr/>
+        </p:nvSpPr>
+        <p:spPr>
+          <a:xfrm>
+            <a:off x="7909560" y="3273552"/>
+            <a:ext cx="816864" cy="146304"/>
+          </a:xfrm>
+          <a:prstGeom prst="rect">
+            <a:avLst/>
+          </a:prstGeom>
+          <a:noFill/>
+          <a:ln/>
+        </p:spPr>
+        <p:txBody>
+          <a:bodyPr wrap="square" lIns="0" tIns="0" rIns="0" bIns="0" rtlCol="0" anchor="ctr">
             <a:normAutofit/>
           </a:bodyPr>
           <a:lstStyle/>
           <a:p>
-            <a:pPr indent="0" marL="0">
-              <a:buNone/>
-            </a:pPr>
-            <a:r>
-              <a:rPr lang="en-US" sz="1220" dirty="0">
-                <a:solidFill>
-                  <a:srgbClr val="17364A"/>
-                </a:solidFill>
-                <a:latin typeface="Aptos" pitchFamily="34" charset="0"/>
-                <a:ea typeface="Aptos" pitchFamily="34" charset="-122"/>
-                <a:cs typeface="Aptos" pitchFamily="34" charset="-120"/>
-              </a:rPr>
-              <a:t>In between, data may be received, staged, validated, transformed,.</a:t>
-            </a:r>
-            <a:endParaRPr lang="en-US" sz="1220" dirty="0"/>
-          </a:p>
-          <a:p>
-            <a:pPr indent="0" marL="0">
-              <a:buNone/>
-            </a:pPr>
-            <a:r>
-              <a:rPr lang="en-US" sz="1220" dirty="0">
-                <a:solidFill>
-                  <a:srgbClr val="17364A"/>
-                </a:solidFill>
-                <a:latin typeface="Aptos" pitchFamily="34" charset="0"/>
-                <a:ea typeface="Aptos" pitchFamily="34" charset="-122"/>
-                <a:cs typeface="Aptos" pitchFamily="34" charset="-120"/>
-              </a:rPr>
-              <a:t>Batch pipelines move data on a schedule, such as nightly files or.</a:t>
-            </a:r>
-            <a:endParaRPr lang="en-US" sz="1220" dirty="0"/>
-          </a:p>
-          <a:p>
-            <a:pPr indent="0" marL="0">
-              <a:buNone/>
-            </a:pPr>
-            <a:r>
-              <a:rPr lang="en-US" sz="1220" dirty="0">
-                <a:solidFill>
-                  <a:srgbClr val="17364A"/>
-                </a:solidFill>
-                <a:latin typeface="Aptos" pitchFamily="34" charset="0"/>
-                <a:ea typeface="Aptos" pitchFamily="34" charset="-122"/>
-                <a:cs typeface="Aptos" pitchFamily="34" charset="-120"/>
-              </a:rPr>
-              <a:t>Real-time pipelines move data as events occur, such as laboratory.</a:t>
-            </a:r>
-            <a:endParaRPr lang="en-US" sz="1220" dirty="0"/>
-          </a:p>
-        </p:txBody>
-      </p:sp>
-      <p:sp>
-        <p:nvSpPr>
-          <p:cNvPr id="16" name="Shape 14"/>
-          <p:cNvSpPr/>
-          <p:nvPr/>
-        </p:nvSpPr>
-        <p:spPr>
-          <a:xfrm>
-            <a:off x="7635240" y="4498848"/>
-            <a:ext cx="3474720" cy="1143000"/>
+            <a:pPr algn="ctr" indent="0" marL="0">
+              <a:buNone/>
+            </a:pPr>
+            <a:r>
+              <a:rPr lang="en-US" sz="880" b="1" dirty="0">
+                <a:solidFill>
+                  <a:srgbClr val="FFFFFF"/>
+                </a:solidFill>
+                <a:latin typeface="Aptos" pitchFamily="34" charset="0"/>
+                <a:ea typeface="Aptos" pitchFamily="34" charset="-122"/>
+                <a:cs typeface="Aptos" pitchFamily="34" charset="-120"/>
+              </a:rPr>
+              <a:t>Data</a:t>
+            </a:r>
+            <a:endParaRPr lang="en-US" sz="880" dirty="0"/>
+          </a:p>
+        </p:txBody>
+      </p:sp>
+      <p:sp>
+        <p:nvSpPr>
+          <p:cNvPr id="18" name="Shape 16"/>
+          <p:cNvSpPr/>
+          <p:nvPr/>
+        </p:nvSpPr>
+        <p:spPr>
+          <a:xfrm>
+            <a:off x="9817608" y="3351276"/>
+            <a:ext cx="164592" cy="0"/>
+          </a:xfrm>
+          <a:prstGeom prst="line">
+            <a:avLst/>
+          </a:prstGeom>
+          <a:noFill/>
+          <a:ln w="15240">
+            <a:solidFill>
+              <a:srgbClr val="8ABBD8"/>
+            </a:solidFill>
+            <a:prstDash val="solid"/>
+          </a:ln>
+        </p:spPr>
+      </p:sp>
+      <p:sp>
+        <p:nvSpPr>
+          <p:cNvPr id="19" name="Shape 17"/>
+          <p:cNvSpPr/>
+          <p:nvPr/>
+        </p:nvSpPr>
+        <p:spPr>
+          <a:xfrm>
+            <a:off x="8927592" y="3200400"/>
+            <a:ext cx="890016" cy="301752"/>
           </a:xfrm>
           <a:prstGeom prst="roundRect">
             <a:avLst>
-              <a:gd name="adj" fmla="val 9600"/>
+              <a:gd name="adj" fmla="val 24242"/>
+            </a:avLst>
+          </a:prstGeom>
+          <a:solidFill>
+            <a:srgbClr val="2F8A28"/>
+          </a:solidFill>
+          <a:ln w="12700">
+            <a:solidFill>
+              <a:srgbClr val="2F8A28"/>
+            </a:solidFill>
+            <a:prstDash val="solid"/>
+          </a:ln>
+        </p:spPr>
+      </p:sp>
+      <p:sp>
+        <p:nvSpPr>
+          <p:cNvPr id="20" name="Text 18"/>
+          <p:cNvSpPr/>
+          <p:nvPr/>
+        </p:nvSpPr>
+        <p:spPr>
+          <a:xfrm>
+            <a:off x="8964168" y="3273552"/>
+            <a:ext cx="816864" cy="146304"/>
+          </a:xfrm>
+          <a:prstGeom prst="rect">
+            <a:avLst/>
+          </a:prstGeom>
+          <a:noFill/>
+          <a:ln/>
+        </p:spPr>
+        <p:txBody>
+          <a:bodyPr wrap="square" lIns="0" tIns="0" rIns="0" bIns="0" rtlCol="0" anchor="ctr">
+            <a:normAutofit/>
+          </a:bodyPr>
+          <a:lstStyle/>
+          <a:p>
+            <a:pPr algn="ctr" indent="0" marL="0">
+              <a:buNone/>
+            </a:pPr>
+            <a:r>
+              <a:rPr lang="en-US" sz="880" b="1" dirty="0">
+                <a:solidFill>
+                  <a:srgbClr val="FFFFFF"/>
+                </a:solidFill>
+                <a:latin typeface="Aptos" pitchFamily="34" charset="0"/>
+                <a:ea typeface="Aptos" pitchFamily="34" charset="-122"/>
+                <a:cs typeface="Aptos" pitchFamily="34" charset="-120"/>
+              </a:rPr>
+              <a:t>Analysis</a:t>
+            </a:r>
+            <a:endParaRPr lang="en-US" sz="880" dirty="0"/>
+          </a:p>
+        </p:txBody>
+      </p:sp>
+      <p:sp>
+        <p:nvSpPr>
+          <p:cNvPr id="21" name="Shape 19"/>
+          <p:cNvSpPr/>
+          <p:nvPr/>
+        </p:nvSpPr>
+        <p:spPr>
+          <a:xfrm>
+            <a:off x="9982200" y="3200400"/>
+            <a:ext cx="890016" cy="301752"/>
+          </a:xfrm>
+          <a:prstGeom prst="roundRect">
+            <a:avLst>
+              <a:gd name="adj" fmla="val 24242"/>
+            </a:avLst>
+          </a:prstGeom>
+          <a:solidFill>
+            <a:srgbClr val="6A4CA3"/>
+          </a:solidFill>
+          <a:ln w="12700">
+            <a:solidFill>
+              <a:srgbClr val="6A4CA3"/>
+            </a:solidFill>
+            <a:prstDash val="solid"/>
+          </a:ln>
+        </p:spPr>
+      </p:sp>
+      <p:sp>
+        <p:nvSpPr>
+          <p:cNvPr id="22" name="Text 20"/>
+          <p:cNvSpPr/>
+          <p:nvPr/>
+        </p:nvSpPr>
+        <p:spPr>
+          <a:xfrm>
+            <a:off x="10018776" y="3273552"/>
+            <a:ext cx="816864" cy="146304"/>
+          </a:xfrm>
+          <a:prstGeom prst="rect">
+            <a:avLst/>
+          </a:prstGeom>
+          <a:noFill/>
+          <a:ln/>
+        </p:spPr>
+        <p:txBody>
+          <a:bodyPr wrap="square" lIns="0" tIns="0" rIns="0" bIns="0" rtlCol="0" anchor="ctr">
+            <a:normAutofit/>
+          </a:bodyPr>
+          <a:lstStyle/>
+          <a:p>
+            <a:pPr algn="ctr" indent="0" marL="0">
+              <a:buNone/>
+            </a:pPr>
+            <a:r>
+              <a:rPr lang="en-US" sz="880" b="1" dirty="0">
+                <a:solidFill>
+                  <a:srgbClr val="FFFFFF"/>
+                </a:solidFill>
+                <a:latin typeface="Aptos" pitchFamily="34" charset="0"/>
+                <a:ea typeface="Aptos" pitchFamily="34" charset="-122"/>
+                <a:cs typeface="Aptos" pitchFamily="34" charset="-120"/>
+              </a:rPr>
+              <a:t>Review</a:t>
+            </a:r>
+            <a:endParaRPr lang="en-US" sz="880" dirty="0"/>
+          </a:p>
+        </p:txBody>
+      </p:sp>
+      <p:sp>
+        <p:nvSpPr>
+          <p:cNvPr id="23" name="Text 21"/>
+          <p:cNvSpPr/>
+          <p:nvPr/>
+        </p:nvSpPr>
+        <p:spPr>
+          <a:xfrm>
+            <a:off x="7854696" y="3694176"/>
+            <a:ext cx="3035808" cy="206654"/>
+          </a:xfrm>
+          <a:prstGeom prst="rect">
+            <a:avLst/>
+          </a:prstGeom>
+          <a:noFill/>
+          <a:ln/>
+        </p:spPr>
+        <p:txBody>
+          <a:bodyPr wrap="square" lIns="254" tIns="254" rIns="254" bIns="254" rtlCol="0" anchor="t">
+            <a:normAutofit/>
+          </a:bodyPr>
+          <a:lstStyle/>
+          <a:p>
+            <a:pPr indent="0" marL="0">
+              <a:buNone/>
+            </a:pPr>
+            <a:r>
+              <a:rPr lang="en-US" sz="1120" dirty="0">
+                <a:solidFill>
+                  <a:srgbClr val="17364A"/>
+                </a:solidFill>
+                <a:latin typeface="Aptos" pitchFamily="34" charset="0"/>
+                <a:ea typeface="Aptos" pitchFamily="34" charset="-122"/>
+                <a:cs typeface="Aptos" pitchFamily="34" charset="-120"/>
+              </a:rPr>
+              <a:t>The important handoff is not from data to AI; it is from analysis to accountable human review.</a:t>
+            </a:r>
+            <a:endParaRPr lang="en-US" sz="1120" dirty="0"/>
+          </a:p>
+        </p:txBody>
+      </p:sp>
+      <p:sp>
+        <p:nvSpPr>
+          <p:cNvPr id="24" name="Shape 22"/>
+          <p:cNvSpPr/>
+          <p:nvPr/>
+        </p:nvSpPr>
+        <p:spPr>
+          <a:xfrm>
+            <a:off x="7635240" y="4184294"/>
+            <a:ext cx="3474720" cy="1466698"/>
+          </a:xfrm>
+          <a:prstGeom prst="roundRect">
+            <a:avLst>
+              <a:gd name="adj" fmla="val 7481"/>
             </a:avLst>
           </a:prstGeom>
           <a:solidFill>
@@ -4394,13 +4610,13 @@
       </p:sp>
       <p:sp>
         <p:nvSpPr>
-          <p:cNvPr id="17" name="Text 15"/>
-          <p:cNvSpPr/>
-          <p:nvPr/>
-        </p:nvSpPr>
-        <p:spPr>
-          <a:xfrm>
-            <a:off x="7799832" y="4645152"/>
+          <p:cNvPr id="25" name="Text 23"/>
+          <p:cNvSpPr/>
+          <p:nvPr/>
+        </p:nvSpPr>
+        <p:spPr>
+          <a:xfrm>
+            <a:off x="7799832" y="4330598"/>
             <a:ext cx="3145536" cy="256032"/>
           </a:xfrm>
           <a:prstGeom prst="rect">
@@ -4433,14 +4649,14 @@
       </p:sp>
       <p:sp>
         <p:nvSpPr>
-          <p:cNvPr id="18" name="Text 16"/>
-          <p:cNvSpPr/>
-          <p:nvPr/>
-        </p:nvSpPr>
-        <p:spPr>
-          <a:xfrm>
-            <a:off x="7799832" y="4974336"/>
-            <a:ext cx="3145536" cy="576072"/>
+          <p:cNvPr id="26" name="Text 24"/>
+          <p:cNvSpPr/>
+          <p:nvPr/>
+        </p:nvSpPr>
+        <p:spPr>
+          <a:xfrm>
+            <a:off x="7799832" y="4659782"/>
+            <a:ext cx="3145536" cy="899770"/>
           </a:xfrm>
           <a:prstGeom prst="rect">
             <a:avLst/>
@@ -4466,7 +4682,7 @@
                 <a:ea typeface="Aptos" pitchFamily="34" charset="-122"/>
                 <a:cs typeface="Aptos" pitchFamily="34" charset="-120"/>
               </a:rPr>
-              <a:t>Connect the concept to data quality, model performance, validation evidence, monitoring measures, and decisions that.</a:t>
+              <a:t>Connect the concept to data quality, model performance, validation evidence, monitoring measures, and decisions that remain under human control.</a:t>
             </a:r>
             <a:endParaRPr lang="en-US" sz="1320" dirty="0"/>
           </a:p>
@@ -4835,11 +5051,11 @@
         <p:spPr>
           <a:xfrm>
             <a:off x="7635240" y="1325880"/>
-            <a:ext cx="3474720" cy="1325880"/>
+            <a:ext cx="3474720" cy="1207008"/>
           </a:xfrm>
           <a:prstGeom prst="roundRect">
             <a:avLst>
-              <a:gd name="adj" fmla="val 8276"/>
+              <a:gd name="adj" fmla="val 9091"/>
             </a:avLst>
           </a:prstGeom>
           <a:solidFill>
@@ -4901,7 +5117,7 @@
         <p:spPr>
           <a:xfrm>
             <a:off x="7799832" y="1801368"/>
-            <a:ext cx="3145536" cy="758952"/>
+            <a:ext cx="3145536" cy="640080"/>
           </a:xfrm>
           <a:prstGeom prst="rect">
             <a:avLst/>
@@ -4941,7 +5157,7 @@
         </p:nvSpPr>
         <p:spPr>
           <a:xfrm>
-            <a:off x="7635240" y="2788920"/>
+            <a:off x="7635240" y="2670048"/>
             <a:ext cx="3474720" cy="1536192"/>
           </a:xfrm>
           <a:prstGeom prst="roundRect">
@@ -4968,7 +5184,7 @@
         </p:nvSpPr>
         <p:spPr>
           <a:xfrm>
-            <a:off x="7799832" y="2935224"/>
+            <a:off x="7799832" y="2816352"/>
             <a:ext cx="3145536" cy="256032"/>
           </a:xfrm>
           <a:prstGeom prst="rect">
@@ -5007,7 +5223,7 @@
         </p:nvSpPr>
         <p:spPr>
           <a:xfrm>
-            <a:off x="7818120" y="3300984"/>
+            <a:off x="7818120" y="3182112"/>
             <a:ext cx="3090672" cy="877824"/>
           </a:xfrm>
           <a:prstGeom prst="rect">
@@ -5082,12 +5298,12 @@
         </p:nvSpPr>
         <p:spPr>
           <a:xfrm>
-            <a:off x="7635240" y="4498848"/>
-            <a:ext cx="3474720" cy="1143000"/>
+            <a:off x="7635240" y="4343400"/>
+            <a:ext cx="3474720" cy="1255471"/>
           </a:xfrm>
           <a:prstGeom prst="roundRect">
             <a:avLst>
-              <a:gd name="adj" fmla="val 9600"/>
+              <a:gd name="adj" fmla="val 8740"/>
             </a:avLst>
           </a:prstGeom>
           <a:solidFill>
@@ -5109,7 +5325,7 @@
         </p:nvSpPr>
         <p:spPr>
           <a:xfrm>
-            <a:off x="7799832" y="4645152"/>
+            <a:off x="7799832" y="4489704"/>
             <a:ext cx="3145536" cy="256032"/>
           </a:xfrm>
           <a:prstGeom prst="rect">
@@ -5148,8 +5364,8 @@
         </p:nvSpPr>
         <p:spPr>
           <a:xfrm>
-            <a:off x="7799832" y="4974336"/>
-            <a:ext cx="3145536" cy="576072"/>
+            <a:off x="7799832" y="4818888"/>
+            <a:ext cx="3145536" cy="688543"/>
           </a:xfrm>
           <a:prstGeom prst="rect">
             <a:avLst/>
@@ -5175,7 +5391,7 @@
                 <a:ea typeface="Aptos" pitchFamily="34" charset="-122"/>
                 <a:cs typeface="Aptos" pitchFamily="34" charset="-120"/>
               </a:rPr>
-              <a:t>Identify what could go wrong, who could be affected, what safeguards are needed, and what evidence should be reviewed.</a:t>
+              <a:t>Identify what could go wrong, who could be affected, what safeguards are needed, and what evidence should be reviewed before use.</a:t>
             </a:r>
             <a:endParaRPr lang="en-US" sz="1320" dirty="0"/>
           </a:p>
@@ -5544,11 +5760,11 @@
         <p:spPr>
           <a:xfrm>
             <a:off x="7635240" y="1325880"/>
-            <a:ext cx="3474720" cy="1325880"/>
+            <a:ext cx="3474720" cy="1207008"/>
           </a:xfrm>
           <a:prstGeom prst="roundRect">
             <a:avLst>
-              <a:gd name="adj" fmla="val 8276"/>
+              <a:gd name="adj" fmla="val 9091"/>
             </a:avLst>
           </a:prstGeom>
           <a:solidFill>
@@ -5610,7 +5826,7 @@
         <p:spPr>
           <a:xfrm>
             <a:off x="7799832" y="1801368"/>
-            <a:ext cx="3145536" cy="758952"/>
+            <a:ext cx="3145536" cy="640080"/>
           </a:xfrm>
           <a:prstGeom prst="rect">
             <a:avLst/>
@@ -5650,7 +5866,7 @@
         </p:nvSpPr>
         <p:spPr>
           <a:xfrm>
-            <a:off x="7635240" y="2788920"/>
+            <a:off x="7635240" y="2670048"/>
             <a:ext cx="3474720" cy="1536192"/>
           </a:xfrm>
           <a:prstGeom prst="roundRect">
@@ -5677,7 +5893,7 @@
         </p:nvSpPr>
         <p:spPr>
           <a:xfrm>
-            <a:off x="7799832" y="2935224"/>
+            <a:off x="7799832" y="2816352"/>
             <a:ext cx="3145536" cy="256032"/>
           </a:xfrm>
           <a:prstGeom prst="rect">
@@ -5716,7 +5932,7 @@
         </p:nvSpPr>
         <p:spPr>
           <a:xfrm>
-            <a:off x="7818120" y="3300984"/>
+            <a:off x="7818120" y="3182112"/>
             <a:ext cx="3090672" cy="877824"/>
           </a:xfrm>
           <a:prstGeom prst="rect">
@@ -5791,12 +6007,12 @@
         </p:nvSpPr>
         <p:spPr>
           <a:xfrm>
-            <a:off x="7635240" y="4498848"/>
-            <a:ext cx="3474720" cy="1143000"/>
+            <a:off x="7635240" y="4343400"/>
+            <a:ext cx="3474720" cy="1255471"/>
           </a:xfrm>
           <a:prstGeom prst="roundRect">
             <a:avLst>
-              <a:gd name="adj" fmla="val 9600"/>
+              <a:gd name="adj" fmla="val 8740"/>
             </a:avLst>
           </a:prstGeom>
           <a:solidFill>
@@ -5818,7 +6034,7 @@
         </p:nvSpPr>
         <p:spPr>
           <a:xfrm>
-            <a:off x="7799832" y="4645152"/>
+            <a:off x="7799832" y="4489704"/>
             <a:ext cx="3145536" cy="256032"/>
           </a:xfrm>
           <a:prstGeom prst="rect">
@@ -5857,8 +6073,8 @@
         </p:nvSpPr>
         <p:spPr>
           <a:xfrm>
-            <a:off x="7799832" y="4974336"/>
-            <a:ext cx="3145536" cy="576072"/>
+            <a:off x="7799832" y="4818888"/>
+            <a:ext cx="3145536" cy="688543"/>
           </a:xfrm>
           <a:prstGeom prst="rect">
             <a:avLst/>
@@ -5884,7 +6100,7 @@
                 <a:ea typeface="Aptos" pitchFamily="34" charset="-122"/>
                 <a:cs typeface="Aptos" pitchFamily="34" charset="-120"/>
               </a:rPr>
-              <a:t>Identify what could go wrong, who could be affected, what safeguards are needed, and what evidence should be reviewed.</a:t>
+              <a:t>Identify what could go wrong, who could be affected, what safeguards are needed, and what evidence should be reviewed before use.</a:t>
             </a:r>
             <a:endParaRPr lang="en-US" sz="1320" dirty="0"/>
           </a:p>
@@ -6253,11 +6469,11 @@
         <p:spPr>
           <a:xfrm>
             <a:off x="7635240" y="1325880"/>
-            <a:ext cx="3474720" cy="1325880"/>
+            <a:ext cx="3474720" cy="1255471"/>
           </a:xfrm>
           <a:prstGeom prst="roundRect">
             <a:avLst>
-              <a:gd name="adj" fmla="val 8276"/>
+              <a:gd name="adj" fmla="val 8740"/>
             </a:avLst>
           </a:prstGeom>
           <a:solidFill>
@@ -6319,7 +6535,7 @@
         <p:spPr>
           <a:xfrm>
             <a:off x="7799832" y="1801368"/>
-            <a:ext cx="3145536" cy="758952"/>
+            <a:ext cx="3145536" cy="688543"/>
           </a:xfrm>
           <a:prstGeom prst="rect">
             <a:avLst/>
@@ -6359,12 +6575,12 @@
         </p:nvSpPr>
         <p:spPr>
           <a:xfrm>
-            <a:off x="7635240" y="2788920"/>
-            <a:ext cx="3474720" cy="1536192"/>
+            <a:off x="7635240" y="2718511"/>
+            <a:ext cx="3474720" cy="1328623"/>
           </a:xfrm>
           <a:prstGeom prst="roundRect">
             <a:avLst>
-              <a:gd name="adj" fmla="val 7143"/>
+              <a:gd name="adj" fmla="val 8259"/>
             </a:avLst>
           </a:prstGeom>
           <a:solidFill>
@@ -6386,7 +6602,7 @@
         </p:nvSpPr>
         <p:spPr>
           <a:xfrm>
-            <a:off x="7799832" y="2935224"/>
+            <a:off x="7799832" y="2864815"/>
             <a:ext cx="3145536" cy="256032"/>
           </a:xfrm>
           <a:prstGeom prst="rect">
@@ -6425,8 +6641,8 @@
         </p:nvSpPr>
         <p:spPr>
           <a:xfrm>
-            <a:off x="7818120" y="3300984"/>
-            <a:ext cx="3090672" cy="877824"/>
+            <a:off x="7818120" y="3230575"/>
+            <a:ext cx="3090672" cy="670255"/>
           </a:xfrm>
           <a:prstGeom prst="rect">
             <a:avLst/>
@@ -6500,12 +6716,12 @@
         </p:nvSpPr>
         <p:spPr>
           <a:xfrm>
-            <a:off x="7635240" y="4498848"/>
-            <a:ext cx="3474720" cy="1143000"/>
+            <a:off x="7635240" y="4184294"/>
+            <a:ext cx="3474720" cy="1466698"/>
           </a:xfrm>
           <a:prstGeom prst="roundRect">
             <a:avLst>
-              <a:gd name="adj" fmla="val 9600"/>
+              <a:gd name="adj" fmla="val 7481"/>
             </a:avLst>
           </a:prstGeom>
           <a:solidFill>
@@ -6527,7 +6743,7 @@
         </p:nvSpPr>
         <p:spPr>
           <a:xfrm>
-            <a:off x="7799832" y="4645152"/>
+            <a:off x="7799832" y="4330598"/>
             <a:ext cx="3145536" cy="256032"/>
           </a:xfrm>
           <a:prstGeom prst="rect">
@@ -6566,8 +6782,8 @@
         </p:nvSpPr>
         <p:spPr>
           <a:xfrm>
-            <a:off x="7799832" y="4974336"/>
-            <a:ext cx="3145536" cy="576072"/>
+            <a:off x="7799832" y="4659782"/>
+            <a:ext cx="3145536" cy="899770"/>
           </a:xfrm>
           <a:prstGeom prst="rect">
             <a:avLst/>
@@ -6593,7 +6809,7 @@
                 <a:ea typeface="Aptos" pitchFamily="34" charset="-122"/>
                 <a:cs typeface="Aptos" pitchFamily="34" charset="-120"/>
               </a:rPr>
-              <a:t>Connect the concept to data quality, model performance, validation evidence, monitoring measures, and decisions that.</a:t>
+              <a:t>Connect the concept to data quality, model performance, validation evidence, monitoring measures, and decisions that remain under human control.</a:t>
             </a:r>
             <a:endParaRPr lang="en-US" sz="1320" dirty="0"/>
           </a:p>
@@ -6962,11 +7178,11 @@
         <p:spPr>
           <a:xfrm>
             <a:off x="7635240" y="1325880"/>
-            <a:ext cx="3474720" cy="1325880"/>
+            <a:ext cx="3474720" cy="1207008"/>
           </a:xfrm>
           <a:prstGeom prst="roundRect">
             <a:avLst>
-              <a:gd name="adj" fmla="val 8276"/>
+              <a:gd name="adj" fmla="val 9091"/>
             </a:avLst>
           </a:prstGeom>
           <a:solidFill>
@@ -7028,7 +7244,7 @@
         <p:spPr>
           <a:xfrm>
             <a:off x="7799832" y="1801368"/>
-            <a:ext cx="3145536" cy="758952"/>
+            <a:ext cx="3145536" cy="640080"/>
           </a:xfrm>
           <a:prstGeom prst="rect">
             <a:avLst/>
@@ -7068,12 +7284,12 @@
         </p:nvSpPr>
         <p:spPr>
           <a:xfrm>
-            <a:off x="7635240" y="2788920"/>
-            <a:ext cx="3474720" cy="1536192"/>
+            <a:off x="7635240" y="2670048"/>
+            <a:ext cx="3474720" cy="1377086"/>
           </a:xfrm>
           <a:prstGeom prst="roundRect">
             <a:avLst>
-              <a:gd name="adj" fmla="val 7143"/>
+              <a:gd name="adj" fmla="val 7968"/>
             </a:avLst>
           </a:prstGeom>
           <a:solidFill>
@@ -7095,7 +7311,7 @@
         </p:nvSpPr>
         <p:spPr>
           <a:xfrm>
-            <a:off x="7799832" y="2935224"/>
+            <a:off x="7799832" y="2816352"/>
             <a:ext cx="3145536" cy="256032"/>
           </a:xfrm>
           <a:prstGeom prst="rect">
@@ -7134,8 +7350,8 @@
         </p:nvSpPr>
         <p:spPr>
           <a:xfrm>
-            <a:off x="7818120" y="3300984"/>
-            <a:ext cx="3090672" cy="877824"/>
+            <a:off x="7818120" y="3182112"/>
+            <a:ext cx="3090672" cy="718718"/>
           </a:xfrm>
           <a:prstGeom prst="rect">
             <a:avLst/>
@@ -7209,12 +7425,12 @@
         </p:nvSpPr>
         <p:spPr>
           <a:xfrm>
-            <a:off x="7635240" y="4498848"/>
-            <a:ext cx="3474720" cy="1143000"/>
+            <a:off x="7635240" y="4184294"/>
+            <a:ext cx="3474720" cy="1466698"/>
           </a:xfrm>
           <a:prstGeom prst="roundRect">
             <a:avLst>
-              <a:gd name="adj" fmla="val 9600"/>
+              <a:gd name="adj" fmla="val 7481"/>
             </a:avLst>
           </a:prstGeom>
           <a:solidFill>
@@ -7236,7 +7452,7 @@
         </p:nvSpPr>
         <p:spPr>
           <a:xfrm>
-            <a:off x="7799832" y="4645152"/>
+            <a:off x="7799832" y="4330598"/>
             <a:ext cx="3145536" cy="256032"/>
           </a:xfrm>
           <a:prstGeom prst="rect">
@@ -7275,8 +7491,8 @@
         </p:nvSpPr>
         <p:spPr>
           <a:xfrm>
-            <a:off x="7799832" y="4974336"/>
-            <a:ext cx="3145536" cy="576072"/>
+            <a:off x="7799832" y="4659782"/>
+            <a:ext cx="3145536" cy="899770"/>
           </a:xfrm>
           <a:prstGeom prst="rect">
             <a:avLst/>
@@ -7302,7 +7518,7 @@
                 <a:ea typeface="Aptos" pitchFamily="34" charset="-122"/>
                 <a:cs typeface="Aptos" pitchFamily="34" charset="-120"/>
               </a:rPr>
-              <a:t>Connect the concept to data quality, model performance, validation evidence, monitoring measures, and decisions that.</a:t>
+              <a:t>Connect the concept to data quality, model performance, validation evidence, monitoring measures, and decisions that remain under human control.</a:t>
             </a:r>
             <a:endParaRPr lang="en-US" sz="1320" dirty="0"/>
           </a:p>
@@ -7654,11 +7870,11 @@
         <p:spPr>
           <a:xfrm>
             <a:off x="7635240" y="1325880"/>
-            <a:ext cx="3474720" cy="1325880"/>
+            <a:ext cx="3474720" cy="1207008"/>
           </a:xfrm>
           <a:prstGeom prst="roundRect">
             <a:avLst>
-              <a:gd name="adj" fmla="val 8276"/>
+              <a:gd name="adj" fmla="val 9091"/>
             </a:avLst>
           </a:prstGeom>
           <a:solidFill>
@@ -7720,7 +7936,7 @@
         <p:spPr>
           <a:xfrm>
             <a:off x="7799832" y="1801368"/>
-            <a:ext cx="3145536" cy="758952"/>
+            <a:ext cx="3145536" cy="640080"/>
           </a:xfrm>
           <a:prstGeom prst="rect">
             <a:avLst/>
@@ -7760,12 +7976,12 @@
         </p:nvSpPr>
         <p:spPr>
           <a:xfrm>
-            <a:off x="7635240" y="2788920"/>
-            <a:ext cx="3474720" cy="1536192"/>
+            <a:off x="7635240" y="2670048"/>
+            <a:ext cx="3474720" cy="1377086"/>
           </a:xfrm>
           <a:prstGeom prst="roundRect">
             <a:avLst>
-              <a:gd name="adj" fmla="val 7143"/>
+              <a:gd name="adj" fmla="val 7968"/>
             </a:avLst>
           </a:prstGeom>
           <a:solidFill>
@@ -7787,7 +8003,7 @@
         </p:nvSpPr>
         <p:spPr>
           <a:xfrm>
-            <a:off x="7799832" y="2935224"/>
+            <a:off x="7799832" y="2816352"/>
             <a:ext cx="3145536" cy="256032"/>
           </a:xfrm>
           <a:prstGeom prst="rect">
@@ -7826,8 +8042,8 @@
         </p:nvSpPr>
         <p:spPr>
           <a:xfrm>
-            <a:off x="7818120" y="3300984"/>
-            <a:ext cx="3090672" cy="877824"/>
+            <a:off x="7818120" y="3182112"/>
+            <a:ext cx="3090672" cy="718718"/>
           </a:xfrm>
           <a:prstGeom prst="rect">
             <a:avLst/>
@@ -7884,12 +8100,12 @@
         </p:nvSpPr>
         <p:spPr>
           <a:xfrm>
-            <a:off x="7635240" y="4498848"/>
-            <a:ext cx="3474720" cy="1143000"/>
+            <a:off x="7635240" y="4184294"/>
+            <a:ext cx="3474720" cy="1466698"/>
           </a:xfrm>
           <a:prstGeom prst="roundRect">
             <a:avLst>
-              <a:gd name="adj" fmla="val 9600"/>
+              <a:gd name="adj" fmla="val 7481"/>
             </a:avLst>
           </a:prstGeom>
           <a:solidFill>
@@ -7911,7 +8127,7 @@
         </p:nvSpPr>
         <p:spPr>
           <a:xfrm>
-            <a:off x="7799832" y="4645152"/>
+            <a:off x="7799832" y="4330598"/>
             <a:ext cx="3145536" cy="256032"/>
           </a:xfrm>
           <a:prstGeom prst="rect">
@@ -7950,8 +8166,8 @@
         </p:nvSpPr>
         <p:spPr>
           <a:xfrm>
-            <a:off x="7799832" y="4974336"/>
-            <a:ext cx="3145536" cy="576072"/>
+            <a:off x="7799832" y="4659782"/>
+            <a:ext cx="3145536" cy="899770"/>
           </a:xfrm>
           <a:prstGeom prst="rect">
             <a:avLst/>
@@ -7977,7 +8193,7 @@
                 <a:ea typeface="Aptos" pitchFamily="34" charset="-122"/>
                 <a:cs typeface="Aptos" pitchFamily="34" charset="-120"/>
               </a:rPr>
-              <a:t>Connect the concept to data quality, model performance, validation evidence, monitoring measures, and decisions that.</a:t>
+              <a:t>Connect the concept to data quality, model performance, validation evidence, monitoring measures, and decisions that remain under human control.</a:t>
             </a:r>
             <a:endParaRPr lang="en-US" sz="1320" dirty="0"/>
           </a:p>
@@ -8346,11 +8562,11 @@
         <p:spPr>
           <a:xfrm>
             <a:off x="7635240" y="1325880"/>
-            <a:ext cx="3474720" cy="1325880"/>
+            <a:ext cx="3474720" cy="1207008"/>
           </a:xfrm>
           <a:prstGeom prst="roundRect">
             <a:avLst>
-              <a:gd name="adj" fmla="val 8276"/>
+              <a:gd name="adj" fmla="val 9091"/>
             </a:avLst>
           </a:prstGeom>
           <a:solidFill>
@@ -8412,7 +8628,7 @@
         <p:spPr>
           <a:xfrm>
             <a:off x="7799832" y="1801368"/>
-            <a:ext cx="3145536" cy="758952"/>
+            <a:ext cx="3145536" cy="640080"/>
           </a:xfrm>
           <a:prstGeom prst="rect">
             <a:avLst/>
@@ -8452,12 +8668,12 @@
         </p:nvSpPr>
         <p:spPr>
           <a:xfrm>
-            <a:off x="7635240" y="2788920"/>
-            <a:ext cx="3474720" cy="1536192"/>
+            <a:off x="7635240" y="2670048"/>
+            <a:ext cx="3474720" cy="1377086"/>
           </a:xfrm>
           <a:prstGeom prst="roundRect">
             <a:avLst>
-              <a:gd name="adj" fmla="val 7143"/>
+              <a:gd name="adj" fmla="val 7968"/>
             </a:avLst>
           </a:prstGeom>
           <a:solidFill>
@@ -8479,7 +8695,7 @@
         </p:nvSpPr>
         <p:spPr>
           <a:xfrm>
-            <a:off x="7799832" y="2935224"/>
+            <a:off x="7799832" y="2816352"/>
             <a:ext cx="3145536" cy="256032"/>
           </a:xfrm>
           <a:prstGeom prst="rect">
@@ -8518,8 +8734,8 @@
         </p:nvSpPr>
         <p:spPr>
           <a:xfrm>
-            <a:off x="7818120" y="3300984"/>
-            <a:ext cx="3090672" cy="877824"/>
+            <a:off x="7818120" y="3182112"/>
+            <a:ext cx="3090672" cy="718718"/>
           </a:xfrm>
           <a:prstGeom prst="rect">
             <a:avLst/>
@@ -8576,12 +8792,12 @@
         </p:nvSpPr>
         <p:spPr>
           <a:xfrm>
-            <a:off x="7635240" y="4498848"/>
-            <a:ext cx="3474720" cy="1143000"/>
+            <a:off x="7635240" y="4184294"/>
+            <a:ext cx="3474720" cy="1466698"/>
           </a:xfrm>
           <a:prstGeom prst="roundRect">
             <a:avLst>
-              <a:gd name="adj" fmla="val 9600"/>
+              <a:gd name="adj" fmla="val 7481"/>
             </a:avLst>
           </a:prstGeom>
           <a:solidFill>
@@ -8603,7 +8819,7 @@
         </p:nvSpPr>
         <p:spPr>
           <a:xfrm>
-            <a:off x="7799832" y="4645152"/>
+            <a:off x="7799832" y="4330598"/>
             <a:ext cx="3145536" cy="256032"/>
           </a:xfrm>
           <a:prstGeom prst="rect">
@@ -8642,8 +8858,8 @@
         </p:nvSpPr>
         <p:spPr>
           <a:xfrm>
-            <a:off x="7799832" y="4974336"/>
-            <a:ext cx="3145536" cy="576072"/>
+            <a:off x="7799832" y="4659782"/>
+            <a:ext cx="3145536" cy="899770"/>
           </a:xfrm>
           <a:prstGeom prst="rect">
             <a:avLst/>
@@ -8669,7 +8885,7 @@
                 <a:ea typeface="Aptos" pitchFamily="34" charset="-122"/>
                 <a:cs typeface="Aptos" pitchFamily="34" charset="-120"/>
               </a:rPr>
-              <a:t>Use the assignment to test whether you can explain the concept, apply it to a realistic public health situation, and.</a:t>
+              <a:t>Use the assignment to test whether you can explain the concept, apply it to a realistic public health situation, and identify what would need review before the work moves forward.</a:t>
             </a:r>
             <a:endParaRPr lang="en-US" sz="1320" dirty="0"/>
           </a:p>
@@ -9038,11 +9254,11 @@
         <p:spPr>
           <a:xfrm>
             <a:off x="7635240" y="1325880"/>
-            <a:ext cx="3474720" cy="1325880"/>
+            <a:ext cx="3474720" cy="1207008"/>
           </a:xfrm>
           <a:prstGeom prst="roundRect">
             <a:avLst>
-              <a:gd name="adj" fmla="val 8276"/>
+              <a:gd name="adj" fmla="val 9091"/>
             </a:avLst>
           </a:prstGeom>
           <a:solidFill>
@@ -9104,7 +9320,7 @@
         <p:spPr>
           <a:xfrm>
             <a:off x="7799832" y="1801368"/>
-            <a:ext cx="3145536" cy="758952"/>
+            <a:ext cx="3145536" cy="640080"/>
           </a:xfrm>
           <a:prstGeom prst="rect">
             <a:avLst/>
@@ -9144,12 +9360,12 @@
         </p:nvSpPr>
         <p:spPr>
           <a:xfrm>
-            <a:off x="7635240" y="2788920"/>
-            <a:ext cx="3474720" cy="1536192"/>
+            <a:off x="7635240" y="2670048"/>
+            <a:ext cx="3474720" cy="1377086"/>
           </a:xfrm>
           <a:prstGeom prst="roundRect">
             <a:avLst>
-              <a:gd name="adj" fmla="val 7143"/>
+              <a:gd name="adj" fmla="val 7968"/>
             </a:avLst>
           </a:prstGeom>
           <a:solidFill>
@@ -9171,7 +9387,7 @@
         </p:nvSpPr>
         <p:spPr>
           <a:xfrm>
-            <a:off x="7799832" y="2935224"/>
+            <a:off x="7799832" y="2816352"/>
             <a:ext cx="3145536" cy="256032"/>
           </a:xfrm>
           <a:prstGeom prst="rect">
@@ -9210,8 +9426,8 @@
         </p:nvSpPr>
         <p:spPr>
           <a:xfrm>
-            <a:off x="7818120" y="3300984"/>
-            <a:ext cx="3090672" cy="877824"/>
+            <a:off x="7818120" y="3182112"/>
+            <a:ext cx="3090672" cy="718718"/>
           </a:xfrm>
           <a:prstGeom prst="rect">
             <a:avLst/>
@@ -9285,12 +9501,12 @@
         </p:nvSpPr>
         <p:spPr>
           <a:xfrm>
-            <a:off x="7635240" y="4498848"/>
-            <a:ext cx="3474720" cy="1143000"/>
+            <a:off x="7635240" y="4184294"/>
+            <a:ext cx="3474720" cy="1466698"/>
           </a:xfrm>
           <a:prstGeom prst="roundRect">
             <a:avLst>
-              <a:gd name="adj" fmla="val 9600"/>
+              <a:gd name="adj" fmla="val 7481"/>
             </a:avLst>
           </a:prstGeom>
           <a:solidFill>
@@ -9312,7 +9528,7 @@
         </p:nvSpPr>
         <p:spPr>
           <a:xfrm>
-            <a:off x="7799832" y="4645152"/>
+            <a:off x="7799832" y="4330598"/>
             <a:ext cx="3145536" cy="256032"/>
           </a:xfrm>
           <a:prstGeom prst="rect">
@@ -9351,8 +9567,8 @@
         </p:nvSpPr>
         <p:spPr>
           <a:xfrm>
-            <a:off x="7799832" y="4974336"/>
-            <a:ext cx="3145536" cy="576072"/>
+            <a:off x="7799832" y="4659782"/>
+            <a:ext cx="3145536" cy="899770"/>
           </a:xfrm>
           <a:prstGeom prst="rect">
             <a:avLst/>
@@ -9378,7 +9594,7 @@
                 <a:ea typeface="Aptos" pitchFamily="34" charset="-122"/>
                 <a:cs typeface="Aptos" pitchFamily="34" charset="-120"/>
               </a:rPr>
-              <a:t>Connect the concept to data quality, model performance, validation evidence, monitoring measures, and decisions that.</a:t>
+              <a:t>Connect the concept to data quality, model performance, validation evidence, monitoring measures, and decisions that remain under human control.</a:t>
             </a:r>
             <a:endParaRPr lang="en-US" sz="1320" dirty="0"/>
           </a:p>
@@ -9713,11 +9929,11 @@
         <p:spPr>
           <a:xfrm>
             <a:off x="7635240" y="1325880"/>
-            <a:ext cx="3474720" cy="1325880"/>
+            <a:ext cx="3474720" cy="1207008"/>
           </a:xfrm>
           <a:prstGeom prst="roundRect">
             <a:avLst>
-              <a:gd name="adj" fmla="val 8276"/>
+              <a:gd name="adj" fmla="val 9091"/>
             </a:avLst>
           </a:prstGeom>
           <a:solidFill>
@@ -9779,7 +9995,7 @@
         <p:spPr>
           <a:xfrm>
             <a:off x="7799832" y="1801368"/>
-            <a:ext cx="3145536" cy="758952"/>
+            <a:ext cx="3145536" cy="640080"/>
           </a:xfrm>
           <a:prstGeom prst="rect">
             <a:avLst/>
@@ -9819,12 +10035,12 @@
         </p:nvSpPr>
         <p:spPr>
           <a:xfrm>
-            <a:off x="7635240" y="2788920"/>
-            <a:ext cx="3474720" cy="1536192"/>
+            <a:off x="7635240" y="2670048"/>
+            <a:ext cx="3474720" cy="1377086"/>
           </a:xfrm>
           <a:prstGeom prst="roundRect">
             <a:avLst>
-              <a:gd name="adj" fmla="val 7143"/>
+              <a:gd name="adj" fmla="val 7968"/>
             </a:avLst>
           </a:prstGeom>
           <a:solidFill>
@@ -9846,7 +10062,7 @@
         </p:nvSpPr>
         <p:spPr>
           <a:xfrm>
-            <a:off x="7799832" y="2935224"/>
+            <a:off x="7799832" y="2816352"/>
             <a:ext cx="3145536" cy="256032"/>
           </a:xfrm>
           <a:prstGeom prst="rect">
@@ -9885,8 +10101,8 @@
         </p:nvSpPr>
         <p:spPr>
           <a:xfrm>
-            <a:off x="7818120" y="3300984"/>
-            <a:ext cx="3090672" cy="877824"/>
+            <a:off x="7818120" y="3182112"/>
+            <a:ext cx="3090672" cy="718718"/>
           </a:xfrm>
           <a:prstGeom prst="rect">
             <a:avLst/>
@@ -9926,12 +10142,12 @@
         </p:nvSpPr>
         <p:spPr>
           <a:xfrm>
-            <a:off x="7635240" y="4498848"/>
-            <a:ext cx="3474720" cy="1143000"/>
+            <a:off x="7635240" y="4184294"/>
+            <a:ext cx="3474720" cy="1466698"/>
           </a:xfrm>
           <a:prstGeom prst="roundRect">
             <a:avLst>
-              <a:gd name="adj" fmla="val 9600"/>
+              <a:gd name="adj" fmla="val 7481"/>
             </a:avLst>
           </a:prstGeom>
           <a:solidFill>
@@ -9953,7 +10169,7 @@
         </p:nvSpPr>
         <p:spPr>
           <a:xfrm>
-            <a:off x="7799832" y="4645152"/>
+            <a:off x="7799832" y="4330598"/>
             <a:ext cx="3145536" cy="256032"/>
           </a:xfrm>
           <a:prstGeom prst="rect">
@@ -9992,8 +10208,8 @@
         </p:nvSpPr>
         <p:spPr>
           <a:xfrm>
-            <a:off x="7799832" y="4974336"/>
-            <a:ext cx="3145536" cy="576072"/>
+            <a:off x="7799832" y="4659782"/>
+            <a:ext cx="3145536" cy="899770"/>
           </a:xfrm>
           <a:prstGeom prst="rect">
             <a:avLst/>
@@ -10019,7 +10235,7 @@
                 <a:ea typeface="Aptos" pitchFamily="34" charset="-122"/>
                 <a:cs typeface="Aptos" pitchFamily="34" charset="-120"/>
               </a:rPr>
-              <a:t>Connect the concept to data quality, model performance, validation evidence, monitoring measures, and decisions that.</a:t>
+              <a:t>Connect the concept to data quality, model performance, validation evidence, monitoring measures, and decisions that remain under human control.</a:t>
             </a:r>
             <a:endParaRPr lang="en-US" sz="1320" dirty="0"/>
           </a:p>
@@ -10990,11 +11206,11 @@
         <p:spPr>
           <a:xfrm>
             <a:off x="7635240" y="1325880"/>
-            <a:ext cx="3474720" cy="1325880"/>
+            <a:ext cx="3474720" cy="1207008"/>
           </a:xfrm>
           <a:prstGeom prst="roundRect">
             <a:avLst>
-              <a:gd name="adj" fmla="val 8276"/>
+              <a:gd name="adj" fmla="val 9091"/>
             </a:avLst>
           </a:prstGeom>
           <a:solidFill>
@@ -11056,7 +11272,7 @@
         <p:spPr>
           <a:xfrm>
             <a:off x="7799832" y="1801368"/>
-            <a:ext cx="3145536" cy="758952"/>
+            <a:ext cx="3145536" cy="640080"/>
           </a:xfrm>
           <a:prstGeom prst="rect">
             <a:avLst/>
@@ -11096,12 +11312,12 @@
         </p:nvSpPr>
         <p:spPr>
           <a:xfrm>
-            <a:off x="7635240" y="2788920"/>
-            <a:ext cx="3474720" cy="1536192"/>
+            <a:off x="7635240" y="2670048"/>
+            <a:ext cx="3474720" cy="1377086"/>
           </a:xfrm>
           <a:prstGeom prst="roundRect">
             <a:avLst>
-              <a:gd name="adj" fmla="val 7143"/>
+              <a:gd name="adj" fmla="val 7968"/>
             </a:avLst>
           </a:prstGeom>
           <a:solidFill>
@@ -11123,7 +11339,7 @@
         </p:nvSpPr>
         <p:spPr>
           <a:xfrm>
-            <a:off x="7799832" y="2935224"/>
+            <a:off x="7799832" y="2816352"/>
             <a:ext cx="3145536" cy="256032"/>
           </a:xfrm>
           <a:prstGeom prst="rect">
@@ -11162,8 +11378,8 @@
         </p:nvSpPr>
         <p:spPr>
           <a:xfrm>
-            <a:off x="7818120" y="3300984"/>
-            <a:ext cx="3090672" cy="877824"/>
+            <a:off x="7818120" y="3182112"/>
+            <a:ext cx="3090672" cy="718718"/>
           </a:xfrm>
           <a:prstGeom prst="rect">
             <a:avLst/>
@@ -11237,12 +11453,12 @@
         </p:nvSpPr>
         <p:spPr>
           <a:xfrm>
-            <a:off x="7635240" y="4498848"/>
-            <a:ext cx="3474720" cy="1143000"/>
+            <a:off x="7635240" y="4184294"/>
+            <a:ext cx="3474720" cy="1466698"/>
           </a:xfrm>
           <a:prstGeom prst="roundRect">
             <a:avLst>
-              <a:gd name="adj" fmla="val 9600"/>
+              <a:gd name="adj" fmla="val 7481"/>
             </a:avLst>
           </a:prstGeom>
           <a:solidFill>
@@ -11264,7 +11480,7 @@
         </p:nvSpPr>
         <p:spPr>
           <a:xfrm>
-            <a:off x="7799832" y="4645152"/>
+            <a:off x="7799832" y="4330598"/>
             <a:ext cx="3145536" cy="256032"/>
           </a:xfrm>
           <a:prstGeom prst="rect">
@@ -11303,8 +11519,8 @@
         </p:nvSpPr>
         <p:spPr>
           <a:xfrm>
-            <a:off x="7799832" y="4974336"/>
-            <a:ext cx="3145536" cy="576072"/>
+            <a:off x="7799832" y="4659782"/>
+            <a:ext cx="3145536" cy="899770"/>
           </a:xfrm>
           <a:prstGeom prst="rect">
             <a:avLst/>
@@ -11330,7 +11546,7 @@
                 <a:ea typeface="Aptos" pitchFamily="34" charset="-122"/>
                 <a:cs typeface="Aptos" pitchFamily="34" charset="-120"/>
               </a:rPr>
-              <a:t>Use the assignment to test whether you can explain the concept, apply it to a realistic public health situation, and.</a:t>
+              <a:t>Use the assignment to test whether you can explain the concept, apply it to a realistic public health situation, and identify what would need review before the work moves forward.</a:t>
             </a:r>
             <a:endParaRPr lang="en-US" sz="1320" dirty="0"/>
           </a:p>
@@ -11699,11 +11915,11 @@
         <p:spPr>
           <a:xfrm>
             <a:off x="7635240" y="1325880"/>
-            <a:ext cx="3474720" cy="1325880"/>
+            <a:ext cx="3474720" cy="1207008"/>
           </a:xfrm>
           <a:prstGeom prst="roundRect">
             <a:avLst>
-              <a:gd name="adj" fmla="val 8276"/>
+              <a:gd name="adj" fmla="val 9091"/>
             </a:avLst>
           </a:prstGeom>
           <a:solidFill>
@@ -11765,7 +11981,7 @@
         <p:spPr>
           <a:xfrm>
             <a:off x="7799832" y="1801368"/>
-            <a:ext cx="3145536" cy="758952"/>
+            <a:ext cx="3145536" cy="640080"/>
           </a:xfrm>
           <a:prstGeom prst="rect">
             <a:avLst/>
@@ -11805,12 +12021,12 @@
         </p:nvSpPr>
         <p:spPr>
           <a:xfrm>
-            <a:off x="7635240" y="2788920"/>
-            <a:ext cx="3474720" cy="1536192"/>
+            <a:off x="7635240" y="2670048"/>
+            <a:ext cx="3474720" cy="1377086"/>
           </a:xfrm>
           <a:prstGeom prst="roundRect">
             <a:avLst>
-              <a:gd name="adj" fmla="val 7143"/>
+              <a:gd name="adj" fmla="val 7968"/>
             </a:avLst>
           </a:prstGeom>
           <a:solidFill>
@@ -11832,7 +12048,7 @@
         </p:nvSpPr>
         <p:spPr>
           <a:xfrm>
-            <a:off x="7799832" y="2935224"/>
+            <a:off x="7799832" y="2816352"/>
             <a:ext cx="3145536" cy="256032"/>
           </a:xfrm>
           <a:prstGeom prst="rect">
@@ -11871,8 +12087,8 @@
         </p:nvSpPr>
         <p:spPr>
           <a:xfrm>
-            <a:off x="7818120" y="3300984"/>
-            <a:ext cx="3090672" cy="877824"/>
+            <a:off x="7818120" y="3182112"/>
+            <a:ext cx="3090672" cy="718718"/>
           </a:xfrm>
           <a:prstGeom prst="rect">
             <a:avLst/>
@@ -11946,12 +12162,12 @@
         </p:nvSpPr>
         <p:spPr>
           <a:xfrm>
-            <a:off x="7635240" y="4498848"/>
-            <a:ext cx="3474720" cy="1143000"/>
+            <a:off x="7635240" y="4184294"/>
+            <a:ext cx="3474720" cy="1466698"/>
           </a:xfrm>
           <a:prstGeom prst="roundRect">
             <a:avLst>
-              <a:gd name="adj" fmla="val 9600"/>
+              <a:gd name="adj" fmla="val 7481"/>
             </a:avLst>
           </a:prstGeom>
           <a:solidFill>
@@ -11973,7 +12189,7 @@
         </p:nvSpPr>
         <p:spPr>
           <a:xfrm>
-            <a:off x="7799832" y="4645152"/>
+            <a:off x="7799832" y="4330598"/>
             <a:ext cx="3145536" cy="256032"/>
           </a:xfrm>
           <a:prstGeom prst="rect">
@@ -12012,8 +12228,8 @@
         </p:nvSpPr>
         <p:spPr>
           <a:xfrm>
-            <a:off x="7799832" y="4974336"/>
-            <a:ext cx="3145536" cy="576072"/>
+            <a:off x="7799832" y="4659782"/>
+            <a:ext cx="3145536" cy="899770"/>
           </a:xfrm>
           <a:prstGeom prst="rect">
             <a:avLst/>
@@ -12039,7 +12255,7 @@
                 <a:ea typeface="Aptos" pitchFamily="34" charset="-122"/>
                 <a:cs typeface="Aptos" pitchFamily="34" charset="-120"/>
               </a:rPr>
-              <a:t>Use the assignment to test whether you can explain the concept, apply it to a realistic public health situation, and.</a:t>
+              <a:t>Use the assignment to test whether you can explain the concept, apply it to a realistic public health situation, and identify what would need review before the work moves forward.</a:t>
             </a:r>
             <a:endParaRPr lang="en-US" sz="1320" dirty="0"/>
           </a:p>
@@ -12408,11 +12624,11 @@
         <p:spPr>
           <a:xfrm>
             <a:off x="7635240" y="1325880"/>
-            <a:ext cx="3474720" cy="1325880"/>
+            <a:ext cx="3474720" cy="1255471"/>
           </a:xfrm>
           <a:prstGeom prst="roundRect">
             <a:avLst>
-              <a:gd name="adj" fmla="val 8276"/>
+              <a:gd name="adj" fmla="val 8740"/>
             </a:avLst>
           </a:prstGeom>
           <a:solidFill>
@@ -12474,7 +12690,7 @@
         <p:spPr>
           <a:xfrm>
             <a:off x="7799832" y="1801368"/>
-            <a:ext cx="3145536" cy="758952"/>
+            <a:ext cx="3145536" cy="688543"/>
           </a:xfrm>
           <a:prstGeom prst="rect">
             <a:avLst/>
@@ -12514,12 +12730,12 @@
         </p:nvSpPr>
         <p:spPr>
           <a:xfrm>
-            <a:off x="7635240" y="2788920"/>
-            <a:ext cx="3474720" cy="1536192"/>
+            <a:off x="7635240" y="2718511"/>
+            <a:ext cx="3474720" cy="1328623"/>
           </a:xfrm>
           <a:prstGeom prst="roundRect">
             <a:avLst>
-              <a:gd name="adj" fmla="val 7143"/>
+              <a:gd name="adj" fmla="val 8259"/>
             </a:avLst>
           </a:prstGeom>
           <a:solidFill>
@@ -12541,7 +12757,7 @@
         </p:nvSpPr>
         <p:spPr>
           <a:xfrm>
-            <a:off x="7799832" y="2935224"/>
+            <a:off x="7799832" y="2864815"/>
             <a:ext cx="3145536" cy="256032"/>
           </a:xfrm>
           <a:prstGeom prst="rect">
@@ -12580,8 +12796,8 @@
         </p:nvSpPr>
         <p:spPr>
           <a:xfrm>
-            <a:off x="7818120" y="3300984"/>
-            <a:ext cx="3090672" cy="877824"/>
+            <a:off x="7818120" y="3230575"/>
+            <a:ext cx="3090672" cy="670255"/>
           </a:xfrm>
           <a:prstGeom prst="rect">
             <a:avLst/>
@@ -12655,12 +12871,12 @@
         </p:nvSpPr>
         <p:spPr>
           <a:xfrm>
-            <a:off x="7635240" y="4498848"/>
-            <a:ext cx="3474720" cy="1143000"/>
+            <a:off x="7635240" y="4184294"/>
+            <a:ext cx="3474720" cy="1466698"/>
           </a:xfrm>
           <a:prstGeom prst="roundRect">
             <a:avLst>
-              <a:gd name="adj" fmla="val 9600"/>
+              <a:gd name="adj" fmla="val 7481"/>
             </a:avLst>
           </a:prstGeom>
           <a:solidFill>
@@ -12682,7 +12898,7 @@
         </p:nvSpPr>
         <p:spPr>
           <a:xfrm>
-            <a:off x="7799832" y="4645152"/>
+            <a:off x="7799832" y="4330598"/>
             <a:ext cx="3145536" cy="256032"/>
           </a:xfrm>
           <a:prstGeom prst="rect">
@@ -12721,8 +12937,8 @@
         </p:nvSpPr>
         <p:spPr>
           <a:xfrm>
-            <a:off x="7799832" y="4974336"/>
-            <a:ext cx="3145536" cy="576072"/>
+            <a:off x="7799832" y="4659782"/>
+            <a:ext cx="3145536" cy="899770"/>
           </a:xfrm>
           <a:prstGeom prst="rect">
             <a:avLst/>
@@ -12748,7 +12964,7 @@
                 <a:ea typeface="Aptos" pitchFamily="34" charset="-122"/>
                 <a:cs typeface="Aptos" pitchFamily="34" charset="-120"/>
               </a:rPr>
-              <a:t>Connect the concept to data quality, model performance, validation evidence, monitoring measures, and decisions that.</a:t>
+              <a:t>Connect the concept to data quality, model performance, validation evidence, monitoring measures, and decisions that remain under human control.</a:t>
             </a:r>
             <a:endParaRPr lang="en-US" sz="1320" dirty="0"/>
           </a:p>
@@ -13226,7 +13442,7 @@
                 <a:ea typeface="Aptos" pitchFamily="34" charset="-122"/>
                 <a:cs typeface="Aptos" pitchFamily="34" charset="-120"/>
               </a:rPr>
-              <a:t>Use the related plays to identify decisions, participants, timing, approvals, and documentation needed for responsible.</a:t>
+              <a:t>Use the related plays to identify decisions, participants, timing, approvals, and documentation needed for responsible implementation.</a:t>
             </a:r>
             <a:endParaRPr lang="en-US" sz="1320" dirty="0"/>
           </a:p>
@@ -13845,7 +14061,7 @@
                 <a:ea typeface="Aptos" pitchFamily="34" charset="-122"/>
                 <a:cs typeface="Aptos" pitchFamily="34" charset="-120"/>
               </a:rPr>
-              <a:t>Use linked tools when your department needs a structured worksheet, template, checklist, review process, or.</a:t>
+              <a:t>Use linked tools when your department needs a structured worksheet, template, checklist, review process, or documentation artifact.</a:t>
             </a:r>
             <a:endParaRPr lang="en-US" sz="1320" dirty="0"/>
           </a:p>
@@ -14355,11 +14571,11 @@
         <p:spPr>
           <a:xfrm>
             <a:off x="7635240" y="1325880"/>
-            <a:ext cx="3474720" cy="1325880"/>
+            <a:ext cx="3474720" cy="1207008"/>
           </a:xfrm>
           <a:prstGeom prst="roundRect">
             <a:avLst>
-              <a:gd name="adj" fmla="val 8276"/>
+              <a:gd name="adj" fmla="val 9091"/>
             </a:avLst>
           </a:prstGeom>
           <a:solidFill>
@@ -14421,7 +14637,7 @@
         <p:spPr>
           <a:xfrm>
             <a:off x="7799832" y="1801368"/>
-            <a:ext cx="3145536" cy="758952"/>
+            <a:ext cx="3145536" cy="640080"/>
           </a:xfrm>
           <a:prstGeom prst="rect">
             <a:avLst/>
@@ -14447,7 +14663,7 @@
                 <a:ea typeface="Aptos" pitchFamily="34" charset="-122"/>
                 <a:cs typeface="Aptos" pitchFamily="34" charset="-120"/>
               </a:rPr>
-              <a:t>Describe the major steps in public health data pipelines, including ingestion, validation,.</a:t>
+              <a:t>Describe the major steps in public health data pipelines, including ingestion,.</a:t>
             </a:r>
             <a:endParaRPr lang="en-US" sz="1320" dirty="0"/>
           </a:p>
@@ -14461,12 +14677,12 @@
         </p:nvSpPr>
         <p:spPr>
           <a:xfrm>
-            <a:off x="7635240" y="2788920"/>
-            <a:ext cx="3474720" cy="1536192"/>
+            <a:off x="7635240" y="2670048"/>
+            <a:ext cx="3474720" cy="1377086"/>
           </a:xfrm>
           <a:prstGeom prst="roundRect">
             <a:avLst>
-              <a:gd name="adj" fmla="val 7143"/>
+              <a:gd name="adj" fmla="val 7968"/>
             </a:avLst>
           </a:prstGeom>
           <a:solidFill>
@@ -14488,7 +14704,7 @@
         </p:nvSpPr>
         <p:spPr>
           <a:xfrm>
-            <a:off x="7799832" y="2935224"/>
+            <a:off x="7799832" y="2816352"/>
             <a:ext cx="3145536" cy="256032"/>
           </a:xfrm>
           <a:prstGeom prst="rect">
@@ -14527,8 +14743,8 @@
         </p:nvSpPr>
         <p:spPr>
           <a:xfrm>
-            <a:off x="7818120" y="3300984"/>
-            <a:ext cx="3090672" cy="877824"/>
+            <a:off x="7818120" y="3182112"/>
+            <a:ext cx="3090672" cy="718718"/>
           </a:xfrm>
           <a:prstGeom prst="rect">
             <a:avLst/>
@@ -14602,12 +14818,12 @@
         </p:nvSpPr>
         <p:spPr>
           <a:xfrm>
-            <a:off x="7635240" y="4498848"/>
-            <a:ext cx="3474720" cy="1143000"/>
+            <a:off x="7635240" y="4184294"/>
+            <a:ext cx="3474720" cy="1466698"/>
           </a:xfrm>
           <a:prstGeom prst="roundRect">
             <a:avLst>
-              <a:gd name="adj" fmla="val 9600"/>
+              <a:gd name="adj" fmla="val 7481"/>
             </a:avLst>
           </a:prstGeom>
           <a:solidFill>
@@ -14629,7 +14845,7 @@
         </p:nvSpPr>
         <p:spPr>
           <a:xfrm>
-            <a:off x="7799832" y="4645152"/>
+            <a:off x="7799832" y="4330598"/>
             <a:ext cx="3145536" cy="256032"/>
           </a:xfrm>
           <a:prstGeom prst="rect">
@@ -14668,8 +14884,8 @@
         </p:nvSpPr>
         <p:spPr>
           <a:xfrm>
-            <a:off x="7799832" y="4974336"/>
-            <a:ext cx="3145536" cy="576072"/>
+            <a:off x="7799832" y="4659782"/>
+            <a:ext cx="3145536" cy="899770"/>
           </a:xfrm>
           <a:prstGeom prst="rect">
             <a:avLst/>
@@ -14695,7 +14911,7 @@
                 <a:ea typeface="Aptos" pitchFamily="34" charset="-122"/>
                 <a:cs typeface="Aptos" pitchFamily="34" charset="-120"/>
               </a:rPr>
-              <a:t>Use the assignment to test whether you can explain the concept, apply it to a realistic public health situation, and.</a:t>
+              <a:t>Use the assignment to test whether you can explain the concept, apply it to a realistic public health situation, and identify what would need review before the work moves forward.</a:t>
             </a:r>
             <a:endParaRPr lang="en-US" sz="1320" dirty="0"/>
           </a:p>
@@ -15064,11 +15280,11 @@
         <p:spPr>
           <a:xfrm>
             <a:off x="7635240" y="1325880"/>
-            <a:ext cx="3474720" cy="1325880"/>
+            <a:ext cx="3474720" cy="1255471"/>
           </a:xfrm>
           <a:prstGeom prst="roundRect">
             <a:avLst>
-              <a:gd name="adj" fmla="val 8276"/>
+              <a:gd name="adj" fmla="val 8740"/>
             </a:avLst>
           </a:prstGeom>
           <a:solidFill>
@@ -15130,7 +15346,7 @@
         <p:spPr>
           <a:xfrm>
             <a:off x="7799832" y="1801368"/>
-            <a:ext cx="3145536" cy="758952"/>
+            <a:ext cx="3145536" cy="688543"/>
           </a:xfrm>
           <a:prstGeom prst="rect">
             <a:avLst/>
@@ -15170,12 +15386,12 @@
         </p:nvSpPr>
         <p:spPr>
           <a:xfrm>
-            <a:off x="7635240" y="2788920"/>
-            <a:ext cx="3474720" cy="1536192"/>
+            <a:off x="7635240" y="2718511"/>
+            <a:ext cx="3474720" cy="1328623"/>
           </a:xfrm>
           <a:prstGeom prst="roundRect">
             <a:avLst>
-              <a:gd name="adj" fmla="val 7143"/>
+              <a:gd name="adj" fmla="val 8259"/>
             </a:avLst>
           </a:prstGeom>
           <a:solidFill>
@@ -15197,8 +15413,8 @@
         </p:nvSpPr>
         <p:spPr>
           <a:xfrm>
-            <a:off x="7799832" y="2935224"/>
-            <a:ext cx="3145536" cy="256032"/>
+            <a:off x="7799832" y="2846527"/>
+            <a:ext cx="3145536" cy="237744"/>
           </a:xfrm>
           <a:prstGeom prst="rect">
             <a:avLst/>
@@ -15214,7 +15430,7 @@
               <a:buNone/>
             </a:pPr>
             <a:r>
-              <a:rPr lang="en-US" sz="1300" b="1" dirty="0">
+              <a:rPr lang="en-US" sz="1250" b="1" dirty="0">
                 <a:solidFill>
                   <a:srgbClr val="0068B7"/>
                 </a:solidFill>
@@ -15222,101 +15438,317 @@
                 <a:ea typeface="Aptos" pitchFamily="34" charset="-122"/>
                 <a:cs typeface="Aptos" pitchFamily="34" charset="-120"/>
               </a:rPr>
-              <a:t>Concept checkpoints</a:t>
-            </a:r>
-            <a:endParaRPr lang="en-US" sz="1300" dirty="0"/>
-          </a:p>
-        </p:txBody>
-      </p:sp>
-      <p:sp>
-        <p:nvSpPr>
-          <p:cNvPr id="15" name="Text 13"/>
-          <p:cNvSpPr/>
-          <p:nvPr/>
-        </p:nvSpPr>
-        <p:spPr>
-          <a:xfrm>
-            <a:off x="7818120" y="3300984"/>
-            <a:ext cx="3090672" cy="877824"/>
-          </a:xfrm>
-          <a:prstGeom prst="rect">
-            <a:avLst/>
-          </a:prstGeom>
-          <a:noFill/>
-          <a:ln/>
-        </p:spPr>
-        <p:txBody>
-          <a:bodyPr wrap="square" lIns="508" tIns="508" rIns="508" bIns="508" rtlCol="0" anchor="t">
+              <a:t>Data-to-decision flow</a:t>
+            </a:r>
+            <a:endParaRPr lang="en-US" sz="1250" dirty="0"/>
+          </a:p>
+        </p:txBody>
+      </p:sp>
+      <p:sp>
+        <p:nvSpPr>
+          <p:cNvPr id="15" name="Shape 13"/>
+          <p:cNvSpPr/>
+          <p:nvPr/>
+        </p:nvSpPr>
+        <p:spPr>
+          <a:xfrm>
+            <a:off x="8763000" y="3399739"/>
+            <a:ext cx="164592" cy="0"/>
+          </a:xfrm>
+          <a:prstGeom prst="line">
+            <a:avLst/>
+          </a:prstGeom>
+          <a:noFill/>
+          <a:ln w="15240">
+            <a:solidFill>
+              <a:srgbClr val="8ABBD8"/>
+            </a:solidFill>
+            <a:prstDash val="solid"/>
+          </a:ln>
+        </p:spPr>
+      </p:sp>
+      <p:sp>
+        <p:nvSpPr>
+          <p:cNvPr id="16" name="Shape 14"/>
+          <p:cNvSpPr/>
+          <p:nvPr/>
+        </p:nvSpPr>
+        <p:spPr>
+          <a:xfrm>
+            <a:off x="7872984" y="3248863"/>
+            <a:ext cx="890016" cy="301752"/>
+          </a:xfrm>
+          <a:prstGeom prst="roundRect">
+            <a:avLst>
+              <a:gd name="adj" fmla="val 24242"/>
+            </a:avLst>
+          </a:prstGeom>
+          <a:solidFill>
+            <a:srgbClr val="0068B7"/>
+          </a:solidFill>
+          <a:ln w="12700">
+            <a:solidFill>
+              <a:srgbClr val="0068B7"/>
+            </a:solidFill>
+            <a:prstDash val="solid"/>
+          </a:ln>
+        </p:spPr>
+      </p:sp>
+      <p:sp>
+        <p:nvSpPr>
+          <p:cNvPr id="17" name="Text 15"/>
+          <p:cNvSpPr/>
+          <p:nvPr/>
+        </p:nvSpPr>
+        <p:spPr>
+          <a:xfrm>
+            <a:off x="7909560" y="3322015"/>
+            <a:ext cx="816864" cy="146304"/>
+          </a:xfrm>
+          <a:prstGeom prst="rect">
+            <a:avLst/>
+          </a:prstGeom>
+          <a:noFill/>
+          <a:ln/>
+        </p:spPr>
+        <p:txBody>
+          <a:bodyPr wrap="square" lIns="0" tIns="0" rIns="0" bIns="0" rtlCol="0" anchor="ctr">
             <a:normAutofit/>
           </a:bodyPr>
           <a:lstStyle/>
           <a:p>
-            <a:pPr indent="0" marL="0">
-              <a:buNone/>
-            </a:pPr>
-            <a:r>
-              <a:rPr lang="en-US" sz="1220" dirty="0">
-                <a:solidFill>
-                  <a:srgbClr val="17364A"/>
-                </a:solidFill>
-                <a:latin typeface="Aptos" pitchFamily="34" charset="0"/>
-                <a:ea typeface="Aptos" pitchFamily="34" charset="-122"/>
-                <a:cs typeface="Aptos" pitchFamily="34" charset="-120"/>
-              </a:rPr>
-              <a:t>Data pipelines are the operational pathways that move public.</a:t>
-            </a:r>
-            <a:endParaRPr lang="en-US" sz="1220" dirty="0"/>
-          </a:p>
-          <a:p>
-            <a:pPr indent="0" marL="0">
-              <a:buNone/>
-            </a:pPr>
-            <a:r>
-              <a:rPr lang="en-US" sz="1220" dirty="0">
-                <a:solidFill>
-                  <a:srgbClr val="17364A"/>
-                </a:solidFill>
-                <a:latin typeface="Aptos" pitchFamily="34" charset="0"/>
-                <a:ea typeface="Aptos" pitchFamily="34" charset="-122"/>
-                <a:cs typeface="Aptos" pitchFamily="34" charset="-120"/>
-              </a:rPr>
-              <a:t>A model that classifies cases, summarizes laboratory reports, or.</a:t>
-            </a:r>
-            <a:endParaRPr lang="en-US" sz="1220" dirty="0"/>
-          </a:p>
-          <a:p>
-            <a:pPr indent="0" marL="0">
-              <a:buNone/>
-            </a:pPr>
-            <a:r>
-              <a:rPr lang="en-US" sz="1220" dirty="0">
-                <a:solidFill>
-                  <a:srgbClr val="17364A"/>
-                </a:solidFill>
-                <a:latin typeface="Aptos" pitchFamily="34" charset="0"/>
-                <a:ea typeface="Aptos" pitchFamily="34" charset="-122"/>
-                <a:cs typeface="Aptos" pitchFamily="34" charset="-120"/>
-              </a:rPr>
-              <a:t>This module helps learners understand the pipeline steps that.</a:t>
-            </a:r>
-            <a:endParaRPr lang="en-US" sz="1220" dirty="0"/>
-          </a:p>
-        </p:txBody>
-      </p:sp>
-      <p:sp>
-        <p:nvSpPr>
-          <p:cNvPr id="16" name="Shape 14"/>
-          <p:cNvSpPr/>
-          <p:nvPr/>
-        </p:nvSpPr>
-        <p:spPr>
-          <a:xfrm>
-            <a:off x="7635240" y="4498848"/>
-            <a:ext cx="3474720" cy="1143000"/>
+            <a:pPr algn="ctr" indent="0" marL="0">
+              <a:buNone/>
+            </a:pPr>
+            <a:r>
+              <a:rPr lang="en-US" sz="880" b="1" dirty="0">
+                <a:solidFill>
+                  <a:srgbClr val="FFFFFF"/>
+                </a:solidFill>
+                <a:latin typeface="Aptos" pitchFamily="34" charset="0"/>
+                <a:ea typeface="Aptos" pitchFamily="34" charset="-122"/>
+                <a:cs typeface="Aptos" pitchFamily="34" charset="-120"/>
+              </a:rPr>
+              <a:t>Data</a:t>
+            </a:r>
+            <a:endParaRPr lang="en-US" sz="880" dirty="0"/>
+          </a:p>
+        </p:txBody>
+      </p:sp>
+      <p:sp>
+        <p:nvSpPr>
+          <p:cNvPr id="18" name="Shape 16"/>
+          <p:cNvSpPr/>
+          <p:nvPr/>
+        </p:nvSpPr>
+        <p:spPr>
+          <a:xfrm>
+            <a:off x="9817608" y="3399739"/>
+            <a:ext cx="164592" cy="0"/>
+          </a:xfrm>
+          <a:prstGeom prst="line">
+            <a:avLst/>
+          </a:prstGeom>
+          <a:noFill/>
+          <a:ln w="15240">
+            <a:solidFill>
+              <a:srgbClr val="8ABBD8"/>
+            </a:solidFill>
+            <a:prstDash val="solid"/>
+          </a:ln>
+        </p:spPr>
+      </p:sp>
+      <p:sp>
+        <p:nvSpPr>
+          <p:cNvPr id="19" name="Shape 17"/>
+          <p:cNvSpPr/>
+          <p:nvPr/>
+        </p:nvSpPr>
+        <p:spPr>
+          <a:xfrm>
+            <a:off x="8927592" y="3248863"/>
+            <a:ext cx="890016" cy="301752"/>
           </a:xfrm>
           <a:prstGeom prst="roundRect">
             <a:avLst>
-              <a:gd name="adj" fmla="val 9600"/>
+              <a:gd name="adj" fmla="val 24242"/>
+            </a:avLst>
+          </a:prstGeom>
+          <a:solidFill>
+            <a:srgbClr val="2F8A28"/>
+          </a:solidFill>
+          <a:ln w="12700">
+            <a:solidFill>
+              <a:srgbClr val="2F8A28"/>
+            </a:solidFill>
+            <a:prstDash val="solid"/>
+          </a:ln>
+        </p:spPr>
+      </p:sp>
+      <p:sp>
+        <p:nvSpPr>
+          <p:cNvPr id="20" name="Text 18"/>
+          <p:cNvSpPr/>
+          <p:nvPr/>
+        </p:nvSpPr>
+        <p:spPr>
+          <a:xfrm>
+            <a:off x="8964168" y="3322015"/>
+            <a:ext cx="816864" cy="146304"/>
+          </a:xfrm>
+          <a:prstGeom prst="rect">
+            <a:avLst/>
+          </a:prstGeom>
+          <a:noFill/>
+          <a:ln/>
+        </p:spPr>
+        <p:txBody>
+          <a:bodyPr wrap="square" lIns="0" tIns="0" rIns="0" bIns="0" rtlCol="0" anchor="ctr">
+            <a:normAutofit/>
+          </a:bodyPr>
+          <a:lstStyle/>
+          <a:p>
+            <a:pPr algn="ctr" indent="0" marL="0">
+              <a:buNone/>
+            </a:pPr>
+            <a:r>
+              <a:rPr lang="en-US" sz="880" b="1" dirty="0">
+                <a:solidFill>
+                  <a:srgbClr val="FFFFFF"/>
+                </a:solidFill>
+                <a:latin typeface="Aptos" pitchFamily="34" charset="0"/>
+                <a:ea typeface="Aptos" pitchFamily="34" charset="-122"/>
+                <a:cs typeface="Aptos" pitchFamily="34" charset="-120"/>
+              </a:rPr>
+              <a:t>Analysis</a:t>
+            </a:r>
+            <a:endParaRPr lang="en-US" sz="880" dirty="0"/>
+          </a:p>
+        </p:txBody>
+      </p:sp>
+      <p:sp>
+        <p:nvSpPr>
+          <p:cNvPr id="21" name="Shape 19"/>
+          <p:cNvSpPr/>
+          <p:nvPr/>
+        </p:nvSpPr>
+        <p:spPr>
+          <a:xfrm>
+            <a:off x="9982200" y="3248863"/>
+            <a:ext cx="890016" cy="301752"/>
+          </a:xfrm>
+          <a:prstGeom prst="roundRect">
+            <a:avLst>
+              <a:gd name="adj" fmla="val 24242"/>
+            </a:avLst>
+          </a:prstGeom>
+          <a:solidFill>
+            <a:srgbClr val="6A4CA3"/>
+          </a:solidFill>
+          <a:ln w="12700">
+            <a:solidFill>
+              <a:srgbClr val="6A4CA3"/>
+            </a:solidFill>
+            <a:prstDash val="solid"/>
+          </a:ln>
+        </p:spPr>
+      </p:sp>
+      <p:sp>
+        <p:nvSpPr>
+          <p:cNvPr id="22" name="Text 20"/>
+          <p:cNvSpPr/>
+          <p:nvPr/>
+        </p:nvSpPr>
+        <p:spPr>
+          <a:xfrm>
+            <a:off x="10018776" y="3322015"/>
+            <a:ext cx="816864" cy="146304"/>
+          </a:xfrm>
+          <a:prstGeom prst="rect">
+            <a:avLst/>
+          </a:prstGeom>
+          <a:noFill/>
+          <a:ln/>
+        </p:spPr>
+        <p:txBody>
+          <a:bodyPr wrap="square" lIns="0" tIns="0" rIns="0" bIns="0" rtlCol="0" anchor="ctr">
+            <a:normAutofit/>
+          </a:bodyPr>
+          <a:lstStyle/>
+          <a:p>
+            <a:pPr algn="ctr" indent="0" marL="0">
+              <a:buNone/>
+            </a:pPr>
+            <a:r>
+              <a:rPr lang="en-US" sz="880" b="1" dirty="0">
+                <a:solidFill>
+                  <a:srgbClr val="FFFFFF"/>
+                </a:solidFill>
+                <a:latin typeface="Aptos" pitchFamily="34" charset="0"/>
+                <a:ea typeface="Aptos" pitchFamily="34" charset="-122"/>
+                <a:cs typeface="Aptos" pitchFamily="34" charset="-120"/>
+              </a:rPr>
+              <a:t>Review</a:t>
+            </a:r>
+            <a:endParaRPr lang="en-US" sz="880" dirty="0"/>
+          </a:p>
+        </p:txBody>
+      </p:sp>
+      <p:sp>
+        <p:nvSpPr>
+          <p:cNvPr id="23" name="Text 21"/>
+          <p:cNvSpPr/>
+          <p:nvPr/>
+        </p:nvSpPr>
+        <p:spPr>
+          <a:xfrm>
+            <a:off x="7854696" y="3742639"/>
+            <a:ext cx="3035808" cy="158191"/>
+          </a:xfrm>
+          <a:prstGeom prst="rect">
+            <a:avLst/>
+          </a:prstGeom>
+          <a:noFill/>
+          <a:ln/>
+        </p:spPr>
+        <p:txBody>
+          <a:bodyPr wrap="square" lIns="254" tIns="254" rIns="254" bIns="254" rtlCol="0" anchor="t">
+            <a:normAutofit/>
+          </a:bodyPr>
+          <a:lstStyle/>
+          <a:p>
+            <a:pPr indent="0" marL="0">
+              <a:buNone/>
+            </a:pPr>
+            <a:r>
+              <a:rPr lang="en-US" sz="1120" dirty="0">
+                <a:solidFill>
+                  <a:srgbClr val="17364A"/>
+                </a:solidFill>
+                <a:latin typeface="Aptos" pitchFamily="34" charset="0"/>
+                <a:ea typeface="Aptos" pitchFamily="34" charset="-122"/>
+                <a:cs typeface="Aptos" pitchFamily="34" charset="-120"/>
+              </a:rPr>
+              <a:t>The important handoff is not from data to AI; it is from analysis to accountable human review.</a:t>
+            </a:r>
+            <a:endParaRPr lang="en-US" sz="1120" dirty="0"/>
+          </a:p>
+        </p:txBody>
+      </p:sp>
+      <p:sp>
+        <p:nvSpPr>
+          <p:cNvPr id="24" name="Shape 22"/>
+          <p:cNvSpPr/>
+          <p:nvPr/>
+        </p:nvSpPr>
+        <p:spPr>
+          <a:xfrm>
+            <a:off x="7635240" y="4184294"/>
+            <a:ext cx="3474720" cy="1466698"/>
+          </a:xfrm>
+          <a:prstGeom prst="roundRect">
+            <a:avLst>
+              <a:gd name="adj" fmla="val 7481"/>
             </a:avLst>
           </a:prstGeom>
           <a:solidFill>
@@ -15332,13 +15764,13 @@
       </p:sp>
       <p:sp>
         <p:nvSpPr>
-          <p:cNvPr id="17" name="Text 15"/>
-          <p:cNvSpPr/>
-          <p:nvPr/>
-        </p:nvSpPr>
-        <p:spPr>
-          <a:xfrm>
-            <a:off x="7799832" y="4645152"/>
+          <p:cNvPr id="25" name="Text 23"/>
+          <p:cNvSpPr/>
+          <p:nvPr/>
+        </p:nvSpPr>
+        <p:spPr>
+          <a:xfrm>
+            <a:off x="7799832" y="4330598"/>
             <a:ext cx="3145536" cy="256032"/>
           </a:xfrm>
           <a:prstGeom prst="rect">
@@ -15371,14 +15803,14 @@
       </p:sp>
       <p:sp>
         <p:nvSpPr>
-          <p:cNvPr id="18" name="Text 16"/>
-          <p:cNvSpPr/>
-          <p:nvPr/>
-        </p:nvSpPr>
-        <p:spPr>
-          <a:xfrm>
-            <a:off x="7799832" y="4974336"/>
-            <a:ext cx="3145536" cy="576072"/>
+          <p:cNvPr id="26" name="Text 24"/>
+          <p:cNvSpPr/>
+          <p:nvPr/>
+        </p:nvSpPr>
+        <p:spPr>
+          <a:xfrm>
+            <a:off x="7799832" y="4659782"/>
+            <a:ext cx="3145536" cy="899770"/>
           </a:xfrm>
           <a:prstGeom prst="rect">
             <a:avLst/>
@@ -15404,7 +15836,7 @@
                 <a:ea typeface="Aptos" pitchFamily="34" charset="-122"/>
                 <a:cs typeface="Aptos" pitchFamily="34" charset="-120"/>
               </a:rPr>
-              <a:t>Connect the concept to data quality, model performance, validation evidence, monitoring measures, and decisions that.</a:t>
+              <a:t>Connect the concept to data quality, model performance, validation evidence, monitoring measures, and decisions that remain under human control.</a:t>
             </a:r>
             <a:endParaRPr lang="en-US" sz="1320" dirty="0"/>
           </a:p>
@@ -15773,11 +16205,11 @@
         <p:spPr>
           <a:xfrm>
             <a:off x="7635240" y="1325880"/>
-            <a:ext cx="3474720" cy="1325880"/>
+            <a:ext cx="3474720" cy="1255471"/>
           </a:xfrm>
           <a:prstGeom prst="roundRect">
             <a:avLst>
-              <a:gd name="adj" fmla="val 8276"/>
+              <a:gd name="adj" fmla="val 8740"/>
             </a:avLst>
           </a:prstGeom>
           <a:solidFill>
@@ -15839,7 +16271,7 @@
         <p:spPr>
           <a:xfrm>
             <a:off x="7799832" y="1801368"/>
-            <a:ext cx="3145536" cy="758952"/>
+            <a:ext cx="3145536" cy="688543"/>
           </a:xfrm>
           <a:prstGeom prst="rect">
             <a:avLst/>
@@ -15879,12 +16311,12 @@
         </p:nvSpPr>
         <p:spPr>
           <a:xfrm>
-            <a:off x="7635240" y="2788920"/>
-            <a:ext cx="3474720" cy="1536192"/>
+            <a:off x="7635240" y="2718511"/>
+            <a:ext cx="3474720" cy="1328623"/>
           </a:xfrm>
           <a:prstGeom prst="roundRect">
             <a:avLst>
-              <a:gd name="adj" fmla="val 7143"/>
+              <a:gd name="adj" fmla="val 8259"/>
             </a:avLst>
           </a:prstGeom>
           <a:solidFill>
@@ -15906,8 +16338,8 @@
         </p:nvSpPr>
         <p:spPr>
           <a:xfrm>
-            <a:off x="7799832" y="2935224"/>
-            <a:ext cx="3145536" cy="256032"/>
+            <a:off x="7799832" y="2846527"/>
+            <a:ext cx="3145536" cy="237744"/>
           </a:xfrm>
           <a:prstGeom prst="rect">
             <a:avLst/>
@@ -15923,7 +16355,7 @@
               <a:buNone/>
             </a:pPr>
             <a:r>
-              <a:rPr lang="en-US" sz="1300" b="1" dirty="0">
+              <a:rPr lang="en-US" sz="1250" b="1" dirty="0">
                 <a:solidFill>
                   <a:srgbClr val="0068B7"/>
                 </a:solidFill>
@@ -15931,101 +16363,317 @@
                 <a:ea typeface="Aptos" pitchFamily="34" charset="-122"/>
                 <a:cs typeface="Aptos" pitchFamily="34" charset="-120"/>
               </a:rPr>
-              <a:t>Concept checkpoints</a:t>
-            </a:r>
-            <a:endParaRPr lang="en-US" sz="1300" dirty="0"/>
-          </a:p>
-        </p:txBody>
-      </p:sp>
-      <p:sp>
-        <p:nvSpPr>
-          <p:cNvPr id="15" name="Text 13"/>
-          <p:cNvSpPr/>
-          <p:nvPr/>
-        </p:nvSpPr>
-        <p:spPr>
-          <a:xfrm>
-            <a:off x="7818120" y="3300984"/>
-            <a:ext cx="3090672" cy="877824"/>
-          </a:xfrm>
-          <a:prstGeom prst="rect">
-            <a:avLst/>
-          </a:prstGeom>
-          <a:noFill/>
-          <a:ln/>
-        </p:spPr>
-        <p:txBody>
-          <a:bodyPr wrap="square" lIns="508" tIns="508" rIns="508" bIns="508" rtlCol="0" anchor="t">
+              <a:t>Data-to-decision flow</a:t>
+            </a:r>
+            <a:endParaRPr lang="en-US" sz="1250" dirty="0"/>
+          </a:p>
+        </p:txBody>
+      </p:sp>
+      <p:sp>
+        <p:nvSpPr>
+          <p:cNvPr id="15" name="Shape 13"/>
+          <p:cNvSpPr/>
+          <p:nvPr/>
+        </p:nvSpPr>
+        <p:spPr>
+          <a:xfrm>
+            <a:off x="8763000" y="3399739"/>
+            <a:ext cx="164592" cy="0"/>
+          </a:xfrm>
+          <a:prstGeom prst="line">
+            <a:avLst/>
+          </a:prstGeom>
+          <a:noFill/>
+          <a:ln w="15240">
+            <a:solidFill>
+              <a:srgbClr val="8ABBD8"/>
+            </a:solidFill>
+            <a:prstDash val="solid"/>
+          </a:ln>
+        </p:spPr>
+      </p:sp>
+      <p:sp>
+        <p:nvSpPr>
+          <p:cNvPr id="16" name="Shape 14"/>
+          <p:cNvSpPr/>
+          <p:nvPr/>
+        </p:nvSpPr>
+        <p:spPr>
+          <a:xfrm>
+            <a:off x="7872984" y="3248863"/>
+            <a:ext cx="890016" cy="301752"/>
+          </a:xfrm>
+          <a:prstGeom prst="roundRect">
+            <a:avLst>
+              <a:gd name="adj" fmla="val 24242"/>
+            </a:avLst>
+          </a:prstGeom>
+          <a:solidFill>
+            <a:srgbClr val="0068B7"/>
+          </a:solidFill>
+          <a:ln w="12700">
+            <a:solidFill>
+              <a:srgbClr val="0068B7"/>
+            </a:solidFill>
+            <a:prstDash val="solid"/>
+          </a:ln>
+        </p:spPr>
+      </p:sp>
+      <p:sp>
+        <p:nvSpPr>
+          <p:cNvPr id="17" name="Text 15"/>
+          <p:cNvSpPr/>
+          <p:nvPr/>
+        </p:nvSpPr>
+        <p:spPr>
+          <a:xfrm>
+            <a:off x="7909560" y="3322015"/>
+            <a:ext cx="816864" cy="146304"/>
+          </a:xfrm>
+          <a:prstGeom prst="rect">
+            <a:avLst/>
+          </a:prstGeom>
+          <a:noFill/>
+          <a:ln/>
+        </p:spPr>
+        <p:txBody>
+          <a:bodyPr wrap="square" lIns="0" tIns="0" rIns="0" bIns="0" rtlCol="0" anchor="ctr">
             <a:normAutofit/>
           </a:bodyPr>
           <a:lstStyle/>
           <a:p>
-            <a:pPr indent="0" marL="0">
-              <a:buNone/>
-            </a:pPr>
-            <a:r>
-              <a:rPr lang="en-US" sz="1220" dirty="0">
-                <a:solidFill>
-                  <a:srgbClr val="17364A"/>
-                </a:solidFill>
-                <a:latin typeface="Aptos" pitchFamily="34" charset="0"/>
-                <a:ea typeface="Aptos" pitchFamily="34" charset="-122"/>
-                <a:cs typeface="Aptos" pitchFamily="34" charset="-120"/>
-              </a:rPr>
-              <a:t>A delayed file, changed field name, failed interface, missing.</a:t>
-            </a:r>
-            <a:endParaRPr lang="en-US" sz="1220" dirty="0"/>
-          </a:p>
-          <a:p>
-            <a:pPr indent="0" marL="0">
-              <a:buNone/>
-            </a:pPr>
-            <a:r>
-              <a:rPr lang="en-US" sz="1220" dirty="0">
-                <a:solidFill>
-                  <a:srgbClr val="17364A"/>
-                </a:solidFill>
-                <a:latin typeface="Aptos" pitchFamily="34" charset="0"/>
-                <a:ea typeface="Aptos" pitchFamily="34" charset="-122"/>
-                <a:cs typeface="Aptos" pitchFamily="34" charset="-120"/>
-              </a:rPr>
-              <a:t>The AI tool may continue generating fluent summaries or confident.</a:t>
-            </a:r>
-            <a:endParaRPr lang="en-US" sz="1220" dirty="0"/>
-          </a:p>
-          <a:p>
-            <a:pPr indent="0" marL="0">
-              <a:buNone/>
-            </a:pPr>
-            <a:r>
-              <a:rPr lang="en-US" sz="1220" dirty="0">
-                <a:solidFill>
-                  <a:srgbClr val="17364A"/>
-                </a:solidFill>
-                <a:latin typeface="Aptos" pitchFamily="34" charset="0"/>
-                <a:ea typeface="Aptos" pitchFamily="34" charset="-122"/>
-                <a:cs typeface="Aptos" pitchFamily="34" charset="-120"/>
-              </a:rPr>
-              <a:t>Public health agencies need pipeline visibility before they rely.</a:t>
-            </a:r>
-            <a:endParaRPr lang="en-US" sz="1220" dirty="0"/>
-          </a:p>
-        </p:txBody>
-      </p:sp>
-      <p:sp>
-        <p:nvSpPr>
-          <p:cNvPr id="16" name="Shape 14"/>
-          <p:cNvSpPr/>
-          <p:nvPr/>
-        </p:nvSpPr>
-        <p:spPr>
-          <a:xfrm>
-            <a:off x="7635240" y="4498848"/>
-            <a:ext cx="3474720" cy="1143000"/>
+            <a:pPr algn="ctr" indent="0" marL="0">
+              <a:buNone/>
+            </a:pPr>
+            <a:r>
+              <a:rPr lang="en-US" sz="880" b="1" dirty="0">
+                <a:solidFill>
+                  <a:srgbClr val="FFFFFF"/>
+                </a:solidFill>
+                <a:latin typeface="Aptos" pitchFamily="34" charset="0"/>
+                <a:ea typeface="Aptos" pitchFamily="34" charset="-122"/>
+                <a:cs typeface="Aptos" pitchFamily="34" charset="-120"/>
+              </a:rPr>
+              <a:t>Data</a:t>
+            </a:r>
+            <a:endParaRPr lang="en-US" sz="880" dirty="0"/>
+          </a:p>
+        </p:txBody>
+      </p:sp>
+      <p:sp>
+        <p:nvSpPr>
+          <p:cNvPr id="18" name="Shape 16"/>
+          <p:cNvSpPr/>
+          <p:nvPr/>
+        </p:nvSpPr>
+        <p:spPr>
+          <a:xfrm>
+            <a:off x="9817608" y="3399739"/>
+            <a:ext cx="164592" cy="0"/>
+          </a:xfrm>
+          <a:prstGeom prst="line">
+            <a:avLst/>
+          </a:prstGeom>
+          <a:noFill/>
+          <a:ln w="15240">
+            <a:solidFill>
+              <a:srgbClr val="8ABBD8"/>
+            </a:solidFill>
+            <a:prstDash val="solid"/>
+          </a:ln>
+        </p:spPr>
+      </p:sp>
+      <p:sp>
+        <p:nvSpPr>
+          <p:cNvPr id="19" name="Shape 17"/>
+          <p:cNvSpPr/>
+          <p:nvPr/>
+        </p:nvSpPr>
+        <p:spPr>
+          <a:xfrm>
+            <a:off x="8927592" y="3248863"/>
+            <a:ext cx="890016" cy="301752"/>
           </a:xfrm>
           <a:prstGeom prst="roundRect">
             <a:avLst>
-              <a:gd name="adj" fmla="val 9600"/>
+              <a:gd name="adj" fmla="val 24242"/>
+            </a:avLst>
+          </a:prstGeom>
+          <a:solidFill>
+            <a:srgbClr val="2F8A28"/>
+          </a:solidFill>
+          <a:ln w="12700">
+            <a:solidFill>
+              <a:srgbClr val="2F8A28"/>
+            </a:solidFill>
+            <a:prstDash val="solid"/>
+          </a:ln>
+        </p:spPr>
+      </p:sp>
+      <p:sp>
+        <p:nvSpPr>
+          <p:cNvPr id="20" name="Text 18"/>
+          <p:cNvSpPr/>
+          <p:nvPr/>
+        </p:nvSpPr>
+        <p:spPr>
+          <a:xfrm>
+            <a:off x="8964168" y="3322015"/>
+            <a:ext cx="816864" cy="146304"/>
+          </a:xfrm>
+          <a:prstGeom prst="rect">
+            <a:avLst/>
+          </a:prstGeom>
+          <a:noFill/>
+          <a:ln/>
+        </p:spPr>
+        <p:txBody>
+          <a:bodyPr wrap="square" lIns="0" tIns="0" rIns="0" bIns="0" rtlCol="0" anchor="ctr">
+            <a:normAutofit/>
+          </a:bodyPr>
+          <a:lstStyle/>
+          <a:p>
+            <a:pPr algn="ctr" indent="0" marL="0">
+              <a:buNone/>
+            </a:pPr>
+            <a:r>
+              <a:rPr lang="en-US" sz="880" b="1" dirty="0">
+                <a:solidFill>
+                  <a:srgbClr val="FFFFFF"/>
+                </a:solidFill>
+                <a:latin typeface="Aptos" pitchFamily="34" charset="0"/>
+                <a:ea typeface="Aptos" pitchFamily="34" charset="-122"/>
+                <a:cs typeface="Aptos" pitchFamily="34" charset="-120"/>
+              </a:rPr>
+              <a:t>Analysis</a:t>
+            </a:r>
+            <a:endParaRPr lang="en-US" sz="880" dirty="0"/>
+          </a:p>
+        </p:txBody>
+      </p:sp>
+      <p:sp>
+        <p:nvSpPr>
+          <p:cNvPr id="21" name="Shape 19"/>
+          <p:cNvSpPr/>
+          <p:nvPr/>
+        </p:nvSpPr>
+        <p:spPr>
+          <a:xfrm>
+            <a:off x="9982200" y="3248863"/>
+            <a:ext cx="890016" cy="301752"/>
+          </a:xfrm>
+          <a:prstGeom prst="roundRect">
+            <a:avLst>
+              <a:gd name="adj" fmla="val 24242"/>
+            </a:avLst>
+          </a:prstGeom>
+          <a:solidFill>
+            <a:srgbClr val="6A4CA3"/>
+          </a:solidFill>
+          <a:ln w="12700">
+            <a:solidFill>
+              <a:srgbClr val="6A4CA3"/>
+            </a:solidFill>
+            <a:prstDash val="solid"/>
+          </a:ln>
+        </p:spPr>
+      </p:sp>
+      <p:sp>
+        <p:nvSpPr>
+          <p:cNvPr id="22" name="Text 20"/>
+          <p:cNvSpPr/>
+          <p:nvPr/>
+        </p:nvSpPr>
+        <p:spPr>
+          <a:xfrm>
+            <a:off x="10018776" y="3322015"/>
+            <a:ext cx="816864" cy="146304"/>
+          </a:xfrm>
+          <a:prstGeom prst="rect">
+            <a:avLst/>
+          </a:prstGeom>
+          <a:noFill/>
+          <a:ln/>
+        </p:spPr>
+        <p:txBody>
+          <a:bodyPr wrap="square" lIns="0" tIns="0" rIns="0" bIns="0" rtlCol="0" anchor="ctr">
+            <a:normAutofit/>
+          </a:bodyPr>
+          <a:lstStyle/>
+          <a:p>
+            <a:pPr algn="ctr" indent="0" marL="0">
+              <a:buNone/>
+            </a:pPr>
+            <a:r>
+              <a:rPr lang="en-US" sz="880" b="1" dirty="0">
+                <a:solidFill>
+                  <a:srgbClr val="FFFFFF"/>
+                </a:solidFill>
+                <a:latin typeface="Aptos" pitchFamily="34" charset="0"/>
+                <a:ea typeface="Aptos" pitchFamily="34" charset="-122"/>
+                <a:cs typeface="Aptos" pitchFamily="34" charset="-120"/>
+              </a:rPr>
+              <a:t>Review</a:t>
+            </a:r>
+            <a:endParaRPr lang="en-US" sz="880" dirty="0"/>
+          </a:p>
+        </p:txBody>
+      </p:sp>
+      <p:sp>
+        <p:nvSpPr>
+          <p:cNvPr id="23" name="Text 21"/>
+          <p:cNvSpPr/>
+          <p:nvPr/>
+        </p:nvSpPr>
+        <p:spPr>
+          <a:xfrm>
+            <a:off x="7854696" y="3742639"/>
+            <a:ext cx="3035808" cy="158191"/>
+          </a:xfrm>
+          <a:prstGeom prst="rect">
+            <a:avLst/>
+          </a:prstGeom>
+          <a:noFill/>
+          <a:ln/>
+        </p:spPr>
+        <p:txBody>
+          <a:bodyPr wrap="square" lIns="254" tIns="254" rIns="254" bIns="254" rtlCol="0" anchor="t">
+            <a:normAutofit/>
+          </a:bodyPr>
+          <a:lstStyle/>
+          <a:p>
+            <a:pPr indent="0" marL="0">
+              <a:buNone/>
+            </a:pPr>
+            <a:r>
+              <a:rPr lang="en-US" sz="1120" dirty="0">
+                <a:solidFill>
+                  <a:srgbClr val="17364A"/>
+                </a:solidFill>
+                <a:latin typeface="Aptos" pitchFamily="34" charset="0"/>
+                <a:ea typeface="Aptos" pitchFamily="34" charset="-122"/>
+                <a:cs typeface="Aptos" pitchFamily="34" charset="-120"/>
+              </a:rPr>
+              <a:t>The important handoff is not from data to AI; it is from analysis to accountable human review.</a:t>
+            </a:r>
+            <a:endParaRPr lang="en-US" sz="1120" dirty="0"/>
+          </a:p>
+        </p:txBody>
+      </p:sp>
+      <p:sp>
+        <p:nvSpPr>
+          <p:cNvPr id="24" name="Shape 22"/>
+          <p:cNvSpPr/>
+          <p:nvPr/>
+        </p:nvSpPr>
+        <p:spPr>
+          <a:xfrm>
+            <a:off x="7635240" y="4184294"/>
+            <a:ext cx="3474720" cy="1466698"/>
+          </a:xfrm>
+          <a:prstGeom prst="roundRect">
+            <a:avLst>
+              <a:gd name="adj" fmla="val 7481"/>
             </a:avLst>
           </a:prstGeom>
           <a:solidFill>
@@ -16041,13 +16689,13 @@
       </p:sp>
       <p:sp>
         <p:nvSpPr>
-          <p:cNvPr id="17" name="Text 15"/>
-          <p:cNvSpPr/>
-          <p:nvPr/>
-        </p:nvSpPr>
-        <p:spPr>
-          <a:xfrm>
-            <a:off x="7799832" y="4645152"/>
+          <p:cNvPr id="25" name="Text 23"/>
+          <p:cNvSpPr/>
+          <p:nvPr/>
+        </p:nvSpPr>
+        <p:spPr>
+          <a:xfrm>
+            <a:off x="7799832" y="4330598"/>
             <a:ext cx="3145536" cy="256032"/>
           </a:xfrm>
           <a:prstGeom prst="rect">
@@ -16080,14 +16728,14 @@
       </p:sp>
       <p:sp>
         <p:nvSpPr>
-          <p:cNvPr id="18" name="Text 16"/>
-          <p:cNvSpPr/>
-          <p:nvPr/>
-        </p:nvSpPr>
-        <p:spPr>
-          <a:xfrm>
-            <a:off x="7799832" y="4974336"/>
-            <a:ext cx="3145536" cy="576072"/>
+          <p:cNvPr id="26" name="Text 24"/>
+          <p:cNvSpPr/>
+          <p:nvPr/>
+        </p:nvSpPr>
+        <p:spPr>
+          <a:xfrm>
+            <a:off x="7799832" y="4659782"/>
+            <a:ext cx="3145536" cy="899770"/>
           </a:xfrm>
           <a:prstGeom prst="rect">
             <a:avLst/>
@@ -16113,7 +16761,7 @@
                 <a:ea typeface="Aptos" pitchFamily="34" charset="-122"/>
                 <a:cs typeface="Aptos" pitchFamily="34" charset="-120"/>
               </a:rPr>
-              <a:t>Connect the concept to data quality, model performance, validation evidence, monitoring measures, and decisions that.</a:t>
+              <a:t>Connect the concept to data quality, model performance, validation evidence, monitoring measures, and decisions that remain under human control.</a:t>
             </a:r>
             <a:endParaRPr lang="en-US" sz="1320" dirty="0"/>
           </a:p>
@@ -16482,11 +17130,11 @@
         <p:spPr>
           <a:xfrm>
             <a:off x="7635240" y="1325880"/>
-            <a:ext cx="3474720" cy="1325880"/>
+            <a:ext cx="3474720" cy="1207008"/>
           </a:xfrm>
           <a:prstGeom prst="roundRect">
             <a:avLst>
-              <a:gd name="adj" fmla="val 8276"/>
+              <a:gd name="adj" fmla="val 9091"/>
             </a:avLst>
           </a:prstGeom>
           <a:solidFill>
@@ -16548,7 +17196,7 @@
         <p:spPr>
           <a:xfrm>
             <a:off x="7799832" y="1801368"/>
-            <a:ext cx="3145536" cy="758952"/>
+            <a:ext cx="3145536" cy="640080"/>
           </a:xfrm>
           <a:prstGeom prst="rect">
             <a:avLst/>
@@ -16588,12 +17236,12 @@
         </p:nvSpPr>
         <p:spPr>
           <a:xfrm>
-            <a:off x="7635240" y="2788920"/>
-            <a:ext cx="3474720" cy="1536192"/>
+            <a:off x="7635240" y="2670048"/>
+            <a:ext cx="3474720" cy="1377086"/>
           </a:xfrm>
           <a:prstGeom prst="roundRect">
             <a:avLst>
-              <a:gd name="adj" fmla="val 7143"/>
+              <a:gd name="adj" fmla="val 7968"/>
             </a:avLst>
           </a:prstGeom>
           <a:solidFill>
@@ -16615,7 +17263,7 @@
         </p:nvSpPr>
         <p:spPr>
           <a:xfrm>
-            <a:off x="7799832" y="2935224"/>
+            <a:off x="7799832" y="2816352"/>
             <a:ext cx="3145536" cy="256032"/>
           </a:xfrm>
           <a:prstGeom prst="rect">
@@ -16654,8 +17302,8 @@
         </p:nvSpPr>
         <p:spPr>
           <a:xfrm>
-            <a:off x="7818120" y="3300984"/>
-            <a:ext cx="3090672" cy="877824"/>
+            <a:off x="7818120" y="3182112"/>
+            <a:ext cx="3090672" cy="718718"/>
           </a:xfrm>
           <a:prstGeom prst="rect">
             <a:avLst/>
@@ -16729,12 +17377,12 @@
         </p:nvSpPr>
         <p:spPr>
           <a:xfrm>
-            <a:off x="7635240" y="4498848"/>
-            <a:ext cx="3474720" cy="1143000"/>
+            <a:off x="7635240" y="4184294"/>
+            <a:ext cx="3474720" cy="1466698"/>
           </a:xfrm>
           <a:prstGeom prst="roundRect">
             <a:avLst>
-              <a:gd name="adj" fmla="val 9600"/>
+              <a:gd name="adj" fmla="val 7481"/>
             </a:avLst>
           </a:prstGeom>
           <a:solidFill>
@@ -16756,7 +17404,7 @@
         </p:nvSpPr>
         <p:spPr>
           <a:xfrm>
-            <a:off x="7799832" y="4645152"/>
+            <a:off x="7799832" y="4330598"/>
             <a:ext cx="3145536" cy="256032"/>
           </a:xfrm>
           <a:prstGeom prst="rect">
@@ -16795,8 +17443,8 @@
         </p:nvSpPr>
         <p:spPr>
           <a:xfrm>
-            <a:off x="7799832" y="4974336"/>
-            <a:ext cx="3145536" cy="576072"/>
+            <a:off x="7799832" y="4659782"/>
+            <a:ext cx="3145536" cy="899770"/>
           </a:xfrm>
           <a:prstGeom prst="rect">
             <a:avLst/>
@@ -16822,7 +17470,7 @@
                 <a:ea typeface="Aptos" pitchFamily="34" charset="-122"/>
                 <a:cs typeface="Aptos" pitchFamily="34" charset="-120"/>
               </a:rPr>
-              <a:t>Connect the concept to data quality, model performance, validation evidence, monitoring measures, and decisions that.</a:t>
+              <a:t>Connect the concept to data quality, model performance, validation evidence, monitoring measures, and decisions that remain under human control.</a:t>
             </a:r>
             <a:endParaRPr lang="en-US" sz="1320" dirty="0"/>
           </a:p>
@@ -17191,11 +17839,11 @@
         <p:spPr>
           <a:xfrm>
             <a:off x="7635240" y="1325880"/>
-            <a:ext cx="3474720" cy="1325880"/>
+            <a:ext cx="3474720" cy="1207008"/>
           </a:xfrm>
           <a:prstGeom prst="roundRect">
             <a:avLst>
-              <a:gd name="adj" fmla="val 8276"/>
+              <a:gd name="adj" fmla="val 9091"/>
             </a:avLst>
           </a:prstGeom>
           <a:solidFill>
@@ -17257,7 +17905,7 @@
         <p:spPr>
           <a:xfrm>
             <a:off x="7799832" y="1801368"/>
-            <a:ext cx="3145536" cy="758952"/>
+            <a:ext cx="3145536" cy="640080"/>
           </a:xfrm>
           <a:prstGeom prst="rect">
             <a:avLst/>
@@ -17297,12 +17945,12 @@
         </p:nvSpPr>
         <p:spPr>
           <a:xfrm>
-            <a:off x="7635240" y="2788920"/>
-            <a:ext cx="3474720" cy="1536192"/>
+            <a:off x="7635240" y="2670048"/>
+            <a:ext cx="3474720" cy="1377086"/>
           </a:xfrm>
           <a:prstGeom prst="roundRect">
             <a:avLst>
-              <a:gd name="adj" fmla="val 7143"/>
+              <a:gd name="adj" fmla="val 7968"/>
             </a:avLst>
           </a:prstGeom>
           <a:solidFill>
@@ -17324,7 +17972,7 @@
         </p:nvSpPr>
         <p:spPr>
           <a:xfrm>
-            <a:off x="7799832" y="2935224"/>
+            <a:off x="7799832" y="2816352"/>
             <a:ext cx="3145536" cy="256032"/>
           </a:xfrm>
           <a:prstGeom prst="rect">
@@ -17363,8 +18011,8 @@
         </p:nvSpPr>
         <p:spPr>
           <a:xfrm>
-            <a:off x="7818120" y="3300984"/>
-            <a:ext cx="3090672" cy="877824"/>
+            <a:off x="7818120" y="3182112"/>
+            <a:ext cx="3090672" cy="718718"/>
           </a:xfrm>
           <a:prstGeom prst="rect">
             <a:avLst/>
@@ -17438,12 +18086,12 @@
         </p:nvSpPr>
         <p:spPr>
           <a:xfrm>
-            <a:off x="7635240" y="4498848"/>
-            <a:ext cx="3474720" cy="1143000"/>
+            <a:off x="7635240" y="4184294"/>
+            <a:ext cx="3474720" cy="1466698"/>
           </a:xfrm>
           <a:prstGeom prst="roundRect">
             <a:avLst>
-              <a:gd name="adj" fmla="val 9600"/>
+              <a:gd name="adj" fmla="val 7481"/>
             </a:avLst>
           </a:prstGeom>
           <a:solidFill>
@@ -17465,7 +18113,7 @@
         </p:nvSpPr>
         <p:spPr>
           <a:xfrm>
-            <a:off x="7799832" y="4645152"/>
+            <a:off x="7799832" y="4330598"/>
             <a:ext cx="3145536" cy="256032"/>
           </a:xfrm>
           <a:prstGeom prst="rect">
@@ -17504,8 +18152,8 @@
         </p:nvSpPr>
         <p:spPr>
           <a:xfrm>
-            <a:off x="7799832" y="4974336"/>
-            <a:ext cx="3145536" cy="576072"/>
+            <a:off x="7799832" y="4659782"/>
+            <a:ext cx="3145536" cy="899770"/>
           </a:xfrm>
           <a:prstGeom prst="rect">
             <a:avLst/>
@@ -17531,7 +18179,7 @@
                 <a:ea typeface="Aptos" pitchFamily="34" charset="-122"/>
                 <a:cs typeface="Aptos" pitchFamily="34" charset="-120"/>
               </a:rPr>
-              <a:t>Connect the concept to data quality, model performance, validation evidence, monitoring measures, and decisions that.</a:t>
+              <a:t>Connect the concept to data quality, model performance, validation evidence, monitoring measures, and decisions that remain under human control.</a:t>
             </a:r>
             <a:endParaRPr lang="en-US" sz="1320" dirty="0"/>
           </a:p>

--- a/downloads/presentations/modules/arc-210.pptx
+++ b/downloads/presentations/modules/arc-210.pptx
@@ -3341,8 +3341,8 @@
         </p:nvSpPr>
         <p:spPr>
           <a:xfrm>
-            <a:off x="868680" y="1508760"/>
-            <a:ext cx="6309360" cy="4160520"/>
+            <a:off x="822960" y="1463040"/>
+            <a:ext cx="6565392" cy="4343400"/>
           </a:xfrm>
           <a:prstGeom prst="rect">
             <a:avLst/>
@@ -3360,7 +3360,7 @@
               <a:buNone/>
             </a:pPr>
             <a:r>
-              <a:rPr lang="en-US" sz="2100" dirty="0">
+              <a:rPr lang="en-US" sz="1920" dirty="0">
                 <a:solidFill>
                   <a:srgbClr val="003A63"/>
                 </a:solidFill>
@@ -3368,16 +3368,16 @@
                 <a:ea typeface="Aptos" pitchFamily="34" charset="-122"/>
                 <a:cs typeface="Aptos" pitchFamily="34" charset="-120"/>
               </a:rPr>
-              <a:t>• A syndromic surveillance team may use AI to identify unusual emergency department visit.</a:t>
-            </a:r>
-            <a:endParaRPr lang="en-US" sz="2100" dirty="0"/>
-          </a:p>
-          <a:p>
-            <a:pPr indent="0" marL="0">
-              <a:buNone/>
-            </a:pPr>
-            <a:r>
-              <a:rPr lang="en-US" sz="2100" dirty="0">
+              <a:t>• A syndromic surveillance team may use AI to identify unusual emergency.</a:t>
+            </a:r>
+            <a:endParaRPr lang="en-US" sz="1920" dirty="0"/>
+          </a:p>
+          <a:p>
+            <a:pPr indent="0" marL="0">
+              <a:buNone/>
+            </a:pPr>
+            <a:r>
+              <a:rPr lang="en-US" sz="1920" dirty="0">
                 <a:solidFill>
                   <a:srgbClr val="003A63"/>
                 </a:solidFill>
@@ -3385,16 +3385,16 @@
                 <a:ea typeface="Aptos" pitchFamily="34" charset="-122"/>
                 <a:cs typeface="Aptos" pitchFamily="34" charset="-120"/>
               </a:rPr>
-              <a:t>• The model depends on timely data feeds from hospitals, correct parsing of chief complaint text,.</a:t>
-            </a:r>
-            <a:endParaRPr lang="en-US" sz="2100" dirty="0"/>
-          </a:p>
-          <a:p>
-            <a:pPr indent="0" marL="0">
-              <a:buNone/>
-            </a:pPr>
-            <a:r>
-              <a:rPr lang="en-US" sz="2100" dirty="0">
+              <a:t>• The model depends on timely data feeds from hospitals, correct parsing of.</a:t>
+            </a:r>
+            <a:endParaRPr lang="en-US" sz="1920" dirty="0"/>
+          </a:p>
+          <a:p>
+            <a:pPr indent="0" marL="0">
+              <a:buNone/>
+            </a:pPr>
+            <a:r>
+              <a:rPr lang="en-US" sz="1920" dirty="0">
                 <a:solidFill>
                   <a:srgbClr val="003A63"/>
                 </a:solidFill>
@@ -3402,9 +3402,9 @@
                 <a:ea typeface="Aptos" pitchFamily="34" charset="-122"/>
                 <a:cs typeface="Aptos" pitchFamily="34" charset="-120"/>
               </a:rPr>
-              <a:t>• If one large hospital feed stops or a field changes after an EHR upgrade, the AI tool may miss.</a:t>
-            </a:r>
-            <a:endParaRPr lang="en-US" sz="2100" dirty="0"/>
+              <a:t>• If one large hospital feed stops or a field changes after an EHR upgrade,.</a:t>
+            </a:r>
+            <a:endParaRPr lang="en-US" sz="1920" dirty="0"/>
           </a:p>
         </p:txBody>
       </p:sp>
@@ -3416,12 +3416,12 @@
         </p:nvSpPr>
         <p:spPr>
           <a:xfrm>
-            <a:off x="7635240" y="1325880"/>
-            <a:ext cx="3474720" cy="1255471"/>
+            <a:off x="7543800" y="1325880"/>
+            <a:ext cx="3611880" cy="1261872"/>
           </a:xfrm>
           <a:prstGeom prst="roundRect">
             <a:avLst>
-              <a:gd name="adj" fmla="val 8740"/>
+              <a:gd name="adj" fmla="val 8696"/>
             </a:avLst>
           </a:prstGeom>
           <a:solidFill>
@@ -3443,8 +3443,8 @@
         </p:nvSpPr>
         <p:spPr>
           <a:xfrm>
-            <a:off x="7799832" y="1472184"/>
-            <a:ext cx="3145536" cy="256032"/>
+            <a:off x="7708392" y="1453896"/>
+            <a:ext cx="3282696" cy="228600"/>
           </a:xfrm>
           <a:prstGeom prst="rect">
             <a:avLst/>
@@ -3460,7 +3460,7 @@
               <a:buNone/>
             </a:pPr>
             <a:r>
-              <a:rPr lang="en-US" sz="1300" b="1" dirty="0">
+              <a:rPr lang="en-US" sz="1220" b="1" dirty="0">
                 <a:solidFill>
                   <a:srgbClr val="0068B7"/>
                 </a:solidFill>
@@ -3470,7 +3470,7 @@
               </a:rPr>
               <a:t>Data decision</a:t>
             </a:r>
-            <a:endParaRPr lang="en-US" sz="1300" dirty="0"/>
+            <a:endParaRPr lang="en-US" sz="1220" dirty="0"/>
           </a:p>
         </p:txBody>
       </p:sp>
@@ -3482,8 +3482,8 @@
         </p:nvSpPr>
         <p:spPr>
           <a:xfrm>
-            <a:off x="7799832" y="1801368"/>
-            <a:ext cx="3145536" cy="688543"/>
+            <a:off x="7708392" y="1764792"/>
+            <a:ext cx="3282696" cy="749808"/>
           </a:xfrm>
           <a:prstGeom prst="rect">
             <a:avLst/>
@@ -3501,7 +3501,7 @@
               <a:buNone/>
             </a:pPr>
             <a:r>
-              <a:rPr lang="en-US" sz="1320" dirty="0">
+              <a:rPr lang="en-US" sz="1220" dirty="0">
                 <a:solidFill>
                   <a:srgbClr val="17364A"/>
                 </a:solidFill>
@@ -3509,9 +3509,9 @@
                 <a:ea typeface="Aptos" pitchFamily="34" charset="-122"/>
                 <a:cs typeface="Aptos" pitchFamily="34" charset="-120"/>
               </a:rPr>
-              <a:t>A syndromic surveillance team may use AI to identify unusual emergency department visit patterns.</a:t>
-            </a:r>
-            <a:endParaRPr lang="en-US" sz="1320" dirty="0"/>
+              <a:t>A syndromic surveillance team may use AI to identify unusual emergency.</a:t>
+            </a:r>
+            <a:endParaRPr lang="en-US" sz="1220" dirty="0"/>
           </a:p>
         </p:txBody>
       </p:sp>
@@ -3523,12 +3523,12 @@
         </p:nvSpPr>
         <p:spPr>
           <a:xfrm>
-            <a:off x="7635240" y="2718511"/>
-            <a:ext cx="3474720" cy="1328623"/>
+            <a:off x="7543800" y="2724912"/>
+            <a:ext cx="3611880" cy="1527048"/>
           </a:xfrm>
           <a:prstGeom prst="roundRect">
             <a:avLst>
-              <a:gd name="adj" fmla="val 8259"/>
+              <a:gd name="adj" fmla="val 7186"/>
             </a:avLst>
           </a:prstGeom>
           <a:solidFill>
@@ -3550,8 +3550,8 @@
         </p:nvSpPr>
         <p:spPr>
           <a:xfrm>
-            <a:off x="7799832" y="2864815"/>
-            <a:ext cx="3145536" cy="256032"/>
+            <a:off x="7708392" y="2852928"/>
+            <a:ext cx="3282696" cy="228600"/>
           </a:xfrm>
           <a:prstGeom prst="rect">
             <a:avLst/>
@@ -3567,7 +3567,7 @@
               <a:buNone/>
             </a:pPr>
             <a:r>
-              <a:rPr lang="en-US" sz="1300" b="1" dirty="0">
+              <a:rPr lang="en-US" sz="1220" b="1" dirty="0">
                 <a:solidFill>
                   <a:srgbClr val="0068B7"/>
                 </a:solidFill>
@@ -3577,7 +3577,7 @@
               </a:rPr>
               <a:t>Concept checkpoints</a:t>
             </a:r>
-            <a:endParaRPr lang="en-US" sz="1300" dirty="0"/>
+            <a:endParaRPr lang="en-US" sz="1220" dirty="0"/>
           </a:p>
         </p:txBody>
       </p:sp>
@@ -3589,8 +3589,8 @@
         </p:nvSpPr>
         <p:spPr>
           <a:xfrm>
-            <a:off x="7818120" y="3230575"/>
-            <a:ext cx="3090672" cy="670255"/>
+            <a:off x="7726680" y="3182112"/>
+            <a:ext cx="3227832" cy="960120"/>
           </a:xfrm>
           <a:prstGeom prst="rect">
             <a:avLst/>
@@ -3608,7 +3608,7 @@
               <a:buNone/>
             </a:pPr>
             <a:r>
-              <a:rPr lang="en-US" sz="1220" dirty="0">
+              <a:rPr lang="en-US" sz="1140" dirty="0">
                 <a:solidFill>
                   <a:srgbClr val="17364A"/>
                 </a:solidFill>
@@ -3616,16 +3616,16 @@
                 <a:ea typeface="Aptos" pitchFamily="34" charset="-122"/>
                 <a:cs typeface="Aptos" pitchFamily="34" charset="-120"/>
               </a:rPr>
-              <a:t>The model depends on timely data feeds from hospitals, correct.</a:t>
-            </a:r>
-            <a:endParaRPr lang="en-US" sz="1220" dirty="0"/>
-          </a:p>
-          <a:p>
-            <a:pPr indent="0" marL="0">
-              <a:buNone/>
-            </a:pPr>
-            <a:r>
-              <a:rPr lang="en-US" sz="1220" dirty="0">
+              <a:t>The model depends on timely data feeds from.</a:t>
+            </a:r>
+            <a:endParaRPr lang="en-US" sz="1140" dirty="0"/>
+          </a:p>
+          <a:p>
+            <a:pPr indent="0" marL="0">
+              <a:buNone/>
+            </a:pPr>
+            <a:r>
+              <a:rPr lang="en-US" sz="1140" dirty="0">
                 <a:solidFill>
                   <a:srgbClr val="17364A"/>
                 </a:solidFill>
@@ -3633,16 +3633,16 @@
                 <a:ea typeface="Aptos" pitchFamily="34" charset="-122"/>
                 <a:cs typeface="Aptos" pitchFamily="34" charset="-120"/>
               </a:rPr>
-              <a:t>If one large hospital feed stops or a field changes after an EHR.</a:t>
-            </a:r>
-            <a:endParaRPr lang="en-US" sz="1220" dirty="0"/>
-          </a:p>
-          <a:p>
-            <a:pPr indent="0" marL="0">
-              <a:buNone/>
-            </a:pPr>
-            <a:r>
-              <a:rPr lang="en-US" sz="1220" dirty="0">
+              <a:t>If one large hospital feed stops or a field.</a:t>
+            </a:r>
+            <a:endParaRPr lang="en-US" sz="1140" dirty="0"/>
+          </a:p>
+          <a:p>
+            <a:pPr indent="0" marL="0">
+              <a:buNone/>
+            </a:pPr>
+            <a:r>
+              <a:rPr lang="en-US" sz="1140" dirty="0">
                 <a:solidFill>
                   <a:srgbClr val="17364A"/>
                 </a:solidFill>
@@ -3650,9 +3650,9 @@
                 <a:ea typeface="Aptos" pitchFamily="34" charset="-122"/>
                 <a:cs typeface="Aptos" pitchFamily="34" charset="-120"/>
               </a:rPr>
-              <a:t>Pipeline monitoring is therefore part of outbreak detection.</a:t>
-            </a:r>
-            <a:endParaRPr lang="en-US" sz="1220" dirty="0"/>
+              <a:t>Pipeline monitoring is therefore part of outbreak.</a:t>
+            </a:r>
+            <a:endParaRPr lang="en-US" sz="1140" dirty="0"/>
           </a:p>
         </p:txBody>
       </p:sp>
@@ -3664,12 +3664,12 @@
         </p:nvSpPr>
         <p:spPr>
           <a:xfrm>
-            <a:off x="7635240" y="4184294"/>
-            <a:ext cx="3474720" cy="1466698"/>
+            <a:off x="7543800" y="4389120"/>
+            <a:ext cx="3611880" cy="1261872"/>
           </a:xfrm>
           <a:prstGeom prst="roundRect">
             <a:avLst>
-              <a:gd name="adj" fmla="val 7481"/>
+              <a:gd name="adj" fmla="val 8696"/>
             </a:avLst>
           </a:prstGeom>
           <a:solidFill>
@@ -3691,8 +3691,8 @@
         </p:nvSpPr>
         <p:spPr>
           <a:xfrm>
-            <a:off x="7799832" y="4330598"/>
-            <a:ext cx="3145536" cy="256032"/>
+            <a:off x="7708392" y="4517136"/>
+            <a:ext cx="3282696" cy="228600"/>
           </a:xfrm>
           <a:prstGeom prst="rect">
             <a:avLst/>
@@ -3708,7 +3708,7 @@
               <a:buNone/>
             </a:pPr>
             <a:r>
-              <a:rPr lang="en-US" sz="1300" b="1" dirty="0">
+              <a:rPr lang="en-US" sz="1220" b="1" dirty="0">
                 <a:solidFill>
                   <a:srgbClr val="0068B7"/>
                 </a:solidFill>
@@ -3718,7 +3718,7 @@
               </a:rPr>
               <a:t>How to validate</a:t>
             </a:r>
-            <a:endParaRPr lang="en-US" sz="1300" dirty="0"/>
+            <a:endParaRPr lang="en-US" sz="1220" dirty="0"/>
           </a:p>
         </p:txBody>
       </p:sp>
@@ -3730,8 +3730,8 @@
         </p:nvSpPr>
         <p:spPr>
           <a:xfrm>
-            <a:off x="7799832" y="4659782"/>
-            <a:ext cx="3145536" cy="899770"/>
+            <a:off x="7708392" y="4828032"/>
+            <a:ext cx="3282696" cy="749808"/>
           </a:xfrm>
           <a:prstGeom prst="rect">
             <a:avLst/>
@@ -3749,7 +3749,7 @@
               <a:buNone/>
             </a:pPr>
             <a:r>
-              <a:rPr lang="en-US" sz="1320" dirty="0">
+              <a:rPr lang="en-US" sz="1220" dirty="0">
                 <a:solidFill>
                   <a:srgbClr val="17364A"/>
                 </a:solidFill>
@@ -3757,9 +3757,9 @@
                 <a:ea typeface="Aptos" pitchFamily="34" charset="-122"/>
                 <a:cs typeface="Aptos" pitchFamily="34" charset="-120"/>
               </a:rPr>
-              <a:t>Connect the concept to data quality, model performance, validation evidence, monitoring measures, and decisions that remain under human control.</a:t>
-            </a:r>
-            <a:endParaRPr lang="en-US" sz="1320" dirty="0"/>
+              <a:t>Connect the concept to data quality, model performance, validation evidence,.</a:t>
+            </a:r>
+            <a:endParaRPr lang="en-US" sz="1220" dirty="0"/>
           </a:p>
         </p:txBody>
       </p:sp>
@@ -4050,8 +4050,8 @@
         </p:nvSpPr>
         <p:spPr>
           <a:xfrm>
-            <a:off x="868680" y="1508760"/>
-            <a:ext cx="6309360" cy="4160520"/>
+            <a:off x="822960" y="1463040"/>
+            <a:ext cx="6565392" cy="4343400"/>
           </a:xfrm>
           <a:prstGeom prst="rect">
             <a:avLst/>
@@ -4069,7 +4069,7 @@
               <a:buNone/>
             </a:pPr>
             <a:r>
-              <a:rPr lang="en-US" sz="2100" dirty="0">
+              <a:rPr lang="en-US" sz="1920" dirty="0">
                 <a:solidFill>
                   <a:srgbClr val="003A63"/>
                 </a:solidFill>
@@ -4077,16 +4077,16 @@
                 <a:ea typeface="Aptos" pitchFamily="34" charset="-122"/>
                 <a:cs typeface="Aptos" pitchFamily="34" charset="-120"/>
               </a:rPr>
-              <a:t>• Pipeline design begins with the source and ends with the user-facing decision or output.</a:t>
-            </a:r>
-            <a:endParaRPr lang="en-US" sz="2100" dirty="0"/>
-          </a:p>
-          <a:p>
-            <a:pPr indent="0" marL="0">
-              <a:buNone/>
-            </a:pPr>
-            <a:r>
-              <a:rPr lang="en-US" sz="2100" dirty="0">
+              <a:t>• Pipeline design begins with the source and ends with the user-facing.</a:t>
+            </a:r>
+            <a:endParaRPr lang="en-US" sz="1920" dirty="0"/>
+          </a:p>
+          <a:p>
+            <a:pPr indent="0" marL="0">
+              <a:buNone/>
+            </a:pPr>
+            <a:r>
+              <a:rPr lang="en-US" sz="1920" dirty="0">
                 <a:solidFill>
                   <a:srgbClr val="003A63"/>
                 </a:solidFill>
@@ -4094,16 +4094,16 @@
                 <a:ea typeface="Aptos" pitchFamily="34" charset="-122"/>
                 <a:cs typeface="Aptos" pitchFamily="34" charset="-120"/>
               </a:rPr>
-              <a:t>• In between, data may be received, staged, validated, transformed, standardized, linked, loaded,.</a:t>
-            </a:r>
-            <a:endParaRPr lang="en-US" sz="2100" dirty="0"/>
-          </a:p>
-          <a:p>
-            <a:pPr indent="0" marL="0">
-              <a:buNone/>
-            </a:pPr>
-            <a:r>
-              <a:rPr lang="en-US" sz="2100" dirty="0">
+              <a:t>• In between, data may be received, staged, validated, transformed,.</a:t>
+            </a:r>
+            <a:endParaRPr lang="en-US" sz="1920" dirty="0"/>
+          </a:p>
+          <a:p>
+            <a:pPr indent="0" marL="0">
+              <a:buNone/>
+            </a:pPr>
+            <a:r>
+              <a:rPr lang="en-US" sz="1920" dirty="0">
                 <a:solidFill>
                   <a:srgbClr val="003A63"/>
                 </a:solidFill>
@@ -4111,9 +4111,9 @@
                 <a:ea typeface="Aptos" pitchFamily="34" charset="-122"/>
                 <a:cs typeface="Aptos" pitchFamily="34" charset="-120"/>
               </a:rPr>
-              <a:t>• Each step should have an owner, a purpose, a quality check, and a documented failure process.</a:t>
-            </a:r>
-            <a:endParaRPr lang="en-US" sz="2100" dirty="0"/>
+              <a:t>• Each step should have an owner, a purpose, a quality check, and a documented.</a:t>
+            </a:r>
+            <a:endParaRPr lang="en-US" sz="1920" dirty="0"/>
           </a:p>
         </p:txBody>
       </p:sp>
@@ -4125,12 +4125,12 @@
         </p:nvSpPr>
         <p:spPr>
           <a:xfrm>
-            <a:off x="7635240" y="1325880"/>
-            <a:ext cx="3474720" cy="1207008"/>
+            <a:off x="7543800" y="1325880"/>
+            <a:ext cx="3611880" cy="1261872"/>
           </a:xfrm>
           <a:prstGeom prst="roundRect">
             <a:avLst>
-              <a:gd name="adj" fmla="val 9091"/>
+              <a:gd name="adj" fmla="val 8696"/>
             </a:avLst>
           </a:prstGeom>
           <a:solidFill>
@@ -4152,8 +4152,8 @@
         </p:nvSpPr>
         <p:spPr>
           <a:xfrm>
-            <a:off x="7799832" y="1472184"/>
-            <a:ext cx="3145536" cy="256032"/>
+            <a:off x="7708392" y="1453896"/>
+            <a:ext cx="3282696" cy="228600"/>
           </a:xfrm>
           <a:prstGeom prst="rect">
             <a:avLst/>
@@ -4169,7 +4169,7 @@
               <a:buNone/>
             </a:pPr>
             <a:r>
-              <a:rPr lang="en-US" sz="1300" b="1" dirty="0">
+              <a:rPr lang="en-US" sz="1220" b="1" dirty="0">
                 <a:solidFill>
                   <a:srgbClr val="0068B7"/>
                 </a:solidFill>
@@ -4179,7 +4179,7 @@
               </a:rPr>
               <a:t>Data decision</a:t>
             </a:r>
-            <a:endParaRPr lang="en-US" sz="1300" dirty="0"/>
+            <a:endParaRPr lang="en-US" sz="1220" dirty="0"/>
           </a:p>
         </p:txBody>
       </p:sp>
@@ -4191,8 +4191,8 @@
         </p:nvSpPr>
         <p:spPr>
           <a:xfrm>
-            <a:off x="7799832" y="1801368"/>
-            <a:ext cx="3145536" cy="640080"/>
+            <a:off x="7708392" y="1764792"/>
+            <a:ext cx="3282696" cy="749808"/>
           </a:xfrm>
           <a:prstGeom prst="rect">
             <a:avLst/>
@@ -4210,7 +4210,7 @@
               <a:buNone/>
             </a:pPr>
             <a:r>
-              <a:rPr lang="en-US" sz="1320" dirty="0">
+              <a:rPr lang="en-US" sz="1220" dirty="0">
                 <a:solidFill>
                   <a:srgbClr val="17364A"/>
                 </a:solidFill>
@@ -4218,9 +4218,9 @@
                 <a:ea typeface="Aptos" pitchFamily="34" charset="-122"/>
                 <a:cs typeface="Aptos" pitchFamily="34" charset="-120"/>
               </a:rPr>
-              <a:t>Pipeline design begins with the source and ends with the user-facing decision or output.</a:t>
-            </a:r>
-            <a:endParaRPr lang="en-US" sz="1320" dirty="0"/>
+              <a:t>Pipeline design begins with the source and ends with the user-facing decision or.</a:t>
+            </a:r>
+            <a:endParaRPr lang="en-US" sz="1220" dirty="0"/>
           </a:p>
         </p:txBody>
       </p:sp>
@@ -4232,12 +4232,12 @@
         </p:nvSpPr>
         <p:spPr>
           <a:xfrm>
-            <a:off x="7635240" y="2670048"/>
-            <a:ext cx="3474720" cy="1377086"/>
+            <a:off x="7543800" y="2724912"/>
+            <a:ext cx="3611880" cy="1527048"/>
           </a:xfrm>
           <a:prstGeom prst="roundRect">
             <a:avLst>
-              <a:gd name="adj" fmla="val 7968"/>
+              <a:gd name="adj" fmla="val 7186"/>
             </a:avLst>
           </a:prstGeom>
           <a:solidFill>
@@ -4259,24 +4259,26 @@
         </p:nvSpPr>
         <p:spPr>
           <a:xfrm>
-            <a:off x="7799832" y="2798064"/>
-            <a:ext cx="3145536" cy="237744"/>
-          </a:xfrm>
-          <a:prstGeom prst="rect">
-            <a:avLst/>
-          </a:prstGeom>
-          <a:noFill/>
-          <a:ln/>
-        </p:spPr>
-        <p:txBody>
-          <a:bodyPr wrap="square" lIns="0" tIns="0" rIns="0" bIns="0" rtlCol="0" anchor="ctr"/>
-          <a:lstStyle/>
-          <a:p>
-            <a:pPr indent="0" marL="0">
-              <a:buNone/>
-            </a:pPr>
-            <a:r>
-              <a:rPr lang="en-US" sz="1250" b="1" dirty="0">
+            <a:off x="7708392" y="2852928"/>
+            <a:ext cx="3282696" cy="219456"/>
+          </a:xfrm>
+          <a:prstGeom prst="rect">
+            <a:avLst/>
+          </a:prstGeom>
+          <a:noFill/>
+          <a:ln/>
+        </p:spPr>
+        <p:txBody>
+          <a:bodyPr wrap="square" lIns="0" tIns="0" rIns="0" bIns="0" rtlCol="0" anchor="ctr">
+            <a:normAutofit/>
+          </a:bodyPr>
+          <a:lstStyle/>
+          <a:p>
+            <a:pPr indent="0" marL="0">
+              <a:buNone/>
+            </a:pPr>
+            <a:r>
+              <a:rPr lang="en-US" sz="1160" b="1" dirty="0">
                 <a:solidFill>
                   <a:srgbClr val="0068B7"/>
                 </a:solidFill>
@@ -4286,7 +4288,7 @@
               </a:rPr>
               <a:t>Data-to-decision flow</a:t>
             </a:r>
-            <a:endParaRPr lang="en-US" sz="1250" dirty="0"/>
+            <a:endParaRPr lang="en-US" sz="1160" dirty="0"/>
           </a:p>
         </p:txBody>
       </p:sp>
@@ -4298,7 +4300,7 @@
         </p:nvSpPr>
         <p:spPr>
           <a:xfrm>
-            <a:off x="8763000" y="3351276"/>
+            <a:off x="8717280" y="3406140"/>
             <a:ext cx="164592" cy="0"/>
           </a:xfrm>
           <a:prstGeom prst="line">
@@ -4321,8 +4323,8 @@
         </p:nvSpPr>
         <p:spPr>
           <a:xfrm>
-            <a:off x="7872984" y="3200400"/>
-            <a:ext cx="890016" cy="301752"/>
+            <a:off x="7781544" y="3255264"/>
+            <a:ext cx="935736" cy="301752"/>
           </a:xfrm>
           <a:prstGeom prst="roundRect">
             <a:avLst>
@@ -4348,8 +4350,8 @@
         </p:nvSpPr>
         <p:spPr>
           <a:xfrm>
-            <a:off x="7909560" y="3273552"/>
-            <a:ext cx="816864" cy="146304"/>
+            <a:off x="7818120" y="3328416"/>
+            <a:ext cx="862584" cy="146304"/>
           </a:xfrm>
           <a:prstGeom prst="rect">
             <a:avLst/>
@@ -4389,7 +4391,7 @@
         </p:nvSpPr>
         <p:spPr>
           <a:xfrm>
-            <a:off x="9817608" y="3351276"/>
+            <a:off x="9817608" y="3406140"/>
             <a:ext cx="164592" cy="0"/>
           </a:xfrm>
           <a:prstGeom prst="line">
@@ -4412,8 +4414,8 @@
         </p:nvSpPr>
         <p:spPr>
           <a:xfrm>
-            <a:off x="8927592" y="3200400"/>
-            <a:ext cx="890016" cy="301752"/>
+            <a:off x="8881872" y="3255264"/>
+            <a:ext cx="935736" cy="301752"/>
           </a:xfrm>
           <a:prstGeom prst="roundRect">
             <a:avLst>
@@ -4439,8 +4441,8 @@
         </p:nvSpPr>
         <p:spPr>
           <a:xfrm>
-            <a:off x="8964168" y="3273552"/>
-            <a:ext cx="816864" cy="146304"/>
+            <a:off x="8918448" y="3328416"/>
+            <a:ext cx="862584" cy="146304"/>
           </a:xfrm>
           <a:prstGeom prst="rect">
             <a:avLst/>
@@ -4480,8 +4482,8 @@
         </p:nvSpPr>
         <p:spPr>
           <a:xfrm>
-            <a:off x="9982200" y="3200400"/>
-            <a:ext cx="890016" cy="301752"/>
+            <a:off x="9982200" y="3255264"/>
+            <a:ext cx="935736" cy="301752"/>
           </a:xfrm>
           <a:prstGeom prst="roundRect">
             <a:avLst>
@@ -4507,8 +4509,8 @@
         </p:nvSpPr>
         <p:spPr>
           <a:xfrm>
-            <a:off x="10018776" y="3273552"/>
-            <a:ext cx="816864" cy="146304"/>
+            <a:off x="10018776" y="3328416"/>
+            <a:ext cx="862584" cy="146304"/>
           </a:xfrm>
           <a:prstGeom prst="rect">
             <a:avLst/>
@@ -4548,8 +4550,8 @@
         </p:nvSpPr>
         <p:spPr>
           <a:xfrm>
-            <a:off x="7854696" y="3694176"/>
-            <a:ext cx="3035808" cy="206654"/>
+            <a:off x="7763256" y="3749040"/>
+            <a:ext cx="3172968" cy="356616"/>
           </a:xfrm>
           <a:prstGeom prst="rect">
             <a:avLst/>
@@ -4567,7 +4569,7 @@
               <a:buNone/>
             </a:pPr>
             <a:r>
-              <a:rPr lang="en-US" sz="1120" dirty="0">
+              <a:rPr lang="en-US" sz="1040" dirty="0">
                 <a:solidFill>
                   <a:srgbClr val="17364A"/>
                 </a:solidFill>
@@ -4575,9 +4577,9 @@
                 <a:ea typeface="Aptos" pitchFamily="34" charset="-122"/>
                 <a:cs typeface="Aptos" pitchFamily="34" charset="-120"/>
               </a:rPr>
-              <a:t>The important handoff is not from data to AI; it is from analysis to accountable human review.</a:t>
-            </a:r>
-            <a:endParaRPr lang="en-US" sz="1120" dirty="0"/>
+              <a:t>The important handoff is not from data to AI; it is from analysis to.</a:t>
+            </a:r>
+            <a:endParaRPr lang="en-US" sz="1040" dirty="0"/>
           </a:p>
         </p:txBody>
       </p:sp>
@@ -4589,12 +4591,12 @@
         </p:nvSpPr>
         <p:spPr>
           <a:xfrm>
-            <a:off x="7635240" y="4184294"/>
-            <a:ext cx="3474720" cy="1466698"/>
+            <a:off x="7543800" y="4389120"/>
+            <a:ext cx="3611880" cy="1261872"/>
           </a:xfrm>
           <a:prstGeom prst="roundRect">
             <a:avLst>
-              <a:gd name="adj" fmla="val 7481"/>
+              <a:gd name="adj" fmla="val 8696"/>
             </a:avLst>
           </a:prstGeom>
           <a:solidFill>
@@ -4616,8 +4618,8 @@
         </p:nvSpPr>
         <p:spPr>
           <a:xfrm>
-            <a:off x="7799832" y="4330598"/>
-            <a:ext cx="3145536" cy="256032"/>
+            <a:off x="7708392" y="4517136"/>
+            <a:ext cx="3282696" cy="228600"/>
           </a:xfrm>
           <a:prstGeom prst="rect">
             <a:avLst/>
@@ -4633,7 +4635,7 @@
               <a:buNone/>
             </a:pPr>
             <a:r>
-              <a:rPr lang="en-US" sz="1300" b="1" dirty="0">
+              <a:rPr lang="en-US" sz="1220" b="1" dirty="0">
                 <a:solidFill>
                   <a:srgbClr val="0068B7"/>
                 </a:solidFill>
@@ -4643,7 +4645,7 @@
               </a:rPr>
               <a:t>How to validate</a:t>
             </a:r>
-            <a:endParaRPr lang="en-US" sz="1300" dirty="0"/>
+            <a:endParaRPr lang="en-US" sz="1220" dirty="0"/>
           </a:p>
         </p:txBody>
       </p:sp>
@@ -4655,8 +4657,8 @@
         </p:nvSpPr>
         <p:spPr>
           <a:xfrm>
-            <a:off x="7799832" y="4659782"/>
-            <a:ext cx="3145536" cy="899770"/>
+            <a:off x="7708392" y="4828032"/>
+            <a:ext cx="3282696" cy="749808"/>
           </a:xfrm>
           <a:prstGeom prst="rect">
             <a:avLst/>
@@ -4674,7 +4676,7 @@
               <a:buNone/>
             </a:pPr>
             <a:r>
-              <a:rPr lang="en-US" sz="1320" dirty="0">
+              <a:rPr lang="en-US" sz="1220" dirty="0">
                 <a:solidFill>
                   <a:srgbClr val="17364A"/>
                 </a:solidFill>
@@ -4682,9 +4684,9 @@
                 <a:ea typeface="Aptos" pitchFamily="34" charset="-122"/>
                 <a:cs typeface="Aptos" pitchFamily="34" charset="-120"/>
               </a:rPr>
-              <a:t>Connect the concept to data quality, model performance, validation evidence, monitoring measures, and decisions that remain under human control.</a:t>
-            </a:r>
-            <a:endParaRPr lang="en-US" sz="1320" dirty="0"/>
+              <a:t>Connect the concept to data quality, model performance, validation evidence,.</a:t>
+            </a:r>
+            <a:endParaRPr lang="en-US" sz="1220" dirty="0"/>
           </a:p>
         </p:txBody>
       </p:sp>
@@ -4975,8 +4977,8 @@
         </p:nvSpPr>
         <p:spPr>
           <a:xfrm>
-            <a:off x="868680" y="1508760"/>
-            <a:ext cx="6309360" cy="4160520"/>
+            <a:off x="822960" y="1463040"/>
+            <a:ext cx="6565392" cy="4343400"/>
           </a:xfrm>
           <a:prstGeom prst="rect">
             <a:avLst/>
@@ -4994,7 +4996,7 @@
               <a:buNone/>
             </a:pPr>
             <a:r>
-              <a:rPr lang="en-US" sz="2100" dirty="0">
+              <a:rPr lang="en-US" sz="1920" dirty="0">
                 <a:solidFill>
                   <a:srgbClr val="003A63"/>
                 </a:solidFill>
@@ -5004,14 +5006,14 @@
               </a:rPr>
               <a:t>• Silent feed failure.</a:t>
             </a:r>
-            <a:endParaRPr lang="en-US" sz="2100" dirty="0"/>
-          </a:p>
-          <a:p>
-            <a:pPr indent="0" marL="0">
-              <a:buNone/>
-            </a:pPr>
-            <a:r>
-              <a:rPr lang="en-US" sz="2100" dirty="0">
+            <a:endParaRPr lang="en-US" sz="1920" dirty="0"/>
+          </a:p>
+          <a:p>
+            <a:pPr indent="0" marL="0">
+              <a:buNone/>
+            </a:pPr>
+            <a:r>
+              <a:rPr lang="en-US" sz="1920" dirty="0">
                 <a:solidFill>
                   <a:srgbClr val="003A63"/>
                 </a:solidFill>
@@ -5021,14 +5023,14 @@
               </a:rPr>
               <a:t>• A data feed can stop or change without visible failure in the AI interface.</a:t>
             </a:r>
-            <a:endParaRPr lang="en-US" sz="2100" dirty="0"/>
-          </a:p>
-          <a:p>
-            <a:pPr indent="0" marL="0">
-              <a:buNone/>
-            </a:pPr>
-            <a:r>
-              <a:rPr lang="en-US" sz="2100" dirty="0">
+            <a:endParaRPr lang="en-US" sz="1920" dirty="0"/>
+          </a:p>
+          <a:p>
+            <a:pPr indent="0" marL="0">
+              <a:buNone/>
+            </a:pPr>
+            <a:r>
+              <a:rPr lang="en-US" sz="1920" dirty="0">
                 <a:solidFill>
                   <a:srgbClr val="003A63"/>
                 </a:solidFill>
@@ -5036,9 +5038,9 @@
                 <a:ea typeface="Aptos" pitchFamily="34" charset="-122"/>
                 <a:cs typeface="Aptos" pitchFamily="34" charset="-120"/>
               </a:rPr>
-              <a:t>• Guardrails include automated feed monitoring, expected volume thresholds, error queues, and.</a:t>
-            </a:r>
-            <a:endParaRPr lang="en-US" sz="2100" dirty="0"/>
+              <a:t>• Guardrails include automated feed monitoring, expected volume thresholds,.</a:t>
+            </a:r>
+            <a:endParaRPr lang="en-US" sz="1920" dirty="0"/>
           </a:p>
         </p:txBody>
       </p:sp>
@@ -5050,12 +5052,12 @@
         </p:nvSpPr>
         <p:spPr>
           <a:xfrm>
-            <a:off x="7635240" y="1325880"/>
-            <a:ext cx="3474720" cy="1207008"/>
+            <a:off x="7543800" y="1325880"/>
+            <a:ext cx="3611880" cy="1261872"/>
           </a:xfrm>
           <a:prstGeom prst="roundRect">
             <a:avLst>
-              <a:gd name="adj" fmla="val 9091"/>
+              <a:gd name="adj" fmla="val 8696"/>
             </a:avLst>
           </a:prstGeom>
           <a:solidFill>
@@ -5077,8 +5079,8 @@
         </p:nvSpPr>
         <p:spPr>
           <a:xfrm>
-            <a:off x="7799832" y="1472184"/>
-            <a:ext cx="3145536" cy="256032"/>
+            <a:off x="7708392" y="1453896"/>
+            <a:ext cx="3282696" cy="228600"/>
           </a:xfrm>
           <a:prstGeom prst="rect">
             <a:avLst/>
@@ -5094,7 +5096,7 @@
               <a:buNone/>
             </a:pPr>
             <a:r>
-              <a:rPr lang="en-US" sz="1300" b="1" dirty="0">
+              <a:rPr lang="en-US" sz="1220" b="1" dirty="0">
                 <a:solidFill>
                   <a:srgbClr val="0068B7"/>
                 </a:solidFill>
@@ -5104,7 +5106,7 @@
               </a:rPr>
               <a:t>Risk check</a:t>
             </a:r>
-            <a:endParaRPr lang="en-US" sz="1300" dirty="0"/>
+            <a:endParaRPr lang="en-US" sz="1220" dirty="0"/>
           </a:p>
         </p:txBody>
       </p:sp>
@@ -5116,8 +5118,8 @@
         </p:nvSpPr>
         <p:spPr>
           <a:xfrm>
-            <a:off x="7799832" y="1801368"/>
-            <a:ext cx="3145536" cy="640080"/>
+            <a:off x="7708392" y="1764792"/>
+            <a:ext cx="3282696" cy="749808"/>
           </a:xfrm>
           <a:prstGeom prst="rect">
             <a:avLst/>
@@ -5135,7 +5137,7 @@
               <a:buNone/>
             </a:pPr>
             <a:r>
-              <a:rPr lang="en-US" sz="1320" dirty="0">
+              <a:rPr lang="en-US" sz="1220" dirty="0">
                 <a:solidFill>
                   <a:srgbClr val="17364A"/>
                 </a:solidFill>
@@ -5145,7 +5147,7 @@
               </a:rPr>
               <a:t>Silent feed failure.</a:t>
             </a:r>
-            <a:endParaRPr lang="en-US" sz="1320" dirty="0"/>
+            <a:endParaRPr lang="en-US" sz="1220" dirty="0"/>
           </a:p>
         </p:txBody>
       </p:sp>
@@ -5157,12 +5159,12 @@
         </p:nvSpPr>
         <p:spPr>
           <a:xfrm>
-            <a:off x="7635240" y="2670048"/>
-            <a:ext cx="3474720" cy="1536192"/>
+            <a:off x="7543800" y="2724912"/>
+            <a:ext cx="3611880" cy="1527048"/>
           </a:xfrm>
           <a:prstGeom prst="roundRect">
             <a:avLst>
-              <a:gd name="adj" fmla="val 7143"/>
+              <a:gd name="adj" fmla="val 7186"/>
             </a:avLst>
           </a:prstGeom>
           <a:solidFill>
@@ -5184,8 +5186,8 @@
         </p:nvSpPr>
         <p:spPr>
           <a:xfrm>
-            <a:off x="7799832" y="2816352"/>
-            <a:ext cx="3145536" cy="256032"/>
+            <a:off x="7708392" y="2852928"/>
+            <a:ext cx="3282696" cy="228600"/>
           </a:xfrm>
           <a:prstGeom prst="rect">
             <a:avLst/>
@@ -5201,7 +5203,7 @@
               <a:buNone/>
             </a:pPr>
             <a:r>
-              <a:rPr lang="en-US" sz="1300" b="1" dirty="0">
+              <a:rPr lang="en-US" sz="1220" b="1" dirty="0">
                 <a:solidFill>
                   <a:srgbClr val="0068B7"/>
                 </a:solidFill>
@@ -5211,7 +5213,7 @@
               </a:rPr>
               <a:t>Concept checkpoints</a:t>
             </a:r>
-            <a:endParaRPr lang="en-US" sz="1300" dirty="0"/>
+            <a:endParaRPr lang="en-US" sz="1220" dirty="0"/>
           </a:p>
         </p:txBody>
       </p:sp>
@@ -5223,8 +5225,8 @@
         </p:nvSpPr>
         <p:spPr>
           <a:xfrm>
-            <a:off x="7818120" y="3182112"/>
-            <a:ext cx="3090672" cy="877824"/>
+            <a:off x="7726680" y="3182112"/>
+            <a:ext cx="3227832" cy="960120"/>
           </a:xfrm>
           <a:prstGeom prst="rect">
             <a:avLst/>
@@ -5242,7 +5244,7 @@
               <a:buNone/>
             </a:pPr>
             <a:r>
-              <a:rPr lang="en-US" sz="1220" dirty="0">
+              <a:rPr lang="en-US" sz="1140" dirty="0">
                 <a:solidFill>
                   <a:srgbClr val="17364A"/>
                 </a:solidFill>
@@ -5250,16 +5252,16 @@
                 <a:ea typeface="Aptos" pitchFamily="34" charset="-122"/>
                 <a:cs typeface="Aptos" pitchFamily="34" charset="-120"/>
               </a:rPr>
-              <a:t>Guardrails include automated feed monitoring, expected volume.</a:t>
-            </a:r>
-            <a:endParaRPr lang="en-US" sz="1220" dirty="0"/>
-          </a:p>
-          <a:p>
-            <a:pPr indent="0" marL="0">
-              <a:buNone/>
-            </a:pPr>
-            <a:r>
-              <a:rPr lang="en-US" sz="1220" dirty="0">
+              <a:t>Guardrails include automated feed monitoring,.</a:t>
+            </a:r>
+            <a:endParaRPr lang="en-US" sz="1140" dirty="0"/>
+          </a:p>
+          <a:p>
+            <a:pPr indent="0" marL="0">
+              <a:buNone/>
+            </a:pPr>
+            <a:r>
+              <a:rPr lang="en-US" sz="1140" dirty="0">
                 <a:solidFill>
                   <a:srgbClr val="17364A"/>
                 </a:solidFill>
@@ -5269,14 +5271,14 @@
               </a:rPr>
               <a:t>Schema and terminology changes.</a:t>
             </a:r>
-            <a:endParaRPr lang="en-US" sz="1220" dirty="0"/>
-          </a:p>
-          <a:p>
-            <a:pPr indent="0" marL="0">
-              <a:buNone/>
-            </a:pPr>
-            <a:r>
-              <a:rPr lang="en-US" sz="1220" dirty="0">
+            <a:endParaRPr lang="en-US" sz="1140" dirty="0"/>
+          </a:p>
+          <a:p>
+            <a:pPr indent="0" marL="0">
+              <a:buNone/>
+            </a:pPr>
+            <a:r>
+              <a:rPr lang="en-US" sz="1140" dirty="0">
                 <a:solidFill>
                   <a:srgbClr val="17364A"/>
                 </a:solidFill>
@@ -5284,9 +5286,9 @@
                 <a:ea typeface="Aptos" pitchFamily="34" charset="-122"/>
                 <a:cs typeface="Aptos" pitchFamily="34" charset="-120"/>
               </a:rPr>
-              <a:t>Source systems may change field names, formats, codes, or units.</a:t>
-            </a:r>
-            <a:endParaRPr lang="en-US" sz="1220" dirty="0"/>
+              <a:t>Source systems may change field names, formats,.</a:t>
+            </a:r>
+            <a:endParaRPr lang="en-US" sz="1140" dirty="0"/>
           </a:p>
         </p:txBody>
       </p:sp>
@@ -5298,12 +5300,12 @@
         </p:nvSpPr>
         <p:spPr>
           <a:xfrm>
-            <a:off x="7635240" y="4343400"/>
-            <a:ext cx="3474720" cy="1255471"/>
+            <a:off x="7543800" y="4389120"/>
+            <a:ext cx="3611880" cy="1261872"/>
           </a:xfrm>
           <a:prstGeom prst="roundRect">
             <a:avLst>
-              <a:gd name="adj" fmla="val 8740"/>
+              <a:gd name="adj" fmla="val 8696"/>
             </a:avLst>
           </a:prstGeom>
           <a:solidFill>
@@ -5325,8 +5327,8 @@
         </p:nvSpPr>
         <p:spPr>
           <a:xfrm>
-            <a:off x="7799832" y="4489704"/>
-            <a:ext cx="3145536" cy="256032"/>
+            <a:off x="7708392" y="4517136"/>
+            <a:ext cx="3282696" cy="228600"/>
           </a:xfrm>
           <a:prstGeom prst="rect">
             <a:avLst/>
@@ -5342,7 +5344,7 @@
               <a:buNone/>
             </a:pPr>
             <a:r>
-              <a:rPr lang="en-US" sz="1300" b="1" dirty="0">
+              <a:rPr lang="en-US" sz="1220" b="1" dirty="0">
                 <a:solidFill>
                   <a:srgbClr val="0068B7"/>
                 </a:solidFill>
@@ -5352,7 +5354,7 @@
               </a:rPr>
               <a:t>Safeguard to plan</a:t>
             </a:r>
-            <a:endParaRPr lang="en-US" sz="1300" dirty="0"/>
+            <a:endParaRPr lang="en-US" sz="1220" dirty="0"/>
           </a:p>
         </p:txBody>
       </p:sp>
@@ -5364,8 +5366,8 @@
         </p:nvSpPr>
         <p:spPr>
           <a:xfrm>
-            <a:off x="7799832" y="4818888"/>
-            <a:ext cx="3145536" cy="688543"/>
+            <a:off x="7708392" y="4828032"/>
+            <a:ext cx="3282696" cy="749808"/>
           </a:xfrm>
           <a:prstGeom prst="rect">
             <a:avLst/>
@@ -5383,7 +5385,7 @@
               <a:buNone/>
             </a:pPr>
             <a:r>
-              <a:rPr lang="en-US" sz="1320" dirty="0">
+              <a:rPr lang="en-US" sz="1220" dirty="0">
                 <a:solidFill>
                   <a:srgbClr val="17364A"/>
                 </a:solidFill>
@@ -5391,9 +5393,9 @@
                 <a:ea typeface="Aptos" pitchFamily="34" charset="-122"/>
                 <a:cs typeface="Aptos" pitchFamily="34" charset="-120"/>
               </a:rPr>
-              <a:t>Identify what could go wrong, who could be affected, what safeguards are needed, and what evidence should be reviewed before use.</a:t>
-            </a:r>
-            <a:endParaRPr lang="en-US" sz="1320" dirty="0"/>
+              <a:t>Identify what could go wrong, who could be affected, what safeguards are needed,.</a:t>
+            </a:r>
+            <a:endParaRPr lang="en-US" sz="1220" dirty="0"/>
           </a:p>
         </p:txBody>
       </p:sp>
@@ -5684,8 +5686,8 @@
         </p:nvSpPr>
         <p:spPr>
           <a:xfrm>
-            <a:off x="868680" y="1508760"/>
-            <a:ext cx="6309360" cy="4160520"/>
+            <a:off x="822960" y="1463040"/>
+            <a:ext cx="6565392" cy="4343400"/>
           </a:xfrm>
           <a:prstGeom prst="rect">
             <a:avLst/>
@@ -5703,7 +5705,7 @@
               <a:buNone/>
             </a:pPr>
             <a:r>
-              <a:rPr lang="en-US" sz="2100" dirty="0">
+              <a:rPr lang="en-US" sz="1920" dirty="0">
                 <a:solidFill>
                   <a:srgbClr val="003A63"/>
                 </a:solidFill>
@@ -5713,14 +5715,14 @@
               </a:rPr>
               <a:t>• Weak lineage.</a:t>
             </a:r>
-            <a:endParaRPr lang="en-US" sz="2100" dirty="0"/>
-          </a:p>
-          <a:p>
-            <a:pPr indent="0" marL="0">
-              <a:buNone/>
-            </a:pPr>
-            <a:r>
-              <a:rPr lang="en-US" sz="2100" dirty="0">
+            <a:endParaRPr lang="en-US" sz="1920" dirty="0"/>
+          </a:p>
+          <a:p>
+            <a:pPr indent="0" marL="0">
+              <a:buNone/>
+            </a:pPr>
+            <a:r>
+              <a:rPr lang="en-US" sz="1920" dirty="0">
                 <a:solidFill>
                   <a:srgbClr val="003A63"/>
                 </a:solidFill>
@@ -5728,16 +5730,16 @@
                 <a:ea typeface="Aptos" pitchFamily="34" charset="-122"/>
                 <a:cs typeface="Aptos" pitchFamily="34" charset="-120"/>
               </a:rPr>
-              <a:t>• If transformations are not documented, staff may not be able to explain or correct AI errors.</a:t>
-            </a:r>
-            <a:endParaRPr lang="en-US" sz="2100" dirty="0"/>
-          </a:p>
-          <a:p>
-            <a:pPr indent="0" marL="0">
-              <a:buNone/>
-            </a:pPr>
-            <a:r>
-              <a:rPr lang="en-US" sz="2100" dirty="0">
+              <a:t>• If transformations are not documented, staff may not be able to explain or.</a:t>
+            </a:r>
+            <a:endParaRPr lang="en-US" sz="1920" dirty="0"/>
+          </a:p>
+          <a:p>
+            <a:pPr indent="0" marL="0">
+              <a:buNone/>
+            </a:pPr>
+            <a:r>
+              <a:rPr lang="en-US" sz="1920" dirty="0">
                 <a:solidFill>
                   <a:srgbClr val="003A63"/>
                 </a:solidFill>
@@ -5747,7 +5749,7 @@
               </a:rPr>
               <a:t>• Guardrails include lineage documentation, version control, and audit trails.</a:t>
             </a:r>
-            <a:endParaRPr lang="en-US" sz="2100" dirty="0"/>
+            <a:endParaRPr lang="en-US" sz="1920" dirty="0"/>
           </a:p>
         </p:txBody>
       </p:sp>
@@ -5759,12 +5761,12 @@
         </p:nvSpPr>
         <p:spPr>
           <a:xfrm>
-            <a:off x="7635240" y="1325880"/>
-            <a:ext cx="3474720" cy="1207008"/>
+            <a:off x="7543800" y="1325880"/>
+            <a:ext cx="3611880" cy="1261872"/>
           </a:xfrm>
           <a:prstGeom prst="roundRect">
             <a:avLst>
-              <a:gd name="adj" fmla="val 9091"/>
+              <a:gd name="adj" fmla="val 8696"/>
             </a:avLst>
           </a:prstGeom>
           <a:solidFill>
@@ -5786,8 +5788,8 @@
         </p:nvSpPr>
         <p:spPr>
           <a:xfrm>
-            <a:off x="7799832" y="1472184"/>
-            <a:ext cx="3145536" cy="256032"/>
+            <a:off x="7708392" y="1453896"/>
+            <a:ext cx="3282696" cy="228600"/>
           </a:xfrm>
           <a:prstGeom prst="rect">
             <a:avLst/>
@@ -5803,7 +5805,7 @@
               <a:buNone/>
             </a:pPr>
             <a:r>
-              <a:rPr lang="en-US" sz="1300" b="1" dirty="0">
+              <a:rPr lang="en-US" sz="1220" b="1" dirty="0">
                 <a:solidFill>
                   <a:srgbClr val="0068B7"/>
                 </a:solidFill>
@@ -5813,7 +5815,7 @@
               </a:rPr>
               <a:t>Risk check</a:t>
             </a:r>
-            <a:endParaRPr lang="en-US" sz="1300" dirty="0"/>
+            <a:endParaRPr lang="en-US" sz="1220" dirty="0"/>
           </a:p>
         </p:txBody>
       </p:sp>
@@ -5825,8 +5827,8 @@
         </p:nvSpPr>
         <p:spPr>
           <a:xfrm>
-            <a:off x="7799832" y="1801368"/>
-            <a:ext cx="3145536" cy="640080"/>
+            <a:off x="7708392" y="1764792"/>
+            <a:ext cx="3282696" cy="749808"/>
           </a:xfrm>
           <a:prstGeom prst="rect">
             <a:avLst/>
@@ -5844,7 +5846,7 @@
               <a:buNone/>
             </a:pPr>
             <a:r>
-              <a:rPr lang="en-US" sz="1320" dirty="0">
+              <a:rPr lang="en-US" sz="1220" dirty="0">
                 <a:solidFill>
                   <a:srgbClr val="17364A"/>
                 </a:solidFill>
@@ -5854,7 +5856,7 @@
               </a:rPr>
               <a:t>Weak lineage.</a:t>
             </a:r>
-            <a:endParaRPr lang="en-US" sz="1320" dirty="0"/>
+            <a:endParaRPr lang="en-US" sz="1220" dirty="0"/>
           </a:p>
         </p:txBody>
       </p:sp>
@@ -5866,12 +5868,12 @@
         </p:nvSpPr>
         <p:spPr>
           <a:xfrm>
-            <a:off x="7635240" y="2670048"/>
-            <a:ext cx="3474720" cy="1536192"/>
+            <a:off x="7543800" y="2724912"/>
+            <a:ext cx="3611880" cy="1527048"/>
           </a:xfrm>
           <a:prstGeom prst="roundRect">
             <a:avLst>
-              <a:gd name="adj" fmla="val 7143"/>
+              <a:gd name="adj" fmla="val 7186"/>
             </a:avLst>
           </a:prstGeom>
           <a:solidFill>
@@ -5893,8 +5895,8 @@
         </p:nvSpPr>
         <p:spPr>
           <a:xfrm>
-            <a:off x="7799832" y="2816352"/>
-            <a:ext cx="3145536" cy="256032"/>
+            <a:off x="7708392" y="2852928"/>
+            <a:ext cx="3282696" cy="228600"/>
           </a:xfrm>
           <a:prstGeom prst="rect">
             <a:avLst/>
@@ -5910,7 +5912,7 @@
               <a:buNone/>
             </a:pPr>
             <a:r>
-              <a:rPr lang="en-US" sz="1300" b="1" dirty="0">
+              <a:rPr lang="en-US" sz="1220" b="1" dirty="0">
                 <a:solidFill>
                   <a:srgbClr val="0068B7"/>
                 </a:solidFill>
@@ -5920,7 +5922,7 @@
               </a:rPr>
               <a:t>Concept checkpoints</a:t>
             </a:r>
-            <a:endParaRPr lang="en-US" sz="1300" dirty="0"/>
+            <a:endParaRPr lang="en-US" sz="1220" dirty="0"/>
           </a:p>
         </p:txBody>
       </p:sp>
@@ -5932,8 +5934,8 @@
         </p:nvSpPr>
         <p:spPr>
           <a:xfrm>
-            <a:off x="7818120" y="3182112"/>
-            <a:ext cx="3090672" cy="877824"/>
+            <a:off x="7726680" y="3182112"/>
+            <a:ext cx="3227832" cy="960120"/>
           </a:xfrm>
           <a:prstGeom prst="rect">
             <a:avLst/>
@@ -5951,7 +5953,7 @@
               <a:buNone/>
             </a:pPr>
             <a:r>
-              <a:rPr lang="en-US" sz="1220" dirty="0">
+              <a:rPr lang="en-US" sz="1140" dirty="0">
                 <a:solidFill>
                   <a:srgbClr val="17364A"/>
                 </a:solidFill>
@@ -5961,14 +5963,14 @@
               </a:rPr>
               <a:t>Weak lineage.</a:t>
             </a:r>
-            <a:endParaRPr lang="en-US" sz="1220" dirty="0"/>
-          </a:p>
-          <a:p>
-            <a:pPr indent="0" marL="0">
-              <a:buNone/>
-            </a:pPr>
-            <a:r>
-              <a:rPr lang="en-US" sz="1220" dirty="0">
+            <a:endParaRPr lang="en-US" sz="1140" dirty="0"/>
+          </a:p>
+          <a:p>
+            <a:pPr indent="0" marL="0">
+              <a:buNone/>
+            </a:pPr>
+            <a:r>
+              <a:rPr lang="en-US" sz="1140" dirty="0">
                 <a:solidFill>
                   <a:srgbClr val="17364A"/>
                 </a:solidFill>
@@ -5976,16 +5978,16 @@
                 <a:ea typeface="Aptos" pitchFamily="34" charset="-122"/>
                 <a:cs typeface="Aptos" pitchFamily="34" charset="-120"/>
               </a:rPr>
-              <a:t>If transformations are not documented, staff may not be able to.</a:t>
-            </a:r>
-            <a:endParaRPr lang="en-US" sz="1220" dirty="0"/>
-          </a:p>
-          <a:p>
-            <a:pPr indent="0" marL="0">
-              <a:buNone/>
-            </a:pPr>
-            <a:r>
-              <a:rPr lang="en-US" sz="1220" dirty="0">
+              <a:t>If transformations are not documented, staff may.</a:t>
+            </a:r>
+            <a:endParaRPr lang="en-US" sz="1140" dirty="0"/>
+          </a:p>
+          <a:p>
+            <a:pPr indent="0" marL="0">
+              <a:buNone/>
+            </a:pPr>
+            <a:r>
+              <a:rPr lang="en-US" sz="1140" dirty="0">
                 <a:solidFill>
                   <a:srgbClr val="17364A"/>
                 </a:solidFill>
@@ -5993,9 +5995,9 @@
                 <a:ea typeface="Aptos" pitchFamily="34" charset="-122"/>
                 <a:cs typeface="Aptos" pitchFamily="34" charset="-120"/>
               </a:rPr>
-              <a:t>Guardrails include lineage documentation, version control, and.</a:t>
-            </a:r>
-            <a:endParaRPr lang="en-US" sz="1220" dirty="0"/>
+              <a:t>Guardrails include lineage documentation, version.</a:t>
+            </a:r>
+            <a:endParaRPr lang="en-US" sz="1140" dirty="0"/>
           </a:p>
         </p:txBody>
       </p:sp>
@@ -6007,12 +6009,12 @@
         </p:nvSpPr>
         <p:spPr>
           <a:xfrm>
-            <a:off x="7635240" y="4343400"/>
-            <a:ext cx="3474720" cy="1255471"/>
+            <a:off x="7543800" y="4389120"/>
+            <a:ext cx="3611880" cy="1261872"/>
           </a:xfrm>
           <a:prstGeom prst="roundRect">
             <a:avLst>
-              <a:gd name="adj" fmla="val 8740"/>
+              <a:gd name="adj" fmla="val 8696"/>
             </a:avLst>
           </a:prstGeom>
           <a:solidFill>
@@ -6034,8 +6036,8 @@
         </p:nvSpPr>
         <p:spPr>
           <a:xfrm>
-            <a:off x="7799832" y="4489704"/>
-            <a:ext cx="3145536" cy="256032"/>
+            <a:off x="7708392" y="4517136"/>
+            <a:ext cx="3282696" cy="228600"/>
           </a:xfrm>
           <a:prstGeom prst="rect">
             <a:avLst/>
@@ -6051,7 +6053,7 @@
               <a:buNone/>
             </a:pPr>
             <a:r>
-              <a:rPr lang="en-US" sz="1300" b="1" dirty="0">
+              <a:rPr lang="en-US" sz="1220" b="1" dirty="0">
                 <a:solidFill>
                   <a:srgbClr val="0068B7"/>
                 </a:solidFill>
@@ -6061,7 +6063,7 @@
               </a:rPr>
               <a:t>Safeguard to plan</a:t>
             </a:r>
-            <a:endParaRPr lang="en-US" sz="1300" dirty="0"/>
+            <a:endParaRPr lang="en-US" sz="1220" dirty="0"/>
           </a:p>
         </p:txBody>
       </p:sp>
@@ -6073,8 +6075,8 @@
         </p:nvSpPr>
         <p:spPr>
           <a:xfrm>
-            <a:off x="7799832" y="4818888"/>
-            <a:ext cx="3145536" cy="688543"/>
+            <a:off x="7708392" y="4828032"/>
+            <a:ext cx="3282696" cy="749808"/>
           </a:xfrm>
           <a:prstGeom prst="rect">
             <a:avLst/>
@@ -6092,7 +6094,7 @@
               <a:buNone/>
             </a:pPr>
             <a:r>
-              <a:rPr lang="en-US" sz="1320" dirty="0">
+              <a:rPr lang="en-US" sz="1220" dirty="0">
                 <a:solidFill>
                   <a:srgbClr val="17364A"/>
                 </a:solidFill>
@@ -6100,9 +6102,9 @@
                 <a:ea typeface="Aptos" pitchFamily="34" charset="-122"/>
                 <a:cs typeface="Aptos" pitchFamily="34" charset="-120"/>
               </a:rPr>
-              <a:t>Identify what could go wrong, who could be affected, what safeguards are needed, and what evidence should be reviewed before use.</a:t>
-            </a:r>
-            <a:endParaRPr lang="en-US" sz="1320" dirty="0"/>
+              <a:t>Identify what could go wrong, who could be affected, what safeguards are needed,.</a:t>
+            </a:r>
+            <a:endParaRPr lang="en-US" sz="1220" dirty="0"/>
           </a:p>
         </p:txBody>
       </p:sp>
@@ -6393,8 +6395,8 @@
         </p:nvSpPr>
         <p:spPr>
           <a:xfrm>
-            <a:off x="868680" y="1508760"/>
-            <a:ext cx="6309360" cy="4160520"/>
+            <a:off x="822960" y="1463040"/>
+            <a:ext cx="6565392" cy="4343400"/>
           </a:xfrm>
           <a:prstGeom prst="rect">
             <a:avLst/>
@@ -6412,7 +6414,7 @@
               <a:buNone/>
             </a:pPr>
             <a:r>
-              <a:rPr lang="en-US" sz="2100" dirty="0">
+              <a:rPr lang="en-US" sz="1920" dirty="0">
                 <a:solidFill>
                   <a:srgbClr val="003A63"/>
                 </a:solidFill>
@@ -6420,16 +6422,16 @@
                 <a:ea typeface="Aptos" pitchFamily="34" charset="-122"/>
                 <a:cs typeface="Aptos" pitchFamily="34" charset="-120"/>
               </a:rPr>
-              <a:t>• Generative AI may use pipeline outputs to summarize records, but the summary should indicate.</a:t>
-            </a:r>
-            <a:endParaRPr lang="en-US" sz="2100" dirty="0"/>
-          </a:p>
-          <a:p>
-            <a:pPr indent="0" marL="0">
-              <a:buNone/>
-            </a:pPr>
-            <a:r>
-              <a:rPr lang="en-US" sz="2100" dirty="0">
+              <a:t>• Generative AI may use pipeline outputs to summarize records, but the summary.</a:t>
+            </a:r>
+            <a:endParaRPr lang="en-US" sz="1920" dirty="0"/>
+          </a:p>
+          <a:p>
+            <a:pPr indent="0" marL="0">
+              <a:buNone/>
+            </a:pPr>
+            <a:r>
+              <a:rPr lang="en-US" sz="1920" dirty="0">
                 <a:solidFill>
                   <a:srgbClr val="003A63"/>
                 </a:solidFill>
@@ -6437,16 +6439,16 @@
                 <a:ea typeface="Aptos" pitchFamily="34" charset="-122"/>
                 <a:cs typeface="Aptos" pitchFamily="34" charset="-120"/>
               </a:rPr>
-              <a:t>• Predictive models may rely on engineered features created by a pipeline, so the feature.</a:t>
-            </a:r>
-            <a:endParaRPr lang="en-US" sz="2100" dirty="0"/>
-          </a:p>
-          <a:p>
-            <a:pPr indent="0" marL="0">
-              <a:buNone/>
-            </a:pPr>
-            <a:r>
-              <a:rPr lang="en-US" sz="2100" dirty="0">
+              <a:t>• Predictive models may rely on engineered features created by a pipeline, so.</a:t>
+            </a:r>
+            <a:endParaRPr lang="en-US" sz="1920" dirty="0"/>
+          </a:p>
+          <a:p>
+            <a:pPr indent="0" marL="0">
+              <a:buNone/>
+            </a:pPr>
+            <a:r>
+              <a:rPr lang="en-US" sz="1920" dirty="0">
                 <a:solidFill>
                   <a:srgbClr val="003A63"/>
                 </a:solidFill>
@@ -6454,9 +6456,9 @@
                 <a:ea typeface="Aptos" pitchFamily="34" charset="-122"/>
                 <a:cs typeface="Aptos" pitchFamily="34" charset="-120"/>
               </a:rPr>
-              <a:t>• RAG systems depend on document ingestion pipelines, which must track document source, version,.</a:t>
-            </a:r>
-            <a:endParaRPr lang="en-US" sz="2100" dirty="0"/>
+              <a:t>• RAG systems depend on document ingestion pipelines, which must track.</a:t>
+            </a:r>
+            <a:endParaRPr lang="en-US" sz="1920" dirty="0"/>
           </a:p>
         </p:txBody>
       </p:sp>
@@ -6468,12 +6470,12 @@
         </p:nvSpPr>
         <p:spPr>
           <a:xfrm>
-            <a:off x="7635240" y="1325880"/>
-            <a:ext cx="3474720" cy="1255471"/>
+            <a:off x="7543800" y="1325880"/>
+            <a:ext cx="3611880" cy="1261872"/>
           </a:xfrm>
           <a:prstGeom prst="roundRect">
             <a:avLst>
-              <a:gd name="adj" fmla="val 8740"/>
+              <a:gd name="adj" fmla="val 8696"/>
             </a:avLst>
           </a:prstGeom>
           <a:solidFill>
@@ -6495,8 +6497,8 @@
         </p:nvSpPr>
         <p:spPr>
           <a:xfrm>
-            <a:off x="7799832" y="1472184"/>
-            <a:ext cx="3145536" cy="256032"/>
+            <a:off x="7708392" y="1453896"/>
+            <a:ext cx="3282696" cy="228600"/>
           </a:xfrm>
           <a:prstGeom prst="rect">
             <a:avLst/>
@@ -6512,7 +6514,7 @@
               <a:buNone/>
             </a:pPr>
             <a:r>
-              <a:rPr lang="en-US" sz="1300" b="1" dirty="0">
+              <a:rPr lang="en-US" sz="1220" b="1" dirty="0">
                 <a:solidFill>
                   <a:srgbClr val="0068B7"/>
                 </a:solidFill>
@@ -6522,7 +6524,7 @@
               </a:rPr>
               <a:t>Data decision</a:t>
             </a:r>
-            <a:endParaRPr lang="en-US" sz="1300" dirty="0"/>
+            <a:endParaRPr lang="en-US" sz="1220" dirty="0"/>
           </a:p>
         </p:txBody>
       </p:sp>
@@ -6534,8 +6536,8 @@
         </p:nvSpPr>
         <p:spPr>
           <a:xfrm>
-            <a:off x="7799832" y="1801368"/>
-            <a:ext cx="3145536" cy="688543"/>
+            <a:off x="7708392" y="1764792"/>
+            <a:ext cx="3282696" cy="749808"/>
           </a:xfrm>
           <a:prstGeom prst="rect">
             <a:avLst/>
@@ -6553,7 +6555,7 @@
               <a:buNone/>
             </a:pPr>
             <a:r>
-              <a:rPr lang="en-US" sz="1320" dirty="0">
+              <a:rPr lang="en-US" sz="1220" dirty="0">
                 <a:solidFill>
                   <a:srgbClr val="17364A"/>
                 </a:solidFill>
@@ -6561,9 +6563,9 @@
                 <a:ea typeface="Aptos" pitchFamily="34" charset="-122"/>
                 <a:cs typeface="Aptos" pitchFamily="34" charset="-120"/>
               </a:rPr>
-              <a:t>Generative AI may use pipeline outputs to summarize records, but the summary should indicate source.</a:t>
-            </a:r>
-            <a:endParaRPr lang="en-US" sz="1320" dirty="0"/>
+              <a:t>Generative AI may use pipeline outputs to summarize records, but the summary.</a:t>
+            </a:r>
+            <a:endParaRPr lang="en-US" sz="1220" dirty="0"/>
           </a:p>
         </p:txBody>
       </p:sp>
@@ -6575,12 +6577,12 @@
         </p:nvSpPr>
         <p:spPr>
           <a:xfrm>
-            <a:off x="7635240" y="2718511"/>
-            <a:ext cx="3474720" cy="1328623"/>
+            <a:off x="7543800" y="2724912"/>
+            <a:ext cx="3611880" cy="1527048"/>
           </a:xfrm>
           <a:prstGeom prst="roundRect">
             <a:avLst>
-              <a:gd name="adj" fmla="val 8259"/>
+              <a:gd name="adj" fmla="val 7186"/>
             </a:avLst>
           </a:prstGeom>
           <a:solidFill>
@@ -6602,8 +6604,8 @@
         </p:nvSpPr>
         <p:spPr>
           <a:xfrm>
-            <a:off x="7799832" y="2864815"/>
-            <a:ext cx="3145536" cy="256032"/>
+            <a:off x="7708392" y="2852928"/>
+            <a:ext cx="3282696" cy="228600"/>
           </a:xfrm>
           <a:prstGeom prst="rect">
             <a:avLst/>
@@ -6619,7 +6621,7 @@
               <a:buNone/>
             </a:pPr>
             <a:r>
-              <a:rPr lang="en-US" sz="1300" b="1" dirty="0">
+              <a:rPr lang="en-US" sz="1220" b="1" dirty="0">
                 <a:solidFill>
                   <a:srgbClr val="0068B7"/>
                 </a:solidFill>
@@ -6629,7 +6631,7 @@
               </a:rPr>
               <a:t>Concept checkpoints</a:t>
             </a:r>
-            <a:endParaRPr lang="en-US" sz="1300" dirty="0"/>
+            <a:endParaRPr lang="en-US" sz="1220" dirty="0"/>
           </a:p>
         </p:txBody>
       </p:sp>
@@ -6641,8 +6643,8 @@
         </p:nvSpPr>
         <p:spPr>
           <a:xfrm>
-            <a:off x="7818120" y="3230575"/>
-            <a:ext cx="3090672" cy="670255"/>
+            <a:off x="7726680" y="3182112"/>
+            <a:ext cx="3227832" cy="960120"/>
           </a:xfrm>
           <a:prstGeom prst="rect">
             <a:avLst/>
@@ -6660,7 +6662,7 @@
               <a:buNone/>
             </a:pPr>
             <a:r>
-              <a:rPr lang="en-US" sz="1220" dirty="0">
+              <a:rPr lang="en-US" sz="1140" dirty="0">
                 <a:solidFill>
                   <a:srgbClr val="17364A"/>
                 </a:solidFill>
@@ -6668,16 +6670,16 @@
                 <a:ea typeface="Aptos" pitchFamily="34" charset="-122"/>
                 <a:cs typeface="Aptos" pitchFamily="34" charset="-120"/>
               </a:rPr>
-              <a:t>Generative AI may use pipeline outputs to summarize records, but.</a:t>
-            </a:r>
-            <a:endParaRPr lang="en-US" sz="1220" dirty="0"/>
-          </a:p>
-          <a:p>
-            <a:pPr indent="0" marL="0">
-              <a:buNone/>
-            </a:pPr>
-            <a:r>
-              <a:rPr lang="en-US" sz="1220" dirty="0">
+              <a:t>Generative AI may use pipeline outputs to.</a:t>
+            </a:r>
+            <a:endParaRPr lang="en-US" sz="1140" dirty="0"/>
+          </a:p>
+          <a:p>
+            <a:pPr indent="0" marL="0">
+              <a:buNone/>
+            </a:pPr>
+            <a:r>
+              <a:rPr lang="en-US" sz="1140" dirty="0">
                 <a:solidFill>
                   <a:srgbClr val="17364A"/>
                 </a:solidFill>
@@ -6685,16 +6687,16 @@
                 <a:ea typeface="Aptos" pitchFamily="34" charset="-122"/>
                 <a:cs typeface="Aptos" pitchFamily="34" charset="-120"/>
               </a:rPr>
-              <a:t>Predictive models may rely on engineered features created by a.</a:t>
-            </a:r>
-            <a:endParaRPr lang="en-US" sz="1220" dirty="0"/>
-          </a:p>
-          <a:p>
-            <a:pPr indent="0" marL="0">
-              <a:buNone/>
-            </a:pPr>
-            <a:r>
-              <a:rPr lang="en-US" sz="1220" dirty="0">
+              <a:t>Predictive models may rely on engineered features.</a:t>
+            </a:r>
+            <a:endParaRPr lang="en-US" sz="1140" dirty="0"/>
+          </a:p>
+          <a:p>
+            <a:pPr indent="0" marL="0">
+              <a:buNone/>
+            </a:pPr>
+            <a:r>
+              <a:rPr lang="en-US" sz="1140" dirty="0">
                 <a:solidFill>
                   <a:srgbClr val="17364A"/>
                 </a:solidFill>
@@ -6702,9 +6704,9 @@
                 <a:ea typeface="Aptos" pitchFamily="34" charset="-122"/>
                 <a:cs typeface="Aptos" pitchFamily="34" charset="-120"/>
               </a:rPr>
-              <a:t>RAG systems depend on document ingestion pipelines, which must.</a:t>
-            </a:r>
-            <a:endParaRPr lang="en-US" sz="1220" dirty="0"/>
+              <a:t>RAG systems depend on document ingestion.</a:t>
+            </a:r>
+            <a:endParaRPr lang="en-US" sz="1140" dirty="0"/>
           </a:p>
         </p:txBody>
       </p:sp>
@@ -6716,12 +6718,12 @@
         </p:nvSpPr>
         <p:spPr>
           <a:xfrm>
-            <a:off x="7635240" y="4184294"/>
-            <a:ext cx="3474720" cy="1466698"/>
+            <a:off x="7543800" y="4389120"/>
+            <a:ext cx="3611880" cy="1261872"/>
           </a:xfrm>
           <a:prstGeom prst="roundRect">
             <a:avLst>
-              <a:gd name="adj" fmla="val 7481"/>
+              <a:gd name="adj" fmla="val 8696"/>
             </a:avLst>
           </a:prstGeom>
           <a:solidFill>
@@ -6743,8 +6745,8 @@
         </p:nvSpPr>
         <p:spPr>
           <a:xfrm>
-            <a:off x="7799832" y="4330598"/>
-            <a:ext cx="3145536" cy="256032"/>
+            <a:off x="7708392" y="4517136"/>
+            <a:ext cx="3282696" cy="228600"/>
           </a:xfrm>
           <a:prstGeom prst="rect">
             <a:avLst/>
@@ -6760,7 +6762,7 @@
               <a:buNone/>
             </a:pPr>
             <a:r>
-              <a:rPr lang="en-US" sz="1300" b="1" dirty="0">
+              <a:rPr lang="en-US" sz="1220" b="1" dirty="0">
                 <a:solidFill>
                   <a:srgbClr val="0068B7"/>
                 </a:solidFill>
@@ -6770,7 +6772,7 @@
               </a:rPr>
               <a:t>How to validate</a:t>
             </a:r>
-            <a:endParaRPr lang="en-US" sz="1300" dirty="0"/>
+            <a:endParaRPr lang="en-US" sz="1220" dirty="0"/>
           </a:p>
         </p:txBody>
       </p:sp>
@@ -6782,8 +6784,8 @@
         </p:nvSpPr>
         <p:spPr>
           <a:xfrm>
-            <a:off x="7799832" y="4659782"/>
-            <a:ext cx="3145536" cy="899770"/>
+            <a:off x="7708392" y="4828032"/>
+            <a:ext cx="3282696" cy="749808"/>
           </a:xfrm>
           <a:prstGeom prst="rect">
             <a:avLst/>
@@ -6801,7 +6803,7 @@
               <a:buNone/>
             </a:pPr>
             <a:r>
-              <a:rPr lang="en-US" sz="1320" dirty="0">
+              <a:rPr lang="en-US" sz="1220" dirty="0">
                 <a:solidFill>
                   <a:srgbClr val="17364A"/>
                 </a:solidFill>
@@ -6809,9 +6811,9 @@
                 <a:ea typeface="Aptos" pitchFamily="34" charset="-122"/>
                 <a:cs typeface="Aptos" pitchFamily="34" charset="-120"/>
               </a:rPr>
-              <a:t>Connect the concept to data quality, model performance, validation evidence, monitoring measures, and decisions that remain under human control.</a:t>
-            </a:r>
-            <a:endParaRPr lang="en-US" sz="1320" dirty="0"/>
+              <a:t>Connect the concept to data quality, model performance, validation evidence,.</a:t>
+            </a:r>
+            <a:endParaRPr lang="en-US" sz="1220" dirty="0"/>
           </a:p>
         </p:txBody>
       </p:sp>
@@ -7102,8 +7104,8 @@
         </p:nvSpPr>
         <p:spPr>
           <a:xfrm>
-            <a:off x="868680" y="1508760"/>
-            <a:ext cx="6309360" cy="4160520"/>
+            <a:off x="822960" y="1463040"/>
+            <a:ext cx="6565392" cy="4343400"/>
           </a:xfrm>
           <a:prstGeom prst="rect">
             <a:avLst/>
@@ -7121,7 +7123,7 @@
               <a:buNone/>
             </a:pPr>
             <a:r>
-              <a:rPr lang="en-US" sz="2100" dirty="0">
+              <a:rPr lang="en-US" sz="1920" dirty="0">
                 <a:solidFill>
                   <a:srgbClr val="003A63"/>
                 </a:solidFill>
@@ -7129,16 +7131,16 @@
                 <a:ea typeface="Aptos" pitchFamily="34" charset="-122"/>
                 <a:cs typeface="Aptos" pitchFamily="34" charset="-120"/>
               </a:rPr>
-              <a:t>• Which public health data feeds are most important to daily decisions in your program?</a:t>
-            </a:r>
-            <a:endParaRPr lang="en-US" sz="2100" dirty="0"/>
-          </a:p>
-          <a:p>
-            <a:pPr indent="0" marL="0">
-              <a:buNone/>
-            </a:pPr>
-            <a:r>
-              <a:rPr lang="en-US" sz="2100" dirty="0">
+              <a:t>• Which public health data feeds are most important to daily decisions in your.</a:t>
+            </a:r>
+            <a:endParaRPr lang="en-US" sz="1920" dirty="0"/>
+          </a:p>
+          <a:p>
+            <a:pPr indent="0" marL="0">
+              <a:buNone/>
+            </a:pPr>
+            <a:r>
+              <a:rPr lang="en-US" sz="1920" dirty="0">
                 <a:solidFill>
                   <a:srgbClr val="003A63"/>
                 </a:solidFill>
@@ -7146,16 +7148,16 @@
                 <a:ea typeface="Aptos" pitchFamily="34" charset="-122"/>
                 <a:cs typeface="Aptos" pitchFamily="34" charset="-120"/>
               </a:rPr>
-              <a:t>• Which pipelines are automatically monitored, and which depend on manual review?</a:t>
-            </a:r>
-            <a:endParaRPr lang="en-US" sz="2100" dirty="0"/>
-          </a:p>
-          <a:p>
-            <a:pPr indent="0" marL="0">
-              <a:buNone/>
-            </a:pPr>
-            <a:r>
-              <a:rPr lang="en-US" sz="2100" dirty="0">
+              <a:t>• Which pipelines are automatically monitored, and which depend on manual.</a:t>
+            </a:r>
+            <a:endParaRPr lang="en-US" sz="1920" dirty="0"/>
+          </a:p>
+          <a:p>
+            <a:pPr indent="0" marL="0">
+              <a:buNone/>
+            </a:pPr>
+            <a:r>
+              <a:rPr lang="en-US" sz="1920" dirty="0">
                 <a:solidFill>
                   <a:srgbClr val="003A63"/>
                 </a:solidFill>
@@ -7165,7 +7167,7 @@
               </a:rPr>
               <a:t>• What failures would materially affect an AI output?</a:t>
             </a:r>
-            <a:endParaRPr lang="en-US" sz="2100" dirty="0"/>
+            <a:endParaRPr lang="en-US" sz="1920" dirty="0"/>
           </a:p>
         </p:txBody>
       </p:sp>
@@ -7177,12 +7179,12 @@
         </p:nvSpPr>
         <p:spPr>
           <a:xfrm>
-            <a:off x="7635240" y="1325880"/>
-            <a:ext cx="3474720" cy="1207008"/>
+            <a:off x="7543800" y="1325880"/>
+            <a:ext cx="3611880" cy="1261872"/>
           </a:xfrm>
           <a:prstGeom prst="roundRect">
             <a:avLst>
-              <a:gd name="adj" fmla="val 9091"/>
+              <a:gd name="adj" fmla="val 8696"/>
             </a:avLst>
           </a:prstGeom>
           <a:solidFill>
@@ -7204,8 +7206,8 @@
         </p:nvSpPr>
         <p:spPr>
           <a:xfrm>
-            <a:off x="7799832" y="1472184"/>
-            <a:ext cx="3145536" cy="256032"/>
+            <a:off x="7708392" y="1453896"/>
+            <a:ext cx="3282696" cy="228600"/>
           </a:xfrm>
           <a:prstGeom prst="rect">
             <a:avLst/>
@@ -7221,7 +7223,7 @@
               <a:buNone/>
             </a:pPr>
             <a:r>
-              <a:rPr lang="en-US" sz="1300" b="1" dirty="0">
+              <a:rPr lang="en-US" sz="1220" b="1" dirty="0">
                 <a:solidFill>
                   <a:srgbClr val="0068B7"/>
                 </a:solidFill>
@@ -7231,7 +7233,7 @@
               </a:rPr>
               <a:t>Data decision</a:t>
             </a:r>
-            <a:endParaRPr lang="en-US" sz="1300" dirty="0"/>
+            <a:endParaRPr lang="en-US" sz="1220" dirty="0"/>
           </a:p>
         </p:txBody>
       </p:sp>
@@ -7243,8 +7245,8 @@
         </p:nvSpPr>
         <p:spPr>
           <a:xfrm>
-            <a:off x="7799832" y="1801368"/>
-            <a:ext cx="3145536" cy="640080"/>
+            <a:off x="7708392" y="1764792"/>
+            <a:ext cx="3282696" cy="749808"/>
           </a:xfrm>
           <a:prstGeom prst="rect">
             <a:avLst/>
@@ -7262,7 +7264,7 @@
               <a:buNone/>
             </a:pPr>
             <a:r>
-              <a:rPr lang="en-US" sz="1320" dirty="0">
+              <a:rPr lang="en-US" sz="1220" dirty="0">
                 <a:solidFill>
                   <a:srgbClr val="17364A"/>
                 </a:solidFill>
@@ -7270,9 +7272,9 @@
                 <a:ea typeface="Aptos" pitchFamily="34" charset="-122"/>
                 <a:cs typeface="Aptos" pitchFamily="34" charset="-120"/>
               </a:rPr>
-              <a:t>Which public health data feeds are most important to daily decisions in your program?</a:t>
-            </a:r>
-            <a:endParaRPr lang="en-US" sz="1320" dirty="0"/>
+              <a:t>Which public health data feeds are most important to daily decisions in your.</a:t>
+            </a:r>
+            <a:endParaRPr lang="en-US" sz="1220" dirty="0"/>
           </a:p>
         </p:txBody>
       </p:sp>
@@ -7284,12 +7286,12 @@
         </p:nvSpPr>
         <p:spPr>
           <a:xfrm>
-            <a:off x="7635240" y="2670048"/>
-            <a:ext cx="3474720" cy="1377086"/>
+            <a:off x="7543800" y="2724912"/>
+            <a:ext cx="3611880" cy="1527048"/>
           </a:xfrm>
           <a:prstGeom prst="roundRect">
             <a:avLst>
-              <a:gd name="adj" fmla="val 7968"/>
+              <a:gd name="adj" fmla="val 7186"/>
             </a:avLst>
           </a:prstGeom>
           <a:solidFill>
@@ -7311,8 +7313,8 @@
         </p:nvSpPr>
         <p:spPr>
           <a:xfrm>
-            <a:off x="7799832" y="2816352"/>
-            <a:ext cx="3145536" cy="256032"/>
+            <a:off x="7708392" y="2852928"/>
+            <a:ext cx="3282696" cy="228600"/>
           </a:xfrm>
           <a:prstGeom prst="rect">
             <a:avLst/>
@@ -7328,7 +7330,7 @@
               <a:buNone/>
             </a:pPr>
             <a:r>
-              <a:rPr lang="en-US" sz="1300" b="1" dirty="0">
+              <a:rPr lang="en-US" sz="1220" b="1" dirty="0">
                 <a:solidFill>
                   <a:srgbClr val="0068B7"/>
                 </a:solidFill>
@@ -7338,7 +7340,7 @@
               </a:rPr>
               <a:t>Concept checkpoints</a:t>
             </a:r>
-            <a:endParaRPr lang="en-US" sz="1300" dirty="0"/>
+            <a:endParaRPr lang="en-US" sz="1220" dirty="0"/>
           </a:p>
         </p:txBody>
       </p:sp>
@@ -7350,8 +7352,8 @@
         </p:nvSpPr>
         <p:spPr>
           <a:xfrm>
-            <a:off x="7818120" y="3182112"/>
-            <a:ext cx="3090672" cy="718718"/>
+            <a:off x="7726680" y="3182112"/>
+            <a:ext cx="3227832" cy="960120"/>
           </a:xfrm>
           <a:prstGeom prst="rect">
             <a:avLst/>
@@ -7369,7 +7371,7 @@
               <a:buNone/>
             </a:pPr>
             <a:r>
-              <a:rPr lang="en-US" sz="1220" dirty="0">
+              <a:rPr lang="en-US" sz="1140" dirty="0">
                 <a:solidFill>
                   <a:srgbClr val="17364A"/>
                 </a:solidFill>
@@ -7377,16 +7379,16 @@
                 <a:ea typeface="Aptos" pitchFamily="34" charset="-122"/>
                 <a:cs typeface="Aptos" pitchFamily="34" charset="-120"/>
               </a:rPr>
-              <a:t>Which public health data feeds are most important to daily.</a:t>
-            </a:r>
-            <a:endParaRPr lang="en-US" sz="1220" dirty="0"/>
-          </a:p>
-          <a:p>
-            <a:pPr indent="0" marL="0">
-              <a:buNone/>
-            </a:pPr>
-            <a:r>
-              <a:rPr lang="en-US" sz="1220" dirty="0">
+              <a:t>Which public health data feeds are most important.</a:t>
+            </a:r>
+            <a:endParaRPr lang="en-US" sz="1140" dirty="0"/>
+          </a:p>
+          <a:p>
+            <a:pPr indent="0" marL="0">
+              <a:buNone/>
+            </a:pPr>
+            <a:r>
+              <a:rPr lang="en-US" sz="1140" dirty="0">
                 <a:solidFill>
                   <a:srgbClr val="17364A"/>
                 </a:solidFill>
@@ -7394,16 +7396,16 @@
                 <a:ea typeface="Aptos" pitchFamily="34" charset="-122"/>
                 <a:cs typeface="Aptos" pitchFamily="34" charset="-120"/>
               </a:rPr>
-              <a:t>Which pipelines are automatically monitored, and which depend on.</a:t>
-            </a:r>
-            <a:endParaRPr lang="en-US" sz="1220" dirty="0"/>
-          </a:p>
-          <a:p>
-            <a:pPr indent="0" marL="0">
-              <a:buNone/>
-            </a:pPr>
-            <a:r>
-              <a:rPr lang="en-US" sz="1220" dirty="0">
+              <a:t>Which pipelines are automatically monitored, and.</a:t>
+            </a:r>
+            <a:endParaRPr lang="en-US" sz="1140" dirty="0"/>
+          </a:p>
+          <a:p>
+            <a:pPr indent="0" marL="0">
+              <a:buNone/>
+            </a:pPr>
+            <a:r>
+              <a:rPr lang="en-US" sz="1140" dirty="0">
                 <a:solidFill>
                   <a:srgbClr val="17364A"/>
                 </a:solidFill>
@@ -7413,7 +7415,7 @@
               </a:rPr>
               <a:t>What failures would materially affect an AI output?</a:t>
             </a:r>
-            <a:endParaRPr lang="en-US" sz="1220" dirty="0"/>
+            <a:endParaRPr lang="en-US" sz="1140" dirty="0"/>
           </a:p>
         </p:txBody>
       </p:sp>
@@ -7425,12 +7427,12 @@
         </p:nvSpPr>
         <p:spPr>
           <a:xfrm>
-            <a:off x="7635240" y="4184294"/>
-            <a:ext cx="3474720" cy="1466698"/>
+            <a:off x="7543800" y="4389120"/>
+            <a:ext cx="3611880" cy="1261872"/>
           </a:xfrm>
           <a:prstGeom prst="roundRect">
             <a:avLst>
-              <a:gd name="adj" fmla="val 7481"/>
+              <a:gd name="adj" fmla="val 8696"/>
             </a:avLst>
           </a:prstGeom>
           <a:solidFill>
@@ -7452,8 +7454,8 @@
         </p:nvSpPr>
         <p:spPr>
           <a:xfrm>
-            <a:off x="7799832" y="4330598"/>
-            <a:ext cx="3145536" cy="256032"/>
+            <a:off x="7708392" y="4517136"/>
+            <a:ext cx="3282696" cy="228600"/>
           </a:xfrm>
           <a:prstGeom prst="rect">
             <a:avLst/>
@@ -7469,7 +7471,7 @@
               <a:buNone/>
             </a:pPr>
             <a:r>
-              <a:rPr lang="en-US" sz="1300" b="1" dirty="0">
+              <a:rPr lang="en-US" sz="1220" b="1" dirty="0">
                 <a:solidFill>
                   <a:srgbClr val="0068B7"/>
                 </a:solidFill>
@@ -7479,7 +7481,7 @@
               </a:rPr>
               <a:t>How to validate</a:t>
             </a:r>
-            <a:endParaRPr lang="en-US" sz="1300" dirty="0"/>
+            <a:endParaRPr lang="en-US" sz="1220" dirty="0"/>
           </a:p>
         </p:txBody>
       </p:sp>
@@ -7491,8 +7493,8 @@
         </p:nvSpPr>
         <p:spPr>
           <a:xfrm>
-            <a:off x="7799832" y="4659782"/>
-            <a:ext cx="3145536" cy="899770"/>
+            <a:off x="7708392" y="4828032"/>
+            <a:ext cx="3282696" cy="749808"/>
           </a:xfrm>
           <a:prstGeom prst="rect">
             <a:avLst/>
@@ -7510,7 +7512,7 @@
               <a:buNone/>
             </a:pPr>
             <a:r>
-              <a:rPr lang="en-US" sz="1320" dirty="0">
+              <a:rPr lang="en-US" sz="1220" dirty="0">
                 <a:solidFill>
                   <a:srgbClr val="17364A"/>
                 </a:solidFill>
@@ -7518,9 +7520,9 @@
                 <a:ea typeface="Aptos" pitchFamily="34" charset="-122"/>
                 <a:cs typeface="Aptos" pitchFamily="34" charset="-120"/>
               </a:rPr>
-              <a:t>Connect the concept to data quality, model performance, validation evidence, monitoring measures, and decisions that remain under human control.</a:t>
-            </a:r>
-            <a:endParaRPr lang="en-US" sz="1320" dirty="0"/>
+              <a:t>Connect the concept to data quality, model performance, validation evidence,.</a:t>
+            </a:r>
+            <a:endParaRPr lang="en-US" sz="1220" dirty="0"/>
           </a:p>
         </p:txBody>
       </p:sp>
@@ -7811,8 +7813,8 @@
         </p:nvSpPr>
         <p:spPr>
           <a:xfrm>
-            <a:off x="868680" y="1508760"/>
-            <a:ext cx="6309360" cy="4160520"/>
+            <a:off x="822960" y="1463040"/>
+            <a:ext cx="6565392" cy="4343400"/>
           </a:xfrm>
           <a:prstGeom prst="rect">
             <a:avLst/>
@@ -7830,7 +7832,7 @@
               <a:buNone/>
             </a:pPr>
             <a:r>
-              <a:rPr lang="en-US" sz="2100" dirty="0">
+              <a:rPr lang="en-US" sz="1920" dirty="0">
                 <a:solidFill>
                   <a:srgbClr val="003A63"/>
                 </a:solidFill>
@@ -7840,14 +7842,14 @@
               </a:rPr>
               <a:t>• How would staff know if an AI output was based on stale or incomplete data?</a:t>
             </a:r>
-            <a:endParaRPr lang="en-US" sz="2100" dirty="0"/>
-          </a:p>
-          <a:p>
-            <a:pPr indent="0" marL="0">
-              <a:buNone/>
-            </a:pPr>
-            <a:r>
-              <a:rPr lang="en-US" sz="2100" dirty="0">
+            <a:endParaRPr lang="en-US" sz="1920" dirty="0"/>
+          </a:p>
+          <a:p>
+            <a:pPr indent="0" marL="0">
+              <a:buNone/>
+            </a:pPr>
+            <a:r>
+              <a:rPr lang="en-US" sz="1920" dirty="0">
                 <a:solidFill>
                   <a:srgbClr val="003A63"/>
                 </a:solidFill>
@@ -7857,7 +7859,7 @@
               </a:rPr>
               <a:t>• Who has authority to pause AI use when a pipeline fails?</a:t>
             </a:r>
-            <a:endParaRPr lang="en-US" sz="2100" dirty="0"/>
+            <a:endParaRPr lang="en-US" sz="1920" dirty="0"/>
           </a:p>
         </p:txBody>
       </p:sp>
@@ -7869,12 +7871,12 @@
         </p:nvSpPr>
         <p:spPr>
           <a:xfrm>
-            <a:off x="7635240" y="1325880"/>
-            <a:ext cx="3474720" cy="1207008"/>
+            <a:off x="7543800" y="1325880"/>
+            <a:ext cx="3611880" cy="1261872"/>
           </a:xfrm>
           <a:prstGeom prst="roundRect">
             <a:avLst>
-              <a:gd name="adj" fmla="val 9091"/>
+              <a:gd name="adj" fmla="val 8696"/>
             </a:avLst>
           </a:prstGeom>
           <a:solidFill>
@@ -7896,8 +7898,8 @@
         </p:nvSpPr>
         <p:spPr>
           <a:xfrm>
-            <a:off x="7799832" y="1472184"/>
-            <a:ext cx="3145536" cy="256032"/>
+            <a:off x="7708392" y="1453896"/>
+            <a:ext cx="3282696" cy="228600"/>
           </a:xfrm>
           <a:prstGeom prst="rect">
             <a:avLst/>
@@ -7913,7 +7915,7 @@
               <a:buNone/>
             </a:pPr>
             <a:r>
-              <a:rPr lang="en-US" sz="1300" b="1" dirty="0">
+              <a:rPr lang="en-US" sz="1220" b="1" dirty="0">
                 <a:solidFill>
                   <a:srgbClr val="0068B7"/>
                 </a:solidFill>
@@ -7923,7 +7925,7 @@
               </a:rPr>
               <a:t>Data decision</a:t>
             </a:r>
-            <a:endParaRPr lang="en-US" sz="1300" dirty="0"/>
+            <a:endParaRPr lang="en-US" sz="1220" dirty="0"/>
           </a:p>
         </p:txBody>
       </p:sp>
@@ -7935,8 +7937,8 @@
         </p:nvSpPr>
         <p:spPr>
           <a:xfrm>
-            <a:off x="7799832" y="1801368"/>
-            <a:ext cx="3145536" cy="640080"/>
+            <a:off x="7708392" y="1764792"/>
+            <a:ext cx="3282696" cy="749808"/>
           </a:xfrm>
           <a:prstGeom prst="rect">
             <a:avLst/>
@@ -7954,7 +7956,7 @@
               <a:buNone/>
             </a:pPr>
             <a:r>
-              <a:rPr lang="en-US" sz="1320" dirty="0">
+              <a:rPr lang="en-US" sz="1220" dirty="0">
                 <a:solidFill>
                   <a:srgbClr val="17364A"/>
                 </a:solidFill>
@@ -7964,7 +7966,7 @@
               </a:rPr>
               <a:t>How would staff know if an AI output was based on stale or incomplete data?</a:t>
             </a:r>
-            <a:endParaRPr lang="en-US" sz="1320" dirty="0"/>
+            <a:endParaRPr lang="en-US" sz="1220" dirty="0"/>
           </a:p>
         </p:txBody>
       </p:sp>
@@ -7976,12 +7978,12 @@
         </p:nvSpPr>
         <p:spPr>
           <a:xfrm>
-            <a:off x="7635240" y="2670048"/>
-            <a:ext cx="3474720" cy="1377086"/>
+            <a:off x="7543800" y="2724912"/>
+            <a:ext cx="3611880" cy="1527048"/>
           </a:xfrm>
           <a:prstGeom prst="roundRect">
             <a:avLst>
-              <a:gd name="adj" fmla="val 7968"/>
+              <a:gd name="adj" fmla="val 7186"/>
             </a:avLst>
           </a:prstGeom>
           <a:solidFill>
@@ -8003,8 +8005,8 @@
         </p:nvSpPr>
         <p:spPr>
           <a:xfrm>
-            <a:off x="7799832" y="2816352"/>
-            <a:ext cx="3145536" cy="256032"/>
+            <a:off x="7708392" y="2852928"/>
+            <a:ext cx="3282696" cy="228600"/>
           </a:xfrm>
           <a:prstGeom prst="rect">
             <a:avLst/>
@@ -8020,7 +8022,7 @@
               <a:buNone/>
             </a:pPr>
             <a:r>
-              <a:rPr lang="en-US" sz="1300" b="1" dirty="0">
+              <a:rPr lang="en-US" sz="1220" b="1" dirty="0">
                 <a:solidFill>
                   <a:srgbClr val="0068B7"/>
                 </a:solidFill>
@@ -8030,7 +8032,7 @@
               </a:rPr>
               <a:t>Concept checkpoints</a:t>
             </a:r>
-            <a:endParaRPr lang="en-US" sz="1300" dirty="0"/>
+            <a:endParaRPr lang="en-US" sz="1220" dirty="0"/>
           </a:p>
         </p:txBody>
       </p:sp>
@@ -8042,8 +8044,8 @@
         </p:nvSpPr>
         <p:spPr>
           <a:xfrm>
-            <a:off x="7818120" y="3182112"/>
-            <a:ext cx="3090672" cy="718718"/>
+            <a:off x="7726680" y="3182112"/>
+            <a:ext cx="3227832" cy="960120"/>
           </a:xfrm>
           <a:prstGeom prst="rect">
             <a:avLst/>
@@ -8061,7 +8063,7 @@
               <a:buNone/>
             </a:pPr>
             <a:r>
-              <a:rPr lang="en-US" sz="1220" dirty="0">
+              <a:rPr lang="en-US" sz="1140" dirty="0">
                 <a:solidFill>
                   <a:srgbClr val="17364A"/>
                 </a:solidFill>
@@ -8069,16 +8071,16 @@
                 <a:ea typeface="Aptos" pitchFamily="34" charset="-122"/>
                 <a:cs typeface="Aptos" pitchFamily="34" charset="-120"/>
               </a:rPr>
-              <a:t>How would staff know if an AI output was based on stale or.</a:t>
-            </a:r>
-            <a:endParaRPr lang="en-US" sz="1220" dirty="0"/>
-          </a:p>
-          <a:p>
-            <a:pPr indent="0" marL="0">
-              <a:buNone/>
-            </a:pPr>
-            <a:r>
-              <a:rPr lang="en-US" sz="1220" dirty="0">
+              <a:t>How would staff know if an AI output was based on.</a:t>
+            </a:r>
+            <a:endParaRPr lang="en-US" sz="1140" dirty="0"/>
+          </a:p>
+          <a:p>
+            <a:pPr indent="0" marL="0">
+              <a:buNone/>
+            </a:pPr>
+            <a:r>
+              <a:rPr lang="en-US" sz="1140" dirty="0">
                 <a:solidFill>
                   <a:srgbClr val="17364A"/>
                 </a:solidFill>
@@ -8086,9 +8088,9 @@
                 <a:ea typeface="Aptos" pitchFamily="34" charset="-122"/>
                 <a:cs typeface="Aptos" pitchFamily="34" charset="-120"/>
               </a:rPr>
-              <a:t>Who has authority to pause AI use when a pipeline fails?</a:t>
-            </a:r>
-            <a:endParaRPr lang="en-US" sz="1220" dirty="0"/>
+              <a:t>Who has authority to pause AI use when a pipeline.</a:t>
+            </a:r>
+            <a:endParaRPr lang="en-US" sz="1140" dirty="0"/>
           </a:p>
         </p:txBody>
       </p:sp>
@@ -8100,12 +8102,12 @@
         </p:nvSpPr>
         <p:spPr>
           <a:xfrm>
-            <a:off x="7635240" y="4184294"/>
-            <a:ext cx="3474720" cy="1466698"/>
+            <a:off x="7543800" y="4389120"/>
+            <a:ext cx="3611880" cy="1261872"/>
           </a:xfrm>
           <a:prstGeom prst="roundRect">
             <a:avLst>
-              <a:gd name="adj" fmla="val 7481"/>
+              <a:gd name="adj" fmla="val 8696"/>
             </a:avLst>
           </a:prstGeom>
           <a:solidFill>
@@ -8127,8 +8129,8 @@
         </p:nvSpPr>
         <p:spPr>
           <a:xfrm>
-            <a:off x="7799832" y="4330598"/>
-            <a:ext cx="3145536" cy="256032"/>
+            <a:off x="7708392" y="4517136"/>
+            <a:ext cx="3282696" cy="228600"/>
           </a:xfrm>
           <a:prstGeom prst="rect">
             <a:avLst/>
@@ -8144,7 +8146,7 @@
               <a:buNone/>
             </a:pPr>
             <a:r>
-              <a:rPr lang="en-US" sz="1300" b="1" dirty="0">
+              <a:rPr lang="en-US" sz="1220" b="1" dirty="0">
                 <a:solidFill>
                   <a:srgbClr val="0068B7"/>
                 </a:solidFill>
@@ -8154,7 +8156,7 @@
               </a:rPr>
               <a:t>How to validate</a:t>
             </a:r>
-            <a:endParaRPr lang="en-US" sz="1300" dirty="0"/>
+            <a:endParaRPr lang="en-US" sz="1220" dirty="0"/>
           </a:p>
         </p:txBody>
       </p:sp>
@@ -8166,8 +8168,8 @@
         </p:nvSpPr>
         <p:spPr>
           <a:xfrm>
-            <a:off x="7799832" y="4659782"/>
-            <a:ext cx="3145536" cy="899770"/>
+            <a:off x="7708392" y="4828032"/>
+            <a:ext cx="3282696" cy="749808"/>
           </a:xfrm>
           <a:prstGeom prst="rect">
             <a:avLst/>
@@ -8185,7 +8187,7 @@
               <a:buNone/>
             </a:pPr>
             <a:r>
-              <a:rPr lang="en-US" sz="1320" dirty="0">
+              <a:rPr lang="en-US" sz="1220" dirty="0">
                 <a:solidFill>
                   <a:srgbClr val="17364A"/>
                 </a:solidFill>
@@ -8193,9 +8195,9 @@
                 <a:ea typeface="Aptos" pitchFamily="34" charset="-122"/>
                 <a:cs typeface="Aptos" pitchFamily="34" charset="-120"/>
               </a:rPr>
-              <a:t>Connect the concept to data quality, model performance, validation evidence, monitoring measures, and decisions that remain under human control.</a:t>
-            </a:r>
-            <a:endParaRPr lang="en-US" sz="1320" dirty="0"/>
+              <a:t>Connect the concept to data quality, model performance, validation evidence,.</a:t>
+            </a:r>
+            <a:endParaRPr lang="en-US" sz="1220" dirty="0"/>
           </a:p>
         </p:txBody>
       </p:sp>
@@ -8486,8 +8488,8 @@
         </p:nvSpPr>
         <p:spPr>
           <a:xfrm>
-            <a:off x="868680" y="1508760"/>
-            <a:ext cx="6309360" cy="4160520"/>
+            <a:off x="822960" y="1463040"/>
+            <a:ext cx="6565392" cy="4343400"/>
           </a:xfrm>
           <a:prstGeom prst="rect">
             <a:avLst/>
@@ -8505,7 +8507,7 @@
               <a:buNone/>
             </a:pPr>
             <a:r>
-              <a:rPr lang="en-US" sz="2100" dirty="0">
+              <a:rPr lang="en-US" sz="1920" dirty="0">
                 <a:solidFill>
                   <a:srgbClr val="003A63"/>
                 </a:solidFill>
@@ -8515,14 +8517,14 @@
               </a:rPr>
               <a:t>• Create a data pipeline readiness checklist for one AI-supported workflow.</a:t>
             </a:r>
-            <a:endParaRPr lang="en-US" sz="2100" dirty="0"/>
-          </a:p>
-          <a:p>
-            <a:pPr indent="0" marL="0">
-              <a:buNone/>
-            </a:pPr>
-            <a:r>
-              <a:rPr lang="en-US" sz="2100" dirty="0">
+            <a:endParaRPr lang="en-US" sz="1920" dirty="0"/>
+          </a:p>
+          <a:p>
+            <a:pPr indent="0" marL="0">
+              <a:buNone/>
+            </a:pPr>
+            <a:r>
+              <a:rPr lang="en-US" sz="1920" dirty="0">
                 <a:solidFill>
                   <a:srgbClr val="003A63"/>
                 </a:solidFill>
@@ -8530,16 +8532,16 @@
                 <a:ea typeface="Aptos" pitchFamily="34" charset="-122"/>
                 <a:cs typeface="Aptos" pitchFamily="34" charset="-120"/>
               </a:rPr>
-              <a:t>• Identify the data source, update frequency, required fields, validation checks,.</a:t>
-            </a:r>
-            <a:endParaRPr lang="en-US" sz="2100" dirty="0"/>
-          </a:p>
-          <a:p>
-            <a:pPr indent="0" marL="0">
-              <a:buNone/>
-            </a:pPr>
-            <a:r>
-              <a:rPr lang="en-US" sz="2100" dirty="0">
+              <a:t>• Identify the data source, update frequency, required fields, validation.</a:t>
+            </a:r>
+            <a:endParaRPr lang="en-US" sz="1920" dirty="0"/>
+          </a:p>
+          <a:p>
+            <a:pPr indent="0" marL="0">
+              <a:buNone/>
+            </a:pPr>
+            <a:r>
+              <a:rPr lang="en-US" sz="1920" dirty="0">
                 <a:solidFill>
                   <a:srgbClr val="003A63"/>
                 </a:solidFill>
@@ -8547,9 +8549,9 @@
                 <a:ea typeface="Aptos" pitchFamily="34" charset="-122"/>
                 <a:cs typeface="Aptos" pitchFamily="34" charset="-120"/>
               </a:rPr>
-              <a:t>• Document at least three pipeline failure scenarios and describe how each should be detected,.</a:t>
-            </a:r>
-            <a:endParaRPr lang="en-US" sz="2100" dirty="0"/>
+              <a:t>• Document at least three pipeline failure scenarios and describe how each.</a:t>
+            </a:r>
+            <a:endParaRPr lang="en-US" sz="1920" dirty="0"/>
           </a:p>
         </p:txBody>
       </p:sp>
@@ -8561,12 +8563,12 @@
         </p:nvSpPr>
         <p:spPr>
           <a:xfrm>
-            <a:off x="7635240" y="1325880"/>
-            <a:ext cx="3474720" cy="1207008"/>
+            <a:off x="7543800" y="1325880"/>
+            <a:ext cx="3611880" cy="1261872"/>
           </a:xfrm>
           <a:prstGeom prst="roundRect">
             <a:avLst>
-              <a:gd name="adj" fmla="val 9091"/>
+              <a:gd name="adj" fmla="val 8696"/>
             </a:avLst>
           </a:prstGeom>
           <a:solidFill>
@@ -8588,8 +8590,8 @@
         </p:nvSpPr>
         <p:spPr>
           <a:xfrm>
-            <a:off x="7799832" y="1472184"/>
-            <a:ext cx="3145536" cy="256032"/>
+            <a:off x="7708392" y="1453896"/>
+            <a:ext cx="3282696" cy="228600"/>
           </a:xfrm>
           <a:prstGeom prst="rect">
             <a:avLst/>
@@ -8605,7 +8607,7 @@
               <a:buNone/>
             </a:pPr>
             <a:r>
-              <a:rPr lang="en-US" sz="1300" b="1" dirty="0">
+              <a:rPr lang="en-US" sz="1220" b="1" dirty="0">
                 <a:solidFill>
                   <a:srgbClr val="0068B7"/>
                 </a:solidFill>
@@ -8615,7 +8617,7 @@
               </a:rPr>
               <a:t>Data decision</a:t>
             </a:r>
-            <a:endParaRPr lang="en-US" sz="1300" dirty="0"/>
+            <a:endParaRPr lang="en-US" sz="1220" dirty="0"/>
           </a:p>
         </p:txBody>
       </p:sp>
@@ -8627,8 +8629,8 @@
         </p:nvSpPr>
         <p:spPr>
           <a:xfrm>
-            <a:off x="7799832" y="1801368"/>
-            <a:ext cx="3145536" cy="640080"/>
+            <a:off x="7708392" y="1764792"/>
+            <a:ext cx="3282696" cy="749808"/>
           </a:xfrm>
           <a:prstGeom prst="rect">
             <a:avLst/>
@@ -8646,7 +8648,7 @@
               <a:buNone/>
             </a:pPr>
             <a:r>
-              <a:rPr lang="en-US" sz="1320" dirty="0">
+              <a:rPr lang="en-US" sz="1220" dirty="0">
                 <a:solidFill>
                   <a:srgbClr val="17364A"/>
                 </a:solidFill>
@@ -8656,7 +8658,7 @@
               </a:rPr>
               <a:t>Create a data pipeline readiness checklist for one AI-supported workflow.</a:t>
             </a:r>
-            <a:endParaRPr lang="en-US" sz="1320" dirty="0"/>
+            <a:endParaRPr lang="en-US" sz="1220" dirty="0"/>
           </a:p>
         </p:txBody>
       </p:sp>
@@ -8668,12 +8670,12 @@
         </p:nvSpPr>
         <p:spPr>
           <a:xfrm>
-            <a:off x="7635240" y="2670048"/>
-            <a:ext cx="3474720" cy="1377086"/>
+            <a:off x="7543800" y="2724912"/>
+            <a:ext cx="3611880" cy="1527048"/>
           </a:xfrm>
           <a:prstGeom prst="roundRect">
             <a:avLst>
-              <a:gd name="adj" fmla="val 7968"/>
+              <a:gd name="adj" fmla="val 7186"/>
             </a:avLst>
           </a:prstGeom>
           <a:solidFill>
@@ -8695,8 +8697,8 @@
         </p:nvSpPr>
         <p:spPr>
           <a:xfrm>
-            <a:off x="7799832" y="2816352"/>
-            <a:ext cx="3145536" cy="256032"/>
+            <a:off x="7708392" y="2852928"/>
+            <a:ext cx="3282696" cy="228600"/>
           </a:xfrm>
           <a:prstGeom prst="rect">
             <a:avLst/>
@@ -8712,7 +8714,7 @@
               <a:buNone/>
             </a:pPr>
             <a:r>
-              <a:rPr lang="en-US" sz="1300" b="1" dirty="0">
+              <a:rPr lang="en-US" sz="1220" b="1" dirty="0">
                 <a:solidFill>
                   <a:srgbClr val="0068B7"/>
                 </a:solidFill>
@@ -8722,7 +8724,7 @@
               </a:rPr>
               <a:t>Concept checkpoints</a:t>
             </a:r>
-            <a:endParaRPr lang="en-US" sz="1300" dirty="0"/>
+            <a:endParaRPr lang="en-US" sz="1220" dirty="0"/>
           </a:p>
         </p:txBody>
       </p:sp>
@@ -8734,8 +8736,8 @@
         </p:nvSpPr>
         <p:spPr>
           <a:xfrm>
-            <a:off x="7818120" y="3182112"/>
-            <a:ext cx="3090672" cy="718718"/>
+            <a:off x="7726680" y="3182112"/>
+            <a:ext cx="3227832" cy="960120"/>
           </a:xfrm>
           <a:prstGeom prst="rect">
             <a:avLst/>
@@ -8753,7 +8755,7 @@
               <a:buNone/>
             </a:pPr>
             <a:r>
-              <a:rPr lang="en-US" sz="1220" dirty="0">
+              <a:rPr lang="en-US" sz="1140" dirty="0">
                 <a:solidFill>
                   <a:srgbClr val="17364A"/>
                 </a:solidFill>
@@ -8761,16 +8763,16 @@
                 <a:ea typeface="Aptos" pitchFamily="34" charset="-122"/>
                 <a:cs typeface="Aptos" pitchFamily="34" charset="-120"/>
               </a:rPr>
-              <a:t>Identify the data source, update frequency, required fields,.</a:t>
-            </a:r>
-            <a:endParaRPr lang="en-US" sz="1220" dirty="0"/>
-          </a:p>
-          <a:p>
-            <a:pPr indent="0" marL="0">
-              <a:buNone/>
-            </a:pPr>
-            <a:r>
-              <a:rPr lang="en-US" sz="1220" dirty="0">
+              <a:t>Identify the data source, update frequency,.</a:t>
+            </a:r>
+            <a:endParaRPr lang="en-US" sz="1140" dirty="0"/>
+          </a:p>
+          <a:p>
+            <a:pPr indent="0" marL="0">
+              <a:buNone/>
+            </a:pPr>
+            <a:r>
+              <a:rPr lang="en-US" sz="1140" dirty="0">
                 <a:solidFill>
                   <a:srgbClr val="17364A"/>
                 </a:solidFill>
@@ -8778,9 +8780,9 @@
                 <a:ea typeface="Aptos" pitchFamily="34" charset="-122"/>
                 <a:cs typeface="Aptos" pitchFamily="34" charset="-120"/>
               </a:rPr>
-              <a:t>Document at least three pipeline failure scenarios and describe.</a:t>
-            </a:r>
-            <a:endParaRPr lang="en-US" sz="1220" dirty="0"/>
+              <a:t>Document at least three pipeline failure scenarios.</a:t>
+            </a:r>
+            <a:endParaRPr lang="en-US" sz="1140" dirty="0"/>
           </a:p>
         </p:txBody>
       </p:sp>
@@ -8792,12 +8794,12 @@
         </p:nvSpPr>
         <p:spPr>
           <a:xfrm>
-            <a:off x="7635240" y="4184294"/>
-            <a:ext cx="3474720" cy="1466698"/>
+            <a:off x="7543800" y="4389120"/>
+            <a:ext cx="3611880" cy="1261872"/>
           </a:xfrm>
           <a:prstGeom prst="roundRect">
             <a:avLst>
-              <a:gd name="adj" fmla="val 7481"/>
+              <a:gd name="adj" fmla="val 8696"/>
             </a:avLst>
           </a:prstGeom>
           <a:solidFill>
@@ -8819,8 +8821,8 @@
         </p:nvSpPr>
         <p:spPr>
           <a:xfrm>
-            <a:off x="7799832" y="4330598"/>
-            <a:ext cx="3145536" cy="256032"/>
+            <a:off x="7708392" y="4517136"/>
+            <a:ext cx="3282696" cy="228600"/>
           </a:xfrm>
           <a:prstGeom prst="rect">
             <a:avLst/>
@@ -8836,7 +8838,7 @@
               <a:buNone/>
             </a:pPr>
             <a:r>
-              <a:rPr lang="en-US" sz="1300" b="1" dirty="0">
+              <a:rPr lang="en-US" sz="1220" b="1" dirty="0">
                 <a:solidFill>
                   <a:srgbClr val="0068B7"/>
                 </a:solidFill>
@@ -8846,7 +8848,7 @@
               </a:rPr>
               <a:t>How to validate</a:t>
             </a:r>
-            <a:endParaRPr lang="en-US" sz="1300" dirty="0"/>
+            <a:endParaRPr lang="en-US" sz="1220" dirty="0"/>
           </a:p>
         </p:txBody>
       </p:sp>
@@ -8858,8 +8860,8 @@
         </p:nvSpPr>
         <p:spPr>
           <a:xfrm>
-            <a:off x="7799832" y="4659782"/>
-            <a:ext cx="3145536" cy="899770"/>
+            <a:off x="7708392" y="4828032"/>
+            <a:ext cx="3282696" cy="749808"/>
           </a:xfrm>
           <a:prstGeom prst="rect">
             <a:avLst/>
@@ -8877,7 +8879,7 @@
               <a:buNone/>
             </a:pPr>
             <a:r>
-              <a:rPr lang="en-US" sz="1320" dirty="0">
+              <a:rPr lang="en-US" sz="1220" dirty="0">
                 <a:solidFill>
                   <a:srgbClr val="17364A"/>
                 </a:solidFill>
@@ -8885,9 +8887,9 @@
                 <a:ea typeface="Aptos" pitchFamily="34" charset="-122"/>
                 <a:cs typeface="Aptos" pitchFamily="34" charset="-120"/>
               </a:rPr>
-              <a:t>Use the assignment to test whether you can explain the concept, apply it to a realistic public health situation, and identify what would need review before the work moves forward.</a:t>
-            </a:r>
-            <a:endParaRPr lang="en-US" sz="1320" dirty="0"/>
+              <a:t>Use the assignment to test whether you can explain the concept, apply it to a.</a:t>
+            </a:r>
+            <a:endParaRPr lang="en-US" sz="1220" dirty="0"/>
           </a:p>
         </p:txBody>
       </p:sp>
@@ -9178,8 +9180,8 @@
         </p:nvSpPr>
         <p:spPr>
           <a:xfrm>
-            <a:off x="868680" y="1508760"/>
-            <a:ext cx="6309360" cy="4160520"/>
+            <a:off x="822960" y="1463040"/>
+            <a:ext cx="6565392" cy="4343400"/>
           </a:xfrm>
           <a:prstGeom prst="rect">
             <a:avLst/>
@@ -9197,7 +9199,7 @@
               <a:buNone/>
             </a:pPr>
             <a:r>
-              <a:rPr lang="en-US" sz="2100" dirty="0">
+              <a:rPr lang="en-US" sz="1920" dirty="0">
                 <a:solidFill>
                   <a:srgbClr val="003A63"/>
                 </a:solidFill>
@@ -9207,14 +9209,14 @@
               </a:rPr>
               <a:t>• Data pipeline map</a:t>
             </a:r>
-            <a:endParaRPr lang="en-US" sz="2100" dirty="0"/>
-          </a:p>
-          <a:p>
-            <a:pPr indent="0" marL="0">
-              <a:buNone/>
-            </a:pPr>
-            <a:r>
-              <a:rPr lang="en-US" sz="2100" dirty="0">
+            <a:endParaRPr lang="en-US" sz="1920" dirty="0"/>
+          </a:p>
+          <a:p>
+            <a:pPr indent="0" marL="0">
+              <a:buNone/>
+            </a:pPr>
+            <a:r>
+              <a:rPr lang="en-US" sz="1920" dirty="0">
                 <a:solidFill>
                   <a:srgbClr val="003A63"/>
                 </a:solidFill>
@@ -9224,14 +9226,14 @@
               </a:rPr>
               <a:t>• Pipeline readiness checklist</a:t>
             </a:r>
-            <a:endParaRPr lang="en-US" sz="2100" dirty="0"/>
-          </a:p>
-          <a:p>
-            <a:pPr indent="0" marL="0">
-              <a:buNone/>
-            </a:pPr>
-            <a:r>
-              <a:rPr lang="en-US" sz="2100" dirty="0">
+            <a:endParaRPr lang="en-US" sz="1920" dirty="0"/>
+          </a:p>
+          <a:p>
+            <a:pPr indent="0" marL="0">
+              <a:buNone/>
+            </a:pPr>
+            <a:r>
+              <a:rPr lang="en-US" sz="1920" dirty="0">
                 <a:solidFill>
                   <a:srgbClr val="003A63"/>
                 </a:solidFill>
@@ -9241,7 +9243,7 @@
               </a:rPr>
               <a:t>• Failure and escalation plan</a:t>
             </a:r>
-            <a:endParaRPr lang="en-US" sz="2100" dirty="0"/>
+            <a:endParaRPr lang="en-US" sz="1920" dirty="0"/>
           </a:p>
         </p:txBody>
       </p:sp>
@@ -9253,12 +9255,12 @@
         </p:nvSpPr>
         <p:spPr>
           <a:xfrm>
-            <a:off x="7635240" y="1325880"/>
-            <a:ext cx="3474720" cy="1207008"/>
+            <a:off x="7543800" y="1325880"/>
+            <a:ext cx="3611880" cy="1261872"/>
           </a:xfrm>
           <a:prstGeom prst="roundRect">
             <a:avLst>
-              <a:gd name="adj" fmla="val 9091"/>
+              <a:gd name="adj" fmla="val 8696"/>
             </a:avLst>
           </a:prstGeom>
           <a:solidFill>
@@ -9280,8 +9282,8 @@
         </p:nvSpPr>
         <p:spPr>
           <a:xfrm>
-            <a:off x="7799832" y="1472184"/>
-            <a:ext cx="3145536" cy="256032"/>
+            <a:off x="7708392" y="1453896"/>
+            <a:ext cx="3282696" cy="228600"/>
           </a:xfrm>
           <a:prstGeom prst="rect">
             <a:avLst/>
@@ -9297,7 +9299,7 @@
               <a:buNone/>
             </a:pPr>
             <a:r>
-              <a:rPr lang="en-US" sz="1300" b="1" dirty="0">
+              <a:rPr lang="en-US" sz="1220" b="1" dirty="0">
                 <a:solidFill>
                   <a:srgbClr val="0068B7"/>
                 </a:solidFill>
@@ -9307,7 +9309,7 @@
               </a:rPr>
               <a:t>Data decision</a:t>
             </a:r>
-            <a:endParaRPr lang="en-US" sz="1300" dirty="0"/>
+            <a:endParaRPr lang="en-US" sz="1220" dirty="0"/>
           </a:p>
         </p:txBody>
       </p:sp>
@@ -9319,8 +9321,8 @@
         </p:nvSpPr>
         <p:spPr>
           <a:xfrm>
-            <a:off x="7799832" y="1801368"/>
-            <a:ext cx="3145536" cy="640080"/>
+            <a:off x="7708392" y="1764792"/>
+            <a:ext cx="3282696" cy="749808"/>
           </a:xfrm>
           <a:prstGeom prst="rect">
             <a:avLst/>
@@ -9338,7 +9340,7 @@
               <a:buNone/>
             </a:pPr>
             <a:r>
-              <a:rPr lang="en-US" sz="1320" dirty="0">
+              <a:rPr lang="en-US" sz="1220" dirty="0">
                 <a:solidFill>
                   <a:srgbClr val="17364A"/>
                 </a:solidFill>
@@ -9348,7 +9350,7 @@
               </a:rPr>
               <a:t>Data pipeline map</a:t>
             </a:r>
-            <a:endParaRPr lang="en-US" sz="1320" dirty="0"/>
+            <a:endParaRPr lang="en-US" sz="1220" dirty="0"/>
           </a:p>
         </p:txBody>
       </p:sp>
@@ -9360,12 +9362,12 @@
         </p:nvSpPr>
         <p:spPr>
           <a:xfrm>
-            <a:off x="7635240" y="2670048"/>
-            <a:ext cx="3474720" cy="1377086"/>
+            <a:off x="7543800" y="2724912"/>
+            <a:ext cx="3611880" cy="1527048"/>
           </a:xfrm>
           <a:prstGeom prst="roundRect">
             <a:avLst>
-              <a:gd name="adj" fmla="val 7968"/>
+              <a:gd name="adj" fmla="val 7186"/>
             </a:avLst>
           </a:prstGeom>
           <a:solidFill>
@@ -9387,8 +9389,8 @@
         </p:nvSpPr>
         <p:spPr>
           <a:xfrm>
-            <a:off x="7799832" y="2816352"/>
-            <a:ext cx="3145536" cy="256032"/>
+            <a:off x="7708392" y="2852928"/>
+            <a:ext cx="3282696" cy="228600"/>
           </a:xfrm>
           <a:prstGeom prst="rect">
             <a:avLst/>
@@ -9404,7 +9406,7 @@
               <a:buNone/>
             </a:pPr>
             <a:r>
-              <a:rPr lang="en-US" sz="1300" b="1" dirty="0">
+              <a:rPr lang="en-US" sz="1220" b="1" dirty="0">
                 <a:solidFill>
                   <a:srgbClr val="0068B7"/>
                 </a:solidFill>
@@ -9414,7 +9416,7 @@
               </a:rPr>
               <a:t>Concept checkpoints</a:t>
             </a:r>
-            <a:endParaRPr lang="en-US" sz="1300" dirty="0"/>
+            <a:endParaRPr lang="en-US" sz="1220" dirty="0"/>
           </a:p>
         </p:txBody>
       </p:sp>
@@ -9426,8 +9428,8 @@
         </p:nvSpPr>
         <p:spPr>
           <a:xfrm>
-            <a:off x="7818120" y="3182112"/>
-            <a:ext cx="3090672" cy="718718"/>
+            <a:off x="7726680" y="3182112"/>
+            <a:ext cx="3227832" cy="960120"/>
           </a:xfrm>
           <a:prstGeom prst="rect">
             <a:avLst/>
@@ -9445,7 +9447,7 @@
               <a:buNone/>
             </a:pPr>
             <a:r>
-              <a:rPr lang="en-US" sz="1220" dirty="0">
+              <a:rPr lang="en-US" sz="1140" dirty="0">
                 <a:solidFill>
                   <a:srgbClr val="17364A"/>
                 </a:solidFill>
@@ -9455,14 +9457,14 @@
               </a:rPr>
               <a:t>Data pipeline map</a:t>
             </a:r>
-            <a:endParaRPr lang="en-US" sz="1220" dirty="0"/>
-          </a:p>
-          <a:p>
-            <a:pPr indent="0" marL="0">
-              <a:buNone/>
-            </a:pPr>
-            <a:r>
-              <a:rPr lang="en-US" sz="1220" dirty="0">
+            <a:endParaRPr lang="en-US" sz="1140" dirty="0"/>
+          </a:p>
+          <a:p>
+            <a:pPr indent="0" marL="0">
+              <a:buNone/>
+            </a:pPr>
+            <a:r>
+              <a:rPr lang="en-US" sz="1140" dirty="0">
                 <a:solidFill>
                   <a:srgbClr val="17364A"/>
                 </a:solidFill>
@@ -9472,14 +9474,14 @@
               </a:rPr>
               <a:t>Pipeline readiness checklist</a:t>
             </a:r>
-            <a:endParaRPr lang="en-US" sz="1220" dirty="0"/>
-          </a:p>
-          <a:p>
-            <a:pPr indent="0" marL="0">
-              <a:buNone/>
-            </a:pPr>
-            <a:r>
-              <a:rPr lang="en-US" sz="1220" dirty="0">
+            <a:endParaRPr lang="en-US" sz="1140" dirty="0"/>
+          </a:p>
+          <a:p>
+            <a:pPr indent="0" marL="0">
+              <a:buNone/>
+            </a:pPr>
+            <a:r>
+              <a:rPr lang="en-US" sz="1140" dirty="0">
                 <a:solidFill>
                   <a:srgbClr val="17364A"/>
                 </a:solidFill>
@@ -9489,7 +9491,7 @@
               </a:rPr>
               <a:t>Failure and escalation plan</a:t>
             </a:r>
-            <a:endParaRPr lang="en-US" sz="1220" dirty="0"/>
+            <a:endParaRPr lang="en-US" sz="1140" dirty="0"/>
           </a:p>
         </p:txBody>
       </p:sp>
@@ -9501,12 +9503,12 @@
         </p:nvSpPr>
         <p:spPr>
           <a:xfrm>
-            <a:off x="7635240" y="4184294"/>
-            <a:ext cx="3474720" cy="1466698"/>
+            <a:off x="7543800" y="4389120"/>
+            <a:ext cx="3611880" cy="1261872"/>
           </a:xfrm>
           <a:prstGeom prst="roundRect">
             <a:avLst>
-              <a:gd name="adj" fmla="val 7481"/>
+              <a:gd name="adj" fmla="val 8696"/>
             </a:avLst>
           </a:prstGeom>
           <a:solidFill>
@@ -9528,8 +9530,8 @@
         </p:nvSpPr>
         <p:spPr>
           <a:xfrm>
-            <a:off x="7799832" y="4330598"/>
-            <a:ext cx="3145536" cy="256032"/>
+            <a:off x="7708392" y="4517136"/>
+            <a:ext cx="3282696" cy="228600"/>
           </a:xfrm>
           <a:prstGeom prst="rect">
             <a:avLst/>
@@ -9545,7 +9547,7 @@
               <a:buNone/>
             </a:pPr>
             <a:r>
-              <a:rPr lang="en-US" sz="1300" b="1" dirty="0">
+              <a:rPr lang="en-US" sz="1220" b="1" dirty="0">
                 <a:solidFill>
                   <a:srgbClr val="0068B7"/>
                 </a:solidFill>
@@ -9555,7 +9557,7 @@
               </a:rPr>
               <a:t>How to validate</a:t>
             </a:r>
-            <a:endParaRPr lang="en-US" sz="1300" dirty="0"/>
+            <a:endParaRPr lang="en-US" sz="1220" dirty="0"/>
           </a:p>
         </p:txBody>
       </p:sp>
@@ -9567,8 +9569,8 @@
         </p:nvSpPr>
         <p:spPr>
           <a:xfrm>
-            <a:off x="7799832" y="4659782"/>
-            <a:ext cx="3145536" cy="899770"/>
+            <a:off x="7708392" y="4828032"/>
+            <a:ext cx="3282696" cy="749808"/>
           </a:xfrm>
           <a:prstGeom prst="rect">
             <a:avLst/>
@@ -9586,7 +9588,7 @@
               <a:buNone/>
             </a:pPr>
             <a:r>
-              <a:rPr lang="en-US" sz="1320" dirty="0">
+              <a:rPr lang="en-US" sz="1220" dirty="0">
                 <a:solidFill>
                   <a:srgbClr val="17364A"/>
                 </a:solidFill>
@@ -9594,9 +9596,9 @@
                 <a:ea typeface="Aptos" pitchFamily="34" charset="-122"/>
                 <a:cs typeface="Aptos" pitchFamily="34" charset="-120"/>
               </a:rPr>
-              <a:t>Connect the concept to data quality, model performance, validation evidence, monitoring measures, and decisions that remain under human control.</a:t>
-            </a:r>
-            <a:endParaRPr lang="en-US" sz="1320" dirty="0"/>
+              <a:t>Connect the concept to data quality, model performance, validation evidence,.</a:t>
+            </a:r>
+            <a:endParaRPr lang="en-US" sz="1220" dirty="0"/>
           </a:p>
         </p:txBody>
       </p:sp>
@@ -9887,8 +9889,8 @@
         </p:nvSpPr>
         <p:spPr>
           <a:xfrm>
-            <a:off x="868680" y="1508760"/>
-            <a:ext cx="6309360" cy="4160520"/>
+            <a:off x="822960" y="1463040"/>
+            <a:ext cx="6565392" cy="4343400"/>
           </a:xfrm>
           <a:prstGeom prst="rect">
             <a:avLst/>
@@ -9906,7 +9908,7 @@
               <a:buNone/>
             </a:pPr>
             <a:r>
-              <a:rPr lang="en-US" sz="2100" dirty="0">
+              <a:rPr lang="en-US" sz="1920" dirty="0">
                 <a:solidFill>
                   <a:srgbClr val="003A63"/>
                 </a:solidFill>
@@ -9916,7 +9918,7 @@
               </a:rPr>
               <a:t>• Known data limitations statement</a:t>
             </a:r>
-            <a:endParaRPr lang="en-US" sz="2100" dirty="0"/>
+            <a:endParaRPr lang="en-US" sz="1920" dirty="0"/>
           </a:p>
         </p:txBody>
       </p:sp>
@@ -9928,12 +9930,12 @@
         </p:nvSpPr>
         <p:spPr>
           <a:xfrm>
-            <a:off x="7635240" y="1325880"/>
-            <a:ext cx="3474720" cy="1207008"/>
+            <a:off x="7543800" y="1325880"/>
+            <a:ext cx="3611880" cy="1261872"/>
           </a:xfrm>
           <a:prstGeom prst="roundRect">
             <a:avLst>
-              <a:gd name="adj" fmla="val 9091"/>
+              <a:gd name="adj" fmla="val 8696"/>
             </a:avLst>
           </a:prstGeom>
           <a:solidFill>
@@ -9955,8 +9957,8 @@
         </p:nvSpPr>
         <p:spPr>
           <a:xfrm>
-            <a:off x="7799832" y="1472184"/>
-            <a:ext cx="3145536" cy="256032"/>
+            <a:off x="7708392" y="1453896"/>
+            <a:ext cx="3282696" cy="228600"/>
           </a:xfrm>
           <a:prstGeom prst="rect">
             <a:avLst/>
@@ -9972,7 +9974,7 @@
               <a:buNone/>
             </a:pPr>
             <a:r>
-              <a:rPr lang="en-US" sz="1300" b="1" dirty="0">
+              <a:rPr lang="en-US" sz="1220" b="1" dirty="0">
                 <a:solidFill>
                   <a:srgbClr val="0068B7"/>
                 </a:solidFill>
@@ -9982,7 +9984,7 @@
               </a:rPr>
               <a:t>Data decision</a:t>
             </a:r>
-            <a:endParaRPr lang="en-US" sz="1300" dirty="0"/>
+            <a:endParaRPr lang="en-US" sz="1220" dirty="0"/>
           </a:p>
         </p:txBody>
       </p:sp>
@@ -9994,8 +9996,8 @@
         </p:nvSpPr>
         <p:spPr>
           <a:xfrm>
-            <a:off x="7799832" y="1801368"/>
-            <a:ext cx="3145536" cy="640080"/>
+            <a:off x="7708392" y="1764792"/>
+            <a:ext cx="3282696" cy="749808"/>
           </a:xfrm>
           <a:prstGeom prst="rect">
             <a:avLst/>
@@ -10013,7 +10015,7 @@
               <a:buNone/>
             </a:pPr>
             <a:r>
-              <a:rPr lang="en-US" sz="1320" dirty="0">
+              <a:rPr lang="en-US" sz="1220" dirty="0">
                 <a:solidFill>
                   <a:srgbClr val="17364A"/>
                 </a:solidFill>
@@ -10023,7 +10025,7 @@
               </a:rPr>
               <a:t>Known data limitations statement</a:t>
             </a:r>
-            <a:endParaRPr lang="en-US" sz="1320" dirty="0"/>
+            <a:endParaRPr lang="en-US" sz="1220" dirty="0"/>
           </a:p>
         </p:txBody>
       </p:sp>
@@ -10035,12 +10037,12 @@
         </p:nvSpPr>
         <p:spPr>
           <a:xfrm>
-            <a:off x="7635240" y="2670048"/>
-            <a:ext cx="3474720" cy="1377086"/>
+            <a:off x="7543800" y="2724912"/>
+            <a:ext cx="3611880" cy="1527048"/>
           </a:xfrm>
           <a:prstGeom prst="roundRect">
             <a:avLst>
-              <a:gd name="adj" fmla="val 7968"/>
+              <a:gd name="adj" fmla="val 7186"/>
             </a:avLst>
           </a:prstGeom>
           <a:solidFill>
@@ -10062,8 +10064,8 @@
         </p:nvSpPr>
         <p:spPr>
           <a:xfrm>
-            <a:off x="7799832" y="2816352"/>
-            <a:ext cx="3145536" cy="256032"/>
+            <a:off x="7708392" y="2852928"/>
+            <a:ext cx="3282696" cy="228600"/>
           </a:xfrm>
           <a:prstGeom prst="rect">
             <a:avLst/>
@@ -10079,7 +10081,7 @@
               <a:buNone/>
             </a:pPr>
             <a:r>
-              <a:rPr lang="en-US" sz="1300" b="1" dirty="0">
+              <a:rPr lang="en-US" sz="1220" b="1" dirty="0">
                 <a:solidFill>
                   <a:srgbClr val="0068B7"/>
                 </a:solidFill>
@@ -10089,7 +10091,7 @@
               </a:rPr>
               <a:t>Concept checkpoints</a:t>
             </a:r>
-            <a:endParaRPr lang="en-US" sz="1300" dirty="0"/>
+            <a:endParaRPr lang="en-US" sz="1220" dirty="0"/>
           </a:p>
         </p:txBody>
       </p:sp>
@@ -10101,8 +10103,8 @@
         </p:nvSpPr>
         <p:spPr>
           <a:xfrm>
-            <a:off x="7818120" y="3182112"/>
-            <a:ext cx="3090672" cy="718718"/>
+            <a:off x="7726680" y="3182112"/>
+            <a:ext cx="3227832" cy="960120"/>
           </a:xfrm>
           <a:prstGeom prst="rect">
             <a:avLst/>
@@ -10120,7 +10122,7 @@
               <a:buNone/>
             </a:pPr>
             <a:r>
-              <a:rPr lang="en-US" sz="1220" dirty="0">
+              <a:rPr lang="en-US" sz="1140" dirty="0">
                 <a:solidFill>
                   <a:srgbClr val="17364A"/>
                 </a:solidFill>
@@ -10130,7 +10132,7 @@
               </a:rPr>
               <a:t>Known data limitations statement</a:t>
             </a:r>
-            <a:endParaRPr lang="en-US" sz="1220" dirty="0"/>
+            <a:endParaRPr lang="en-US" sz="1140" dirty="0"/>
           </a:p>
         </p:txBody>
       </p:sp>
@@ -10142,12 +10144,12 @@
         </p:nvSpPr>
         <p:spPr>
           <a:xfrm>
-            <a:off x="7635240" y="4184294"/>
-            <a:ext cx="3474720" cy="1466698"/>
+            <a:off x="7543800" y="4389120"/>
+            <a:ext cx="3611880" cy="1261872"/>
           </a:xfrm>
           <a:prstGeom prst="roundRect">
             <a:avLst>
-              <a:gd name="adj" fmla="val 7481"/>
+              <a:gd name="adj" fmla="val 8696"/>
             </a:avLst>
           </a:prstGeom>
           <a:solidFill>
@@ -10169,8 +10171,8 @@
         </p:nvSpPr>
         <p:spPr>
           <a:xfrm>
-            <a:off x="7799832" y="4330598"/>
-            <a:ext cx="3145536" cy="256032"/>
+            <a:off x="7708392" y="4517136"/>
+            <a:ext cx="3282696" cy="228600"/>
           </a:xfrm>
           <a:prstGeom prst="rect">
             <a:avLst/>
@@ -10186,7 +10188,7 @@
               <a:buNone/>
             </a:pPr>
             <a:r>
-              <a:rPr lang="en-US" sz="1300" b="1" dirty="0">
+              <a:rPr lang="en-US" sz="1220" b="1" dirty="0">
                 <a:solidFill>
                   <a:srgbClr val="0068B7"/>
                 </a:solidFill>
@@ -10196,7 +10198,7 @@
               </a:rPr>
               <a:t>How to validate</a:t>
             </a:r>
-            <a:endParaRPr lang="en-US" sz="1300" dirty="0"/>
+            <a:endParaRPr lang="en-US" sz="1220" dirty="0"/>
           </a:p>
         </p:txBody>
       </p:sp>
@@ -10208,8 +10210,8 @@
         </p:nvSpPr>
         <p:spPr>
           <a:xfrm>
-            <a:off x="7799832" y="4659782"/>
-            <a:ext cx="3145536" cy="899770"/>
+            <a:off x="7708392" y="4828032"/>
+            <a:ext cx="3282696" cy="749808"/>
           </a:xfrm>
           <a:prstGeom prst="rect">
             <a:avLst/>
@@ -10227,7 +10229,7 @@
               <a:buNone/>
             </a:pPr>
             <a:r>
-              <a:rPr lang="en-US" sz="1320" dirty="0">
+              <a:rPr lang="en-US" sz="1220" dirty="0">
                 <a:solidFill>
                   <a:srgbClr val="17364A"/>
                 </a:solidFill>
@@ -10235,9 +10237,9 @@
                 <a:ea typeface="Aptos" pitchFamily="34" charset="-122"/>
                 <a:cs typeface="Aptos" pitchFamily="34" charset="-120"/>
               </a:rPr>
-              <a:t>Connect the concept to data quality, model performance, validation evidence, monitoring measures, and decisions that remain under human control.</a:t>
-            </a:r>
-            <a:endParaRPr lang="en-US" sz="1320" dirty="0"/>
+              <a:t>Connect the concept to data quality, model performance, validation evidence,.</a:t>
+            </a:r>
+            <a:endParaRPr lang="en-US" sz="1220" dirty="0"/>
           </a:p>
         </p:txBody>
       </p:sp>
@@ -10555,7 +10557,7 @@
                 <a:ea typeface="Aptos" pitchFamily="34" charset="-122"/>
                 <a:cs typeface="Aptos" pitchFamily="34" charset="-120"/>
               </a:rPr>
-              <a:t>• Data pipelines are the operational pathways that move public health data from source systems.</a:t>
+              <a:t>• Data pipelines are the operational pathways that move public health data.</a:t>
             </a:r>
             <a:endParaRPr lang="en-US" sz="2100" dirty="0"/>
           </a:p>
@@ -10589,7 +10591,7 @@
                 <a:ea typeface="Aptos" pitchFamily="34" charset="-122"/>
                 <a:cs typeface="Aptos" pitchFamily="34" charset="-120"/>
               </a:rPr>
-              <a:t>• A model that classifies cases, summarizes laboratory reports, or predicts service demand can.</a:t>
+              <a:t>• A model that classifies cases, summarizes laboratory reports, or predicts.</a:t>
             </a:r>
             <a:endParaRPr lang="en-US" sz="2100" dirty="0"/>
           </a:p>
@@ -10630,8 +10632,8 @@
         </p:nvSpPr>
         <p:spPr>
           <a:xfrm>
-            <a:off x="8074152" y="1563624"/>
-            <a:ext cx="2825496" cy="256032"/>
+            <a:off x="8074152" y="1545336"/>
+            <a:ext cx="2825496" cy="228600"/>
           </a:xfrm>
           <a:prstGeom prst="rect">
             <a:avLst/>
@@ -10647,7 +10649,7 @@
               <a:buNone/>
             </a:pPr>
             <a:r>
-              <a:rPr lang="en-US" sz="1300" b="1" dirty="0">
+              <a:rPr lang="en-US" sz="1220" b="1" dirty="0">
                 <a:solidFill>
                   <a:srgbClr val="0068B7"/>
                 </a:solidFill>
@@ -10657,7 +10659,7 @@
               </a:rPr>
               <a:t>Module details</a:t>
             </a:r>
-            <a:endParaRPr lang="en-US" sz="1300" dirty="0"/>
+            <a:endParaRPr lang="en-US" sz="1220" dirty="0"/>
           </a:p>
         </p:txBody>
       </p:sp>
@@ -10669,8 +10671,8 @@
         </p:nvSpPr>
         <p:spPr>
           <a:xfrm>
-            <a:off x="8074152" y="1892808"/>
-            <a:ext cx="2825496" cy="1353312"/>
+            <a:off x="8074152" y="1856232"/>
+            <a:ext cx="2825496" cy="1408176"/>
           </a:xfrm>
           <a:prstGeom prst="rect">
             <a:avLst/>
@@ -10688,7 +10690,7 @@
               <a:buNone/>
             </a:pPr>
             <a:r>
-              <a:rPr lang="en-US" sz="1320" dirty="0">
+              <a:rPr lang="en-US" sz="1220" dirty="0">
                 <a:solidFill>
                   <a:srgbClr val="17364A"/>
                 </a:solidFill>
@@ -10696,9 +10698,9 @@
                 <a:ea typeface="Aptos" pitchFamily="34" charset="-122"/>
                 <a:cs typeface="Aptos" pitchFamily="34" charset="-120"/>
               </a:rPr>
-              <a:t>Level: applied/foundational Primary track: Technical Architecture Track Appears in tracks: technical-architecture</a:t>
-            </a:r>
-            <a:endParaRPr lang="en-US" sz="1320" dirty="0"/>
+              <a:t>Level: applied/foundational Primary track: Technical Architecture Track Appears.</a:t>
+            </a:r>
+            <a:endParaRPr lang="en-US" sz="1220" dirty="0"/>
           </a:p>
         </p:txBody>
       </p:sp>
@@ -10737,8 +10739,8 @@
         </p:nvSpPr>
         <p:spPr>
           <a:xfrm>
-            <a:off x="8074152" y="3822192"/>
-            <a:ext cx="2825496" cy="256032"/>
+            <a:off x="8074152" y="3803904"/>
+            <a:ext cx="2825496" cy="228600"/>
           </a:xfrm>
           <a:prstGeom prst="rect">
             <a:avLst/>
@@ -10754,7 +10756,7 @@
               <a:buNone/>
             </a:pPr>
             <a:r>
-              <a:rPr lang="en-US" sz="1300" b="1" dirty="0">
+              <a:rPr lang="en-US" sz="1220" b="1" dirty="0">
                 <a:solidFill>
                   <a:srgbClr val="0068B7"/>
                 </a:solidFill>
@@ -10764,7 +10766,7 @@
               </a:rPr>
               <a:t>Learning sequence</a:t>
             </a:r>
-            <a:endParaRPr lang="en-US" sz="1300" dirty="0"/>
+            <a:endParaRPr lang="en-US" sz="1220" dirty="0"/>
           </a:p>
         </p:txBody>
       </p:sp>
@@ -10776,8 +10778,8 @@
         </p:nvSpPr>
         <p:spPr>
           <a:xfrm>
-            <a:off x="8092440" y="4187952"/>
-            <a:ext cx="2770632" cy="1033272"/>
+            <a:off x="8092440" y="4133088"/>
+            <a:ext cx="2770632" cy="1124712"/>
           </a:xfrm>
           <a:prstGeom prst="rect">
             <a:avLst/>
@@ -10795,7 +10797,7 @@
               <a:buNone/>
             </a:pPr>
             <a:r>
-              <a:rPr lang="en-US" sz="1220" dirty="0">
+              <a:rPr lang="en-US" sz="1140" dirty="0">
                 <a:solidFill>
                   <a:srgbClr val="17364A"/>
                 </a:solidFill>
@@ -10805,14 +10807,14 @@
               </a:rPr>
               <a:t>Read the module for shared vocabulary and context.</a:t>
             </a:r>
-            <a:endParaRPr lang="en-US" sz="1220" dirty="0"/>
-          </a:p>
-          <a:p>
-            <a:pPr indent="0" marL="0">
-              <a:buNone/>
-            </a:pPr>
-            <a:r>
-              <a:rPr lang="en-US" sz="1220" dirty="0">
+            <a:endParaRPr lang="en-US" sz="1140" dirty="0"/>
+          </a:p>
+          <a:p>
+            <a:pPr indent="0" marL="0">
+              <a:buNone/>
+            </a:pPr>
+            <a:r>
+              <a:rPr lang="en-US" sz="1140" dirty="0">
                 <a:solidFill>
                   <a:srgbClr val="17364A"/>
                 </a:solidFill>
@@ -10820,16 +10822,16 @@
                 <a:ea typeface="Aptos" pitchFamily="34" charset="-122"/>
                 <a:cs typeface="Aptos" pitchFamily="34" charset="-120"/>
               </a:rPr>
-              <a:t>Complete the practical exercise to apply the concept.</a:t>
-            </a:r>
-            <a:endParaRPr lang="en-US" sz="1220" dirty="0"/>
-          </a:p>
-          <a:p>
-            <a:pPr indent="0" marL="0">
-              <a:buNone/>
-            </a:pPr>
-            <a:r>
-              <a:rPr lang="en-US" sz="1220" dirty="0">
+              <a:t>Complete the practical exercise to apply the.</a:t>
+            </a:r>
+            <a:endParaRPr lang="en-US" sz="1140" dirty="0"/>
+          </a:p>
+          <a:p>
+            <a:pPr indent="0" marL="0">
+              <a:buNone/>
+            </a:pPr>
+            <a:r>
+              <a:rPr lang="en-US" sz="1140" dirty="0">
                 <a:solidFill>
                   <a:srgbClr val="17364A"/>
                 </a:solidFill>
@@ -10839,7 +10841,7 @@
               </a:rPr>
               <a:t>Use the notes and references for deeper review.</a:t>
             </a:r>
-            <a:endParaRPr lang="en-US" sz="1220" dirty="0"/>
+            <a:endParaRPr lang="en-US" sz="1140" dirty="0"/>
           </a:p>
         </p:txBody>
       </p:sp>
@@ -11130,8 +11132,8 @@
         </p:nvSpPr>
         <p:spPr>
           <a:xfrm>
-            <a:off x="868680" y="1508760"/>
-            <a:ext cx="6309360" cy="4160520"/>
+            <a:off x="822960" y="1463040"/>
+            <a:ext cx="6565392" cy="4343400"/>
           </a:xfrm>
           <a:prstGeom prst="rect">
             <a:avLst/>
@@ -11149,7 +11151,7 @@
               <a:buNone/>
             </a:pPr>
             <a:r>
-              <a:rPr lang="en-US" sz="2100" dirty="0">
+              <a:rPr lang="en-US" sz="1920" dirty="0">
                 <a:solidFill>
                   <a:srgbClr val="003A63"/>
                 </a:solidFill>
@@ -11159,14 +11161,14 @@
               </a:rPr>
               <a:t>• Data pipeline map</a:t>
             </a:r>
-            <a:endParaRPr lang="en-US" sz="2100" dirty="0"/>
-          </a:p>
-          <a:p>
-            <a:pPr indent="0" marL="0">
-              <a:buNone/>
-            </a:pPr>
-            <a:r>
-              <a:rPr lang="en-US" sz="2100" dirty="0">
+            <a:endParaRPr lang="en-US" sz="1920" dirty="0"/>
+          </a:p>
+          <a:p>
+            <a:pPr indent="0" marL="0">
+              <a:buNone/>
+            </a:pPr>
+            <a:r>
+              <a:rPr lang="en-US" sz="1920" dirty="0">
                 <a:solidFill>
                   <a:srgbClr val="003A63"/>
                 </a:solidFill>
@@ -11176,14 +11178,14 @@
               </a:rPr>
               <a:t>• Pipeline readiness checklist</a:t>
             </a:r>
-            <a:endParaRPr lang="en-US" sz="2100" dirty="0"/>
-          </a:p>
-          <a:p>
-            <a:pPr indent="0" marL="0">
-              <a:buNone/>
-            </a:pPr>
-            <a:r>
-              <a:rPr lang="en-US" sz="2100" dirty="0">
+            <a:endParaRPr lang="en-US" sz="1920" dirty="0"/>
+          </a:p>
+          <a:p>
+            <a:pPr indent="0" marL="0">
+              <a:buNone/>
+            </a:pPr>
+            <a:r>
+              <a:rPr lang="en-US" sz="1920" dirty="0">
                 <a:solidFill>
                   <a:srgbClr val="003A63"/>
                 </a:solidFill>
@@ -11193,7 +11195,7 @@
               </a:rPr>
               <a:t>• Failure and escalation plan</a:t>
             </a:r>
-            <a:endParaRPr lang="en-US" sz="2100" dirty="0"/>
+            <a:endParaRPr lang="en-US" sz="1920" dirty="0"/>
           </a:p>
         </p:txBody>
       </p:sp>
@@ -11205,12 +11207,12 @@
         </p:nvSpPr>
         <p:spPr>
           <a:xfrm>
-            <a:off x="7635240" y="1325880"/>
-            <a:ext cx="3474720" cy="1207008"/>
+            <a:off x="7543800" y="1325880"/>
+            <a:ext cx="3611880" cy="1261872"/>
           </a:xfrm>
           <a:prstGeom prst="roundRect">
             <a:avLst>
-              <a:gd name="adj" fmla="val 9091"/>
+              <a:gd name="adj" fmla="val 8696"/>
             </a:avLst>
           </a:prstGeom>
           <a:solidFill>
@@ -11232,8 +11234,8 @@
         </p:nvSpPr>
         <p:spPr>
           <a:xfrm>
-            <a:off x="7799832" y="1472184"/>
-            <a:ext cx="3145536" cy="256032"/>
+            <a:off x="7708392" y="1453896"/>
+            <a:ext cx="3282696" cy="228600"/>
           </a:xfrm>
           <a:prstGeom prst="rect">
             <a:avLst/>
@@ -11249,7 +11251,7 @@
               <a:buNone/>
             </a:pPr>
             <a:r>
-              <a:rPr lang="en-US" sz="1300" b="1" dirty="0">
+              <a:rPr lang="en-US" sz="1220" b="1" dirty="0">
                 <a:solidFill>
                   <a:srgbClr val="0068B7"/>
                 </a:solidFill>
@@ -11259,7 +11261,7 @@
               </a:rPr>
               <a:t>Data decision</a:t>
             </a:r>
-            <a:endParaRPr lang="en-US" sz="1300" dirty="0"/>
+            <a:endParaRPr lang="en-US" sz="1220" dirty="0"/>
           </a:p>
         </p:txBody>
       </p:sp>
@@ -11271,8 +11273,8 @@
         </p:nvSpPr>
         <p:spPr>
           <a:xfrm>
-            <a:off x="7799832" y="1801368"/>
-            <a:ext cx="3145536" cy="640080"/>
+            <a:off x="7708392" y="1764792"/>
+            <a:ext cx="3282696" cy="749808"/>
           </a:xfrm>
           <a:prstGeom prst="rect">
             <a:avLst/>
@@ -11290,7 +11292,7 @@
               <a:buNone/>
             </a:pPr>
             <a:r>
-              <a:rPr lang="en-US" sz="1320" dirty="0">
+              <a:rPr lang="en-US" sz="1220" dirty="0">
                 <a:solidFill>
                   <a:srgbClr val="17364A"/>
                 </a:solidFill>
@@ -11300,7 +11302,7 @@
               </a:rPr>
               <a:t>Data pipeline map</a:t>
             </a:r>
-            <a:endParaRPr lang="en-US" sz="1320" dirty="0"/>
+            <a:endParaRPr lang="en-US" sz="1220" dirty="0"/>
           </a:p>
         </p:txBody>
       </p:sp>
@@ -11312,12 +11314,12 @@
         </p:nvSpPr>
         <p:spPr>
           <a:xfrm>
-            <a:off x="7635240" y="2670048"/>
-            <a:ext cx="3474720" cy="1377086"/>
+            <a:off x="7543800" y="2724912"/>
+            <a:ext cx="3611880" cy="1527048"/>
           </a:xfrm>
           <a:prstGeom prst="roundRect">
             <a:avLst>
-              <a:gd name="adj" fmla="val 7968"/>
+              <a:gd name="adj" fmla="val 7186"/>
             </a:avLst>
           </a:prstGeom>
           <a:solidFill>
@@ -11339,8 +11341,8 @@
         </p:nvSpPr>
         <p:spPr>
           <a:xfrm>
-            <a:off x="7799832" y="2816352"/>
-            <a:ext cx="3145536" cy="256032"/>
+            <a:off x="7708392" y="2852928"/>
+            <a:ext cx="3282696" cy="228600"/>
           </a:xfrm>
           <a:prstGeom prst="rect">
             <a:avLst/>
@@ -11356,7 +11358,7 @@
               <a:buNone/>
             </a:pPr>
             <a:r>
-              <a:rPr lang="en-US" sz="1300" b="1" dirty="0">
+              <a:rPr lang="en-US" sz="1220" b="1" dirty="0">
                 <a:solidFill>
                   <a:srgbClr val="0068B7"/>
                 </a:solidFill>
@@ -11366,7 +11368,7 @@
               </a:rPr>
               <a:t>Concept checkpoints</a:t>
             </a:r>
-            <a:endParaRPr lang="en-US" sz="1300" dirty="0"/>
+            <a:endParaRPr lang="en-US" sz="1220" dirty="0"/>
           </a:p>
         </p:txBody>
       </p:sp>
@@ -11378,8 +11380,8 @@
         </p:nvSpPr>
         <p:spPr>
           <a:xfrm>
-            <a:off x="7818120" y="3182112"/>
-            <a:ext cx="3090672" cy="718718"/>
+            <a:off x="7726680" y="3182112"/>
+            <a:ext cx="3227832" cy="960120"/>
           </a:xfrm>
           <a:prstGeom prst="rect">
             <a:avLst/>
@@ -11397,7 +11399,7 @@
               <a:buNone/>
             </a:pPr>
             <a:r>
-              <a:rPr lang="en-US" sz="1220" dirty="0">
+              <a:rPr lang="en-US" sz="1140" dirty="0">
                 <a:solidFill>
                   <a:srgbClr val="17364A"/>
                 </a:solidFill>
@@ -11407,14 +11409,14 @@
               </a:rPr>
               <a:t>Data pipeline map</a:t>
             </a:r>
-            <a:endParaRPr lang="en-US" sz="1220" dirty="0"/>
-          </a:p>
-          <a:p>
-            <a:pPr indent="0" marL="0">
-              <a:buNone/>
-            </a:pPr>
-            <a:r>
-              <a:rPr lang="en-US" sz="1220" dirty="0">
+            <a:endParaRPr lang="en-US" sz="1140" dirty="0"/>
+          </a:p>
+          <a:p>
+            <a:pPr indent="0" marL="0">
+              <a:buNone/>
+            </a:pPr>
+            <a:r>
+              <a:rPr lang="en-US" sz="1140" dirty="0">
                 <a:solidFill>
                   <a:srgbClr val="17364A"/>
                 </a:solidFill>
@@ -11424,14 +11426,14 @@
               </a:rPr>
               <a:t>Pipeline readiness checklist</a:t>
             </a:r>
-            <a:endParaRPr lang="en-US" sz="1220" dirty="0"/>
-          </a:p>
-          <a:p>
-            <a:pPr indent="0" marL="0">
-              <a:buNone/>
-            </a:pPr>
-            <a:r>
-              <a:rPr lang="en-US" sz="1220" dirty="0">
+            <a:endParaRPr lang="en-US" sz="1140" dirty="0"/>
+          </a:p>
+          <a:p>
+            <a:pPr indent="0" marL="0">
+              <a:buNone/>
+            </a:pPr>
+            <a:r>
+              <a:rPr lang="en-US" sz="1140" dirty="0">
                 <a:solidFill>
                   <a:srgbClr val="17364A"/>
                 </a:solidFill>
@@ -11441,7 +11443,7 @@
               </a:rPr>
               <a:t>Failure and escalation plan</a:t>
             </a:r>
-            <a:endParaRPr lang="en-US" sz="1220" dirty="0"/>
+            <a:endParaRPr lang="en-US" sz="1140" dirty="0"/>
           </a:p>
         </p:txBody>
       </p:sp>
@@ -11453,12 +11455,12 @@
         </p:nvSpPr>
         <p:spPr>
           <a:xfrm>
-            <a:off x="7635240" y="4184294"/>
-            <a:ext cx="3474720" cy="1466698"/>
+            <a:off x="7543800" y="4389120"/>
+            <a:ext cx="3611880" cy="1261872"/>
           </a:xfrm>
           <a:prstGeom prst="roundRect">
             <a:avLst>
-              <a:gd name="adj" fmla="val 7481"/>
+              <a:gd name="adj" fmla="val 8696"/>
             </a:avLst>
           </a:prstGeom>
           <a:solidFill>
@@ -11480,8 +11482,8 @@
         </p:nvSpPr>
         <p:spPr>
           <a:xfrm>
-            <a:off x="7799832" y="4330598"/>
-            <a:ext cx="3145536" cy="256032"/>
+            <a:off x="7708392" y="4517136"/>
+            <a:ext cx="3282696" cy="228600"/>
           </a:xfrm>
           <a:prstGeom prst="rect">
             <a:avLst/>
@@ -11497,7 +11499,7 @@
               <a:buNone/>
             </a:pPr>
             <a:r>
-              <a:rPr lang="en-US" sz="1300" b="1" dirty="0">
+              <a:rPr lang="en-US" sz="1220" b="1" dirty="0">
                 <a:solidFill>
                   <a:srgbClr val="0068B7"/>
                 </a:solidFill>
@@ -11507,7 +11509,7 @@
               </a:rPr>
               <a:t>How to validate</a:t>
             </a:r>
-            <a:endParaRPr lang="en-US" sz="1300" dirty="0"/>
+            <a:endParaRPr lang="en-US" sz="1220" dirty="0"/>
           </a:p>
         </p:txBody>
       </p:sp>
@@ -11519,8 +11521,8 @@
         </p:nvSpPr>
         <p:spPr>
           <a:xfrm>
-            <a:off x="7799832" y="4659782"/>
-            <a:ext cx="3145536" cy="899770"/>
+            <a:off x="7708392" y="4828032"/>
+            <a:ext cx="3282696" cy="749808"/>
           </a:xfrm>
           <a:prstGeom prst="rect">
             <a:avLst/>
@@ -11538,7 +11540,7 @@
               <a:buNone/>
             </a:pPr>
             <a:r>
-              <a:rPr lang="en-US" sz="1320" dirty="0">
+              <a:rPr lang="en-US" sz="1220" dirty="0">
                 <a:solidFill>
                   <a:srgbClr val="17364A"/>
                 </a:solidFill>
@@ -11546,9 +11548,9 @@
                 <a:ea typeface="Aptos" pitchFamily="34" charset="-122"/>
                 <a:cs typeface="Aptos" pitchFamily="34" charset="-120"/>
               </a:rPr>
-              <a:t>Use the assignment to test whether you can explain the concept, apply it to a realistic public health situation, and identify what would need review before the work moves forward.</a:t>
-            </a:r>
-            <a:endParaRPr lang="en-US" sz="1320" dirty="0"/>
+              <a:t>Use the assignment to test whether you can explain the concept, apply it to a.</a:t>
+            </a:r>
+            <a:endParaRPr lang="en-US" sz="1220" dirty="0"/>
           </a:p>
         </p:txBody>
       </p:sp>
@@ -11839,8 +11841,8 @@
         </p:nvSpPr>
         <p:spPr>
           <a:xfrm>
-            <a:off x="868680" y="1508760"/>
-            <a:ext cx="6309360" cy="4160520"/>
+            <a:off x="822960" y="1463040"/>
+            <a:ext cx="6565392" cy="4343400"/>
           </a:xfrm>
           <a:prstGeom prst="rect">
             <a:avLst/>
@@ -11858,7 +11860,7 @@
               <a:buNone/>
             </a:pPr>
             <a:r>
-              <a:rPr lang="en-US" sz="2100" dirty="0">
+              <a:rPr lang="en-US" sz="1920" dirty="0">
                 <a:solidFill>
                   <a:srgbClr val="003A63"/>
                 </a:solidFill>
@@ -11866,16 +11868,16 @@
                 <a:ea typeface="Aptos" pitchFamily="34" charset="-122"/>
                 <a:cs typeface="Aptos" pitchFamily="34" charset="-120"/>
               </a:rPr>
-              <a:t>• 1. What is the strongest reason to document data lineage for an AI-supported workflow?</a:t>
-            </a:r>
-            <a:endParaRPr lang="en-US" sz="2100" dirty="0"/>
-          </a:p>
-          <a:p>
-            <a:pPr indent="0" marL="0">
-              <a:buNone/>
-            </a:pPr>
-            <a:r>
-              <a:rPr lang="en-US" sz="2100" dirty="0">
+              <a:t>• 1. What is the strongest reason to document data lineage for an AI-supported.</a:t>
+            </a:r>
+            <a:endParaRPr lang="en-US" sz="1920" dirty="0"/>
+          </a:p>
+          <a:p>
+            <a:pPr indent="0" marL="0">
+              <a:buNone/>
+            </a:pPr>
+            <a:r>
+              <a:rPr lang="en-US" sz="1920" dirty="0">
                 <a:solidFill>
                   <a:srgbClr val="003A63"/>
                 </a:solidFill>
@@ -11883,16 +11885,16 @@
                 <a:ea typeface="Aptos" pitchFamily="34" charset="-122"/>
                 <a:cs typeface="Aptos" pitchFamily="34" charset="-120"/>
               </a:rPr>
-              <a:t>• 2. Which pipeline type is most likely to trigger a workflow immediately after a defined event?</a:t>
-            </a:r>
-            <a:endParaRPr lang="en-US" sz="2100" dirty="0"/>
-          </a:p>
-          <a:p>
-            <a:pPr indent="0" marL="0">
-              <a:buNone/>
-            </a:pPr>
-            <a:r>
-              <a:rPr lang="en-US" sz="2100" dirty="0">
+              <a:t>• 2. Which pipeline type is most likely to trigger a workflow immediately.</a:t>
+            </a:r>
+            <a:endParaRPr lang="en-US" sz="1920" dirty="0"/>
+          </a:p>
+          <a:p>
+            <a:pPr indent="0" marL="0">
+              <a:buNone/>
+            </a:pPr>
+            <a:r>
+              <a:rPr lang="en-US" sz="1920" dirty="0">
                 <a:solidFill>
                   <a:srgbClr val="003A63"/>
                 </a:solidFill>
@@ -11902,7 +11904,7 @@
               </a:rPr>
               <a:t>• 3. What is a practical guardrail for silent feed failure?</a:t>
             </a:r>
-            <a:endParaRPr lang="en-US" sz="2100" dirty="0"/>
+            <a:endParaRPr lang="en-US" sz="1920" dirty="0"/>
           </a:p>
         </p:txBody>
       </p:sp>
@@ -11914,12 +11916,12 @@
         </p:nvSpPr>
         <p:spPr>
           <a:xfrm>
-            <a:off x="7635240" y="1325880"/>
-            <a:ext cx="3474720" cy="1207008"/>
+            <a:off x="7543800" y="1325880"/>
+            <a:ext cx="3611880" cy="1261872"/>
           </a:xfrm>
           <a:prstGeom prst="roundRect">
             <a:avLst>
-              <a:gd name="adj" fmla="val 9091"/>
+              <a:gd name="adj" fmla="val 8696"/>
             </a:avLst>
           </a:prstGeom>
           <a:solidFill>
@@ -11941,8 +11943,8 @@
         </p:nvSpPr>
         <p:spPr>
           <a:xfrm>
-            <a:off x="7799832" y="1472184"/>
-            <a:ext cx="3145536" cy="256032"/>
+            <a:off x="7708392" y="1453896"/>
+            <a:ext cx="3282696" cy="228600"/>
           </a:xfrm>
           <a:prstGeom prst="rect">
             <a:avLst/>
@@ -11958,7 +11960,7 @@
               <a:buNone/>
             </a:pPr>
             <a:r>
-              <a:rPr lang="en-US" sz="1300" b="1" dirty="0">
+              <a:rPr lang="en-US" sz="1220" b="1" dirty="0">
                 <a:solidFill>
                   <a:srgbClr val="0068B7"/>
                 </a:solidFill>
@@ -11968,7 +11970,7 @@
               </a:rPr>
               <a:t>Data decision</a:t>
             </a:r>
-            <a:endParaRPr lang="en-US" sz="1300" dirty="0"/>
+            <a:endParaRPr lang="en-US" sz="1220" dirty="0"/>
           </a:p>
         </p:txBody>
       </p:sp>
@@ -11980,8 +11982,8 @@
         </p:nvSpPr>
         <p:spPr>
           <a:xfrm>
-            <a:off x="7799832" y="1801368"/>
-            <a:ext cx="3145536" cy="640080"/>
+            <a:off x="7708392" y="1764792"/>
+            <a:ext cx="3282696" cy="749808"/>
           </a:xfrm>
           <a:prstGeom prst="rect">
             <a:avLst/>
@@ -11999,7 +12001,7 @@
               <a:buNone/>
             </a:pPr>
             <a:r>
-              <a:rPr lang="en-US" sz="1320" dirty="0">
+              <a:rPr lang="en-US" sz="1220" dirty="0">
                 <a:solidFill>
                   <a:srgbClr val="17364A"/>
                 </a:solidFill>
@@ -12007,9 +12009,9 @@
                 <a:ea typeface="Aptos" pitchFamily="34" charset="-122"/>
                 <a:cs typeface="Aptos" pitchFamily="34" charset="-120"/>
               </a:rPr>
-              <a:t>1. What is the strongest reason to document data lineage for an AI-supported workflow?</a:t>
-            </a:r>
-            <a:endParaRPr lang="en-US" sz="1320" dirty="0"/>
+              <a:t>1. What is the strongest reason to document data lineage for an AI-supported.</a:t>
+            </a:r>
+            <a:endParaRPr lang="en-US" sz="1220" dirty="0"/>
           </a:p>
         </p:txBody>
       </p:sp>
@@ -12021,12 +12023,12 @@
         </p:nvSpPr>
         <p:spPr>
           <a:xfrm>
-            <a:off x="7635240" y="2670048"/>
-            <a:ext cx="3474720" cy="1377086"/>
+            <a:off x="7543800" y="2724912"/>
+            <a:ext cx="3611880" cy="1527048"/>
           </a:xfrm>
           <a:prstGeom prst="roundRect">
             <a:avLst>
-              <a:gd name="adj" fmla="val 7968"/>
+              <a:gd name="adj" fmla="val 7186"/>
             </a:avLst>
           </a:prstGeom>
           <a:solidFill>
@@ -12048,8 +12050,8 @@
         </p:nvSpPr>
         <p:spPr>
           <a:xfrm>
-            <a:off x="7799832" y="2816352"/>
-            <a:ext cx="3145536" cy="256032"/>
+            <a:off x="7708392" y="2852928"/>
+            <a:ext cx="3282696" cy="228600"/>
           </a:xfrm>
           <a:prstGeom prst="rect">
             <a:avLst/>
@@ -12065,7 +12067,7 @@
               <a:buNone/>
             </a:pPr>
             <a:r>
-              <a:rPr lang="en-US" sz="1300" b="1" dirty="0">
+              <a:rPr lang="en-US" sz="1220" b="1" dirty="0">
                 <a:solidFill>
                   <a:srgbClr val="0068B7"/>
                 </a:solidFill>
@@ -12075,7 +12077,7 @@
               </a:rPr>
               <a:t>Concept checkpoints</a:t>
             </a:r>
-            <a:endParaRPr lang="en-US" sz="1300" dirty="0"/>
+            <a:endParaRPr lang="en-US" sz="1220" dirty="0"/>
           </a:p>
         </p:txBody>
       </p:sp>
@@ -12087,8 +12089,8 @@
         </p:nvSpPr>
         <p:spPr>
           <a:xfrm>
-            <a:off x="7818120" y="3182112"/>
-            <a:ext cx="3090672" cy="718718"/>
+            <a:off x="7726680" y="3182112"/>
+            <a:ext cx="3227832" cy="960120"/>
           </a:xfrm>
           <a:prstGeom prst="rect">
             <a:avLst/>
@@ -12106,7 +12108,7 @@
               <a:buNone/>
             </a:pPr>
             <a:r>
-              <a:rPr lang="en-US" sz="1220" dirty="0">
+              <a:rPr lang="en-US" sz="1140" dirty="0">
                 <a:solidFill>
                   <a:srgbClr val="17364A"/>
                 </a:solidFill>
@@ -12116,14 +12118,14 @@
               </a:rPr>
               <a:t>1.</a:t>
             </a:r>
-            <a:endParaRPr lang="en-US" sz="1220" dirty="0"/>
-          </a:p>
-          <a:p>
-            <a:pPr indent="0" marL="0">
-              <a:buNone/>
-            </a:pPr>
-            <a:r>
-              <a:rPr lang="en-US" sz="1220" dirty="0">
+            <a:endParaRPr lang="en-US" sz="1140" dirty="0"/>
+          </a:p>
+          <a:p>
+            <a:pPr indent="0" marL="0">
+              <a:buNone/>
+            </a:pPr>
+            <a:r>
+              <a:rPr lang="en-US" sz="1140" dirty="0">
                 <a:solidFill>
                   <a:srgbClr val="17364A"/>
                 </a:solidFill>
@@ -12131,16 +12133,16 @@
                 <a:ea typeface="Aptos" pitchFamily="34" charset="-122"/>
                 <a:cs typeface="Aptos" pitchFamily="34" charset="-120"/>
               </a:rPr>
-              <a:t>What is the strongest reason to document data lineage for an.</a:t>
-            </a:r>
-            <a:endParaRPr lang="en-US" sz="1220" dirty="0"/>
-          </a:p>
-          <a:p>
-            <a:pPr indent="0" marL="0">
-              <a:buNone/>
-            </a:pPr>
-            <a:r>
-              <a:rPr lang="en-US" sz="1220" dirty="0">
+              <a:t>What is the strongest reason to document data.</a:t>
+            </a:r>
+            <a:endParaRPr lang="en-US" sz="1140" dirty="0"/>
+          </a:p>
+          <a:p>
+            <a:pPr indent="0" marL="0">
+              <a:buNone/>
+            </a:pPr>
+            <a:r>
+              <a:rPr lang="en-US" sz="1140" dirty="0">
                 <a:solidFill>
                   <a:srgbClr val="17364A"/>
                 </a:solidFill>
@@ -12150,7 +12152,7 @@
               </a:rPr>
               <a:t>2.</a:t>
             </a:r>
-            <a:endParaRPr lang="en-US" sz="1220" dirty="0"/>
+            <a:endParaRPr lang="en-US" sz="1140" dirty="0"/>
           </a:p>
         </p:txBody>
       </p:sp>
@@ -12162,12 +12164,12 @@
         </p:nvSpPr>
         <p:spPr>
           <a:xfrm>
-            <a:off x="7635240" y="4184294"/>
-            <a:ext cx="3474720" cy="1466698"/>
+            <a:off x="7543800" y="4389120"/>
+            <a:ext cx="3611880" cy="1261872"/>
           </a:xfrm>
           <a:prstGeom prst="roundRect">
             <a:avLst>
-              <a:gd name="adj" fmla="val 7481"/>
+              <a:gd name="adj" fmla="val 8696"/>
             </a:avLst>
           </a:prstGeom>
           <a:solidFill>
@@ -12189,8 +12191,8 @@
         </p:nvSpPr>
         <p:spPr>
           <a:xfrm>
-            <a:off x="7799832" y="4330598"/>
-            <a:ext cx="3145536" cy="256032"/>
+            <a:off x="7708392" y="4517136"/>
+            <a:ext cx="3282696" cy="228600"/>
           </a:xfrm>
           <a:prstGeom prst="rect">
             <a:avLst/>
@@ -12206,7 +12208,7 @@
               <a:buNone/>
             </a:pPr>
             <a:r>
-              <a:rPr lang="en-US" sz="1300" b="1" dirty="0">
+              <a:rPr lang="en-US" sz="1220" b="1" dirty="0">
                 <a:solidFill>
                   <a:srgbClr val="0068B7"/>
                 </a:solidFill>
@@ -12216,7 +12218,7 @@
               </a:rPr>
               <a:t>How to validate</a:t>
             </a:r>
-            <a:endParaRPr lang="en-US" sz="1300" dirty="0"/>
+            <a:endParaRPr lang="en-US" sz="1220" dirty="0"/>
           </a:p>
         </p:txBody>
       </p:sp>
@@ -12228,8 +12230,8 @@
         </p:nvSpPr>
         <p:spPr>
           <a:xfrm>
-            <a:off x="7799832" y="4659782"/>
-            <a:ext cx="3145536" cy="899770"/>
+            <a:off x="7708392" y="4828032"/>
+            <a:ext cx="3282696" cy="749808"/>
           </a:xfrm>
           <a:prstGeom prst="rect">
             <a:avLst/>
@@ -12247,7 +12249,7 @@
               <a:buNone/>
             </a:pPr>
             <a:r>
-              <a:rPr lang="en-US" sz="1320" dirty="0">
+              <a:rPr lang="en-US" sz="1220" dirty="0">
                 <a:solidFill>
                   <a:srgbClr val="17364A"/>
                 </a:solidFill>
@@ -12255,9 +12257,9 @@
                 <a:ea typeface="Aptos" pitchFamily="34" charset="-122"/>
                 <a:cs typeface="Aptos" pitchFamily="34" charset="-120"/>
               </a:rPr>
-              <a:t>Use the assignment to test whether you can explain the concept, apply it to a realistic public health situation, and identify what would need review before the work moves forward.</a:t>
-            </a:r>
-            <a:endParaRPr lang="en-US" sz="1320" dirty="0"/>
+              <a:t>Use the assignment to test whether you can explain the concept, apply it to a.</a:t>
+            </a:r>
+            <a:endParaRPr lang="en-US" sz="1220" dirty="0"/>
           </a:p>
         </p:txBody>
       </p:sp>
@@ -12548,8 +12550,8 @@
         </p:nvSpPr>
         <p:spPr>
           <a:xfrm>
-            <a:off x="868680" y="1508760"/>
-            <a:ext cx="6309360" cy="4160520"/>
+            <a:off x="822960" y="1463040"/>
+            <a:ext cx="6565392" cy="4343400"/>
           </a:xfrm>
           <a:prstGeom prst="rect">
             <a:avLst/>
@@ -12567,7 +12569,7 @@
               <a:buNone/>
             </a:pPr>
             <a:r>
-              <a:rPr lang="en-US" sz="2100" dirty="0">
+              <a:rPr lang="en-US" sz="1920" dirty="0">
                 <a:solidFill>
                   <a:srgbClr val="003A63"/>
                 </a:solidFill>
@@ -12577,14 +12579,14 @@
               </a:rPr>
               <a:t>• CDC Data Modernization Initiative materials:.</a:t>
             </a:r>
-            <a:endParaRPr lang="en-US" sz="2100" dirty="0"/>
-          </a:p>
-          <a:p>
-            <a:pPr indent="0" marL="0">
-              <a:buNone/>
-            </a:pPr>
-            <a:r>
-              <a:rPr lang="en-US" sz="2100" dirty="0">
+            <a:endParaRPr lang="en-US" sz="1920" dirty="0"/>
+          </a:p>
+          <a:p>
+            <a:pPr indent="0" marL="0">
+              <a:buNone/>
+            </a:pPr>
+            <a:r>
+              <a:rPr lang="en-US" sz="1920" dirty="0">
                 <a:solidFill>
                   <a:srgbClr val="003A63"/>
                 </a:solidFill>
@@ -12594,14 +12596,14 @@
               </a:rPr>
               <a:t>• CDC Public Health Data Strategy:.</a:t>
             </a:r>
-            <a:endParaRPr lang="en-US" sz="2100" dirty="0"/>
-          </a:p>
-          <a:p>
-            <a:pPr indent="0" marL="0">
-              <a:buNone/>
-            </a:pPr>
-            <a:r>
-              <a:rPr lang="en-US" sz="2100" dirty="0">
+            <a:endParaRPr lang="en-US" sz="1920" dirty="0"/>
+          </a:p>
+          <a:p>
+            <a:pPr indent="0" marL="0">
+              <a:buNone/>
+            </a:pPr>
+            <a:r>
+              <a:rPr lang="en-US" sz="1920" dirty="0">
                 <a:solidFill>
                   <a:srgbClr val="003A63"/>
                 </a:solidFill>
@@ -12609,9 +12611,9 @@
                 <a:ea typeface="Aptos" pitchFamily="34" charset="-122"/>
                 <a:cs typeface="Aptos" pitchFamily="34" charset="-120"/>
               </a:rPr>
-              <a:t>• NIST AI Risk Management Framework: https://www.nist.gov/itl/ai-risk-management-framework</a:t>
-            </a:r>
-            <a:endParaRPr lang="en-US" sz="2100" dirty="0"/>
+              <a:t>• NIST AI Risk Management Framework:.</a:t>
+            </a:r>
+            <a:endParaRPr lang="en-US" sz="1920" dirty="0"/>
           </a:p>
         </p:txBody>
       </p:sp>
@@ -12623,12 +12625,12 @@
         </p:nvSpPr>
         <p:spPr>
           <a:xfrm>
-            <a:off x="7635240" y="1325880"/>
-            <a:ext cx="3474720" cy="1255471"/>
+            <a:off x="7543800" y="1325880"/>
+            <a:ext cx="3611880" cy="1261872"/>
           </a:xfrm>
           <a:prstGeom prst="roundRect">
             <a:avLst>
-              <a:gd name="adj" fmla="val 8740"/>
+              <a:gd name="adj" fmla="val 8696"/>
             </a:avLst>
           </a:prstGeom>
           <a:solidFill>
@@ -12650,8 +12652,8 @@
         </p:nvSpPr>
         <p:spPr>
           <a:xfrm>
-            <a:off x="7799832" y="1472184"/>
-            <a:ext cx="3145536" cy="256032"/>
+            <a:off x="7708392" y="1453896"/>
+            <a:ext cx="3282696" cy="228600"/>
           </a:xfrm>
           <a:prstGeom prst="rect">
             <a:avLst/>
@@ -12667,7 +12669,7 @@
               <a:buNone/>
             </a:pPr>
             <a:r>
-              <a:rPr lang="en-US" sz="1300" b="1" dirty="0">
+              <a:rPr lang="en-US" sz="1220" b="1" dirty="0">
                 <a:solidFill>
                   <a:srgbClr val="0068B7"/>
                 </a:solidFill>
@@ -12677,7 +12679,7 @@
               </a:rPr>
               <a:t>Data decision</a:t>
             </a:r>
-            <a:endParaRPr lang="en-US" sz="1300" dirty="0"/>
+            <a:endParaRPr lang="en-US" sz="1220" dirty="0"/>
           </a:p>
         </p:txBody>
       </p:sp>
@@ -12689,8 +12691,8 @@
         </p:nvSpPr>
         <p:spPr>
           <a:xfrm>
-            <a:off x="7799832" y="1801368"/>
-            <a:ext cx="3145536" cy="688543"/>
+            <a:off x="7708392" y="1764792"/>
+            <a:ext cx="3282696" cy="749808"/>
           </a:xfrm>
           <a:prstGeom prst="rect">
             <a:avLst/>
@@ -12708,7 +12710,7 @@
               <a:buNone/>
             </a:pPr>
             <a:r>
-              <a:rPr lang="en-US" sz="1320" dirty="0">
+              <a:rPr lang="en-US" sz="1220" dirty="0">
                 <a:solidFill>
                   <a:srgbClr val="17364A"/>
                 </a:solidFill>
@@ -12716,9 +12718,9 @@
                 <a:ea typeface="Aptos" pitchFamily="34" charset="-122"/>
                 <a:cs typeface="Aptos" pitchFamily="34" charset="-120"/>
               </a:rPr>
-              <a:t>CDC Data Modernization Initiative materials: https://www.cdc.gov/data-modernization/php/index.html</a:t>
-            </a:r>
-            <a:endParaRPr lang="en-US" sz="1320" dirty="0"/>
+              <a:t>CDC Data Modernization Initiative materials:.</a:t>
+            </a:r>
+            <a:endParaRPr lang="en-US" sz="1220" dirty="0"/>
           </a:p>
         </p:txBody>
       </p:sp>
@@ -12730,12 +12732,12 @@
         </p:nvSpPr>
         <p:spPr>
           <a:xfrm>
-            <a:off x="7635240" y="2718511"/>
-            <a:ext cx="3474720" cy="1328623"/>
+            <a:off x="7543800" y="2724912"/>
+            <a:ext cx="3611880" cy="1527048"/>
           </a:xfrm>
           <a:prstGeom prst="roundRect">
             <a:avLst>
-              <a:gd name="adj" fmla="val 8259"/>
+              <a:gd name="adj" fmla="val 7186"/>
             </a:avLst>
           </a:prstGeom>
           <a:solidFill>
@@ -12757,8 +12759,8 @@
         </p:nvSpPr>
         <p:spPr>
           <a:xfrm>
-            <a:off x="7799832" y="2864815"/>
-            <a:ext cx="3145536" cy="256032"/>
+            <a:off x="7708392" y="2852928"/>
+            <a:ext cx="3282696" cy="228600"/>
           </a:xfrm>
           <a:prstGeom prst="rect">
             <a:avLst/>
@@ -12774,7 +12776,7 @@
               <a:buNone/>
             </a:pPr>
             <a:r>
-              <a:rPr lang="en-US" sz="1300" b="1" dirty="0">
+              <a:rPr lang="en-US" sz="1220" b="1" dirty="0">
                 <a:solidFill>
                   <a:srgbClr val="0068B7"/>
                 </a:solidFill>
@@ -12784,7 +12786,7 @@
               </a:rPr>
               <a:t>Concept checkpoints</a:t>
             </a:r>
-            <a:endParaRPr lang="en-US" sz="1300" dirty="0"/>
+            <a:endParaRPr lang="en-US" sz="1220" dirty="0"/>
           </a:p>
         </p:txBody>
       </p:sp>
@@ -12796,8 +12798,8 @@
         </p:nvSpPr>
         <p:spPr>
           <a:xfrm>
-            <a:off x="7818120" y="3230575"/>
-            <a:ext cx="3090672" cy="670255"/>
+            <a:off x="7726680" y="3182112"/>
+            <a:ext cx="3227832" cy="960120"/>
           </a:xfrm>
           <a:prstGeom prst="rect">
             <a:avLst/>
@@ -12815,7 +12817,7 @@
               <a:buNone/>
             </a:pPr>
             <a:r>
-              <a:rPr lang="en-US" sz="1220" dirty="0">
+              <a:rPr lang="en-US" sz="1140" dirty="0">
                 <a:solidFill>
                   <a:srgbClr val="17364A"/>
                 </a:solidFill>
@@ -12825,14 +12827,14 @@
               </a:rPr>
               <a:t>CDC Data Modernization Initiative materials:.</a:t>
             </a:r>
-            <a:endParaRPr lang="en-US" sz="1220" dirty="0"/>
-          </a:p>
-          <a:p>
-            <a:pPr indent="0" marL="0">
-              <a:buNone/>
-            </a:pPr>
-            <a:r>
-              <a:rPr lang="en-US" sz="1220" dirty="0">
+            <a:endParaRPr lang="en-US" sz="1140" dirty="0"/>
+          </a:p>
+          <a:p>
+            <a:pPr indent="0" marL="0">
+              <a:buNone/>
+            </a:pPr>
+            <a:r>
+              <a:rPr lang="en-US" sz="1140" dirty="0">
                 <a:solidFill>
                   <a:srgbClr val="17364A"/>
                 </a:solidFill>
@@ -12842,14 +12844,14 @@
               </a:rPr>
               <a:t>CDC Public Health Data Strategy:.</a:t>
             </a:r>
-            <a:endParaRPr lang="en-US" sz="1220" dirty="0"/>
-          </a:p>
-          <a:p>
-            <a:pPr indent="0" marL="0">
-              <a:buNone/>
-            </a:pPr>
-            <a:r>
-              <a:rPr lang="en-US" sz="1220" dirty="0">
+            <a:endParaRPr lang="en-US" sz="1140" dirty="0"/>
+          </a:p>
+          <a:p>
+            <a:pPr indent="0" marL="0">
+              <a:buNone/>
+            </a:pPr>
+            <a:r>
+              <a:rPr lang="en-US" sz="1140" dirty="0">
                 <a:solidFill>
                   <a:srgbClr val="17364A"/>
                 </a:solidFill>
@@ -12859,7 +12861,7 @@
               </a:rPr>
               <a:t>NIST AI Risk Management Framework:.</a:t>
             </a:r>
-            <a:endParaRPr lang="en-US" sz="1220" dirty="0"/>
+            <a:endParaRPr lang="en-US" sz="1140" dirty="0"/>
           </a:p>
         </p:txBody>
       </p:sp>
@@ -12871,12 +12873,12 @@
         </p:nvSpPr>
         <p:spPr>
           <a:xfrm>
-            <a:off x="7635240" y="4184294"/>
-            <a:ext cx="3474720" cy="1466698"/>
+            <a:off x="7543800" y="4389120"/>
+            <a:ext cx="3611880" cy="1261872"/>
           </a:xfrm>
           <a:prstGeom prst="roundRect">
             <a:avLst>
-              <a:gd name="adj" fmla="val 7481"/>
+              <a:gd name="adj" fmla="val 8696"/>
             </a:avLst>
           </a:prstGeom>
           <a:solidFill>
@@ -12898,8 +12900,8 @@
         </p:nvSpPr>
         <p:spPr>
           <a:xfrm>
-            <a:off x="7799832" y="4330598"/>
-            <a:ext cx="3145536" cy="256032"/>
+            <a:off x="7708392" y="4517136"/>
+            <a:ext cx="3282696" cy="228600"/>
           </a:xfrm>
           <a:prstGeom prst="rect">
             <a:avLst/>
@@ -12915,7 +12917,7 @@
               <a:buNone/>
             </a:pPr>
             <a:r>
-              <a:rPr lang="en-US" sz="1300" b="1" dirty="0">
+              <a:rPr lang="en-US" sz="1220" b="1" dirty="0">
                 <a:solidFill>
                   <a:srgbClr val="0068B7"/>
                 </a:solidFill>
@@ -12925,7 +12927,7 @@
               </a:rPr>
               <a:t>How to validate</a:t>
             </a:r>
-            <a:endParaRPr lang="en-US" sz="1300" dirty="0"/>
+            <a:endParaRPr lang="en-US" sz="1220" dirty="0"/>
           </a:p>
         </p:txBody>
       </p:sp>
@@ -12937,8 +12939,8 @@
         </p:nvSpPr>
         <p:spPr>
           <a:xfrm>
-            <a:off x="7799832" y="4659782"/>
-            <a:ext cx="3145536" cy="899770"/>
+            <a:off x="7708392" y="4828032"/>
+            <a:ext cx="3282696" cy="749808"/>
           </a:xfrm>
           <a:prstGeom prst="rect">
             <a:avLst/>
@@ -12956,7 +12958,7 @@
               <a:buNone/>
             </a:pPr>
             <a:r>
-              <a:rPr lang="en-US" sz="1320" dirty="0">
+              <a:rPr lang="en-US" sz="1220" dirty="0">
                 <a:solidFill>
                   <a:srgbClr val="17364A"/>
                 </a:solidFill>
@@ -12964,9 +12966,9 @@
                 <a:ea typeface="Aptos" pitchFamily="34" charset="-122"/>
                 <a:cs typeface="Aptos" pitchFamily="34" charset="-120"/>
               </a:rPr>
-              <a:t>Connect the concept to data quality, model performance, validation evidence, monitoring measures, and decisions that remain under human control.</a:t>
-            </a:r>
-            <a:endParaRPr lang="en-US" sz="1320" dirty="0"/>
+              <a:t>Connect the concept to data quality, model performance, validation evidence,.</a:t>
+            </a:r>
+            <a:endParaRPr lang="en-US" sz="1220" dirty="0"/>
           </a:p>
         </p:txBody>
       </p:sp>
@@ -13284,7 +13286,7 @@
                 <a:ea typeface="Aptos" pitchFamily="34" charset="-122"/>
                 <a:cs typeface="Aptos" pitchFamily="34" charset="-120"/>
               </a:rPr>
-              <a:t>• Play 12: Execute Governance and Oversight - This lesson informs Play 12 by helping learners.</a:t>
+              <a:t>• Play 12: Execute Governance and Oversight - This lesson informs Play 12 by.</a:t>
             </a:r>
             <a:endParaRPr lang="en-US" sz="1900" dirty="0"/>
           </a:p>
@@ -13301,7 +13303,7 @@
                 <a:ea typeface="Aptos" pitchFamily="34" charset="-122"/>
                 <a:cs typeface="Aptos" pitchFamily="34" charset="-120"/>
               </a:rPr>
-              <a:t>• Play 3: Establish AI Governance - This lesson informs Play 3 by helping learners connect the.</a:t>
+              <a:t>• Play 3: Establish AI Governance - This lesson informs Play 3 by helping.</a:t>
             </a:r>
             <a:endParaRPr lang="en-US" sz="1900" dirty="0"/>
           </a:p>
@@ -13318,7 +13320,7 @@
                 <a:ea typeface="Aptos" pitchFamily="34" charset="-122"/>
                 <a:cs typeface="Aptos" pitchFamily="34" charset="-120"/>
               </a:rPr>
-              <a:t>• Play 13: Monitor and Evaluate AI Systems - This lesson informs Play 13 by helping learners.</a:t>
+              <a:t>• Play 13: Monitor and Evaluate AI Systems - This lesson informs Play 13 by.</a:t>
             </a:r>
             <a:endParaRPr lang="en-US" sz="1900" dirty="0"/>
           </a:p>
@@ -13335,7 +13337,7 @@
                 <a:ea typeface="Aptos" pitchFamily="34" charset="-122"/>
                 <a:cs typeface="Aptos" pitchFamily="34" charset="-120"/>
               </a:rPr>
-              <a:t>• Play 11: Build and Deploy AI Solutions - This lesson informs Play 11 by helping learners.</a:t>
+              <a:t>• Play 11: Build and Deploy AI Solutions - This lesson informs Play 11 by.</a:t>
             </a:r>
             <a:endParaRPr lang="en-US" sz="1900" dirty="0"/>
           </a:p>
@@ -13376,8 +13378,8 @@
         </p:nvSpPr>
         <p:spPr>
           <a:xfrm>
-            <a:off x="8211312" y="1563624"/>
-            <a:ext cx="2734056" cy="256032"/>
+            <a:off x="8211312" y="1545336"/>
+            <a:ext cx="2734056" cy="228600"/>
           </a:xfrm>
           <a:prstGeom prst="rect">
             <a:avLst/>
@@ -13393,7 +13395,7 @@
               <a:buNone/>
             </a:pPr>
             <a:r>
-              <a:rPr lang="en-US" sz="1300" b="1" dirty="0">
+              <a:rPr lang="en-US" sz="1220" b="1" dirty="0">
                 <a:solidFill>
                   <a:srgbClr val="0068B7"/>
                 </a:solidFill>
@@ -13403,7 +13405,7 @@
               </a:rPr>
               <a:t>Apply the lesson</a:t>
             </a:r>
-            <a:endParaRPr lang="en-US" sz="1300" dirty="0"/>
+            <a:endParaRPr lang="en-US" sz="1220" dirty="0"/>
           </a:p>
         </p:txBody>
       </p:sp>
@@ -13415,8 +13417,8 @@
         </p:nvSpPr>
         <p:spPr>
           <a:xfrm>
-            <a:off x="8211312" y="1892808"/>
-            <a:ext cx="2734056" cy="1536192"/>
+            <a:off x="8211312" y="1856232"/>
+            <a:ext cx="2734056" cy="1591056"/>
           </a:xfrm>
           <a:prstGeom prst="rect">
             <a:avLst/>
@@ -13434,7 +13436,7 @@
               <a:buNone/>
             </a:pPr>
             <a:r>
-              <a:rPr lang="en-US" sz="1320" dirty="0">
+              <a:rPr lang="en-US" sz="1220" dirty="0">
                 <a:solidFill>
                   <a:srgbClr val="17364A"/>
                 </a:solidFill>
@@ -13442,9 +13444,9 @@
                 <a:ea typeface="Aptos" pitchFamily="34" charset="-122"/>
                 <a:cs typeface="Aptos" pitchFamily="34" charset="-120"/>
               </a:rPr>
-              <a:t>Use the related plays to identify decisions, participants, timing, approvals, and documentation needed for responsible implementation.</a:t>
-            </a:r>
-            <a:endParaRPr lang="en-US" sz="1320" dirty="0"/>
+              <a:t>Use the related plays to identify decisions, participants, timing, approvals,.</a:t>
+            </a:r>
+            <a:endParaRPr lang="en-US" sz="1220" dirty="0"/>
           </a:p>
         </p:txBody>
       </p:sp>
@@ -13483,8 +13485,8 @@
         </p:nvSpPr>
         <p:spPr>
           <a:xfrm>
-            <a:off x="8211312" y="3941064"/>
-            <a:ext cx="2734056" cy="256032"/>
+            <a:off x="8211312" y="3922776"/>
+            <a:ext cx="2734056" cy="228600"/>
           </a:xfrm>
           <a:prstGeom prst="rect">
             <a:avLst/>
@@ -13500,7 +13502,7 @@
               <a:buNone/>
             </a:pPr>
             <a:r>
-              <a:rPr lang="en-US" sz="1300" b="1" dirty="0">
+              <a:rPr lang="en-US" sz="1220" b="1" dirty="0">
                 <a:solidFill>
                   <a:srgbClr val="0068B7"/>
                 </a:solidFill>
@@ -13510,7 +13512,7 @@
               </a:rPr>
               <a:t>Use the play links to</a:t>
             </a:r>
-            <a:endParaRPr lang="en-US" sz="1300" dirty="0"/>
+            <a:endParaRPr lang="en-US" sz="1220" dirty="0"/>
           </a:p>
         </p:txBody>
       </p:sp>
@@ -13522,8 +13524,8 @@
         </p:nvSpPr>
         <p:spPr>
           <a:xfrm>
-            <a:off x="8229600" y="4306824"/>
-            <a:ext cx="2679192" cy="941832"/>
+            <a:off x="8229600" y="4251960"/>
+            <a:ext cx="2679192" cy="1033272"/>
           </a:xfrm>
           <a:prstGeom prst="rect">
             <a:avLst/>
@@ -13541,7 +13543,7 @@
               <a:buNone/>
             </a:pPr>
             <a:r>
-              <a:rPr lang="en-US" sz="1220" dirty="0">
+              <a:rPr lang="en-US" sz="1140" dirty="0">
                 <a:solidFill>
                   <a:srgbClr val="17364A"/>
                 </a:solidFill>
@@ -13551,14 +13553,14 @@
               </a:rPr>
               <a:t>Locate the decision point in the playbook sequence.</a:t>
             </a:r>
-            <a:endParaRPr lang="en-US" sz="1220" dirty="0"/>
-          </a:p>
-          <a:p>
-            <a:pPr indent="0" marL="0">
-              <a:buNone/>
-            </a:pPr>
-            <a:r>
-              <a:rPr lang="en-US" sz="1220" dirty="0">
+            <a:endParaRPr lang="en-US" sz="1140" dirty="0"/>
+          </a:p>
+          <a:p>
+            <a:pPr indent="0" marL="0">
+              <a:buNone/>
+            </a:pPr>
+            <a:r>
+              <a:rPr lang="en-US" sz="1140" dirty="0">
                 <a:solidFill>
                   <a:srgbClr val="17364A"/>
                 </a:solidFill>
@@ -13568,14 +13570,14 @@
               </a:rPr>
               <a:t>Identify who should participate in the work.</a:t>
             </a:r>
-            <a:endParaRPr lang="en-US" sz="1220" dirty="0"/>
-          </a:p>
-          <a:p>
-            <a:pPr indent="0" marL="0">
-              <a:buNone/>
-            </a:pPr>
-            <a:r>
-              <a:rPr lang="en-US" sz="1220" dirty="0">
+            <a:endParaRPr lang="en-US" sz="1140" dirty="0"/>
+          </a:p>
+          <a:p>
+            <a:pPr indent="0" marL="0">
+              <a:buNone/>
+            </a:pPr>
+            <a:r>
+              <a:rPr lang="en-US" sz="1140" dirty="0">
                 <a:solidFill>
                   <a:srgbClr val="17364A"/>
                 </a:solidFill>
@@ -13583,9 +13585,9 @@
                 <a:ea typeface="Aptos" pitchFamily="34" charset="-122"/>
                 <a:cs typeface="Aptos" pitchFamily="34" charset="-120"/>
               </a:rPr>
-              <a:t>Document the review, approval, or implementation step.</a:t>
-            </a:r>
-            <a:endParaRPr lang="en-US" sz="1220" dirty="0"/>
+              <a:t>Document the review, approval, or implementation.</a:t>
+            </a:r>
+            <a:endParaRPr lang="en-US" sz="1140" dirty="0"/>
           </a:p>
         </p:txBody>
       </p:sp>
@@ -13903,7 +13905,7 @@
                 <a:ea typeface="Aptos" pitchFamily="34" charset="-122"/>
                 <a:cs typeface="Aptos" pitchFamily="34" charset="-120"/>
               </a:rPr>
-              <a:t>• Tool 16: Incident Response Checklist (Checklist) - Use Incident Response Checklist to.</a:t>
+              <a:t>• Tool 16: Incident Response Checklist (Checklist) - Use Incident Response.</a:t>
             </a:r>
             <a:endParaRPr lang="en-US" sz="1850" dirty="0"/>
           </a:p>
@@ -13920,7 +13922,7 @@
                 <a:ea typeface="Aptos" pitchFamily="34" charset="-122"/>
                 <a:cs typeface="Aptos" pitchFamily="34" charset="-120"/>
               </a:rPr>
-              <a:t>• Tool 17: Compliance Audit Checklist (Checklist) - Use Compliance Audit Checklist to translate.</a:t>
+              <a:t>• Tool 17: Compliance Audit Checklist (Checklist) - Use Compliance Audit.</a:t>
             </a:r>
             <a:endParaRPr lang="en-US" sz="1850" dirty="0"/>
           </a:p>
@@ -13937,7 +13939,7 @@
                 <a:ea typeface="Aptos" pitchFamily="34" charset="-122"/>
                 <a:cs typeface="Aptos" pitchFamily="34" charset="-120"/>
               </a:rPr>
-              <a:t>• Tool 18: Policy Update &amp; Version Control Log (Log) - Use this tool to complete or strengthen.</a:t>
+              <a:t>• Tool 18: Policy Update &amp; Version Control Log (Log) - Use this tool to.</a:t>
             </a:r>
             <a:endParaRPr lang="en-US" sz="1850" dirty="0"/>
           </a:p>
@@ -13954,7 +13956,7 @@
                 <a:ea typeface="Aptos" pitchFamily="34" charset="-122"/>
                 <a:cs typeface="Aptos" pitchFamily="34" charset="-120"/>
               </a:rPr>
-              <a:t>• Tool 19: Plain-Language AI Public Notice Template (Template) - Use Plain-Language AI Public.</a:t>
+              <a:t>• Tool 19: Plain-Language AI Public Notice Template (Template) - Use.</a:t>
             </a:r>
             <a:endParaRPr lang="en-US" sz="1850" dirty="0"/>
           </a:p>
@@ -13995,8 +13997,8 @@
         </p:nvSpPr>
         <p:spPr>
           <a:xfrm>
-            <a:off x="8211312" y="1563624"/>
-            <a:ext cx="2734056" cy="256032"/>
+            <a:off x="8211312" y="1545336"/>
+            <a:ext cx="2734056" cy="228600"/>
           </a:xfrm>
           <a:prstGeom prst="rect">
             <a:avLst/>
@@ -14012,7 +14014,7 @@
               <a:buNone/>
             </a:pPr>
             <a:r>
-              <a:rPr lang="en-US" sz="1300" b="1" dirty="0">
+              <a:rPr lang="en-US" sz="1220" b="1" dirty="0">
                 <a:solidFill>
                   <a:srgbClr val="0068B7"/>
                 </a:solidFill>
@@ -14022,7 +14024,7 @@
               </a:rPr>
               <a:t>Use the tools</a:t>
             </a:r>
-            <a:endParaRPr lang="en-US" sz="1300" dirty="0"/>
+            <a:endParaRPr lang="en-US" sz="1220" dirty="0"/>
           </a:p>
         </p:txBody>
       </p:sp>
@@ -14034,8 +14036,8 @@
         </p:nvSpPr>
         <p:spPr>
           <a:xfrm>
-            <a:off x="8211312" y="1892808"/>
-            <a:ext cx="2734056" cy="1536192"/>
+            <a:off x="8211312" y="1856232"/>
+            <a:ext cx="2734056" cy="1591056"/>
           </a:xfrm>
           <a:prstGeom prst="rect">
             <a:avLst/>
@@ -14053,7 +14055,7 @@
               <a:buNone/>
             </a:pPr>
             <a:r>
-              <a:rPr lang="en-US" sz="1320" dirty="0">
+              <a:rPr lang="en-US" sz="1220" dirty="0">
                 <a:solidFill>
                   <a:srgbClr val="17364A"/>
                 </a:solidFill>
@@ -14061,9 +14063,9 @@
                 <a:ea typeface="Aptos" pitchFamily="34" charset="-122"/>
                 <a:cs typeface="Aptos" pitchFamily="34" charset="-120"/>
               </a:rPr>
-              <a:t>Use linked tools when your department needs a structured worksheet, template, checklist, review process, or documentation artifact.</a:t>
-            </a:r>
-            <a:endParaRPr lang="en-US" sz="1320" dirty="0"/>
+              <a:t>Use linked tools when your department needs a structured worksheet, template,.</a:t>
+            </a:r>
+            <a:endParaRPr lang="en-US" sz="1220" dirty="0"/>
           </a:p>
         </p:txBody>
       </p:sp>
@@ -14102,8 +14104,8 @@
         </p:nvSpPr>
         <p:spPr>
           <a:xfrm>
-            <a:off x="8211312" y="3941064"/>
-            <a:ext cx="2734056" cy="256032"/>
+            <a:off x="8211312" y="3922776"/>
+            <a:ext cx="2734056" cy="228600"/>
           </a:xfrm>
           <a:prstGeom prst="rect">
             <a:avLst/>
@@ -14119,7 +14121,7 @@
               <a:buNone/>
             </a:pPr>
             <a:r>
-              <a:rPr lang="en-US" sz="1300" b="1" dirty="0">
+              <a:rPr lang="en-US" sz="1220" b="1" dirty="0">
                 <a:solidFill>
                   <a:srgbClr val="0068B7"/>
                 </a:solidFill>
@@ -14129,7 +14131,7 @@
               </a:rPr>
               <a:t>Tool selection cues</a:t>
             </a:r>
-            <a:endParaRPr lang="en-US" sz="1300" dirty="0"/>
+            <a:endParaRPr lang="en-US" sz="1220" dirty="0"/>
           </a:p>
         </p:txBody>
       </p:sp>
@@ -14141,8 +14143,8 @@
         </p:nvSpPr>
         <p:spPr>
           <a:xfrm>
-            <a:off x="8229600" y="4306824"/>
-            <a:ext cx="2679192" cy="941832"/>
+            <a:off x="8229600" y="4251960"/>
+            <a:ext cx="2679192" cy="1033272"/>
           </a:xfrm>
           <a:prstGeom prst="rect">
             <a:avLst/>
@@ -14160,7 +14162,7 @@
               <a:buNone/>
             </a:pPr>
             <a:r>
-              <a:rPr lang="en-US" sz="1220" dirty="0">
+              <a:rPr lang="en-US" sz="1140" dirty="0">
                 <a:solidFill>
                   <a:srgbClr val="17364A"/>
                 </a:solidFill>
@@ -14170,14 +14172,14 @@
               </a:rPr>
               <a:t>Use a tool when no comparable local process exists.</a:t>
             </a:r>
-            <a:endParaRPr lang="en-US" sz="1220" dirty="0"/>
-          </a:p>
-          <a:p>
-            <a:pPr indent="0" marL="0">
-              <a:buNone/>
-            </a:pPr>
-            <a:r>
-              <a:rPr lang="en-US" sz="1220" dirty="0">
+            <a:endParaRPr lang="en-US" sz="1140" dirty="0"/>
+          </a:p>
+          <a:p>
+            <a:pPr indent="0" marL="0">
+              <a:buNone/>
+            </a:pPr>
+            <a:r>
+              <a:rPr lang="en-US" sz="1140" dirty="0">
                 <a:solidFill>
                   <a:srgbClr val="17364A"/>
                 </a:solidFill>
@@ -14185,16 +14187,16 @@
                 <a:ea typeface="Aptos" pitchFamily="34" charset="-122"/>
                 <a:cs typeface="Aptos" pitchFamily="34" charset="-120"/>
               </a:rPr>
-              <a:t>Adapt existing department templates when they already fit the.</a:t>
-            </a:r>
-            <a:endParaRPr lang="en-US" sz="1220" dirty="0"/>
-          </a:p>
-          <a:p>
-            <a:pPr indent="0" marL="0">
-              <a:buNone/>
-            </a:pPr>
-            <a:r>
-              <a:rPr lang="en-US" sz="1220" dirty="0">
+              <a:t>Adapt existing department templates when they.</a:t>
+            </a:r>
+            <a:endParaRPr lang="en-US" sz="1140" dirty="0"/>
+          </a:p>
+          <a:p>
+            <a:pPr indent="0" marL="0">
+              <a:buNone/>
+            </a:pPr>
+            <a:r>
+              <a:rPr lang="en-US" sz="1140" dirty="0">
                 <a:solidFill>
                   <a:srgbClr val="17364A"/>
                 </a:solidFill>
@@ -14202,9 +14204,9 @@
                 <a:ea typeface="Aptos" pitchFamily="34" charset="-122"/>
                 <a:cs typeface="Aptos" pitchFamily="34" charset="-120"/>
               </a:rPr>
-              <a:t>Save the completed artifact as evidence of the decision.</a:t>
-            </a:r>
-            <a:endParaRPr lang="en-US" sz="1220" dirty="0"/>
+              <a:t>Save the completed artifact as evidence of the.</a:t>
+            </a:r>
+            <a:endParaRPr lang="en-US" sz="1140" dirty="0"/>
           </a:p>
         </p:txBody>
       </p:sp>
@@ -14495,8 +14497,8 @@
         </p:nvSpPr>
         <p:spPr>
           <a:xfrm>
-            <a:off x="868680" y="1508760"/>
-            <a:ext cx="6309360" cy="4160520"/>
+            <a:off x="822960" y="1463040"/>
+            <a:ext cx="6565392" cy="4343400"/>
           </a:xfrm>
           <a:prstGeom prst="rect">
             <a:avLst/>
@@ -14514,7 +14516,7 @@
               <a:buNone/>
             </a:pPr>
             <a:r>
-              <a:rPr lang="en-US" sz="2100" dirty="0">
+              <a:rPr lang="en-US" sz="1920" dirty="0">
                 <a:solidFill>
                   <a:srgbClr val="003A63"/>
                 </a:solidFill>
@@ -14522,16 +14524,16 @@
                 <a:ea typeface="Aptos" pitchFamily="34" charset="-122"/>
                 <a:cs typeface="Aptos" pitchFamily="34" charset="-120"/>
               </a:rPr>
-              <a:t>• Describe the major steps in public health data pipelines, including ingestion, validation,.</a:t>
-            </a:r>
-            <a:endParaRPr lang="en-US" sz="2100" dirty="0"/>
-          </a:p>
-          <a:p>
-            <a:pPr indent="0" marL="0">
-              <a:buNone/>
-            </a:pPr>
-            <a:r>
-              <a:rPr lang="en-US" sz="2100" dirty="0">
+              <a:t>• Describe the major steps in public health data pipelines, including.</a:t>
+            </a:r>
+            <a:endParaRPr lang="en-US" sz="1920" dirty="0"/>
+          </a:p>
+          <a:p>
+            <a:pPr indent="0" marL="0">
+              <a:buNone/>
+            </a:pPr>
+            <a:r>
+              <a:rPr lang="en-US" sz="1920" dirty="0">
                 <a:solidFill>
                   <a:srgbClr val="003A63"/>
                 </a:solidFill>
@@ -14541,14 +14543,14 @@
               </a:rPr>
               <a:t>• Distinguish between batch, real-time, and event-driven data flows.</a:t>
             </a:r>
-            <a:endParaRPr lang="en-US" sz="2100" dirty="0"/>
-          </a:p>
-          <a:p>
-            <a:pPr indent="0" marL="0">
-              <a:buNone/>
-            </a:pPr>
-            <a:r>
-              <a:rPr lang="en-US" sz="2100" dirty="0">
+            <a:endParaRPr lang="en-US" sz="1920" dirty="0"/>
+          </a:p>
+          <a:p>
+            <a:pPr indent="0" marL="0">
+              <a:buNone/>
+            </a:pPr>
+            <a:r>
+              <a:rPr lang="en-US" sz="1920" dirty="0">
                 <a:solidFill>
                   <a:srgbClr val="003A63"/>
                 </a:solidFill>
@@ -14558,7 +14560,7 @@
               </a:rPr>
               <a:t>• Explain how pipeline failures can affect AI outputs and operational decisions.</a:t>
             </a:r>
-            <a:endParaRPr lang="en-US" sz="2100" dirty="0"/>
+            <a:endParaRPr lang="en-US" sz="1920" dirty="0"/>
           </a:p>
         </p:txBody>
       </p:sp>
@@ -14570,12 +14572,12 @@
         </p:nvSpPr>
         <p:spPr>
           <a:xfrm>
-            <a:off x="7635240" y="1325880"/>
-            <a:ext cx="3474720" cy="1207008"/>
+            <a:off x="7543800" y="1325880"/>
+            <a:ext cx="3611880" cy="1261872"/>
           </a:xfrm>
           <a:prstGeom prst="roundRect">
             <a:avLst>
-              <a:gd name="adj" fmla="val 9091"/>
+              <a:gd name="adj" fmla="val 8696"/>
             </a:avLst>
           </a:prstGeom>
           <a:solidFill>
@@ -14597,8 +14599,8 @@
         </p:nvSpPr>
         <p:spPr>
           <a:xfrm>
-            <a:off x="7799832" y="1472184"/>
-            <a:ext cx="3145536" cy="256032"/>
+            <a:off x="7708392" y="1453896"/>
+            <a:ext cx="3282696" cy="228600"/>
           </a:xfrm>
           <a:prstGeom prst="rect">
             <a:avLst/>
@@ -14614,7 +14616,7 @@
               <a:buNone/>
             </a:pPr>
             <a:r>
-              <a:rPr lang="en-US" sz="1300" b="1" dirty="0">
+              <a:rPr lang="en-US" sz="1220" b="1" dirty="0">
                 <a:solidFill>
                   <a:srgbClr val="0068B7"/>
                 </a:solidFill>
@@ -14624,7 +14626,7 @@
               </a:rPr>
               <a:t>Data decision</a:t>
             </a:r>
-            <a:endParaRPr lang="en-US" sz="1300" dirty="0"/>
+            <a:endParaRPr lang="en-US" sz="1220" dirty="0"/>
           </a:p>
         </p:txBody>
       </p:sp>
@@ -14636,8 +14638,8 @@
         </p:nvSpPr>
         <p:spPr>
           <a:xfrm>
-            <a:off x="7799832" y="1801368"/>
-            <a:ext cx="3145536" cy="640080"/>
+            <a:off x="7708392" y="1764792"/>
+            <a:ext cx="3282696" cy="749808"/>
           </a:xfrm>
           <a:prstGeom prst="rect">
             <a:avLst/>
@@ -14655,7 +14657,7 @@
               <a:buNone/>
             </a:pPr>
             <a:r>
-              <a:rPr lang="en-US" sz="1320" dirty="0">
+              <a:rPr lang="en-US" sz="1220" dirty="0">
                 <a:solidFill>
                   <a:srgbClr val="17364A"/>
                 </a:solidFill>
@@ -14665,7 +14667,7 @@
               </a:rPr>
               <a:t>Describe the major steps in public health data pipelines, including ingestion,.</a:t>
             </a:r>
-            <a:endParaRPr lang="en-US" sz="1320" dirty="0"/>
+            <a:endParaRPr lang="en-US" sz="1220" dirty="0"/>
           </a:p>
         </p:txBody>
       </p:sp>
@@ -14677,12 +14679,12 @@
         </p:nvSpPr>
         <p:spPr>
           <a:xfrm>
-            <a:off x="7635240" y="2670048"/>
-            <a:ext cx="3474720" cy="1377086"/>
+            <a:off x="7543800" y="2724912"/>
+            <a:ext cx="3611880" cy="1527048"/>
           </a:xfrm>
           <a:prstGeom prst="roundRect">
             <a:avLst>
-              <a:gd name="adj" fmla="val 7968"/>
+              <a:gd name="adj" fmla="val 7186"/>
             </a:avLst>
           </a:prstGeom>
           <a:solidFill>
@@ -14704,8 +14706,8 @@
         </p:nvSpPr>
         <p:spPr>
           <a:xfrm>
-            <a:off x="7799832" y="2816352"/>
-            <a:ext cx="3145536" cy="256032"/>
+            <a:off x="7708392" y="2852928"/>
+            <a:ext cx="3282696" cy="228600"/>
           </a:xfrm>
           <a:prstGeom prst="rect">
             <a:avLst/>
@@ -14721,7 +14723,7 @@
               <a:buNone/>
             </a:pPr>
             <a:r>
-              <a:rPr lang="en-US" sz="1300" b="1" dirty="0">
+              <a:rPr lang="en-US" sz="1220" b="1" dirty="0">
                 <a:solidFill>
                   <a:srgbClr val="0068B7"/>
                 </a:solidFill>
@@ -14731,7 +14733,7 @@
               </a:rPr>
               <a:t>Concept checkpoints</a:t>
             </a:r>
-            <a:endParaRPr lang="en-US" sz="1300" dirty="0"/>
+            <a:endParaRPr lang="en-US" sz="1220" dirty="0"/>
           </a:p>
         </p:txBody>
       </p:sp>
@@ -14743,8 +14745,8 @@
         </p:nvSpPr>
         <p:spPr>
           <a:xfrm>
-            <a:off x="7818120" y="3182112"/>
-            <a:ext cx="3090672" cy="718718"/>
+            <a:off x="7726680" y="3182112"/>
+            <a:ext cx="3227832" cy="960120"/>
           </a:xfrm>
           <a:prstGeom prst="rect">
             <a:avLst/>
@@ -14762,7 +14764,7 @@
               <a:buNone/>
             </a:pPr>
             <a:r>
-              <a:rPr lang="en-US" sz="1220" dirty="0">
+              <a:rPr lang="en-US" sz="1140" dirty="0">
                 <a:solidFill>
                   <a:srgbClr val="17364A"/>
                 </a:solidFill>
@@ -14770,16 +14772,16 @@
                 <a:ea typeface="Aptos" pitchFamily="34" charset="-122"/>
                 <a:cs typeface="Aptos" pitchFamily="34" charset="-120"/>
               </a:rPr>
-              <a:t>Describe the major steps in public health data pipelines,.</a:t>
-            </a:r>
-            <a:endParaRPr lang="en-US" sz="1220" dirty="0"/>
-          </a:p>
-          <a:p>
-            <a:pPr indent="0" marL="0">
-              <a:buNone/>
-            </a:pPr>
-            <a:r>
-              <a:rPr lang="en-US" sz="1220" dirty="0">
+              <a:t>Describe the major steps in public health data.</a:t>
+            </a:r>
+            <a:endParaRPr lang="en-US" sz="1140" dirty="0"/>
+          </a:p>
+          <a:p>
+            <a:pPr indent="0" marL="0">
+              <a:buNone/>
+            </a:pPr>
+            <a:r>
+              <a:rPr lang="en-US" sz="1140" dirty="0">
                 <a:solidFill>
                   <a:srgbClr val="17364A"/>
                 </a:solidFill>
@@ -14787,16 +14789,16 @@
                 <a:ea typeface="Aptos" pitchFamily="34" charset="-122"/>
                 <a:cs typeface="Aptos" pitchFamily="34" charset="-120"/>
               </a:rPr>
-              <a:t>Identify metadata, lineage, version control, and audit needs for.</a:t>
-            </a:r>
-            <a:endParaRPr lang="en-US" sz="1220" dirty="0"/>
-          </a:p>
-          <a:p>
-            <a:pPr indent="0" marL="0">
-              <a:buNone/>
-            </a:pPr>
-            <a:r>
-              <a:rPr lang="en-US" sz="1220" dirty="0">
+              <a:t>Identify metadata, lineage, version control, and.</a:t>
+            </a:r>
+            <a:endParaRPr lang="en-US" sz="1140" dirty="0"/>
+          </a:p>
+          <a:p>
+            <a:pPr indent="0" marL="0">
+              <a:buNone/>
+            </a:pPr>
+            <a:r>
+              <a:rPr lang="en-US" sz="1140" dirty="0">
                 <a:solidFill>
                   <a:srgbClr val="17364A"/>
                 </a:solidFill>
@@ -14804,9 +14806,9 @@
                 <a:ea typeface="Aptos" pitchFamily="34" charset="-122"/>
                 <a:cs typeface="Aptos" pitchFamily="34" charset="-120"/>
               </a:rPr>
-              <a:t>Produce a data pipeline readiness checklist for a public health AI.</a:t>
-            </a:r>
-            <a:endParaRPr lang="en-US" sz="1220" dirty="0"/>
+              <a:t>Produce a data pipeline readiness checklist for a.</a:t>
+            </a:r>
+            <a:endParaRPr lang="en-US" sz="1140" dirty="0"/>
           </a:p>
         </p:txBody>
       </p:sp>
@@ -14818,12 +14820,12 @@
         </p:nvSpPr>
         <p:spPr>
           <a:xfrm>
-            <a:off x="7635240" y="4184294"/>
-            <a:ext cx="3474720" cy="1466698"/>
+            <a:off x="7543800" y="4389120"/>
+            <a:ext cx="3611880" cy="1261872"/>
           </a:xfrm>
           <a:prstGeom prst="roundRect">
             <a:avLst>
-              <a:gd name="adj" fmla="val 7481"/>
+              <a:gd name="adj" fmla="val 8696"/>
             </a:avLst>
           </a:prstGeom>
           <a:solidFill>
@@ -14845,8 +14847,8 @@
         </p:nvSpPr>
         <p:spPr>
           <a:xfrm>
-            <a:off x="7799832" y="4330598"/>
-            <a:ext cx="3145536" cy="256032"/>
+            <a:off x="7708392" y="4517136"/>
+            <a:ext cx="3282696" cy="228600"/>
           </a:xfrm>
           <a:prstGeom prst="rect">
             <a:avLst/>
@@ -14862,7 +14864,7 @@
               <a:buNone/>
             </a:pPr>
             <a:r>
-              <a:rPr lang="en-US" sz="1300" b="1" dirty="0">
+              <a:rPr lang="en-US" sz="1220" b="1" dirty="0">
                 <a:solidFill>
                   <a:srgbClr val="0068B7"/>
                 </a:solidFill>
@@ -14872,7 +14874,7 @@
               </a:rPr>
               <a:t>How to validate</a:t>
             </a:r>
-            <a:endParaRPr lang="en-US" sz="1300" dirty="0"/>
+            <a:endParaRPr lang="en-US" sz="1220" dirty="0"/>
           </a:p>
         </p:txBody>
       </p:sp>
@@ -14884,8 +14886,8 @@
         </p:nvSpPr>
         <p:spPr>
           <a:xfrm>
-            <a:off x="7799832" y="4659782"/>
-            <a:ext cx="3145536" cy="899770"/>
+            <a:off x="7708392" y="4828032"/>
+            <a:ext cx="3282696" cy="749808"/>
           </a:xfrm>
           <a:prstGeom prst="rect">
             <a:avLst/>
@@ -14903,7 +14905,7 @@
               <a:buNone/>
             </a:pPr>
             <a:r>
-              <a:rPr lang="en-US" sz="1320" dirty="0">
+              <a:rPr lang="en-US" sz="1220" dirty="0">
                 <a:solidFill>
                   <a:srgbClr val="17364A"/>
                 </a:solidFill>
@@ -14911,9 +14913,9 @@
                 <a:ea typeface="Aptos" pitchFamily="34" charset="-122"/>
                 <a:cs typeface="Aptos" pitchFamily="34" charset="-120"/>
               </a:rPr>
-              <a:t>Use the assignment to test whether you can explain the concept, apply it to a realistic public health situation, and identify what would need review before the work moves forward.</a:t>
-            </a:r>
-            <a:endParaRPr lang="en-US" sz="1320" dirty="0"/>
+              <a:t>Use the assignment to test whether you can explain the concept, apply it to a.</a:t>
+            </a:r>
+            <a:endParaRPr lang="en-US" sz="1220" dirty="0"/>
           </a:p>
         </p:txBody>
       </p:sp>
@@ -15204,8 +15206,8 @@
         </p:nvSpPr>
         <p:spPr>
           <a:xfrm>
-            <a:off x="868680" y="1508760"/>
-            <a:ext cx="6309360" cy="4160520"/>
+            <a:off x="822960" y="1463040"/>
+            <a:ext cx="6565392" cy="4343400"/>
           </a:xfrm>
           <a:prstGeom prst="rect">
             <a:avLst/>
@@ -15223,7 +15225,7 @@
               <a:buNone/>
             </a:pPr>
             <a:r>
-              <a:rPr lang="en-US" sz="2100" dirty="0">
+              <a:rPr lang="en-US" sz="1920" dirty="0">
                 <a:solidFill>
                   <a:srgbClr val="003A63"/>
                 </a:solidFill>
@@ -15231,16 +15233,16 @@
                 <a:ea typeface="Aptos" pitchFamily="34" charset="-122"/>
                 <a:cs typeface="Aptos" pitchFamily="34" charset="-120"/>
               </a:rPr>
-              <a:t>• Data pipelines are the operational pathways that move public health data from source systems.</a:t>
-            </a:r>
-            <a:endParaRPr lang="en-US" sz="2100" dirty="0"/>
-          </a:p>
-          <a:p>
-            <a:pPr indent="0" marL="0">
-              <a:buNone/>
-            </a:pPr>
-            <a:r>
-              <a:rPr lang="en-US" sz="2100" dirty="0">
+              <a:t>• Data pipelines are the operational pathways that move public health data.</a:t>
+            </a:r>
+            <a:endParaRPr lang="en-US" sz="1920" dirty="0"/>
+          </a:p>
+          <a:p>
+            <a:pPr indent="0" marL="0">
+              <a:buNone/>
+            </a:pPr>
+            <a:r>
+              <a:rPr lang="en-US" sz="1920" dirty="0">
                 <a:solidFill>
                   <a:srgbClr val="003A63"/>
                 </a:solidFill>
@@ -15250,14 +15252,14 @@
               </a:rPr>
               <a:t>• AI tools depend on these pathways even when users do not see them.</a:t>
             </a:r>
-            <a:endParaRPr lang="en-US" sz="2100" dirty="0"/>
-          </a:p>
-          <a:p>
-            <a:pPr indent="0" marL="0">
-              <a:buNone/>
-            </a:pPr>
-            <a:r>
-              <a:rPr lang="en-US" sz="2100" dirty="0">
+            <a:endParaRPr lang="en-US" sz="1920" dirty="0"/>
+          </a:p>
+          <a:p>
+            <a:pPr indent="0" marL="0">
+              <a:buNone/>
+            </a:pPr>
+            <a:r>
+              <a:rPr lang="en-US" sz="1920" dirty="0">
                 <a:solidFill>
                   <a:srgbClr val="003A63"/>
                 </a:solidFill>
@@ -15265,9 +15267,9 @@
                 <a:ea typeface="Aptos" pitchFamily="34" charset="-122"/>
                 <a:cs typeface="Aptos" pitchFamily="34" charset="-120"/>
               </a:rPr>
-              <a:t>• A model that classifies cases, summarizes laboratory reports, or predicts service demand can.</a:t>
-            </a:r>
-            <a:endParaRPr lang="en-US" sz="2100" dirty="0"/>
+              <a:t>• A model that classifies cases, summarizes laboratory reports, or predicts.</a:t>
+            </a:r>
+            <a:endParaRPr lang="en-US" sz="1920" dirty="0"/>
           </a:p>
         </p:txBody>
       </p:sp>
@@ -15279,12 +15281,12 @@
         </p:nvSpPr>
         <p:spPr>
           <a:xfrm>
-            <a:off x="7635240" y="1325880"/>
-            <a:ext cx="3474720" cy="1255471"/>
+            <a:off x="7543800" y="1325880"/>
+            <a:ext cx="3611880" cy="1261872"/>
           </a:xfrm>
           <a:prstGeom prst="roundRect">
             <a:avLst>
-              <a:gd name="adj" fmla="val 8740"/>
+              <a:gd name="adj" fmla="val 8696"/>
             </a:avLst>
           </a:prstGeom>
           <a:solidFill>
@@ -15306,8 +15308,8 @@
         </p:nvSpPr>
         <p:spPr>
           <a:xfrm>
-            <a:off x="7799832" y="1472184"/>
-            <a:ext cx="3145536" cy="256032"/>
+            <a:off x="7708392" y="1453896"/>
+            <a:ext cx="3282696" cy="228600"/>
           </a:xfrm>
           <a:prstGeom prst="rect">
             <a:avLst/>
@@ -15323,7 +15325,7 @@
               <a:buNone/>
             </a:pPr>
             <a:r>
-              <a:rPr lang="en-US" sz="1300" b="1" dirty="0">
+              <a:rPr lang="en-US" sz="1220" b="1" dirty="0">
                 <a:solidFill>
                   <a:srgbClr val="0068B7"/>
                 </a:solidFill>
@@ -15333,7 +15335,7 @@
               </a:rPr>
               <a:t>Data decision</a:t>
             </a:r>
-            <a:endParaRPr lang="en-US" sz="1300" dirty="0"/>
+            <a:endParaRPr lang="en-US" sz="1220" dirty="0"/>
           </a:p>
         </p:txBody>
       </p:sp>
@@ -15345,8 +15347,8 @@
         </p:nvSpPr>
         <p:spPr>
           <a:xfrm>
-            <a:off x="7799832" y="1801368"/>
-            <a:ext cx="3145536" cy="688543"/>
+            <a:off x="7708392" y="1764792"/>
+            <a:ext cx="3282696" cy="749808"/>
           </a:xfrm>
           <a:prstGeom prst="rect">
             <a:avLst/>
@@ -15364,7 +15366,7 @@
               <a:buNone/>
             </a:pPr>
             <a:r>
-              <a:rPr lang="en-US" sz="1320" dirty="0">
+              <a:rPr lang="en-US" sz="1220" dirty="0">
                 <a:solidFill>
                   <a:srgbClr val="17364A"/>
                 </a:solidFill>
@@ -15372,9 +15374,9 @@
                 <a:ea typeface="Aptos" pitchFamily="34" charset="-122"/>
                 <a:cs typeface="Aptos" pitchFamily="34" charset="-120"/>
               </a:rPr>
-              <a:t>Data pipelines are the operational pathways that move public health data from source systems into.</a:t>
-            </a:r>
-            <a:endParaRPr lang="en-US" sz="1320" dirty="0"/>
+              <a:t>Data pipelines are the operational pathways that move public health data from.</a:t>
+            </a:r>
+            <a:endParaRPr lang="en-US" sz="1220" dirty="0"/>
           </a:p>
         </p:txBody>
       </p:sp>
@@ -15386,12 +15388,12 @@
         </p:nvSpPr>
         <p:spPr>
           <a:xfrm>
-            <a:off x="7635240" y="2718511"/>
-            <a:ext cx="3474720" cy="1328623"/>
+            <a:off x="7543800" y="2724912"/>
+            <a:ext cx="3611880" cy="1527048"/>
           </a:xfrm>
           <a:prstGeom prst="roundRect">
             <a:avLst>
-              <a:gd name="adj" fmla="val 8259"/>
+              <a:gd name="adj" fmla="val 7186"/>
             </a:avLst>
           </a:prstGeom>
           <a:solidFill>
@@ -15413,24 +15415,26 @@
         </p:nvSpPr>
         <p:spPr>
           <a:xfrm>
-            <a:off x="7799832" y="2846527"/>
-            <a:ext cx="3145536" cy="237744"/>
-          </a:xfrm>
-          <a:prstGeom prst="rect">
-            <a:avLst/>
-          </a:prstGeom>
-          <a:noFill/>
-          <a:ln/>
-        </p:spPr>
-        <p:txBody>
-          <a:bodyPr wrap="square" lIns="0" tIns="0" rIns="0" bIns="0" rtlCol="0" anchor="ctr"/>
-          <a:lstStyle/>
-          <a:p>
-            <a:pPr indent="0" marL="0">
-              <a:buNone/>
-            </a:pPr>
-            <a:r>
-              <a:rPr lang="en-US" sz="1250" b="1" dirty="0">
+            <a:off x="7708392" y="2852928"/>
+            <a:ext cx="3282696" cy="219456"/>
+          </a:xfrm>
+          <a:prstGeom prst="rect">
+            <a:avLst/>
+          </a:prstGeom>
+          <a:noFill/>
+          <a:ln/>
+        </p:spPr>
+        <p:txBody>
+          <a:bodyPr wrap="square" lIns="0" tIns="0" rIns="0" bIns="0" rtlCol="0" anchor="ctr">
+            <a:normAutofit/>
+          </a:bodyPr>
+          <a:lstStyle/>
+          <a:p>
+            <a:pPr indent="0" marL="0">
+              <a:buNone/>
+            </a:pPr>
+            <a:r>
+              <a:rPr lang="en-US" sz="1160" b="1" dirty="0">
                 <a:solidFill>
                   <a:srgbClr val="0068B7"/>
                 </a:solidFill>
@@ -15440,7 +15444,7 @@
               </a:rPr>
               <a:t>Data-to-decision flow</a:t>
             </a:r>
-            <a:endParaRPr lang="en-US" sz="1250" dirty="0"/>
+            <a:endParaRPr lang="en-US" sz="1160" dirty="0"/>
           </a:p>
         </p:txBody>
       </p:sp>
@@ -15452,7 +15456,7 @@
         </p:nvSpPr>
         <p:spPr>
           <a:xfrm>
-            <a:off x="8763000" y="3399739"/>
+            <a:off x="8717280" y="3406140"/>
             <a:ext cx="164592" cy="0"/>
           </a:xfrm>
           <a:prstGeom prst="line">
@@ -15475,8 +15479,8 @@
         </p:nvSpPr>
         <p:spPr>
           <a:xfrm>
-            <a:off x="7872984" y="3248863"/>
-            <a:ext cx="890016" cy="301752"/>
+            <a:off x="7781544" y="3255264"/>
+            <a:ext cx="935736" cy="301752"/>
           </a:xfrm>
           <a:prstGeom prst="roundRect">
             <a:avLst>
@@ -15502,8 +15506,8 @@
         </p:nvSpPr>
         <p:spPr>
           <a:xfrm>
-            <a:off x="7909560" y="3322015"/>
-            <a:ext cx="816864" cy="146304"/>
+            <a:off x="7818120" y="3328416"/>
+            <a:ext cx="862584" cy="146304"/>
           </a:xfrm>
           <a:prstGeom prst="rect">
             <a:avLst/>
@@ -15543,7 +15547,7 @@
         </p:nvSpPr>
         <p:spPr>
           <a:xfrm>
-            <a:off x="9817608" y="3399739"/>
+            <a:off x="9817608" y="3406140"/>
             <a:ext cx="164592" cy="0"/>
           </a:xfrm>
           <a:prstGeom prst="line">
@@ -15566,8 +15570,8 @@
         </p:nvSpPr>
         <p:spPr>
           <a:xfrm>
-            <a:off x="8927592" y="3248863"/>
-            <a:ext cx="890016" cy="301752"/>
+            <a:off x="8881872" y="3255264"/>
+            <a:ext cx="935736" cy="301752"/>
           </a:xfrm>
           <a:prstGeom prst="roundRect">
             <a:avLst>
@@ -15593,8 +15597,8 @@
         </p:nvSpPr>
         <p:spPr>
           <a:xfrm>
-            <a:off x="8964168" y="3322015"/>
-            <a:ext cx="816864" cy="146304"/>
+            <a:off x="8918448" y="3328416"/>
+            <a:ext cx="862584" cy="146304"/>
           </a:xfrm>
           <a:prstGeom prst="rect">
             <a:avLst/>
@@ -15634,8 +15638,8 @@
         </p:nvSpPr>
         <p:spPr>
           <a:xfrm>
-            <a:off x="9982200" y="3248863"/>
-            <a:ext cx="890016" cy="301752"/>
+            <a:off x="9982200" y="3255264"/>
+            <a:ext cx="935736" cy="301752"/>
           </a:xfrm>
           <a:prstGeom prst="roundRect">
             <a:avLst>
@@ -15661,8 +15665,8 @@
         </p:nvSpPr>
         <p:spPr>
           <a:xfrm>
-            <a:off x="10018776" y="3322015"/>
-            <a:ext cx="816864" cy="146304"/>
+            <a:off x="10018776" y="3328416"/>
+            <a:ext cx="862584" cy="146304"/>
           </a:xfrm>
           <a:prstGeom prst="rect">
             <a:avLst/>
@@ -15702,8 +15706,8 @@
         </p:nvSpPr>
         <p:spPr>
           <a:xfrm>
-            <a:off x="7854696" y="3742639"/>
-            <a:ext cx="3035808" cy="158191"/>
+            <a:off x="7763256" y="3749040"/>
+            <a:ext cx="3172968" cy="356616"/>
           </a:xfrm>
           <a:prstGeom prst="rect">
             <a:avLst/>
@@ -15721,7 +15725,7 @@
               <a:buNone/>
             </a:pPr>
             <a:r>
-              <a:rPr lang="en-US" sz="1120" dirty="0">
+              <a:rPr lang="en-US" sz="1040" dirty="0">
                 <a:solidFill>
                   <a:srgbClr val="17364A"/>
                 </a:solidFill>
@@ -15729,9 +15733,9 @@
                 <a:ea typeface="Aptos" pitchFamily="34" charset="-122"/>
                 <a:cs typeface="Aptos" pitchFamily="34" charset="-120"/>
               </a:rPr>
-              <a:t>The important handoff is not from data to AI; it is from analysis to accountable human review.</a:t>
-            </a:r>
-            <a:endParaRPr lang="en-US" sz="1120" dirty="0"/>
+              <a:t>The important handoff is not from data to AI; it is from analysis to.</a:t>
+            </a:r>
+            <a:endParaRPr lang="en-US" sz="1040" dirty="0"/>
           </a:p>
         </p:txBody>
       </p:sp>
@@ -15743,12 +15747,12 @@
         </p:nvSpPr>
         <p:spPr>
           <a:xfrm>
-            <a:off x="7635240" y="4184294"/>
-            <a:ext cx="3474720" cy="1466698"/>
+            <a:off x="7543800" y="4389120"/>
+            <a:ext cx="3611880" cy="1261872"/>
           </a:xfrm>
           <a:prstGeom prst="roundRect">
             <a:avLst>
-              <a:gd name="adj" fmla="val 7481"/>
+              <a:gd name="adj" fmla="val 8696"/>
             </a:avLst>
           </a:prstGeom>
           <a:solidFill>
@@ -15770,8 +15774,8 @@
         </p:nvSpPr>
         <p:spPr>
           <a:xfrm>
-            <a:off x="7799832" y="4330598"/>
-            <a:ext cx="3145536" cy="256032"/>
+            <a:off x="7708392" y="4517136"/>
+            <a:ext cx="3282696" cy="228600"/>
           </a:xfrm>
           <a:prstGeom prst="rect">
             <a:avLst/>
@@ -15787,7 +15791,7 @@
               <a:buNone/>
             </a:pPr>
             <a:r>
-              <a:rPr lang="en-US" sz="1300" b="1" dirty="0">
+              <a:rPr lang="en-US" sz="1220" b="1" dirty="0">
                 <a:solidFill>
                   <a:srgbClr val="0068B7"/>
                 </a:solidFill>
@@ -15797,7 +15801,7 @@
               </a:rPr>
               <a:t>How to validate</a:t>
             </a:r>
-            <a:endParaRPr lang="en-US" sz="1300" dirty="0"/>
+            <a:endParaRPr lang="en-US" sz="1220" dirty="0"/>
           </a:p>
         </p:txBody>
       </p:sp>
@@ -15809,8 +15813,8 @@
         </p:nvSpPr>
         <p:spPr>
           <a:xfrm>
-            <a:off x="7799832" y="4659782"/>
-            <a:ext cx="3145536" cy="899770"/>
+            <a:off x="7708392" y="4828032"/>
+            <a:ext cx="3282696" cy="749808"/>
           </a:xfrm>
           <a:prstGeom prst="rect">
             <a:avLst/>
@@ -15828,7 +15832,7 @@
               <a:buNone/>
             </a:pPr>
             <a:r>
-              <a:rPr lang="en-US" sz="1320" dirty="0">
+              <a:rPr lang="en-US" sz="1220" dirty="0">
                 <a:solidFill>
                   <a:srgbClr val="17364A"/>
                 </a:solidFill>
@@ -15836,9 +15840,9 @@
                 <a:ea typeface="Aptos" pitchFamily="34" charset="-122"/>
                 <a:cs typeface="Aptos" pitchFamily="34" charset="-120"/>
               </a:rPr>
-              <a:t>Connect the concept to data quality, model performance, validation evidence, monitoring measures, and decisions that remain under human control.</a:t>
-            </a:r>
-            <a:endParaRPr lang="en-US" sz="1320" dirty="0"/>
+              <a:t>Connect the concept to data quality, model performance, validation evidence,.</a:t>
+            </a:r>
+            <a:endParaRPr lang="en-US" sz="1220" dirty="0"/>
           </a:p>
         </p:txBody>
       </p:sp>
@@ -16129,8 +16133,8 @@
         </p:nvSpPr>
         <p:spPr>
           <a:xfrm>
-            <a:off x="868680" y="1508760"/>
-            <a:ext cx="6309360" cy="4160520"/>
+            <a:off x="822960" y="1463040"/>
+            <a:ext cx="6565392" cy="4343400"/>
           </a:xfrm>
           <a:prstGeom prst="rect">
             <a:avLst/>
@@ -16148,7 +16152,7 @@
               <a:buNone/>
             </a:pPr>
             <a:r>
-              <a:rPr lang="en-US" sz="2100" dirty="0">
+              <a:rPr lang="en-US" sz="1920" dirty="0">
                 <a:solidFill>
                   <a:srgbClr val="003A63"/>
                 </a:solidFill>
@@ -16156,16 +16160,16 @@
                 <a:ea typeface="Aptos" pitchFamily="34" charset="-122"/>
                 <a:cs typeface="Aptos" pitchFamily="34" charset="-120"/>
               </a:rPr>
-              <a:t>• Data pipeline readiness matters because AI systems can amplify routine data management problems.</a:t>
-            </a:r>
-            <a:endParaRPr lang="en-US" sz="2100" dirty="0"/>
-          </a:p>
-          <a:p>
-            <a:pPr indent="0" marL="0">
-              <a:buNone/>
-            </a:pPr>
-            <a:r>
-              <a:rPr lang="en-US" sz="2100" dirty="0">
+              <a:t>• Data pipeline readiness matters because AI systems can amplify routine data.</a:t>
+            </a:r>
+            <a:endParaRPr lang="en-US" sz="1920" dirty="0"/>
+          </a:p>
+          <a:p>
+            <a:pPr indent="0" marL="0">
+              <a:buNone/>
+            </a:pPr>
+            <a:r>
+              <a:rPr lang="en-US" sz="1920" dirty="0">
                 <a:solidFill>
                   <a:srgbClr val="003A63"/>
                 </a:solidFill>
@@ -16173,16 +16177,16 @@
                 <a:ea typeface="Aptos" pitchFamily="34" charset="-122"/>
                 <a:cs typeface="Aptos" pitchFamily="34" charset="-120"/>
               </a:rPr>
-              <a:t>• A delayed file, changed field name, failed interface, missing date, duplicate record, or.</a:t>
-            </a:r>
-            <a:endParaRPr lang="en-US" sz="2100" dirty="0"/>
-          </a:p>
-          <a:p>
-            <a:pPr indent="0" marL="0">
-              <a:buNone/>
-            </a:pPr>
-            <a:r>
-              <a:rPr lang="en-US" sz="2100" dirty="0">
+              <a:t>• A delayed file, changed field name, failed interface, missing date,.</a:t>
+            </a:r>
+            <a:endParaRPr lang="en-US" sz="1920" dirty="0"/>
+          </a:p>
+          <a:p>
+            <a:pPr indent="0" marL="0">
+              <a:buNone/>
+            </a:pPr>
+            <a:r>
+              <a:rPr lang="en-US" sz="1920" dirty="0">
                 <a:solidFill>
                   <a:srgbClr val="003A63"/>
                 </a:solidFill>
@@ -16190,9 +16194,9 @@
                 <a:ea typeface="Aptos" pitchFamily="34" charset="-122"/>
                 <a:cs typeface="Aptos" pitchFamily="34" charset="-120"/>
               </a:rPr>
-              <a:t>• The AI tool may continue generating fluent summaries or confident classifications even after.</a:t>
-            </a:r>
-            <a:endParaRPr lang="en-US" sz="2100" dirty="0"/>
+              <a:t>• The AI tool may continue generating fluent summaries or confident.</a:t>
+            </a:r>
+            <a:endParaRPr lang="en-US" sz="1920" dirty="0"/>
           </a:p>
         </p:txBody>
       </p:sp>
@@ -16204,12 +16208,12 @@
         </p:nvSpPr>
         <p:spPr>
           <a:xfrm>
-            <a:off x="7635240" y="1325880"/>
-            <a:ext cx="3474720" cy="1255471"/>
+            <a:off x="7543800" y="1325880"/>
+            <a:ext cx="3611880" cy="1261872"/>
           </a:xfrm>
           <a:prstGeom prst="roundRect">
             <a:avLst>
-              <a:gd name="adj" fmla="val 8740"/>
+              <a:gd name="adj" fmla="val 8696"/>
             </a:avLst>
           </a:prstGeom>
           <a:solidFill>
@@ -16231,8 +16235,8 @@
         </p:nvSpPr>
         <p:spPr>
           <a:xfrm>
-            <a:off x="7799832" y="1472184"/>
-            <a:ext cx="3145536" cy="256032"/>
+            <a:off x="7708392" y="1453896"/>
+            <a:ext cx="3282696" cy="228600"/>
           </a:xfrm>
           <a:prstGeom prst="rect">
             <a:avLst/>
@@ -16248,7 +16252,7 @@
               <a:buNone/>
             </a:pPr>
             <a:r>
-              <a:rPr lang="en-US" sz="1300" b="1" dirty="0">
+              <a:rPr lang="en-US" sz="1220" b="1" dirty="0">
                 <a:solidFill>
                   <a:srgbClr val="0068B7"/>
                 </a:solidFill>
@@ -16258,7 +16262,7 @@
               </a:rPr>
               <a:t>Data decision</a:t>
             </a:r>
-            <a:endParaRPr lang="en-US" sz="1300" dirty="0"/>
+            <a:endParaRPr lang="en-US" sz="1220" dirty="0"/>
           </a:p>
         </p:txBody>
       </p:sp>
@@ -16270,8 +16274,8 @@
         </p:nvSpPr>
         <p:spPr>
           <a:xfrm>
-            <a:off x="7799832" y="1801368"/>
-            <a:ext cx="3145536" cy="688543"/>
+            <a:off x="7708392" y="1764792"/>
+            <a:ext cx="3282696" cy="749808"/>
           </a:xfrm>
           <a:prstGeom prst="rect">
             <a:avLst/>
@@ -16289,7 +16293,7 @@
               <a:buNone/>
             </a:pPr>
             <a:r>
-              <a:rPr lang="en-US" sz="1320" dirty="0">
+              <a:rPr lang="en-US" sz="1220" dirty="0">
                 <a:solidFill>
                   <a:srgbClr val="17364A"/>
                 </a:solidFill>
@@ -16297,9 +16301,9 @@
                 <a:ea typeface="Aptos" pitchFamily="34" charset="-122"/>
                 <a:cs typeface="Aptos" pitchFamily="34" charset="-120"/>
               </a:rPr>
-              <a:t>Data pipeline readiness matters because AI systems can amplify routine data management problems.</a:t>
-            </a:r>
-            <a:endParaRPr lang="en-US" sz="1320" dirty="0"/>
+              <a:t>Data pipeline readiness matters because AI systems can amplify routine data.</a:t>
+            </a:r>
+            <a:endParaRPr lang="en-US" sz="1220" dirty="0"/>
           </a:p>
         </p:txBody>
       </p:sp>
@@ -16311,12 +16315,12 @@
         </p:nvSpPr>
         <p:spPr>
           <a:xfrm>
-            <a:off x="7635240" y="2718511"/>
-            <a:ext cx="3474720" cy="1328623"/>
+            <a:off x="7543800" y="2724912"/>
+            <a:ext cx="3611880" cy="1527048"/>
           </a:xfrm>
           <a:prstGeom prst="roundRect">
             <a:avLst>
-              <a:gd name="adj" fmla="val 8259"/>
+              <a:gd name="adj" fmla="val 7186"/>
             </a:avLst>
           </a:prstGeom>
           <a:solidFill>
@@ -16338,24 +16342,26 @@
         </p:nvSpPr>
         <p:spPr>
           <a:xfrm>
-            <a:off x="7799832" y="2846527"/>
-            <a:ext cx="3145536" cy="237744"/>
-          </a:xfrm>
-          <a:prstGeom prst="rect">
-            <a:avLst/>
-          </a:prstGeom>
-          <a:noFill/>
-          <a:ln/>
-        </p:spPr>
-        <p:txBody>
-          <a:bodyPr wrap="square" lIns="0" tIns="0" rIns="0" bIns="0" rtlCol="0" anchor="ctr"/>
-          <a:lstStyle/>
-          <a:p>
-            <a:pPr indent="0" marL="0">
-              <a:buNone/>
-            </a:pPr>
-            <a:r>
-              <a:rPr lang="en-US" sz="1250" b="1" dirty="0">
+            <a:off x="7708392" y="2852928"/>
+            <a:ext cx="3282696" cy="219456"/>
+          </a:xfrm>
+          <a:prstGeom prst="rect">
+            <a:avLst/>
+          </a:prstGeom>
+          <a:noFill/>
+          <a:ln/>
+        </p:spPr>
+        <p:txBody>
+          <a:bodyPr wrap="square" lIns="0" tIns="0" rIns="0" bIns="0" rtlCol="0" anchor="ctr">
+            <a:normAutofit/>
+          </a:bodyPr>
+          <a:lstStyle/>
+          <a:p>
+            <a:pPr indent="0" marL="0">
+              <a:buNone/>
+            </a:pPr>
+            <a:r>
+              <a:rPr lang="en-US" sz="1160" b="1" dirty="0">
                 <a:solidFill>
                   <a:srgbClr val="0068B7"/>
                 </a:solidFill>
@@ -16365,7 +16371,7 @@
               </a:rPr>
               <a:t>Data-to-decision flow</a:t>
             </a:r>
-            <a:endParaRPr lang="en-US" sz="1250" dirty="0"/>
+            <a:endParaRPr lang="en-US" sz="1160" dirty="0"/>
           </a:p>
         </p:txBody>
       </p:sp>
@@ -16377,7 +16383,7 @@
         </p:nvSpPr>
         <p:spPr>
           <a:xfrm>
-            <a:off x="8763000" y="3399739"/>
+            <a:off x="8717280" y="3406140"/>
             <a:ext cx="164592" cy="0"/>
           </a:xfrm>
           <a:prstGeom prst="line">
@@ -16400,8 +16406,8 @@
         </p:nvSpPr>
         <p:spPr>
           <a:xfrm>
-            <a:off x="7872984" y="3248863"/>
-            <a:ext cx="890016" cy="301752"/>
+            <a:off x="7781544" y="3255264"/>
+            <a:ext cx="935736" cy="301752"/>
           </a:xfrm>
           <a:prstGeom prst="roundRect">
             <a:avLst>
@@ -16427,8 +16433,8 @@
         </p:nvSpPr>
         <p:spPr>
           <a:xfrm>
-            <a:off x="7909560" y="3322015"/>
-            <a:ext cx="816864" cy="146304"/>
+            <a:off x="7818120" y="3328416"/>
+            <a:ext cx="862584" cy="146304"/>
           </a:xfrm>
           <a:prstGeom prst="rect">
             <a:avLst/>
@@ -16468,7 +16474,7 @@
         </p:nvSpPr>
         <p:spPr>
           <a:xfrm>
-            <a:off x="9817608" y="3399739"/>
+            <a:off x="9817608" y="3406140"/>
             <a:ext cx="164592" cy="0"/>
           </a:xfrm>
           <a:prstGeom prst="line">
@@ -16491,8 +16497,8 @@
         </p:nvSpPr>
         <p:spPr>
           <a:xfrm>
-            <a:off x="8927592" y="3248863"/>
-            <a:ext cx="890016" cy="301752"/>
+            <a:off x="8881872" y="3255264"/>
+            <a:ext cx="935736" cy="301752"/>
           </a:xfrm>
           <a:prstGeom prst="roundRect">
             <a:avLst>
@@ -16518,8 +16524,8 @@
         </p:nvSpPr>
         <p:spPr>
           <a:xfrm>
-            <a:off x="8964168" y="3322015"/>
-            <a:ext cx="816864" cy="146304"/>
+            <a:off x="8918448" y="3328416"/>
+            <a:ext cx="862584" cy="146304"/>
           </a:xfrm>
           <a:prstGeom prst="rect">
             <a:avLst/>
@@ -16559,8 +16565,8 @@
         </p:nvSpPr>
         <p:spPr>
           <a:xfrm>
-            <a:off x="9982200" y="3248863"/>
-            <a:ext cx="890016" cy="301752"/>
+            <a:off x="9982200" y="3255264"/>
+            <a:ext cx="935736" cy="301752"/>
           </a:xfrm>
           <a:prstGeom prst="roundRect">
             <a:avLst>
@@ -16586,8 +16592,8 @@
         </p:nvSpPr>
         <p:spPr>
           <a:xfrm>
-            <a:off x="10018776" y="3322015"/>
-            <a:ext cx="816864" cy="146304"/>
+            <a:off x="10018776" y="3328416"/>
+            <a:ext cx="862584" cy="146304"/>
           </a:xfrm>
           <a:prstGeom prst="rect">
             <a:avLst/>
@@ -16627,8 +16633,8 @@
         </p:nvSpPr>
         <p:spPr>
           <a:xfrm>
-            <a:off x="7854696" y="3742639"/>
-            <a:ext cx="3035808" cy="158191"/>
+            <a:off x="7763256" y="3749040"/>
+            <a:ext cx="3172968" cy="356616"/>
           </a:xfrm>
           <a:prstGeom prst="rect">
             <a:avLst/>
@@ -16646,7 +16652,7 @@
               <a:buNone/>
             </a:pPr>
             <a:r>
-              <a:rPr lang="en-US" sz="1120" dirty="0">
+              <a:rPr lang="en-US" sz="1040" dirty="0">
                 <a:solidFill>
                   <a:srgbClr val="17364A"/>
                 </a:solidFill>
@@ -16654,9 +16660,9 @@
                 <a:ea typeface="Aptos" pitchFamily="34" charset="-122"/>
                 <a:cs typeface="Aptos" pitchFamily="34" charset="-120"/>
               </a:rPr>
-              <a:t>The important handoff is not from data to AI; it is from analysis to accountable human review.</a:t>
-            </a:r>
-            <a:endParaRPr lang="en-US" sz="1120" dirty="0"/>
+              <a:t>The important handoff is not from data to AI; it is from analysis to.</a:t>
+            </a:r>
+            <a:endParaRPr lang="en-US" sz="1040" dirty="0"/>
           </a:p>
         </p:txBody>
       </p:sp>
@@ -16668,12 +16674,12 @@
         </p:nvSpPr>
         <p:spPr>
           <a:xfrm>
-            <a:off x="7635240" y="4184294"/>
-            <a:ext cx="3474720" cy="1466698"/>
+            <a:off x="7543800" y="4389120"/>
+            <a:ext cx="3611880" cy="1261872"/>
           </a:xfrm>
           <a:prstGeom prst="roundRect">
             <a:avLst>
-              <a:gd name="adj" fmla="val 7481"/>
+              <a:gd name="adj" fmla="val 8696"/>
             </a:avLst>
           </a:prstGeom>
           <a:solidFill>
@@ -16695,8 +16701,8 @@
         </p:nvSpPr>
         <p:spPr>
           <a:xfrm>
-            <a:off x="7799832" y="4330598"/>
-            <a:ext cx="3145536" cy="256032"/>
+            <a:off x="7708392" y="4517136"/>
+            <a:ext cx="3282696" cy="228600"/>
           </a:xfrm>
           <a:prstGeom prst="rect">
             <a:avLst/>
@@ -16712,7 +16718,7 @@
               <a:buNone/>
             </a:pPr>
             <a:r>
-              <a:rPr lang="en-US" sz="1300" b="1" dirty="0">
+              <a:rPr lang="en-US" sz="1220" b="1" dirty="0">
                 <a:solidFill>
                   <a:srgbClr val="0068B7"/>
                 </a:solidFill>
@@ -16722,7 +16728,7 @@
               </a:rPr>
               <a:t>How to validate</a:t>
             </a:r>
-            <a:endParaRPr lang="en-US" sz="1300" dirty="0"/>
+            <a:endParaRPr lang="en-US" sz="1220" dirty="0"/>
           </a:p>
         </p:txBody>
       </p:sp>
@@ -16734,8 +16740,8 @@
         </p:nvSpPr>
         <p:spPr>
           <a:xfrm>
-            <a:off x="7799832" y="4659782"/>
-            <a:ext cx="3145536" cy="899770"/>
+            <a:off x="7708392" y="4828032"/>
+            <a:ext cx="3282696" cy="749808"/>
           </a:xfrm>
           <a:prstGeom prst="rect">
             <a:avLst/>
@@ -16753,7 +16759,7 @@
               <a:buNone/>
             </a:pPr>
             <a:r>
-              <a:rPr lang="en-US" sz="1320" dirty="0">
+              <a:rPr lang="en-US" sz="1220" dirty="0">
                 <a:solidFill>
                   <a:srgbClr val="17364A"/>
                 </a:solidFill>
@@ -16761,9 +16767,9 @@
                 <a:ea typeface="Aptos" pitchFamily="34" charset="-122"/>
                 <a:cs typeface="Aptos" pitchFamily="34" charset="-120"/>
               </a:rPr>
-              <a:t>Connect the concept to data quality, model performance, validation evidence, monitoring measures, and decisions that remain under human control.</a:t>
-            </a:r>
-            <a:endParaRPr lang="en-US" sz="1320" dirty="0"/>
+              <a:t>Connect the concept to data quality, model performance, validation evidence,.</a:t>
+            </a:r>
+            <a:endParaRPr lang="en-US" sz="1220" dirty="0"/>
           </a:p>
         </p:txBody>
       </p:sp>
@@ -17054,8 +17060,8 @@
         </p:nvSpPr>
         <p:spPr>
           <a:xfrm>
-            <a:off x="868680" y="1508760"/>
-            <a:ext cx="6309360" cy="4160520"/>
+            <a:off x="822960" y="1463040"/>
+            <a:ext cx="6565392" cy="4343400"/>
           </a:xfrm>
           <a:prstGeom prst="rect">
             <a:avLst/>
@@ -17073,7 +17079,7 @@
               <a:buNone/>
             </a:pPr>
             <a:r>
-              <a:rPr lang="en-US" sz="2100" dirty="0">
+              <a:rPr lang="en-US" sz="1920" dirty="0">
                 <a:solidFill>
                   <a:srgbClr val="003A63"/>
                 </a:solidFill>
@@ -17083,14 +17089,14 @@
               </a:rPr>
               <a:t>• Data pipeline.</a:t>
             </a:r>
-            <a:endParaRPr lang="en-US" sz="2100" dirty="0"/>
-          </a:p>
-          <a:p>
-            <a:pPr indent="0" marL="0">
-              <a:buNone/>
-            </a:pPr>
-            <a:r>
-              <a:rPr lang="en-US" sz="2100" dirty="0">
+            <a:endParaRPr lang="en-US" sz="1920" dirty="0"/>
+          </a:p>
+          <a:p>
+            <a:pPr indent="0" marL="0">
+              <a:buNone/>
+            </a:pPr>
+            <a:r>
+              <a:rPr lang="en-US" sz="1920" dirty="0">
                 <a:solidFill>
                   <a:srgbClr val="003A63"/>
                 </a:solidFill>
@@ -17098,16 +17104,16 @@
                 <a:ea typeface="Aptos" pitchFamily="34" charset="-122"/>
                 <a:cs typeface="Aptos" pitchFamily="34" charset="-120"/>
               </a:rPr>
-              <a:t>• A data pipeline is a set of technical and operational steps that moves data from a source to a.</a:t>
-            </a:r>
-            <a:endParaRPr lang="en-US" sz="2100" dirty="0"/>
-          </a:p>
-          <a:p>
-            <a:pPr indent="0" marL="0">
-              <a:buNone/>
-            </a:pPr>
-            <a:r>
-              <a:rPr lang="en-US" sz="2100" dirty="0">
+              <a:t>• A data pipeline is a set of technical and operational steps that moves data.</a:t>
+            </a:r>
+            <a:endParaRPr lang="en-US" sz="1920" dirty="0"/>
+          </a:p>
+          <a:p>
+            <a:pPr indent="0" marL="0">
+              <a:buNone/>
+            </a:pPr>
+            <a:r>
+              <a:rPr lang="en-US" sz="1920" dirty="0">
                 <a:solidFill>
                   <a:srgbClr val="003A63"/>
                 </a:solidFill>
@@ -17115,9 +17121,9 @@
                 <a:ea typeface="Aptos" pitchFamily="34" charset="-122"/>
                 <a:cs typeface="Aptos" pitchFamily="34" charset="-120"/>
               </a:rPr>
-              <a:t>• In public health, pipelines may include laboratory interfaces, EHR feeds, IIS submissions,.</a:t>
-            </a:r>
-            <a:endParaRPr lang="en-US" sz="2100" dirty="0"/>
+              <a:t>• In public health, pipelines may include laboratory interfaces, EHR feeds,.</a:t>
+            </a:r>
+            <a:endParaRPr lang="en-US" sz="1920" dirty="0"/>
           </a:p>
         </p:txBody>
       </p:sp>
@@ -17129,12 +17135,12 @@
         </p:nvSpPr>
         <p:spPr>
           <a:xfrm>
-            <a:off x="7635240" y="1325880"/>
-            <a:ext cx="3474720" cy="1207008"/>
+            <a:off x="7543800" y="1325880"/>
+            <a:ext cx="3611880" cy="1261872"/>
           </a:xfrm>
           <a:prstGeom prst="roundRect">
             <a:avLst>
-              <a:gd name="adj" fmla="val 9091"/>
+              <a:gd name="adj" fmla="val 8696"/>
             </a:avLst>
           </a:prstGeom>
           <a:solidFill>
@@ -17156,8 +17162,8 @@
         </p:nvSpPr>
         <p:spPr>
           <a:xfrm>
-            <a:off x="7799832" y="1472184"/>
-            <a:ext cx="3145536" cy="256032"/>
+            <a:off x="7708392" y="1453896"/>
+            <a:ext cx="3282696" cy="228600"/>
           </a:xfrm>
           <a:prstGeom prst="rect">
             <a:avLst/>
@@ -17173,7 +17179,7 @@
               <a:buNone/>
             </a:pPr>
             <a:r>
-              <a:rPr lang="en-US" sz="1300" b="1" dirty="0">
+              <a:rPr lang="en-US" sz="1220" b="1" dirty="0">
                 <a:solidFill>
                   <a:srgbClr val="0068B7"/>
                 </a:solidFill>
@@ -17183,7 +17189,7 @@
               </a:rPr>
               <a:t>Data decision</a:t>
             </a:r>
-            <a:endParaRPr lang="en-US" sz="1300" dirty="0"/>
+            <a:endParaRPr lang="en-US" sz="1220" dirty="0"/>
           </a:p>
         </p:txBody>
       </p:sp>
@@ -17195,8 +17201,8 @@
         </p:nvSpPr>
         <p:spPr>
           <a:xfrm>
-            <a:off x="7799832" y="1801368"/>
-            <a:ext cx="3145536" cy="640080"/>
+            <a:off x="7708392" y="1764792"/>
+            <a:ext cx="3282696" cy="749808"/>
           </a:xfrm>
           <a:prstGeom prst="rect">
             <a:avLst/>
@@ -17214,7 +17220,7 @@
               <a:buNone/>
             </a:pPr>
             <a:r>
-              <a:rPr lang="en-US" sz="1320" dirty="0">
+              <a:rPr lang="en-US" sz="1220" dirty="0">
                 <a:solidFill>
                   <a:srgbClr val="17364A"/>
                 </a:solidFill>
@@ -17224,7 +17230,7 @@
               </a:rPr>
               <a:t>Data pipeline.</a:t>
             </a:r>
-            <a:endParaRPr lang="en-US" sz="1320" dirty="0"/>
+            <a:endParaRPr lang="en-US" sz="1220" dirty="0"/>
           </a:p>
         </p:txBody>
       </p:sp>
@@ -17236,12 +17242,12 @@
         </p:nvSpPr>
         <p:spPr>
           <a:xfrm>
-            <a:off x="7635240" y="2670048"/>
-            <a:ext cx="3474720" cy="1377086"/>
+            <a:off x="7543800" y="2724912"/>
+            <a:ext cx="3611880" cy="1527048"/>
           </a:xfrm>
           <a:prstGeom prst="roundRect">
             <a:avLst>
-              <a:gd name="adj" fmla="val 7968"/>
+              <a:gd name="adj" fmla="val 7186"/>
             </a:avLst>
           </a:prstGeom>
           <a:solidFill>
@@ -17263,8 +17269,8 @@
         </p:nvSpPr>
         <p:spPr>
           <a:xfrm>
-            <a:off x="7799832" y="2816352"/>
-            <a:ext cx="3145536" cy="256032"/>
+            <a:off x="7708392" y="2852928"/>
+            <a:ext cx="3282696" cy="228600"/>
           </a:xfrm>
           <a:prstGeom prst="rect">
             <a:avLst/>
@@ -17280,7 +17286,7 @@
               <a:buNone/>
             </a:pPr>
             <a:r>
-              <a:rPr lang="en-US" sz="1300" b="1" dirty="0">
+              <a:rPr lang="en-US" sz="1220" b="1" dirty="0">
                 <a:solidFill>
                   <a:srgbClr val="0068B7"/>
                 </a:solidFill>
@@ -17290,7 +17296,7 @@
               </a:rPr>
               <a:t>Concept checkpoints</a:t>
             </a:r>
-            <a:endParaRPr lang="en-US" sz="1300" dirty="0"/>
+            <a:endParaRPr lang="en-US" sz="1220" dirty="0"/>
           </a:p>
         </p:txBody>
       </p:sp>
@@ -17302,8 +17308,8 @@
         </p:nvSpPr>
         <p:spPr>
           <a:xfrm>
-            <a:off x="7818120" y="3182112"/>
-            <a:ext cx="3090672" cy="718718"/>
+            <a:off x="7726680" y="3182112"/>
+            <a:ext cx="3227832" cy="960120"/>
           </a:xfrm>
           <a:prstGeom prst="rect">
             <a:avLst/>
@@ -17321,7 +17327,7 @@
               <a:buNone/>
             </a:pPr>
             <a:r>
-              <a:rPr lang="en-US" sz="1220" dirty="0">
+              <a:rPr lang="en-US" sz="1140" dirty="0">
                 <a:solidFill>
                   <a:srgbClr val="17364A"/>
                 </a:solidFill>
@@ -17329,16 +17335,16 @@
                 <a:ea typeface="Aptos" pitchFamily="34" charset="-122"/>
                 <a:cs typeface="Aptos" pitchFamily="34" charset="-120"/>
               </a:rPr>
-              <a:t>A data pipeline is a set of technical and operational steps that.</a:t>
-            </a:r>
-            <a:endParaRPr lang="en-US" sz="1220" dirty="0"/>
-          </a:p>
-          <a:p>
-            <a:pPr indent="0" marL="0">
-              <a:buNone/>
-            </a:pPr>
-            <a:r>
-              <a:rPr lang="en-US" sz="1220" dirty="0">
+              <a:t>A data pipeline is a set of technical and.</a:t>
+            </a:r>
+            <a:endParaRPr lang="en-US" sz="1140" dirty="0"/>
+          </a:p>
+          <a:p>
+            <a:pPr indent="0" marL="0">
+              <a:buNone/>
+            </a:pPr>
+            <a:r>
+              <a:rPr lang="en-US" sz="1140" dirty="0">
                 <a:solidFill>
                   <a:srgbClr val="17364A"/>
                 </a:solidFill>
@@ -17346,16 +17352,16 @@
                 <a:ea typeface="Aptos" pitchFamily="34" charset="-122"/>
                 <a:cs typeface="Aptos" pitchFamily="34" charset="-120"/>
               </a:rPr>
-              <a:t>In public health, pipelines may include laboratory interfaces, EHR.</a:t>
-            </a:r>
-            <a:endParaRPr lang="en-US" sz="1220" dirty="0"/>
-          </a:p>
-          <a:p>
-            <a:pPr indent="0" marL="0">
-              <a:buNone/>
-            </a:pPr>
-            <a:r>
-              <a:rPr lang="en-US" sz="1220" dirty="0">
+              <a:t>In public health, pipelines may include laboratory.</a:t>
+            </a:r>
+            <a:endParaRPr lang="en-US" sz="1140" dirty="0"/>
+          </a:p>
+          <a:p>
+            <a:pPr indent="0" marL="0">
+              <a:buNone/>
+            </a:pPr>
+            <a:r>
+              <a:rPr lang="en-US" sz="1140" dirty="0">
                 <a:solidFill>
                   <a:srgbClr val="17364A"/>
                 </a:solidFill>
@@ -17363,9 +17369,9 @@
                 <a:ea typeface="Aptos" pitchFamily="34" charset="-122"/>
                 <a:cs typeface="Aptos" pitchFamily="34" charset="-120"/>
               </a:rPr>
-              <a:t>Each step creates an opportunity to improve or degrade data quality.</a:t>
-            </a:r>
-            <a:endParaRPr lang="en-US" sz="1220" dirty="0"/>
+              <a:t>Each step creates an opportunity to improve or.</a:t>
+            </a:r>
+            <a:endParaRPr lang="en-US" sz="1140" dirty="0"/>
           </a:p>
         </p:txBody>
       </p:sp>
@@ -17377,12 +17383,12 @@
         </p:nvSpPr>
         <p:spPr>
           <a:xfrm>
-            <a:off x="7635240" y="4184294"/>
-            <a:ext cx="3474720" cy="1466698"/>
+            <a:off x="7543800" y="4389120"/>
+            <a:ext cx="3611880" cy="1261872"/>
           </a:xfrm>
           <a:prstGeom prst="roundRect">
             <a:avLst>
-              <a:gd name="adj" fmla="val 7481"/>
+              <a:gd name="adj" fmla="val 8696"/>
             </a:avLst>
           </a:prstGeom>
           <a:solidFill>
@@ -17404,8 +17410,8 @@
         </p:nvSpPr>
         <p:spPr>
           <a:xfrm>
-            <a:off x="7799832" y="4330598"/>
-            <a:ext cx="3145536" cy="256032"/>
+            <a:off x="7708392" y="4517136"/>
+            <a:ext cx="3282696" cy="228600"/>
           </a:xfrm>
           <a:prstGeom prst="rect">
             <a:avLst/>
@@ -17421,7 +17427,7 @@
               <a:buNone/>
             </a:pPr>
             <a:r>
-              <a:rPr lang="en-US" sz="1300" b="1" dirty="0">
+              <a:rPr lang="en-US" sz="1220" b="1" dirty="0">
                 <a:solidFill>
                   <a:srgbClr val="0068B7"/>
                 </a:solidFill>
@@ -17431,7 +17437,7 @@
               </a:rPr>
               <a:t>How to validate</a:t>
             </a:r>
-            <a:endParaRPr lang="en-US" sz="1300" dirty="0"/>
+            <a:endParaRPr lang="en-US" sz="1220" dirty="0"/>
           </a:p>
         </p:txBody>
       </p:sp>
@@ -17443,8 +17449,8 @@
         </p:nvSpPr>
         <p:spPr>
           <a:xfrm>
-            <a:off x="7799832" y="4659782"/>
-            <a:ext cx="3145536" cy="899770"/>
+            <a:off x="7708392" y="4828032"/>
+            <a:ext cx="3282696" cy="749808"/>
           </a:xfrm>
           <a:prstGeom prst="rect">
             <a:avLst/>
@@ -17462,7 +17468,7 @@
               <a:buNone/>
             </a:pPr>
             <a:r>
-              <a:rPr lang="en-US" sz="1320" dirty="0">
+              <a:rPr lang="en-US" sz="1220" dirty="0">
                 <a:solidFill>
                   <a:srgbClr val="17364A"/>
                 </a:solidFill>
@@ -17470,9 +17476,9 @@
                 <a:ea typeface="Aptos" pitchFamily="34" charset="-122"/>
                 <a:cs typeface="Aptos" pitchFamily="34" charset="-120"/>
               </a:rPr>
-              <a:t>Connect the concept to data quality, model performance, validation evidence, monitoring measures, and decisions that remain under human control.</a:t>
-            </a:r>
-            <a:endParaRPr lang="en-US" sz="1320" dirty="0"/>
+              <a:t>Connect the concept to data quality, model performance, validation evidence,.</a:t>
+            </a:r>
+            <a:endParaRPr lang="en-US" sz="1220" dirty="0"/>
           </a:p>
         </p:txBody>
       </p:sp>
@@ -17763,8 +17769,8 @@
         </p:nvSpPr>
         <p:spPr>
           <a:xfrm>
-            <a:off x="868680" y="1508760"/>
-            <a:ext cx="6309360" cy="4160520"/>
+            <a:off x="822960" y="1463040"/>
+            <a:ext cx="6565392" cy="4343400"/>
           </a:xfrm>
           <a:prstGeom prst="rect">
             <a:avLst/>
@@ -17782,7 +17788,7 @@
               <a:buNone/>
             </a:pPr>
             <a:r>
-              <a:rPr lang="en-US" sz="2100" dirty="0">
+              <a:rPr lang="en-US" sz="1920" dirty="0">
                 <a:solidFill>
                   <a:srgbClr val="003A63"/>
                 </a:solidFill>
@@ -17792,14 +17798,14 @@
               </a:rPr>
               <a:t>• Data lineage.</a:t>
             </a:r>
-            <a:endParaRPr lang="en-US" sz="2100" dirty="0"/>
-          </a:p>
-          <a:p>
-            <a:pPr indent="0" marL="0">
-              <a:buNone/>
-            </a:pPr>
-            <a:r>
-              <a:rPr lang="en-US" sz="2100" dirty="0">
+            <a:endParaRPr lang="en-US" sz="1920" dirty="0"/>
+          </a:p>
+          <a:p>
+            <a:pPr indent="0" marL="0">
+              <a:buNone/>
+            </a:pPr>
+            <a:r>
+              <a:rPr lang="en-US" sz="1920" dirty="0">
                 <a:solidFill>
                   <a:srgbClr val="003A63"/>
                 </a:solidFill>
@@ -17807,16 +17813,16 @@
                 <a:ea typeface="Aptos" pitchFamily="34" charset="-122"/>
                 <a:cs typeface="Aptos" pitchFamily="34" charset="-120"/>
               </a:rPr>
-              <a:t>• Data lineage shows where data came from, what happened to them, and where they were used.</a:t>
-            </a:r>
-            <a:endParaRPr lang="en-US" sz="2100" dirty="0"/>
-          </a:p>
-          <a:p>
-            <a:pPr indent="0" marL="0">
-              <a:buNone/>
-            </a:pPr>
-            <a:r>
-              <a:rPr lang="en-US" sz="2100" dirty="0">
+              <a:t>• Data lineage shows where data came from, what happened to them, and where.</a:t>
+            </a:r>
+            <a:endParaRPr lang="en-US" sz="1920" dirty="0"/>
+          </a:p>
+          <a:p>
+            <a:pPr indent="0" marL="0">
+              <a:buNone/>
+            </a:pPr>
+            <a:r>
+              <a:rPr lang="en-US" sz="1920" dirty="0">
                 <a:solidFill>
                   <a:srgbClr val="003A63"/>
                 </a:solidFill>
@@ -17824,9 +17830,9 @@
                 <a:ea typeface="Aptos" pitchFamily="34" charset="-122"/>
                 <a:cs typeface="Aptos" pitchFamily="34" charset="-120"/>
               </a:rPr>
-              <a:t>• Lineage supports validation, troubleshooting, incident response, and public records review.</a:t>
-            </a:r>
-            <a:endParaRPr lang="en-US" sz="2100" dirty="0"/>
+              <a:t>• Lineage supports validation, troubleshooting, incident response, and public.</a:t>
+            </a:r>
+            <a:endParaRPr lang="en-US" sz="1920" dirty="0"/>
           </a:p>
         </p:txBody>
       </p:sp>
@@ -17838,12 +17844,12 @@
         </p:nvSpPr>
         <p:spPr>
           <a:xfrm>
-            <a:off x="7635240" y="1325880"/>
-            <a:ext cx="3474720" cy="1207008"/>
+            <a:off x="7543800" y="1325880"/>
+            <a:ext cx="3611880" cy="1261872"/>
           </a:xfrm>
           <a:prstGeom prst="roundRect">
             <a:avLst>
-              <a:gd name="adj" fmla="val 9091"/>
+              <a:gd name="adj" fmla="val 8696"/>
             </a:avLst>
           </a:prstGeom>
           <a:solidFill>
@@ -17865,8 +17871,8 @@
         </p:nvSpPr>
         <p:spPr>
           <a:xfrm>
-            <a:off x="7799832" y="1472184"/>
-            <a:ext cx="3145536" cy="256032"/>
+            <a:off x="7708392" y="1453896"/>
+            <a:ext cx="3282696" cy="228600"/>
           </a:xfrm>
           <a:prstGeom prst="rect">
             <a:avLst/>
@@ -17882,7 +17888,7 @@
               <a:buNone/>
             </a:pPr>
             <a:r>
-              <a:rPr lang="en-US" sz="1300" b="1" dirty="0">
+              <a:rPr lang="en-US" sz="1220" b="1" dirty="0">
                 <a:solidFill>
                   <a:srgbClr val="0068B7"/>
                 </a:solidFill>
@@ -17892,7 +17898,7 @@
               </a:rPr>
               <a:t>Data decision</a:t>
             </a:r>
-            <a:endParaRPr lang="en-US" sz="1300" dirty="0"/>
+            <a:endParaRPr lang="en-US" sz="1220" dirty="0"/>
           </a:p>
         </p:txBody>
       </p:sp>
@@ -17904,8 +17910,8 @@
         </p:nvSpPr>
         <p:spPr>
           <a:xfrm>
-            <a:off x="7799832" y="1801368"/>
-            <a:ext cx="3145536" cy="640080"/>
+            <a:off x="7708392" y="1764792"/>
+            <a:ext cx="3282696" cy="749808"/>
           </a:xfrm>
           <a:prstGeom prst="rect">
             <a:avLst/>
@@ -17923,7 +17929,7 @@
               <a:buNone/>
             </a:pPr>
             <a:r>
-              <a:rPr lang="en-US" sz="1320" dirty="0">
+              <a:rPr lang="en-US" sz="1220" dirty="0">
                 <a:solidFill>
                   <a:srgbClr val="17364A"/>
                 </a:solidFill>
@@ -17933,7 +17939,7 @@
               </a:rPr>
               <a:t>Data lineage.</a:t>
             </a:r>
-            <a:endParaRPr lang="en-US" sz="1320" dirty="0"/>
+            <a:endParaRPr lang="en-US" sz="1220" dirty="0"/>
           </a:p>
         </p:txBody>
       </p:sp>
@@ -17945,12 +17951,12 @@
         </p:nvSpPr>
         <p:spPr>
           <a:xfrm>
-            <a:off x="7635240" y="2670048"/>
-            <a:ext cx="3474720" cy="1377086"/>
+            <a:off x="7543800" y="2724912"/>
+            <a:ext cx="3611880" cy="1527048"/>
           </a:xfrm>
           <a:prstGeom prst="roundRect">
             <a:avLst>
-              <a:gd name="adj" fmla="val 7968"/>
+              <a:gd name="adj" fmla="val 7186"/>
             </a:avLst>
           </a:prstGeom>
           <a:solidFill>
@@ -17972,8 +17978,8 @@
         </p:nvSpPr>
         <p:spPr>
           <a:xfrm>
-            <a:off x="7799832" y="2816352"/>
-            <a:ext cx="3145536" cy="256032"/>
+            <a:off x="7708392" y="2852928"/>
+            <a:ext cx="3282696" cy="228600"/>
           </a:xfrm>
           <a:prstGeom prst="rect">
             <a:avLst/>
@@ -17989,7 +17995,7 @@
               <a:buNone/>
             </a:pPr>
             <a:r>
-              <a:rPr lang="en-US" sz="1300" b="1" dirty="0">
+              <a:rPr lang="en-US" sz="1220" b="1" dirty="0">
                 <a:solidFill>
                   <a:srgbClr val="0068B7"/>
                 </a:solidFill>
@@ -17999,7 +18005,7 @@
               </a:rPr>
               <a:t>Concept checkpoints</a:t>
             </a:r>
-            <a:endParaRPr lang="en-US" sz="1300" dirty="0"/>
+            <a:endParaRPr lang="en-US" sz="1220" dirty="0"/>
           </a:p>
         </p:txBody>
       </p:sp>
@@ -18011,8 +18017,8 @@
         </p:nvSpPr>
         <p:spPr>
           <a:xfrm>
-            <a:off x="7818120" y="3182112"/>
-            <a:ext cx="3090672" cy="718718"/>
+            <a:off x="7726680" y="3182112"/>
+            <a:ext cx="3227832" cy="960120"/>
           </a:xfrm>
           <a:prstGeom prst="rect">
             <a:avLst/>
@@ -18030,7 +18036,7 @@
               <a:buNone/>
             </a:pPr>
             <a:r>
-              <a:rPr lang="en-US" sz="1220" dirty="0">
+              <a:rPr lang="en-US" sz="1140" dirty="0">
                 <a:solidFill>
                   <a:srgbClr val="17364A"/>
                 </a:solidFill>
@@ -18040,14 +18046,14 @@
               </a:rPr>
               <a:t>Data lineage.</a:t>
             </a:r>
-            <a:endParaRPr lang="en-US" sz="1220" dirty="0"/>
-          </a:p>
-          <a:p>
-            <a:pPr indent="0" marL="0">
-              <a:buNone/>
-            </a:pPr>
-            <a:r>
-              <a:rPr lang="en-US" sz="1220" dirty="0">
+            <a:endParaRPr lang="en-US" sz="1140" dirty="0"/>
+          </a:p>
+          <a:p>
+            <a:pPr indent="0" marL="0">
+              <a:buNone/>
+            </a:pPr>
+            <a:r>
+              <a:rPr lang="en-US" sz="1140" dirty="0">
                 <a:solidFill>
                   <a:srgbClr val="17364A"/>
                 </a:solidFill>
@@ -18055,16 +18061,16 @@
                 <a:ea typeface="Aptos" pitchFamily="34" charset="-122"/>
                 <a:cs typeface="Aptos" pitchFamily="34" charset="-120"/>
               </a:rPr>
-              <a:t>Data lineage shows where data came from, what happened to them,.</a:t>
-            </a:r>
-            <a:endParaRPr lang="en-US" sz="1220" dirty="0"/>
-          </a:p>
-          <a:p>
-            <a:pPr indent="0" marL="0">
-              <a:buNone/>
-            </a:pPr>
-            <a:r>
-              <a:rPr lang="en-US" sz="1220" dirty="0">
+              <a:t>Data lineage shows where data came from, what.</a:t>
+            </a:r>
+            <a:endParaRPr lang="en-US" sz="1140" dirty="0"/>
+          </a:p>
+          <a:p>
+            <a:pPr indent="0" marL="0">
+              <a:buNone/>
+            </a:pPr>
+            <a:r>
+              <a:rPr lang="en-US" sz="1140" dirty="0">
                 <a:solidFill>
                   <a:srgbClr val="17364A"/>
                 </a:solidFill>
@@ -18072,9 +18078,9 @@
                 <a:ea typeface="Aptos" pitchFamily="34" charset="-122"/>
                 <a:cs typeface="Aptos" pitchFamily="34" charset="-120"/>
               </a:rPr>
-              <a:t>Lineage supports validation, troubleshooting, incident response,.</a:t>
-            </a:r>
-            <a:endParaRPr lang="en-US" sz="1220" dirty="0"/>
+              <a:t>Lineage supports validation, troubleshooting,.</a:t>
+            </a:r>
+            <a:endParaRPr lang="en-US" sz="1140" dirty="0"/>
           </a:p>
         </p:txBody>
       </p:sp>
@@ -18086,12 +18092,12 @@
         </p:nvSpPr>
         <p:spPr>
           <a:xfrm>
-            <a:off x="7635240" y="4184294"/>
-            <a:ext cx="3474720" cy="1466698"/>
+            <a:off x="7543800" y="4389120"/>
+            <a:ext cx="3611880" cy="1261872"/>
           </a:xfrm>
           <a:prstGeom prst="roundRect">
             <a:avLst>
-              <a:gd name="adj" fmla="val 7481"/>
+              <a:gd name="adj" fmla="val 8696"/>
             </a:avLst>
           </a:prstGeom>
           <a:solidFill>
@@ -18113,8 +18119,8 @@
         </p:nvSpPr>
         <p:spPr>
           <a:xfrm>
-            <a:off x="7799832" y="4330598"/>
-            <a:ext cx="3145536" cy="256032"/>
+            <a:off x="7708392" y="4517136"/>
+            <a:ext cx="3282696" cy="228600"/>
           </a:xfrm>
           <a:prstGeom prst="rect">
             <a:avLst/>
@@ -18130,7 +18136,7 @@
               <a:buNone/>
             </a:pPr>
             <a:r>
-              <a:rPr lang="en-US" sz="1300" b="1" dirty="0">
+              <a:rPr lang="en-US" sz="1220" b="1" dirty="0">
                 <a:solidFill>
                   <a:srgbClr val="0068B7"/>
                 </a:solidFill>
@@ -18140,7 +18146,7 @@
               </a:rPr>
               <a:t>How to validate</a:t>
             </a:r>
-            <a:endParaRPr lang="en-US" sz="1300" dirty="0"/>
+            <a:endParaRPr lang="en-US" sz="1220" dirty="0"/>
           </a:p>
         </p:txBody>
       </p:sp>
@@ -18152,8 +18158,8 @@
         </p:nvSpPr>
         <p:spPr>
           <a:xfrm>
-            <a:off x="7799832" y="4659782"/>
-            <a:ext cx="3145536" cy="899770"/>
+            <a:off x="7708392" y="4828032"/>
+            <a:ext cx="3282696" cy="749808"/>
           </a:xfrm>
           <a:prstGeom prst="rect">
             <a:avLst/>
@@ -18171,7 +18177,7 @@
               <a:buNone/>
             </a:pPr>
             <a:r>
-              <a:rPr lang="en-US" sz="1320" dirty="0">
+              <a:rPr lang="en-US" sz="1220" dirty="0">
                 <a:solidFill>
                   <a:srgbClr val="17364A"/>
                 </a:solidFill>
@@ -18179,9 +18185,9 @@
                 <a:ea typeface="Aptos" pitchFamily="34" charset="-122"/>
                 <a:cs typeface="Aptos" pitchFamily="34" charset="-120"/>
               </a:rPr>
-              <a:t>Connect the concept to data quality, model performance, validation evidence, monitoring measures, and decisions that remain under human control.</a:t>
-            </a:r>
-            <a:endParaRPr lang="en-US" sz="1320" dirty="0"/>
+              <a:t>Connect the concept to data quality, model performance, validation evidence,.</a:t>
+            </a:r>
+            <a:endParaRPr lang="en-US" sz="1220" dirty="0"/>
           </a:p>
         </p:txBody>
       </p:sp>

--- a/downloads/presentations/modules/arc-210.pptx
+++ b/downloads/presentations/modules/arc-210.pptx
@@ -11868,7 +11868,7 @@
                 <a:ea typeface="Aptos" pitchFamily="34" charset="-122"/>
                 <a:cs typeface="Aptos" pitchFamily="34" charset="-120"/>
               </a:rPr>
-              <a:t>• 1. What is the strongest reason to document data lineage for an AI-supported.</a:t>
+              <a:t>1. What is the strongest reason to document data lineage for an AI-supported.</a:t>
             </a:r>
             <a:endParaRPr lang="en-US" sz="1920" dirty="0"/>
           </a:p>
@@ -11885,7 +11885,7 @@
                 <a:ea typeface="Aptos" pitchFamily="34" charset="-122"/>
                 <a:cs typeface="Aptos" pitchFamily="34" charset="-120"/>
               </a:rPr>
-              <a:t>• 2. Which pipeline type is most likely to trigger a workflow immediately.</a:t>
+              <a:t>2. Which pipeline type is most likely to trigger a workflow immediately.</a:t>
             </a:r>
             <a:endParaRPr lang="en-US" sz="1920" dirty="0"/>
           </a:p>
@@ -11902,7 +11902,7 @@
                 <a:ea typeface="Aptos" pitchFamily="34" charset="-122"/>
                 <a:cs typeface="Aptos" pitchFamily="34" charset="-120"/>
               </a:rPr>
-              <a:t>• 3. What is a practical guardrail for silent feed failure?</a:t>
+              <a:t>3. What is a practical guardrail for silent feed failure?</a:t>
             </a:r>
             <a:endParaRPr lang="en-US" sz="1920" dirty="0"/>
           </a:p>
@@ -12009,7 +12009,7 @@
                 <a:ea typeface="Aptos" pitchFamily="34" charset="-122"/>
                 <a:cs typeface="Aptos" pitchFamily="34" charset="-120"/>
               </a:rPr>
-              <a:t>1. What is the strongest reason to document data lineage for an AI-supported.</a:t>
+              <a:t>What is the strongest reason to document data lineage for an AI-supported.</a:t>
             </a:r>
             <a:endParaRPr lang="en-US" sz="1220" dirty="0"/>
           </a:p>
@@ -12116,41 +12116,7 @@
                 <a:ea typeface="Aptos" pitchFamily="34" charset="-122"/>
                 <a:cs typeface="Aptos" pitchFamily="34" charset="-120"/>
               </a:rPr>
-              <a:t>1.</a:t>
-            </a:r>
-            <a:endParaRPr lang="en-US" sz="1140" dirty="0"/>
-          </a:p>
-          <a:p>
-            <a:pPr indent="0" marL="0">
-              <a:buNone/>
-            </a:pPr>
-            <a:r>
-              <a:rPr lang="en-US" sz="1140" dirty="0">
-                <a:solidFill>
-                  <a:srgbClr val="17364A"/>
-                </a:solidFill>
-                <a:latin typeface="Aptos" pitchFamily="34" charset="0"/>
-                <a:ea typeface="Aptos" pitchFamily="34" charset="-122"/>
-                <a:cs typeface="Aptos" pitchFamily="34" charset="-120"/>
-              </a:rPr>
               <a:t>What is the strongest reason to document data.</a:t>
-            </a:r>
-            <a:endParaRPr lang="en-US" sz="1140" dirty="0"/>
-          </a:p>
-          <a:p>
-            <a:pPr indent="0" marL="0">
-              <a:buNone/>
-            </a:pPr>
-            <a:r>
-              <a:rPr lang="en-US" sz="1140" dirty="0">
-                <a:solidFill>
-                  <a:srgbClr val="17364A"/>
-                </a:solidFill>
-                <a:latin typeface="Aptos" pitchFamily="34" charset="0"/>
-                <a:ea typeface="Aptos" pitchFamily="34" charset="-122"/>
-                <a:cs typeface="Aptos" pitchFamily="34" charset="-120"/>
-              </a:rPr>
-              <a:t>2.</a:t>
             </a:r>
             <a:endParaRPr lang="en-US" sz="1140" dirty="0"/>
           </a:p>
